--- a/slides/03 Snake.pptx
+++ b/slides/03 Snake.pptx
@@ -7016,6 +7016,145 @@
   <p:cSld>
     <p:spTree>
       <p:nvGrpSpPr>
+        <p:cNvPr id="91" name="Shape 91"/>
+        <p:cNvGrpSpPr/>
+        <p:nvPr/>
+      </p:nvGrpSpPr>
+      <p:grpSpPr>
+        <a:xfrm>
+          <a:off x="0" y="0"/>
+          <a:ext cx="0" cy="0"/>
+          <a:chOff x="0" y="0"/>
+          <a:chExt cx="0" cy="0"/>
+        </a:xfrm>
+      </p:grpSpPr>
+      <p:sp>
+        <p:nvSpPr>
+          <p:cNvPr id="92" name="Google Shape;92;p16"/>
+          <p:cNvSpPr txBox="1"/>
+          <p:nvPr>
+            <p:ph type="title"/>
+          </p:nvPr>
+        </p:nvSpPr>
+        <p:spPr>
+          <a:xfrm>
+            <a:off x="311700" y="195615"/>
+            <a:ext cx="8520600" cy="572700"/>
+          </a:xfrm>
+          <a:prstGeom prst="rect">
+            <a:avLst/>
+          </a:prstGeom>
+        </p:spPr>
+        <p:txBody>
+          <a:bodyPr anchorCtr="0" anchor="t" bIns="91425" lIns="91425" spcFirstLastPara="1" rIns="91425" wrap="square" tIns="91425">
+            <a:normAutofit fontScale="90000"/>
+          </a:bodyPr>
+          <a:lstStyle/>
+          <a:p>
+            <a:pPr indent="0" lvl="0" marL="0" rtl="0" algn="l">
+              <a:spcBef>
+                <a:spcPts val="0"/>
+              </a:spcBef>
+              <a:spcAft>
+                <a:spcPts val="0"/>
+              </a:spcAft>
+              <a:buNone/>
+            </a:pPr>
+            <a:r>
+              <a:rPr lang="en">
+                <a:solidFill>
+                  <a:schemeClr val="accent5"/>
+                </a:solidFill>
+              </a:rPr>
+              <a:t>Texture Atlas Implementation</a:t>
+            </a:r>
+            <a:endParaRPr>
+              <a:solidFill>
+                <a:schemeClr val="accent5"/>
+              </a:solidFill>
+            </a:endParaRPr>
+          </a:p>
+        </p:txBody>
+      </p:sp>
+      <p:sp>
+        <p:nvSpPr>
+          <p:cNvPr id="93" name="Google Shape;93;p16"/>
+          <p:cNvSpPr txBox="1"/>
+          <p:nvPr>
+            <p:ph idx="1" type="body"/>
+          </p:nvPr>
+        </p:nvSpPr>
+        <p:spPr>
+          <a:xfrm>
+            <a:off x="311700" y="885950"/>
+            <a:ext cx="8520600" cy="4023300"/>
+          </a:xfrm>
+          <a:prstGeom prst="rect">
+            <a:avLst/>
+          </a:prstGeom>
+        </p:spPr>
+        <p:txBody>
+          <a:bodyPr anchorCtr="0" anchor="ctr" bIns="91425" lIns="91425" spcFirstLastPara="1" rIns="91425" wrap="square" tIns="91425">
+            <a:normAutofit/>
+          </a:bodyPr>
+          <a:lstStyle/>
+          <a:p>
+            <a:pPr indent="0" lvl="0" marL="0" rtl="0" algn="ctr">
+              <a:spcBef>
+                <a:spcPts val="0"/>
+              </a:spcBef>
+              <a:spcAft>
+                <a:spcPts val="1200"/>
+              </a:spcAft>
+              <a:buNone/>
+            </a:pPr>
+            <a:r>
+              <a:rPr lang="en" sz="2900">
+                <a:latin typeface="VT323"/>
+                <a:ea typeface="VT323"/>
+                <a:cs typeface="VT323"/>
+                <a:sym typeface="VT323"/>
+              </a:rPr>
+              <a:t>DEMO!</a:t>
+            </a:r>
+            <a:endParaRPr sz="2900">
+              <a:latin typeface="VT323"/>
+              <a:ea typeface="VT323"/>
+              <a:cs typeface="VT323"/>
+              <a:sym typeface="VT323"/>
+            </a:endParaRPr>
+          </a:p>
+          <a:p>
+            <a:pPr indent="0" lvl="0" marL="0" rtl="0" algn="ctr">
+              <a:spcBef>
+                <a:spcPts val="0"/>
+              </a:spcBef>
+              <a:spcAft>
+                <a:spcPts val="0"/>
+              </a:spcAft>
+              <a:buNone/>
+            </a:pPr>
+            <a:r>
+              <a:rPr lang="en" sz="1800"/>
+              <a:t>Snake0 → Snake1: from hardcoded rectangles to a texture atlas</a:t>
+            </a:r>
+            <a:endParaRPr sz="1800"/>
+          </a:p>
+        </p:txBody>
+      </p:sp>
+    </p:spTree>
+  </p:cSld>
+  <p:clrMapOvr>
+    <a:masterClrMapping/>
+  </p:clrMapOvr>
+</p:sld>
+</file>
+
+<file path=ppt/slides/slide11.xml><?xml version="1.0" encoding="utf-8"?>
+<p:sld xmlns:a="http://schemas.openxmlformats.org/drawingml/2006/main" xmlns:r="http://schemas.openxmlformats.org/officeDocument/2006/relationships" xmlns:mc="http://schemas.openxmlformats.org/markup-compatibility/2006" xmlns:mv="urn:schemas-microsoft-com:mac:vml" xmlns:p="http://schemas.openxmlformats.org/presentationml/2006/main" xmlns:c="http://schemas.openxmlformats.org/drawingml/2006/chart" xmlns:dgm="http://schemas.openxmlformats.org/drawingml/2006/diagram" xmlns:o="urn:schemas-microsoft-com:office:office" xmlns:v="urn:schemas-microsoft-com:vml" xmlns:pvml="urn:schemas-microsoft-com:office:powerpoint" xmlns:com="http://schemas.openxmlformats.org/drawingml/2006/compatibility" xmlns:p14="http://schemas.microsoft.com/office/powerpoint/2010/main" xmlns:p15="http://schemas.microsoft.com/office/powerpoint/2012/main" xmlns:ahyp="http://schemas.microsoft.com/office/drawing/2018/hyperlinkcolor">
+  <p:cSld>
+    <p:spTree>
+      <p:nvGrpSpPr>
         <p:cNvPr id="97" name="Shape 97"/>
         <p:cNvGrpSpPr/>
         <p:nvPr/>
@@ -7751,7 +7890,7 @@
 </p:sld>
 </file>
 
-<file path=ppt/slides/slide11.xml><?xml version="1.0" encoding="utf-8"?>
+<file path=ppt/slides/slide12.xml><?xml version="1.0" encoding="utf-8"?>
 <p:sld xmlns:a="http://schemas.openxmlformats.org/drawingml/2006/main" xmlns:r="http://schemas.openxmlformats.org/officeDocument/2006/relationships" xmlns:mc="http://schemas.openxmlformats.org/markup-compatibility/2006" xmlns:mv="urn:schemas-microsoft-com:mac:vml" xmlns:p="http://schemas.openxmlformats.org/presentationml/2006/main" xmlns:c="http://schemas.openxmlformats.org/drawingml/2006/chart" xmlns:dgm="http://schemas.openxmlformats.org/drawingml/2006/diagram" xmlns:o="urn:schemas-microsoft-com:office:office" xmlns:v="urn:schemas-microsoft-com:vml" xmlns:pvml="urn:schemas-microsoft-com:office:powerpoint" xmlns:com="http://schemas.openxmlformats.org/drawingml/2006/compatibility" xmlns:p14="http://schemas.microsoft.com/office/powerpoint/2010/main" xmlns:p15="http://schemas.microsoft.com/office/powerpoint/2012/main" xmlns:ahyp="http://schemas.microsoft.com/office/drawing/2018/hyperlinkcolor">
   <p:cSld>
     <p:spTree>
@@ -7885,7 +8024,7 @@
 </p:sld>
 </file>
 
-<file path=ppt/slides/slide12.xml><?xml version="1.0" encoding="utf-8"?>
+<file path=ppt/slides/slide13.xml><?xml version="1.0" encoding="utf-8"?>
 <p:sld xmlns:a="http://schemas.openxmlformats.org/drawingml/2006/main" xmlns:r="http://schemas.openxmlformats.org/officeDocument/2006/relationships" xmlns:mc="http://schemas.openxmlformats.org/markup-compatibility/2006" xmlns:mv="urn:schemas-microsoft-com:mac:vml" xmlns:p="http://schemas.openxmlformats.org/presentationml/2006/main" xmlns:c="http://schemas.openxmlformats.org/drawingml/2006/chart" xmlns:dgm="http://schemas.openxmlformats.org/drawingml/2006/diagram" xmlns:o="urn:schemas-microsoft-com:office:office" xmlns:v="urn:schemas-microsoft-com:vml" xmlns:pvml="urn:schemas-microsoft-com:office:powerpoint" xmlns:com="http://schemas.openxmlformats.org/drawingml/2006/compatibility" xmlns:p14="http://schemas.microsoft.com/office/powerpoint/2010/main" xmlns:p15="http://schemas.microsoft.com/office/powerpoint/2012/main" xmlns:ahyp="http://schemas.microsoft.com/office/drawing/2018/hyperlinkcolor">
   <p:cSld>
     <p:spTree>
@@ -7978,7 +8117,7 @@
 </p:sld>
 </file>
 
-<file path=ppt/slides/slide13.xml><?xml version="1.0" encoding="utf-8"?>
+<file path=ppt/slides/slide14.xml><?xml version="1.0" encoding="utf-8"?>
 <p:sld xmlns:a="http://schemas.openxmlformats.org/drawingml/2006/main" xmlns:r="http://schemas.openxmlformats.org/officeDocument/2006/relationships" xmlns:mc="http://schemas.openxmlformats.org/markup-compatibility/2006" xmlns:mv="urn:schemas-microsoft-com:mac:vml" xmlns:p="http://schemas.openxmlformats.org/presentationml/2006/main" xmlns:c="http://schemas.openxmlformats.org/drawingml/2006/chart" xmlns:dgm="http://schemas.openxmlformats.org/drawingml/2006/diagram" xmlns:o="urn:schemas-microsoft-com:office:office" xmlns:v="urn:schemas-microsoft-com:vml" xmlns:pvml="urn:schemas-microsoft-com:office:powerpoint" xmlns:com="http://schemas.openxmlformats.org/drawingml/2006/compatibility" xmlns:p14="http://schemas.microsoft.com/office/powerpoint/2010/main" xmlns:p15="http://schemas.microsoft.com/office/powerpoint/2012/main" xmlns:ahyp="http://schemas.microsoft.com/office/drawing/2018/hyperlinkcolor">
   <p:cSld>
     <p:spTree>
@@ -8146,7 +8285,7 @@
 </p:sld>
 </file>
 
-<file path=ppt/slides/slide14.xml><?xml version="1.0" encoding="utf-8"?>
+<file path=ppt/slides/slide15.xml><?xml version="1.0" encoding="utf-8"?>
 <p:sld xmlns:a="http://schemas.openxmlformats.org/drawingml/2006/main" xmlns:r="http://schemas.openxmlformats.org/officeDocument/2006/relationships" xmlns:mc="http://schemas.openxmlformats.org/markup-compatibility/2006" xmlns:mv="urn:schemas-microsoft-com:mac:vml" xmlns:p="http://schemas.openxmlformats.org/presentationml/2006/main" xmlns:c="http://schemas.openxmlformats.org/drawingml/2006/chart" xmlns:dgm="http://schemas.openxmlformats.org/drawingml/2006/diagram" xmlns:o="urn:schemas-microsoft-com:office:office" xmlns:v="urn:schemas-microsoft-com:vml" xmlns:pvml="urn:schemas-microsoft-com:office:powerpoint" xmlns:com="http://schemas.openxmlformats.org/drawingml/2006/compatibility" xmlns:p14="http://schemas.microsoft.com/office/powerpoint/2010/main" xmlns:p15="http://schemas.microsoft.com/office/powerpoint/2012/main" xmlns:ahyp="http://schemas.microsoft.com/office/drawing/2018/hyperlinkcolor">
   <p:cSld>
     <p:spTree>
@@ -8269,6 +8408,2166 @@
               <a:t>Snake3: animated sprites</a:t>
             </a:r>
             <a:endParaRPr sz="1800"/>
+          </a:p>
+        </p:txBody>
+      </p:sp>
+    </p:spTree>
+  </p:cSld>
+  <p:clrMapOvr>
+    <a:masterClrMapping/>
+  </p:clrMapOvr>
+</p:sld>
+</file>
+
+<file path=ppt/slides/slide16.xml><?xml version="1.0" encoding="utf-8"?>
+<p:sld xmlns:a="http://schemas.openxmlformats.org/drawingml/2006/main" xmlns:r="http://schemas.openxmlformats.org/officeDocument/2006/relationships" xmlns:mc="http://schemas.openxmlformats.org/markup-compatibility/2006" xmlns:mv="urn:schemas-microsoft-com:mac:vml" xmlns:p="http://schemas.openxmlformats.org/presentationml/2006/main" xmlns:c="http://schemas.openxmlformats.org/drawingml/2006/chart" xmlns:dgm="http://schemas.openxmlformats.org/drawingml/2006/diagram" xmlns:o="urn:schemas-microsoft-com:office:office" xmlns:v="urn:schemas-microsoft-com:vml" xmlns:pvml="urn:schemas-microsoft-com:office:powerpoint" xmlns:com="http://schemas.openxmlformats.org/drawingml/2006/compatibility" xmlns:p14="http://schemas.microsoft.com/office/powerpoint/2010/main" xmlns:p15="http://schemas.microsoft.com/office/powerpoint/2012/main" xmlns:ahyp="http://schemas.microsoft.com/office/drawing/2018/hyperlinkcolor">
+  <p:cSld>
+    <p:spTree>
+      <p:nvGrpSpPr>
+        <p:cNvPr id="264" name="Shape 264"/>
+        <p:cNvGrpSpPr/>
+        <p:nvPr/>
+      </p:nvGrpSpPr>
+      <p:grpSpPr>
+        <a:xfrm>
+          <a:off x="0" y="0"/>
+          <a:ext cx="0" cy="0"/>
+          <a:chOff x="0" y="0"/>
+          <a:chExt cx="0" cy="0"/>
+        </a:xfrm>
+      </p:grpSpPr>
+      <p:sp>
+        <p:nvSpPr>
+          <p:cNvPr id="265" name="Google Shape;265;p41"/>
+          <p:cNvSpPr txBox="1"/>
+          <p:nvPr>
+            <p:ph type="title"/>
+          </p:nvPr>
+        </p:nvSpPr>
+        <p:spPr>
+          <a:xfrm>
+            <a:off x="311700" y="195615"/>
+            <a:ext cx="8520600" cy="572700"/>
+          </a:xfrm>
+          <a:prstGeom prst="rect">
+            <a:avLst/>
+          </a:prstGeom>
+        </p:spPr>
+        <p:txBody>
+          <a:bodyPr anchorCtr="0" anchor="t" bIns="91425" lIns="91425" spcFirstLastPara="1" rIns="91425" wrap="square" tIns="91425">
+            <a:normAutofit fontScale="90000"/>
+          </a:bodyPr>
+          <a:lstStyle/>
+          <a:p>
+            <a:pPr indent="0" lvl="0" marL="0" rtl="0" algn="l">
+              <a:spcBef>
+                <a:spcPts val="0"/>
+              </a:spcBef>
+              <a:spcAft>
+                <a:spcPts val="0"/>
+              </a:spcAft>
+              <a:buNone/>
+            </a:pPr>
+            <a:r>
+              <a:rPr lang="en"/>
+              <a:t>Tileset</a:t>
+            </a:r>
+            <a:endParaRPr/>
+          </a:p>
+        </p:txBody>
+      </p:sp>
+      <p:pic>
+        <p:nvPicPr>
+          <p:cNvPr id="266" name="Google Shape;266;p41"/>
+          <p:cNvPicPr preferRelativeResize="0"/>
+          <p:nvPr/>
+        </p:nvPicPr>
+        <p:blipFill rotWithShape="1">
+          <a:blip r:embed="rId3">
+            <a:alphaModFix/>
+          </a:blip>
+          <a:srcRect b="0" l="0" r="54225" t="0"/>
+          <a:stretch/>
+        </p:blipFill>
+        <p:spPr>
+          <a:xfrm>
+            <a:off x="1238250" y="1247650"/>
+            <a:ext cx="3052075" cy="3048000"/>
+          </a:xfrm>
+          <a:prstGeom prst="rect">
+            <a:avLst/>
+          </a:prstGeom>
+          <a:noFill/>
+          <a:ln>
+            <a:noFill/>
+          </a:ln>
+        </p:spPr>
+      </p:pic>
+      <p:pic>
+        <p:nvPicPr>
+          <p:cNvPr id="267" name="Google Shape;267;p41"/>
+          <p:cNvPicPr preferRelativeResize="0"/>
+          <p:nvPr/>
+        </p:nvPicPr>
+        <p:blipFill rotWithShape="1">
+          <a:blip r:embed="rId3">
+            <a:alphaModFix/>
+          </a:blip>
+          <a:srcRect b="0" l="54225" r="0" t="0"/>
+          <a:stretch/>
+        </p:blipFill>
+        <p:spPr>
+          <a:xfrm>
+            <a:off x="5040275" y="1247650"/>
+            <a:ext cx="3052075" cy="3048000"/>
+          </a:xfrm>
+          <a:prstGeom prst="rect">
+            <a:avLst/>
+          </a:prstGeom>
+          <a:noFill/>
+          <a:ln>
+            <a:noFill/>
+          </a:ln>
+        </p:spPr>
+      </p:pic>
+    </p:spTree>
+  </p:cSld>
+  <p:clrMapOvr>
+    <a:masterClrMapping/>
+  </p:clrMapOvr>
+  <p:timing>
+    <p:tnLst>
+      <p:par>
+        <p:cTn dur="indefinite" nodeType="tmRoot" restart="never">
+          <p:childTnLst>
+            <p:seq concurrent="1" nextAc="seek">
+              <p:cTn dur="indefinite" id="2" nodeType="mainSeq">
+                <p:childTnLst>
+                  <p:par>
+                    <p:cTn fill="hold">
+                      <p:stCondLst>
+                        <p:cond delay="indefinite"/>
+                      </p:stCondLst>
+                      <p:childTnLst>
+                        <p:par>
+                          <p:cTn fill="hold">
+                            <p:stCondLst>
+                              <p:cond delay="0"/>
+                            </p:stCondLst>
+                            <p:childTnLst>
+                              <p:par>
+                                <p:cTn fill="hold" nodeType="clickEffect" presetClass="entr" presetID="1" presetSubtype="0">
+                                  <p:stCondLst>
+                                    <p:cond delay="0"/>
+                                  </p:stCondLst>
+                                  <p:childTnLst>
+                                    <p:set>
+                                      <p:cBhvr>
+                                        <p:cTn dur="1" fill="hold">
+                                          <p:stCondLst>
+                                            <p:cond delay="0"/>
+                                          </p:stCondLst>
+                                        </p:cTn>
+                                        <p:tgtEl>
+                                          <p:spTgt spid="266"/>
+                                        </p:tgtEl>
+                                        <p:attrNameLst>
+                                          <p:attrName>style.visibility</p:attrName>
+                                        </p:attrNameLst>
+                                      </p:cBhvr>
+                                      <p:to>
+                                        <p:strVal val="visible"/>
+                                      </p:to>
+                                    </p:set>
+                                  </p:childTnLst>
+                                </p:cTn>
+                              </p:par>
+                            </p:childTnLst>
+                          </p:cTn>
+                        </p:par>
+                      </p:childTnLst>
+                    </p:cTn>
+                  </p:par>
+                  <p:par>
+                    <p:cTn fill="hold">
+                      <p:stCondLst>
+                        <p:cond delay="indefinite"/>
+                      </p:stCondLst>
+                      <p:childTnLst>
+                        <p:par>
+                          <p:cTn fill="hold">
+                            <p:stCondLst>
+                              <p:cond delay="0"/>
+                            </p:stCondLst>
+                            <p:childTnLst>
+                              <p:par>
+                                <p:cTn fill="hold" nodeType="clickEffect" presetClass="entr" presetID="1" presetSubtype="0">
+                                  <p:stCondLst>
+                                    <p:cond delay="0"/>
+                                  </p:stCondLst>
+                                  <p:childTnLst>
+                                    <p:set>
+                                      <p:cBhvr>
+                                        <p:cTn dur="1" fill="hold">
+                                          <p:stCondLst>
+                                            <p:cond delay="0"/>
+                                          </p:stCondLst>
+                                        </p:cTn>
+                                        <p:tgtEl>
+                                          <p:spTgt spid="267"/>
+                                        </p:tgtEl>
+                                        <p:attrNameLst>
+                                          <p:attrName>style.visibility</p:attrName>
+                                        </p:attrNameLst>
+                                      </p:cBhvr>
+                                      <p:to>
+                                        <p:strVal val="visible"/>
+                                      </p:to>
+                                    </p:set>
+                                  </p:childTnLst>
+                                </p:cTn>
+                              </p:par>
+                            </p:childTnLst>
+                          </p:cTn>
+                        </p:par>
+                      </p:childTnLst>
+                    </p:cTn>
+                  </p:par>
+                </p:childTnLst>
+              </p:cTn>
+              <p:prevCondLst>
+                <p:cond evt="onPrev">
+                  <p:tgtEl>
+                    <p:sldTgt/>
+                  </p:tgtEl>
+                </p:cond>
+              </p:prevCondLst>
+              <p:nextCondLst>
+                <p:cond evt="onNext">
+                  <p:tgtEl>
+                    <p:sldTgt/>
+                  </p:tgtEl>
+                </p:cond>
+              </p:nextCondLst>
+            </p:seq>
+          </p:childTnLst>
+        </p:cTn>
+      </p:par>
+    </p:tnLst>
+  </p:timing>
+</p:sld>
+</file>
+
+<file path=ppt/slides/slide17.xml><?xml version="1.0" encoding="utf-8"?>
+<p:sld xmlns:a="http://schemas.openxmlformats.org/drawingml/2006/main" xmlns:r="http://schemas.openxmlformats.org/officeDocument/2006/relationships" xmlns:mc="http://schemas.openxmlformats.org/markup-compatibility/2006" xmlns:mv="urn:schemas-microsoft-com:mac:vml" xmlns:p="http://schemas.openxmlformats.org/presentationml/2006/main" xmlns:c="http://schemas.openxmlformats.org/drawingml/2006/chart" xmlns:dgm="http://schemas.openxmlformats.org/drawingml/2006/diagram" xmlns:o="urn:schemas-microsoft-com:office:office" xmlns:v="urn:schemas-microsoft-com:vml" xmlns:pvml="urn:schemas-microsoft-com:office:powerpoint" xmlns:com="http://schemas.openxmlformats.org/drawingml/2006/compatibility" xmlns:p14="http://schemas.microsoft.com/office/powerpoint/2010/main" xmlns:p15="http://schemas.microsoft.com/office/powerpoint/2012/main" xmlns:ahyp="http://schemas.microsoft.com/office/drawing/2018/hyperlinkcolor">
+  <p:cSld>
+    <p:spTree>
+      <p:nvGrpSpPr>
+        <p:cNvPr id="271" name="Shape 271"/>
+        <p:cNvGrpSpPr/>
+        <p:nvPr/>
+      </p:nvGrpSpPr>
+      <p:grpSpPr>
+        <a:xfrm>
+          <a:off x="0" y="0"/>
+          <a:ext cx="0" cy="0"/>
+          <a:chOff x="0" y="0"/>
+          <a:chExt cx="0" cy="0"/>
+        </a:xfrm>
+      </p:grpSpPr>
+      <p:sp>
+        <p:nvSpPr>
+          <p:cNvPr id="272" name="Google Shape;272;p42"/>
+          <p:cNvSpPr txBox="1"/>
+          <p:nvPr>
+            <p:ph type="title"/>
+          </p:nvPr>
+        </p:nvSpPr>
+        <p:spPr>
+          <a:xfrm>
+            <a:off x="311700" y="195615"/>
+            <a:ext cx="8520600" cy="572700"/>
+          </a:xfrm>
+          <a:prstGeom prst="rect">
+            <a:avLst/>
+          </a:prstGeom>
+        </p:spPr>
+        <p:txBody>
+          <a:bodyPr anchorCtr="0" anchor="t" bIns="91425" lIns="91425" spcFirstLastPara="1" rIns="91425" wrap="square" tIns="91425">
+            <a:normAutofit fontScale="90000"/>
+          </a:bodyPr>
+          <a:lstStyle/>
+          <a:p>
+            <a:pPr indent="0" lvl="0" marL="0" rtl="0" algn="l">
+              <a:spcBef>
+                <a:spcPts val="0"/>
+              </a:spcBef>
+              <a:spcAft>
+                <a:spcPts val="0"/>
+              </a:spcAft>
+              <a:buNone/>
+            </a:pPr>
+            <a:r>
+              <a:rPr lang="en"/>
+              <a:t>The Room: A Tilemap</a:t>
+            </a:r>
+            <a:endParaRPr/>
+          </a:p>
+        </p:txBody>
+      </p:sp>
+      <p:pic>
+        <p:nvPicPr>
+          <p:cNvPr id="273" name="Google Shape;273;p42"/>
+          <p:cNvPicPr preferRelativeResize="0"/>
+          <p:nvPr/>
+        </p:nvPicPr>
+        <p:blipFill rotWithShape="1">
+          <a:blip r:embed="rId3">
+            <a:alphaModFix/>
+          </a:blip>
+          <a:srcRect b="16166" l="0" r="59830" t="16280"/>
+          <a:stretch/>
+        </p:blipFill>
+        <p:spPr>
+          <a:xfrm>
+            <a:off x="633950" y="1516225"/>
+            <a:ext cx="2725150" cy="2749700"/>
+          </a:xfrm>
+          <a:prstGeom prst="rect">
+            <a:avLst/>
+          </a:prstGeom>
+          <a:noFill/>
+          <a:ln>
+            <a:noFill/>
+          </a:ln>
+        </p:spPr>
+      </p:pic>
+      <p:sp>
+        <p:nvSpPr>
+          <p:cNvPr id="274" name="Google Shape;274;p42"/>
+          <p:cNvSpPr txBox="1"/>
+          <p:nvPr>
+            <p:ph idx="4294967295" type="body"/>
+          </p:nvPr>
+        </p:nvSpPr>
+        <p:spPr>
+          <a:xfrm>
+            <a:off x="3749613" y="2239625"/>
+            <a:ext cx="1183800" cy="1302900"/>
+          </a:xfrm>
+          <a:prstGeom prst="rect">
+            <a:avLst/>
+          </a:prstGeom>
+          <a:solidFill>
+            <a:schemeClr val="dk2"/>
+          </a:solidFill>
+        </p:spPr>
+        <p:txBody>
+          <a:bodyPr anchorCtr="0" anchor="t" bIns="91425" lIns="91425" spcFirstLastPara="1" rIns="91425" wrap="square" tIns="91425">
+            <a:normAutofit/>
+          </a:bodyPr>
+          <a:lstStyle/>
+          <a:p>
+            <a:pPr indent="0" lvl="0" marL="0" rtl="0" algn="l">
+              <a:lnSpc>
+                <a:spcPct val="157500"/>
+              </a:lnSpc>
+              <a:spcBef>
+                <a:spcPts val="0"/>
+              </a:spcBef>
+              <a:spcAft>
+                <a:spcPts val="0"/>
+              </a:spcAft>
+              <a:buNone/>
+            </a:pPr>
+            <a:r>
+              <a:rPr lang="en" sz="1000">
+                <a:solidFill>
+                  <a:srgbClr val="B5CEA8"/>
+                </a:solidFill>
+                <a:highlight>
+                  <a:srgbClr val="1F1F1F"/>
+                </a:highlight>
+                <a:latin typeface="Consolas"/>
+                <a:ea typeface="Consolas"/>
+                <a:cs typeface="Consolas"/>
+                <a:sym typeface="Consolas"/>
+              </a:rPr>
+              <a:t>00</a:t>
+            </a:r>
+            <a:r>
+              <a:rPr lang="en" sz="1000">
+                <a:solidFill>
+                  <a:srgbClr val="CCCCCC"/>
+                </a:solidFill>
+                <a:highlight>
+                  <a:srgbClr val="1F1F1F"/>
+                </a:highlight>
+                <a:latin typeface="Consolas"/>
+                <a:ea typeface="Consolas"/>
+                <a:cs typeface="Consolas"/>
+                <a:sym typeface="Consolas"/>
+              </a:rPr>
+              <a:t> </a:t>
+            </a:r>
+            <a:r>
+              <a:rPr lang="en" sz="1000">
+                <a:solidFill>
+                  <a:srgbClr val="B5CEA8"/>
+                </a:solidFill>
+                <a:highlight>
+                  <a:srgbClr val="1F1F1F"/>
+                </a:highlight>
+                <a:latin typeface="Consolas"/>
+                <a:ea typeface="Consolas"/>
+                <a:cs typeface="Consolas"/>
+                <a:sym typeface="Consolas"/>
+              </a:rPr>
+              <a:t>01</a:t>
+            </a:r>
+            <a:r>
+              <a:rPr lang="en" sz="1000">
+                <a:solidFill>
+                  <a:srgbClr val="CCCCCC"/>
+                </a:solidFill>
+                <a:highlight>
+                  <a:srgbClr val="1F1F1F"/>
+                </a:highlight>
+                <a:latin typeface="Consolas"/>
+                <a:ea typeface="Consolas"/>
+                <a:cs typeface="Consolas"/>
+                <a:sym typeface="Consolas"/>
+              </a:rPr>
+              <a:t> </a:t>
+            </a:r>
+            <a:r>
+              <a:rPr lang="en" sz="1000">
+                <a:solidFill>
+                  <a:srgbClr val="B5CEA8"/>
+                </a:solidFill>
+                <a:highlight>
+                  <a:srgbClr val="1F1F1F"/>
+                </a:highlight>
+                <a:latin typeface="Consolas"/>
+                <a:ea typeface="Consolas"/>
+                <a:cs typeface="Consolas"/>
+                <a:sym typeface="Consolas"/>
+              </a:rPr>
+              <a:t>02</a:t>
+            </a:r>
+            <a:r>
+              <a:rPr lang="en" sz="1000">
+                <a:solidFill>
+                  <a:srgbClr val="CCCCCC"/>
+                </a:solidFill>
+                <a:highlight>
+                  <a:srgbClr val="1F1F1F"/>
+                </a:highlight>
+                <a:latin typeface="Consolas"/>
+                <a:ea typeface="Consolas"/>
+                <a:cs typeface="Consolas"/>
+                <a:sym typeface="Consolas"/>
+              </a:rPr>
+              <a:t> </a:t>
+            </a:r>
+            <a:r>
+              <a:rPr lang="en" sz="1000">
+                <a:solidFill>
+                  <a:srgbClr val="B5CEA8"/>
+                </a:solidFill>
+                <a:highlight>
+                  <a:srgbClr val="1F1F1F"/>
+                </a:highlight>
+                <a:latin typeface="Consolas"/>
+                <a:ea typeface="Consolas"/>
+                <a:cs typeface="Consolas"/>
+                <a:sym typeface="Consolas"/>
+              </a:rPr>
+              <a:t>01</a:t>
+            </a:r>
+            <a:r>
+              <a:rPr lang="en" sz="1000">
+                <a:solidFill>
+                  <a:srgbClr val="CCCCCC"/>
+                </a:solidFill>
+                <a:highlight>
+                  <a:srgbClr val="1F1F1F"/>
+                </a:highlight>
+                <a:latin typeface="Consolas"/>
+                <a:ea typeface="Consolas"/>
+                <a:cs typeface="Consolas"/>
+                <a:sym typeface="Consolas"/>
+              </a:rPr>
+              <a:t> </a:t>
+            </a:r>
+            <a:r>
+              <a:rPr lang="en" sz="1000">
+                <a:solidFill>
+                  <a:srgbClr val="B5CEA8"/>
+                </a:solidFill>
+                <a:highlight>
+                  <a:srgbClr val="1F1F1F"/>
+                </a:highlight>
+                <a:latin typeface="Consolas"/>
+                <a:ea typeface="Consolas"/>
+                <a:cs typeface="Consolas"/>
+                <a:sym typeface="Consolas"/>
+              </a:rPr>
+              <a:t>03</a:t>
+            </a:r>
+            <a:endParaRPr sz="1000">
+              <a:solidFill>
+                <a:srgbClr val="B5CEA8"/>
+              </a:solidFill>
+              <a:highlight>
+                <a:srgbClr val="1F1F1F"/>
+              </a:highlight>
+              <a:latin typeface="Consolas"/>
+              <a:ea typeface="Consolas"/>
+              <a:cs typeface="Consolas"/>
+              <a:sym typeface="Consolas"/>
+            </a:endParaRPr>
+          </a:p>
+          <a:p>
+            <a:pPr indent="0" lvl="0" marL="0" rtl="0" algn="l">
+              <a:lnSpc>
+                <a:spcPct val="157500"/>
+              </a:lnSpc>
+              <a:spcBef>
+                <a:spcPts val="0"/>
+              </a:spcBef>
+              <a:spcAft>
+                <a:spcPts val="0"/>
+              </a:spcAft>
+              <a:buNone/>
+            </a:pPr>
+            <a:r>
+              <a:rPr lang="en" sz="1000">
+                <a:solidFill>
+                  <a:srgbClr val="B5CEA8"/>
+                </a:solidFill>
+                <a:highlight>
+                  <a:srgbClr val="1F1F1F"/>
+                </a:highlight>
+                <a:latin typeface="Consolas"/>
+                <a:ea typeface="Consolas"/>
+                <a:cs typeface="Consolas"/>
+                <a:sym typeface="Consolas"/>
+              </a:rPr>
+              <a:t>04</a:t>
+            </a:r>
+            <a:r>
+              <a:rPr lang="en" sz="1000">
+                <a:solidFill>
+                  <a:srgbClr val="CCCCCC"/>
+                </a:solidFill>
+                <a:highlight>
+                  <a:srgbClr val="1F1F1F"/>
+                </a:highlight>
+                <a:latin typeface="Consolas"/>
+                <a:ea typeface="Consolas"/>
+                <a:cs typeface="Consolas"/>
+                <a:sym typeface="Consolas"/>
+              </a:rPr>
+              <a:t> </a:t>
+            </a:r>
+            <a:r>
+              <a:rPr lang="en" sz="1000">
+                <a:solidFill>
+                  <a:srgbClr val="B5CEA8"/>
+                </a:solidFill>
+                <a:highlight>
+                  <a:srgbClr val="1F1F1F"/>
+                </a:highlight>
+                <a:latin typeface="Consolas"/>
+                <a:ea typeface="Consolas"/>
+                <a:cs typeface="Consolas"/>
+                <a:sym typeface="Consolas"/>
+              </a:rPr>
+              <a:t>05</a:t>
+            </a:r>
+            <a:r>
+              <a:rPr lang="en" sz="1000">
+                <a:solidFill>
+                  <a:srgbClr val="CCCCCC"/>
+                </a:solidFill>
+                <a:highlight>
+                  <a:srgbClr val="1F1F1F"/>
+                </a:highlight>
+                <a:latin typeface="Consolas"/>
+                <a:ea typeface="Consolas"/>
+                <a:cs typeface="Consolas"/>
+                <a:sym typeface="Consolas"/>
+              </a:rPr>
+              <a:t> </a:t>
+            </a:r>
+            <a:r>
+              <a:rPr lang="en" sz="1000">
+                <a:solidFill>
+                  <a:srgbClr val="B5CEA8"/>
+                </a:solidFill>
+                <a:highlight>
+                  <a:srgbClr val="1F1F1F"/>
+                </a:highlight>
+                <a:latin typeface="Consolas"/>
+                <a:ea typeface="Consolas"/>
+                <a:cs typeface="Consolas"/>
+                <a:sym typeface="Consolas"/>
+              </a:rPr>
+              <a:t>06</a:t>
+            </a:r>
+            <a:r>
+              <a:rPr lang="en" sz="1000">
+                <a:solidFill>
+                  <a:srgbClr val="CCCCCC"/>
+                </a:solidFill>
+                <a:highlight>
+                  <a:srgbClr val="1F1F1F"/>
+                </a:highlight>
+                <a:latin typeface="Consolas"/>
+                <a:ea typeface="Consolas"/>
+                <a:cs typeface="Consolas"/>
+                <a:sym typeface="Consolas"/>
+              </a:rPr>
+              <a:t> </a:t>
+            </a:r>
+            <a:r>
+              <a:rPr lang="en" sz="1000">
+                <a:solidFill>
+                  <a:srgbClr val="B5CEA8"/>
+                </a:solidFill>
+                <a:highlight>
+                  <a:srgbClr val="1F1F1F"/>
+                </a:highlight>
+                <a:latin typeface="Consolas"/>
+                <a:ea typeface="Consolas"/>
+                <a:cs typeface="Consolas"/>
+                <a:sym typeface="Consolas"/>
+              </a:rPr>
+              <a:t>05</a:t>
+            </a:r>
+            <a:r>
+              <a:rPr lang="en" sz="1000">
+                <a:solidFill>
+                  <a:srgbClr val="CCCCCC"/>
+                </a:solidFill>
+                <a:highlight>
+                  <a:srgbClr val="1F1F1F"/>
+                </a:highlight>
+                <a:latin typeface="Consolas"/>
+                <a:ea typeface="Consolas"/>
+                <a:cs typeface="Consolas"/>
+                <a:sym typeface="Consolas"/>
+              </a:rPr>
+              <a:t> </a:t>
+            </a:r>
+            <a:r>
+              <a:rPr lang="en" sz="1000">
+                <a:solidFill>
+                  <a:srgbClr val="B5CEA8"/>
+                </a:solidFill>
+                <a:highlight>
+                  <a:srgbClr val="1F1F1F"/>
+                </a:highlight>
+                <a:latin typeface="Consolas"/>
+                <a:ea typeface="Consolas"/>
+                <a:cs typeface="Consolas"/>
+                <a:sym typeface="Consolas"/>
+              </a:rPr>
+              <a:t>07</a:t>
+            </a:r>
+            <a:endParaRPr sz="1000">
+              <a:solidFill>
+                <a:srgbClr val="B5CEA8"/>
+              </a:solidFill>
+              <a:highlight>
+                <a:srgbClr val="1F1F1F"/>
+              </a:highlight>
+              <a:latin typeface="Consolas"/>
+              <a:ea typeface="Consolas"/>
+              <a:cs typeface="Consolas"/>
+              <a:sym typeface="Consolas"/>
+            </a:endParaRPr>
+          </a:p>
+          <a:p>
+            <a:pPr indent="0" lvl="0" marL="0" rtl="0" algn="l">
+              <a:lnSpc>
+                <a:spcPct val="157500"/>
+              </a:lnSpc>
+              <a:spcBef>
+                <a:spcPts val="0"/>
+              </a:spcBef>
+              <a:spcAft>
+                <a:spcPts val="0"/>
+              </a:spcAft>
+              <a:buNone/>
+            </a:pPr>
+            <a:r>
+              <a:rPr lang="en" sz="1000">
+                <a:solidFill>
+                  <a:srgbClr val="B5CEA8"/>
+                </a:solidFill>
+                <a:highlight>
+                  <a:srgbClr val="1F1F1F"/>
+                </a:highlight>
+                <a:latin typeface="Consolas"/>
+                <a:ea typeface="Consolas"/>
+                <a:cs typeface="Consolas"/>
+                <a:sym typeface="Consolas"/>
+              </a:rPr>
+              <a:t>08</a:t>
+            </a:r>
+            <a:r>
+              <a:rPr lang="en" sz="1000">
+                <a:solidFill>
+                  <a:srgbClr val="CCCCCC"/>
+                </a:solidFill>
+                <a:highlight>
+                  <a:srgbClr val="1F1F1F"/>
+                </a:highlight>
+                <a:latin typeface="Consolas"/>
+                <a:ea typeface="Consolas"/>
+                <a:cs typeface="Consolas"/>
+                <a:sym typeface="Consolas"/>
+              </a:rPr>
+              <a:t> </a:t>
+            </a:r>
+            <a:r>
+              <a:rPr lang="en" sz="1000">
+                <a:solidFill>
+                  <a:srgbClr val="B5CEA8"/>
+                </a:solidFill>
+                <a:highlight>
+                  <a:srgbClr val="1F1F1F"/>
+                </a:highlight>
+                <a:latin typeface="Consolas"/>
+                <a:ea typeface="Consolas"/>
+                <a:cs typeface="Consolas"/>
+                <a:sym typeface="Consolas"/>
+              </a:rPr>
+              <a:t>09</a:t>
+            </a:r>
+            <a:r>
+              <a:rPr lang="en" sz="1000">
+                <a:solidFill>
+                  <a:srgbClr val="CCCCCC"/>
+                </a:solidFill>
+                <a:highlight>
+                  <a:srgbClr val="1F1F1F"/>
+                </a:highlight>
+                <a:latin typeface="Consolas"/>
+                <a:ea typeface="Consolas"/>
+                <a:cs typeface="Consolas"/>
+                <a:sym typeface="Consolas"/>
+              </a:rPr>
+              <a:t> </a:t>
+            </a:r>
+            <a:r>
+              <a:rPr lang="en" sz="1000">
+                <a:solidFill>
+                  <a:srgbClr val="B5CEA8"/>
+                </a:solidFill>
+                <a:highlight>
+                  <a:srgbClr val="1F1F1F"/>
+                </a:highlight>
+                <a:latin typeface="Consolas"/>
+                <a:ea typeface="Consolas"/>
+                <a:cs typeface="Consolas"/>
+                <a:sym typeface="Consolas"/>
+              </a:rPr>
+              <a:t>10</a:t>
+            </a:r>
+            <a:r>
+              <a:rPr lang="en" sz="1000">
+                <a:solidFill>
+                  <a:srgbClr val="CCCCCC"/>
+                </a:solidFill>
+                <a:highlight>
+                  <a:srgbClr val="1F1F1F"/>
+                </a:highlight>
+                <a:latin typeface="Consolas"/>
+                <a:ea typeface="Consolas"/>
+                <a:cs typeface="Consolas"/>
+                <a:sym typeface="Consolas"/>
+              </a:rPr>
+              <a:t> </a:t>
+            </a:r>
+            <a:r>
+              <a:rPr lang="en" sz="1000">
+                <a:solidFill>
+                  <a:srgbClr val="B5CEA8"/>
+                </a:solidFill>
+                <a:highlight>
+                  <a:srgbClr val="1F1F1F"/>
+                </a:highlight>
+                <a:latin typeface="Consolas"/>
+                <a:ea typeface="Consolas"/>
+                <a:cs typeface="Consolas"/>
+                <a:sym typeface="Consolas"/>
+              </a:rPr>
+              <a:t>09</a:t>
+            </a:r>
+            <a:r>
+              <a:rPr lang="en" sz="1000">
+                <a:solidFill>
+                  <a:srgbClr val="CCCCCC"/>
+                </a:solidFill>
+                <a:highlight>
+                  <a:srgbClr val="1F1F1F"/>
+                </a:highlight>
+                <a:latin typeface="Consolas"/>
+                <a:ea typeface="Consolas"/>
+                <a:cs typeface="Consolas"/>
+                <a:sym typeface="Consolas"/>
+              </a:rPr>
+              <a:t> </a:t>
+            </a:r>
+            <a:r>
+              <a:rPr lang="en" sz="1000">
+                <a:solidFill>
+                  <a:srgbClr val="B5CEA8"/>
+                </a:solidFill>
+                <a:highlight>
+                  <a:srgbClr val="1F1F1F"/>
+                </a:highlight>
+                <a:latin typeface="Consolas"/>
+                <a:ea typeface="Consolas"/>
+                <a:cs typeface="Consolas"/>
+                <a:sym typeface="Consolas"/>
+              </a:rPr>
+              <a:t>11</a:t>
+            </a:r>
+            <a:endParaRPr sz="1000">
+              <a:solidFill>
+                <a:srgbClr val="B5CEA8"/>
+              </a:solidFill>
+              <a:highlight>
+                <a:srgbClr val="1F1F1F"/>
+              </a:highlight>
+              <a:latin typeface="Consolas"/>
+              <a:ea typeface="Consolas"/>
+              <a:cs typeface="Consolas"/>
+              <a:sym typeface="Consolas"/>
+            </a:endParaRPr>
+          </a:p>
+          <a:p>
+            <a:pPr indent="0" lvl="0" marL="0" rtl="0" algn="l">
+              <a:lnSpc>
+                <a:spcPct val="157500"/>
+              </a:lnSpc>
+              <a:spcBef>
+                <a:spcPts val="0"/>
+              </a:spcBef>
+              <a:spcAft>
+                <a:spcPts val="0"/>
+              </a:spcAft>
+              <a:buNone/>
+            </a:pPr>
+            <a:r>
+              <a:rPr lang="en" sz="1000">
+                <a:solidFill>
+                  <a:srgbClr val="B5CEA8"/>
+                </a:solidFill>
+                <a:highlight>
+                  <a:srgbClr val="1F1F1F"/>
+                </a:highlight>
+                <a:latin typeface="Consolas"/>
+                <a:ea typeface="Consolas"/>
+                <a:cs typeface="Consolas"/>
+                <a:sym typeface="Consolas"/>
+              </a:rPr>
+              <a:t>04</a:t>
+            </a:r>
+            <a:r>
+              <a:rPr lang="en" sz="1000">
+                <a:solidFill>
+                  <a:srgbClr val="CCCCCC"/>
+                </a:solidFill>
+                <a:highlight>
+                  <a:srgbClr val="1F1F1F"/>
+                </a:highlight>
+                <a:latin typeface="Consolas"/>
+                <a:ea typeface="Consolas"/>
+                <a:cs typeface="Consolas"/>
+                <a:sym typeface="Consolas"/>
+              </a:rPr>
+              <a:t> </a:t>
+            </a:r>
+            <a:r>
+              <a:rPr lang="en" sz="1000">
+                <a:solidFill>
+                  <a:srgbClr val="B5CEA8"/>
+                </a:solidFill>
+                <a:highlight>
+                  <a:srgbClr val="1F1F1F"/>
+                </a:highlight>
+                <a:latin typeface="Consolas"/>
+                <a:ea typeface="Consolas"/>
+                <a:cs typeface="Consolas"/>
+                <a:sym typeface="Consolas"/>
+              </a:rPr>
+              <a:t>09</a:t>
+            </a:r>
+            <a:r>
+              <a:rPr lang="en" sz="1000">
+                <a:solidFill>
+                  <a:srgbClr val="CCCCCC"/>
+                </a:solidFill>
+                <a:highlight>
+                  <a:srgbClr val="1F1F1F"/>
+                </a:highlight>
+                <a:latin typeface="Consolas"/>
+                <a:ea typeface="Consolas"/>
+                <a:cs typeface="Consolas"/>
+                <a:sym typeface="Consolas"/>
+              </a:rPr>
+              <a:t> </a:t>
+            </a:r>
+            <a:r>
+              <a:rPr lang="en" sz="1000">
+                <a:solidFill>
+                  <a:srgbClr val="B5CEA8"/>
+                </a:solidFill>
+                <a:highlight>
+                  <a:srgbClr val="1F1F1F"/>
+                </a:highlight>
+                <a:latin typeface="Consolas"/>
+                <a:ea typeface="Consolas"/>
+                <a:cs typeface="Consolas"/>
+                <a:sym typeface="Consolas"/>
+              </a:rPr>
+              <a:t>09</a:t>
+            </a:r>
+            <a:r>
+              <a:rPr lang="en" sz="1000">
+                <a:solidFill>
+                  <a:srgbClr val="CCCCCC"/>
+                </a:solidFill>
+                <a:highlight>
+                  <a:srgbClr val="1F1F1F"/>
+                </a:highlight>
+                <a:latin typeface="Consolas"/>
+                <a:ea typeface="Consolas"/>
+                <a:cs typeface="Consolas"/>
+                <a:sym typeface="Consolas"/>
+              </a:rPr>
+              <a:t> </a:t>
+            </a:r>
+            <a:r>
+              <a:rPr lang="en" sz="1000">
+                <a:solidFill>
+                  <a:srgbClr val="B5CEA8"/>
+                </a:solidFill>
+                <a:highlight>
+                  <a:srgbClr val="1F1F1F"/>
+                </a:highlight>
+                <a:latin typeface="Consolas"/>
+                <a:ea typeface="Consolas"/>
+                <a:cs typeface="Consolas"/>
+                <a:sym typeface="Consolas"/>
+              </a:rPr>
+              <a:t>09</a:t>
+            </a:r>
+            <a:r>
+              <a:rPr lang="en" sz="1000">
+                <a:solidFill>
+                  <a:srgbClr val="CCCCCC"/>
+                </a:solidFill>
+                <a:highlight>
+                  <a:srgbClr val="1F1F1F"/>
+                </a:highlight>
+                <a:latin typeface="Consolas"/>
+                <a:ea typeface="Consolas"/>
+                <a:cs typeface="Consolas"/>
+                <a:sym typeface="Consolas"/>
+              </a:rPr>
+              <a:t> </a:t>
+            </a:r>
+            <a:r>
+              <a:rPr lang="en" sz="1000">
+                <a:solidFill>
+                  <a:srgbClr val="B5CEA8"/>
+                </a:solidFill>
+                <a:highlight>
+                  <a:srgbClr val="1F1F1F"/>
+                </a:highlight>
+                <a:latin typeface="Consolas"/>
+                <a:ea typeface="Consolas"/>
+                <a:cs typeface="Consolas"/>
+                <a:sym typeface="Consolas"/>
+              </a:rPr>
+              <a:t>07</a:t>
+            </a:r>
+            <a:endParaRPr sz="1000">
+              <a:solidFill>
+                <a:srgbClr val="B5CEA8"/>
+              </a:solidFill>
+              <a:highlight>
+                <a:srgbClr val="1F1F1F"/>
+              </a:highlight>
+              <a:latin typeface="Consolas"/>
+              <a:ea typeface="Consolas"/>
+              <a:cs typeface="Consolas"/>
+              <a:sym typeface="Consolas"/>
+            </a:endParaRPr>
+          </a:p>
+          <a:p>
+            <a:pPr indent="0" lvl="0" marL="0" rtl="0" algn="l">
+              <a:lnSpc>
+                <a:spcPct val="157500"/>
+              </a:lnSpc>
+              <a:spcBef>
+                <a:spcPts val="0"/>
+              </a:spcBef>
+              <a:spcAft>
+                <a:spcPts val="0"/>
+              </a:spcAft>
+              <a:buNone/>
+            </a:pPr>
+            <a:r>
+              <a:rPr lang="en" sz="1000">
+                <a:solidFill>
+                  <a:srgbClr val="B5CEA8"/>
+                </a:solidFill>
+                <a:highlight>
+                  <a:srgbClr val="1F1F1F"/>
+                </a:highlight>
+                <a:latin typeface="Consolas"/>
+                <a:ea typeface="Consolas"/>
+                <a:cs typeface="Consolas"/>
+                <a:sym typeface="Consolas"/>
+              </a:rPr>
+              <a:t>12</a:t>
+            </a:r>
+            <a:r>
+              <a:rPr lang="en" sz="1000">
+                <a:solidFill>
+                  <a:srgbClr val="CCCCCC"/>
+                </a:solidFill>
+                <a:highlight>
+                  <a:srgbClr val="1F1F1F"/>
+                </a:highlight>
+                <a:latin typeface="Consolas"/>
+                <a:ea typeface="Consolas"/>
+                <a:cs typeface="Consolas"/>
+                <a:sym typeface="Consolas"/>
+              </a:rPr>
+              <a:t> </a:t>
+            </a:r>
+            <a:r>
+              <a:rPr lang="en" sz="1000">
+                <a:solidFill>
+                  <a:srgbClr val="B5CEA8"/>
+                </a:solidFill>
+                <a:highlight>
+                  <a:srgbClr val="1F1F1F"/>
+                </a:highlight>
+                <a:latin typeface="Consolas"/>
+                <a:ea typeface="Consolas"/>
+                <a:cs typeface="Consolas"/>
+                <a:sym typeface="Consolas"/>
+              </a:rPr>
+              <a:t>13</a:t>
+            </a:r>
+            <a:r>
+              <a:rPr lang="en" sz="1000">
+                <a:solidFill>
+                  <a:srgbClr val="CCCCCC"/>
+                </a:solidFill>
+                <a:highlight>
+                  <a:srgbClr val="1F1F1F"/>
+                </a:highlight>
+                <a:latin typeface="Consolas"/>
+                <a:ea typeface="Consolas"/>
+                <a:cs typeface="Consolas"/>
+                <a:sym typeface="Consolas"/>
+              </a:rPr>
+              <a:t> </a:t>
+            </a:r>
+            <a:r>
+              <a:rPr lang="en" sz="1000">
+                <a:solidFill>
+                  <a:srgbClr val="B5CEA8"/>
+                </a:solidFill>
+                <a:highlight>
+                  <a:srgbClr val="1F1F1F"/>
+                </a:highlight>
+                <a:latin typeface="Consolas"/>
+                <a:ea typeface="Consolas"/>
+                <a:cs typeface="Consolas"/>
+                <a:sym typeface="Consolas"/>
+              </a:rPr>
+              <a:t>14</a:t>
+            </a:r>
+            <a:r>
+              <a:rPr lang="en" sz="1000">
+                <a:solidFill>
+                  <a:srgbClr val="CCCCCC"/>
+                </a:solidFill>
+                <a:highlight>
+                  <a:srgbClr val="1F1F1F"/>
+                </a:highlight>
+                <a:latin typeface="Consolas"/>
+                <a:ea typeface="Consolas"/>
+                <a:cs typeface="Consolas"/>
+                <a:sym typeface="Consolas"/>
+              </a:rPr>
+              <a:t> </a:t>
+            </a:r>
+            <a:r>
+              <a:rPr lang="en" sz="1000">
+                <a:solidFill>
+                  <a:srgbClr val="B5CEA8"/>
+                </a:solidFill>
+                <a:highlight>
+                  <a:srgbClr val="1F1F1F"/>
+                </a:highlight>
+                <a:latin typeface="Consolas"/>
+                <a:ea typeface="Consolas"/>
+                <a:cs typeface="Consolas"/>
+                <a:sym typeface="Consolas"/>
+              </a:rPr>
+              <a:t>13</a:t>
+            </a:r>
+            <a:r>
+              <a:rPr lang="en" sz="1000">
+                <a:solidFill>
+                  <a:srgbClr val="CCCCCC"/>
+                </a:solidFill>
+                <a:highlight>
+                  <a:srgbClr val="1F1F1F"/>
+                </a:highlight>
+                <a:latin typeface="Consolas"/>
+                <a:ea typeface="Consolas"/>
+                <a:cs typeface="Consolas"/>
+                <a:sym typeface="Consolas"/>
+              </a:rPr>
+              <a:t> </a:t>
+            </a:r>
+            <a:r>
+              <a:rPr lang="en" sz="1000">
+                <a:solidFill>
+                  <a:srgbClr val="B5CEA8"/>
+                </a:solidFill>
+                <a:highlight>
+                  <a:srgbClr val="1F1F1F"/>
+                </a:highlight>
+                <a:latin typeface="Consolas"/>
+                <a:ea typeface="Consolas"/>
+                <a:cs typeface="Consolas"/>
+                <a:sym typeface="Consolas"/>
+              </a:rPr>
+              <a:t>15</a:t>
+            </a:r>
+            <a:endParaRPr/>
+          </a:p>
+        </p:txBody>
+      </p:sp>
+      <p:pic>
+        <p:nvPicPr>
+          <p:cNvPr id="275" name="Google Shape;275;p42"/>
+          <p:cNvPicPr preferRelativeResize="0"/>
+          <p:nvPr/>
+        </p:nvPicPr>
+        <p:blipFill rotWithShape="1">
+          <a:blip r:embed="rId3">
+            <a:alphaModFix/>
+          </a:blip>
+          <a:srcRect b="7917" l="49925" r="0" t="8478"/>
+          <a:stretch/>
+        </p:blipFill>
+        <p:spPr>
+          <a:xfrm>
+            <a:off x="5323925" y="1111575"/>
+            <a:ext cx="3397050" cy="3403000"/>
+          </a:xfrm>
+          <a:prstGeom prst="rect">
+            <a:avLst/>
+          </a:prstGeom>
+          <a:noFill/>
+          <a:ln>
+            <a:noFill/>
+          </a:ln>
+        </p:spPr>
+      </p:pic>
+    </p:spTree>
+  </p:cSld>
+  <p:clrMapOvr>
+    <a:masterClrMapping/>
+  </p:clrMapOvr>
+  <p:timing>
+    <p:tnLst>
+      <p:par>
+        <p:cTn dur="indefinite" nodeType="tmRoot" restart="never">
+          <p:childTnLst>
+            <p:seq concurrent="1" nextAc="seek">
+              <p:cTn dur="indefinite" id="2" nodeType="mainSeq">
+                <p:childTnLst>
+                  <p:par>
+                    <p:cTn fill="hold">
+                      <p:stCondLst>
+                        <p:cond delay="indefinite"/>
+                      </p:stCondLst>
+                      <p:childTnLst>
+                        <p:par>
+                          <p:cTn fill="hold">
+                            <p:stCondLst>
+                              <p:cond delay="0"/>
+                            </p:stCondLst>
+                            <p:childTnLst>
+                              <p:par>
+                                <p:cTn fill="hold" nodeType="clickEffect" presetClass="entr" presetID="1" presetSubtype="0">
+                                  <p:stCondLst>
+                                    <p:cond delay="0"/>
+                                  </p:stCondLst>
+                                  <p:childTnLst>
+                                    <p:set>
+                                      <p:cBhvr>
+                                        <p:cTn dur="1" fill="hold">
+                                          <p:stCondLst>
+                                            <p:cond delay="0"/>
+                                          </p:stCondLst>
+                                        </p:cTn>
+                                        <p:tgtEl>
+                                          <p:spTgt spid="273"/>
+                                        </p:tgtEl>
+                                        <p:attrNameLst>
+                                          <p:attrName>style.visibility</p:attrName>
+                                        </p:attrNameLst>
+                                      </p:cBhvr>
+                                      <p:to>
+                                        <p:strVal val="visible"/>
+                                      </p:to>
+                                    </p:set>
+                                  </p:childTnLst>
+                                </p:cTn>
+                              </p:par>
+                            </p:childTnLst>
+                          </p:cTn>
+                        </p:par>
+                      </p:childTnLst>
+                    </p:cTn>
+                  </p:par>
+                  <p:par>
+                    <p:cTn fill="hold">
+                      <p:stCondLst>
+                        <p:cond delay="indefinite"/>
+                      </p:stCondLst>
+                      <p:childTnLst>
+                        <p:par>
+                          <p:cTn fill="hold">
+                            <p:stCondLst>
+                              <p:cond delay="0"/>
+                            </p:stCondLst>
+                            <p:childTnLst>
+                              <p:par>
+                                <p:cTn fill="hold" nodeType="clickEffect" presetClass="entr" presetID="1" presetSubtype="0">
+                                  <p:stCondLst>
+                                    <p:cond delay="0"/>
+                                  </p:stCondLst>
+                                  <p:childTnLst>
+                                    <p:set>
+                                      <p:cBhvr>
+                                        <p:cTn dur="1" fill="hold">
+                                          <p:stCondLst>
+                                            <p:cond delay="0"/>
+                                          </p:stCondLst>
+                                        </p:cTn>
+                                        <p:tgtEl>
+                                          <p:spTgt spid="274"/>
+                                        </p:tgtEl>
+                                        <p:attrNameLst>
+                                          <p:attrName>style.visibility</p:attrName>
+                                        </p:attrNameLst>
+                                      </p:cBhvr>
+                                      <p:to>
+                                        <p:strVal val="visible"/>
+                                      </p:to>
+                                    </p:set>
+                                  </p:childTnLst>
+                                </p:cTn>
+                              </p:par>
+                            </p:childTnLst>
+                          </p:cTn>
+                        </p:par>
+                      </p:childTnLst>
+                    </p:cTn>
+                  </p:par>
+                  <p:par>
+                    <p:cTn fill="hold">
+                      <p:stCondLst>
+                        <p:cond delay="indefinite"/>
+                      </p:stCondLst>
+                      <p:childTnLst>
+                        <p:par>
+                          <p:cTn fill="hold">
+                            <p:stCondLst>
+                              <p:cond delay="0"/>
+                            </p:stCondLst>
+                            <p:childTnLst>
+                              <p:par>
+                                <p:cTn fill="hold" nodeType="clickEffect" presetClass="entr" presetID="1" presetSubtype="0">
+                                  <p:stCondLst>
+                                    <p:cond delay="0"/>
+                                  </p:stCondLst>
+                                  <p:childTnLst>
+                                    <p:set>
+                                      <p:cBhvr>
+                                        <p:cTn dur="1" fill="hold">
+                                          <p:stCondLst>
+                                            <p:cond delay="0"/>
+                                          </p:stCondLst>
+                                        </p:cTn>
+                                        <p:tgtEl>
+                                          <p:spTgt spid="275"/>
+                                        </p:tgtEl>
+                                        <p:attrNameLst>
+                                          <p:attrName>style.visibility</p:attrName>
+                                        </p:attrNameLst>
+                                      </p:cBhvr>
+                                      <p:to>
+                                        <p:strVal val="visible"/>
+                                      </p:to>
+                                    </p:set>
+                                  </p:childTnLst>
+                                </p:cTn>
+                              </p:par>
+                            </p:childTnLst>
+                          </p:cTn>
+                        </p:par>
+                      </p:childTnLst>
+                    </p:cTn>
+                  </p:par>
+                </p:childTnLst>
+              </p:cTn>
+              <p:prevCondLst>
+                <p:cond evt="onPrev">
+                  <p:tgtEl>
+                    <p:sldTgt/>
+                  </p:tgtEl>
+                </p:cond>
+              </p:prevCondLst>
+              <p:nextCondLst>
+                <p:cond evt="onNext">
+                  <p:tgtEl>
+                    <p:sldTgt/>
+                  </p:tgtEl>
+                </p:cond>
+              </p:nextCondLst>
+            </p:seq>
+          </p:childTnLst>
+        </p:cTn>
+      </p:par>
+    </p:tnLst>
+  </p:timing>
+</p:sld>
+</file>
+
+<file path=ppt/slides/slide18.xml><?xml version="1.0" encoding="utf-8"?>
+<p:sld xmlns:a="http://schemas.openxmlformats.org/drawingml/2006/main" xmlns:r="http://schemas.openxmlformats.org/officeDocument/2006/relationships" xmlns:mc="http://schemas.openxmlformats.org/markup-compatibility/2006" xmlns:mv="urn:schemas-microsoft-com:mac:vml" xmlns:p="http://schemas.openxmlformats.org/presentationml/2006/main" xmlns:c="http://schemas.openxmlformats.org/drawingml/2006/chart" xmlns:dgm="http://schemas.openxmlformats.org/drawingml/2006/diagram" xmlns:o="urn:schemas-microsoft-com:office:office" xmlns:v="urn:schemas-microsoft-com:vml" xmlns:pvml="urn:schemas-microsoft-com:office:powerpoint" xmlns:com="http://schemas.openxmlformats.org/drawingml/2006/compatibility" xmlns:p14="http://schemas.microsoft.com/office/powerpoint/2010/main" xmlns:p15="http://schemas.microsoft.com/office/powerpoint/2012/main" xmlns:ahyp="http://schemas.microsoft.com/office/drawing/2018/hyperlinkcolor">
+  <p:cSld>
+    <p:spTree>
+      <p:nvGrpSpPr>
+        <p:cNvPr id="279" name="Shape 279"/>
+        <p:cNvGrpSpPr/>
+        <p:nvPr/>
+      </p:nvGrpSpPr>
+      <p:grpSpPr>
+        <a:xfrm>
+          <a:off x="0" y="0"/>
+          <a:ext cx="0" cy="0"/>
+          <a:chOff x="0" y="0"/>
+          <a:chExt cx="0" cy="0"/>
+        </a:xfrm>
+      </p:grpSpPr>
+      <p:sp>
+        <p:nvSpPr>
+          <p:cNvPr id="280" name="Google Shape;280;p43"/>
+          <p:cNvSpPr txBox="1"/>
+          <p:nvPr>
+            <p:ph type="title"/>
+          </p:nvPr>
+        </p:nvSpPr>
+        <p:spPr>
+          <a:xfrm>
+            <a:off x="311700" y="195615"/>
+            <a:ext cx="8520600" cy="572700"/>
+          </a:xfrm>
+          <a:prstGeom prst="rect">
+            <a:avLst/>
+          </a:prstGeom>
+        </p:spPr>
+        <p:txBody>
+          <a:bodyPr anchorCtr="0" anchor="t" bIns="91425" lIns="91425" spcFirstLastPara="1" rIns="91425" wrap="square" tIns="91425">
+            <a:normAutofit fontScale="90000"/>
+          </a:bodyPr>
+          <a:lstStyle/>
+          <a:p>
+            <a:pPr indent="0" lvl="0" marL="0" rtl="0" algn="l">
+              <a:spcBef>
+                <a:spcPts val="0"/>
+              </a:spcBef>
+              <a:spcAft>
+                <a:spcPts val="0"/>
+              </a:spcAft>
+              <a:buNone/>
+            </a:pPr>
+            <a:r>
+              <a:rPr lang="en">
+                <a:solidFill>
+                  <a:schemeClr val="accent5"/>
+                </a:solidFill>
+              </a:rPr>
+              <a:t>Tilemap Implementation</a:t>
+            </a:r>
+            <a:endParaRPr>
+              <a:solidFill>
+                <a:schemeClr val="accent5"/>
+              </a:solidFill>
+            </a:endParaRPr>
+          </a:p>
+        </p:txBody>
+      </p:sp>
+      <p:sp>
+        <p:nvSpPr>
+          <p:cNvPr id="281" name="Google Shape;281;p43"/>
+          <p:cNvSpPr txBox="1"/>
+          <p:nvPr>
+            <p:ph idx="1" type="body"/>
+          </p:nvPr>
+        </p:nvSpPr>
+        <p:spPr>
+          <a:xfrm>
+            <a:off x="311700" y="885950"/>
+            <a:ext cx="8520600" cy="4023300"/>
+          </a:xfrm>
+          <a:prstGeom prst="rect">
+            <a:avLst/>
+          </a:prstGeom>
+        </p:spPr>
+        <p:txBody>
+          <a:bodyPr anchorCtr="0" anchor="ctr" bIns="91425" lIns="91425" spcFirstLastPara="1" rIns="91425" wrap="square" tIns="91425">
+            <a:normAutofit/>
+          </a:bodyPr>
+          <a:lstStyle/>
+          <a:p>
+            <a:pPr indent="0" lvl="0" marL="0" rtl="0" algn="ctr">
+              <a:spcBef>
+                <a:spcPts val="0"/>
+              </a:spcBef>
+              <a:spcAft>
+                <a:spcPts val="1200"/>
+              </a:spcAft>
+              <a:buNone/>
+            </a:pPr>
+            <a:r>
+              <a:rPr lang="en" sz="2900">
+                <a:latin typeface="VT323"/>
+                <a:ea typeface="VT323"/>
+                <a:cs typeface="VT323"/>
+                <a:sym typeface="VT323"/>
+              </a:rPr>
+              <a:t>DEMO!</a:t>
+            </a:r>
+            <a:endParaRPr/>
+          </a:p>
+          <a:p>
+            <a:pPr indent="0" lvl="0" marL="0" rtl="0" algn="ctr">
+              <a:spcBef>
+                <a:spcPts val="0"/>
+              </a:spcBef>
+              <a:spcAft>
+                <a:spcPts val="0"/>
+              </a:spcAft>
+              <a:buNone/>
+            </a:pPr>
+            <a:r>
+              <a:rPr lang="en" sz="1800"/>
+              <a:t>Snake4: the room, drawn from tilemap-definition.xml</a:t>
+            </a:r>
+            <a:endParaRPr sz="1800"/>
+          </a:p>
+        </p:txBody>
+      </p:sp>
+    </p:spTree>
+  </p:cSld>
+  <p:clrMapOvr>
+    <a:masterClrMapping/>
+  </p:clrMapOvr>
+</p:sld>
+</file>
+
+<file path=ppt/slides/slide19.xml><?xml version="1.0" encoding="utf-8"?>
+<p:sld xmlns:a="http://schemas.openxmlformats.org/drawingml/2006/main" xmlns:p="http://schemas.openxmlformats.org/presentationml/2006/main" xmlns:r="http://schemas.openxmlformats.org/officeDocument/2006/relationships">
+  <p:cSld>
+    <p:spTree>
+      <p:nvGrpSpPr>
+        <p:cNvPr id="1" name=""/>
+        <p:cNvGrpSpPr/>
+        <p:nvPr/>
+      </p:nvGrpSpPr>
+      <p:grpSpPr/>
+      <p:sp>
+        <p:nvSpPr>
+          <p:cNvPr id="140" name="Google Shape;140;p23"/>
+          <p:cNvSpPr txBox="1"/>
+          <p:nvPr>
+            <p:ph type="title"/>
+          </p:nvPr>
+        </p:nvSpPr>
+        <p:spPr>
+          <a:xfrm>
+            <a:off x="311700" y="195615"/>
+            <a:ext cx="8520600" cy="572700"/>
+          </a:xfrm>
+          <a:prstGeom prst="rect">
+            <a:avLst/>
+          </a:prstGeom>
+        </p:spPr>
+        <p:txBody>
+          <a:bodyPr anchorCtr="0" anchor="t" bIns="91425" lIns="91425" spcFirstLastPara="1" rIns="91425" wrap="square" tIns="91425">
+            <a:normAutofit fontScale="90000"/>
+          </a:bodyPr>
+          <a:lstStyle/>
+          <a:p>
+            <a:pPr indent="0" lvl="0" marL="0" rtl="0" algn="l">
+              <a:spcBef>
+                <a:spcPts val="0"/>
+              </a:spcBef>
+              <a:spcAft>
+                <a:spcPts val="0"/>
+              </a:spcAft>
+              <a:buNone/>
+            </a:pPr>
+            <a:r>
+              <a:rPr lang="en"/>
+              <a:t>Fixed-Tick Movement</a:t>
+            </a:r>
+            <a:endParaRPr/>
+          </a:p>
+        </p:txBody>
+      </p:sp>
+      <p:sp>
+        <p:nvSpPr>
+          <p:cNvPr id="293" name="Google Shape;293;p45"/>
+          <p:cNvSpPr txBox="1"/>
+          <p:nvPr>
+            <p:ph type="title"/>
+          </p:nvPr>
+        </p:nvSpPr>
+        <p:spPr>
+          <a:xfrm>
+            <a:off x="311700" y="1152475"/>
+            <a:ext cx="3700000" cy="3500000"/>
+          </a:xfrm>
+          <a:prstGeom prst="rect">
+            <a:avLst/>
+          </a:prstGeom>
+        </p:spPr>
+        <p:txBody>
+          <a:bodyPr anchorCtr="0" anchor="t" bIns="91425" lIns="91425" spcFirstLastPara="1" rIns="91425" wrap="square" tIns="91425">
+            <a:normAutofit fontScale="90000"/>
+          </a:bodyPr>
+          <a:lstStyle/>
+          <a:p>
+            <a:pPr indent="-330200" lvl="0" marL="457200" rtl="0" algn="l">
+              <a:buClr>
+                <a:srgbClr val="DEE2E6"/>
+              </a:buClr>
+              <a:spcBef>
+                <a:spcPts val="0"/>
+              </a:spcBef>
+              <a:spcAft>
+                <a:spcPts val="0"/>
+              </a:spcAft>
+              <a:buSzPts val="1600"/>
+              <a:buChar char="●"/>
+            </a:pPr>
+            <a:r>
+              <a:rPr lang="en" sz="1600">
+                <a:solidFill>
+                  <a:srgbClr val="DEE2E6"/>
+                </a:solidFill>
+              </a:rPr>
+              <a:t>A snake jumps one cell at a time, however fast the game runs</a:t>
+            </a:r>
+            <a:endParaRPr/>
+          </a:p>
+          <a:p>
+            <a:pPr indent="-330200" lvl="0" marL="457200" rtl="0" algn="l">
+              <a:buClr>
+                <a:srgbClr val="DEE2E6"/>
+              </a:buClr>
+              <a:spcBef>
+                <a:spcPts val="0"/>
+              </a:spcBef>
+              <a:spcAft>
+                <a:spcPts val="0"/>
+              </a:spcAft>
+              <a:buSzPts val="1600"/>
+              <a:buChar char="●"/>
+            </a:pPr>
+            <a:r>
+              <a:rPr lang="en" sz="1600">
+                <a:solidFill>
+                  <a:srgbClr val="DEE2E6"/>
+                </a:solidFill>
+              </a:rPr>
+              <a:t>An accumulator collects real time</a:t>
+            </a:r>
+            <a:endParaRPr/>
+          </a:p>
+          <a:p>
+            <a:pPr indent="-317500" lvl="1" marL="914400" rtl="0" algn="l">
+              <a:buClr>
+                <a:srgbClr val="6C757D"/>
+              </a:buClr>
+              <a:spcBef>
+                <a:spcPts val="0"/>
+              </a:spcBef>
+              <a:spcAft>
+                <a:spcPts val="0"/>
+              </a:spcAft>
+              <a:buSzPts val="1400"/>
+              <a:buChar char="○"/>
+            </a:pPr>
+            <a:r>
+              <a:rPr lang="en" sz="1400">
+                <a:solidFill>
+                  <a:srgbClr val="6C757D"/>
+                </a:solidFill>
+              </a:rPr>
+              <a:t>Move once for every full tick</a:t>
+            </a:r>
+            <a:endParaRPr/>
+          </a:p>
+          <a:p>
+            <a:pPr indent="-317500" lvl="1" marL="914400" rtl="0" algn="l">
+              <a:buClr>
+                <a:srgbClr val="6C757D"/>
+              </a:buClr>
+              <a:spcBef>
+                <a:spcPts val="0"/>
+              </a:spcBef>
+              <a:spcAft>
+                <a:spcPts val="0"/>
+              </a:spcAft>
+              <a:buSzPts val="1400"/>
+              <a:buChar char="○"/>
+            </a:pPr>
+            <a:r>
+              <a:rPr lang="en" sz="1400">
+                <a:solidFill>
+                  <a:srgbClr val="6C757D"/>
+                </a:solidFill>
+              </a:rPr>
+              <a:t>Subtract, don’t reset: leftover time carries over</a:t>
+            </a:r>
+            <a:endParaRPr/>
+          </a:p>
+          <a:p>
+            <a:pPr indent="-330200" lvl="0" marL="457200" rtl="0" algn="l">
+              <a:buClr>
+                <a:srgbClr val="DEE2E6"/>
+              </a:buClr>
+              <a:spcBef>
+                <a:spcPts val="0"/>
+              </a:spcBef>
+              <a:spcAft>
+                <a:spcPts val="0"/>
+              </a:spcAft>
+              <a:buSzPts val="1600"/>
+              <a:buChar char="●"/>
+            </a:pPr>
+            <a:r>
+              <a:rPr lang="en" sz="1600">
+                <a:solidFill>
+                  <a:srgbClr val="DEE2E6"/>
+                </a:solidFill>
+              </a:rPr>
+              <a:t>Pong’s fixed timestep, in practice</a:t>
+            </a:r>
+            <a:endParaRPr/>
+          </a:p>
+        </p:txBody>
+      </p:sp>
+      <p:sp>
+        <p:nvSpPr>
+          <p:cNvPr id="141" name="Google Shape;141;p23"/>
+          <p:cNvSpPr txBox="1"/>
+          <p:nvPr>
+            <p:ph idx="2" type="body"/>
+          </p:nvPr>
+        </p:nvSpPr>
+        <p:spPr>
+          <a:xfrm>
+            <a:off x="4150000" y="1152475"/>
+            <a:ext cx="4750000" cy="3600000"/>
+          </a:xfrm>
+          <a:prstGeom prst="rect">
+            <a:avLst/>
+          </a:prstGeom>
+        </p:spPr>
+        <p:txBody>
+          <a:bodyPr anchorCtr="0" anchor="t" bIns="91425" lIns="91425" spcFirstLastPara="1" rIns="91425" wrap="square" tIns="91425">
+            <a:noAutofit/>
+          </a:bodyPr>
+          <a:lstStyle/>
+          <a:p>
+            <a:pPr indent="0" lvl="0" marL="0" rtl="0" algn="l">
+              <a:lnSpc>
+                <a:spcPct val="115000"/>
+              </a:lnSpc>
+              <a:spcBef>
+                <a:spcPts val="0"/>
+              </a:spcBef>
+              <a:spcAft>
+                <a:spcPts val="0"/>
+              </a:spcAft>
+              <a:buNone/>
+            </a:pPr>
+            <a:r>
+              <a:rPr lang="en" sz="1000">
+                <a:highlight>
+                  <a:schemeClr val="dk2"/>
+                </a:highlight>
+                <a:latin typeface="Consolas"/>
+                <a:ea typeface="Consolas"/>
+                <a:cs typeface="Consolas"/>
+                <a:sym typeface="Consolas"/>
+              </a:rPr>
+              <a:t>TimeSpan TickDuration =</a:t>
+            </a:r>
+            <a:endParaRPr sz="1000">
+              <a:solidFill>
+                <a:srgbClr val="CCCCCC"/>
+              </a:solidFill>
+              <a:highlight>
+                <a:schemeClr val="dk2"/>
+              </a:highlight>
+              <a:latin typeface="Consolas"/>
+              <a:ea typeface="Consolas"/>
+              <a:cs typeface="Consolas"/>
+              <a:sym typeface="Consolas"/>
+            </a:endParaRPr>
+          </a:p>
+          <a:p>
+            <a:pPr indent="0" lvl="0" marL="0" rtl="0" algn="l">
+              <a:lnSpc>
+                <a:spcPct val="115000"/>
+              </a:lnSpc>
+              <a:spcBef>
+                <a:spcPts val="0"/>
+              </a:spcBef>
+              <a:spcAft>
+                <a:spcPts val="0"/>
+              </a:spcAft>
+              <a:buNone/>
+            </a:pPr>
+            <a:r>
+              <a:rPr lang="en" sz="1000">
+                <a:highlight>
+                  <a:schemeClr val="dk2"/>
+                </a:highlight>
+                <a:latin typeface="Consolas"/>
+                <a:ea typeface="Consolas"/>
+                <a:cs typeface="Consolas"/>
+                <a:sym typeface="Consolas"/>
+              </a:rPr>
+              <a:t>    TimeSpan.FromMilliseconds(200);</a:t>
+            </a:r>
+            <a:endParaRPr sz="1000">
+              <a:solidFill>
+                <a:srgbClr val="CCCCCC"/>
+              </a:solidFill>
+              <a:highlight>
+                <a:schemeClr val="dk2"/>
+              </a:highlight>
+              <a:latin typeface="Consolas"/>
+              <a:ea typeface="Consolas"/>
+              <a:cs typeface="Consolas"/>
+              <a:sym typeface="Consolas"/>
+            </a:endParaRPr>
+          </a:p>
+          <a:p>
+            <a:pPr indent="0" lvl="0" marL="0" rtl="0" algn="l">
+              <a:lnSpc>
+                <a:spcPct val="115000"/>
+              </a:lnSpc>
+              <a:spcBef>
+                <a:spcPts val="0"/>
+              </a:spcBef>
+              <a:spcAft>
+                <a:spcPts val="0"/>
+              </a:spcAft>
+              <a:buNone/>
+            </a:pPr>
+            <a:r>
+              <a:rPr lang="en" sz="1000">
+                <a:highlight>
+                  <a:schemeClr val="dk2"/>
+                </a:highlight>
+                <a:latin typeface="Consolas"/>
+                <a:ea typeface="Consolas"/>
+                <a:cs typeface="Consolas"/>
+                <a:sym typeface="Consolas"/>
+              </a:rPr>
+              <a:t/>
+            </a:r>
+            <a:endParaRPr sz="1000">
+              <a:solidFill>
+                <a:srgbClr val="CCCCCC"/>
+              </a:solidFill>
+              <a:highlight>
+                <a:schemeClr val="dk2"/>
+              </a:highlight>
+              <a:latin typeface="Consolas"/>
+              <a:ea typeface="Consolas"/>
+              <a:cs typeface="Consolas"/>
+              <a:sym typeface="Consolas"/>
+            </a:endParaRPr>
+          </a:p>
+          <a:p>
+            <a:pPr indent="0" lvl="0" marL="0" rtl="0" algn="l">
+              <a:lnSpc>
+                <a:spcPct val="115000"/>
+              </a:lnSpc>
+              <a:spcBef>
+                <a:spcPts val="0"/>
+              </a:spcBef>
+              <a:spcAft>
+                <a:spcPts val="0"/>
+              </a:spcAft>
+              <a:buNone/>
+            </a:pPr>
+            <a:r>
+              <a:rPr lang="en" sz="1000">
+                <a:highlight>
+                  <a:schemeClr val="dk2"/>
+                </a:highlight>
+                <a:latin typeface="Consolas"/>
+                <a:ea typeface="Consolas"/>
+                <a:cs typeface="Consolas"/>
+                <a:sym typeface="Consolas"/>
+              </a:rPr>
+              <a:t>public void Update(GameTime gameTime)</a:t>
+            </a:r>
+            <a:endParaRPr sz="1000">
+              <a:solidFill>
+                <a:srgbClr val="CCCCCC"/>
+              </a:solidFill>
+              <a:highlight>
+                <a:schemeClr val="dk2"/>
+              </a:highlight>
+              <a:latin typeface="Consolas"/>
+              <a:ea typeface="Consolas"/>
+              <a:cs typeface="Consolas"/>
+              <a:sym typeface="Consolas"/>
+            </a:endParaRPr>
+          </a:p>
+          <a:p>
+            <a:pPr indent="0" lvl="0" marL="0" rtl="0" algn="l">
+              <a:lnSpc>
+                <a:spcPct val="115000"/>
+              </a:lnSpc>
+              <a:spcBef>
+                <a:spcPts val="0"/>
+              </a:spcBef>
+              <a:spcAft>
+                <a:spcPts val="0"/>
+              </a:spcAft>
+              <a:buNone/>
+            </a:pPr>
+            <a:r>
+              <a:rPr lang="en" sz="1000">
+                <a:highlight>
+                  <a:schemeClr val="dk2"/>
+                </a:highlight>
+                <a:latin typeface="Consolas"/>
+                <a:ea typeface="Consolas"/>
+                <a:cs typeface="Consolas"/>
+                <a:sym typeface="Consolas"/>
+              </a:rPr>
+              <a:t>{</a:t>
+            </a:r>
+            <a:endParaRPr sz="1000">
+              <a:solidFill>
+                <a:srgbClr val="CCCCCC"/>
+              </a:solidFill>
+              <a:highlight>
+                <a:schemeClr val="dk2"/>
+              </a:highlight>
+              <a:latin typeface="Consolas"/>
+              <a:ea typeface="Consolas"/>
+              <a:cs typeface="Consolas"/>
+              <a:sym typeface="Consolas"/>
+            </a:endParaRPr>
+          </a:p>
+          <a:p>
+            <a:pPr indent="0" lvl="0" marL="0" rtl="0" algn="l">
+              <a:lnSpc>
+                <a:spcPct val="115000"/>
+              </a:lnSpc>
+              <a:spcBef>
+                <a:spcPts val="0"/>
+              </a:spcBef>
+              <a:spcAft>
+                <a:spcPts val="0"/>
+              </a:spcAft>
+              <a:buNone/>
+            </a:pPr>
+            <a:r>
+              <a:rPr lang="en" sz="1000">
+                <a:highlight>
+                  <a:schemeClr val="dk2"/>
+                </a:highlight>
+                <a:latin typeface="Consolas"/>
+                <a:ea typeface="Consolas"/>
+                <a:cs typeface="Consolas"/>
+                <a:sym typeface="Consolas"/>
+              </a:rPr>
+              <a:t>    _elapsed += gameTime.ElapsedGameTime;</a:t>
+            </a:r>
+            <a:endParaRPr sz="1000">
+              <a:solidFill>
+                <a:srgbClr val="CCCCCC"/>
+              </a:solidFill>
+              <a:highlight>
+                <a:schemeClr val="dk2"/>
+              </a:highlight>
+              <a:latin typeface="Consolas"/>
+              <a:ea typeface="Consolas"/>
+              <a:cs typeface="Consolas"/>
+              <a:sym typeface="Consolas"/>
+            </a:endParaRPr>
+          </a:p>
+          <a:p>
+            <a:pPr indent="0" lvl="0" marL="0" rtl="0" algn="l">
+              <a:lnSpc>
+                <a:spcPct val="115000"/>
+              </a:lnSpc>
+              <a:spcBef>
+                <a:spcPts val="0"/>
+              </a:spcBef>
+              <a:spcAft>
+                <a:spcPts val="0"/>
+              </a:spcAft>
+              <a:buNone/>
+            </a:pPr>
+            <a:r>
+              <a:rPr lang="en" sz="1000">
+                <a:highlight>
+                  <a:schemeClr val="dk2"/>
+                </a:highlight>
+                <a:latin typeface="Consolas"/>
+                <a:ea typeface="Consolas"/>
+                <a:cs typeface="Consolas"/>
+                <a:sym typeface="Consolas"/>
+              </a:rPr>
+              <a:t>    while (_elapsed &gt;= TickDuration)</a:t>
+            </a:r>
+            <a:endParaRPr sz="1000">
+              <a:solidFill>
+                <a:srgbClr val="CCCCCC"/>
+              </a:solidFill>
+              <a:highlight>
+                <a:schemeClr val="dk2"/>
+              </a:highlight>
+              <a:latin typeface="Consolas"/>
+              <a:ea typeface="Consolas"/>
+              <a:cs typeface="Consolas"/>
+              <a:sym typeface="Consolas"/>
+            </a:endParaRPr>
+          </a:p>
+          <a:p>
+            <a:pPr indent="0" lvl="0" marL="0" rtl="0" algn="l">
+              <a:lnSpc>
+                <a:spcPct val="115000"/>
+              </a:lnSpc>
+              <a:spcBef>
+                <a:spcPts val="0"/>
+              </a:spcBef>
+              <a:spcAft>
+                <a:spcPts val="0"/>
+              </a:spcAft>
+              <a:buNone/>
+            </a:pPr>
+            <a:r>
+              <a:rPr lang="en" sz="1000">
+                <a:highlight>
+                  <a:schemeClr val="dk2"/>
+                </a:highlight>
+                <a:latin typeface="Consolas"/>
+                <a:ea typeface="Consolas"/>
+                <a:cs typeface="Consolas"/>
+                <a:sym typeface="Consolas"/>
+              </a:rPr>
+              <a:t>    {</a:t>
+            </a:r>
+            <a:endParaRPr sz="1000">
+              <a:solidFill>
+                <a:srgbClr val="CCCCCC"/>
+              </a:solidFill>
+              <a:highlight>
+                <a:schemeClr val="dk2"/>
+              </a:highlight>
+              <a:latin typeface="Consolas"/>
+              <a:ea typeface="Consolas"/>
+              <a:cs typeface="Consolas"/>
+              <a:sym typeface="Consolas"/>
+            </a:endParaRPr>
+          </a:p>
+          <a:p>
+            <a:pPr indent="0" lvl="0" marL="0" rtl="0" algn="l">
+              <a:lnSpc>
+                <a:spcPct val="115000"/>
+              </a:lnSpc>
+              <a:spcBef>
+                <a:spcPts val="0"/>
+              </a:spcBef>
+              <a:spcAft>
+                <a:spcPts val="0"/>
+              </a:spcAft>
+              <a:buNone/>
+            </a:pPr>
+            <a:r>
+              <a:rPr lang="en" sz="1000">
+                <a:highlight>
+                  <a:schemeClr val="dk2"/>
+                </a:highlight>
+                <a:latin typeface="Consolas"/>
+                <a:ea typeface="Consolas"/>
+                <a:cs typeface="Consolas"/>
+                <a:sym typeface="Consolas"/>
+              </a:rPr>
+              <a:t>        _elapsed -= TickDuration;</a:t>
+            </a:r>
+            <a:endParaRPr sz="1000">
+              <a:solidFill>
+                <a:srgbClr val="CCCCCC"/>
+              </a:solidFill>
+              <a:highlight>
+                <a:schemeClr val="dk2"/>
+              </a:highlight>
+              <a:latin typeface="Consolas"/>
+              <a:ea typeface="Consolas"/>
+              <a:cs typeface="Consolas"/>
+              <a:sym typeface="Consolas"/>
+            </a:endParaRPr>
+          </a:p>
+          <a:p>
+            <a:pPr indent="0" lvl="0" marL="0" rtl="0" algn="l">
+              <a:lnSpc>
+                <a:spcPct val="115000"/>
+              </a:lnSpc>
+              <a:spcBef>
+                <a:spcPts val="0"/>
+              </a:spcBef>
+              <a:spcAft>
+                <a:spcPts val="0"/>
+              </a:spcAft>
+              <a:buNone/>
+            </a:pPr>
+            <a:r>
+              <a:rPr lang="en" sz="1000">
+                <a:highlight>
+                  <a:schemeClr val="dk2"/>
+                </a:highlight>
+                <a:latin typeface="Consolas"/>
+                <a:ea typeface="Consolas"/>
+                <a:cs typeface="Consolas"/>
+                <a:sym typeface="Consolas"/>
+              </a:rPr>
+              <a:t>        Move();</a:t>
+            </a:r>
+            <a:endParaRPr sz="1000">
+              <a:solidFill>
+                <a:srgbClr val="CCCCCC"/>
+              </a:solidFill>
+              <a:highlight>
+                <a:schemeClr val="dk2"/>
+              </a:highlight>
+              <a:latin typeface="Consolas"/>
+              <a:ea typeface="Consolas"/>
+              <a:cs typeface="Consolas"/>
+              <a:sym typeface="Consolas"/>
+            </a:endParaRPr>
+          </a:p>
+          <a:p>
+            <a:pPr indent="0" lvl="0" marL="0" rtl="0" algn="l">
+              <a:lnSpc>
+                <a:spcPct val="115000"/>
+              </a:lnSpc>
+              <a:spcBef>
+                <a:spcPts val="0"/>
+              </a:spcBef>
+              <a:spcAft>
+                <a:spcPts val="0"/>
+              </a:spcAft>
+              <a:buNone/>
+            </a:pPr>
+            <a:r>
+              <a:rPr lang="en" sz="1000">
+                <a:highlight>
+                  <a:schemeClr val="dk2"/>
+                </a:highlight>
+                <a:latin typeface="Consolas"/>
+                <a:ea typeface="Consolas"/>
+                <a:cs typeface="Consolas"/>
+                <a:sym typeface="Consolas"/>
+              </a:rPr>
+              <a:t>    }</a:t>
+            </a:r>
+            <a:endParaRPr sz="1000">
+              <a:solidFill>
+                <a:srgbClr val="CCCCCC"/>
+              </a:solidFill>
+              <a:highlight>
+                <a:schemeClr val="dk2"/>
+              </a:highlight>
+              <a:latin typeface="Consolas"/>
+              <a:ea typeface="Consolas"/>
+              <a:cs typeface="Consolas"/>
+              <a:sym typeface="Consolas"/>
+            </a:endParaRPr>
+          </a:p>
+          <a:p>
+            <a:pPr indent="0" lvl="0" marL="0" rtl="0" algn="l">
+              <a:lnSpc>
+                <a:spcPct val="115000"/>
+              </a:lnSpc>
+              <a:spcBef>
+                <a:spcPts val="0"/>
+              </a:spcBef>
+              <a:spcAft>
+                <a:spcPts val="0"/>
+              </a:spcAft>
+              <a:buNone/>
+            </a:pPr>
+            <a:r>
+              <a:rPr lang="en" sz="1000">
+                <a:highlight>
+                  <a:schemeClr val="dk2"/>
+                </a:highlight>
+                <a:latin typeface="Consolas"/>
+                <a:ea typeface="Consolas"/>
+                <a:cs typeface="Consolas"/>
+                <a:sym typeface="Consolas"/>
+              </a:rPr>
+              <a:t>}</a:t>
+            </a:r>
+            <a:endParaRPr sz="1000">
+              <a:solidFill>
+                <a:srgbClr val="CCCCCC"/>
+              </a:solidFill>
+              <a:highlight>
+                <a:schemeClr val="dk2"/>
+              </a:highlight>
+              <a:latin typeface="Consolas"/>
+              <a:ea typeface="Consolas"/>
+              <a:cs typeface="Consolas"/>
+              <a:sym typeface="Consolas"/>
+            </a:endParaRPr>
           </a:p>
         </p:txBody>
       </p:sp>
@@ -8373,7 +10672,994 @@
 </p:sld>
 </file>
 
-<file path=ppt/slides/slide27.xml><?xml version="1.0" encoding="utf-8"?>
+<file path=ppt/slides/slide20.xml><?xml version="1.0" encoding="utf-8"?>
+<p:sld xmlns:a="http://schemas.openxmlformats.org/drawingml/2006/main" xmlns:p="http://schemas.openxmlformats.org/presentationml/2006/main" xmlns:r="http://schemas.openxmlformats.org/officeDocument/2006/relationships">
+  <p:cSld>
+    <p:spTree>
+      <p:nvGrpSpPr>
+        <p:cNvPr id="1" name=""/>
+        <p:cNvGrpSpPr/>
+        <p:nvPr/>
+      </p:nvGrpSpPr>
+      <p:grpSpPr/>
+      <p:sp>
+        <p:nvSpPr>
+          <p:cNvPr id="140" name="Google Shape;140;p23"/>
+          <p:cNvSpPr txBox="1"/>
+          <p:nvPr>
+            <p:ph type="title"/>
+          </p:nvPr>
+        </p:nvSpPr>
+        <p:spPr>
+          <a:xfrm>
+            <a:off x="311700" y="195615"/>
+            <a:ext cx="8520600" cy="572700"/>
+          </a:xfrm>
+          <a:prstGeom prst="rect">
+            <a:avLst/>
+          </a:prstGeom>
+        </p:spPr>
+        <p:txBody>
+          <a:bodyPr anchorCtr="0" anchor="t" bIns="91425" lIns="91425" spcFirstLastPara="1" rIns="91425" wrap="square" tIns="91425">
+            <a:normAutofit fontScale="90000"/>
+          </a:bodyPr>
+          <a:lstStyle/>
+          <a:p>
+            <a:pPr indent="0" lvl="0" marL="0" rtl="0" algn="l">
+              <a:spcBef>
+                <a:spcPts val="0"/>
+              </a:spcBef>
+              <a:spcAft>
+                <a:spcPts val="0"/>
+              </a:spcAft>
+              <a:buNone/>
+            </a:pPr>
+            <a:r>
+              <a:rPr lang="en"/>
+              <a:t>Input as Actions</a:t>
+            </a:r>
+            <a:endParaRPr/>
+          </a:p>
+        </p:txBody>
+      </p:sp>
+      <p:sp>
+        <p:nvSpPr>
+          <p:cNvPr id="293" name="Google Shape;293;p45"/>
+          <p:cNvSpPr txBox="1"/>
+          <p:nvPr>
+            <p:ph type="title"/>
+          </p:nvPr>
+        </p:nvSpPr>
+        <p:spPr>
+          <a:xfrm>
+            <a:off x="311700" y="1152475"/>
+            <a:ext cx="3700000" cy="3500000"/>
+          </a:xfrm>
+          <a:prstGeom prst="rect">
+            <a:avLst/>
+          </a:prstGeom>
+        </p:spPr>
+        <p:txBody>
+          <a:bodyPr anchorCtr="0" anchor="t" bIns="91425" lIns="91425" spcFirstLastPara="1" rIns="91425" wrap="square" tIns="91425">
+            <a:normAutofit fontScale="90000"/>
+          </a:bodyPr>
+          <a:lstStyle/>
+          <a:p>
+            <a:pPr indent="-330200" lvl="0" marL="457200" rtl="0" algn="l">
+              <a:buClr>
+                <a:srgbClr val="DEE2E6"/>
+              </a:buClr>
+              <a:spcBef>
+                <a:spcPts val="0"/>
+              </a:spcBef>
+              <a:spcAft>
+                <a:spcPts val="0"/>
+              </a:spcAft>
+              <a:buSzPts val="1600"/>
+              <a:buChar char="●"/>
+            </a:pPr>
+            <a:r>
+              <a:rPr lang="en" sz="1600">
+                <a:solidFill>
+                  <a:srgbClr val="DEE2E6"/>
+                </a:solidFill>
+              </a:rPr>
+              <a:t>Snake5 reads the keys directly</a:t>
+            </a:r>
+            <a:endParaRPr/>
+          </a:p>
+          <a:p>
+            <a:pPr indent="-317500" lvl="1" marL="914400" rtl="0" algn="l">
+              <a:buClr>
+                <a:srgbClr val="6C757D"/>
+              </a:buClr>
+              <a:spcBef>
+                <a:spcPts val="0"/>
+              </a:spcBef>
+              <a:spcAft>
+                <a:spcPts val="0"/>
+              </a:spcAft>
+              <a:buSzPts val="1400"/>
+              <a:buChar char="○"/>
+            </a:pPr>
+            <a:r>
+              <a:rPr lang="en" sz="1400">
+                <a:solidFill>
+                  <a:srgbClr val="6C757D"/>
+                </a:solidFill>
+              </a:rPr>
+              <a:t>Keys are hardwired to what they do</a:t>
+            </a:r>
+            <a:endParaRPr/>
+          </a:p>
+          <a:p>
+            <a:pPr indent="-330200" lvl="0" marL="457200" rtl="0" algn="l">
+              <a:buClr>
+                <a:srgbClr val="DEE2E6"/>
+              </a:buClr>
+              <a:spcBef>
+                <a:spcPts val="0"/>
+              </a:spcBef>
+              <a:spcAft>
+                <a:spcPts val="0"/>
+              </a:spcAft>
+              <a:buSzPts val="1600"/>
+              <a:buChar char="●"/>
+            </a:pPr>
+            <a:r>
+              <a:rPr lang="en" sz="1600">
+                <a:solidFill>
+                  <a:srgbClr val="DEE2E6"/>
+                </a:solidFill>
+              </a:rPr>
+              <a:t>A GameController maps keys to actions</a:t>
+            </a:r>
+            <a:endParaRPr/>
+          </a:p>
+          <a:p>
+            <a:pPr indent="-317500" lvl="1" marL="914400" rtl="0" algn="l">
+              <a:buClr>
+                <a:srgbClr val="6C757D"/>
+              </a:buClr>
+              <a:spcBef>
+                <a:spcPts val="0"/>
+              </a:spcBef>
+              <a:spcAft>
+                <a:spcPts val="0"/>
+              </a:spcAft>
+              <a:buSzPts val="1400"/>
+              <a:buChar char="○"/>
+            </a:pPr>
+            <a:r>
+              <a:rPr lang="en" sz="1400">
+                <a:solidFill>
+                  <a:srgbClr val="6C757D"/>
+                </a:solidFill>
+              </a:rPr>
+              <a:t>The game asks for “up”, never for W</a:t>
+            </a:r>
+            <a:endParaRPr/>
+          </a:p>
+          <a:p>
+            <a:pPr indent="-317500" lvl="1" marL="914400" rtl="0" algn="l">
+              <a:buClr>
+                <a:srgbClr val="6C757D"/>
+              </a:buClr>
+              <a:spcBef>
+                <a:spcPts val="0"/>
+              </a:spcBef>
+              <a:spcAft>
+                <a:spcPts val="0"/>
+              </a:spcAft>
+              <a:buSzPts val="1400"/>
+              <a:buChar char="○"/>
+            </a:pPr>
+            <a:r>
+              <a:rPr lang="en" sz="1400">
+                <a:solidFill>
+                  <a:srgbClr val="6C757D"/>
+                </a:solidFill>
+              </a:rPr>
+              <a:t>The controls live in one place</a:t>
+            </a:r>
+            <a:endParaRPr/>
+          </a:p>
+          <a:p>
+            <a:pPr indent="-330200" lvl="0" marL="457200" rtl="0" algn="l">
+              <a:buClr>
+                <a:srgbClr val="DEE2E6"/>
+              </a:buClr>
+              <a:spcBef>
+                <a:spcPts val="0"/>
+              </a:spcBef>
+              <a:spcAft>
+                <a:spcPts val="0"/>
+              </a:spcAft>
+              <a:buSzPts val="1600"/>
+              <a:buChar char="●"/>
+            </a:pPr>
+            <a:r>
+              <a:rPr lang="en" sz="1600">
+                <a:solidFill>
+                  <a:srgbClr val="DEE2E6"/>
+                </a:solidFill>
+              </a:rPr>
+              <a:t>Sokoban goes one step further: actions become objects</a:t>
+            </a:r>
+            <a:endParaRPr/>
+          </a:p>
+        </p:txBody>
+      </p:sp>
+      <p:sp>
+        <p:nvSpPr>
+          <p:cNvPr id="141" name="Google Shape;141;p23"/>
+          <p:cNvSpPr txBox="1"/>
+          <p:nvPr>
+            <p:ph idx="2" type="body"/>
+          </p:nvPr>
+        </p:nvSpPr>
+        <p:spPr>
+          <a:xfrm>
+            <a:off x="4150000" y="1152475"/>
+            <a:ext cx="4750000" cy="3600000"/>
+          </a:xfrm>
+          <a:prstGeom prst="rect">
+            <a:avLst/>
+          </a:prstGeom>
+        </p:spPr>
+        <p:txBody>
+          <a:bodyPr anchorCtr="0" anchor="t" bIns="91425" lIns="91425" spcFirstLastPara="1" rIns="91425" wrap="square" tIns="91425">
+            <a:noAutofit/>
+          </a:bodyPr>
+          <a:lstStyle/>
+          <a:p>
+            <a:pPr indent="0" lvl="0" marL="0" rtl="0" algn="l">
+              <a:lnSpc>
+                <a:spcPct val="115000"/>
+              </a:lnSpc>
+              <a:spcBef>
+                <a:spcPts val="0"/>
+              </a:spcBef>
+              <a:spcAft>
+                <a:spcPts val="0"/>
+              </a:spcAft>
+              <a:buNone/>
+            </a:pPr>
+            <a:r>
+              <a:rPr lang="en" sz="1000">
+                <a:highlight>
+                  <a:schemeClr val="dk2"/>
+                </a:highlight>
+                <a:latin typeface="Consolas"/>
+                <a:ea typeface="Consolas"/>
+                <a:cs typeface="Consolas"/>
+                <a:sym typeface="Consolas"/>
+              </a:rPr>
+              <a:t>public static class GameController</a:t>
+            </a:r>
+            <a:endParaRPr sz="1000">
+              <a:solidFill>
+                <a:srgbClr val="CCCCCC"/>
+              </a:solidFill>
+              <a:highlight>
+                <a:schemeClr val="dk2"/>
+              </a:highlight>
+              <a:latin typeface="Consolas"/>
+              <a:ea typeface="Consolas"/>
+              <a:cs typeface="Consolas"/>
+              <a:sym typeface="Consolas"/>
+            </a:endParaRPr>
+          </a:p>
+          <a:p>
+            <a:pPr indent="0" lvl="0" marL="0" rtl="0" algn="l">
+              <a:lnSpc>
+                <a:spcPct val="115000"/>
+              </a:lnSpc>
+              <a:spcBef>
+                <a:spcPts val="0"/>
+              </a:spcBef>
+              <a:spcAft>
+                <a:spcPts val="0"/>
+              </a:spcAft>
+              <a:buNone/>
+            </a:pPr>
+            <a:r>
+              <a:rPr lang="en" sz="1000">
+                <a:highlight>
+                  <a:schemeClr val="dk2"/>
+                </a:highlight>
+                <a:latin typeface="Consolas"/>
+                <a:ea typeface="Consolas"/>
+                <a:cs typeface="Consolas"/>
+                <a:sym typeface="Consolas"/>
+              </a:rPr>
+              <a:t>{</a:t>
+            </a:r>
+            <a:endParaRPr sz="1000">
+              <a:solidFill>
+                <a:srgbClr val="CCCCCC"/>
+              </a:solidFill>
+              <a:highlight>
+                <a:schemeClr val="dk2"/>
+              </a:highlight>
+              <a:latin typeface="Consolas"/>
+              <a:ea typeface="Consolas"/>
+              <a:cs typeface="Consolas"/>
+              <a:sym typeface="Consolas"/>
+            </a:endParaRPr>
+          </a:p>
+          <a:p>
+            <a:pPr indent="0" lvl="0" marL="0" rtl="0" algn="l">
+              <a:lnSpc>
+                <a:spcPct val="115000"/>
+              </a:lnSpc>
+              <a:spcBef>
+                <a:spcPts val="0"/>
+              </a:spcBef>
+              <a:spcAft>
+                <a:spcPts val="0"/>
+              </a:spcAft>
+              <a:buNone/>
+            </a:pPr>
+            <a:r>
+              <a:rPr lang="en" sz="1000">
+                <a:highlight>
+                  <a:schemeClr val="dk2"/>
+                </a:highlight>
+                <a:latin typeface="Consolas"/>
+                <a:ea typeface="Consolas"/>
+                <a:cs typeface="Consolas"/>
+                <a:sym typeface="Consolas"/>
+              </a:rPr>
+              <a:t>    public static bool Up =&gt;</a:t>
+            </a:r>
+            <a:endParaRPr sz="1000">
+              <a:solidFill>
+                <a:srgbClr val="CCCCCC"/>
+              </a:solidFill>
+              <a:highlight>
+                <a:schemeClr val="dk2"/>
+              </a:highlight>
+              <a:latin typeface="Consolas"/>
+              <a:ea typeface="Consolas"/>
+              <a:cs typeface="Consolas"/>
+              <a:sym typeface="Consolas"/>
+            </a:endParaRPr>
+          </a:p>
+          <a:p>
+            <a:pPr indent="0" lvl="0" marL="0" rtl="0" algn="l">
+              <a:lnSpc>
+                <a:spcPct val="115000"/>
+              </a:lnSpc>
+              <a:spcBef>
+                <a:spcPts val="0"/>
+              </a:spcBef>
+              <a:spcAft>
+                <a:spcPts val="0"/>
+              </a:spcAft>
+              <a:buNone/>
+            </a:pPr>
+            <a:r>
+              <a:rPr lang="en" sz="1000">
+                <a:highlight>
+                  <a:schemeClr val="dk2"/>
+                </a:highlight>
+                <a:latin typeface="Consolas"/>
+                <a:ea typeface="Consolas"/>
+                <a:cs typeface="Consolas"/>
+                <a:sym typeface="Consolas"/>
+              </a:rPr>
+              <a:t>        WasPressed(Keys.W) ||</a:t>
+            </a:r>
+            <a:endParaRPr sz="1000">
+              <a:solidFill>
+                <a:srgbClr val="CCCCCC"/>
+              </a:solidFill>
+              <a:highlight>
+                <a:schemeClr val="dk2"/>
+              </a:highlight>
+              <a:latin typeface="Consolas"/>
+              <a:ea typeface="Consolas"/>
+              <a:cs typeface="Consolas"/>
+              <a:sym typeface="Consolas"/>
+            </a:endParaRPr>
+          </a:p>
+          <a:p>
+            <a:pPr indent="0" lvl="0" marL="0" rtl="0" algn="l">
+              <a:lnSpc>
+                <a:spcPct val="115000"/>
+              </a:lnSpc>
+              <a:spcBef>
+                <a:spcPts val="0"/>
+              </a:spcBef>
+              <a:spcAft>
+                <a:spcPts val="0"/>
+              </a:spcAft>
+              <a:buNone/>
+            </a:pPr>
+            <a:r>
+              <a:rPr lang="en" sz="1000">
+                <a:highlight>
+                  <a:schemeClr val="dk2"/>
+                </a:highlight>
+                <a:latin typeface="Consolas"/>
+                <a:ea typeface="Consolas"/>
+                <a:cs typeface="Consolas"/>
+                <a:sym typeface="Consolas"/>
+              </a:rPr>
+              <a:t>        WasPressed(Keys.Up);</a:t>
+            </a:r>
+            <a:endParaRPr sz="1000">
+              <a:solidFill>
+                <a:srgbClr val="CCCCCC"/>
+              </a:solidFill>
+              <a:highlight>
+                <a:schemeClr val="dk2"/>
+              </a:highlight>
+              <a:latin typeface="Consolas"/>
+              <a:ea typeface="Consolas"/>
+              <a:cs typeface="Consolas"/>
+              <a:sym typeface="Consolas"/>
+            </a:endParaRPr>
+          </a:p>
+          <a:p>
+            <a:pPr indent="0" lvl="0" marL="0" rtl="0" algn="l">
+              <a:lnSpc>
+                <a:spcPct val="115000"/>
+              </a:lnSpc>
+              <a:spcBef>
+                <a:spcPts val="0"/>
+              </a:spcBef>
+              <a:spcAft>
+                <a:spcPts val="0"/>
+              </a:spcAft>
+              <a:buNone/>
+            </a:pPr>
+            <a:r>
+              <a:rPr lang="en" sz="1000">
+                <a:highlight>
+                  <a:schemeClr val="dk2"/>
+                </a:highlight>
+                <a:latin typeface="Consolas"/>
+                <a:ea typeface="Consolas"/>
+                <a:cs typeface="Consolas"/>
+                <a:sym typeface="Consolas"/>
+              </a:rPr>
+              <a:t>    // Down, Left, Right...</a:t>
+            </a:r>
+            <a:endParaRPr sz="1000">
+              <a:solidFill>
+                <a:srgbClr val="CCCCCC"/>
+              </a:solidFill>
+              <a:highlight>
+                <a:schemeClr val="dk2"/>
+              </a:highlight>
+              <a:latin typeface="Consolas"/>
+              <a:ea typeface="Consolas"/>
+              <a:cs typeface="Consolas"/>
+              <a:sym typeface="Consolas"/>
+            </a:endParaRPr>
+          </a:p>
+          <a:p>
+            <a:pPr indent="0" lvl="0" marL="0" rtl="0" algn="l">
+              <a:lnSpc>
+                <a:spcPct val="115000"/>
+              </a:lnSpc>
+              <a:spcBef>
+                <a:spcPts val="0"/>
+              </a:spcBef>
+              <a:spcAft>
+                <a:spcPts val="0"/>
+              </a:spcAft>
+              <a:buNone/>
+            </a:pPr>
+            <a:r>
+              <a:rPr lang="en" sz="1000">
+                <a:highlight>
+                  <a:schemeClr val="dk2"/>
+                </a:highlight>
+                <a:latin typeface="Consolas"/>
+                <a:ea typeface="Consolas"/>
+                <a:cs typeface="Consolas"/>
+                <a:sym typeface="Consolas"/>
+              </a:rPr>
+              <a:t>}</a:t>
+            </a:r>
+            <a:endParaRPr sz="1000">
+              <a:solidFill>
+                <a:srgbClr val="CCCCCC"/>
+              </a:solidFill>
+              <a:highlight>
+                <a:schemeClr val="dk2"/>
+              </a:highlight>
+              <a:latin typeface="Consolas"/>
+              <a:ea typeface="Consolas"/>
+              <a:cs typeface="Consolas"/>
+              <a:sym typeface="Consolas"/>
+            </a:endParaRPr>
+          </a:p>
+          <a:p>
+            <a:pPr indent="0" lvl="0" marL="0" rtl="0" algn="l">
+              <a:lnSpc>
+                <a:spcPct val="115000"/>
+              </a:lnSpc>
+              <a:spcBef>
+                <a:spcPts val="0"/>
+              </a:spcBef>
+              <a:spcAft>
+                <a:spcPts val="0"/>
+              </a:spcAft>
+              <a:buNone/>
+            </a:pPr>
+            <a:r>
+              <a:rPr lang="en" sz="1000">
+                <a:highlight>
+                  <a:schemeClr val="dk2"/>
+                </a:highlight>
+                <a:latin typeface="Consolas"/>
+                <a:ea typeface="Consolas"/>
+                <a:cs typeface="Consolas"/>
+                <a:sym typeface="Consolas"/>
+              </a:rPr>
+              <a:t/>
+            </a:r>
+            <a:endParaRPr sz="1000">
+              <a:solidFill>
+                <a:srgbClr val="CCCCCC"/>
+              </a:solidFill>
+              <a:highlight>
+                <a:schemeClr val="dk2"/>
+              </a:highlight>
+              <a:latin typeface="Consolas"/>
+              <a:ea typeface="Consolas"/>
+              <a:cs typeface="Consolas"/>
+              <a:sym typeface="Consolas"/>
+            </a:endParaRPr>
+          </a:p>
+          <a:p>
+            <a:pPr indent="0" lvl="0" marL="0" rtl="0" algn="l">
+              <a:lnSpc>
+                <a:spcPct val="115000"/>
+              </a:lnSpc>
+              <a:spcBef>
+                <a:spcPts val="0"/>
+              </a:spcBef>
+              <a:spcAft>
+                <a:spcPts val="0"/>
+              </a:spcAft>
+              <a:buNone/>
+            </a:pPr>
+            <a:r>
+              <a:rPr lang="en" sz="1000">
+                <a:highlight>
+                  <a:schemeClr val="dk2"/>
+                </a:highlight>
+                <a:latin typeface="Consolas"/>
+                <a:ea typeface="Consolas"/>
+                <a:cs typeface="Consolas"/>
+                <a:sym typeface="Consolas"/>
+              </a:rPr>
+              <a:t>// In the game</a:t>
+            </a:r>
+            <a:endParaRPr sz="1000">
+              <a:solidFill>
+                <a:srgbClr val="CCCCCC"/>
+              </a:solidFill>
+              <a:highlight>
+                <a:schemeClr val="dk2"/>
+              </a:highlight>
+              <a:latin typeface="Consolas"/>
+              <a:ea typeface="Consolas"/>
+              <a:cs typeface="Consolas"/>
+              <a:sym typeface="Consolas"/>
+            </a:endParaRPr>
+          </a:p>
+          <a:p>
+            <a:pPr indent="0" lvl="0" marL="0" rtl="0" algn="l">
+              <a:lnSpc>
+                <a:spcPct val="115000"/>
+              </a:lnSpc>
+              <a:spcBef>
+                <a:spcPts val="0"/>
+              </a:spcBef>
+              <a:spcAft>
+                <a:spcPts val="0"/>
+              </a:spcAft>
+              <a:buNone/>
+            </a:pPr>
+            <a:r>
+              <a:rPr lang="en" sz="1000">
+                <a:highlight>
+                  <a:schemeClr val="dk2"/>
+                </a:highlight>
+                <a:latin typeface="Consolas"/>
+                <a:ea typeface="Consolas"/>
+                <a:cs typeface="Consolas"/>
+                <a:sym typeface="Consolas"/>
+              </a:rPr>
+              <a:t>if (GameController.Up)</a:t>
+            </a:r>
+            <a:endParaRPr sz="1000">
+              <a:solidFill>
+                <a:srgbClr val="CCCCCC"/>
+              </a:solidFill>
+              <a:highlight>
+                <a:schemeClr val="dk2"/>
+              </a:highlight>
+              <a:latin typeface="Consolas"/>
+              <a:ea typeface="Consolas"/>
+              <a:cs typeface="Consolas"/>
+              <a:sym typeface="Consolas"/>
+            </a:endParaRPr>
+          </a:p>
+          <a:p>
+            <a:pPr indent="0" lvl="0" marL="0" rtl="0" algn="l">
+              <a:lnSpc>
+                <a:spcPct val="115000"/>
+              </a:lnSpc>
+              <a:spcBef>
+                <a:spcPts val="0"/>
+              </a:spcBef>
+              <a:spcAft>
+                <a:spcPts val="0"/>
+              </a:spcAft>
+              <a:buNone/>
+            </a:pPr>
+            <a:r>
+              <a:rPr lang="en" sz="1000">
+                <a:highlight>
+                  <a:schemeClr val="dk2"/>
+                </a:highlight>
+                <a:latin typeface="Consolas"/>
+                <a:ea typeface="Consolas"/>
+                <a:cs typeface="Consolas"/>
+                <a:sym typeface="Consolas"/>
+              </a:rPr>
+              <a:t>    _snake.Turn(Direction.Up);</a:t>
+            </a:r>
+            <a:endParaRPr sz="1000">
+              <a:solidFill>
+                <a:srgbClr val="CCCCCC"/>
+              </a:solidFill>
+              <a:highlight>
+                <a:schemeClr val="dk2"/>
+              </a:highlight>
+              <a:latin typeface="Consolas"/>
+              <a:ea typeface="Consolas"/>
+              <a:cs typeface="Consolas"/>
+              <a:sym typeface="Consolas"/>
+            </a:endParaRPr>
+          </a:p>
+        </p:txBody>
+      </p:sp>
+    </p:spTree>
+  </p:cSld>
+  <p:clrMapOvr>
+    <a:masterClrMapping/>
+  </p:clrMapOvr>
+</p:sld>
+</file>
+
+<file path=ppt/slides/slide21.xml><?xml version="1.0" encoding="utf-8"?>
+<p:sld xmlns:a="http://schemas.openxmlformats.org/drawingml/2006/main" xmlns:p="http://schemas.openxmlformats.org/presentationml/2006/main" xmlns:r="http://schemas.openxmlformats.org/officeDocument/2006/relationships">
+  <p:cSld>
+    <p:spTree>
+      <p:nvGrpSpPr>
+        <p:cNvPr id="1" name=""/>
+        <p:cNvGrpSpPr/>
+        <p:nvPr/>
+      </p:nvGrpSpPr>
+      <p:grpSpPr/>
+      <p:sp>
+        <p:nvSpPr>
+          <p:cNvPr id="293" name="Google Shape;293;p45"/>
+          <p:cNvSpPr txBox="1"/>
+          <p:nvPr>
+            <p:ph type="title"/>
+          </p:nvPr>
+        </p:nvSpPr>
+        <p:spPr>
+          <a:xfrm>
+            <a:off x="311700" y="195615"/>
+            <a:ext cx="8520600" cy="572700"/>
+          </a:xfrm>
+          <a:prstGeom prst="rect">
+            <a:avLst/>
+          </a:prstGeom>
+        </p:spPr>
+        <p:txBody>
+          <a:bodyPr anchorCtr="0" anchor="t" bIns="91425" lIns="91425" spcFirstLastPara="1" rIns="91425" wrap="square" tIns="91425">
+            <a:normAutofit fontScale="90000"/>
+          </a:bodyPr>
+          <a:lstStyle/>
+          <a:p>
+            <a:pPr indent="0" lvl="0" marL="0" rtl="0" algn="l">
+              <a:spcBef>
+                <a:spcPts val="0"/>
+              </a:spcBef>
+              <a:spcAft>
+                <a:spcPts val="0"/>
+              </a:spcAft>
+              <a:buNone/>
+            </a:pPr>
+            <a:r>
+              <a:rPr lang="en">
+                <a:solidFill>
+                  <a:schemeClr val="accent5"/>
+                </a:solidFill>
+              </a:rPr>
+              <a:t>Input Buffering</a:t>
+            </a:r>
+            <a:endParaRPr>
+              <a:solidFill>
+                <a:schemeClr val="accent5"/>
+              </a:solidFill>
+            </a:endParaRPr>
+          </a:p>
+        </p:txBody>
+      </p:sp>
+      <p:sp>
+        <p:nvSpPr>
+          <p:cNvPr id="294" name="Google Shape;294;p45"/>
+          <p:cNvSpPr txBox="1"/>
+          <p:nvPr>
+            <p:ph idx="1" type="body"/>
+          </p:nvPr>
+        </p:nvSpPr>
+        <p:spPr>
+          <a:xfrm>
+            <a:off x="311700" y="885950"/>
+            <a:ext cx="8520600" cy="4023300"/>
+          </a:xfrm>
+          <a:prstGeom prst="rect">
+            <a:avLst/>
+          </a:prstGeom>
+        </p:spPr>
+        <p:txBody>
+          <a:bodyPr anchorCtr="0" anchor="t" bIns="91425" lIns="91425" spcFirstLastPara="1" rIns="91425" wrap="square" tIns="91425">
+            <a:normAutofit/>
+          </a:bodyPr>
+          <a:lstStyle/>
+          <a:p>
+            <a:pPr indent="-330200" lvl="0" marL="457200" rtl="0" algn="l">
+              <a:spcBef>
+                <a:spcPts val="0"/>
+              </a:spcBef>
+              <a:spcAft>
+                <a:spcPts val="0"/>
+              </a:spcAft>
+              <a:buSzPts val="1600"/>
+              <a:buChar char="●"/>
+            </a:pPr>
+            <a:r>
+              <a:rPr lang="en"/>
+              <a:t>Input happens every frame, but the snake acts on a tick</a:t>
+            </a:r>
+            <a:endParaRPr/>
+          </a:p>
+          <a:p>
+            <a:pPr indent="-317500" lvl="1" marL="914400" rtl="0" algn="l">
+              <a:spcBef>
+                <a:spcPts val="0"/>
+              </a:spcBef>
+              <a:spcAft>
+                <a:spcPts val="0"/>
+              </a:spcAft>
+              <a:buSzPts val="1400"/>
+              <a:buChar char="○"/>
+            </a:pPr>
+            <a:r>
+              <a:rPr lang="en"/>
+              <a:t>Up, then Left between two ticks: the second press overwrites the first</a:t>
+            </a:r>
+            <a:endParaRPr/>
+          </a:p>
+          <a:p>
+            <a:pPr indent="-330200" lvl="0" marL="457200" rtl="0" algn="l">
+              <a:spcBef>
+                <a:spcPts val="0"/>
+              </a:spcBef>
+              <a:spcAft>
+                <a:spcPts val="0"/>
+              </a:spcAft>
+              <a:buSzPts val="1600"/>
+              <a:buChar char="●"/>
+            </a:pPr>
+            <a:r>
+              <a:rPr lang="en"/>
+              <a:t>Queue the turns, and use one per tick</a:t>
+            </a:r>
+            <a:endParaRPr/>
+          </a:p>
+          <a:p>
+            <a:pPr indent="-317500" lvl="1" marL="914400" rtl="0" algn="l">
+              <a:spcBef>
+                <a:spcPts val="0"/>
+              </a:spcBef>
+              <a:spcAft>
+                <a:spcPts val="0"/>
+              </a:spcAft>
+              <a:buSzPts val="1400"/>
+              <a:buChar char="○"/>
+            </a:pPr>
+            <a:r>
+              <a:rPr lang="en"/>
+              <a:t>Check each turn against the last queued direction</a:t>
+            </a:r>
+            <a:endParaRPr/>
+          </a:p>
+          <a:p>
+            <a:pPr indent="-317500" lvl="1" marL="914400" rtl="0" algn="l">
+              <a:spcBef>
+                <a:spcPts val="0"/>
+              </a:spcBef>
+              <a:spcAft>
+                <a:spcPts val="0"/>
+              </a:spcAft>
+              <a:buSzPts val="1400"/>
+              <a:buChar char="○"/>
+            </a:pPr>
+            <a:r>
+              <a:rPr lang="en"/>
+              <a:t>Keep the queue short: two turns</a:t>
+            </a:r>
+            <a:endParaRPr/>
+          </a:p>
+          <a:p>
+            <a:pPr indent="-330200" lvl="0" marL="457200" rtl="0" algn="l">
+              <a:spcBef>
+                <a:spcPts val="0"/>
+              </a:spcBef>
+              <a:spcAft>
+                <a:spcPts val="0"/>
+              </a:spcAft>
+              <a:buSzPts val="1600"/>
+              <a:buChar char="●"/>
+            </a:pPr>
+            <a:r>
+              <a:rPr lang="en"/>
+              <a:t>Common in games: a jump pressed just before landing still counts</a:t>
+            </a:r>
+            <a:endParaRPr/>
+          </a:p>
+        </p:txBody>
+      </p:sp>
+    </p:spTree>
+  </p:cSld>
+  <p:clrMapOvr>
+    <a:masterClrMapping/>
+  </p:clrMapOvr>
+</p:sld>
+</file>
+
+<file path=ppt/slides/slide22.xml><?xml version="1.0" encoding="utf-8"?>
+<p:sld xmlns:a="http://schemas.openxmlformats.org/drawingml/2006/main" xmlns:p="http://schemas.openxmlformats.org/presentationml/2006/main" xmlns:r="http://schemas.openxmlformats.org/officeDocument/2006/relationships">
+  <p:cSld>
+    <p:spTree>
+      <p:nvGrpSpPr>
+        <p:cNvPr id="1" name=""/>
+        <p:cNvGrpSpPr/>
+        <p:nvPr/>
+      </p:nvGrpSpPr>
+      <p:grpSpPr/>
+      <p:sp>
+        <p:nvSpPr>
+          <p:cNvPr id="128" name="Google Shape;128;p21"/>
+          <p:cNvSpPr txBox="1"/>
+          <p:nvPr>
+            <p:ph type="title"/>
+          </p:nvPr>
+        </p:nvSpPr>
+        <p:spPr>
+          <a:xfrm>
+            <a:off x="311700" y="195615"/>
+            <a:ext cx="8520600" cy="572700"/>
+          </a:xfrm>
+          <a:prstGeom prst="rect">
+            <a:avLst/>
+          </a:prstGeom>
+        </p:spPr>
+        <p:txBody>
+          <a:bodyPr anchorCtr="0" anchor="t" bIns="91425" lIns="91425" spcFirstLastPara="1" rIns="91425" wrap="square" tIns="91425">
+            <a:normAutofit fontScale="90000"/>
+          </a:bodyPr>
+          <a:lstStyle/>
+          <a:p>
+            <a:pPr indent="0" lvl="0" marL="0" rtl="0" algn="l">
+              <a:spcBef>
+                <a:spcPts val="0"/>
+              </a:spcBef>
+              <a:spcAft>
+                <a:spcPts val="0"/>
+              </a:spcAft>
+              <a:buNone/>
+            </a:pPr>
+            <a:r>
+              <a:rPr lang="en">
+                <a:solidFill>
+                  <a:schemeClr val="accent5"/>
+                </a:solidFill>
+              </a:rPr>
+              <a:t>Movement &amp; Input Implementation</a:t>
+            </a:r>
+            <a:endParaRPr>
+              <a:solidFill>
+                <a:schemeClr val="accent5"/>
+              </a:solidFill>
+            </a:endParaRPr>
+          </a:p>
+        </p:txBody>
+      </p:sp>
+      <p:sp>
+        <p:nvSpPr>
+          <p:cNvPr id="129" name="Google Shape;129;p21"/>
+          <p:cNvSpPr txBox="1"/>
+          <p:nvPr>
+            <p:ph idx="1" type="body"/>
+          </p:nvPr>
+        </p:nvSpPr>
+        <p:spPr>
+          <a:xfrm>
+            <a:off x="311700" y="885950"/>
+            <a:ext cx="8520600" cy="4023300"/>
+          </a:xfrm>
+          <a:prstGeom prst="rect">
+            <a:avLst/>
+          </a:prstGeom>
+        </p:spPr>
+        <p:txBody>
+          <a:bodyPr anchorCtr="0" anchor="ctr" bIns="91425" lIns="91425" spcFirstLastPara="1" rIns="91425" wrap="square" tIns="91425">
+            <a:normAutofit/>
+          </a:bodyPr>
+          <a:lstStyle/>
+          <a:p>
+            <a:pPr indent="0" lvl="0" marL="0" rtl="0" algn="ctr">
+              <a:spcBef>
+                <a:spcPts val="0"/>
+              </a:spcBef>
+              <a:spcAft>
+                <a:spcPts val="1200"/>
+              </a:spcAft>
+              <a:buNone/>
+            </a:pPr>
+            <a:r>
+              <a:rPr lang="en" sz="2900">
+                <a:latin typeface="VT323"/>
+                <a:ea typeface="VT323"/>
+                <a:cs typeface="VT323"/>
+                <a:sym typeface="VT323"/>
+              </a:rPr>
+              <a:t>DEMO!</a:t>
+            </a:r>
+            <a:endParaRPr/>
+          </a:p>
+          <a:p>
+            <a:pPr indent="0" lvl="0" marL="0" rtl="0" algn="ctr">
+              <a:spcBef>
+                <a:spcPts val="0"/>
+              </a:spcBef>
+              <a:spcAft>
+                <a:spcPts val="0"/>
+              </a:spcAft>
+              <a:buNone/>
+            </a:pPr>
+            <a:r>
+              <a:rPr lang="en" sz="1800"/>
+              <a:t>Snake5 → Snake6 → Snake7: ticks, actions and buffering</a:t>
+            </a:r>
+            <a:endParaRPr sz="1800"/>
+          </a:p>
+        </p:txBody>
+      </p:sp>
+    </p:spTree>
+  </p:cSld>
+  <p:clrMapOvr>
+    <a:masterClrMapping/>
+  </p:clrMapOvr>
+</p:sld>
+</file>
+
+<file path=ppt/slides/slide23.xml><?xml version="1.0" encoding="utf-8"?>
 <p:sld xmlns:a="http://schemas.openxmlformats.org/drawingml/2006/main" xmlns:r="http://schemas.openxmlformats.org/officeDocument/2006/relationships" xmlns:mc="http://schemas.openxmlformats.org/markup-compatibility/2006" xmlns:mv="urn:schemas-microsoft-com:mac:vml" xmlns:p="http://schemas.openxmlformats.org/presentationml/2006/main" xmlns:c="http://schemas.openxmlformats.org/drawingml/2006/chart" xmlns:dgm="http://schemas.openxmlformats.org/drawingml/2006/diagram" xmlns:o="urn:schemas-microsoft-com:office:office" xmlns:v="urn:schemas-microsoft-com:vml" xmlns:pvml="urn:schemas-microsoft-com:office:powerpoint" xmlns:com="http://schemas.openxmlformats.org/drawingml/2006/compatibility" xmlns:p14="http://schemas.microsoft.com/office/powerpoint/2010/main" xmlns:p15="http://schemas.microsoft.com/office/powerpoint/2012/main" xmlns:ahyp="http://schemas.microsoft.com/office/drawing/2018/hyperlinkcolor">
   <p:cSld>
     <p:spTree>
@@ -8829,7 +12115,7 @@
 </p:sld>
 </file>
 
-<file path=ppt/slides/slide28.xml><?xml version="1.0" encoding="utf-8"?>
+<file path=ppt/slides/slide24.xml><?xml version="1.0" encoding="utf-8"?>
 <p:sld xmlns:a="http://schemas.openxmlformats.org/drawingml/2006/main" xmlns:r="http://schemas.openxmlformats.org/officeDocument/2006/relationships" xmlns:mc="http://schemas.openxmlformats.org/markup-compatibility/2006" xmlns:mv="urn:schemas-microsoft-com:mac:vml" xmlns:p="http://schemas.openxmlformats.org/presentationml/2006/main" xmlns:c="http://schemas.openxmlformats.org/drawingml/2006/chart" xmlns:dgm="http://schemas.openxmlformats.org/drawingml/2006/diagram" xmlns:o="urn:schemas-microsoft-com:office:office" xmlns:v="urn:schemas-microsoft-com:vml" xmlns:pvml="urn:schemas-microsoft-com:office:powerpoint" xmlns:com="http://schemas.openxmlformats.org/drawingml/2006/compatibility" xmlns:p14="http://schemas.microsoft.com/office/powerpoint/2010/main" xmlns:p15="http://schemas.microsoft.com/office/powerpoint/2012/main" xmlns:ahyp="http://schemas.microsoft.com/office/drawing/2018/hyperlinkcolor">
   <p:cSld>
     <p:spTree>
@@ -9679,6 +12965,7 @@
               <a:buNone/>
             </a:pPr>
             <a:r>
+              <a:rPr/>
               <a:t/>
             </a:r>
             <a:endParaRPr sz="1000">
@@ -9985,6 +13272,7 @@
               <a:buNone/>
             </a:pPr>
             <a:r>
+              <a:rPr/>
               <a:t/>
             </a:r>
             <a:endParaRPr sz="1000">
@@ -10381,6 +13669,7 @@
               <a:buNone/>
             </a:pPr>
             <a:r>
+              <a:rPr/>
               <a:t/>
             </a:r>
             <a:endParaRPr sz="1000">
@@ -10878,7 +14167,7 @@
 </p:sld>
 </file>
 
-<file path=ppt/slides/slide29.xml><?xml version="1.0" encoding="utf-8"?>
+<file path=ppt/slides/slide25.xml><?xml version="1.0" encoding="utf-8"?>
 <p:sld xmlns:a="http://schemas.openxmlformats.org/drawingml/2006/main" xmlns:r="http://schemas.openxmlformats.org/officeDocument/2006/relationships" xmlns:mc="http://schemas.openxmlformats.org/markup-compatibility/2006" xmlns:mv="urn:schemas-microsoft-com:mac:vml" xmlns:p="http://schemas.openxmlformats.org/presentationml/2006/main" xmlns:c="http://schemas.openxmlformats.org/drawingml/2006/chart" xmlns:dgm="http://schemas.openxmlformats.org/drawingml/2006/diagram" xmlns:o="urn:schemas-microsoft-com:office:office" xmlns:v="urn:schemas-microsoft-com:vml" xmlns:pvml="urn:schemas-microsoft-com:office:powerpoint" xmlns:com="http://schemas.openxmlformats.org/drawingml/2006/compatibility" xmlns:p14="http://schemas.microsoft.com/office/powerpoint/2010/main" xmlns:p15="http://schemas.microsoft.com/office/powerpoint/2012/main" xmlns:ahyp="http://schemas.microsoft.com/office/drawing/2018/hyperlinkcolor">
   <p:cSld>
     <p:spTree>
@@ -10978,6 +14267,7 @@
               <a:buNone/>
             </a:pPr>
             <a:r>
+              <a:rPr/>
               <a:t/>
             </a:r>
             <a:endParaRPr>
@@ -11032,6 +14322,7 @@
               <a:buNone/>
             </a:pPr>
             <a:r>
+              <a:rPr/>
               <a:t/>
             </a:r>
             <a:endParaRPr>
@@ -11040,6 +14331,890 @@
               <a:cs typeface="Roboto Light"/>
               <a:sym typeface="Roboto Light"/>
             </a:endParaRPr>
+          </a:p>
+        </p:txBody>
+      </p:sp>
+    </p:spTree>
+  </p:cSld>
+  <p:clrMapOvr>
+    <a:masterClrMapping/>
+  </p:clrMapOvr>
+</p:sld>
+</file>
+
+<file path=ppt/slides/slide26.xml><?xml version="1.0" encoding="utf-8"?>
+<p:sld xmlns:a="http://schemas.openxmlformats.org/drawingml/2006/main" xmlns:r="http://schemas.openxmlformats.org/officeDocument/2006/relationships" xmlns:mc="http://schemas.openxmlformats.org/markup-compatibility/2006" xmlns:mv="urn:schemas-microsoft-com:mac:vml" xmlns:p="http://schemas.openxmlformats.org/presentationml/2006/main" xmlns:c="http://schemas.openxmlformats.org/drawingml/2006/chart" xmlns:dgm="http://schemas.openxmlformats.org/drawingml/2006/diagram" xmlns:o="urn:schemas-microsoft-com:office:office" xmlns:v="urn:schemas-microsoft-com:vml" xmlns:pvml="urn:schemas-microsoft-com:office:powerpoint" xmlns:com="http://schemas.openxmlformats.org/drawingml/2006/compatibility" xmlns:p14="http://schemas.microsoft.com/office/powerpoint/2010/main" xmlns:p15="http://schemas.microsoft.com/office/powerpoint/2012/main" xmlns:ahyp="http://schemas.microsoft.com/office/drawing/2018/hyperlinkcolor">
+  <p:cSld>
+    <p:spTree>
+      <p:nvGrpSpPr>
+        <p:cNvPr id="235" name="Shape 235"/>
+        <p:cNvGrpSpPr/>
+        <p:nvPr/>
+      </p:nvGrpSpPr>
+      <p:grpSpPr>
+        <a:xfrm>
+          <a:off x="0" y="0"/>
+          <a:ext cx="0" cy="0"/>
+          <a:chOff x="0" y="0"/>
+          <a:chExt cx="0" cy="0"/>
+        </a:xfrm>
+      </p:grpSpPr>
+      <p:sp>
+        <p:nvSpPr>
+          <p:cNvPr id="236" name="Google Shape;236;p37"/>
+          <p:cNvSpPr txBox="1"/>
+          <p:nvPr>
+            <p:ph type="title"/>
+          </p:nvPr>
+        </p:nvSpPr>
+        <p:spPr>
+          <a:xfrm>
+            <a:off x="311700" y="195615"/>
+            <a:ext cx="8520600" cy="572700"/>
+          </a:xfrm>
+          <a:prstGeom prst="rect">
+            <a:avLst/>
+          </a:prstGeom>
+        </p:spPr>
+        <p:txBody>
+          <a:bodyPr anchorCtr="0" anchor="t" bIns="91425" lIns="91425" spcFirstLastPara="1" rIns="91425" wrap="square" tIns="91425">
+            <a:normAutofit fontScale="90000"/>
+          </a:bodyPr>
+          <a:lstStyle/>
+          <a:p>
+            <a:pPr indent="0" lvl="0" marL="0" rtl="0" algn="l">
+              <a:spcBef>
+                <a:spcPts val="0"/>
+              </a:spcBef>
+              <a:spcAft>
+                <a:spcPts val="0"/>
+              </a:spcAft>
+              <a:buNone/>
+            </a:pPr>
+            <a:r>
+              <a:rPr lang="en"/>
+              <a:t>Collision Response</a:t>
+            </a:r>
+            <a:endParaRPr/>
+          </a:p>
+        </p:txBody>
+      </p:sp>
+      <p:sp>
+        <p:nvSpPr>
+          <p:cNvPr id="237" name="Google Shape;237;p37"/>
+          <p:cNvSpPr txBox="1"/>
+          <p:nvPr>
+            <p:ph idx="1" type="body"/>
+          </p:nvPr>
+        </p:nvSpPr>
+        <p:spPr>
+          <a:xfrm>
+            <a:off x="311700" y="885950"/>
+            <a:ext cx="8520600" cy="4023300"/>
+          </a:xfrm>
+          <a:prstGeom prst="rect">
+            <a:avLst/>
+          </a:prstGeom>
+        </p:spPr>
+        <p:txBody>
+          <a:bodyPr anchorCtr="0" anchor="t" bIns="91425" lIns="91425" spcFirstLastPara="1" rIns="91425" wrap="square" tIns="91425">
+            <a:normAutofit/>
+          </a:bodyPr>
+          <a:lstStyle/>
+          <a:p>
+            <a:pPr indent="-330200" lvl="0" marL="457200" rtl="0" algn="l">
+              <a:spcBef>
+                <a:spcPts val="0"/>
+              </a:spcBef>
+              <a:spcAft>
+                <a:spcPts val="0"/>
+              </a:spcAft>
+              <a:buSzPts val="1600"/>
+              <a:buChar char="●"/>
+            </a:pPr>
+            <a:r>
+              <a:rPr lang="en"/>
+              <a:t>Blocking to prevent objects from overlapping</a:t>
+            </a:r>
+            <a:endParaRPr/>
+          </a:p>
+          <a:p>
+            <a:pPr indent="-330200" lvl="0" marL="457200" rtl="0" algn="l">
+              <a:spcBef>
+                <a:spcPts val="0"/>
+              </a:spcBef>
+              <a:spcAft>
+                <a:spcPts val="0"/>
+              </a:spcAft>
+              <a:buSzPts val="1600"/>
+              <a:buChar char="●"/>
+            </a:pPr>
+            <a:r>
+              <a:rPr lang="en"/>
+              <a:t>Triggering events when objects collide</a:t>
+            </a:r>
+            <a:endParaRPr/>
+          </a:p>
+          <a:p>
+            <a:pPr indent="-330200" lvl="0" marL="457200" rtl="0" algn="l">
+              <a:spcBef>
+                <a:spcPts val="0"/>
+              </a:spcBef>
+              <a:spcAft>
+                <a:spcPts val="0"/>
+              </a:spcAft>
+              <a:buSzPts val="1600"/>
+              <a:buChar char="●"/>
+            </a:pPr>
+            <a:r>
+              <a:rPr lang="en"/>
+              <a:t>Bouncing to reflect objects off surfaces</a:t>
+            </a:r>
+            <a:endParaRPr/>
+          </a:p>
+        </p:txBody>
+      </p:sp>
+      <p:pic>
+        <p:nvPicPr>
+          <p:cNvPr id="238" name="Google Shape;238;p37"/>
+          <p:cNvPicPr preferRelativeResize="0"/>
+          <p:nvPr/>
+        </p:nvPicPr>
+        <p:blipFill>
+          <a:blip r:embed="rId3">
+            <a:alphaModFix/>
+          </a:blip>
+          <a:stretch>
+            <a:fillRect/>
+          </a:stretch>
+        </p:blipFill>
+        <p:spPr>
+          <a:xfrm>
+            <a:off x="2858937" y="2195425"/>
+            <a:ext cx="3426125" cy="1951300"/>
+          </a:xfrm>
+          <a:prstGeom prst="rect">
+            <a:avLst/>
+          </a:prstGeom>
+          <a:noFill/>
+          <a:ln>
+            <a:noFill/>
+          </a:ln>
+        </p:spPr>
+      </p:pic>
+      <p:sp>
+        <p:nvSpPr>
+          <p:cNvPr id="239" name="Google Shape;239;p37"/>
+          <p:cNvSpPr txBox="1"/>
+          <p:nvPr/>
+        </p:nvSpPr>
+        <p:spPr>
+          <a:xfrm>
+            <a:off x="3894900" y="4363700"/>
+            <a:ext cx="1317300" cy="324000"/>
+          </a:xfrm>
+          <a:prstGeom prst="rect">
+            <a:avLst/>
+          </a:prstGeom>
+          <a:noFill/>
+          <a:ln>
+            <a:noFill/>
+          </a:ln>
+        </p:spPr>
+        <p:txBody>
+          <a:bodyPr anchorCtr="0" anchor="t" bIns="91425" lIns="91425" spcFirstLastPara="1" rIns="91425" wrap="square" tIns="91425">
+            <a:noAutofit/>
+          </a:bodyPr>
+          <a:lstStyle/>
+          <a:p>
+            <a:pPr indent="0" lvl="0" marL="0" rtl="0" algn="l">
+              <a:spcBef>
+                <a:spcPts val="0"/>
+              </a:spcBef>
+              <a:spcAft>
+                <a:spcPts val="0"/>
+              </a:spcAft>
+              <a:buNone/>
+            </a:pPr>
+            <a:r>
+              <a:rPr lang="en" sz="1300" u="sng">
+                <a:solidFill>
+                  <a:srgbClr val="4A86E8"/>
+                </a:solidFill>
+                <a:latin typeface="Roboto"/>
+                <a:ea typeface="Roboto"/>
+                <a:cs typeface="Roboto"/>
+                <a:sym typeface="Roboto"/>
+                <a:hlinkClick r:id="rId4">
+                  <a:extLst>
+                    <a:ext uri="{A12FA001-AC4F-418D-AE19-62706E023703}">
+                      <ahyp:hlinkClr val="tx"/>
+                    </a:ext>
+                  </a:extLst>
+                </a:hlinkClick>
+              </a:rPr>
+              <a:t>Vector2.Reflect</a:t>
+            </a:r>
+            <a:endParaRPr sz="1300">
+              <a:solidFill>
+                <a:srgbClr val="1F1F1F"/>
+              </a:solidFill>
+              <a:latin typeface="Roboto"/>
+              <a:ea typeface="Roboto"/>
+              <a:cs typeface="Roboto"/>
+              <a:sym typeface="Roboto"/>
+            </a:endParaRPr>
+          </a:p>
+        </p:txBody>
+      </p:sp>
+    </p:spTree>
+  </p:cSld>
+  <p:clrMapOvr>
+    <a:masterClrMapping/>
+  </p:clrMapOvr>
+</p:sld>
+</file>
+
+<file path=ppt/slides/slide27.xml><?xml version="1.0" encoding="utf-8"?>
+<p:sld xmlns:a="http://schemas.openxmlformats.org/drawingml/2006/main" xmlns:r="http://schemas.openxmlformats.org/officeDocument/2006/relationships" xmlns:mc="http://schemas.openxmlformats.org/markup-compatibility/2006" xmlns:mv="urn:schemas-microsoft-com:mac:vml" xmlns:p="http://schemas.openxmlformats.org/presentationml/2006/main" xmlns:c="http://schemas.openxmlformats.org/drawingml/2006/chart" xmlns:dgm="http://schemas.openxmlformats.org/drawingml/2006/diagram" xmlns:o="urn:schemas-microsoft-com:office:office" xmlns:v="urn:schemas-microsoft-com:vml" xmlns:pvml="urn:schemas-microsoft-com:office:powerpoint" xmlns:com="http://schemas.openxmlformats.org/drawingml/2006/compatibility" xmlns:p14="http://schemas.microsoft.com/office/powerpoint/2010/main" xmlns:p15="http://schemas.microsoft.com/office/powerpoint/2012/main" xmlns:ahyp="http://schemas.microsoft.com/office/drawing/2018/hyperlinkcolor">
+  <p:cSld>
+    <p:spTree>
+      <p:nvGrpSpPr>
+        <p:cNvPr id="243" name="Shape 243"/>
+        <p:cNvGrpSpPr/>
+        <p:nvPr/>
+      </p:nvGrpSpPr>
+      <p:grpSpPr>
+        <a:xfrm>
+          <a:off x="0" y="0"/>
+          <a:ext cx="0" cy="0"/>
+          <a:chOff x="0" y="0"/>
+          <a:chExt cx="0" cy="0"/>
+        </a:xfrm>
+      </p:grpSpPr>
+      <p:sp>
+        <p:nvSpPr>
+          <p:cNvPr id="244" name="Google Shape;244;p38"/>
+          <p:cNvSpPr txBox="1"/>
+          <p:nvPr>
+            <p:ph type="title"/>
+          </p:nvPr>
+        </p:nvSpPr>
+        <p:spPr>
+          <a:xfrm>
+            <a:off x="311700" y="195615"/>
+            <a:ext cx="8520600" cy="572700"/>
+          </a:xfrm>
+          <a:prstGeom prst="rect">
+            <a:avLst/>
+          </a:prstGeom>
+        </p:spPr>
+        <p:txBody>
+          <a:bodyPr anchorCtr="0" anchor="t" bIns="91425" lIns="91425" spcFirstLastPara="1" rIns="91425" wrap="square" tIns="91425">
+            <a:normAutofit fontScale="90000"/>
+          </a:bodyPr>
+          <a:lstStyle/>
+          <a:p>
+            <a:pPr indent="0" lvl="0" marL="0" rtl="0" algn="l">
+              <a:spcBef>
+                <a:spcPts val="0"/>
+              </a:spcBef>
+              <a:spcAft>
+                <a:spcPts val="0"/>
+              </a:spcAft>
+              <a:buNone/>
+            </a:pPr>
+            <a:r>
+              <a:rPr lang="en"/>
+              <a:t>Optimizing Collision Performance</a:t>
+            </a:r>
+            <a:endParaRPr/>
+          </a:p>
+        </p:txBody>
+      </p:sp>
+      <p:sp>
+        <p:nvSpPr>
+          <p:cNvPr id="245" name="Google Shape;245;p38"/>
+          <p:cNvSpPr txBox="1"/>
+          <p:nvPr>
+            <p:ph idx="1" type="body"/>
+          </p:nvPr>
+        </p:nvSpPr>
+        <p:spPr>
+          <a:xfrm>
+            <a:off x="311700" y="885950"/>
+            <a:ext cx="8520600" cy="1318200"/>
+          </a:xfrm>
+          <a:prstGeom prst="rect">
+            <a:avLst/>
+          </a:prstGeom>
+        </p:spPr>
+        <p:txBody>
+          <a:bodyPr anchorCtr="0" anchor="t" bIns="91425" lIns="91425" spcFirstLastPara="1" rIns="91425" wrap="square" tIns="91425">
+            <a:normAutofit/>
+          </a:bodyPr>
+          <a:lstStyle/>
+          <a:p>
+            <a:pPr indent="-330200" lvl="0" marL="457200" rtl="0" algn="l">
+              <a:spcBef>
+                <a:spcPts val="0"/>
+              </a:spcBef>
+              <a:spcAft>
+                <a:spcPts val="0"/>
+              </a:spcAft>
+              <a:buSzPts val="1600"/>
+              <a:buChar char="●"/>
+            </a:pPr>
+            <a:r>
+              <a:rPr lang="en"/>
+              <a:t>Collision Detection is (often) the most expensive operation in a game engine</a:t>
+            </a:r>
+            <a:endParaRPr/>
+          </a:p>
+          <a:p>
+            <a:pPr indent="-317500" lvl="1" marL="914400" rtl="0" algn="l">
+              <a:spcBef>
+                <a:spcPts val="0"/>
+              </a:spcBef>
+              <a:spcAft>
+                <a:spcPts val="0"/>
+              </a:spcAft>
+              <a:buSzPts val="1400"/>
+              <a:buChar char="○"/>
+            </a:pPr>
+            <a:r>
+              <a:rPr lang="en"/>
+              <a:t>n</a:t>
+            </a:r>
+            <a:r>
+              <a:rPr lang="en"/>
+              <a:t> * (n - 1) / 2</a:t>
+            </a:r>
+            <a:endParaRPr/>
+          </a:p>
+          <a:p>
+            <a:pPr indent="-317500" lvl="1" marL="914400" rtl="0" algn="l">
+              <a:spcBef>
+                <a:spcPts val="0"/>
+              </a:spcBef>
+              <a:spcAft>
+                <a:spcPts val="0"/>
+              </a:spcAft>
+              <a:buSzPts val="1400"/>
+              <a:buChar char="○"/>
+            </a:pPr>
+            <a:r>
+              <a:rPr lang="en"/>
+              <a:t>100 objects =&gt; 100 * 99 / 2 = 4950 collision checks </a:t>
+            </a:r>
+            <a:r>
+              <a:rPr lang="en" u="sng"/>
+              <a:t>every frame</a:t>
+            </a:r>
+            <a:endParaRPr u="sng"/>
+          </a:p>
+          <a:p>
+            <a:pPr indent="-330200" lvl="0" marL="457200" rtl="0" algn="l">
+              <a:spcBef>
+                <a:spcPts val="0"/>
+              </a:spcBef>
+              <a:spcAft>
+                <a:spcPts val="0"/>
+              </a:spcAft>
+              <a:buSzPts val="1600"/>
+              <a:buChar char="●"/>
+            </a:pPr>
+            <a:r>
+              <a:rPr lang="en"/>
+              <a:t>Broad phase &amp; Narrow phase</a:t>
+            </a:r>
+            <a:endParaRPr/>
+          </a:p>
+        </p:txBody>
+      </p:sp>
+      <p:pic>
+        <p:nvPicPr>
+          <p:cNvPr id="246" name="Google Shape;246;p38"/>
+          <p:cNvPicPr preferRelativeResize="0"/>
+          <p:nvPr/>
+        </p:nvPicPr>
+        <p:blipFill>
+          <a:blip r:embed="rId3">
+            <a:alphaModFix/>
+          </a:blip>
+          <a:stretch>
+            <a:fillRect/>
+          </a:stretch>
+        </p:blipFill>
+        <p:spPr>
+          <a:xfrm>
+            <a:off x="698200" y="2359000"/>
+            <a:ext cx="2493568" cy="2632100"/>
+          </a:xfrm>
+          <a:prstGeom prst="rect">
+            <a:avLst/>
+          </a:prstGeom>
+          <a:noFill/>
+          <a:ln>
+            <a:noFill/>
+          </a:ln>
+        </p:spPr>
+      </p:pic>
+      <p:pic>
+        <p:nvPicPr>
+          <p:cNvPr id="247" name="Google Shape;247;p38"/>
+          <p:cNvPicPr preferRelativeResize="0"/>
+          <p:nvPr/>
+        </p:nvPicPr>
+        <p:blipFill>
+          <a:blip r:embed="rId4">
+            <a:alphaModFix/>
+          </a:blip>
+          <a:stretch>
+            <a:fillRect/>
+          </a:stretch>
+        </p:blipFill>
+        <p:spPr>
+          <a:xfrm>
+            <a:off x="3325347" y="2359000"/>
+            <a:ext cx="2493568" cy="2632100"/>
+          </a:xfrm>
+          <a:prstGeom prst="rect">
+            <a:avLst/>
+          </a:prstGeom>
+          <a:noFill/>
+          <a:ln>
+            <a:noFill/>
+          </a:ln>
+        </p:spPr>
+      </p:pic>
+      <p:pic>
+        <p:nvPicPr>
+          <p:cNvPr id="248" name="Google Shape;248;p38"/>
+          <p:cNvPicPr preferRelativeResize="0"/>
+          <p:nvPr/>
+        </p:nvPicPr>
+        <p:blipFill>
+          <a:blip r:embed="rId5">
+            <a:alphaModFix/>
+          </a:blip>
+          <a:stretch>
+            <a:fillRect/>
+          </a:stretch>
+        </p:blipFill>
+        <p:spPr>
+          <a:xfrm>
+            <a:off x="5952495" y="2359000"/>
+            <a:ext cx="2493306" cy="2631823"/>
+          </a:xfrm>
+          <a:prstGeom prst="rect">
+            <a:avLst/>
+          </a:prstGeom>
+          <a:noFill/>
+          <a:ln>
+            <a:noFill/>
+          </a:ln>
+        </p:spPr>
+      </p:pic>
+    </p:spTree>
+  </p:cSld>
+  <p:clrMapOvr>
+    <a:masterClrMapping/>
+  </p:clrMapOvr>
+</p:sld>
+</file>
+
+<file path=ppt/slides/slide28.xml><?xml version="1.0" encoding="utf-8"?>
+<p:sld xmlns:a="http://schemas.openxmlformats.org/drawingml/2006/main" xmlns:r="http://schemas.openxmlformats.org/officeDocument/2006/relationships" xmlns:mc="http://schemas.openxmlformats.org/markup-compatibility/2006" xmlns:mv="urn:schemas-microsoft-com:mac:vml" xmlns:p="http://schemas.openxmlformats.org/presentationml/2006/main" xmlns:c="http://schemas.openxmlformats.org/drawingml/2006/chart" xmlns:dgm="http://schemas.openxmlformats.org/drawingml/2006/diagram" xmlns:o="urn:schemas-microsoft-com:office:office" xmlns:v="urn:schemas-microsoft-com:vml" xmlns:pvml="urn:schemas-microsoft-com:office:powerpoint" xmlns:com="http://schemas.openxmlformats.org/drawingml/2006/compatibility" xmlns:p14="http://schemas.microsoft.com/office/powerpoint/2010/main" xmlns:p15="http://schemas.microsoft.com/office/powerpoint/2012/main" xmlns:ahyp="http://schemas.microsoft.com/office/drawing/2018/hyperlinkcolor">
+  <p:cSld>
+    <p:spTree>
+      <p:nvGrpSpPr>
+        <p:cNvPr id="252" name="Shape 252"/>
+        <p:cNvGrpSpPr/>
+        <p:nvPr/>
+      </p:nvGrpSpPr>
+      <p:grpSpPr>
+        <a:xfrm>
+          <a:off x="0" y="0"/>
+          <a:ext cx="0" cy="0"/>
+          <a:chOff x="0" y="0"/>
+          <a:chExt cx="0" cy="0"/>
+        </a:xfrm>
+      </p:grpSpPr>
+      <p:sp>
+        <p:nvSpPr>
+          <p:cNvPr id="253" name="Google Shape;253;p39"/>
+          <p:cNvSpPr txBox="1"/>
+          <p:nvPr>
+            <p:ph type="title"/>
+          </p:nvPr>
+        </p:nvSpPr>
+        <p:spPr>
+          <a:xfrm>
+            <a:off x="311700" y="195615"/>
+            <a:ext cx="8520600" cy="572700"/>
+          </a:xfrm>
+          <a:prstGeom prst="rect">
+            <a:avLst/>
+          </a:prstGeom>
+        </p:spPr>
+        <p:txBody>
+          <a:bodyPr anchorCtr="0" anchor="t" bIns="91425" lIns="91425" spcFirstLastPara="1" rIns="91425" wrap="square" tIns="91425">
+            <a:normAutofit fontScale="90000"/>
+          </a:bodyPr>
+          <a:lstStyle/>
+          <a:p>
+            <a:pPr indent="0" lvl="0" marL="0" rtl="0" algn="l">
+              <a:spcBef>
+                <a:spcPts val="0"/>
+              </a:spcBef>
+              <a:spcAft>
+                <a:spcPts val="0"/>
+              </a:spcAft>
+              <a:buNone/>
+            </a:pPr>
+            <a:r>
+              <a:rPr lang="en">
+                <a:solidFill>
+                  <a:schemeClr val="accent5"/>
+                </a:solidFill>
+              </a:rPr>
+              <a:t>Refactoring Collisions to GMDCore</a:t>
+            </a:r>
+            <a:endParaRPr>
+              <a:solidFill>
+                <a:schemeClr val="accent5"/>
+              </a:solidFill>
+            </a:endParaRPr>
+          </a:p>
+        </p:txBody>
+      </p:sp>
+      <p:sp>
+        <p:nvSpPr>
+          <p:cNvPr id="254" name="Google Shape;254;p39"/>
+          <p:cNvSpPr txBox="1"/>
+          <p:nvPr>
+            <p:ph idx="1" type="body"/>
+          </p:nvPr>
+        </p:nvSpPr>
+        <p:spPr>
+          <a:xfrm>
+            <a:off x="311700" y="885950"/>
+            <a:ext cx="8520600" cy="4023300"/>
+          </a:xfrm>
+          <a:prstGeom prst="rect">
+            <a:avLst/>
+          </a:prstGeom>
+        </p:spPr>
+        <p:txBody>
+          <a:bodyPr anchorCtr="0" anchor="t" bIns="91425" lIns="91425" spcFirstLastPara="1" rIns="91425" wrap="square" tIns="91425">
+            <a:normAutofit/>
+          </a:bodyPr>
+          <a:lstStyle/>
+          <a:p>
+            <a:pPr indent="-330200" lvl="0" marL="457200" rtl="0" algn="l">
+              <a:spcBef>
+                <a:spcPts val="0"/>
+              </a:spcBef>
+              <a:spcAft>
+                <a:spcPts val="0"/>
+              </a:spcAft>
+              <a:buSzPts val="1600"/>
+              <a:buChar char="●"/>
+            </a:pPr>
+            <a:r>
+              <a:rPr lang="en"/>
+              <a:t>No need to add basic AABB collision detection to our library</a:t>
+            </a:r>
+            <a:endParaRPr/>
+          </a:p>
+          <a:p>
+            <a:pPr indent="-330200" lvl="0" marL="457200" rtl="0" algn="l">
+              <a:spcBef>
+                <a:spcPts val="0"/>
+              </a:spcBef>
+              <a:spcAft>
+                <a:spcPts val="0"/>
+              </a:spcAft>
+              <a:buSzPts val="1600"/>
+              <a:buChar char="●"/>
+            </a:pPr>
+            <a:r>
+              <a:rPr lang="en" u="sng">
+                <a:solidFill>
+                  <a:schemeClr val="hlink"/>
+                </a:solidFill>
+                <a:hlinkClick r:id="rId3"/>
+              </a:rPr>
+              <a:t>Rectangle.Intersects(Rectangle)</a:t>
+            </a:r>
+            <a:endParaRPr/>
+          </a:p>
+          <a:p>
+            <a:pPr indent="-317500" lvl="1" marL="914400" rtl="0" algn="l">
+              <a:spcBef>
+                <a:spcPts val="0"/>
+              </a:spcBef>
+              <a:spcAft>
+                <a:spcPts val="0"/>
+              </a:spcAft>
+              <a:buSzPts val="1400"/>
+              <a:buChar char="○"/>
+            </a:pPr>
+            <a:r>
+              <a:rPr lang="en"/>
+              <a:t>Provided by MonoGame</a:t>
+            </a:r>
+            <a:endParaRPr/>
+          </a:p>
+          <a:p>
+            <a:pPr indent="-304800" lvl="2" marL="1371600" rtl="0" algn="l">
+              <a:spcBef>
+                <a:spcPts val="0"/>
+              </a:spcBef>
+              <a:spcAft>
+                <a:spcPts val="0"/>
+              </a:spcAft>
+              <a:buSzPts val="1200"/>
+              <a:buChar char="■"/>
+            </a:pPr>
+            <a:r>
+              <a:rPr lang="en"/>
+              <a:t>performs an an AABB collision check for us</a:t>
+            </a:r>
+            <a:endParaRPr/>
+          </a:p>
+          <a:p>
+            <a:pPr indent="-330200" lvl="0" marL="457200" rtl="0" algn="l">
+              <a:spcBef>
+                <a:spcPts val="0"/>
+              </a:spcBef>
+              <a:spcAft>
+                <a:spcPts val="0"/>
+              </a:spcAft>
+              <a:buSzPts val="1600"/>
+              <a:buChar char="●"/>
+            </a:pPr>
+            <a:r>
+              <a:rPr lang="en" u="sng">
+                <a:solidFill>
+                  <a:schemeClr val="hlink"/>
+                </a:solidFill>
+                <a:hlinkClick r:id="rId4"/>
+              </a:rPr>
+              <a:t>Rectangle.Contains()</a:t>
+            </a:r>
+            <a:endParaRPr/>
+          </a:p>
+          <a:p>
+            <a:pPr indent="-317500" lvl="1" marL="914400" rtl="0" algn="l">
+              <a:spcBef>
+                <a:spcPts val="0"/>
+              </a:spcBef>
+              <a:spcAft>
+                <a:spcPts val="0"/>
+              </a:spcAft>
+              <a:buSzPts val="1400"/>
+              <a:buChar char="○"/>
+            </a:pPr>
+            <a:r>
+              <a:rPr lang="en"/>
+              <a:t>Checks if Rectangle/Vector2/Point is contained within the Rectangle</a:t>
+            </a:r>
+            <a:endParaRPr/>
+          </a:p>
+          <a:p>
+            <a:pPr indent="-330200" lvl="0" marL="457200" rtl="0" algn="l">
+              <a:spcBef>
+                <a:spcPts val="0"/>
+              </a:spcBef>
+              <a:spcAft>
+                <a:spcPts val="0"/>
+              </a:spcAft>
+              <a:buSzPts val="1600"/>
+              <a:buChar char="●"/>
+            </a:pPr>
+            <a:r>
+              <a:rPr lang="en"/>
+              <a:t>No Circles though</a:t>
+            </a:r>
+            <a:endParaRPr/>
+          </a:p>
+          <a:p>
+            <a:pPr indent="-317500" lvl="1" marL="914400" rtl="0" algn="l">
+              <a:spcBef>
+                <a:spcPts val="0"/>
+              </a:spcBef>
+              <a:spcAft>
+                <a:spcPts val="0"/>
+              </a:spcAft>
+              <a:buSzPts val="1400"/>
+              <a:buChar char="○"/>
+            </a:pPr>
+            <a:r>
+              <a:rPr lang="en"/>
+              <a:t>Add a Circle struct to GMDCore</a:t>
+            </a:r>
+            <a:endParaRPr/>
+          </a:p>
+          <a:p>
+            <a:pPr indent="-317500" lvl="1" marL="914400" rtl="0" algn="l">
+              <a:spcBef>
+                <a:spcPts val="0"/>
+              </a:spcBef>
+              <a:spcAft>
+                <a:spcPts val="0"/>
+              </a:spcAft>
+              <a:buSzPts val="1400"/>
+              <a:buChar char="○"/>
+            </a:pPr>
+            <a:r>
+              <a:rPr lang="en"/>
+              <a:t>Add an Intersects(Ci</a:t>
+            </a:r>
+            <a:r>
+              <a:rPr lang="en"/>
+              <a:t>rcl</a:t>
+            </a:r>
+            <a:r>
+              <a:rPr lang="en"/>
+              <a:t>e) method for other Circles</a:t>
+            </a:r>
+            <a:endParaRPr/>
+          </a:p>
+        </p:txBody>
+      </p:sp>
+    </p:spTree>
+  </p:cSld>
+  <p:clrMapOvr>
+    <a:masterClrMapping/>
+  </p:clrMapOvr>
+</p:sld>
+</file>
+
+<file path=ppt/slides/slide29.xml><?xml version="1.0" encoding="utf-8"?>
+<p:sld xmlns:a="http://schemas.openxmlformats.org/drawingml/2006/main" xmlns:r="http://schemas.openxmlformats.org/officeDocument/2006/relationships" xmlns:mc="http://schemas.openxmlformats.org/markup-compatibility/2006" xmlns:mv="urn:schemas-microsoft-com:mac:vml" xmlns:p="http://schemas.openxmlformats.org/presentationml/2006/main" xmlns:c="http://schemas.openxmlformats.org/drawingml/2006/chart" xmlns:dgm="http://schemas.openxmlformats.org/drawingml/2006/diagram" xmlns:o="urn:schemas-microsoft-com:office:office" xmlns:v="urn:schemas-microsoft-com:vml" xmlns:pvml="urn:schemas-microsoft-com:office:powerpoint" xmlns:com="http://schemas.openxmlformats.org/drawingml/2006/compatibility" xmlns:p14="http://schemas.microsoft.com/office/powerpoint/2010/main" xmlns:p15="http://schemas.microsoft.com/office/powerpoint/2012/main" xmlns:ahyp="http://schemas.microsoft.com/office/drawing/2018/hyperlinkcolor">
+  <p:cSld>
+    <p:spTree>
+      <p:nvGrpSpPr>
+        <p:cNvPr id="258" name="Shape 258"/>
+        <p:cNvGrpSpPr/>
+        <p:nvPr/>
+      </p:nvGrpSpPr>
+      <p:grpSpPr>
+        <a:xfrm>
+          <a:off x="0" y="0"/>
+          <a:ext cx="0" cy="0"/>
+          <a:chOff x="0" y="0"/>
+          <a:chExt cx="0" cy="0"/>
+        </a:xfrm>
+      </p:grpSpPr>
+      <p:sp>
+        <p:nvSpPr>
+          <p:cNvPr id="259" name="Google Shape;259;p40"/>
+          <p:cNvSpPr txBox="1"/>
+          <p:nvPr>
+            <p:ph type="title"/>
+          </p:nvPr>
+        </p:nvSpPr>
+        <p:spPr>
+          <a:xfrm>
+            <a:off x="311700" y="195615"/>
+            <a:ext cx="8520600" cy="572700"/>
+          </a:xfrm>
+          <a:prstGeom prst="rect">
+            <a:avLst/>
+          </a:prstGeom>
+        </p:spPr>
+        <p:txBody>
+          <a:bodyPr anchorCtr="0" anchor="t" bIns="91425" lIns="91425" spcFirstLastPara="1" rIns="91425" wrap="square" tIns="91425">
+            <a:normAutofit fontScale="90000"/>
+          </a:bodyPr>
+          <a:lstStyle/>
+          <a:p>
+            <a:pPr indent="0" lvl="0" marL="0" rtl="0" algn="l">
+              <a:spcBef>
+                <a:spcPts val="0"/>
+              </a:spcBef>
+              <a:spcAft>
+                <a:spcPts val="0"/>
+              </a:spcAft>
+              <a:buNone/>
+            </a:pPr>
+            <a:r>
+              <a:rPr lang="en">
+                <a:solidFill>
+                  <a:schemeClr val="accent5"/>
+                </a:solidFill>
+              </a:rPr>
+              <a:t>Collision Implementation</a:t>
+            </a:r>
+            <a:endParaRPr>
+              <a:solidFill>
+                <a:schemeClr val="accent5"/>
+              </a:solidFill>
+            </a:endParaRPr>
+          </a:p>
+        </p:txBody>
+      </p:sp>
+      <p:sp>
+        <p:nvSpPr>
+          <p:cNvPr id="260" name="Google Shape;260;p40"/>
+          <p:cNvSpPr txBox="1"/>
+          <p:nvPr>
+            <p:ph idx="1" type="body"/>
+          </p:nvPr>
+        </p:nvSpPr>
+        <p:spPr>
+          <a:xfrm>
+            <a:off x="311700" y="885950"/>
+            <a:ext cx="8520600" cy="4023300"/>
+          </a:xfrm>
+          <a:prstGeom prst="rect">
+            <a:avLst/>
+          </a:prstGeom>
+        </p:spPr>
+        <p:txBody>
+          <a:bodyPr anchorCtr="0" anchor="ctr" bIns="91425" lIns="91425" spcFirstLastPara="1" rIns="91425" wrap="square" tIns="91425">
+            <a:normAutofit/>
+          </a:bodyPr>
+          <a:lstStyle/>
+          <a:p>
+            <a:pPr indent="0" lvl="0" marL="0" rtl="0" algn="ctr">
+              <a:spcBef>
+                <a:spcPts val="0"/>
+              </a:spcBef>
+              <a:spcAft>
+                <a:spcPts val="1200"/>
+              </a:spcAft>
+              <a:buNone/>
+            </a:pPr>
+            <a:r>
+              <a:rPr lang="en" sz="2900">
+                <a:latin typeface="VT323"/>
+                <a:ea typeface="VT323"/>
+                <a:cs typeface="VT323"/>
+                <a:sym typeface="VT323"/>
+              </a:rPr>
+              <a:t>DEMO!</a:t>
+            </a:r>
+            <a:endParaRPr/>
+          </a:p>
+          <a:p>
+            <a:pPr indent="0" lvl="0" marL="0" rtl="0" algn="ctr">
+              <a:spcBef>
+                <a:spcPts val="0"/>
+              </a:spcBef>
+              <a:spcAft>
+                <a:spcPts val="0"/>
+              </a:spcAft>
+              <a:buNone/>
+            </a:pPr>
+            <a:r>
+              <a:rPr lang="en" sz="1800"/>
+              <a:t>Snake8 → Snake9: eating, growing and game over</a:t>
+            </a:r>
+            <a:endParaRPr sz="1800"/>
           </a:p>
         </p:txBody>
       </p:sp>
@@ -11501,2368 +15676,6 @@
 </file>
 
 <file path=ppt/slides/slide30.xml><?xml version="1.0" encoding="utf-8"?>
-<p:sld xmlns:a="http://schemas.openxmlformats.org/drawingml/2006/main" xmlns:r="http://schemas.openxmlformats.org/officeDocument/2006/relationships" xmlns:mc="http://schemas.openxmlformats.org/markup-compatibility/2006" xmlns:mv="urn:schemas-microsoft-com:mac:vml" xmlns:p="http://schemas.openxmlformats.org/presentationml/2006/main" xmlns:c="http://schemas.openxmlformats.org/drawingml/2006/chart" xmlns:dgm="http://schemas.openxmlformats.org/drawingml/2006/diagram" xmlns:o="urn:schemas-microsoft-com:office:office" xmlns:v="urn:schemas-microsoft-com:vml" xmlns:pvml="urn:schemas-microsoft-com:office:powerpoint" xmlns:com="http://schemas.openxmlformats.org/drawingml/2006/compatibility" xmlns:p14="http://schemas.microsoft.com/office/powerpoint/2010/main" xmlns:p15="http://schemas.microsoft.com/office/powerpoint/2012/main" xmlns:ahyp="http://schemas.microsoft.com/office/drawing/2018/hyperlinkcolor">
-  <p:cSld>
-    <p:spTree>
-      <p:nvGrpSpPr>
-        <p:cNvPr id="235" name="Shape 235"/>
-        <p:cNvGrpSpPr/>
-        <p:nvPr/>
-      </p:nvGrpSpPr>
-      <p:grpSpPr>
-        <a:xfrm>
-          <a:off x="0" y="0"/>
-          <a:ext cx="0" cy="0"/>
-          <a:chOff x="0" y="0"/>
-          <a:chExt cx="0" cy="0"/>
-        </a:xfrm>
-      </p:grpSpPr>
-      <p:sp>
-        <p:nvSpPr>
-          <p:cNvPr id="236" name="Google Shape;236;p37"/>
-          <p:cNvSpPr txBox="1"/>
-          <p:nvPr>
-            <p:ph type="title"/>
-          </p:nvPr>
-        </p:nvSpPr>
-        <p:spPr>
-          <a:xfrm>
-            <a:off x="311700" y="195615"/>
-            <a:ext cx="8520600" cy="572700"/>
-          </a:xfrm>
-          <a:prstGeom prst="rect">
-            <a:avLst/>
-          </a:prstGeom>
-        </p:spPr>
-        <p:txBody>
-          <a:bodyPr anchorCtr="0" anchor="t" bIns="91425" lIns="91425" spcFirstLastPara="1" rIns="91425" wrap="square" tIns="91425">
-            <a:normAutofit fontScale="90000"/>
-          </a:bodyPr>
-          <a:lstStyle/>
-          <a:p>
-            <a:pPr indent="0" lvl="0" marL="0" rtl="0" algn="l">
-              <a:spcBef>
-                <a:spcPts val="0"/>
-              </a:spcBef>
-              <a:spcAft>
-                <a:spcPts val="0"/>
-              </a:spcAft>
-              <a:buNone/>
-            </a:pPr>
-            <a:r>
-              <a:rPr lang="en"/>
-              <a:t>Collision Response</a:t>
-            </a:r>
-            <a:endParaRPr/>
-          </a:p>
-        </p:txBody>
-      </p:sp>
-      <p:sp>
-        <p:nvSpPr>
-          <p:cNvPr id="237" name="Google Shape;237;p37"/>
-          <p:cNvSpPr txBox="1"/>
-          <p:nvPr>
-            <p:ph idx="1" type="body"/>
-          </p:nvPr>
-        </p:nvSpPr>
-        <p:spPr>
-          <a:xfrm>
-            <a:off x="311700" y="885950"/>
-            <a:ext cx="8520600" cy="4023300"/>
-          </a:xfrm>
-          <a:prstGeom prst="rect">
-            <a:avLst/>
-          </a:prstGeom>
-        </p:spPr>
-        <p:txBody>
-          <a:bodyPr anchorCtr="0" anchor="t" bIns="91425" lIns="91425" spcFirstLastPara="1" rIns="91425" wrap="square" tIns="91425">
-            <a:normAutofit/>
-          </a:bodyPr>
-          <a:lstStyle/>
-          <a:p>
-            <a:pPr indent="-330200" lvl="0" marL="457200" rtl="0" algn="l">
-              <a:spcBef>
-                <a:spcPts val="0"/>
-              </a:spcBef>
-              <a:spcAft>
-                <a:spcPts val="0"/>
-              </a:spcAft>
-              <a:buSzPts val="1600"/>
-              <a:buChar char="●"/>
-            </a:pPr>
-            <a:r>
-              <a:rPr lang="en"/>
-              <a:t>Blocking to prevent objects from overlapping</a:t>
-            </a:r>
-            <a:endParaRPr/>
-          </a:p>
-          <a:p>
-            <a:pPr indent="-330200" lvl="0" marL="457200" rtl="0" algn="l">
-              <a:spcBef>
-                <a:spcPts val="0"/>
-              </a:spcBef>
-              <a:spcAft>
-                <a:spcPts val="0"/>
-              </a:spcAft>
-              <a:buSzPts val="1600"/>
-              <a:buChar char="●"/>
-            </a:pPr>
-            <a:r>
-              <a:rPr lang="en"/>
-              <a:t>Triggering events when objects collide</a:t>
-            </a:r>
-            <a:endParaRPr/>
-          </a:p>
-          <a:p>
-            <a:pPr indent="-330200" lvl="0" marL="457200" rtl="0" algn="l">
-              <a:spcBef>
-                <a:spcPts val="0"/>
-              </a:spcBef>
-              <a:spcAft>
-                <a:spcPts val="0"/>
-              </a:spcAft>
-              <a:buSzPts val="1600"/>
-              <a:buChar char="●"/>
-            </a:pPr>
-            <a:r>
-              <a:rPr lang="en"/>
-              <a:t>Bouncing to reflect objects off surfaces</a:t>
-            </a:r>
-            <a:endParaRPr/>
-          </a:p>
-        </p:txBody>
-      </p:sp>
-      <p:pic>
-        <p:nvPicPr>
-          <p:cNvPr id="238" name="Google Shape;238;p37"/>
-          <p:cNvPicPr preferRelativeResize="0"/>
-          <p:nvPr/>
-        </p:nvPicPr>
-        <p:blipFill>
-          <a:blip r:embed="rId3">
-            <a:alphaModFix/>
-          </a:blip>
-          <a:stretch>
-            <a:fillRect/>
-          </a:stretch>
-        </p:blipFill>
-        <p:spPr>
-          <a:xfrm>
-            <a:off x="2858937" y="2195425"/>
-            <a:ext cx="3426125" cy="1951300"/>
-          </a:xfrm>
-          <a:prstGeom prst="rect">
-            <a:avLst/>
-          </a:prstGeom>
-          <a:noFill/>
-          <a:ln>
-            <a:noFill/>
-          </a:ln>
-        </p:spPr>
-      </p:pic>
-      <p:sp>
-        <p:nvSpPr>
-          <p:cNvPr id="239" name="Google Shape;239;p37"/>
-          <p:cNvSpPr txBox="1"/>
-          <p:nvPr/>
-        </p:nvSpPr>
-        <p:spPr>
-          <a:xfrm>
-            <a:off x="3894900" y="4363700"/>
-            <a:ext cx="1317300" cy="324000"/>
-          </a:xfrm>
-          <a:prstGeom prst="rect">
-            <a:avLst/>
-          </a:prstGeom>
-          <a:noFill/>
-          <a:ln>
-            <a:noFill/>
-          </a:ln>
-        </p:spPr>
-        <p:txBody>
-          <a:bodyPr anchorCtr="0" anchor="t" bIns="91425" lIns="91425" spcFirstLastPara="1" rIns="91425" wrap="square" tIns="91425">
-            <a:noAutofit/>
-          </a:bodyPr>
-          <a:lstStyle/>
-          <a:p>
-            <a:pPr indent="0" lvl="0" marL="0" rtl="0" algn="l">
-              <a:spcBef>
-                <a:spcPts val="0"/>
-              </a:spcBef>
-              <a:spcAft>
-                <a:spcPts val="0"/>
-              </a:spcAft>
-              <a:buNone/>
-            </a:pPr>
-            <a:r>
-              <a:rPr lang="en" sz="1300" u="sng">
-                <a:solidFill>
-                  <a:srgbClr val="4A86E8"/>
-                </a:solidFill>
-                <a:latin typeface="Roboto"/>
-                <a:ea typeface="Roboto"/>
-                <a:cs typeface="Roboto"/>
-                <a:sym typeface="Roboto"/>
-                <a:hlinkClick r:id="rId4">
-                  <a:extLst>
-                    <a:ext uri="{A12FA001-AC4F-418D-AE19-62706E023703}">
-                      <ahyp:hlinkClr val="tx"/>
-                    </a:ext>
-                  </a:extLst>
-                </a:hlinkClick>
-              </a:rPr>
-              <a:t>Vector2.Reflect</a:t>
-            </a:r>
-            <a:endParaRPr sz="1300">
-              <a:solidFill>
-                <a:srgbClr val="1F1F1F"/>
-              </a:solidFill>
-              <a:latin typeface="Roboto"/>
-              <a:ea typeface="Roboto"/>
-              <a:cs typeface="Roboto"/>
-              <a:sym typeface="Roboto"/>
-            </a:endParaRPr>
-          </a:p>
-        </p:txBody>
-      </p:sp>
-    </p:spTree>
-  </p:cSld>
-  <p:clrMapOvr>
-    <a:masterClrMapping/>
-  </p:clrMapOvr>
-</p:sld>
-</file>
-
-<file path=ppt/slides/slide31.xml><?xml version="1.0" encoding="utf-8"?>
-<p:sld xmlns:a="http://schemas.openxmlformats.org/drawingml/2006/main" xmlns:r="http://schemas.openxmlformats.org/officeDocument/2006/relationships" xmlns:mc="http://schemas.openxmlformats.org/markup-compatibility/2006" xmlns:mv="urn:schemas-microsoft-com:mac:vml" xmlns:p="http://schemas.openxmlformats.org/presentationml/2006/main" xmlns:c="http://schemas.openxmlformats.org/drawingml/2006/chart" xmlns:dgm="http://schemas.openxmlformats.org/drawingml/2006/diagram" xmlns:o="urn:schemas-microsoft-com:office:office" xmlns:v="urn:schemas-microsoft-com:vml" xmlns:pvml="urn:schemas-microsoft-com:office:powerpoint" xmlns:com="http://schemas.openxmlformats.org/drawingml/2006/compatibility" xmlns:p14="http://schemas.microsoft.com/office/powerpoint/2010/main" xmlns:p15="http://schemas.microsoft.com/office/powerpoint/2012/main" xmlns:ahyp="http://schemas.microsoft.com/office/drawing/2018/hyperlinkcolor">
-  <p:cSld>
-    <p:spTree>
-      <p:nvGrpSpPr>
-        <p:cNvPr id="243" name="Shape 243"/>
-        <p:cNvGrpSpPr/>
-        <p:nvPr/>
-      </p:nvGrpSpPr>
-      <p:grpSpPr>
-        <a:xfrm>
-          <a:off x="0" y="0"/>
-          <a:ext cx="0" cy="0"/>
-          <a:chOff x="0" y="0"/>
-          <a:chExt cx="0" cy="0"/>
-        </a:xfrm>
-      </p:grpSpPr>
-      <p:sp>
-        <p:nvSpPr>
-          <p:cNvPr id="244" name="Google Shape;244;p38"/>
-          <p:cNvSpPr txBox="1"/>
-          <p:nvPr>
-            <p:ph type="title"/>
-          </p:nvPr>
-        </p:nvSpPr>
-        <p:spPr>
-          <a:xfrm>
-            <a:off x="311700" y="195615"/>
-            <a:ext cx="8520600" cy="572700"/>
-          </a:xfrm>
-          <a:prstGeom prst="rect">
-            <a:avLst/>
-          </a:prstGeom>
-        </p:spPr>
-        <p:txBody>
-          <a:bodyPr anchorCtr="0" anchor="t" bIns="91425" lIns="91425" spcFirstLastPara="1" rIns="91425" wrap="square" tIns="91425">
-            <a:normAutofit fontScale="90000"/>
-          </a:bodyPr>
-          <a:lstStyle/>
-          <a:p>
-            <a:pPr indent="0" lvl="0" marL="0" rtl="0" algn="l">
-              <a:spcBef>
-                <a:spcPts val="0"/>
-              </a:spcBef>
-              <a:spcAft>
-                <a:spcPts val="0"/>
-              </a:spcAft>
-              <a:buNone/>
-            </a:pPr>
-            <a:r>
-              <a:rPr lang="en"/>
-              <a:t>Optimizing Collision Performance</a:t>
-            </a:r>
-            <a:endParaRPr/>
-          </a:p>
-        </p:txBody>
-      </p:sp>
-      <p:sp>
-        <p:nvSpPr>
-          <p:cNvPr id="245" name="Google Shape;245;p38"/>
-          <p:cNvSpPr txBox="1"/>
-          <p:nvPr>
-            <p:ph idx="1" type="body"/>
-          </p:nvPr>
-        </p:nvSpPr>
-        <p:spPr>
-          <a:xfrm>
-            <a:off x="311700" y="885950"/>
-            <a:ext cx="8520600" cy="1318200"/>
-          </a:xfrm>
-          <a:prstGeom prst="rect">
-            <a:avLst/>
-          </a:prstGeom>
-        </p:spPr>
-        <p:txBody>
-          <a:bodyPr anchorCtr="0" anchor="t" bIns="91425" lIns="91425" spcFirstLastPara="1" rIns="91425" wrap="square" tIns="91425">
-            <a:normAutofit/>
-          </a:bodyPr>
-          <a:lstStyle/>
-          <a:p>
-            <a:pPr indent="-330200" lvl="0" marL="457200" rtl="0" algn="l">
-              <a:spcBef>
-                <a:spcPts val="0"/>
-              </a:spcBef>
-              <a:spcAft>
-                <a:spcPts val="0"/>
-              </a:spcAft>
-              <a:buSzPts val="1600"/>
-              <a:buChar char="●"/>
-            </a:pPr>
-            <a:r>
-              <a:rPr lang="en"/>
-              <a:t>Collision Detection is (often) the most expensive operation in a game engine</a:t>
-            </a:r>
-            <a:endParaRPr/>
-          </a:p>
-          <a:p>
-            <a:pPr indent="-317500" lvl="1" marL="914400" rtl="0" algn="l">
-              <a:spcBef>
-                <a:spcPts val="0"/>
-              </a:spcBef>
-              <a:spcAft>
-                <a:spcPts val="0"/>
-              </a:spcAft>
-              <a:buSzPts val="1400"/>
-              <a:buChar char="○"/>
-            </a:pPr>
-            <a:r>
-              <a:rPr lang="en"/>
-              <a:t>n</a:t>
-            </a:r>
-            <a:r>
-              <a:rPr lang="en"/>
-              <a:t> * (n - 1) / 2</a:t>
-            </a:r>
-            <a:endParaRPr/>
-          </a:p>
-          <a:p>
-            <a:pPr indent="-317500" lvl="1" marL="914400" rtl="0" algn="l">
-              <a:spcBef>
-                <a:spcPts val="0"/>
-              </a:spcBef>
-              <a:spcAft>
-                <a:spcPts val="0"/>
-              </a:spcAft>
-              <a:buSzPts val="1400"/>
-              <a:buChar char="○"/>
-            </a:pPr>
-            <a:r>
-              <a:rPr lang="en"/>
-              <a:t>100 objects =&gt; 100 * 99 / 2 = 4950 collision checks </a:t>
-            </a:r>
-            <a:r>
-              <a:rPr lang="en" u="sng"/>
-              <a:t>every frame</a:t>
-            </a:r>
-            <a:endParaRPr u="sng"/>
-          </a:p>
-          <a:p>
-            <a:pPr indent="-330200" lvl="0" marL="457200" rtl="0" algn="l">
-              <a:spcBef>
-                <a:spcPts val="0"/>
-              </a:spcBef>
-              <a:spcAft>
-                <a:spcPts val="0"/>
-              </a:spcAft>
-              <a:buSzPts val="1600"/>
-              <a:buChar char="●"/>
-            </a:pPr>
-            <a:r>
-              <a:rPr lang="en"/>
-              <a:t>Broad phase &amp; Narrow phase</a:t>
-            </a:r>
-            <a:endParaRPr/>
-          </a:p>
-        </p:txBody>
-      </p:sp>
-      <p:pic>
-        <p:nvPicPr>
-          <p:cNvPr id="246" name="Google Shape;246;p38"/>
-          <p:cNvPicPr preferRelativeResize="0"/>
-          <p:nvPr/>
-        </p:nvPicPr>
-        <p:blipFill>
-          <a:blip r:embed="rId3">
-            <a:alphaModFix/>
-          </a:blip>
-          <a:stretch>
-            <a:fillRect/>
-          </a:stretch>
-        </p:blipFill>
-        <p:spPr>
-          <a:xfrm>
-            <a:off x="698200" y="2359000"/>
-            <a:ext cx="2493568" cy="2632100"/>
-          </a:xfrm>
-          <a:prstGeom prst="rect">
-            <a:avLst/>
-          </a:prstGeom>
-          <a:noFill/>
-          <a:ln>
-            <a:noFill/>
-          </a:ln>
-        </p:spPr>
-      </p:pic>
-      <p:pic>
-        <p:nvPicPr>
-          <p:cNvPr id="247" name="Google Shape;247;p38"/>
-          <p:cNvPicPr preferRelativeResize="0"/>
-          <p:nvPr/>
-        </p:nvPicPr>
-        <p:blipFill>
-          <a:blip r:embed="rId4">
-            <a:alphaModFix/>
-          </a:blip>
-          <a:stretch>
-            <a:fillRect/>
-          </a:stretch>
-        </p:blipFill>
-        <p:spPr>
-          <a:xfrm>
-            <a:off x="3325347" y="2359000"/>
-            <a:ext cx="2493568" cy="2632100"/>
-          </a:xfrm>
-          <a:prstGeom prst="rect">
-            <a:avLst/>
-          </a:prstGeom>
-          <a:noFill/>
-          <a:ln>
-            <a:noFill/>
-          </a:ln>
-        </p:spPr>
-      </p:pic>
-      <p:pic>
-        <p:nvPicPr>
-          <p:cNvPr id="248" name="Google Shape;248;p38"/>
-          <p:cNvPicPr preferRelativeResize="0"/>
-          <p:nvPr/>
-        </p:nvPicPr>
-        <p:blipFill>
-          <a:blip r:embed="rId5">
-            <a:alphaModFix/>
-          </a:blip>
-          <a:stretch>
-            <a:fillRect/>
-          </a:stretch>
-        </p:blipFill>
-        <p:spPr>
-          <a:xfrm>
-            <a:off x="5952495" y="2359000"/>
-            <a:ext cx="2493306" cy="2631823"/>
-          </a:xfrm>
-          <a:prstGeom prst="rect">
-            <a:avLst/>
-          </a:prstGeom>
-          <a:noFill/>
-          <a:ln>
-            <a:noFill/>
-          </a:ln>
-        </p:spPr>
-      </p:pic>
-    </p:spTree>
-  </p:cSld>
-  <p:clrMapOvr>
-    <a:masterClrMapping/>
-  </p:clrMapOvr>
-</p:sld>
-</file>
-
-<file path=ppt/slides/slide32.xml><?xml version="1.0" encoding="utf-8"?>
-<p:sld xmlns:a="http://schemas.openxmlformats.org/drawingml/2006/main" xmlns:r="http://schemas.openxmlformats.org/officeDocument/2006/relationships" xmlns:mc="http://schemas.openxmlformats.org/markup-compatibility/2006" xmlns:mv="urn:schemas-microsoft-com:mac:vml" xmlns:p="http://schemas.openxmlformats.org/presentationml/2006/main" xmlns:c="http://schemas.openxmlformats.org/drawingml/2006/chart" xmlns:dgm="http://schemas.openxmlformats.org/drawingml/2006/diagram" xmlns:o="urn:schemas-microsoft-com:office:office" xmlns:v="urn:schemas-microsoft-com:vml" xmlns:pvml="urn:schemas-microsoft-com:office:powerpoint" xmlns:com="http://schemas.openxmlformats.org/drawingml/2006/compatibility" xmlns:p14="http://schemas.microsoft.com/office/powerpoint/2010/main" xmlns:p15="http://schemas.microsoft.com/office/powerpoint/2012/main" xmlns:ahyp="http://schemas.microsoft.com/office/drawing/2018/hyperlinkcolor">
-  <p:cSld>
-    <p:spTree>
-      <p:nvGrpSpPr>
-        <p:cNvPr id="252" name="Shape 252"/>
-        <p:cNvGrpSpPr/>
-        <p:nvPr/>
-      </p:nvGrpSpPr>
-      <p:grpSpPr>
-        <a:xfrm>
-          <a:off x="0" y="0"/>
-          <a:ext cx="0" cy="0"/>
-          <a:chOff x="0" y="0"/>
-          <a:chExt cx="0" cy="0"/>
-        </a:xfrm>
-      </p:grpSpPr>
-      <p:sp>
-        <p:nvSpPr>
-          <p:cNvPr id="253" name="Google Shape;253;p39"/>
-          <p:cNvSpPr txBox="1"/>
-          <p:nvPr>
-            <p:ph type="title"/>
-          </p:nvPr>
-        </p:nvSpPr>
-        <p:spPr>
-          <a:xfrm>
-            <a:off x="311700" y="195615"/>
-            <a:ext cx="8520600" cy="572700"/>
-          </a:xfrm>
-          <a:prstGeom prst="rect">
-            <a:avLst/>
-          </a:prstGeom>
-        </p:spPr>
-        <p:txBody>
-          <a:bodyPr anchorCtr="0" anchor="t" bIns="91425" lIns="91425" spcFirstLastPara="1" rIns="91425" wrap="square" tIns="91425">
-            <a:normAutofit fontScale="90000"/>
-          </a:bodyPr>
-          <a:lstStyle/>
-          <a:p>
-            <a:pPr indent="0" lvl="0" marL="0" rtl="0" algn="l">
-              <a:spcBef>
-                <a:spcPts val="0"/>
-              </a:spcBef>
-              <a:spcAft>
-                <a:spcPts val="0"/>
-              </a:spcAft>
-              <a:buNone/>
-            </a:pPr>
-            <a:r>
-              <a:rPr lang="en">
-                <a:solidFill>
-                  <a:schemeClr val="accent5"/>
-                </a:solidFill>
-              </a:rPr>
-              <a:t>Refactoring Collisions to GMDCore</a:t>
-            </a:r>
-            <a:endParaRPr>
-              <a:solidFill>
-                <a:schemeClr val="accent5"/>
-              </a:solidFill>
-            </a:endParaRPr>
-          </a:p>
-        </p:txBody>
-      </p:sp>
-      <p:sp>
-        <p:nvSpPr>
-          <p:cNvPr id="254" name="Google Shape;254;p39"/>
-          <p:cNvSpPr txBox="1"/>
-          <p:nvPr>
-            <p:ph idx="1" type="body"/>
-          </p:nvPr>
-        </p:nvSpPr>
-        <p:spPr>
-          <a:xfrm>
-            <a:off x="311700" y="885950"/>
-            <a:ext cx="8520600" cy="4023300"/>
-          </a:xfrm>
-          <a:prstGeom prst="rect">
-            <a:avLst/>
-          </a:prstGeom>
-        </p:spPr>
-        <p:txBody>
-          <a:bodyPr anchorCtr="0" anchor="t" bIns="91425" lIns="91425" spcFirstLastPara="1" rIns="91425" wrap="square" tIns="91425">
-            <a:normAutofit/>
-          </a:bodyPr>
-          <a:lstStyle/>
-          <a:p>
-            <a:pPr indent="-330200" lvl="0" marL="457200" rtl="0" algn="l">
-              <a:spcBef>
-                <a:spcPts val="0"/>
-              </a:spcBef>
-              <a:spcAft>
-                <a:spcPts val="0"/>
-              </a:spcAft>
-              <a:buSzPts val="1600"/>
-              <a:buChar char="●"/>
-            </a:pPr>
-            <a:r>
-              <a:rPr lang="en"/>
-              <a:t>No need to add basic AABB collision detection to our library</a:t>
-            </a:r>
-            <a:endParaRPr/>
-          </a:p>
-          <a:p>
-            <a:pPr indent="-330200" lvl="0" marL="457200" rtl="0" algn="l">
-              <a:spcBef>
-                <a:spcPts val="0"/>
-              </a:spcBef>
-              <a:spcAft>
-                <a:spcPts val="0"/>
-              </a:spcAft>
-              <a:buSzPts val="1600"/>
-              <a:buChar char="●"/>
-            </a:pPr>
-            <a:r>
-              <a:rPr lang="en" u="sng">
-                <a:solidFill>
-                  <a:schemeClr val="hlink"/>
-                </a:solidFill>
-                <a:hlinkClick r:id="rId3"/>
-              </a:rPr>
-              <a:t>Rectangle.Intersects(Rectangle)</a:t>
-            </a:r>
-            <a:endParaRPr/>
-          </a:p>
-          <a:p>
-            <a:pPr indent="-317500" lvl="1" marL="914400" rtl="0" algn="l">
-              <a:spcBef>
-                <a:spcPts val="0"/>
-              </a:spcBef>
-              <a:spcAft>
-                <a:spcPts val="0"/>
-              </a:spcAft>
-              <a:buSzPts val="1400"/>
-              <a:buChar char="○"/>
-            </a:pPr>
-            <a:r>
-              <a:rPr lang="en"/>
-              <a:t>Provided by MonoGame</a:t>
-            </a:r>
-            <a:endParaRPr/>
-          </a:p>
-          <a:p>
-            <a:pPr indent="-304800" lvl="2" marL="1371600" rtl="0" algn="l">
-              <a:spcBef>
-                <a:spcPts val="0"/>
-              </a:spcBef>
-              <a:spcAft>
-                <a:spcPts val="0"/>
-              </a:spcAft>
-              <a:buSzPts val="1200"/>
-              <a:buChar char="■"/>
-            </a:pPr>
-            <a:r>
-              <a:rPr lang="en"/>
-              <a:t>performs an an AABB collision check for us</a:t>
-            </a:r>
-            <a:endParaRPr/>
-          </a:p>
-          <a:p>
-            <a:pPr indent="-330200" lvl="0" marL="457200" rtl="0" algn="l">
-              <a:spcBef>
-                <a:spcPts val="0"/>
-              </a:spcBef>
-              <a:spcAft>
-                <a:spcPts val="0"/>
-              </a:spcAft>
-              <a:buSzPts val="1600"/>
-              <a:buChar char="●"/>
-            </a:pPr>
-            <a:r>
-              <a:rPr lang="en" u="sng">
-                <a:solidFill>
-                  <a:schemeClr val="hlink"/>
-                </a:solidFill>
-                <a:hlinkClick r:id="rId4"/>
-              </a:rPr>
-              <a:t>Rectangle.Contains()</a:t>
-            </a:r>
-            <a:endParaRPr/>
-          </a:p>
-          <a:p>
-            <a:pPr indent="-317500" lvl="1" marL="914400" rtl="0" algn="l">
-              <a:spcBef>
-                <a:spcPts val="0"/>
-              </a:spcBef>
-              <a:spcAft>
-                <a:spcPts val="0"/>
-              </a:spcAft>
-              <a:buSzPts val="1400"/>
-              <a:buChar char="○"/>
-            </a:pPr>
-            <a:r>
-              <a:rPr lang="en"/>
-              <a:t>Checks if Rectangle/Vector2/Point is contained within the Rectangle</a:t>
-            </a:r>
-            <a:endParaRPr/>
-          </a:p>
-          <a:p>
-            <a:pPr indent="-330200" lvl="0" marL="457200" rtl="0" algn="l">
-              <a:spcBef>
-                <a:spcPts val="0"/>
-              </a:spcBef>
-              <a:spcAft>
-                <a:spcPts val="0"/>
-              </a:spcAft>
-              <a:buSzPts val="1600"/>
-              <a:buChar char="●"/>
-            </a:pPr>
-            <a:r>
-              <a:rPr lang="en"/>
-              <a:t>No Circles though</a:t>
-            </a:r>
-            <a:endParaRPr/>
-          </a:p>
-          <a:p>
-            <a:pPr indent="-317500" lvl="1" marL="914400" rtl="0" algn="l">
-              <a:spcBef>
-                <a:spcPts val="0"/>
-              </a:spcBef>
-              <a:spcAft>
-                <a:spcPts val="0"/>
-              </a:spcAft>
-              <a:buSzPts val="1400"/>
-              <a:buChar char="○"/>
-            </a:pPr>
-            <a:r>
-              <a:rPr lang="en"/>
-              <a:t>Add a Circle struct to GMDCore</a:t>
-            </a:r>
-            <a:endParaRPr/>
-          </a:p>
-          <a:p>
-            <a:pPr indent="-317500" lvl="1" marL="914400" rtl="0" algn="l">
-              <a:spcBef>
-                <a:spcPts val="0"/>
-              </a:spcBef>
-              <a:spcAft>
-                <a:spcPts val="0"/>
-              </a:spcAft>
-              <a:buSzPts val="1400"/>
-              <a:buChar char="○"/>
-            </a:pPr>
-            <a:r>
-              <a:rPr lang="en"/>
-              <a:t>Add an Intersects(Ci</a:t>
-            </a:r>
-            <a:r>
-              <a:rPr lang="en"/>
-              <a:t>rcl</a:t>
-            </a:r>
-            <a:r>
-              <a:rPr lang="en"/>
-              <a:t>e) method for other Circles</a:t>
-            </a:r>
-            <a:endParaRPr/>
-          </a:p>
-        </p:txBody>
-      </p:sp>
-    </p:spTree>
-  </p:cSld>
-  <p:clrMapOvr>
-    <a:masterClrMapping/>
-  </p:clrMapOvr>
-</p:sld>
-</file>
-
-<file path=ppt/slides/slide33.xml><?xml version="1.0" encoding="utf-8"?>
-<p:sld xmlns:a="http://schemas.openxmlformats.org/drawingml/2006/main" xmlns:r="http://schemas.openxmlformats.org/officeDocument/2006/relationships" xmlns:mc="http://schemas.openxmlformats.org/markup-compatibility/2006" xmlns:mv="urn:schemas-microsoft-com:mac:vml" xmlns:p="http://schemas.openxmlformats.org/presentationml/2006/main" xmlns:c="http://schemas.openxmlformats.org/drawingml/2006/chart" xmlns:dgm="http://schemas.openxmlformats.org/drawingml/2006/diagram" xmlns:o="urn:schemas-microsoft-com:office:office" xmlns:v="urn:schemas-microsoft-com:vml" xmlns:pvml="urn:schemas-microsoft-com:office:powerpoint" xmlns:com="http://schemas.openxmlformats.org/drawingml/2006/compatibility" xmlns:p14="http://schemas.microsoft.com/office/powerpoint/2010/main" xmlns:p15="http://schemas.microsoft.com/office/powerpoint/2012/main" xmlns:ahyp="http://schemas.microsoft.com/office/drawing/2018/hyperlinkcolor">
-  <p:cSld>
-    <p:spTree>
-      <p:nvGrpSpPr>
-        <p:cNvPr id="258" name="Shape 258"/>
-        <p:cNvGrpSpPr/>
-        <p:nvPr/>
-      </p:nvGrpSpPr>
-      <p:grpSpPr>
-        <a:xfrm>
-          <a:off x="0" y="0"/>
-          <a:ext cx="0" cy="0"/>
-          <a:chOff x="0" y="0"/>
-          <a:chExt cx="0" cy="0"/>
-        </a:xfrm>
-      </p:grpSpPr>
-      <p:sp>
-        <p:nvSpPr>
-          <p:cNvPr id="259" name="Google Shape;259;p40"/>
-          <p:cNvSpPr txBox="1"/>
-          <p:nvPr>
-            <p:ph type="title"/>
-          </p:nvPr>
-        </p:nvSpPr>
-        <p:spPr>
-          <a:xfrm>
-            <a:off x="311700" y="195615"/>
-            <a:ext cx="8520600" cy="572700"/>
-          </a:xfrm>
-          <a:prstGeom prst="rect">
-            <a:avLst/>
-          </a:prstGeom>
-        </p:spPr>
-        <p:txBody>
-          <a:bodyPr anchorCtr="0" anchor="t" bIns="91425" lIns="91425" spcFirstLastPara="1" rIns="91425" wrap="square" tIns="91425">
-            <a:normAutofit fontScale="90000"/>
-          </a:bodyPr>
-          <a:lstStyle/>
-          <a:p>
-            <a:pPr indent="0" lvl="0" marL="0" rtl="0" algn="l">
-              <a:spcBef>
-                <a:spcPts val="0"/>
-              </a:spcBef>
-              <a:spcAft>
-                <a:spcPts val="0"/>
-              </a:spcAft>
-              <a:buNone/>
-            </a:pPr>
-            <a:r>
-              <a:rPr lang="en">
-                <a:solidFill>
-                  <a:schemeClr val="accent5"/>
-                </a:solidFill>
-              </a:rPr>
-              <a:t>Collision Implementation</a:t>
-            </a:r>
-            <a:endParaRPr>
-              <a:solidFill>
-                <a:schemeClr val="accent5"/>
-              </a:solidFill>
-            </a:endParaRPr>
-          </a:p>
-        </p:txBody>
-      </p:sp>
-      <p:sp>
-        <p:nvSpPr>
-          <p:cNvPr id="260" name="Google Shape;260;p40"/>
-          <p:cNvSpPr txBox="1"/>
-          <p:nvPr>
-            <p:ph idx="1" type="body"/>
-          </p:nvPr>
-        </p:nvSpPr>
-        <p:spPr>
-          <a:xfrm>
-            <a:off x="311700" y="885950"/>
-            <a:ext cx="8520600" cy="4023300"/>
-          </a:xfrm>
-          <a:prstGeom prst="rect">
-            <a:avLst/>
-          </a:prstGeom>
-        </p:spPr>
-        <p:txBody>
-          <a:bodyPr anchorCtr="0" anchor="ctr" bIns="91425" lIns="91425" spcFirstLastPara="1" rIns="91425" wrap="square" tIns="91425">
-            <a:normAutofit/>
-          </a:bodyPr>
-          <a:lstStyle/>
-          <a:p>
-            <a:pPr indent="0" lvl="0" marL="0" rtl="0" algn="ctr">
-              <a:spcBef>
-                <a:spcPts val="0"/>
-              </a:spcBef>
-              <a:spcAft>
-                <a:spcPts val="1200"/>
-              </a:spcAft>
-              <a:buNone/>
-            </a:pPr>
-            <a:r>
-              <a:rPr lang="en" sz="2900">
-                <a:latin typeface="VT323"/>
-                <a:ea typeface="VT323"/>
-                <a:cs typeface="VT323"/>
-                <a:sym typeface="VT323"/>
-              </a:rPr>
-              <a:t>DEMO!</a:t>
-            </a:r>
-            <a:endParaRPr/>
-          </a:p>
-          <a:p>
-            <a:pPr indent="0" lvl="0" marL="0" rtl="0" algn="ctr">
-              <a:spcBef>
-                <a:spcPts val="0"/>
-              </a:spcBef>
-              <a:spcAft>
-                <a:spcPts val="0"/>
-              </a:spcAft>
-              <a:buNone/>
-            </a:pPr>
-            <a:r>
-              <a:rPr lang="en" sz="1800"/>
-              <a:t>Snake8 → Snake9: eating, growing and game over</a:t>
-            </a:r>
-            <a:endParaRPr sz="1800"/>
-          </a:p>
-        </p:txBody>
-      </p:sp>
-    </p:spTree>
-  </p:cSld>
-  <p:clrMapOvr>
-    <a:masterClrMapping/>
-  </p:clrMapOvr>
-</p:sld>
-</file>
-
-<file path=ppt/slides/slide34.xml><?xml version="1.0" encoding="utf-8"?>
-<p:sld xmlns:a="http://schemas.openxmlformats.org/drawingml/2006/main" xmlns:r="http://schemas.openxmlformats.org/officeDocument/2006/relationships" xmlns:mc="http://schemas.openxmlformats.org/markup-compatibility/2006" xmlns:mv="urn:schemas-microsoft-com:mac:vml" xmlns:p="http://schemas.openxmlformats.org/presentationml/2006/main" xmlns:c="http://schemas.openxmlformats.org/drawingml/2006/chart" xmlns:dgm="http://schemas.openxmlformats.org/drawingml/2006/diagram" xmlns:o="urn:schemas-microsoft-com:office:office" xmlns:v="urn:schemas-microsoft-com:vml" xmlns:pvml="urn:schemas-microsoft-com:office:powerpoint" xmlns:com="http://schemas.openxmlformats.org/drawingml/2006/compatibility" xmlns:p14="http://schemas.microsoft.com/office/powerpoint/2010/main" xmlns:p15="http://schemas.microsoft.com/office/powerpoint/2012/main" xmlns:ahyp="http://schemas.microsoft.com/office/drawing/2018/hyperlinkcolor">
-  <p:cSld>
-    <p:spTree>
-      <p:nvGrpSpPr>
-        <p:cNvPr id="264" name="Shape 264"/>
-        <p:cNvGrpSpPr/>
-        <p:nvPr/>
-      </p:nvGrpSpPr>
-      <p:grpSpPr>
-        <a:xfrm>
-          <a:off x="0" y="0"/>
-          <a:ext cx="0" cy="0"/>
-          <a:chOff x="0" y="0"/>
-          <a:chExt cx="0" cy="0"/>
-        </a:xfrm>
-      </p:grpSpPr>
-      <p:sp>
-        <p:nvSpPr>
-          <p:cNvPr id="265" name="Google Shape;265;p41"/>
-          <p:cNvSpPr txBox="1"/>
-          <p:nvPr>
-            <p:ph type="title"/>
-          </p:nvPr>
-        </p:nvSpPr>
-        <p:spPr>
-          <a:xfrm>
-            <a:off x="311700" y="195615"/>
-            <a:ext cx="8520600" cy="572700"/>
-          </a:xfrm>
-          <a:prstGeom prst="rect">
-            <a:avLst/>
-          </a:prstGeom>
-        </p:spPr>
-        <p:txBody>
-          <a:bodyPr anchorCtr="0" anchor="t" bIns="91425" lIns="91425" spcFirstLastPara="1" rIns="91425" wrap="square" tIns="91425">
-            <a:normAutofit fontScale="90000"/>
-          </a:bodyPr>
-          <a:lstStyle/>
-          <a:p>
-            <a:pPr indent="0" lvl="0" marL="0" rtl="0" algn="l">
-              <a:spcBef>
-                <a:spcPts val="0"/>
-              </a:spcBef>
-              <a:spcAft>
-                <a:spcPts val="0"/>
-              </a:spcAft>
-              <a:buNone/>
-            </a:pPr>
-            <a:r>
-              <a:rPr lang="en"/>
-              <a:t>Tileset</a:t>
-            </a:r>
-            <a:endParaRPr/>
-          </a:p>
-        </p:txBody>
-      </p:sp>
-      <p:pic>
-        <p:nvPicPr>
-          <p:cNvPr id="266" name="Google Shape;266;p41"/>
-          <p:cNvPicPr preferRelativeResize="0"/>
-          <p:nvPr/>
-        </p:nvPicPr>
-        <p:blipFill rotWithShape="1">
-          <a:blip r:embed="rId3">
-            <a:alphaModFix/>
-          </a:blip>
-          <a:srcRect b="0" l="0" r="54225" t="0"/>
-          <a:stretch/>
-        </p:blipFill>
-        <p:spPr>
-          <a:xfrm>
-            <a:off x="1238250" y="1247650"/>
-            <a:ext cx="3052075" cy="3048000"/>
-          </a:xfrm>
-          <a:prstGeom prst="rect">
-            <a:avLst/>
-          </a:prstGeom>
-          <a:noFill/>
-          <a:ln>
-            <a:noFill/>
-          </a:ln>
-        </p:spPr>
-      </p:pic>
-      <p:pic>
-        <p:nvPicPr>
-          <p:cNvPr id="267" name="Google Shape;267;p41"/>
-          <p:cNvPicPr preferRelativeResize="0"/>
-          <p:nvPr/>
-        </p:nvPicPr>
-        <p:blipFill rotWithShape="1">
-          <a:blip r:embed="rId3">
-            <a:alphaModFix/>
-          </a:blip>
-          <a:srcRect b="0" l="54225" r="0" t="0"/>
-          <a:stretch/>
-        </p:blipFill>
-        <p:spPr>
-          <a:xfrm>
-            <a:off x="5040275" y="1247650"/>
-            <a:ext cx="3052075" cy="3048000"/>
-          </a:xfrm>
-          <a:prstGeom prst="rect">
-            <a:avLst/>
-          </a:prstGeom>
-          <a:noFill/>
-          <a:ln>
-            <a:noFill/>
-          </a:ln>
-        </p:spPr>
-      </p:pic>
-    </p:spTree>
-  </p:cSld>
-  <p:clrMapOvr>
-    <a:masterClrMapping/>
-  </p:clrMapOvr>
-  <p:timing>
-    <p:tnLst>
-      <p:par>
-        <p:cTn dur="indefinite" nodeType="tmRoot" restart="never">
-          <p:childTnLst>
-            <p:seq concurrent="1" nextAc="seek">
-              <p:cTn dur="indefinite" id="2" nodeType="mainSeq">
-                <p:childTnLst>
-                  <p:par>
-                    <p:cTn fill="hold">
-                      <p:stCondLst>
-                        <p:cond delay="indefinite"/>
-                      </p:stCondLst>
-                      <p:childTnLst>
-                        <p:par>
-                          <p:cTn fill="hold">
-                            <p:stCondLst>
-                              <p:cond delay="0"/>
-                            </p:stCondLst>
-                            <p:childTnLst>
-                              <p:par>
-                                <p:cTn fill="hold" nodeType="clickEffect" presetClass="entr" presetID="1" presetSubtype="0">
-                                  <p:stCondLst>
-                                    <p:cond delay="0"/>
-                                  </p:stCondLst>
-                                  <p:childTnLst>
-                                    <p:set>
-                                      <p:cBhvr>
-                                        <p:cTn dur="1" fill="hold">
-                                          <p:stCondLst>
-                                            <p:cond delay="0"/>
-                                          </p:stCondLst>
-                                        </p:cTn>
-                                        <p:tgtEl>
-                                          <p:spTgt spid="266"/>
-                                        </p:tgtEl>
-                                        <p:attrNameLst>
-                                          <p:attrName>style.visibility</p:attrName>
-                                        </p:attrNameLst>
-                                      </p:cBhvr>
-                                      <p:to>
-                                        <p:strVal val="visible"/>
-                                      </p:to>
-                                    </p:set>
-                                  </p:childTnLst>
-                                </p:cTn>
-                              </p:par>
-                            </p:childTnLst>
-                          </p:cTn>
-                        </p:par>
-                      </p:childTnLst>
-                    </p:cTn>
-                  </p:par>
-                  <p:par>
-                    <p:cTn fill="hold">
-                      <p:stCondLst>
-                        <p:cond delay="indefinite"/>
-                      </p:stCondLst>
-                      <p:childTnLst>
-                        <p:par>
-                          <p:cTn fill="hold">
-                            <p:stCondLst>
-                              <p:cond delay="0"/>
-                            </p:stCondLst>
-                            <p:childTnLst>
-                              <p:par>
-                                <p:cTn fill="hold" nodeType="clickEffect" presetClass="entr" presetID="1" presetSubtype="0">
-                                  <p:stCondLst>
-                                    <p:cond delay="0"/>
-                                  </p:stCondLst>
-                                  <p:childTnLst>
-                                    <p:set>
-                                      <p:cBhvr>
-                                        <p:cTn dur="1" fill="hold">
-                                          <p:stCondLst>
-                                            <p:cond delay="0"/>
-                                          </p:stCondLst>
-                                        </p:cTn>
-                                        <p:tgtEl>
-                                          <p:spTgt spid="267"/>
-                                        </p:tgtEl>
-                                        <p:attrNameLst>
-                                          <p:attrName>style.visibility</p:attrName>
-                                        </p:attrNameLst>
-                                      </p:cBhvr>
-                                      <p:to>
-                                        <p:strVal val="visible"/>
-                                      </p:to>
-                                    </p:set>
-                                  </p:childTnLst>
-                                </p:cTn>
-                              </p:par>
-                            </p:childTnLst>
-                          </p:cTn>
-                        </p:par>
-                      </p:childTnLst>
-                    </p:cTn>
-                  </p:par>
-                </p:childTnLst>
-              </p:cTn>
-              <p:prevCondLst>
-                <p:cond evt="onPrev">
-                  <p:tgtEl>
-                    <p:sldTgt/>
-                  </p:tgtEl>
-                </p:cond>
-              </p:prevCondLst>
-              <p:nextCondLst>
-                <p:cond evt="onNext">
-                  <p:tgtEl>
-                    <p:sldTgt/>
-                  </p:tgtEl>
-                </p:cond>
-              </p:nextCondLst>
-            </p:seq>
-          </p:childTnLst>
-        </p:cTn>
-      </p:par>
-    </p:tnLst>
-  </p:timing>
-</p:sld>
-</file>
-
-<file path=ppt/slides/slide35.xml><?xml version="1.0" encoding="utf-8"?>
-<p:sld xmlns:a="http://schemas.openxmlformats.org/drawingml/2006/main" xmlns:r="http://schemas.openxmlformats.org/officeDocument/2006/relationships" xmlns:mc="http://schemas.openxmlformats.org/markup-compatibility/2006" xmlns:mv="urn:schemas-microsoft-com:mac:vml" xmlns:p="http://schemas.openxmlformats.org/presentationml/2006/main" xmlns:c="http://schemas.openxmlformats.org/drawingml/2006/chart" xmlns:dgm="http://schemas.openxmlformats.org/drawingml/2006/diagram" xmlns:o="urn:schemas-microsoft-com:office:office" xmlns:v="urn:schemas-microsoft-com:vml" xmlns:pvml="urn:schemas-microsoft-com:office:powerpoint" xmlns:com="http://schemas.openxmlformats.org/drawingml/2006/compatibility" xmlns:p14="http://schemas.microsoft.com/office/powerpoint/2010/main" xmlns:p15="http://schemas.microsoft.com/office/powerpoint/2012/main" xmlns:ahyp="http://schemas.microsoft.com/office/drawing/2018/hyperlinkcolor">
-  <p:cSld>
-    <p:spTree>
-      <p:nvGrpSpPr>
-        <p:cNvPr id="271" name="Shape 271"/>
-        <p:cNvGrpSpPr/>
-        <p:nvPr/>
-      </p:nvGrpSpPr>
-      <p:grpSpPr>
-        <a:xfrm>
-          <a:off x="0" y="0"/>
-          <a:ext cx="0" cy="0"/>
-          <a:chOff x="0" y="0"/>
-          <a:chExt cx="0" cy="0"/>
-        </a:xfrm>
-      </p:grpSpPr>
-      <p:sp>
-        <p:nvSpPr>
-          <p:cNvPr id="272" name="Google Shape;272;p42"/>
-          <p:cNvSpPr txBox="1"/>
-          <p:nvPr>
-            <p:ph type="title"/>
-          </p:nvPr>
-        </p:nvSpPr>
-        <p:spPr>
-          <a:xfrm>
-            <a:off x="311700" y="195615"/>
-            <a:ext cx="8520600" cy="572700"/>
-          </a:xfrm>
-          <a:prstGeom prst="rect">
-            <a:avLst/>
-          </a:prstGeom>
-        </p:spPr>
-        <p:txBody>
-          <a:bodyPr anchorCtr="0" anchor="t" bIns="91425" lIns="91425" spcFirstLastPara="1" rIns="91425" wrap="square" tIns="91425">
-            <a:normAutofit fontScale="90000"/>
-          </a:bodyPr>
-          <a:lstStyle/>
-          <a:p>
-            <a:pPr indent="0" lvl="0" marL="0" rtl="0" algn="l">
-              <a:spcBef>
-                <a:spcPts val="0"/>
-              </a:spcBef>
-              <a:spcAft>
-                <a:spcPts val="0"/>
-              </a:spcAft>
-              <a:buNone/>
-            </a:pPr>
-            <a:r>
-              <a:rPr lang="en"/>
-              <a:t>The Room: A Tilemap</a:t>
-            </a:r>
-            <a:endParaRPr/>
-          </a:p>
-        </p:txBody>
-      </p:sp>
-      <p:pic>
-        <p:nvPicPr>
-          <p:cNvPr id="273" name="Google Shape;273;p42"/>
-          <p:cNvPicPr preferRelativeResize="0"/>
-          <p:nvPr/>
-        </p:nvPicPr>
-        <p:blipFill rotWithShape="1">
-          <a:blip r:embed="rId3">
-            <a:alphaModFix/>
-          </a:blip>
-          <a:srcRect b="16166" l="0" r="59830" t="16280"/>
-          <a:stretch/>
-        </p:blipFill>
-        <p:spPr>
-          <a:xfrm>
-            <a:off x="633950" y="1516225"/>
-            <a:ext cx="2725150" cy="2749700"/>
-          </a:xfrm>
-          <a:prstGeom prst="rect">
-            <a:avLst/>
-          </a:prstGeom>
-          <a:noFill/>
-          <a:ln>
-            <a:noFill/>
-          </a:ln>
-        </p:spPr>
-      </p:pic>
-      <p:sp>
-        <p:nvSpPr>
-          <p:cNvPr id="274" name="Google Shape;274;p42"/>
-          <p:cNvSpPr txBox="1"/>
-          <p:nvPr>
-            <p:ph idx="4294967295" type="body"/>
-          </p:nvPr>
-        </p:nvSpPr>
-        <p:spPr>
-          <a:xfrm>
-            <a:off x="3749613" y="2239625"/>
-            <a:ext cx="1183800" cy="1302900"/>
-          </a:xfrm>
-          <a:prstGeom prst="rect">
-            <a:avLst/>
-          </a:prstGeom>
-          <a:solidFill>
-            <a:schemeClr val="dk2"/>
-          </a:solidFill>
-        </p:spPr>
-        <p:txBody>
-          <a:bodyPr anchorCtr="0" anchor="t" bIns="91425" lIns="91425" spcFirstLastPara="1" rIns="91425" wrap="square" tIns="91425">
-            <a:normAutofit/>
-          </a:bodyPr>
-          <a:lstStyle/>
-          <a:p>
-            <a:pPr indent="0" lvl="0" marL="0" rtl="0" algn="l">
-              <a:lnSpc>
-                <a:spcPct val="157500"/>
-              </a:lnSpc>
-              <a:spcBef>
-                <a:spcPts val="0"/>
-              </a:spcBef>
-              <a:spcAft>
-                <a:spcPts val="0"/>
-              </a:spcAft>
-              <a:buNone/>
-            </a:pPr>
-            <a:r>
-              <a:rPr lang="en" sz="1000">
-                <a:solidFill>
-                  <a:srgbClr val="B5CEA8"/>
-                </a:solidFill>
-                <a:highlight>
-                  <a:srgbClr val="1F1F1F"/>
-                </a:highlight>
-                <a:latin typeface="Consolas"/>
-                <a:ea typeface="Consolas"/>
-                <a:cs typeface="Consolas"/>
-                <a:sym typeface="Consolas"/>
-              </a:rPr>
-              <a:t>00</a:t>
-            </a:r>
-            <a:r>
-              <a:rPr lang="en" sz="1000">
-                <a:solidFill>
-                  <a:srgbClr val="CCCCCC"/>
-                </a:solidFill>
-                <a:highlight>
-                  <a:srgbClr val="1F1F1F"/>
-                </a:highlight>
-                <a:latin typeface="Consolas"/>
-                <a:ea typeface="Consolas"/>
-                <a:cs typeface="Consolas"/>
-                <a:sym typeface="Consolas"/>
-              </a:rPr>
-              <a:t> </a:t>
-            </a:r>
-            <a:r>
-              <a:rPr lang="en" sz="1000">
-                <a:solidFill>
-                  <a:srgbClr val="B5CEA8"/>
-                </a:solidFill>
-                <a:highlight>
-                  <a:srgbClr val="1F1F1F"/>
-                </a:highlight>
-                <a:latin typeface="Consolas"/>
-                <a:ea typeface="Consolas"/>
-                <a:cs typeface="Consolas"/>
-                <a:sym typeface="Consolas"/>
-              </a:rPr>
-              <a:t>01</a:t>
-            </a:r>
-            <a:r>
-              <a:rPr lang="en" sz="1000">
-                <a:solidFill>
-                  <a:srgbClr val="CCCCCC"/>
-                </a:solidFill>
-                <a:highlight>
-                  <a:srgbClr val="1F1F1F"/>
-                </a:highlight>
-                <a:latin typeface="Consolas"/>
-                <a:ea typeface="Consolas"/>
-                <a:cs typeface="Consolas"/>
-                <a:sym typeface="Consolas"/>
-              </a:rPr>
-              <a:t> </a:t>
-            </a:r>
-            <a:r>
-              <a:rPr lang="en" sz="1000">
-                <a:solidFill>
-                  <a:srgbClr val="B5CEA8"/>
-                </a:solidFill>
-                <a:highlight>
-                  <a:srgbClr val="1F1F1F"/>
-                </a:highlight>
-                <a:latin typeface="Consolas"/>
-                <a:ea typeface="Consolas"/>
-                <a:cs typeface="Consolas"/>
-                <a:sym typeface="Consolas"/>
-              </a:rPr>
-              <a:t>02</a:t>
-            </a:r>
-            <a:r>
-              <a:rPr lang="en" sz="1000">
-                <a:solidFill>
-                  <a:srgbClr val="CCCCCC"/>
-                </a:solidFill>
-                <a:highlight>
-                  <a:srgbClr val="1F1F1F"/>
-                </a:highlight>
-                <a:latin typeface="Consolas"/>
-                <a:ea typeface="Consolas"/>
-                <a:cs typeface="Consolas"/>
-                <a:sym typeface="Consolas"/>
-              </a:rPr>
-              <a:t> </a:t>
-            </a:r>
-            <a:r>
-              <a:rPr lang="en" sz="1000">
-                <a:solidFill>
-                  <a:srgbClr val="B5CEA8"/>
-                </a:solidFill>
-                <a:highlight>
-                  <a:srgbClr val="1F1F1F"/>
-                </a:highlight>
-                <a:latin typeface="Consolas"/>
-                <a:ea typeface="Consolas"/>
-                <a:cs typeface="Consolas"/>
-                <a:sym typeface="Consolas"/>
-              </a:rPr>
-              <a:t>01</a:t>
-            </a:r>
-            <a:r>
-              <a:rPr lang="en" sz="1000">
-                <a:solidFill>
-                  <a:srgbClr val="CCCCCC"/>
-                </a:solidFill>
-                <a:highlight>
-                  <a:srgbClr val="1F1F1F"/>
-                </a:highlight>
-                <a:latin typeface="Consolas"/>
-                <a:ea typeface="Consolas"/>
-                <a:cs typeface="Consolas"/>
-                <a:sym typeface="Consolas"/>
-              </a:rPr>
-              <a:t> </a:t>
-            </a:r>
-            <a:r>
-              <a:rPr lang="en" sz="1000">
-                <a:solidFill>
-                  <a:srgbClr val="B5CEA8"/>
-                </a:solidFill>
-                <a:highlight>
-                  <a:srgbClr val="1F1F1F"/>
-                </a:highlight>
-                <a:latin typeface="Consolas"/>
-                <a:ea typeface="Consolas"/>
-                <a:cs typeface="Consolas"/>
-                <a:sym typeface="Consolas"/>
-              </a:rPr>
-              <a:t>03</a:t>
-            </a:r>
-            <a:endParaRPr sz="1000">
-              <a:solidFill>
-                <a:srgbClr val="B5CEA8"/>
-              </a:solidFill>
-              <a:highlight>
-                <a:srgbClr val="1F1F1F"/>
-              </a:highlight>
-              <a:latin typeface="Consolas"/>
-              <a:ea typeface="Consolas"/>
-              <a:cs typeface="Consolas"/>
-              <a:sym typeface="Consolas"/>
-            </a:endParaRPr>
-          </a:p>
-          <a:p>
-            <a:pPr indent="0" lvl="0" marL="0" rtl="0" algn="l">
-              <a:lnSpc>
-                <a:spcPct val="157500"/>
-              </a:lnSpc>
-              <a:spcBef>
-                <a:spcPts val="0"/>
-              </a:spcBef>
-              <a:spcAft>
-                <a:spcPts val="0"/>
-              </a:spcAft>
-              <a:buNone/>
-            </a:pPr>
-            <a:r>
-              <a:rPr lang="en" sz="1000">
-                <a:solidFill>
-                  <a:srgbClr val="B5CEA8"/>
-                </a:solidFill>
-                <a:highlight>
-                  <a:srgbClr val="1F1F1F"/>
-                </a:highlight>
-                <a:latin typeface="Consolas"/>
-                <a:ea typeface="Consolas"/>
-                <a:cs typeface="Consolas"/>
-                <a:sym typeface="Consolas"/>
-              </a:rPr>
-              <a:t>04</a:t>
-            </a:r>
-            <a:r>
-              <a:rPr lang="en" sz="1000">
-                <a:solidFill>
-                  <a:srgbClr val="CCCCCC"/>
-                </a:solidFill>
-                <a:highlight>
-                  <a:srgbClr val="1F1F1F"/>
-                </a:highlight>
-                <a:latin typeface="Consolas"/>
-                <a:ea typeface="Consolas"/>
-                <a:cs typeface="Consolas"/>
-                <a:sym typeface="Consolas"/>
-              </a:rPr>
-              <a:t> </a:t>
-            </a:r>
-            <a:r>
-              <a:rPr lang="en" sz="1000">
-                <a:solidFill>
-                  <a:srgbClr val="B5CEA8"/>
-                </a:solidFill>
-                <a:highlight>
-                  <a:srgbClr val="1F1F1F"/>
-                </a:highlight>
-                <a:latin typeface="Consolas"/>
-                <a:ea typeface="Consolas"/>
-                <a:cs typeface="Consolas"/>
-                <a:sym typeface="Consolas"/>
-              </a:rPr>
-              <a:t>05</a:t>
-            </a:r>
-            <a:r>
-              <a:rPr lang="en" sz="1000">
-                <a:solidFill>
-                  <a:srgbClr val="CCCCCC"/>
-                </a:solidFill>
-                <a:highlight>
-                  <a:srgbClr val="1F1F1F"/>
-                </a:highlight>
-                <a:latin typeface="Consolas"/>
-                <a:ea typeface="Consolas"/>
-                <a:cs typeface="Consolas"/>
-                <a:sym typeface="Consolas"/>
-              </a:rPr>
-              <a:t> </a:t>
-            </a:r>
-            <a:r>
-              <a:rPr lang="en" sz="1000">
-                <a:solidFill>
-                  <a:srgbClr val="B5CEA8"/>
-                </a:solidFill>
-                <a:highlight>
-                  <a:srgbClr val="1F1F1F"/>
-                </a:highlight>
-                <a:latin typeface="Consolas"/>
-                <a:ea typeface="Consolas"/>
-                <a:cs typeface="Consolas"/>
-                <a:sym typeface="Consolas"/>
-              </a:rPr>
-              <a:t>06</a:t>
-            </a:r>
-            <a:r>
-              <a:rPr lang="en" sz="1000">
-                <a:solidFill>
-                  <a:srgbClr val="CCCCCC"/>
-                </a:solidFill>
-                <a:highlight>
-                  <a:srgbClr val="1F1F1F"/>
-                </a:highlight>
-                <a:latin typeface="Consolas"/>
-                <a:ea typeface="Consolas"/>
-                <a:cs typeface="Consolas"/>
-                <a:sym typeface="Consolas"/>
-              </a:rPr>
-              <a:t> </a:t>
-            </a:r>
-            <a:r>
-              <a:rPr lang="en" sz="1000">
-                <a:solidFill>
-                  <a:srgbClr val="B5CEA8"/>
-                </a:solidFill>
-                <a:highlight>
-                  <a:srgbClr val="1F1F1F"/>
-                </a:highlight>
-                <a:latin typeface="Consolas"/>
-                <a:ea typeface="Consolas"/>
-                <a:cs typeface="Consolas"/>
-                <a:sym typeface="Consolas"/>
-              </a:rPr>
-              <a:t>05</a:t>
-            </a:r>
-            <a:r>
-              <a:rPr lang="en" sz="1000">
-                <a:solidFill>
-                  <a:srgbClr val="CCCCCC"/>
-                </a:solidFill>
-                <a:highlight>
-                  <a:srgbClr val="1F1F1F"/>
-                </a:highlight>
-                <a:latin typeface="Consolas"/>
-                <a:ea typeface="Consolas"/>
-                <a:cs typeface="Consolas"/>
-                <a:sym typeface="Consolas"/>
-              </a:rPr>
-              <a:t> </a:t>
-            </a:r>
-            <a:r>
-              <a:rPr lang="en" sz="1000">
-                <a:solidFill>
-                  <a:srgbClr val="B5CEA8"/>
-                </a:solidFill>
-                <a:highlight>
-                  <a:srgbClr val="1F1F1F"/>
-                </a:highlight>
-                <a:latin typeface="Consolas"/>
-                <a:ea typeface="Consolas"/>
-                <a:cs typeface="Consolas"/>
-                <a:sym typeface="Consolas"/>
-              </a:rPr>
-              <a:t>07</a:t>
-            </a:r>
-            <a:endParaRPr sz="1000">
-              <a:solidFill>
-                <a:srgbClr val="B5CEA8"/>
-              </a:solidFill>
-              <a:highlight>
-                <a:srgbClr val="1F1F1F"/>
-              </a:highlight>
-              <a:latin typeface="Consolas"/>
-              <a:ea typeface="Consolas"/>
-              <a:cs typeface="Consolas"/>
-              <a:sym typeface="Consolas"/>
-            </a:endParaRPr>
-          </a:p>
-          <a:p>
-            <a:pPr indent="0" lvl="0" marL="0" rtl="0" algn="l">
-              <a:lnSpc>
-                <a:spcPct val="157500"/>
-              </a:lnSpc>
-              <a:spcBef>
-                <a:spcPts val="0"/>
-              </a:spcBef>
-              <a:spcAft>
-                <a:spcPts val="0"/>
-              </a:spcAft>
-              <a:buNone/>
-            </a:pPr>
-            <a:r>
-              <a:rPr lang="en" sz="1000">
-                <a:solidFill>
-                  <a:srgbClr val="B5CEA8"/>
-                </a:solidFill>
-                <a:highlight>
-                  <a:srgbClr val="1F1F1F"/>
-                </a:highlight>
-                <a:latin typeface="Consolas"/>
-                <a:ea typeface="Consolas"/>
-                <a:cs typeface="Consolas"/>
-                <a:sym typeface="Consolas"/>
-              </a:rPr>
-              <a:t>08</a:t>
-            </a:r>
-            <a:r>
-              <a:rPr lang="en" sz="1000">
-                <a:solidFill>
-                  <a:srgbClr val="CCCCCC"/>
-                </a:solidFill>
-                <a:highlight>
-                  <a:srgbClr val="1F1F1F"/>
-                </a:highlight>
-                <a:latin typeface="Consolas"/>
-                <a:ea typeface="Consolas"/>
-                <a:cs typeface="Consolas"/>
-                <a:sym typeface="Consolas"/>
-              </a:rPr>
-              <a:t> </a:t>
-            </a:r>
-            <a:r>
-              <a:rPr lang="en" sz="1000">
-                <a:solidFill>
-                  <a:srgbClr val="B5CEA8"/>
-                </a:solidFill>
-                <a:highlight>
-                  <a:srgbClr val="1F1F1F"/>
-                </a:highlight>
-                <a:latin typeface="Consolas"/>
-                <a:ea typeface="Consolas"/>
-                <a:cs typeface="Consolas"/>
-                <a:sym typeface="Consolas"/>
-              </a:rPr>
-              <a:t>09</a:t>
-            </a:r>
-            <a:r>
-              <a:rPr lang="en" sz="1000">
-                <a:solidFill>
-                  <a:srgbClr val="CCCCCC"/>
-                </a:solidFill>
-                <a:highlight>
-                  <a:srgbClr val="1F1F1F"/>
-                </a:highlight>
-                <a:latin typeface="Consolas"/>
-                <a:ea typeface="Consolas"/>
-                <a:cs typeface="Consolas"/>
-                <a:sym typeface="Consolas"/>
-              </a:rPr>
-              <a:t> </a:t>
-            </a:r>
-            <a:r>
-              <a:rPr lang="en" sz="1000">
-                <a:solidFill>
-                  <a:srgbClr val="B5CEA8"/>
-                </a:solidFill>
-                <a:highlight>
-                  <a:srgbClr val="1F1F1F"/>
-                </a:highlight>
-                <a:latin typeface="Consolas"/>
-                <a:ea typeface="Consolas"/>
-                <a:cs typeface="Consolas"/>
-                <a:sym typeface="Consolas"/>
-              </a:rPr>
-              <a:t>10</a:t>
-            </a:r>
-            <a:r>
-              <a:rPr lang="en" sz="1000">
-                <a:solidFill>
-                  <a:srgbClr val="CCCCCC"/>
-                </a:solidFill>
-                <a:highlight>
-                  <a:srgbClr val="1F1F1F"/>
-                </a:highlight>
-                <a:latin typeface="Consolas"/>
-                <a:ea typeface="Consolas"/>
-                <a:cs typeface="Consolas"/>
-                <a:sym typeface="Consolas"/>
-              </a:rPr>
-              <a:t> </a:t>
-            </a:r>
-            <a:r>
-              <a:rPr lang="en" sz="1000">
-                <a:solidFill>
-                  <a:srgbClr val="B5CEA8"/>
-                </a:solidFill>
-                <a:highlight>
-                  <a:srgbClr val="1F1F1F"/>
-                </a:highlight>
-                <a:latin typeface="Consolas"/>
-                <a:ea typeface="Consolas"/>
-                <a:cs typeface="Consolas"/>
-                <a:sym typeface="Consolas"/>
-              </a:rPr>
-              <a:t>09</a:t>
-            </a:r>
-            <a:r>
-              <a:rPr lang="en" sz="1000">
-                <a:solidFill>
-                  <a:srgbClr val="CCCCCC"/>
-                </a:solidFill>
-                <a:highlight>
-                  <a:srgbClr val="1F1F1F"/>
-                </a:highlight>
-                <a:latin typeface="Consolas"/>
-                <a:ea typeface="Consolas"/>
-                <a:cs typeface="Consolas"/>
-                <a:sym typeface="Consolas"/>
-              </a:rPr>
-              <a:t> </a:t>
-            </a:r>
-            <a:r>
-              <a:rPr lang="en" sz="1000">
-                <a:solidFill>
-                  <a:srgbClr val="B5CEA8"/>
-                </a:solidFill>
-                <a:highlight>
-                  <a:srgbClr val="1F1F1F"/>
-                </a:highlight>
-                <a:latin typeface="Consolas"/>
-                <a:ea typeface="Consolas"/>
-                <a:cs typeface="Consolas"/>
-                <a:sym typeface="Consolas"/>
-              </a:rPr>
-              <a:t>11</a:t>
-            </a:r>
-            <a:endParaRPr sz="1000">
-              <a:solidFill>
-                <a:srgbClr val="B5CEA8"/>
-              </a:solidFill>
-              <a:highlight>
-                <a:srgbClr val="1F1F1F"/>
-              </a:highlight>
-              <a:latin typeface="Consolas"/>
-              <a:ea typeface="Consolas"/>
-              <a:cs typeface="Consolas"/>
-              <a:sym typeface="Consolas"/>
-            </a:endParaRPr>
-          </a:p>
-          <a:p>
-            <a:pPr indent="0" lvl="0" marL="0" rtl="0" algn="l">
-              <a:lnSpc>
-                <a:spcPct val="157500"/>
-              </a:lnSpc>
-              <a:spcBef>
-                <a:spcPts val="0"/>
-              </a:spcBef>
-              <a:spcAft>
-                <a:spcPts val="0"/>
-              </a:spcAft>
-              <a:buNone/>
-            </a:pPr>
-            <a:r>
-              <a:rPr lang="en" sz="1000">
-                <a:solidFill>
-                  <a:srgbClr val="B5CEA8"/>
-                </a:solidFill>
-                <a:highlight>
-                  <a:srgbClr val="1F1F1F"/>
-                </a:highlight>
-                <a:latin typeface="Consolas"/>
-                <a:ea typeface="Consolas"/>
-                <a:cs typeface="Consolas"/>
-                <a:sym typeface="Consolas"/>
-              </a:rPr>
-              <a:t>04</a:t>
-            </a:r>
-            <a:r>
-              <a:rPr lang="en" sz="1000">
-                <a:solidFill>
-                  <a:srgbClr val="CCCCCC"/>
-                </a:solidFill>
-                <a:highlight>
-                  <a:srgbClr val="1F1F1F"/>
-                </a:highlight>
-                <a:latin typeface="Consolas"/>
-                <a:ea typeface="Consolas"/>
-                <a:cs typeface="Consolas"/>
-                <a:sym typeface="Consolas"/>
-              </a:rPr>
-              <a:t> </a:t>
-            </a:r>
-            <a:r>
-              <a:rPr lang="en" sz="1000">
-                <a:solidFill>
-                  <a:srgbClr val="B5CEA8"/>
-                </a:solidFill>
-                <a:highlight>
-                  <a:srgbClr val="1F1F1F"/>
-                </a:highlight>
-                <a:latin typeface="Consolas"/>
-                <a:ea typeface="Consolas"/>
-                <a:cs typeface="Consolas"/>
-                <a:sym typeface="Consolas"/>
-              </a:rPr>
-              <a:t>09</a:t>
-            </a:r>
-            <a:r>
-              <a:rPr lang="en" sz="1000">
-                <a:solidFill>
-                  <a:srgbClr val="CCCCCC"/>
-                </a:solidFill>
-                <a:highlight>
-                  <a:srgbClr val="1F1F1F"/>
-                </a:highlight>
-                <a:latin typeface="Consolas"/>
-                <a:ea typeface="Consolas"/>
-                <a:cs typeface="Consolas"/>
-                <a:sym typeface="Consolas"/>
-              </a:rPr>
-              <a:t> </a:t>
-            </a:r>
-            <a:r>
-              <a:rPr lang="en" sz="1000">
-                <a:solidFill>
-                  <a:srgbClr val="B5CEA8"/>
-                </a:solidFill>
-                <a:highlight>
-                  <a:srgbClr val="1F1F1F"/>
-                </a:highlight>
-                <a:latin typeface="Consolas"/>
-                <a:ea typeface="Consolas"/>
-                <a:cs typeface="Consolas"/>
-                <a:sym typeface="Consolas"/>
-              </a:rPr>
-              <a:t>09</a:t>
-            </a:r>
-            <a:r>
-              <a:rPr lang="en" sz="1000">
-                <a:solidFill>
-                  <a:srgbClr val="CCCCCC"/>
-                </a:solidFill>
-                <a:highlight>
-                  <a:srgbClr val="1F1F1F"/>
-                </a:highlight>
-                <a:latin typeface="Consolas"/>
-                <a:ea typeface="Consolas"/>
-                <a:cs typeface="Consolas"/>
-                <a:sym typeface="Consolas"/>
-              </a:rPr>
-              <a:t> </a:t>
-            </a:r>
-            <a:r>
-              <a:rPr lang="en" sz="1000">
-                <a:solidFill>
-                  <a:srgbClr val="B5CEA8"/>
-                </a:solidFill>
-                <a:highlight>
-                  <a:srgbClr val="1F1F1F"/>
-                </a:highlight>
-                <a:latin typeface="Consolas"/>
-                <a:ea typeface="Consolas"/>
-                <a:cs typeface="Consolas"/>
-                <a:sym typeface="Consolas"/>
-              </a:rPr>
-              <a:t>09</a:t>
-            </a:r>
-            <a:r>
-              <a:rPr lang="en" sz="1000">
-                <a:solidFill>
-                  <a:srgbClr val="CCCCCC"/>
-                </a:solidFill>
-                <a:highlight>
-                  <a:srgbClr val="1F1F1F"/>
-                </a:highlight>
-                <a:latin typeface="Consolas"/>
-                <a:ea typeface="Consolas"/>
-                <a:cs typeface="Consolas"/>
-                <a:sym typeface="Consolas"/>
-              </a:rPr>
-              <a:t> </a:t>
-            </a:r>
-            <a:r>
-              <a:rPr lang="en" sz="1000">
-                <a:solidFill>
-                  <a:srgbClr val="B5CEA8"/>
-                </a:solidFill>
-                <a:highlight>
-                  <a:srgbClr val="1F1F1F"/>
-                </a:highlight>
-                <a:latin typeface="Consolas"/>
-                <a:ea typeface="Consolas"/>
-                <a:cs typeface="Consolas"/>
-                <a:sym typeface="Consolas"/>
-              </a:rPr>
-              <a:t>07</a:t>
-            </a:r>
-            <a:endParaRPr sz="1000">
-              <a:solidFill>
-                <a:srgbClr val="B5CEA8"/>
-              </a:solidFill>
-              <a:highlight>
-                <a:srgbClr val="1F1F1F"/>
-              </a:highlight>
-              <a:latin typeface="Consolas"/>
-              <a:ea typeface="Consolas"/>
-              <a:cs typeface="Consolas"/>
-              <a:sym typeface="Consolas"/>
-            </a:endParaRPr>
-          </a:p>
-          <a:p>
-            <a:pPr indent="0" lvl="0" marL="0" rtl="0" algn="l">
-              <a:lnSpc>
-                <a:spcPct val="157500"/>
-              </a:lnSpc>
-              <a:spcBef>
-                <a:spcPts val="0"/>
-              </a:spcBef>
-              <a:spcAft>
-                <a:spcPts val="0"/>
-              </a:spcAft>
-              <a:buNone/>
-            </a:pPr>
-            <a:r>
-              <a:rPr lang="en" sz="1000">
-                <a:solidFill>
-                  <a:srgbClr val="B5CEA8"/>
-                </a:solidFill>
-                <a:highlight>
-                  <a:srgbClr val="1F1F1F"/>
-                </a:highlight>
-                <a:latin typeface="Consolas"/>
-                <a:ea typeface="Consolas"/>
-                <a:cs typeface="Consolas"/>
-                <a:sym typeface="Consolas"/>
-              </a:rPr>
-              <a:t>12</a:t>
-            </a:r>
-            <a:r>
-              <a:rPr lang="en" sz="1000">
-                <a:solidFill>
-                  <a:srgbClr val="CCCCCC"/>
-                </a:solidFill>
-                <a:highlight>
-                  <a:srgbClr val="1F1F1F"/>
-                </a:highlight>
-                <a:latin typeface="Consolas"/>
-                <a:ea typeface="Consolas"/>
-                <a:cs typeface="Consolas"/>
-                <a:sym typeface="Consolas"/>
-              </a:rPr>
-              <a:t> </a:t>
-            </a:r>
-            <a:r>
-              <a:rPr lang="en" sz="1000">
-                <a:solidFill>
-                  <a:srgbClr val="B5CEA8"/>
-                </a:solidFill>
-                <a:highlight>
-                  <a:srgbClr val="1F1F1F"/>
-                </a:highlight>
-                <a:latin typeface="Consolas"/>
-                <a:ea typeface="Consolas"/>
-                <a:cs typeface="Consolas"/>
-                <a:sym typeface="Consolas"/>
-              </a:rPr>
-              <a:t>13</a:t>
-            </a:r>
-            <a:r>
-              <a:rPr lang="en" sz="1000">
-                <a:solidFill>
-                  <a:srgbClr val="CCCCCC"/>
-                </a:solidFill>
-                <a:highlight>
-                  <a:srgbClr val="1F1F1F"/>
-                </a:highlight>
-                <a:latin typeface="Consolas"/>
-                <a:ea typeface="Consolas"/>
-                <a:cs typeface="Consolas"/>
-                <a:sym typeface="Consolas"/>
-              </a:rPr>
-              <a:t> </a:t>
-            </a:r>
-            <a:r>
-              <a:rPr lang="en" sz="1000">
-                <a:solidFill>
-                  <a:srgbClr val="B5CEA8"/>
-                </a:solidFill>
-                <a:highlight>
-                  <a:srgbClr val="1F1F1F"/>
-                </a:highlight>
-                <a:latin typeface="Consolas"/>
-                <a:ea typeface="Consolas"/>
-                <a:cs typeface="Consolas"/>
-                <a:sym typeface="Consolas"/>
-              </a:rPr>
-              <a:t>14</a:t>
-            </a:r>
-            <a:r>
-              <a:rPr lang="en" sz="1000">
-                <a:solidFill>
-                  <a:srgbClr val="CCCCCC"/>
-                </a:solidFill>
-                <a:highlight>
-                  <a:srgbClr val="1F1F1F"/>
-                </a:highlight>
-                <a:latin typeface="Consolas"/>
-                <a:ea typeface="Consolas"/>
-                <a:cs typeface="Consolas"/>
-                <a:sym typeface="Consolas"/>
-              </a:rPr>
-              <a:t> </a:t>
-            </a:r>
-            <a:r>
-              <a:rPr lang="en" sz="1000">
-                <a:solidFill>
-                  <a:srgbClr val="B5CEA8"/>
-                </a:solidFill>
-                <a:highlight>
-                  <a:srgbClr val="1F1F1F"/>
-                </a:highlight>
-                <a:latin typeface="Consolas"/>
-                <a:ea typeface="Consolas"/>
-                <a:cs typeface="Consolas"/>
-                <a:sym typeface="Consolas"/>
-              </a:rPr>
-              <a:t>13</a:t>
-            </a:r>
-            <a:r>
-              <a:rPr lang="en" sz="1000">
-                <a:solidFill>
-                  <a:srgbClr val="CCCCCC"/>
-                </a:solidFill>
-                <a:highlight>
-                  <a:srgbClr val="1F1F1F"/>
-                </a:highlight>
-                <a:latin typeface="Consolas"/>
-                <a:ea typeface="Consolas"/>
-                <a:cs typeface="Consolas"/>
-                <a:sym typeface="Consolas"/>
-              </a:rPr>
-              <a:t> </a:t>
-            </a:r>
-            <a:r>
-              <a:rPr lang="en" sz="1000">
-                <a:solidFill>
-                  <a:srgbClr val="B5CEA8"/>
-                </a:solidFill>
-                <a:highlight>
-                  <a:srgbClr val="1F1F1F"/>
-                </a:highlight>
-                <a:latin typeface="Consolas"/>
-                <a:ea typeface="Consolas"/>
-                <a:cs typeface="Consolas"/>
-                <a:sym typeface="Consolas"/>
-              </a:rPr>
-              <a:t>15</a:t>
-            </a:r>
-            <a:endParaRPr/>
-          </a:p>
-        </p:txBody>
-      </p:sp>
-      <p:pic>
-        <p:nvPicPr>
-          <p:cNvPr id="275" name="Google Shape;275;p42"/>
-          <p:cNvPicPr preferRelativeResize="0"/>
-          <p:nvPr/>
-        </p:nvPicPr>
-        <p:blipFill rotWithShape="1">
-          <a:blip r:embed="rId3">
-            <a:alphaModFix/>
-          </a:blip>
-          <a:srcRect b="7917" l="49925" r="0" t="8478"/>
-          <a:stretch/>
-        </p:blipFill>
-        <p:spPr>
-          <a:xfrm>
-            <a:off x="5323925" y="1111575"/>
-            <a:ext cx="3397050" cy="3403000"/>
-          </a:xfrm>
-          <a:prstGeom prst="rect">
-            <a:avLst/>
-          </a:prstGeom>
-          <a:noFill/>
-          <a:ln>
-            <a:noFill/>
-          </a:ln>
-        </p:spPr>
-      </p:pic>
-    </p:spTree>
-  </p:cSld>
-  <p:clrMapOvr>
-    <a:masterClrMapping/>
-  </p:clrMapOvr>
-  <p:timing>
-    <p:tnLst>
-      <p:par>
-        <p:cTn dur="indefinite" nodeType="tmRoot" restart="never">
-          <p:childTnLst>
-            <p:seq concurrent="1" nextAc="seek">
-              <p:cTn dur="indefinite" id="2" nodeType="mainSeq">
-                <p:childTnLst>
-                  <p:par>
-                    <p:cTn fill="hold">
-                      <p:stCondLst>
-                        <p:cond delay="indefinite"/>
-                      </p:stCondLst>
-                      <p:childTnLst>
-                        <p:par>
-                          <p:cTn fill="hold">
-                            <p:stCondLst>
-                              <p:cond delay="0"/>
-                            </p:stCondLst>
-                            <p:childTnLst>
-                              <p:par>
-                                <p:cTn fill="hold" nodeType="clickEffect" presetClass="entr" presetID="1" presetSubtype="0">
-                                  <p:stCondLst>
-                                    <p:cond delay="0"/>
-                                  </p:stCondLst>
-                                  <p:childTnLst>
-                                    <p:set>
-                                      <p:cBhvr>
-                                        <p:cTn dur="1" fill="hold">
-                                          <p:stCondLst>
-                                            <p:cond delay="0"/>
-                                          </p:stCondLst>
-                                        </p:cTn>
-                                        <p:tgtEl>
-                                          <p:spTgt spid="273"/>
-                                        </p:tgtEl>
-                                        <p:attrNameLst>
-                                          <p:attrName>style.visibility</p:attrName>
-                                        </p:attrNameLst>
-                                      </p:cBhvr>
-                                      <p:to>
-                                        <p:strVal val="visible"/>
-                                      </p:to>
-                                    </p:set>
-                                  </p:childTnLst>
-                                </p:cTn>
-                              </p:par>
-                            </p:childTnLst>
-                          </p:cTn>
-                        </p:par>
-                      </p:childTnLst>
-                    </p:cTn>
-                  </p:par>
-                  <p:par>
-                    <p:cTn fill="hold">
-                      <p:stCondLst>
-                        <p:cond delay="indefinite"/>
-                      </p:stCondLst>
-                      <p:childTnLst>
-                        <p:par>
-                          <p:cTn fill="hold">
-                            <p:stCondLst>
-                              <p:cond delay="0"/>
-                            </p:stCondLst>
-                            <p:childTnLst>
-                              <p:par>
-                                <p:cTn fill="hold" nodeType="clickEffect" presetClass="entr" presetID="1" presetSubtype="0">
-                                  <p:stCondLst>
-                                    <p:cond delay="0"/>
-                                  </p:stCondLst>
-                                  <p:childTnLst>
-                                    <p:set>
-                                      <p:cBhvr>
-                                        <p:cTn dur="1" fill="hold">
-                                          <p:stCondLst>
-                                            <p:cond delay="0"/>
-                                          </p:stCondLst>
-                                        </p:cTn>
-                                        <p:tgtEl>
-                                          <p:spTgt spid="274"/>
-                                        </p:tgtEl>
-                                        <p:attrNameLst>
-                                          <p:attrName>style.visibility</p:attrName>
-                                        </p:attrNameLst>
-                                      </p:cBhvr>
-                                      <p:to>
-                                        <p:strVal val="visible"/>
-                                      </p:to>
-                                    </p:set>
-                                  </p:childTnLst>
-                                </p:cTn>
-                              </p:par>
-                            </p:childTnLst>
-                          </p:cTn>
-                        </p:par>
-                      </p:childTnLst>
-                    </p:cTn>
-                  </p:par>
-                  <p:par>
-                    <p:cTn fill="hold">
-                      <p:stCondLst>
-                        <p:cond delay="indefinite"/>
-                      </p:stCondLst>
-                      <p:childTnLst>
-                        <p:par>
-                          <p:cTn fill="hold">
-                            <p:stCondLst>
-                              <p:cond delay="0"/>
-                            </p:stCondLst>
-                            <p:childTnLst>
-                              <p:par>
-                                <p:cTn fill="hold" nodeType="clickEffect" presetClass="entr" presetID="1" presetSubtype="0">
-                                  <p:stCondLst>
-                                    <p:cond delay="0"/>
-                                  </p:stCondLst>
-                                  <p:childTnLst>
-                                    <p:set>
-                                      <p:cBhvr>
-                                        <p:cTn dur="1" fill="hold">
-                                          <p:stCondLst>
-                                            <p:cond delay="0"/>
-                                          </p:stCondLst>
-                                        </p:cTn>
-                                        <p:tgtEl>
-                                          <p:spTgt spid="275"/>
-                                        </p:tgtEl>
-                                        <p:attrNameLst>
-                                          <p:attrName>style.visibility</p:attrName>
-                                        </p:attrNameLst>
-                                      </p:cBhvr>
-                                      <p:to>
-                                        <p:strVal val="visible"/>
-                                      </p:to>
-                                    </p:set>
-                                  </p:childTnLst>
-                                </p:cTn>
-                              </p:par>
-                            </p:childTnLst>
-                          </p:cTn>
-                        </p:par>
-                      </p:childTnLst>
-                    </p:cTn>
-                  </p:par>
-                </p:childTnLst>
-              </p:cTn>
-              <p:prevCondLst>
-                <p:cond evt="onPrev">
-                  <p:tgtEl>
-                    <p:sldTgt/>
-                  </p:tgtEl>
-                </p:cond>
-              </p:prevCondLst>
-              <p:nextCondLst>
-                <p:cond evt="onNext">
-                  <p:tgtEl>
-                    <p:sldTgt/>
-                  </p:tgtEl>
-                </p:cond>
-              </p:nextCondLst>
-            </p:seq>
-          </p:childTnLst>
-        </p:cTn>
-      </p:par>
-    </p:tnLst>
-  </p:timing>
-</p:sld>
-</file>
-
-<file path=ppt/slides/slide36.xml><?xml version="1.0" encoding="utf-8"?>
-<p:sld xmlns:a="http://schemas.openxmlformats.org/drawingml/2006/main" xmlns:r="http://schemas.openxmlformats.org/officeDocument/2006/relationships" xmlns:mc="http://schemas.openxmlformats.org/markup-compatibility/2006" xmlns:mv="urn:schemas-microsoft-com:mac:vml" xmlns:p="http://schemas.openxmlformats.org/presentationml/2006/main" xmlns:c="http://schemas.openxmlformats.org/drawingml/2006/chart" xmlns:dgm="http://schemas.openxmlformats.org/drawingml/2006/diagram" xmlns:o="urn:schemas-microsoft-com:office:office" xmlns:v="urn:schemas-microsoft-com:vml" xmlns:pvml="urn:schemas-microsoft-com:office:powerpoint" xmlns:com="http://schemas.openxmlformats.org/drawingml/2006/compatibility" xmlns:p14="http://schemas.microsoft.com/office/powerpoint/2010/main" xmlns:p15="http://schemas.microsoft.com/office/powerpoint/2012/main" xmlns:ahyp="http://schemas.microsoft.com/office/drawing/2018/hyperlinkcolor">
-  <p:cSld>
-    <p:spTree>
-      <p:nvGrpSpPr>
-        <p:cNvPr id="279" name="Shape 279"/>
-        <p:cNvGrpSpPr/>
-        <p:nvPr/>
-      </p:nvGrpSpPr>
-      <p:grpSpPr>
-        <a:xfrm>
-          <a:off x="0" y="0"/>
-          <a:ext cx="0" cy="0"/>
-          <a:chOff x="0" y="0"/>
-          <a:chExt cx="0" cy="0"/>
-        </a:xfrm>
-      </p:grpSpPr>
-      <p:sp>
-        <p:nvSpPr>
-          <p:cNvPr id="280" name="Google Shape;280;p43"/>
-          <p:cNvSpPr txBox="1"/>
-          <p:nvPr>
-            <p:ph type="title"/>
-          </p:nvPr>
-        </p:nvSpPr>
-        <p:spPr>
-          <a:xfrm>
-            <a:off x="311700" y="195615"/>
-            <a:ext cx="8520600" cy="572700"/>
-          </a:xfrm>
-          <a:prstGeom prst="rect">
-            <a:avLst/>
-          </a:prstGeom>
-        </p:spPr>
-        <p:txBody>
-          <a:bodyPr anchorCtr="0" anchor="t" bIns="91425" lIns="91425" spcFirstLastPara="1" rIns="91425" wrap="square" tIns="91425">
-            <a:normAutofit fontScale="90000"/>
-          </a:bodyPr>
-          <a:lstStyle/>
-          <a:p>
-            <a:pPr indent="0" lvl="0" marL="0" rtl="0" algn="l">
-              <a:spcBef>
-                <a:spcPts val="0"/>
-              </a:spcBef>
-              <a:spcAft>
-                <a:spcPts val="0"/>
-              </a:spcAft>
-              <a:buNone/>
-            </a:pPr>
-            <a:r>
-              <a:rPr lang="en">
-                <a:solidFill>
-                  <a:schemeClr val="accent5"/>
-                </a:solidFill>
-              </a:rPr>
-              <a:t>Tilemap Implementation</a:t>
-            </a:r>
-            <a:endParaRPr>
-              <a:solidFill>
-                <a:schemeClr val="accent5"/>
-              </a:solidFill>
-            </a:endParaRPr>
-          </a:p>
-        </p:txBody>
-      </p:sp>
-      <p:sp>
-        <p:nvSpPr>
-          <p:cNvPr id="281" name="Google Shape;281;p43"/>
-          <p:cNvSpPr txBox="1"/>
-          <p:nvPr>
-            <p:ph idx="1" type="body"/>
-          </p:nvPr>
-        </p:nvSpPr>
-        <p:spPr>
-          <a:xfrm>
-            <a:off x="311700" y="885950"/>
-            <a:ext cx="8520600" cy="4023300"/>
-          </a:xfrm>
-          <a:prstGeom prst="rect">
-            <a:avLst/>
-          </a:prstGeom>
-        </p:spPr>
-        <p:txBody>
-          <a:bodyPr anchorCtr="0" anchor="ctr" bIns="91425" lIns="91425" spcFirstLastPara="1" rIns="91425" wrap="square" tIns="91425">
-            <a:normAutofit/>
-          </a:bodyPr>
-          <a:lstStyle/>
-          <a:p>
-            <a:pPr indent="0" lvl="0" marL="0" rtl="0" algn="ctr">
-              <a:spcBef>
-                <a:spcPts val="0"/>
-              </a:spcBef>
-              <a:spcAft>
-                <a:spcPts val="1200"/>
-              </a:spcAft>
-              <a:buNone/>
-            </a:pPr>
-            <a:r>
-              <a:rPr lang="en" sz="2900">
-                <a:latin typeface="VT323"/>
-                <a:ea typeface="VT323"/>
-                <a:cs typeface="VT323"/>
-                <a:sym typeface="VT323"/>
-              </a:rPr>
-              <a:t>DEMO!</a:t>
-            </a:r>
-            <a:endParaRPr/>
-          </a:p>
-          <a:p>
-            <a:pPr indent="0" lvl="0" marL="0" rtl="0" algn="ctr">
-              <a:spcBef>
-                <a:spcPts val="0"/>
-              </a:spcBef>
-              <a:spcAft>
-                <a:spcPts val="0"/>
-              </a:spcAft>
-              <a:buNone/>
-            </a:pPr>
-            <a:r>
-              <a:rPr lang="en" sz="1800"/>
-              <a:t>Snake4: the room, drawn from tilemap-definition.xml</a:t>
-            </a:r>
-            <a:endParaRPr sz="1800"/>
-          </a:p>
-        </p:txBody>
-      </p:sp>
-    </p:spTree>
-  </p:cSld>
-  <p:clrMapOvr>
-    <a:masterClrMapping/>
-  </p:clrMapOvr>
-</p:sld>
-</file>
-
-<file path=ppt/slides/slide37.xml><?xml version="1.0" encoding="utf-8"?>
 <p:sld xmlns:a="http://schemas.openxmlformats.org/drawingml/2006/main" xmlns:r="http://schemas.openxmlformats.org/officeDocument/2006/relationships" xmlns:mc="http://schemas.openxmlformats.org/markup-compatibility/2006" xmlns:mv="urn:schemas-microsoft-com:mac:vml" xmlns:p="http://schemas.openxmlformats.org/presentationml/2006/main" xmlns:c="http://schemas.openxmlformats.org/drawingml/2006/chart" xmlns:dgm="http://schemas.openxmlformats.org/drawingml/2006/diagram" xmlns:o="urn:schemas-microsoft-com:office:office" xmlns:v="urn:schemas-microsoft-com:vml" xmlns:pvml="urn:schemas-microsoft-com:office:powerpoint" xmlns:com="http://schemas.openxmlformats.org/drawingml/2006/compatibility" xmlns:p14="http://schemas.microsoft.com/office/powerpoint/2010/main" xmlns:p15="http://schemas.microsoft.com/office/powerpoint/2012/main" xmlns:ahyp="http://schemas.microsoft.com/office/drawing/2018/hyperlinkcolor">
   <p:cSld>
     <p:spTree>
@@ -14332,7 +16145,7 @@
 </p:sld>
 </file>
 
-<file path=ppt/slides/slide38.xml><?xml version="1.0" encoding="utf-8"?>
+<file path=ppt/slides/slide31.xml><?xml version="1.0" encoding="utf-8"?>
 <p:sld xmlns:a="http://schemas.openxmlformats.org/drawingml/2006/main" xmlns:r="http://schemas.openxmlformats.org/officeDocument/2006/relationships" xmlns:mc="http://schemas.openxmlformats.org/markup-compatibility/2006" xmlns:mv="urn:schemas-microsoft-com:mac:vml" xmlns:p="http://schemas.openxmlformats.org/presentationml/2006/main" xmlns:c="http://schemas.openxmlformats.org/drawingml/2006/chart" xmlns:dgm="http://schemas.openxmlformats.org/drawingml/2006/diagram" xmlns:o="urn:schemas-microsoft-com:office:office" xmlns:v="urn:schemas-microsoft-com:vml" xmlns:pvml="urn:schemas-microsoft-com:office:powerpoint" xmlns:com="http://schemas.openxmlformats.org/drawingml/2006/compatibility" xmlns:p14="http://schemas.microsoft.com/office/powerpoint/2010/main" xmlns:p15="http://schemas.microsoft.com/office/powerpoint/2012/main" xmlns:ahyp="http://schemas.microsoft.com/office/drawing/2018/hyperlinkcolor">
   <p:cSld>
     <p:spTree>
@@ -15181,7 +16994,7 @@
 </p:sld>
 </file>
 
-<file path=ppt/slides/slide39.xml><?xml version="1.0" encoding="utf-8"?>
+<file path=ppt/slides/slide32.xml><?xml version="1.0" encoding="utf-8"?>
 <p:sld xmlns:a="http://schemas.openxmlformats.org/drawingml/2006/main" xmlns:r="http://schemas.openxmlformats.org/officeDocument/2006/relationships" xmlns:mc="http://schemas.openxmlformats.org/markup-compatibility/2006" xmlns:mv="urn:schemas-microsoft-com:mac:vml" xmlns:p="http://schemas.openxmlformats.org/presentationml/2006/main" xmlns:c="http://schemas.openxmlformats.org/drawingml/2006/chart" xmlns:dgm="http://schemas.openxmlformats.org/drawingml/2006/diagram" xmlns:o="urn:schemas-microsoft-com:office:office" xmlns:v="urn:schemas-microsoft-com:vml" xmlns:pvml="urn:schemas-microsoft-com:office:powerpoint" xmlns:com="http://schemas.openxmlformats.org/drawingml/2006/compatibility" xmlns:p14="http://schemas.microsoft.com/office/powerpoint/2010/main" xmlns:p15="http://schemas.microsoft.com/office/powerpoint/2012/main" xmlns:ahyp="http://schemas.microsoft.com/office/drawing/2018/hyperlinkcolor">
   <p:cSld>
     <p:spTree>
@@ -16013,203 +17826,7 @@
 </p:sld>
 </file>
 
-<file path=ppt/slides/slide4.xml><?xml version="1.0" encoding="utf-8"?>
-<p:sld xmlns:a="http://schemas.openxmlformats.org/drawingml/2006/main" xmlns:r="http://schemas.openxmlformats.org/officeDocument/2006/relationships" xmlns:mc="http://schemas.openxmlformats.org/markup-compatibility/2006" xmlns:mv="urn:schemas-microsoft-com:mac:vml" xmlns:p="http://schemas.openxmlformats.org/presentationml/2006/main" xmlns:c="http://schemas.openxmlformats.org/drawingml/2006/chart" xmlns:dgm="http://schemas.openxmlformats.org/drawingml/2006/diagram" xmlns:o="urn:schemas-microsoft-com:office:office" xmlns:v="urn:schemas-microsoft-com:vml" xmlns:pvml="urn:schemas-microsoft-com:office:powerpoint" xmlns:com="http://schemas.openxmlformats.org/drawingml/2006/compatibility" xmlns:p14="http://schemas.microsoft.com/office/powerpoint/2010/main" xmlns:p15="http://schemas.microsoft.com/office/powerpoint/2012/main" xmlns:ahyp="http://schemas.microsoft.com/office/drawing/2018/hyperlinkcolor">
-  <p:cSld>
-    <p:spTree>
-      <p:nvGrpSpPr>
-        <p:cNvPr id="56" name="Shape 56"/>
-        <p:cNvGrpSpPr/>
-        <p:nvPr/>
-      </p:nvGrpSpPr>
-      <p:grpSpPr>
-        <a:xfrm>
-          <a:off x="0" y="0"/>
-          <a:ext cx="0" cy="0"/>
-          <a:chOff x="0" y="0"/>
-          <a:chExt cx="0" cy="0"/>
-        </a:xfrm>
-      </p:grpSpPr>
-      <p:sp>
-        <p:nvSpPr>
-          <p:cNvPr id="57" name="Google Shape;57;p12"/>
-          <p:cNvSpPr txBox="1"/>
-          <p:nvPr>
-            <p:ph type="title"/>
-          </p:nvPr>
-        </p:nvSpPr>
-        <p:spPr>
-          <a:xfrm>
-            <a:off x="311700" y="195615"/>
-            <a:ext cx="8520600" cy="572700"/>
-          </a:xfrm>
-          <a:prstGeom prst="rect">
-            <a:avLst/>
-          </a:prstGeom>
-        </p:spPr>
-        <p:txBody>
-          <a:bodyPr anchorCtr="0" anchor="t" bIns="91425" lIns="91425" spcFirstLastPara="1" rIns="91425" wrap="square" tIns="91425">
-            <a:normAutofit fontScale="90000"/>
-          </a:bodyPr>
-          <a:lstStyle/>
-          <a:p>
-            <a:pPr indent="0" lvl="0" marL="0" rtl="0" algn="l">
-              <a:spcBef>
-                <a:spcPts val="0"/>
-              </a:spcBef>
-              <a:spcAft>
-                <a:spcPts val="0"/>
-              </a:spcAft>
-              <a:buNone/>
-            </a:pPr>
-            <a:r>
-              <a:rPr lang="en"/>
-              <a:t>Source Code</a:t>
-            </a:r>
-            <a:endParaRPr/>
-          </a:p>
-        </p:txBody>
-      </p:sp>
-      <p:sp>
-        <p:nvSpPr>
-          <p:cNvPr id="58" name="Google Shape;58;p12"/>
-          <p:cNvSpPr txBox="1"/>
-          <p:nvPr>
-            <p:ph idx="1" type="body"/>
-          </p:nvPr>
-        </p:nvSpPr>
-        <p:spPr>
-          <a:xfrm>
-            <a:off x="311700" y="885950"/>
-            <a:ext cx="8520600" cy="4023300"/>
-          </a:xfrm>
-          <a:prstGeom prst="rect">
-            <a:avLst/>
-          </a:prstGeom>
-        </p:spPr>
-        <p:txBody>
-          <a:bodyPr anchorCtr="0" anchor="t" bIns="91425" lIns="91425" spcFirstLastPara="1" rIns="91425" wrap="square" tIns="91425">
-            <a:normAutofit/>
-          </a:bodyPr>
-          <a:lstStyle/>
-          <a:p>
-            <a:pPr indent="-330200" lvl="0" marL="457200" rtl="0" algn="l">
-              <a:spcBef>
-                <a:spcPts val="0"/>
-              </a:spcBef>
-              <a:spcAft>
-                <a:spcPts val="0"/>
-              </a:spcAft>
-              <a:buSzPts val="1600"/>
-              <a:buChar char="●"/>
-            </a:pPr>
-            <a:r>
-              <a:rPr lang="en"/>
-              <a:t>All Source code for today’s game can be found here:</a:t>
-            </a:r>
-            <a:endParaRPr/>
-          </a:p>
-          <a:p>
-            <a:pPr indent="-317500" lvl="1" marL="914400" rtl="0" algn="l">
-              <a:spcBef>
-                <a:spcPts val="0"/>
-              </a:spcBef>
-              <a:spcAft>
-                <a:spcPts val="0"/>
-              </a:spcAft>
-              <a:buSzPts val="1400"/>
-              <a:buChar char="○"/>
-            </a:pPr>
-            <a:r>
-              <a:rPr lang="en" u="sng">
-                <a:solidFill>
-                  <a:schemeClr val="hlink"/>
-                </a:solidFill>
-                <a:hlinkClick r:id="rId3"/>
-              </a:rPr>
-              <a:t>https://github.com/Metamate/gmd2-snake</a:t>
-            </a:r>
-            <a:endParaRPr/>
-          </a:p>
-          <a:p>
-            <a:pPr indent="-330200" lvl="0" marL="457200" rtl="0" algn="l">
-              <a:spcBef>
-                <a:spcPts val="0"/>
-              </a:spcBef>
-              <a:spcAft>
-                <a:spcPts val="0"/>
-              </a:spcAft>
-              <a:buSzPts val="1600"/>
-              <a:buChar char="●"/>
-            </a:pPr>
-            <a:r>
-              <a:rPr lang="en"/>
-              <a:t>The game is built up in steps: Snake0 → Snake9</a:t>
-            </a:r>
-            <a:endParaRPr/>
-          </a:p>
-          <a:p>
-            <a:pPr indent="-317500" lvl="1" marL="914400" rtl="0" algn="l">
-              <a:spcBef>
-                <a:spcPts val="0"/>
-              </a:spcBef>
-              <a:spcAft>
-                <a:spcPts val="0"/>
-              </a:spcAft>
-              <a:buSzPts val="1400"/>
-              <a:buChar char="○"/>
-            </a:pPr>
-            <a:r>
-              <a:rPr lang="en"/>
-              <a:t>Each step is a separate project that adds one concept</a:t>
-            </a:r>
-            <a:endParaRPr/>
-          </a:p>
-          <a:p>
-            <a:pPr indent="-317500" lvl="1" marL="914400" rtl="0" algn="l">
-              <a:spcBef>
-                <a:spcPts val="0"/>
-              </a:spcBef>
-              <a:spcAft>
-                <a:spcPts val="0"/>
-              </a:spcAft>
-              <a:buSzPts val="1400"/>
-              <a:buChar char="○"/>
-            </a:pPr>
-            <a:r>
-              <a:rPr lang="en"/>
-              <a:t>Compare neighbouring steps to see exactly what changed</a:t>
-            </a:r>
-            <a:endParaRPr/>
-          </a:p>
-          <a:p>
-            <a:pPr indent="-330200" lvl="0" marL="457200" rtl="0" algn="l">
-              <a:spcBef>
-                <a:spcPts val="0"/>
-              </a:spcBef>
-              <a:spcAft>
-                <a:spcPts val="0"/>
-              </a:spcAft>
-              <a:buSzPts val="1600"/>
-              <a:buChar char="●"/>
-            </a:pPr>
-            <a:r>
-              <a:rPr lang="en"/>
-              <a:t>Snake9 is the finished game, and the starting point for the exercises</a:t>
-            </a:r>
-            <a:endParaRPr/>
-          </a:p>
-        </p:txBody>
-      </p:sp>
-    </p:spTree>
-  </p:cSld>
-  <p:clrMapOvr>
-    <a:masterClrMapping/>
-  </p:clrMapOvr>
-</p:sld>
-</file>
-
-<file path=ppt/slides/slide40.xml><?xml version="1.0" encoding="utf-8"?>
+<file path=ppt/slides/slide33.xml><?xml version="1.0" encoding="utf-8"?>
 <p:sld xmlns:a="http://schemas.openxmlformats.org/drawingml/2006/main" xmlns:r="http://schemas.openxmlformats.org/officeDocument/2006/relationships" xmlns:mc="http://schemas.openxmlformats.org/markup-compatibility/2006" xmlns:mv="urn:schemas-microsoft-com:mac:vml" xmlns:p="http://schemas.openxmlformats.org/presentationml/2006/main" xmlns:c="http://schemas.openxmlformats.org/drawingml/2006/chart" xmlns:dgm="http://schemas.openxmlformats.org/drawingml/2006/diagram" xmlns:o="urn:schemas-microsoft-com:office:office" xmlns:v="urn:schemas-microsoft-com:vml" xmlns:pvml="urn:schemas-microsoft-com:office:powerpoint" xmlns:com="http://schemas.openxmlformats.org/drawingml/2006/compatibility" xmlns:p14="http://schemas.microsoft.com/office/powerpoint/2010/main" xmlns:p15="http://schemas.microsoft.com/office/powerpoint/2012/main" xmlns:ahyp="http://schemas.microsoft.com/office/drawing/2018/hyperlinkcolor">
   <p:cSld>
     <p:spTree>
@@ -17041,7 +18658,7 @@
 </p:sld>
 </file>
 
-<file path=ppt/slides/slide41.xml><?xml version="1.0" encoding="utf-8"?>
+<file path=ppt/slides/slide34.xml><?xml version="1.0" encoding="utf-8"?>
 <p:sld xmlns:a="http://schemas.openxmlformats.org/drawingml/2006/main" xmlns:r="http://schemas.openxmlformats.org/officeDocument/2006/relationships" xmlns:mc="http://schemas.openxmlformats.org/markup-compatibility/2006" xmlns:mv="urn:schemas-microsoft-com:mac:vml" xmlns:p="http://schemas.openxmlformats.org/presentationml/2006/main" xmlns:c="http://schemas.openxmlformats.org/drawingml/2006/chart" xmlns:dgm="http://schemas.openxmlformats.org/drawingml/2006/diagram" xmlns:o="urn:schemas-microsoft-com:office:office" xmlns:v="urn:schemas-microsoft-com:vml" xmlns:pvml="urn:schemas-microsoft-com:office:powerpoint" xmlns:com="http://schemas.openxmlformats.org/drawingml/2006/compatibility" xmlns:p14="http://schemas.microsoft.com/office/powerpoint/2010/main" xmlns:p15="http://schemas.microsoft.com/office/powerpoint/2012/main" xmlns:ahyp="http://schemas.microsoft.com/office/drawing/2018/hyperlinkcolor">
   <p:cSld>
     <p:spTree>
@@ -17249,19 +18866,26 @@
 </p:sld>
 </file>
 
-<file path=ppt/slides/slide42.xml><?xml version="1.0" encoding="utf-8"?>
-<p:sld xmlns:a="http://schemas.openxmlformats.org/drawingml/2006/main" xmlns:p="http://schemas.openxmlformats.org/presentationml/2006/main" xmlns:r="http://schemas.openxmlformats.org/officeDocument/2006/relationships">
+<file path=ppt/slides/slide4.xml><?xml version="1.0" encoding="utf-8"?>
+<p:sld xmlns:a="http://schemas.openxmlformats.org/drawingml/2006/main" xmlns:r="http://schemas.openxmlformats.org/officeDocument/2006/relationships" xmlns:mc="http://schemas.openxmlformats.org/markup-compatibility/2006" xmlns:mv="urn:schemas-microsoft-com:mac:vml" xmlns:p="http://schemas.openxmlformats.org/presentationml/2006/main" xmlns:c="http://schemas.openxmlformats.org/drawingml/2006/chart" xmlns:dgm="http://schemas.openxmlformats.org/drawingml/2006/diagram" xmlns:o="urn:schemas-microsoft-com:office:office" xmlns:v="urn:schemas-microsoft-com:vml" xmlns:pvml="urn:schemas-microsoft-com:office:powerpoint" xmlns:com="http://schemas.openxmlformats.org/drawingml/2006/compatibility" xmlns:p14="http://schemas.microsoft.com/office/powerpoint/2010/main" xmlns:p15="http://schemas.microsoft.com/office/powerpoint/2012/main" xmlns:ahyp="http://schemas.microsoft.com/office/drawing/2018/hyperlinkcolor">
   <p:cSld>
     <p:spTree>
       <p:nvGrpSpPr>
-        <p:cNvPr id="1" name=""/>
+        <p:cNvPr id="56" name="Shape 56"/>
         <p:cNvGrpSpPr/>
         <p:nvPr/>
       </p:nvGrpSpPr>
-      <p:grpSpPr/>
+      <p:grpSpPr>
+        <a:xfrm>
+          <a:off x="0" y="0"/>
+          <a:ext cx="0" cy="0"/>
+          <a:chOff x="0" y="0"/>
+          <a:chExt cx="0" cy="0"/>
+        </a:xfrm>
+      </p:grpSpPr>
       <p:sp>
         <p:nvSpPr>
-          <p:cNvPr id="293" name="Google Shape;293;p45"/>
+          <p:cNvPr id="57" name="Google Shape;57;p12"/>
           <p:cNvSpPr txBox="1"/>
           <p:nvPr>
             <p:ph type="title"/>
@@ -17292,24 +18916,16 @@
               <a:buNone/>
             </a:pPr>
             <a:r>
-              <a:rPr lang="en">
-                <a:solidFill>
-                  <a:schemeClr val="accent5"/>
-                </a:solidFill>
-              </a:rPr>
-              <a:t>Assets as Data</a:t>
-            </a:r>
-            <a:endParaRPr>
-              <a:solidFill>
-                <a:schemeClr val="accent5"/>
-              </a:solidFill>
-            </a:endParaRPr>
+              <a:rPr lang="en"/>
+              <a:t>Source Code</a:t>
+            </a:r>
+            <a:endParaRPr/>
           </a:p>
         </p:txBody>
       </p:sp>
       <p:sp>
         <p:nvSpPr>
-          <p:cNvPr id="294" name="Google Shape;294;p45"/>
+          <p:cNvPr id="58" name="Google Shape;58;p12"/>
           <p:cNvSpPr txBox="1"/>
           <p:nvPr>
             <p:ph idx="1" type="body"/>
@@ -17342,7 +18958,7 @@
             </a:pPr>
             <a:r>
               <a:rPr lang="en"/>
-              <a:t>The XML files describe the assets</a:t>
+              <a:t>All Source code for today’s game can be found here:</a:t>
             </a:r>
             <a:endParaRPr/>
           </a:p>
@@ -17358,8 +18974,13 @@
               <a:buChar char="○"/>
             </a:pPr>
             <a:r>
-              <a:rPr lang="en"/>
-              <a:t>Which part of the image is the snake, how the bat’s animation runs, which tile goes where</a:t>
+              <a:rPr lang="en" u="sng">
+                <a:solidFill>
+                  <a:schemeClr val="hlink"/>
+                </a:solidFill>
+                <a:hlinkClick r:id="rId3"/>
+              </a:rPr>
+              <a:t>https://github.com/Metamate/gar-games/tree/main/03-snake</a:t>
             </a:r>
             <a:endParaRPr/>
           </a:p>
@@ -17376,7 +18997,7 @@
             </a:pPr>
             <a:r>
               <a:rPr lang="en"/>
-              <a:t>Data can change without the code changing</a:t>
+              <a:t>The game is built up in steps: Snake0 → Snake9</a:t>
             </a:r>
             <a:endParaRPr/>
           </a:p>
@@ -17393,7 +19014,7 @@
             </a:pPr>
             <a:r>
               <a:rPr lang="en"/>
-              <a:t>A new frame, a faster animation or a new room: edit a file, not C#</a:t>
+              <a:t>Each step is a separate project that adds one concept</a:t>
             </a:r>
             <a:endParaRPr/>
           </a:p>
@@ -17410,7 +19031,7 @@
             </a:pPr>
             <a:r>
               <a:rPr lang="en"/>
-              <a:t>Artists and designers can work without touching the code</a:t>
+              <a:t>Compare neighbouring steps to see exactly what changed</a:t>
             </a:r>
             <a:endParaRPr/>
           </a:p>
@@ -17427,1678 +19048,9 @@
             </a:pPr>
             <a:r>
               <a:rPr lang="en"/>
-              <a:t>The code gets smaller and more general</a:t>
+              <a:t>Snake9 is the finished game, and the starting point for the exercises</a:t>
             </a:r>
             <a:endParaRPr/>
-          </a:p>
-        </p:txBody>
-      </p:sp>
-    </p:spTree>
-  </p:cSld>
-  <p:clrMapOvr>
-    <a:masterClrMapping/>
-  </p:clrMapOvr>
-</p:sld>
-</file>
-
-<file path=ppt/slides/slide43.xml><?xml version="1.0" encoding="utf-8"?>
-<p:sld xmlns:a="http://schemas.openxmlformats.org/drawingml/2006/main" xmlns:p="http://schemas.openxmlformats.org/presentationml/2006/main" xmlns:r="http://schemas.openxmlformats.org/officeDocument/2006/relationships">
-  <p:cSld>
-    <p:spTree>
-      <p:nvGrpSpPr>
-        <p:cNvPr id="1" name=""/>
-        <p:cNvGrpSpPr/>
-        <p:nvPr/>
-      </p:nvGrpSpPr>
-      <p:grpSpPr/>
-      <p:sp>
-        <p:nvSpPr>
-          <p:cNvPr id="140" name="Google Shape;140;p23"/>
-          <p:cNvSpPr txBox="1"/>
-          <p:nvPr>
-            <p:ph type="title"/>
-          </p:nvPr>
-        </p:nvSpPr>
-        <p:spPr>
-          <a:xfrm>
-            <a:off x="311700" y="195615"/>
-            <a:ext cx="8520600" cy="572700"/>
-          </a:xfrm>
-          <a:prstGeom prst="rect">
-            <a:avLst/>
-          </a:prstGeom>
-        </p:spPr>
-        <p:txBody>
-          <a:bodyPr anchorCtr="0" anchor="t" bIns="91425" lIns="91425" spcFirstLastPara="1" rIns="91425" wrap="square" tIns="91425">
-            <a:normAutofit fontScale="90000"/>
-          </a:bodyPr>
-          <a:lstStyle/>
-          <a:p>
-            <a:pPr indent="0" lvl="0" marL="0" rtl="0" algn="l">
-              <a:spcBef>
-                <a:spcPts val="0"/>
-              </a:spcBef>
-              <a:spcAft>
-                <a:spcPts val="0"/>
-              </a:spcAft>
-              <a:buNone/>
-            </a:pPr>
-            <a:r>
-              <a:rPr lang="en"/>
-              <a:t>Fixed-Tick Movement</a:t>
-            </a:r>
-            <a:endParaRPr/>
-          </a:p>
-        </p:txBody>
-      </p:sp>
-      <p:sp>
-        <p:nvSpPr>
-          <p:cNvPr id="293" name="Google Shape;293;p45"/>
-          <p:cNvSpPr txBox="1"/>
-          <p:nvPr>
-            <p:ph type="title"/>
-          </p:nvPr>
-        </p:nvSpPr>
-        <p:spPr>
-          <a:xfrm>
-            <a:off x="311700" y="1152475"/>
-            <a:ext cx="3700000" cy="3500000"/>
-          </a:xfrm>
-          <a:prstGeom prst="rect">
-            <a:avLst/>
-          </a:prstGeom>
-        </p:spPr>
-        <p:txBody>
-          <a:bodyPr anchorCtr="0" anchor="t" bIns="91425" lIns="91425" spcFirstLastPara="1" rIns="91425" wrap="square" tIns="91425">
-            <a:normAutofit fontScale="90000"/>
-          </a:bodyPr>
-          <a:lstStyle/>
-          <a:p>
-            <a:pPr indent="-330200" lvl="0" marL="457200" rtl="0" algn="l">
-              <a:buClr>
-                <a:srgbClr val="DEE2E6"/>
-              </a:buClr>
-              <a:spcBef>
-                <a:spcPts val="0"/>
-              </a:spcBef>
-              <a:spcAft>
-                <a:spcPts val="0"/>
-              </a:spcAft>
-              <a:buSzPts val="1600"/>
-              <a:buChar char="●"/>
-            </a:pPr>
-            <a:r>
-              <a:rPr lang="en" sz="1600">
-                <a:solidFill>
-                  <a:srgbClr val="DEE2E6"/>
-                </a:solidFill>
-              </a:rPr>
-              <a:t>A snake jumps one cell at a time, however fast the game runs</a:t>
-            </a:r>
-            <a:endParaRPr/>
-          </a:p>
-          <a:p>
-            <a:pPr indent="-330200" lvl="0" marL="457200" rtl="0" algn="l">
-              <a:buClr>
-                <a:srgbClr val="DEE2E6"/>
-              </a:buClr>
-              <a:spcBef>
-                <a:spcPts val="0"/>
-              </a:spcBef>
-              <a:spcAft>
-                <a:spcPts val="0"/>
-              </a:spcAft>
-              <a:buSzPts val="1600"/>
-              <a:buChar char="●"/>
-            </a:pPr>
-            <a:r>
-              <a:rPr lang="en" sz="1600">
-                <a:solidFill>
-                  <a:srgbClr val="DEE2E6"/>
-                </a:solidFill>
-              </a:rPr>
-              <a:t>An accumulator collects real time</a:t>
-            </a:r>
-            <a:endParaRPr/>
-          </a:p>
-          <a:p>
-            <a:pPr indent="-317500" lvl="1" marL="914400" rtl="0" algn="l">
-              <a:buClr>
-                <a:srgbClr val="6C757D"/>
-              </a:buClr>
-              <a:spcBef>
-                <a:spcPts val="0"/>
-              </a:spcBef>
-              <a:spcAft>
-                <a:spcPts val="0"/>
-              </a:spcAft>
-              <a:buSzPts val="1400"/>
-              <a:buChar char="○"/>
-            </a:pPr>
-            <a:r>
-              <a:rPr lang="en" sz="1400">
-                <a:solidFill>
-                  <a:srgbClr val="6C757D"/>
-                </a:solidFill>
-              </a:rPr>
-              <a:t>Move once for every full tick</a:t>
-            </a:r>
-            <a:endParaRPr/>
-          </a:p>
-          <a:p>
-            <a:pPr indent="-317500" lvl="1" marL="914400" rtl="0" algn="l">
-              <a:buClr>
-                <a:srgbClr val="6C757D"/>
-              </a:buClr>
-              <a:spcBef>
-                <a:spcPts val="0"/>
-              </a:spcBef>
-              <a:spcAft>
-                <a:spcPts val="0"/>
-              </a:spcAft>
-              <a:buSzPts val="1400"/>
-              <a:buChar char="○"/>
-            </a:pPr>
-            <a:r>
-              <a:rPr lang="en" sz="1400">
-                <a:solidFill>
-                  <a:srgbClr val="6C757D"/>
-                </a:solidFill>
-              </a:rPr>
-              <a:t>Subtract, don’t reset: leftover time carries over</a:t>
-            </a:r>
-            <a:endParaRPr/>
-          </a:p>
-          <a:p>
-            <a:pPr indent="-330200" lvl="0" marL="457200" rtl="0" algn="l">
-              <a:buClr>
-                <a:srgbClr val="DEE2E6"/>
-              </a:buClr>
-              <a:spcBef>
-                <a:spcPts val="0"/>
-              </a:spcBef>
-              <a:spcAft>
-                <a:spcPts val="0"/>
-              </a:spcAft>
-              <a:buSzPts val="1600"/>
-              <a:buChar char="●"/>
-            </a:pPr>
-            <a:r>
-              <a:rPr lang="en" sz="1600">
-                <a:solidFill>
-                  <a:srgbClr val="DEE2E6"/>
-                </a:solidFill>
-              </a:rPr>
-              <a:t>Pong’s fixed timestep, in practice</a:t>
-            </a:r>
-            <a:endParaRPr/>
-          </a:p>
-        </p:txBody>
-      </p:sp>
-      <p:sp>
-        <p:nvSpPr>
-          <p:cNvPr id="141" name="Google Shape;141;p23"/>
-          <p:cNvSpPr txBox="1"/>
-          <p:nvPr>
-            <p:ph idx="2" type="body"/>
-          </p:nvPr>
-        </p:nvSpPr>
-        <p:spPr>
-          <a:xfrm>
-            <a:off x="4150000" y="1152475"/>
-            <a:ext cx="4750000" cy="3600000"/>
-          </a:xfrm>
-          <a:prstGeom prst="rect">
-            <a:avLst/>
-          </a:prstGeom>
-        </p:spPr>
-        <p:txBody>
-          <a:bodyPr anchorCtr="0" anchor="t" bIns="91425" lIns="91425" spcFirstLastPara="1" rIns="91425" wrap="square" tIns="91425">
-            <a:noAutofit/>
-          </a:bodyPr>
-          <a:lstStyle/>
-          <a:p>
-            <a:pPr indent="0" lvl="0" marL="0" rtl="0" algn="l">
-              <a:lnSpc>
-                <a:spcPct val="115000"/>
-              </a:lnSpc>
-              <a:spcBef>
-                <a:spcPts val="0"/>
-              </a:spcBef>
-              <a:spcAft>
-                <a:spcPts val="0"/>
-              </a:spcAft>
-              <a:buNone/>
-            </a:pPr>
-            <a:r>
-              <a:rPr lang="en" sz="1000">
-                <a:highlight>
-                  <a:schemeClr val="dk2"/>
-                </a:highlight>
-                <a:latin typeface="Consolas"/>
-                <a:ea typeface="Consolas"/>
-                <a:cs typeface="Consolas"/>
-                <a:sym typeface="Consolas"/>
-              </a:rPr>
-              <a:t>TimeSpan TickDuration =</a:t>
-            </a:r>
-            <a:endParaRPr sz="1000">
-              <a:solidFill>
-                <a:srgbClr val="CCCCCC"/>
-              </a:solidFill>
-              <a:highlight>
-                <a:schemeClr val="dk2"/>
-              </a:highlight>
-              <a:latin typeface="Consolas"/>
-              <a:ea typeface="Consolas"/>
-              <a:cs typeface="Consolas"/>
-              <a:sym typeface="Consolas"/>
-            </a:endParaRPr>
-          </a:p>
-          <a:p>
-            <a:pPr indent="0" lvl="0" marL="0" rtl="0" algn="l">
-              <a:lnSpc>
-                <a:spcPct val="115000"/>
-              </a:lnSpc>
-              <a:spcBef>
-                <a:spcPts val="0"/>
-              </a:spcBef>
-              <a:spcAft>
-                <a:spcPts val="0"/>
-              </a:spcAft>
-              <a:buNone/>
-            </a:pPr>
-            <a:r>
-              <a:rPr lang="en" sz="1000">
-                <a:highlight>
-                  <a:schemeClr val="dk2"/>
-                </a:highlight>
-                <a:latin typeface="Consolas"/>
-                <a:ea typeface="Consolas"/>
-                <a:cs typeface="Consolas"/>
-                <a:sym typeface="Consolas"/>
-              </a:rPr>
-              <a:t>    TimeSpan.FromMilliseconds(200);</a:t>
-            </a:r>
-            <a:endParaRPr sz="1000">
-              <a:solidFill>
-                <a:srgbClr val="CCCCCC"/>
-              </a:solidFill>
-              <a:highlight>
-                <a:schemeClr val="dk2"/>
-              </a:highlight>
-              <a:latin typeface="Consolas"/>
-              <a:ea typeface="Consolas"/>
-              <a:cs typeface="Consolas"/>
-              <a:sym typeface="Consolas"/>
-            </a:endParaRPr>
-          </a:p>
-          <a:p>
-            <a:pPr indent="0" lvl="0" marL="0" rtl="0" algn="l">
-              <a:lnSpc>
-                <a:spcPct val="115000"/>
-              </a:lnSpc>
-              <a:spcBef>
-                <a:spcPts val="0"/>
-              </a:spcBef>
-              <a:spcAft>
-                <a:spcPts val="0"/>
-              </a:spcAft>
-              <a:buNone/>
-            </a:pPr>
-            <a:r>
-              <a:rPr lang="en" sz="1000">
-                <a:highlight>
-                  <a:schemeClr val="dk2"/>
-                </a:highlight>
-                <a:latin typeface="Consolas"/>
-                <a:ea typeface="Consolas"/>
-                <a:cs typeface="Consolas"/>
-                <a:sym typeface="Consolas"/>
-              </a:rPr>
-              <a:t/>
-            </a:r>
-            <a:endParaRPr sz="1000">
-              <a:solidFill>
-                <a:srgbClr val="CCCCCC"/>
-              </a:solidFill>
-              <a:highlight>
-                <a:schemeClr val="dk2"/>
-              </a:highlight>
-              <a:latin typeface="Consolas"/>
-              <a:ea typeface="Consolas"/>
-              <a:cs typeface="Consolas"/>
-              <a:sym typeface="Consolas"/>
-            </a:endParaRPr>
-          </a:p>
-          <a:p>
-            <a:pPr indent="0" lvl="0" marL="0" rtl="0" algn="l">
-              <a:lnSpc>
-                <a:spcPct val="115000"/>
-              </a:lnSpc>
-              <a:spcBef>
-                <a:spcPts val="0"/>
-              </a:spcBef>
-              <a:spcAft>
-                <a:spcPts val="0"/>
-              </a:spcAft>
-              <a:buNone/>
-            </a:pPr>
-            <a:r>
-              <a:rPr lang="en" sz="1000">
-                <a:highlight>
-                  <a:schemeClr val="dk2"/>
-                </a:highlight>
-                <a:latin typeface="Consolas"/>
-                <a:ea typeface="Consolas"/>
-                <a:cs typeface="Consolas"/>
-                <a:sym typeface="Consolas"/>
-              </a:rPr>
-              <a:t>public void Update(GameTime gameTime)</a:t>
-            </a:r>
-            <a:endParaRPr sz="1000">
-              <a:solidFill>
-                <a:srgbClr val="CCCCCC"/>
-              </a:solidFill>
-              <a:highlight>
-                <a:schemeClr val="dk2"/>
-              </a:highlight>
-              <a:latin typeface="Consolas"/>
-              <a:ea typeface="Consolas"/>
-              <a:cs typeface="Consolas"/>
-              <a:sym typeface="Consolas"/>
-            </a:endParaRPr>
-          </a:p>
-          <a:p>
-            <a:pPr indent="0" lvl="0" marL="0" rtl="0" algn="l">
-              <a:lnSpc>
-                <a:spcPct val="115000"/>
-              </a:lnSpc>
-              <a:spcBef>
-                <a:spcPts val="0"/>
-              </a:spcBef>
-              <a:spcAft>
-                <a:spcPts val="0"/>
-              </a:spcAft>
-              <a:buNone/>
-            </a:pPr>
-            <a:r>
-              <a:rPr lang="en" sz="1000">
-                <a:highlight>
-                  <a:schemeClr val="dk2"/>
-                </a:highlight>
-                <a:latin typeface="Consolas"/>
-                <a:ea typeface="Consolas"/>
-                <a:cs typeface="Consolas"/>
-                <a:sym typeface="Consolas"/>
-              </a:rPr>
-              <a:t>{</a:t>
-            </a:r>
-            <a:endParaRPr sz="1000">
-              <a:solidFill>
-                <a:srgbClr val="CCCCCC"/>
-              </a:solidFill>
-              <a:highlight>
-                <a:schemeClr val="dk2"/>
-              </a:highlight>
-              <a:latin typeface="Consolas"/>
-              <a:ea typeface="Consolas"/>
-              <a:cs typeface="Consolas"/>
-              <a:sym typeface="Consolas"/>
-            </a:endParaRPr>
-          </a:p>
-          <a:p>
-            <a:pPr indent="0" lvl="0" marL="0" rtl="0" algn="l">
-              <a:lnSpc>
-                <a:spcPct val="115000"/>
-              </a:lnSpc>
-              <a:spcBef>
-                <a:spcPts val="0"/>
-              </a:spcBef>
-              <a:spcAft>
-                <a:spcPts val="0"/>
-              </a:spcAft>
-              <a:buNone/>
-            </a:pPr>
-            <a:r>
-              <a:rPr lang="en" sz="1000">
-                <a:highlight>
-                  <a:schemeClr val="dk2"/>
-                </a:highlight>
-                <a:latin typeface="Consolas"/>
-                <a:ea typeface="Consolas"/>
-                <a:cs typeface="Consolas"/>
-                <a:sym typeface="Consolas"/>
-              </a:rPr>
-              <a:t>    _elapsed += gameTime.ElapsedGameTime;</a:t>
-            </a:r>
-            <a:endParaRPr sz="1000">
-              <a:solidFill>
-                <a:srgbClr val="CCCCCC"/>
-              </a:solidFill>
-              <a:highlight>
-                <a:schemeClr val="dk2"/>
-              </a:highlight>
-              <a:latin typeface="Consolas"/>
-              <a:ea typeface="Consolas"/>
-              <a:cs typeface="Consolas"/>
-              <a:sym typeface="Consolas"/>
-            </a:endParaRPr>
-          </a:p>
-          <a:p>
-            <a:pPr indent="0" lvl="0" marL="0" rtl="0" algn="l">
-              <a:lnSpc>
-                <a:spcPct val="115000"/>
-              </a:lnSpc>
-              <a:spcBef>
-                <a:spcPts val="0"/>
-              </a:spcBef>
-              <a:spcAft>
-                <a:spcPts val="0"/>
-              </a:spcAft>
-              <a:buNone/>
-            </a:pPr>
-            <a:r>
-              <a:rPr lang="en" sz="1000">
-                <a:highlight>
-                  <a:schemeClr val="dk2"/>
-                </a:highlight>
-                <a:latin typeface="Consolas"/>
-                <a:ea typeface="Consolas"/>
-                <a:cs typeface="Consolas"/>
-                <a:sym typeface="Consolas"/>
-              </a:rPr>
-              <a:t>    while (_elapsed &gt;= TickDuration)</a:t>
-            </a:r>
-            <a:endParaRPr sz="1000">
-              <a:solidFill>
-                <a:srgbClr val="CCCCCC"/>
-              </a:solidFill>
-              <a:highlight>
-                <a:schemeClr val="dk2"/>
-              </a:highlight>
-              <a:latin typeface="Consolas"/>
-              <a:ea typeface="Consolas"/>
-              <a:cs typeface="Consolas"/>
-              <a:sym typeface="Consolas"/>
-            </a:endParaRPr>
-          </a:p>
-          <a:p>
-            <a:pPr indent="0" lvl="0" marL="0" rtl="0" algn="l">
-              <a:lnSpc>
-                <a:spcPct val="115000"/>
-              </a:lnSpc>
-              <a:spcBef>
-                <a:spcPts val="0"/>
-              </a:spcBef>
-              <a:spcAft>
-                <a:spcPts val="0"/>
-              </a:spcAft>
-              <a:buNone/>
-            </a:pPr>
-            <a:r>
-              <a:rPr lang="en" sz="1000">
-                <a:highlight>
-                  <a:schemeClr val="dk2"/>
-                </a:highlight>
-                <a:latin typeface="Consolas"/>
-                <a:ea typeface="Consolas"/>
-                <a:cs typeface="Consolas"/>
-                <a:sym typeface="Consolas"/>
-              </a:rPr>
-              <a:t>    {</a:t>
-            </a:r>
-            <a:endParaRPr sz="1000">
-              <a:solidFill>
-                <a:srgbClr val="CCCCCC"/>
-              </a:solidFill>
-              <a:highlight>
-                <a:schemeClr val="dk2"/>
-              </a:highlight>
-              <a:latin typeface="Consolas"/>
-              <a:ea typeface="Consolas"/>
-              <a:cs typeface="Consolas"/>
-              <a:sym typeface="Consolas"/>
-            </a:endParaRPr>
-          </a:p>
-          <a:p>
-            <a:pPr indent="0" lvl="0" marL="0" rtl="0" algn="l">
-              <a:lnSpc>
-                <a:spcPct val="115000"/>
-              </a:lnSpc>
-              <a:spcBef>
-                <a:spcPts val="0"/>
-              </a:spcBef>
-              <a:spcAft>
-                <a:spcPts val="0"/>
-              </a:spcAft>
-              <a:buNone/>
-            </a:pPr>
-            <a:r>
-              <a:rPr lang="en" sz="1000">
-                <a:highlight>
-                  <a:schemeClr val="dk2"/>
-                </a:highlight>
-                <a:latin typeface="Consolas"/>
-                <a:ea typeface="Consolas"/>
-                <a:cs typeface="Consolas"/>
-                <a:sym typeface="Consolas"/>
-              </a:rPr>
-              <a:t>        _elapsed -= TickDuration;</a:t>
-            </a:r>
-            <a:endParaRPr sz="1000">
-              <a:solidFill>
-                <a:srgbClr val="CCCCCC"/>
-              </a:solidFill>
-              <a:highlight>
-                <a:schemeClr val="dk2"/>
-              </a:highlight>
-              <a:latin typeface="Consolas"/>
-              <a:ea typeface="Consolas"/>
-              <a:cs typeface="Consolas"/>
-              <a:sym typeface="Consolas"/>
-            </a:endParaRPr>
-          </a:p>
-          <a:p>
-            <a:pPr indent="0" lvl="0" marL="0" rtl="0" algn="l">
-              <a:lnSpc>
-                <a:spcPct val="115000"/>
-              </a:lnSpc>
-              <a:spcBef>
-                <a:spcPts val="0"/>
-              </a:spcBef>
-              <a:spcAft>
-                <a:spcPts val="0"/>
-              </a:spcAft>
-              <a:buNone/>
-            </a:pPr>
-            <a:r>
-              <a:rPr lang="en" sz="1000">
-                <a:highlight>
-                  <a:schemeClr val="dk2"/>
-                </a:highlight>
-                <a:latin typeface="Consolas"/>
-                <a:ea typeface="Consolas"/>
-                <a:cs typeface="Consolas"/>
-                <a:sym typeface="Consolas"/>
-              </a:rPr>
-              <a:t>        Move();</a:t>
-            </a:r>
-            <a:endParaRPr sz="1000">
-              <a:solidFill>
-                <a:srgbClr val="CCCCCC"/>
-              </a:solidFill>
-              <a:highlight>
-                <a:schemeClr val="dk2"/>
-              </a:highlight>
-              <a:latin typeface="Consolas"/>
-              <a:ea typeface="Consolas"/>
-              <a:cs typeface="Consolas"/>
-              <a:sym typeface="Consolas"/>
-            </a:endParaRPr>
-          </a:p>
-          <a:p>
-            <a:pPr indent="0" lvl="0" marL="0" rtl="0" algn="l">
-              <a:lnSpc>
-                <a:spcPct val="115000"/>
-              </a:lnSpc>
-              <a:spcBef>
-                <a:spcPts val="0"/>
-              </a:spcBef>
-              <a:spcAft>
-                <a:spcPts val="0"/>
-              </a:spcAft>
-              <a:buNone/>
-            </a:pPr>
-            <a:r>
-              <a:rPr lang="en" sz="1000">
-                <a:highlight>
-                  <a:schemeClr val="dk2"/>
-                </a:highlight>
-                <a:latin typeface="Consolas"/>
-                <a:ea typeface="Consolas"/>
-                <a:cs typeface="Consolas"/>
-                <a:sym typeface="Consolas"/>
-              </a:rPr>
-              <a:t>    }</a:t>
-            </a:r>
-            <a:endParaRPr sz="1000">
-              <a:solidFill>
-                <a:srgbClr val="CCCCCC"/>
-              </a:solidFill>
-              <a:highlight>
-                <a:schemeClr val="dk2"/>
-              </a:highlight>
-              <a:latin typeface="Consolas"/>
-              <a:ea typeface="Consolas"/>
-              <a:cs typeface="Consolas"/>
-              <a:sym typeface="Consolas"/>
-            </a:endParaRPr>
-          </a:p>
-          <a:p>
-            <a:pPr indent="0" lvl="0" marL="0" rtl="0" algn="l">
-              <a:lnSpc>
-                <a:spcPct val="115000"/>
-              </a:lnSpc>
-              <a:spcBef>
-                <a:spcPts val="0"/>
-              </a:spcBef>
-              <a:spcAft>
-                <a:spcPts val="0"/>
-              </a:spcAft>
-              <a:buNone/>
-            </a:pPr>
-            <a:r>
-              <a:rPr lang="en" sz="1000">
-                <a:highlight>
-                  <a:schemeClr val="dk2"/>
-                </a:highlight>
-                <a:latin typeface="Consolas"/>
-                <a:ea typeface="Consolas"/>
-                <a:cs typeface="Consolas"/>
-                <a:sym typeface="Consolas"/>
-              </a:rPr>
-              <a:t>}</a:t>
-            </a:r>
-            <a:endParaRPr sz="1000">
-              <a:solidFill>
-                <a:srgbClr val="CCCCCC"/>
-              </a:solidFill>
-              <a:highlight>
-                <a:schemeClr val="dk2"/>
-              </a:highlight>
-              <a:latin typeface="Consolas"/>
-              <a:ea typeface="Consolas"/>
-              <a:cs typeface="Consolas"/>
-              <a:sym typeface="Consolas"/>
-            </a:endParaRPr>
-          </a:p>
-        </p:txBody>
-      </p:sp>
-    </p:spTree>
-  </p:cSld>
-  <p:clrMapOvr>
-    <a:masterClrMapping/>
-  </p:clrMapOvr>
-</p:sld>
-</file>
-
-<file path=ppt/slides/slide44.xml><?xml version="1.0" encoding="utf-8"?>
-<p:sld xmlns:a="http://schemas.openxmlformats.org/drawingml/2006/main" xmlns:p="http://schemas.openxmlformats.org/presentationml/2006/main" xmlns:r="http://schemas.openxmlformats.org/officeDocument/2006/relationships">
-  <p:cSld>
-    <p:spTree>
-      <p:nvGrpSpPr>
-        <p:cNvPr id="1" name=""/>
-        <p:cNvGrpSpPr/>
-        <p:nvPr/>
-      </p:nvGrpSpPr>
-      <p:grpSpPr/>
-      <p:sp>
-        <p:nvSpPr>
-          <p:cNvPr id="140" name="Google Shape;140;p23"/>
-          <p:cNvSpPr txBox="1"/>
-          <p:nvPr>
-            <p:ph type="title"/>
-          </p:nvPr>
-        </p:nvSpPr>
-        <p:spPr>
-          <a:xfrm>
-            <a:off x="311700" y="195615"/>
-            <a:ext cx="8520600" cy="572700"/>
-          </a:xfrm>
-          <a:prstGeom prst="rect">
-            <a:avLst/>
-          </a:prstGeom>
-        </p:spPr>
-        <p:txBody>
-          <a:bodyPr anchorCtr="0" anchor="t" bIns="91425" lIns="91425" spcFirstLastPara="1" rIns="91425" wrap="square" tIns="91425">
-            <a:normAutofit fontScale="90000"/>
-          </a:bodyPr>
-          <a:lstStyle/>
-          <a:p>
-            <a:pPr indent="0" lvl="0" marL="0" rtl="0" algn="l">
-              <a:spcBef>
-                <a:spcPts val="0"/>
-              </a:spcBef>
-              <a:spcAft>
-                <a:spcPts val="0"/>
-              </a:spcAft>
-              <a:buNone/>
-            </a:pPr>
-            <a:r>
-              <a:rPr lang="en"/>
-              <a:t>Input as Actions</a:t>
-            </a:r>
-            <a:endParaRPr/>
-          </a:p>
-        </p:txBody>
-      </p:sp>
-      <p:sp>
-        <p:nvSpPr>
-          <p:cNvPr id="293" name="Google Shape;293;p45"/>
-          <p:cNvSpPr txBox="1"/>
-          <p:nvPr>
-            <p:ph type="title"/>
-          </p:nvPr>
-        </p:nvSpPr>
-        <p:spPr>
-          <a:xfrm>
-            <a:off x="311700" y="1152475"/>
-            <a:ext cx="3700000" cy="3500000"/>
-          </a:xfrm>
-          <a:prstGeom prst="rect">
-            <a:avLst/>
-          </a:prstGeom>
-        </p:spPr>
-        <p:txBody>
-          <a:bodyPr anchorCtr="0" anchor="t" bIns="91425" lIns="91425" spcFirstLastPara="1" rIns="91425" wrap="square" tIns="91425">
-            <a:normAutofit fontScale="90000"/>
-          </a:bodyPr>
-          <a:lstStyle/>
-          <a:p>
-            <a:pPr indent="-330200" lvl="0" marL="457200" rtl="0" algn="l">
-              <a:buClr>
-                <a:srgbClr val="DEE2E6"/>
-              </a:buClr>
-              <a:spcBef>
-                <a:spcPts val="0"/>
-              </a:spcBef>
-              <a:spcAft>
-                <a:spcPts val="0"/>
-              </a:spcAft>
-              <a:buSzPts val="1600"/>
-              <a:buChar char="●"/>
-            </a:pPr>
-            <a:r>
-              <a:rPr lang="en" sz="1600">
-                <a:solidFill>
-                  <a:srgbClr val="DEE2E6"/>
-                </a:solidFill>
-              </a:rPr>
-              <a:t>Snake5 reads the keys directly</a:t>
-            </a:r>
-            <a:endParaRPr/>
-          </a:p>
-          <a:p>
-            <a:pPr indent="-317500" lvl="1" marL="914400" rtl="0" algn="l">
-              <a:buClr>
-                <a:srgbClr val="6C757D"/>
-              </a:buClr>
-              <a:spcBef>
-                <a:spcPts val="0"/>
-              </a:spcBef>
-              <a:spcAft>
-                <a:spcPts val="0"/>
-              </a:spcAft>
-              <a:buSzPts val="1400"/>
-              <a:buChar char="○"/>
-            </a:pPr>
-            <a:r>
-              <a:rPr lang="en" sz="1400">
-                <a:solidFill>
-                  <a:srgbClr val="6C757D"/>
-                </a:solidFill>
-              </a:rPr>
-              <a:t>Keys are hardwired to what they do</a:t>
-            </a:r>
-            <a:endParaRPr/>
-          </a:p>
-          <a:p>
-            <a:pPr indent="-330200" lvl="0" marL="457200" rtl="0" algn="l">
-              <a:buClr>
-                <a:srgbClr val="DEE2E6"/>
-              </a:buClr>
-              <a:spcBef>
-                <a:spcPts val="0"/>
-              </a:spcBef>
-              <a:spcAft>
-                <a:spcPts val="0"/>
-              </a:spcAft>
-              <a:buSzPts val="1600"/>
-              <a:buChar char="●"/>
-            </a:pPr>
-            <a:r>
-              <a:rPr lang="en" sz="1600">
-                <a:solidFill>
-                  <a:srgbClr val="DEE2E6"/>
-                </a:solidFill>
-              </a:rPr>
-              <a:t>A GameController maps keys to actions</a:t>
-            </a:r>
-            <a:endParaRPr/>
-          </a:p>
-          <a:p>
-            <a:pPr indent="-317500" lvl="1" marL="914400" rtl="0" algn="l">
-              <a:buClr>
-                <a:srgbClr val="6C757D"/>
-              </a:buClr>
-              <a:spcBef>
-                <a:spcPts val="0"/>
-              </a:spcBef>
-              <a:spcAft>
-                <a:spcPts val="0"/>
-              </a:spcAft>
-              <a:buSzPts val="1400"/>
-              <a:buChar char="○"/>
-            </a:pPr>
-            <a:r>
-              <a:rPr lang="en" sz="1400">
-                <a:solidFill>
-                  <a:srgbClr val="6C757D"/>
-                </a:solidFill>
-              </a:rPr>
-              <a:t>The game asks for “up”, never for W</a:t>
-            </a:r>
-            <a:endParaRPr/>
-          </a:p>
-          <a:p>
-            <a:pPr indent="-317500" lvl="1" marL="914400" rtl="0" algn="l">
-              <a:buClr>
-                <a:srgbClr val="6C757D"/>
-              </a:buClr>
-              <a:spcBef>
-                <a:spcPts val="0"/>
-              </a:spcBef>
-              <a:spcAft>
-                <a:spcPts val="0"/>
-              </a:spcAft>
-              <a:buSzPts val="1400"/>
-              <a:buChar char="○"/>
-            </a:pPr>
-            <a:r>
-              <a:rPr lang="en" sz="1400">
-                <a:solidFill>
-                  <a:srgbClr val="6C757D"/>
-                </a:solidFill>
-              </a:rPr>
-              <a:t>The controls live in one place</a:t>
-            </a:r>
-            <a:endParaRPr/>
-          </a:p>
-          <a:p>
-            <a:pPr indent="-330200" lvl="0" marL="457200" rtl="0" algn="l">
-              <a:buClr>
-                <a:srgbClr val="DEE2E6"/>
-              </a:buClr>
-              <a:spcBef>
-                <a:spcPts val="0"/>
-              </a:spcBef>
-              <a:spcAft>
-                <a:spcPts val="0"/>
-              </a:spcAft>
-              <a:buSzPts val="1600"/>
-              <a:buChar char="●"/>
-            </a:pPr>
-            <a:r>
-              <a:rPr lang="en" sz="1600">
-                <a:solidFill>
-                  <a:srgbClr val="DEE2E6"/>
-                </a:solidFill>
-              </a:rPr>
-              <a:t>Sokoban goes one step further: actions become objects</a:t>
-            </a:r>
-            <a:endParaRPr/>
-          </a:p>
-        </p:txBody>
-      </p:sp>
-      <p:sp>
-        <p:nvSpPr>
-          <p:cNvPr id="141" name="Google Shape;141;p23"/>
-          <p:cNvSpPr txBox="1"/>
-          <p:nvPr>
-            <p:ph idx="2" type="body"/>
-          </p:nvPr>
-        </p:nvSpPr>
-        <p:spPr>
-          <a:xfrm>
-            <a:off x="4150000" y="1152475"/>
-            <a:ext cx="4750000" cy="3600000"/>
-          </a:xfrm>
-          <a:prstGeom prst="rect">
-            <a:avLst/>
-          </a:prstGeom>
-        </p:spPr>
-        <p:txBody>
-          <a:bodyPr anchorCtr="0" anchor="t" bIns="91425" lIns="91425" spcFirstLastPara="1" rIns="91425" wrap="square" tIns="91425">
-            <a:noAutofit/>
-          </a:bodyPr>
-          <a:lstStyle/>
-          <a:p>
-            <a:pPr indent="0" lvl="0" marL="0" rtl="0" algn="l">
-              <a:lnSpc>
-                <a:spcPct val="115000"/>
-              </a:lnSpc>
-              <a:spcBef>
-                <a:spcPts val="0"/>
-              </a:spcBef>
-              <a:spcAft>
-                <a:spcPts val="0"/>
-              </a:spcAft>
-              <a:buNone/>
-            </a:pPr>
-            <a:r>
-              <a:rPr lang="en" sz="1000">
-                <a:highlight>
-                  <a:schemeClr val="dk2"/>
-                </a:highlight>
-                <a:latin typeface="Consolas"/>
-                <a:ea typeface="Consolas"/>
-                <a:cs typeface="Consolas"/>
-                <a:sym typeface="Consolas"/>
-              </a:rPr>
-              <a:t>public static class GameController</a:t>
-            </a:r>
-            <a:endParaRPr sz="1000">
-              <a:solidFill>
-                <a:srgbClr val="CCCCCC"/>
-              </a:solidFill>
-              <a:highlight>
-                <a:schemeClr val="dk2"/>
-              </a:highlight>
-              <a:latin typeface="Consolas"/>
-              <a:ea typeface="Consolas"/>
-              <a:cs typeface="Consolas"/>
-              <a:sym typeface="Consolas"/>
-            </a:endParaRPr>
-          </a:p>
-          <a:p>
-            <a:pPr indent="0" lvl="0" marL="0" rtl="0" algn="l">
-              <a:lnSpc>
-                <a:spcPct val="115000"/>
-              </a:lnSpc>
-              <a:spcBef>
-                <a:spcPts val="0"/>
-              </a:spcBef>
-              <a:spcAft>
-                <a:spcPts val="0"/>
-              </a:spcAft>
-              <a:buNone/>
-            </a:pPr>
-            <a:r>
-              <a:rPr lang="en" sz="1000">
-                <a:highlight>
-                  <a:schemeClr val="dk2"/>
-                </a:highlight>
-                <a:latin typeface="Consolas"/>
-                <a:ea typeface="Consolas"/>
-                <a:cs typeface="Consolas"/>
-                <a:sym typeface="Consolas"/>
-              </a:rPr>
-              <a:t>{</a:t>
-            </a:r>
-            <a:endParaRPr sz="1000">
-              <a:solidFill>
-                <a:srgbClr val="CCCCCC"/>
-              </a:solidFill>
-              <a:highlight>
-                <a:schemeClr val="dk2"/>
-              </a:highlight>
-              <a:latin typeface="Consolas"/>
-              <a:ea typeface="Consolas"/>
-              <a:cs typeface="Consolas"/>
-              <a:sym typeface="Consolas"/>
-            </a:endParaRPr>
-          </a:p>
-          <a:p>
-            <a:pPr indent="0" lvl="0" marL="0" rtl="0" algn="l">
-              <a:lnSpc>
-                <a:spcPct val="115000"/>
-              </a:lnSpc>
-              <a:spcBef>
-                <a:spcPts val="0"/>
-              </a:spcBef>
-              <a:spcAft>
-                <a:spcPts val="0"/>
-              </a:spcAft>
-              <a:buNone/>
-            </a:pPr>
-            <a:r>
-              <a:rPr lang="en" sz="1000">
-                <a:highlight>
-                  <a:schemeClr val="dk2"/>
-                </a:highlight>
-                <a:latin typeface="Consolas"/>
-                <a:ea typeface="Consolas"/>
-                <a:cs typeface="Consolas"/>
-                <a:sym typeface="Consolas"/>
-              </a:rPr>
-              <a:t>    public static bool Up =&gt;</a:t>
-            </a:r>
-            <a:endParaRPr sz="1000">
-              <a:solidFill>
-                <a:srgbClr val="CCCCCC"/>
-              </a:solidFill>
-              <a:highlight>
-                <a:schemeClr val="dk2"/>
-              </a:highlight>
-              <a:latin typeface="Consolas"/>
-              <a:ea typeface="Consolas"/>
-              <a:cs typeface="Consolas"/>
-              <a:sym typeface="Consolas"/>
-            </a:endParaRPr>
-          </a:p>
-          <a:p>
-            <a:pPr indent="0" lvl="0" marL="0" rtl="0" algn="l">
-              <a:lnSpc>
-                <a:spcPct val="115000"/>
-              </a:lnSpc>
-              <a:spcBef>
-                <a:spcPts val="0"/>
-              </a:spcBef>
-              <a:spcAft>
-                <a:spcPts val="0"/>
-              </a:spcAft>
-              <a:buNone/>
-            </a:pPr>
-            <a:r>
-              <a:rPr lang="en" sz="1000">
-                <a:highlight>
-                  <a:schemeClr val="dk2"/>
-                </a:highlight>
-                <a:latin typeface="Consolas"/>
-                <a:ea typeface="Consolas"/>
-                <a:cs typeface="Consolas"/>
-                <a:sym typeface="Consolas"/>
-              </a:rPr>
-              <a:t>        WasPressed(Keys.W) ||</a:t>
-            </a:r>
-            <a:endParaRPr sz="1000">
-              <a:solidFill>
-                <a:srgbClr val="CCCCCC"/>
-              </a:solidFill>
-              <a:highlight>
-                <a:schemeClr val="dk2"/>
-              </a:highlight>
-              <a:latin typeface="Consolas"/>
-              <a:ea typeface="Consolas"/>
-              <a:cs typeface="Consolas"/>
-              <a:sym typeface="Consolas"/>
-            </a:endParaRPr>
-          </a:p>
-          <a:p>
-            <a:pPr indent="0" lvl="0" marL="0" rtl="0" algn="l">
-              <a:lnSpc>
-                <a:spcPct val="115000"/>
-              </a:lnSpc>
-              <a:spcBef>
-                <a:spcPts val="0"/>
-              </a:spcBef>
-              <a:spcAft>
-                <a:spcPts val="0"/>
-              </a:spcAft>
-              <a:buNone/>
-            </a:pPr>
-            <a:r>
-              <a:rPr lang="en" sz="1000">
-                <a:highlight>
-                  <a:schemeClr val="dk2"/>
-                </a:highlight>
-                <a:latin typeface="Consolas"/>
-                <a:ea typeface="Consolas"/>
-                <a:cs typeface="Consolas"/>
-                <a:sym typeface="Consolas"/>
-              </a:rPr>
-              <a:t>        WasPressed(Keys.Up);</a:t>
-            </a:r>
-            <a:endParaRPr sz="1000">
-              <a:solidFill>
-                <a:srgbClr val="CCCCCC"/>
-              </a:solidFill>
-              <a:highlight>
-                <a:schemeClr val="dk2"/>
-              </a:highlight>
-              <a:latin typeface="Consolas"/>
-              <a:ea typeface="Consolas"/>
-              <a:cs typeface="Consolas"/>
-              <a:sym typeface="Consolas"/>
-            </a:endParaRPr>
-          </a:p>
-          <a:p>
-            <a:pPr indent="0" lvl="0" marL="0" rtl="0" algn="l">
-              <a:lnSpc>
-                <a:spcPct val="115000"/>
-              </a:lnSpc>
-              <a:spcBef>
-                <a:spcPts val="0"/>
-              </a:spcBef>
-              <a:spcAft>
-                <a:spcPts val="0"/>
-              </a:spcAft>
-              <a:buNone/>
-            </a:pPr>
-            <a:r>
-              <a:rPr lang="en" sz="1000">
-                <a:highlight>
-                  <a:schemeClr val="dk2"/>
-                </a:highlight>
-                <a:latin typeface="Consolas"/>
-                <a:ea typeface="Consolas"/>
-                <a:cs typeface="Consolas"/>
-                <a:sym typeface="Consolas"/>
-              </a:rPr>
-              <a:t>    // Down, Left, Right...</a:t>
-            </a:r>
-            <a:endParaRPr sz="1000">
-              <a:solidFill>
-                <a:srgbClr val="CCCCCC"/>
-              </a:solidFill>
-              <a:highlight>
-                <a:schemeClr val="dk2"/>
-              </a:highlight>
-              <a:latin typeface="Consolas"/>
-              <a:ea typeface="Consolas"/>
-              <a:cs typeface="Consolas"/>
-              <a:sym typeface="Consolas"/>
-            </a:endParaRPr>
-          </a:p>
-          <a:p>
-            <a:pPr indent="0" lvl="0" marL="0" rtl="0" algn="l">
-              <a:lnSpc>
-                <a:spcPct val="115000"/>
-              </a:lnSpc>
-              <a:spcBef>
-                <a:spcPts val="0"/>
-              </a:spcBef>
-              <a:spcAft>
-                <a:spcPts val="0"/>
-              </a:spcAft>
-              <a:buNone/>
-            </a:pPr>
-            <a:r>
-              <a:rPr lang="en" sz="1000">
-                <a:highlight>
-                  <a:schemeClr val="dk2"/>
-                </a:highlight>
-                <a:latin typeface="Consolas"/>
-                <a:ea typeface="Consolas"/>
-                <a:cs typeface="Consolas"/>
-                <a:sym typeface="Consolas"/>
-              </a:rPr>
-              <a:t>}</a:t>
-            </a:r>
-            <a:endParaRPr sz="1000">
-              <a:solidFill>
-                <a:srgbClr val="CCCCCC"/>
-              </a:solidFill>
-              <a:highlight>
-                <a:schemeClr val="dk2"/>
-              </a:highlight>
-              <a:latin typeface="Consolas"/>
-              <a:ea typeface="Consolas"/>
-              <a:cs typeface="Consolas"/>
-              <a:sym typeface="Consolas"/>
-            </a:endParaRPr>
-          </a:p>
-          <a:p>
-            <a:pPr indent="0" lvl="0" marL="0" rtl="0" algn="l">
-              <a:lnSpc>
-                <a:spcPct val="115000"/>
-              </a:lnSpc>
-              <a:spcBef>
-                <a:spcPts val="0"/>
-              </a:spcBef>
-              <a:spcAft>
-                <a:spcPts val="0"/>
-              </a:spcAft>
-              <a:buNone/>
-            </a:pPr>
-            <a:r>
-              <a:rPr lang="en" sz="1000">
-                <a:highlight>
-                  <a:schemeClr val="dk2"/>
-                </a:highlight>
-                <a:latin typeface="Consolas"/>
-                <a:ea typeface="Consolas"/>
-                <a:cs typeface="Consolas"/>
-                <a:sym typeface="Consolas"/>
-              </a:rPr>
-              <a:t/>
-            </a:r>
-            <a:endParaRPr sz="1000">
-              <a:solidFill>
-                <a:srgbClr val="CCCCCC"/>
-              </a:solidFill>
-              <a:highlight>
-                <a:schemeClr val="dk2"/>
-              </a:highlight>
-              <a:latin typeface="Consolas"/>
-              <a:ea typeface="Consolas"/>
-              <a:cs typeface="Consolas"/>
-              <a:sym typeface="Consolas"/>
-            </a:endParaRPr>
-          </a:p>
-          <a:p>
-            <a:pPr indent="0" lvl="0" marL="0" rtl="0" algn="l">
-              <a:lnSpc>
-                <a:spcPct val="115000"/>
-              </a:lnSpc>
-              <a:spcBef>
-                <a:spcPts val="0"/>
-              </a:spcBef>
-              <a:spcAft>
-                <a:spcPts val="0"/>
-              </a:spcAft>
-              <a:buNone/>
-            </a:pPr>
-            <a:r>
-              <a:rPr lang="en" sz="1000">
-                <a:highlight>
-                  <a:schemeClr val="dk2"/>
-                </a:highlight>
-                <a:latin typeface="Consolas"/>
-                <a:ea typeface="Consolas"/>
-                <a:cs typeface="Consolas"/>
-                <a:sym typeface="Consolas"/>
-              </a:rPr>
-              <a:t>// In the game</a:t>
-            </a:r>
-            <a:endParaRPr sz="1000">
-              <a:solidFill>
-                <a:srgbClr val="CCCCCC"/>
-              </a:solidFill>
-              <a:highlight>
-                <a:schemeClr val="dk2"/>
-              </a:highlight>
-              <a:latin typeface="Consolas"/>
-              <a:ea typeface="Consolas"/>
-              <a:cs typeface="Consolas"/>
-              <a:sym typeface="Consolas"/>
-            </a:endParaRPr>
-          </a:p>
-          <a:p>
-            <a:pPr indent="0" lvl="0" marL="0" rtl="0" algn="l">
-              <a:lnSpc>
-                <a:spcPct val="115000"/>
-              </a:lnSpc>
-              <a:spcBef>
-                <a:spcPts val="0"/>
-              </a:spcBef>
-              <a:spcAft>
-                <a:spcPts val="0"/>
-              </a:spcAft>
-              <a:buNone/>
-            </a:pPr>
-            <a:r>
-              <a:rPr lang="en" sz="1000">
-                <a:highlight>
-                  <a:schemeClr val="dk2"/>
-                </a:highlight>
-                <a:latin typeface="Consolas"/>
-                <a:ea typeface="Consolas"/>
-                <a:cs typeface="Consolas"/>
-                <a:sym typeface="Consolas"/>
-              </a:rPr>
-              <a:t>if (GameController.Up)</a:t>
-            </a:r>
-            <a:endParaRPr sz="1000">
-              <a:solidFill>
-                <a:srgbClr val="CCCCCC"/>
-              </a:solidFill>
-              <a:highlight>
-                <a:schemeClr val="dk2"/>
-              </a:highlight>
-              <a:latin typeface="Consolas"/>
-              <a:ea typeface="Consolas"/>
-              <a:cs typeface="Consolas"/>
-              <a:sym typeface="Consolas"/>
-            </a:endParaRPr>
-          </a:p>
-          <a:p>
-            <a:pPr indent="0" lvl="0" marL="0" rtl="0" algn="l">
-              <a:lnSpc>
-                <a:spcPct val="115000"/>
-              </a:lnSpc>
-              <a:spcBef>
-                <a:spcPts val="0"/>
-              </a:spcBef>
-              <a:spcAft>
-                <a:spcPts val="0"/>
-              </a:spcAft>
-              <a:buNone/>
-            </a:pPr>
-            <a:r>
-              <a:rPr lang="en" sz="1000">
-                <a:highlight>
-                  <a:schemeClr val="dk2"/>
-                </a:highlight>
-                <a:latin typeface="Consolas"/>
-                <a:ea typeface="Consolas"/>
-                <a:cs typeface="Consolas"/>
-                <a:sym typeface="Consolas"/>
-              </a:rPr>
-              <a:t>    _snake.Turn(Direction.Up);</a:t>
-            </a:r>
-            <a:endParaRPr sz="1000">
-              <a:solidFill>
-                <a:srgbClr val="CCCCCC"/>
-              </a:solidFill>
-              <a:highlight>
-                <a:schemeClr val="dk2"/>
-              </a:highlight>
-              <a:latin typeface="Consolas"/>
-              <a:ea typeface="Consolas"/>
-              <a:cs typeface="Consolas"/>
-              <a:sym typeface="Consolas"/>
-            </a:endParaRPr>
-          </a:p>
-        </p:txBody>
-      </p:sp>
-    </p:spTree>
-  </p:cSld>
-  <p:clrMapOvr>
-    <a:masterClrMapping/>
-  </p:clrMapOvr>
-</p:sld>
-</file>
-
-<file path=ppt/slides/slide45.xml><?xml version="1.0" encoding="utf-8"?>
-<p:sld xmlns:a="http://schemas.openxmlformats.org/drawingml/2006/main" xmlns:p="http://schemas.openxmlformats.org/presentationml/2006/main" xmlns:r="http://schemas.openxmlformats.org/officeDocument/2006/relationships">
-  <p:cSld>
-    <p:spTree>
-      <p:nvGrpSpPr>
-        <p:cNvPr id="1" name=""/>
-        <p:cNvGrpSpPr/>
-        <p:nvPr/>
-      </p:nvGrpSpPr>
-      <p:grpSpPr/>
-      <p:sp>
-        <p:nvSpPr>
-          <p:cNvPr id="293" name="Google Shape;293;p45"/>
-          <p:cNvSpPr txBox="1"/>
-          <p:nvPr>
-            <p:ph type="title"/>
-          </p:nvPr>
-        </p:nvSpPr>
-        <p:spPr>
-          <a:xfrm>
-            <a:off x="311700" y="195615"/>
-            <a:ext cx="8520600" cy="572700"/>
-          </a:xfrm>
-          <a:prstGeom prst="rect">
-            <a:avLst/>
-          </a:prstGeom>
-        </p:spPr>
-        <p:txBody>
-          <a:bodyPr anchorCtr="0" anchor="t" bIns="91425" lIns="91425" spcFirstLastPara="1" rIns="91425" wrap="square" tIns="91425">
-            <a:normAutofit fontScale="90000"/>
-          </a:bodyPr>
-          <a:lstStyle/>
-          <a:p>
-            <a:pPr indent="0" lvl="0" marL="0" rtl="0" algn="l">
-              <a:spcBef>
-                <a:spcPts val="0"/>
-              </a:spcBef>
-              <a:spcAft>
-                <a:spcPts val="0"/>
-              </a:spcAft>
-              <a:buNone/>
-            </a:pPr>
-            <a:r>
-              <a:rPr lang="en">
-                <a:solidFill>
-                  <a:schemeClr val="accent5"/>
-                </a:solidFill>
-              </a:rPr>
-              <a:t>Input Buffering</a:t>
-            </a:r>
-            <a:endParaRPr>
-              <a:solidFill>
-                <a:schemeClr val="accent5"/>
-              </a:solidFill>
-            </a:endParaRPr>
-          </a:p>
-        </p:txBody>
-      </p:sp>
-      <p:sp>
-        <p:nvSpPr>
-          <p:cNvPr id="294" name="Google Shape;294;p45"/>
-          <p:cNvSpPr txBox="1"/>
-          <p:nvPr>
-            <p:ph idx="1" type="body"/>
-          </p:nvPr>
-        </p:nvSpPr>
-        <p:spPr>
-          <a:xfrm>
-            <a:off x="311700" y="885950"/>
-            <a:ext cx="8520600" cy="4023300"/>
-          </a:xfrm>
-          <a:prstGeom prst="rect">
-            <a:avLst/>
-          </a:prstGeom>
-        </p:spPr>
-        <p:txBody>
-          <a:bodyPr anchorCtr="0" anchor="t" bIns="91425" lIns="91425" spcFirstLastPara="1" rIns="91425" wrap="square" tIns="91425">
-            <a:normAutofit/>
-          </a:bodyPr>
-          <a:lstStyle/>
-          <a:p>
-            <a:pPr indent="-330200" lvl="0" marL="457200" rtl="0" algn="l">
-              <a:spcBef>
-                <a:spcPts val="0"/>
-              </a:spcBef>
-              <a:spcAft>
-                <a:spcPts val="0"/>
-              </a:spcAft>
-              <a:buSzPts val="1600"/>
-              <a:buChar char="●"/>
-            </a:pPr>
-            <a:r>
-              <a:rPr lang="en"/>
-              <a:t>Input happens every frame, but the snake acts on a tick</a:t>
-            </a:r>
-            <a:endParaRPr/>
-          </a:p>
-          <a:p>
-            <a:pPr indent="-317500" lvl="1" marL="914400" rtl="0" algn="l">
-              <a:spcBef>
-                <a:spcPts val="0"/>
-              </a:spcBef>
-              <a:spcAft>
-                <a:spcPts val="0"/>
-              </a:spcAft>
-              <a:buSzPts val="1400"/>
-              <a:buChar char="○"/>
-            </a:pPr>
-            <a:r>
-              <a:rPr lang="en"/>
-              <a:t>Up, then Left between two ticks: the second press overwrites the first</a:t>
-            </a:r>
-            <a:endParaRPr/>
-          </a:p>
-          <a:p>
-            <a:pPr indent="-330200" lvl="0" marL="457200" rtl="0" algn="l">
-              <a:spcBef>
-                <a:spcPts val="0"/>
-              </a:spcBef>
-              <a:spcAft>
-                <a:spcPts val="0"/>
-              </a:spcAft>
-              <a:buSzPts val="1600"/>
-              <a:buChar char="●"/>
-            </a:pPr>
-            <a:r>
-              <a:rPr lang="en"/>
-              <a:t>Queue the turns, and use one per tick</a:t>
-            </a:r>
-            <a:endParaRPr/>
-          </a:p>
-          <a:p>
-            <a:pPr indent="-317500" lvl="1" marL="914400" rtl="0" algn="l">
-              <a:spcBef>
-                <a:spcPts val="0"/>
-              </a:spcBef>
-              <a:spcAft>
-                <a:spcPts val="0"/>
-              </a:spcAft>
-              <a:buSzPts val="1400"/>
-              <a:buChar char="○"/>
-            </a:pPr>
-            <a:r>
-              <a:rPr lang="en"/>
-              <a:t>Check each turn against the last queued direction</a:t>
-            </a:r>
-            <a:endParaRPr/>
-          </a:p>
-          <a:p>
-            <a:pPr indent="-317500" lvl="1" marL="914400" rtl="0" algn="l">
-              <a:spcBef>
-                <a:spcPts val="0"/>
-              </a:spcBef>
-              <a:spcAft>
-                <a:spcPts val="0"/>
-              </a:spcAft>
-              <a:buSzPts val="1400"/>
-              <a:buChar char="○"/>
-            </a:pPr>
-            <a:r>
-              <a:rPr lang="en"/>
-              <a:t>Keep the queue short: two turns</a:t>
-            </a:r>
-            <a:endParaRPr/>
-          </a:p>
-          <a:p>
-            <a:pPr indent="-330200" lvl="0" marL="457200" rtl="0" algn="l">
-              <a:spcBef>
-                <a:spcPts val="0"/>
-              </a:spcBef>
-              <a:spcAft>
-                <a:spcPts val="0"/>
-              </a:spcAft>
-              <a:buSzPts val="1600"/>
-              <a:buChar char="●"/>
-            </a:pPr>
-            <a:r>
-              <a:rPr lang="en"/>
-              <a:t>Common in games: a jump pressed just before landing still counts</a:t>
-            </a:r>
-            <a:endParaRPr/>
-          </a:p>
-        </p:txBody>
-      </p:sp>
-    </p:spTree>
-  </p:cSld>
-  <p:clrMapOvr>
-    <a:masterClrMapping/>
-  </p:clrMapOvr>
-</p:sld>
-</file>
-
-<file path=ppt/slides/slide46.xml><?xml version="1.0" encoding="utf-8"?>
-<p:sld xmlns:a="http://schemas.openxmlformats.org/drawingml/2006/main" xmlns:p="http://schemas.openxmlformats.org/presentationml/2006/main" xmlns:r="http://schemas.openxmlformats.org/officeDocument/2006/relationships">
-  <p:cSld>
-    <p:spTree>
-      <p:nvGrpSpPr>
-        <p:cNvPr id="1" name=""/>
-        <p:cNvGrpSpPr/>
-        <p:nvPr/>
-      </p:nvGrpSpPr>
-      <p:grpSpPr/>
-      <p:sp>
-        <p:nvSpPr>
-          <p:cNvPr id="128" name="Google Shape;128;p21"/>
-          <p:cNvSpPr txBox="1"/>
-          <p:nvPr>
-            <p:ph type="title"/>
-          </p:nvPr>
-        </p:nvSpPr>
-        <p:spPr>
-          <a:xfrm>
-            <a:off x="311700" y="195615"/>
-            <a:ext cx="8520600" cy="572700"/>
-          </a:xfrm>
-          <a:prstGeom prst="rect">
-            <a:avLst/>
-          </a:prstGeom>
-        </p:spPr>
-        <p:txBody>
-          <a:bodyPr anchorCtr="0" anchor="t" bIns="91425" lIns="91425" spcFirstLastPara="1" rIns="91425" wrap="square" tIns="91425">
-            <a:normAutofit fontScale="90000"/>
-          </a:bodyPr>
-          <a:lstStyle/>
-          <a:p>
-            <a:pPr indent="0" lvl="0" marL="0" rtl="0" algn="l">
-              <a:spcBef>
-                <a:spcPts val="0"/>
-              </a:spcBef>
-              <a:spcAft>
-                <a:spcPts val="0"/>
-              </a:spcAft>
-              <a:buNone/>
-            </a:pPr>
-            <a:r>
-              <a:rPr lang="en">
-                <a:solidFill>
-                  <a:schemeClr val="accent5"/>
-                </a:solidFill>
-              </a:rPr>
-              <a:t>Movement &amp; Input Implementation</a:t>
-            </a:r>
-            <a:endParaRPr>
-              <a:solidFill>
-                <a:schemeClr val="accent5"/>
-              </a:solidFill>
-            </a:endParaRPr>
-          </a:p>
-        </p:txBody>
-      </p:sp>
-      <p:sp>
-        <p:nvSpPr>
-          <p:cNvPr id="129" name="Google Shape;129;p21"/>
-          <p:cNvSpPr txBox="1"/>
-          <p:nvPr>
-            <p:ph idx="1" type="body"/>
-          </p:nvPr>
-        </p:nvSpPr>
-        <p:spPr>
-          <a:xfrm>
-            <a:off x="311700" y="885950"/>
-            <a:ext cx="8520600" cy="4023300"/>
-          </a:xfrm>
-          <a:prstGeom prst="rect">
-            <a:avLst/>
-          </a:prstGeom>
-        </p:spPr>
-        <p:txBody>
-          <a:bodyPr anchorCtr="0" anchor="ctr" bIns="91425" lIns="91425" spcFirstLastPara="1" rIns="91425" wrap="square" tIns="91425">
-            <a:normAutofit/>
-          </a:bodyPr>
-          <a:lstStyle/>
-          <a:p>
-            <a:pPr indent="0" lvl="0" marL="0" rtl="0" algn="ctr">
-              <a:spcBef>
-                <a:spcPts val="0"/>
-              </a:spcBef>
-              <a:spcAft>
-                <a:spcPts val="1200"/>
-              </a:spcAft>
-              <a:buNone/>
-            </a:pPr>
-            <a:r>
-              <a:rPr lang="en" sz="2900">
-                <a:latin typeface="VT323"/>
-                <a:ea typeface="VT323"/>
-                <a:cs typeface="VT323"/>
-                <a:sym typeface="VT323"/>
-              </a:rPr>
-              <a:t>DEMO!</a:t>
-            </a:r>
-            <a:endParaRPr/>
-          </a:p>
-          <a:p>
-            <a:pPr indent="0" lvl="0" marL="0" rtl="0" algn="ctr">
-              <a:spcBef>
-                <a:spcPts val="0"/>
-              </a:spcBef>
-              <a:spcAft>
-                <a:spcPts val="0"/>
-              </a:spcAft>
-              <a:buNone/>
-            </a:pPr>
-            <a:r>
-              <a:rPr lang="en" sz="1800"/>
-              <a:t>Snake5 → Snake6 → Snake7: ticks, actions and buffering</a:t>
-            </a:r>
-            <a:endParaRPr sz="1800"/>
           </a:p>
         </p:txBody>
       </p:sp>
@@ -19319,6 +19271,198 @@
 </file>
 
 <file path=ppt/slides/slide6.xml><?xml version="1.0" encoding="utf-8"?>
+<p:sld xmlns:a="http://schemas.openxmlformats.org/drawingml/2006/main" xmlns:p="http://schemas.openxmlformats.org/presentationml/2006/main" xmlns:r="http://schemas.openxmlformats.org/officeDocument/2006/relationships">
+  <p:cSld>
+    <p:spTree>
+      <p:nvGrpSpPr>
+        <p:cNvPr id="1" name=""/>
+        <p:cNvGrpSpPr/>
+        <p:nvPr/>
+      </p:nvGrpSpPr>
+      <p:grpSpPr/>
+      <p:sp>
+        <p:nvSpPr>
+          <p:cNvPr id="293" name="Google Shape;293;p45"/>
+          <p:cNvSpPr txBox="1"/>
+          <p:nvPr>
+            <p:ph type="title"/>
+          </p:nvPr>
+        </p:nvSpPr>
+        <p:spPr>
+          <a:xfrm>
+            <a:off x="311700" y="195615"/>
+            <a:ext cx="8520600" cy="572700"/>
+          </a:xfrm>
+          <a:prstGeom prst="rect">
+            <a:avLst/>
+          </a:prstGeom>
+        </p:spPr>
+        <p:txBody>
+          <a:bodyPr anchorCtr="0" anchor="t" bIns="91425" lIns="91425" spcFirstLastPara="1" rIns="91425" wrap="square" tIns="91425">
+            <a:normAutofit fontScale="90000"/>
+          </a:bodyPr>
+          <a:lstStyle/>
+          <a:p>
+            <a:pPr indent="0" lvl="0" marL="0" rtl="0" algn="l">
+              <a:spcBef>
+                <a:spcPts val="0"/>
+              </a:spcBef>
+              <a:spcAft>
+                <a:spcPts val="0"/>
+              </a:spcAft>
+              <a:buNone/>
+            </a:pPr>
+            <a:r>
+              <a:rPr lang="en">
+                <a:solidFill>
+                  <a:schemeClr val="accent5"/>
+                </a:solidFill>
+              </a:rPr>
+              <a:t>Assets as Data</a:t>
+            </a:r>
+            <a:endParaRPr>
+              <a:solidFill>
+                <a:schemeClr val="accent5"/>
+              </a:solidFill>
+            </a:endParaRPr>
+          </a:p>
+        </p:txBody>
+      </p:sp>
+      <p:sp>
+        <p:nvSpPr>
+          <p:cNvPr id="294" name="Google Shape;294;p45"/>
+          <p:cNvSpPr txBox="1"/>
+          <p:nvPr>
+            <p:ph idx="1" type="body"/>
+          </p:nvPr>
+        </p:nvSpPr>
+        <p:spPr>
+          <a:xfrm>
+            <a:off x="311700" y="885950"/>
+            <a:ext cx="8520600" cy="4023300"/>
+          </a:xfrm>
+          <a:prstGeom prst="rect">
+            <a:avLst/>
+          </a:prstGeom>
+        </p:spPr>
+        <p:txBody>
+          <a:bodyPr anchorCtr="0" anchor="t" bIns="91425" lIns="91425" spcFirstLastPara="1" rIns="91425" wrap="square" tIns="91425">
+            <a:normAutofit/>
+          </a:bodyPr>
+          <a:lstStyle/>
+          <a:p>
+            <a:pPr indent="-330200" lvl="0" marL="457200" rtl="0" algn="l">
+              <a:spcBef>
+                <a:spcPts val="0"/>
+              </a:spcBef>
+              <a:spcAft>
+                <a:spcPts val="0"/>
+              </a:spcAft>
+              <a:buSzPts val="1600"/>
+              <a:buChar char="●"/>
+            </a:pPr>
+            <a:r>
+              <a:rPr lang="en"/>
+              <a:t>The XML files describe the assets</a:t>
+            </a:r>
+            <a:endParaRPr/>
+          </a:p>
+          <a:p>
+            <a:pPr indent="-317500" lvl="1" marL="914400" rtl="0" algn="l">
+              <a:spcBef>
+                <a:spcPts val="0"/>
+              </a:spcBef>
+              <a:spcAft>
+                <a:spcPts val="0"/>
+              </a:spcAft>
+              <a:buSzPts val="1400"/>
+              <a:buChar char="○"/>
+            </a:pPr>
+            <a:r>
+              <a:rPr lang="en"/>
+              <a:t>Which part of the image is the snake, how the bat’s animation runs, which tile goes where</a:t>
+            </a:r>
+            <a:endParaRPr/>
+          </a:p>
+          <a:p>
+            <a:pPr indent="-330200" lvl="0" marL="457200" rtl="0" algn="l">
+              <a:spcBef>
+                <a:spcPts val="0"/>
+              </a:spcBef>
+              <a:spcAft>
+                <a:spcPts val="0"/>
+              </a:spcAft>
+              <a:buSzPts val="1600"/>
+              <a:buChar char="●"/>
+            </a:pPr>
+            <a:r>
+              <a:rPr lang="en"/>
+              <a:t>Data can change without the code changing</a:t>
+            </a:r>
+            <a:endParaRPr/>
+          </a:p>
+          <a:p>
+            <a:pPr indent="-317500" lvl="1" marL="914400" rtl="0" algn="l">
+              <a:spcBef>
+                <a:spcPts val="0"/>
+              </a:spcBef>
+              <a:spcAft>
+                <a:spcPts val="0"/>
+              </a:spcAft>
+              <a:buSzPts val="1400"/>
+              <a:buChar char="○"/>
+            </a:pPr>
+            <a:r>
+              <a:rPr lang="en"/>
+              <a:t>A new frame, a faster animation or a new room: edit a file, not C#</a:t>
+            </a:r>
+            <a:endParaRPr/>
+          </a:p>
+          <a:p>
+            <a:pPr indent="-317500" lvl="1" marL="914400" rtl="0" algn="l">
+              <a:spcBef>
+                <a:spcPts val="0"/>
+              </a:spcBef>
+              <a:spcAft>
+                <a:spcPts val="0"/>
+              </a:spcAft>
+              <a:buSzPts val="1400"/>
+              <a:buChar char="○"/>
+            </a:pPr>
+            <a:r>
+              <a:rPr lang="en"/>
+              <a:t>Artists and designers can work without touching the code</a:t>
+            </a:r>
+            <a:endParaRPr/>
+          </a:p>
+          <a:p>
+            <a:pPr indent="-330200" lvl="0" marL="457200" rtl="0" algn="l">
+              <a:spcBef>
+                <a:spcPts val="0"/>
+              </a:spcBef>
+              <a:spcAft>
+                <a:spcPts val="0"/>
+              </a:spcAft>
+              <a:buSzPts val="1600"/>
+              <a:buChar char="●"/>
+            </a:pPr>
+            <a:r>
+              <a:rPr lang="en"/>
+              <a:t>The code gets smaller and more general</a:t>
+            </a:r>
+            <a:endParaRPr/>
+          </a:p>
+        </p:txBody>
+      </p:sp>
+    </p:spTree>
+  </p:cSld>
+  <p:clrMapOvr>
+    <a:masterClrMapping/>
+  </p:clrMapOvr>
+</p:sld>
+</file>
+
+<file path=ppt/slides/slide7.xml><?xml version="1.0" encoding="utf-8"?>
 <p:sld xmlns:a="http://schemas.openxmlformats.org/drawingml/2006/main" xmlns:r="http://schemas.openxmlformats.org/officeDocument/2006/relationships" xmlns:mc="http://schemas.openxmlformats.org/markup-compatibility/2006" xmlns:mv="urn:schemas-microsoft-com:mac:vml" xmlns:p="http://schemas.openxmlformats.org/presentationml/2006/main" xmlns:c="http://schemas.openxmlformats.org/drawingml/2006/chart" xmlns:dgm="http://schemas.openxmlformats.org/drawingml/2006/diagram" xmlns:o="urn:schemas-microsoft-com:office:office" xmlns:v="urn:schemas-microsoft-com:vml" xmlns:pvml="urn:schemas-microsoft-com:office:powerpoint" xmlns:com="http://schemas.openxmlformats.org/drawingml/2006/compatibility" xmlns:p14="http://schemas.microsoft.com/office/powerpoint/2010/main" xmlns:p15="http://schemas.microsoft.com/office/powerpoint/2012/main" xmlns:ahyp="http://schemas.microsoft.com/office/drawing/2018/hyperlinkcolor">
   <p:cSld>
     <p:spTree>
@@ -20223,7 +20367,7 @@
 </p:sld>
 </file>
 
-<file path=ppt/slides/slide7.xml><?xml version="1.0" encoding="utf-8"?>
+<file path=ppt/slides/slide8.xml><?xml version="1.0" encoding="utf-8"?>
 <p:sld xmlns:a="http://schemas.openxmlformats.org/drawingml/2006/main" xmlns:r="http://schemas.openxmlformats.org/officeDocument/2006/relationships" xmlns:mc="http://schemas.openxmlformats.org/markup-compatibility/2006" xmlns:mv="urn:schemas-microsoft-com:mac:vml" xmlns:p="http://schemas.openxmlformats.org/presentationml/2006/main" xmlns:c="http://schemas.openxmlformats.org/drawingml/2006/chart" xmlns:dgm="http://schemas.openxmlformats.org/drawingml/2006/diagram" xmlns:o="urn:schemas-microsoft-com:office:office" xmlns:v="urn:schemas-microsoft-com:vml" xmlns:pvml="urn:schemas-microsoft-com:office:powerpoint" xmlns:com="http://schemas.openxmlformats.org/drawingml/2006/compatibility" xmlns:p14="http://schemas.microsoft.com/office/powerpoint/2010/main" xmlns:p15="http://schemas.microsoft.com/office/powerpoint/2012/main" xmlns:ahyp="http://schemas.microsoft.com/office/drawing/2018/hyperlinkcolor">
   <p:cSld>
     <p:spTree>
@@ -20316,7 +20460,7 @@
 </p:sld>
 </file>
 
-<file path=ppt/slides/slide8.xml><?xml version="1.0" encoding="utf-8"?>
+<file path=ppt/slides/slide9.xml><?xml version="1.0" encoding="utf-8"?>
 <p:sld xmlns:a="http://schemas.openxmlformats.org/drawingml/2006/main" xmlns:r="http://schemas.openxmlformats.org/officeDocument/2006/relationships" xmlns:mc="http://schemas.openxmlformats.org/markup-compatibility/2006" xmlns:mv="urn:schemas-microsoft-com:mac:vml" xmlns:p="http://schemas.openxmlformats.org/presentationml/2006/main" xmlns:c="http://schemas.openxmlformats.org/drawingml/2006/chart" xmlns:dgm="http://schemas.openxmlformats.org/drawingml/2006/diagram" xmlns:o="urn:schemas-microsoft-com:office:office" xmlns:v="urn:schemas-microsoft-com:vml" xmlns:pvml="urn:schemas-microsoft-com:office:powerpoint" xmlns:com="http://schemas.openxmlformats.org/drawingml/2006/compatibility" xmlns:p14="http://schemas.microsoft.com/office/powerpoint/2010/main" xmlns:p15="http://schemas.microsoft.com/office/powerpoint/2012/main" xmlns:ahyp="http://schemas.microsoft.com/office/drawing/2018/hyperlinkcolor">
   <p:cSld>
     <p:spTree>
@@ -20442,6 +20586,7 @@
               <a:buNone/>
             </a:pPr>
             <a:r>
+              <a:rPr/>
               <a:t/>
             </a:r>
             <a:endParaRPr>
@@ -20481,145 +20626,6 @@
           </a:ln>
         </p:spPr>
       </p:cxnSp>
-    </p:spTree>
-  </p:cSld>
-  <p:clrMapOvr>
-    <a:masterClrMapping/>
-  </p:clrMapOvr>
-</p:sld>
-</file>
-
-<file path=ppt/slides/slide9.xml><?xml version="1.0" encoding="utf-8"?>
-<p:sld xmlns:a="http://schemas.openxmlformats.org/drawingml/2006/main" xmlns:r="http://schemas.openxmlformats.org/officeDocument/2006/relationships" xmlns:mc="http://schemas.openxmlformats.org/markup-compatibility/2006" xmlns:mv="urn:schemas-microsoft-com:mac:vml" xmlns:p="http://schemas.openxmlformats.org/presentationml/2006/main" xmlns:c="http://schemas.openxmlformats.org/drawingml/2006/chart" xmlns:dgm="http://schemas.openxmlformats.org/drawingml/2006/diagram" xmlns:o="urn:schemas-microsoft-com:office:office" xmlns:v="urn:schemas-microsoft-com:vml" xmlns:pvml="urn:schemas-microsoft-com:office:powerpoint" xmlns:com="http://schemas.openxmlformats.org/drawingml/2006/compatibility" xmlns:p14="http://schemas.microsoft.com/office/powerpoint/2010/main" xmlns:p15="http://schemas.microsoft.com/office/powerpoint/2012/main" xmlns:ahyp="http://schemas.microsoft.com/office/drawing/2018/hyperlinkcolor">
-  <p:cSld>
-    <p:spTree>
-      <p:nvGrpSpPr>
-        <p:cNvPr id="91" name="Shape 91"/>
-        <p:cNvGrpSpPr/>
-        <p:nvPr/>
-      </p:nvGrpSpPr>
-      <p:grpSpPr>
-        <a:xfrm>
-          <a:off x="0" y="0"/>
-          <a:ext cx="0" cy="0"/>
-          <a:chOff x="0" y="0"/>
-          <a:chExt cx="0" cy="0"/>
-        </a:xfrm>
-      </p:grpSpPr>
-      <p:sp>
-        <p:nvSpPr>
-          <p:cNvPr id="92" name="Google Shape;92;p16"/>
-          <p:cNvSpPr txBox="1"/>
-          <p:nvPr>
-            <p:ph type="title"/>
-          </p:nvPr>
-        </p:nvSpPr>
-        <p:spPr>
-          <a:xfrm>
-            <a:off x="311700" y="195615"/>
-            <a:ext cx="8520600" cy="572700"/>
-          </a:xfrm>
-          <a:prstGeom prst="rect">
-            <a:avLst/>
-          </a:prstGeom>
-        </p:spPr>
-        <p:txBody>
-          <a:bodyPr anchorCtr="0" anchor="t" bIns="91425" lIns="91425" spcFirstLastPara="1" rIns="91425" wrap="square" tIns="91425">
-            <a:normAutofit fontScale="90000"/>
-          </a:bodyPr>
-          <a:lstStyle/>
-          <a:p>
-            <a:pPr indent="0" lvl="0" marL="0" rtl="0" algn="l">
-              <a:spcBef>
-                <a:spcPts val="0"/>
-              </a:spcBef>
-              <a:spcAft>
-                <a:spcPts val="0"/>
-              </a:spcAft>
-              <a:buNone/>
-            </a:pPr>
-            <a:r>
-              <a:rPr lang="en">
-                <a:solidFill>
-                  <a:schemeClr val="accent5"/>
-                </a:solidFill>
-              </a:rPr>
-              <a:t>Texture Atlas Implementation</a:t>
-            </a:r>
-            <a:endParaRPr>
-              <a:solidFill>
-                <a:schemeClr val="accent5"/>
-              </a:solidFill>
-            </a:endParaRPr>
-          </a:p>
-        </p:txBody>
-      </p:sp>
-      <p:sp>
-        <p:nvSpPr>
-          <p:cNvPr id="93" name="Google Shape;93;p16"/>
-          <p:cNvSpPr txBox="1"/>
-          <p:nvPr>
-            <p:ph idx="1" type="body"/>
-          </p:nvPr>
-        </p:nvSpPr>
-        <p:spPr>
-          <a:xfrm>
-            <a:off x="311700" y="885950"/>
-            <a:ext cx="8520600" cy="4023300"/>
-          </a:xfrm>
-          <a:prstGeom prst="rect">
-            <a:avLst/>
-          </a:prstGeom>
-        </p:spPr>
-        <p:txBody>
-          <a:bodyPr anchorCtr="0" anchor="ctr" bIns="91425" lIns="91425" spcFirstLastPara="1" rIns="91425" wrap="square" tIns="91425">
-            <a:normAutofit/>
-          </a:bodyPr>
-          <a:lstStyle/>
-          <a:p>
-            <a:pPr indent="0" lvl="0" marL="0" rtl="0" algn="ctr">
-              <a:spcBef>
-                <a:spcPts val="0"/>
-              </a:spcBef>
-              <a:spcAft>
-                <a:spcPts val="1200"/>
-              </a:spcAft>
-              <a:buNone/>
-            </a:pPr>
-            <a:r>
-              <a:rPr lang="en" sz="2900">
-                <a:latin typeface="VT323"/>
-                <a:ea typeface="VT323"/>
-                <a:cs typeface="VT323"/>
-                <a:sym typeface="VT323"/>
-              </a:rPr>
-              <a:t>DEMO!</a:t>
-            </a:r>
-            <a:endParaRPr sz="2900">
-              <a:latin typeface="VT323"/>
-              <a:ea typeface="VT323"/>
-              <a:cs typeface="VT323"/>
-              <a:sym typeface="VT323"/>
-            </a:endParaRPr>
-          </a:p>
-          <a:p>
-            <a:pPr indent="0" lvl="0" marL="0" rtl="0" algn="ctr">
-              <a:spcBef>
-                <a:spcPts val="0"/>
-              </a:spcBef>
-              <a:spcAft>
-                <a:spcPts val="0"/>
-              </a:spcAft>
-              <a:buNone/>
-            </a:pPr>
-            <a:r>
-              <a:rPr lang="en" sz="1800"/>
-              <a:t>Snake0 → Snake1: from hardcoded rectangles to a texture atlas</a:t>
-            </a:r>
-            <a:endParaRPr sz="1800"/>
-          </a:p>
-        </p:txBody>
-      </p:sp>
     </p:spTree>
   </p:cSld>
   <p:clrMapOvr>

--- a/slides/03 Snake.pptx
+++ b/slides/03 Snake.pptx
@@ -18980,7 +18980,7 @@
                 </a:solidFill>
                 <a:hlinkClick r:id="rId3"/>
               </a:rPr>
-              <a:t>https://github.com/Metamate/gar-games/tree/main/03-snake</a:t>
+              <a:t>github.com/Metamate/gar-games (folder 03-snake)</a:t>
             </a:r>
             <a:endParaRPr/>
           </a:p>

--- a/slides/03 Snake.pptx
+++ b/slides/03 Snake.pptx
@@ -7395,30 +7395,26 @@
       </p:sp>
       <p:pic>
         <p:nvPicPr>
-          <p:cNvPr id="100" name="Google Shape;100;p17"/>
-          <p:cNvPicPr preferRelativeResize="0"/>
+          <p:cNvPr id="100" name="Picture 105" descr="snake_sprite.png"/>
+          <p:cNvPicPr>
+            <a:picLocks noChangeAspect="1"/>
+          </p:cNvPicPr>
           <p:nvPr/>
         </p:nvPicPr>
         <p:blipFill>
-          <a:blip r:embed="rId3">
-            <a:alphaModFix/>
-          </a:blip>
+          <a:blip r:embed="rId4"/>
           <a:stretch>
             <a:fillRect/>
           </a:stretch>
         </p:blipFill>
         <p:spPr>
-          <a:xfrm rot="-1191950">
+          <a:xfrm rot="20408050">
             <a:off x="3478224" y="1282475"/>
             <a:ext cx="2187550" cy="2187550"/>
           </a:xfrm>
           <a:prstGeom prst="rect">
             <a:avLst/>
           </a:prstGeom>
-          <a:noFill/>
-          <a:ln>
-            <a:noFill/>
-          </a:ln>
         </p:spPr>
       </p:pic>
       <p:sp>
@@ -8176,14 +8172,14 @@
       </p:sp>
       <p:pic>
         <p:nvPicPr>
-          <p:cNvPr id="123" name="Google Shape;123;p20" title="bat-animation-example.gif"/>
-          <p:cNvPicPr preferRelativeResize="0"/>
+          <p:cNvPr id="123" name="Picture 123" descr="bat_animation.gif"/>
+          <p:cNvPicPr>
+            <a:picLocks noChangeAspect="1"/>
+          </p:cNvPicPr>
           <p:nvPr/>
         </p:nvPicPr>
         <p:blipFill>
-          <a:blip r:embed="rId3">
-            <a:alphaModFix/>
-          </a:blip>
+          <a:blip r:embed="rId4"/>
           <a:stretch>
             <a:fillRect/>
           </a:stretch>
@@ -8196,10 +8192,6 @@
           <a:prstGeom prst="rect">
             <a:avLst/>
           </a:prstGeom>
-          <a:noFill/>
-          <a:ln>
-            <a:noFill/>
-          </a:ln>
         </p:spPr>
       </p:pic>
     </p:spTree>
@@ -8478,56 +8470,50 @@
       </p:sp>
       <p:pic>
         <p:nvPicPr>
-          <p:cNvPr id="266" name="Google Shape;266;p41"/>
-          <p:cNvPicPr preferRelativeResize="0"/>
+          <p:cNvPr id="266" name="Picture 267" descr="snake_tileset.png"/>
+          <p:cNvPicPr>
+            <a:picLocks noChangeAspect="1"/>
+          </p:cNvPicPr>
           <p:nvPr/>
         </p:nvPicPr>
-        <p:blipFill rotWithShape="1">
-          <a:blip r:embed="rId3">
-            <a:alphaModFix/>
-          </a:blip>
-          <a:srcRect b="0" l="0" r="54225" t="0"/>
-          <a:stretch/>
+        <p:blipFill>
+          <a:blip r:embed="rId4"/>
+          <a:stretch>
+            <a:fillRect/>
+          </a:stretch>
         </p:blipFill>
         <p:spPr>
           <a:xfrm>
-            <a:off x="1238250" y="1247650"/>
-            <a:ext cx="3052075" cy="3048000"/>
+            <a:off x="1240287" y="1247650"/>
+            <a:ext cx="3048000" cy="3048000"/>
           </a:xfrm>
           <a:prstGeom prst="rect">
             <a:avLst/>
           </a:prstGeom>
-          <a:noFill/>
-          <a:ln>
-            <a:noFill/>
-          </a:ln>
         </p:spPr>
       </p:pic>
       <p:pic>
         <p:nvPicPr>
-          <p:cNvPr id="267" name="Google Shape;267;p41"/>
-          <p:cNvPicPr preferRelativeResize="0"/>
+          <p:cNvPr id="267" name="Picture 267" descr="snake_tileset_labelled.png"/>
+          <p:cNvPicPr>
+            <a:picLocks noChangeAspect="1"/>
+          </p:cNvPicPr>
           <p:nvPr/>
         </p:nvPicPr>
-        <p:blipFill rotWithShape="1">
-          <a:blip r:embed="rId3">
-            <a:alphaModFix/>
-          </a:blip>
-          <a:srcRect b="0" l="54225" r="0" t="0"/>
-          <a:stretch/>
+        <p:blipFill>
+          <a:blip r:embed="rId5"/>
+          <a:stretch>
+            <a:fillRect/>
+          </a:stretch>
         </p:blipFill>
         <p:spPr>
           <a:xfrm>
-            <a:off x="5040275" y="1247650"/>
-            <a:ext cx="3052075" cy="3048000"/>
+            <a:off x="5042312" y="1247650"/>
+            <a:ext cx="3048000" cy="3048000"/>
           </a:xfrm>
           <a:prstGeom prst="rect">
             <a:avLst/>
           </a:prstGeom>
-          <a:noFill/>
-          <a:ln>
-            <a:noFill/>
-          </a:ln>
         </p:spPr>
       </p:pic>
     </p:spTree>
@@ -8717,29 +8703,26 @@
       </p:sp>
       <p:pic>
         <p:nvPicPr>
-          <p:cNvPr id="273" name="Google Shape;273;p42"/>
-          <p:cNvPicPr preferRelativeResize="0"/>
+          <p:cNvPr id="273" name="Picture 275" descr="snake_tileset_labelled.png"/>
+          <p:cNvPicPr>
+            <a:picLocks noChangeAspect="1"/>
+          </p:cNvPicPr>
           <p:nvPr/>
         </p:nvPicPr>
-        <p:blipFill rotWithShape="1">
-          <a:blip r:embed="rId3">
-            <a:alphaModFix/>
-          </a:blip>
-          <a:srcRect b="16166" l="0" r="59830" t="16280"/>
-          <a:stretch/>
+        <p:blipFill>
+          <a:blip r:embed="rId4"/>
+          <a:stretch>
+            <a:fillRect/>
+          </a:stretch>
         </p:blipFill>
         <p:spPr>
           <a:xfrm>
-            <a:off x="633950" y="1516225"/>
-            <a:ext cx="2725150" cy="2749700"/>
+            <a:off x="633950" y="1528500"/>
+            <a:ext cx="2725150" cy="2725150"/>
           </a:xfrm>
           <a:prstGeom prst="rect">
             <a:avLst/>
           </a:prstGeom>
-          <a:noFill/>
-          <a:ln>
-            <a:noFill/>
-          </a:ln>
         </p:spPr>
       </p:pic>
       <p:sp>
@@ -9565,29 +9548,26 @@
       </p:sp>
       <p:pic>
         <p:nvPicPr>
-          <p:cNvPr id="275" name="Google Shape;275;p42"/>
-          <p:cNvPicPr preferRelativeResize="0"/>
+          <p:cNvPr id="275" name="Picture 275" descr="snake_room.png"/>
+          <p:cNvPicPr>
+            <a:picLocks noChangeAspect="1"/>
+          </p:cNvPicPr>
           <p:nvPr/>
         </p:nvPicPr>
-        <p:blipFill rotWithShape="1">
-          <a:blip r:embed="rId3">
-            <a:alphaModFix/>
-          </a:blip>
-          <a:srcRect b="7917" l="49925" r="0" t="8478"/>
-          <a:stretch/>
+        <p:blipFill>
+          <a:blip r:embed="rId5"/>
+          <a:stretch>
+            <a:fillRect/>
+          </a:stretch>
         </p:blipFill>
         <p:spPr>
           <a:xfrm>
-            <a:off x="5323925" y="1111575"/>
-            <a:ext cx="3397050" cy="3403000"/>
+            <a:off x="5323925" y="1114550"/>
+            <a:ext cx="3397050" cy="3397050"/>
           </a:xfrm>
           <a:prstGeom prst="rect">
             <a:avLst/>
           </a:prstGeom>
-          <a:noFill/>
-          <a:ln>
-            <a:noFill/>
-          </a:ln>
         </p:spPr>
       </p:pic>
     </p:spTree>
@@ -10638,30 +10618,26 @@
       </p:sp>
       <p:pic>
         <p:nvPicPr>
-          <p:cNvPr id="46" name="Google Shape;46;p10"/>
-          <p:cNvPicPr preferRelativeResize="0"/>
+          <p:cNvPr id="46" name="Picture 46" descr="snake9.png"/>
+          <p:cNvPicPr>
+            <a:picLocks noChangeAspect="1"/>
+          </p:cNvPicPr>
           <p:nvPr/>
         </p:nvPicPr>
         <p:blipFill>
-          <a:blip r:embed="rId3">
-            <a:alphaModFix/>
-          </a:blip>
+          <a:blip r:embed="rId4"/>
           <a:stretch>
             <a:fillRect/>
           </a:stretch>
         </p:blipFill>
         <p:spPr>
           <a:xfrm>
-            <a:off x="1846087" y="1531275"/>
-            <a:ext cx="5451825" cy="3256649"/>
+            <a:off x="1846087" y="1626274"/>
+            <a:ext cx="5451825" cy="3066651"/>
           </a:xfrm>
           <a:prstGeom prst="rect">
             <a:avLst/>
           </a:prstGeom>
-          <a:noFill/>
-          <a:ln>
-            <a:noFill/>
-          </a:ln>
         </p:spPr>
       </p:pic>
     </p:spTree>
@@ -19521,138 +19497,122 @@
       </p:sp>
       <p:pic>
         <p:nvPicPr>
-          <p:cNvPr id="64" name="Google Shape;64;p13"/>
-          <p:cNvPicPr preferRelativeResize="0"/>
-          <p:nvPr/>
-        </p:nvPicPr>
-        <p:blipFill rotWithShape="1">
-          <a:blip r:embed="rId3">
-            <a:alphaModFix/>
-          </a:blip>
-          <a:srcRect b="80434" l="13614" r="79962" t="0"/>
-          <a:stretch/>
-        </p:blipFill>
-        <p:spPr>
-          <a:xfrm>
-            <a:off x="2015375" y="2043200"/>
-            <a:ext cx="223900" cy="395850"/>
-          </a:xfrm>
-          <a:prstGeom prst="rect">
-            <a:avLst/>
-          </a:prstGeom>
-          <a:noFill/>
-          <a:ln>
-            <a:noFill/>
-          </a:ln>
-        </p:spPr>
-      </p:pic>
-      <p:pic>
-        <p:nvPicPr>
-          <p:cNvPr id="65" name="Google Shape;65;p13"/>
-          <p:cNvPicPr preferRelativeResize="0"/>
-          <p:nvPr/>
-        </p:nvPicPr>
-        <p:blipFill rotWithShape="1">
-          <a:blip r:embed="rId3">
-            <a:alphaModFix/>
-          </a:blip>
-          <a:srcRect b="80434" l="0" r="93577" t="0"/>
-          <a:stretch/>
-        </p:blipFill>
-        <p:spPr>
-          <a:xfrm>
-            <a:off x="584175" y="2043200"/>
-            <a:ext cx="223900" cy="395850"/>
-          </a:xfrm>
-          <a:prstGeom prst="rect">
-            <a:avLst/>
-          </a:prstGeom>
-          <a:noFill/>
-          <a:ln>
-            <a:noFill/>
-          </a:ln>
-        </p:spPr>
-      </p:pic>
-      <p:pic>
-        <p:nvPicPr>
-          <p:cNvPr id="66" name="Google Shape;66;p13"/>
-          <p:cNvPicPr preferRelativeResize="0"/>
-          <p:nvPr/>
-        </p:nvPicPr>
-        <p:blipFill rotWithShape="1">
-          <a:blip r:embed="rId3">
-            <a:alphaModFix/>
-          </a:blip>
-          <a:srcRect b="80434" l="7433" r="86143" t="0"/>
-          <a:stretch/>
-        </p:blipFill>
-        <p:spPr>
-          <a:xfrm>
-            <a:off x="1299776" y="2043200"/>
-            <a:ext cx="223900" cy="395850"/>
-          </a:xfrm>
-          <a:prstGeom prst="rect">
-            <a:avLst/>
-          </a:prstGeom>
-          <a:noFill/>
-          <a:ln>
-            <a:noFill/>
-          </a:ln>
-        </p:spPr>
-      </p:pic>
-      <p:pic>
-        <p:nvPicPr>
-          <p:cNvPr id="67" name="Google Shape;67;p13"/>
-          <p:cNvPicPr preferRelativeResize="0"/>
+          <p:cNvPr id="64" name="Picture 73" descr="bat1.png"/>
+          <p:cNvPicPr>
+            <a:picLocks noChangeAspect="1"/>
+          </p:cNvPicPr>
           <p:nvPr/>
         </p:nvPicPr>
         <p:blipFill>
-          <a:blip r:embed="rId3">
-            <a:alphaModFix/>
-          </a:blip>
+          <a:blip r:embed="rId6"/>
           <a:stretch>
             <a:fillRect/>
           </a:stretch>
         </p:blipFill>
         <p:spPr>
           <a:xfrm>
-            <a:off x="4296100" y="1560179"/>
-            <a:ext cx="3485850" cy="2023150"/>
+            <a:off x="1902325" y="1969050"/>
+            <a:ext cx="450000" cy="450000"/>
           </a:xfrm>
           <a:prstGeom prst="rect">
             <a:avLst/>
           </a:prstGeom>
-          <a:noFill/>
-          <a:ln>
-            <a:noFill/>
-          </a:ln>
         </p:spPr>
       </p:pic>
       <p:pic>
         <p:nvPicPr>
-          <p:cNvPr id="68" name="Google Shape;68;p13"/>
-          <p:cNvPicPr preferRelativeResize="0"/>
+          <p:cNvPr id="65" name="Picture 73" descr="snake1.png"/>
+          <p:cNvPicPr>
+            <a:picLocks noChangeAspect="1"/>
+          </p:cNvPicPr>
           <p:nvPr/>
         </p:nvPicPr>
-        <p:blipFill rotWithShape="1">
-          <a:blip r:embed="rId3">
-            <a:alphaModFix/>
-          </a:blip>
-          <a:srcRect b="29607" l="84686" r="8891" t="59340"/>
-          <a:stretch/>
+        <p:blipFill>
+          <a:blip r:embed="rId4"/>
+          <a:stretch>
+            <a:fillRect/>
+          </a:stretch>
         </p:blipFill>
         <p:spPr>
           <a:xfrm>
-            <a:off x="2797937" y="2129314"/>
-            <a:ext cx="223900" cy="223625"/>
+            <a:off x="471125" y="1969050"/>
+            <a:ext cx="450000" cy="450000"/>
           </a:xfrm>
           <a:prstGeom prst="rect">
             <a:avLst/>
           </a:prstGeom>
-          <a:noFill/>
-          <a:ln>
-            <a:noFill/>
-          </a:ln>
+        </p:spPr>
+      </p:pic>
+      <p:pic>
+        <p:nvPicPr>
+          <p:cNvPr id="66" name="Picture 73" descr="snake2.png"/>
+          <p:cNvPicPr>
+            <a:picLocks noChangeAspect="1"/>
+          </p:cNvPicPr>
+          <p:nvPr/>
+        </p:nvPicPr>
+        <p:blipFill>
+          <a:blip r:embed="rId5"/>
+          <a:stretch>
+            <a:fillRect/>
+          </a:stretch>
+        </p:blipFill>
+        <p:spPr>
+          <a:xfrm>
+            <a:off x="1186726" y="1969050"/>
+            <a:ext cx="450000" cy="450000"/>
+          </a:xfrm>
+          <a:prstGeom prst="rect">
+            <a:avLst/>
+          </a:prstGeom>
+        </p:spPr>
+      </p:pic>
+      <p:pic>
+        <p:nvPicPr>
+          <p:cNvPr id="67" name="Picture 73" descr="snake_atlas.png"/>
+          <p:cNvPicPr>
+            <a:picLocks noChangeAspect="1"/>
+          </p:cNvPicPr>
+          <p:nvPr/>
+        </p:nvPicPr>
+        <p:blipFill>
+          <a:blip r:embed="rId8"/>
+          <a:stretch>
+            <a:fillRect/>
+          </a:stretch>
+        </p:blipFill>
+        <p:spPr>
+          <a:xfrm>
+            <a:off x="5364642" y="1560179"/>
+            <a:ext cx="1348766" cy="2023149"/>
+          </a:xfrm>
+          <a:prstGeom prst="rect">
+            <a:avLst/>
+          </a:prstGeom>
+        </p:spPr>
+      </p:pic>
+      <p:pic>
+        <p:nvPicPr>
+          <p:cNvPr id="68" name="Picture 73" descr="floor.png"/>
+          <p:cNvPicPr>
+            <a:picLocks noChangeAspect="1"/>
+          </p:cNvPicPr>
+          <p:nvPr/>
+        </p:nvPicPr>
+        <p:blipFill>
+          <a:blip r:embed="rId7"/>
+          <a:stretch>
+            <a:fillRect/>
+          </a:stretch>
+        </p:blipFill>
+        <p:spPr>
+          <a:xfrm>
+            <a:off x="2684887" y="1969050"/>
+            <a:ext cx="450000" cy="450000"/>
+          </a:xfrm>
+          <a:prstGeom prst="rect">
+            <a:avLst/>
+          </a:prstGeom>
         </p:spPr>
       </p:pic>
       <p:sp>
@@ -19699,7 +19659,7 @@
                 <a:cs typeface="VT323"/>
                 <a:sym typeface="VT323"/>
               </a:rPr>
-              <a:t>mario1.png</a:t>
+              <a:t>snake1.png</a:t>
             </a:r>
             <a:endParaRPr sz="900">
               <a:solidFill>
@@ -19757,7 +19717,7 @@
                 <a:cs typeface="VT323"/>
                 <a:sym typeface="VT323"/>
               </a:rPr>
-              <a:t>mario2.png</a:t>
+              <a:t>snake2.png</a:t>
             </a:r>
             <a:endParaRPr sz="900">
               <a:solidFill>
@@ -19815,7 +19775,7 @@
                 <a:cs typeface="VT323"/>
                 <a:sym typeface="VT323"/>
               </a:rPr>
-              <a:t>mario3.png</a:t>
+              <a:t>bat1.png</a:t>
             </a:r>
             <a:endParaRPr sz="900">
               <a:solidFill>
@@ -19873,19 +19833,7 @@
                 <a:cs typeface="VT323"/>
                 <a:sym typeface="VT323"/>
               </a:rPr>
-              <a:t>ground1</a:t>
-            </a:r>
-            <a:r>
-              <a:rPr lang="en" sz="900">
-                <a:solidFill>
-                  <a:schemeClr val="dk1"/>
-                </a:solidFill>
-                <a:latin typeface="VT323"/>
-                <a:ea typeface="VT323"/>
-                <a:cs typeface="VT323"/>
-                <a:sym typeface="VT323"/>
-              </a:rPr>
-              <a:t>.png</a:t>
+              <a:t>floor.png</a:t>
             </a:r>
             <a:endParaRPr sz="900">
               <a:solidFill>
@@ -20426,30 +20374,26 @@
       </p:sp>
       <p:pic>
         <p:nvPicPr>
-          <p:cNvPr id="79" name="Google Shape;79;p14"/>
-          <p:cNvPicPr preferRelativeResize="0"/>
+          <p:cNvPr id="79" name="Picture 79" descr="snake_atlas.png"/>
+          <p:cNvPicPr>
+            <a:picLocks noChangeAspect="1"/>
+          </p:cNvPicPr>
           <p:nvPr/>
         </p:nvPicPr>
         <p:blipFill>
-          <a:blip r:embed="rId3">
-            <a:alphaModFix/>
-          </a:blip>
+          <a:blip r:embed="rId4"/>
           <a:stretch>
             <a:fillRect/>
           </a:stretch>
         </p:blipFill>
         <p:spPr>
           <a:xfrm>
-            <a:off x="2829075" y="1560179"/>
-            <a:ext cx="3485850" cy="2023150"/>
+            <a:off x="3897617" y="1560179"/>
+            <a:ext cx="1348766" cy="2023149"/>
           </a:xfrm>
           <a:prstGeom prst="rect">
             <a:avLst/>
           </a:prstGeom>
-          <a:noFill/>
-          <a:ln>
-            <a:noFill/>
-          </a:ln>
         </p:spPr>
       </p:pic>
     </p:spTree>
@@ -20519,30 +20463,26 @@
       </p:sp>
       <p:pic>
         <p:nvPicPr>
-          <p:cNvPr id="85" name="Google Shape;85;p15"/>
-          <p:cNvPicPr preferRelativeResize="0"/>
+          <p:cNvPr id="85" name="Picture 87" descr="snake_atlas.png"/>
+          <p:cNvPicPr>
+            <a:picLocks noChangeAspect="1"/>
+          </p:cNvPicPr>
           <p:nvPr/>
         </p:nvPicPr>
         <p:blipFill>
-          <a:blip r:embed="rId3">
-            <a:alphaModFix/>
-          </a:blip>
+          <a:blip r:embed="rId4"/>
           <a:stretch>
             <a:fillRect/>
           </a:stretch>
         </p:blipFill>
         <p:spPr>
           <a:xfrm>
-            <a:off x="2829075" y="1560179"/>
-            <a:ext cx="3485850" cy="2023150"/>
+            <a:off x="3897617" y="1560179"/>
+            <a:ext cx="1348766" cy="2023149"/>
           </a:xfrm>
           <a:prstGeom prst="rect">
             <a:avLst/>
           </a:prstGeom>
-          <a:noFill/>
-          <a:ln>
-            <a:noFill/>
-          </a:ln>
         </p:spPr>
       </p:pic>
       <p:sp>
@@ -20553,8 +20493,8 @@
         </p:nvSpPr>
         <p:spPr>
           <a:xfrm>
-            <a:off x="2812073" y="1527475"/>
-            <a:ext cx="268200" cy="433500"/>
+            <a:off x="3872328" y="1534890"/>
+            <a:ext cx="387769" cy="387769"/>
           </a:xfrm>
           <a:prstGeom prst="rect">
             <a:avLst/>
@@ -20608,7 +20548,7 @@
         </p:nvCxnSpPr>
         <p:spPr>
           <a:xfrm>
-            <a:off x="2510873" y="1076875"/>
+            <a:off x="3571128" y="1084290"/>
             <a:ext cx="435300" cy="450600"/>
           </a:xfrm>
           <a:prstGeom prst="straightConnector1">

--- a/slides/03 Snake.pptx
+++ b/slides/03 Snake.pptx
@@ -40,6 +40,7 @@
     <p:sldId id="291" r:id="rId41"/>
     <p:sldId id="292" r:id="rId42"/>
     <p:sldId id="293" r:id="rId52"/>
+    <p:sldId id="302" r:id="rId30"/>
     <p:sldId id="294" r:id="rId53"/>
     <p:sldId id="296" r:id="rId55"/>
   </p:sldIdLst>
@@ -1333,6 +1334,333 @@
 </p:notes>
 </file>
 
+<file path=ppt/notesSlides/notesSlide22.xml><?xml version="1.0" encoding="utf-8"?>
+<p:notes xmlns:a="http://schemas.openxmlformats.org/drawingml/2006/main" xmlns:p="http://schemas.openxmlformats.org/presentationml/2006/main" xmlns:r="http://schemas.openxmlformats.org/officeDocument/2006/relationships">
+  <p:cSld>
+    <p:spTree>
+      <p:nvGrpSpPr>
+        <p:cNvPr id="1" name=""/>
+        <p:cNvGrpSpPr/>
+        <p:nvPr/>
+      </p:nvGrpSpPr>
+      <p:grpSpPr>
+        <a:xfrm>
+          <a:off x="0" y="0"/>
+          <a:ext cx="0" cy="0"/>
+          <a:chOff x="0" y="0"/>
+          <a:chExt cx="0" cy="0"/>
+        </a:xfrm>
+      </p:grpSpPr>
+      <p:sp>
+        <p:nvSpPr>
+          <p:cNvPr id="2" name="Slide Image Placeholder 1"/>
+          <p:cNvSpPr>
+            <a:spLocks noGrp="1"/>
+          </p:cNvSpPr>
+          <p:nvPr>
+            <p:ph type="sldImg" idx="2"/>
+          </p:nvPr>
+        </p:nvSpPr>
+        <p:spPr/>
+      </p:sp>
+      <p:sp>
+        <p:nvSpPr>
+          <p:cNvPr id="3" name="Notes Placeholder 2"/>
+          <p:cNvSpPr>
+            <a:spLocks noGrp="1"/>
+          </p:cNvSpPr>
+          <p:nvPr>
+            <p:ph type="body" idx="1"/>
+          </p:nvPr>
+        </p:nvSpPr>
+        <p:spPr/>
+        <p:txBody>
+          <a:bodyPr/>
+          <a:lstStyle/>
+          <a:p>
+            <a:r>
+              <a:t>Ask, let them answer in pairs for a minute, then take a few answers. These are the site’s Check yourself questions.</a:t>
+            </a:r>
+          </a:p>
+        </p:txBody>
+      </p:sp>
+    </p:spTree>
+  </p:cSld>
+  <p:clrMapOvr>
+    <a:masterClrMapping/>
+  </p:clrMapOvr>
+</p:notes>
+</file>
+
+<file path=ppt/notesSlides/notesSlide23.xml><?xml version="1.0" encoding="utf-8"?>
+<p:notes xmlns:a="http://schemas.openxmlformats.org/drawingml/2006/main" xmlns:p="http://schemas.openxmlformats.org/presentationml/2006/main" xmlns:r="http://schemas.openxmlformats.org/officeDocument/2006/relationships">
+  <p:cSld>
+    <p:spTree>
+      <p:nvGrpSpPr>
+        <p:cNvPr id="1" name=""/>
+        <p:cNvGrpSpPr/>
+        <p:nvPr/>
+      </p:nvGrpSpPr>
+      <p:grpSpPr>
+        <a:xfrm>
+          <a:off x="0" y="0"/>
+          <a:ext cx="0" cy="0"/>
+          <a:chOff x="0" y="0"/>
+          <a:chExt cx="0" cy="0"/>
+        </a:xfrm>
+      </p:grpSpPr>
+      <p:sp>
+        <p:nvSpPr>
+          <p:cNvPr id="2" name="Slide Image Placeholder 1"/>
+          <p:cNvSpPr>
+            <a:spLocks noGrp="1"/>
+          </p:cNvSpPr>
+          <p:nvPr>
+            <p:ph type="sldImg" idx="2"/>
+          </p:nvPr>
+        </p:nvSpPr>
+        <p:spPr/>
+      </p:sp>
+      <p:sp>
+        <p:nvSpPr>
+          <p:cNvPr id="3" name="Notes Placeholder 2"/>
+          <p:cNvSpPr>
+            <a:spLocks noGrp="1"/>
+          </p:cNvSpPr>
+          <p:nvPr>
+            <p:ph type="body" idx="1"/>
+          </p:nvPr>
+        </p:nvSpPr>
+        <p:spPr/>
+        <p:txBody>
+          <a:bodyPr/>
+          <a:lstStyle/>
+          <a:p>
+            <a:r>
+              <a:t>Talking points:</a:t>
+            </a:r>
+          </a:p>
+          <a:p>
+            <a:r>
+              <a:t>- Input happens every frame, but the snake acts on a tick</a:t>
+            </a:r>
+          </a:p>
+          <a:p>
+            <a:r>
+              <a:t>  - Up, then Left between two ticks: the second press overwrites the first</a:t>
+            </a:r>
+          </a:p>
+          <a:p>
+            <a:r>
+              <a:t>- Queue the turns, and use one per tick</a:t>
+            </a:r>
+          </a:p>
+          <a:p>
+            <a:r>
+              <a:t>  - Check each turn against the last queued direction</a:t>
+            </a:r>
+          </a:p>
+          <a:p>
+            <a:r>
+              <a:t>  - Keep the queue short: two turns</a:t>
+            </a:r>
+          </a:p>
+          <a:p>
+            <a:r>
+              <a:t>- Common in games: a jump pressed just before landing still counts</a:t>
+            </a:r>
+          </a:p>
+        </p:txBody>
+      </p:sp>
+    </p:spTree>
+  </p:cSld>
+  <p:clrMapOvr>
+    <a:masterClrMapping/>
+  </p:clrMapOvr>
+</p:notes>
+</file>
+
+<file path=ppt/notesSlides/notesSlide24.xml><?xml version="1.0" encoding="utf-8"?>
+<p:notes xmlns:a="http://schemas.openxmlformats.org/drawingml/2006/main" xmlns:p="http://schemas.openxmlformats.org/presentationml/2006/main" xmlns:r="http://schemas.openxmlformats.org/officeDocument/2006/relationships">
+  <p:cSld>
+    <p:spTree>
+      <p:nvGrpSpPr>
+        <p:cNvPr id="1" name=""/>
+        <p:cNvGrpSpPr/>
+        <p:nvPr/>
+      </p:nvGrpSpPr>
+      <p:grpSpPr>
+        <a:xfrm>
+          <a:off x="0" y="0"/>
+          <a:ext cx="0" cy="0"/>
+          <a:chOff x="0" y="0"/>
+          <a:chExt cx="0" cy="0"/>
+        </a:xfrm>
+      </p:grpSpPr>
+      <p:sp>
+        <p:nvSpPr>
+          <p:cNvPr id="2" name="Slide Image Placeholder 1"/>
+          <p:cNvSpPr>
+            <a:spLocks noGrp="1"/>
+          </p:cNvSpPr>
+          <p:nvPr>
+            <p:ph type="sldImg" idx="2"/>
+          </p:nvPr>
+        </p:nvSpPr>
+        <p:spPr/>
+      </p:sp>
+      <p:sp>
+        <p:nvSpPr>
+          <p:cNvPr id="3" name="Notes Placeholder 2"/>
+          <p:cNvSpPr>
+            <a:spLocks noGrp="1"/>
+          </p:cNvSpPr>
+          <p:nvPr>
+            <p:ph type="body" idx="1"/>
+          </p:nvPr>
+        </p:nvSpPr>
+        <p:spPr/>
+        <p:txBody>
+          <a:bodyPr/>
+          <a:lstStyle/>
+          <a:p>
+            <a:r>
+              <a:t>Talking points:</a:t>
+            </a:r>
+          </a:p>
+          <a:p>
+            <a:r>
+              <a:t>- The XML files describe the assets</a:t>
+            </a:r>
+          </a:p>
+          <a:p>
+            <a:r>
+              <a:t>  - Which part of the image is the snake, how the bat’s animation runs, which tile goes where</a:t>
+            </a:r>
+          </a:p>
+          <a:p>
+            <a:r>
+              <a:t>- Data can change without the code changing</a:t>
+            </a:r>
+          </a:p>
+          <a:p>
+            <a:r>
+              <a:t>  - A new frame, a faster animation or a new room: edit a file, not C#</a:t>
+            </a:r>
+          </a:p>
+          <a:p>
+            <a:r>
+              <a:t>  - Artists and designers can work without touching the code</a:t>
+            </a:r>
+          </a:p>
+          <a:p>
+            <a:r>
+              <a:t>- The code gets smaller and more general</a:t>
+            </a:r>
+          </a:p>
+        </p:txBody>
+      </p:sp>
+    </p:spTree>
+  </p:cSld>
+  <p:clrMapOvr>
+    <a:masterClrMapping/>
+  </p:clrMapOvr>
+</p:notes>
+</file>
+
+<file path=ppt/notesSlides/notesSlide25.xml><?xml version="1.0" encoding="utf-8"?>
+<p:notes xmlns:a="http://schemas.openxmlformats.org/drawingml/2006/main" xmlns:p="http://schemas.openxmlformats.org/presentationml/2006/main" xmlns:r="http://schemas.openxmlformats.org/officeDocument/2006/relationships">
+  <p:cSld>
+    <p:spTree>
+      <p:nvGrpSpPr>
+        <p:cNvPr id="1" name=""/>
+        <p:cNvGrpSpPr/>
+        <p:nvPr/>
+      </p:nvGrpSpPr>
+      <p:grpSpPr>
+        <a:xfrm>
+          <a:off x="0" y="0"/>
+          <a:ext cx="0" cy="0"/>
+          <a:chOff x="0" y="0"/>
+          <a:chExt cx="0" cy="0"/>
+        </a:xfrm>
+      </p:grpSpPr>
+      <p:sp>
+        <p:nvSpPr>
+          <p:cNvPr id="2" name="Slide Image Placeholder 1"/>
+          <p:cNvSpPr>
+            <a:spLocks noGrp="1"/>
+          </p:cNvSpPr>
+          <p:nvPr>
+            <p:ph type="sldImg" idx="2"/>
+          </p:nvPr>
+        </p:nvSpPr>
+        <p:spPr/>
+      </p:sp>
+      <p:sp>
+        <p:nvSpPr>
+          <p:cNvPr id="3" name="Notes Placeholder 2"/>
+          <p:cNvSpPr>
+            <a:spLocks noGrp="1"/>
+          </p:cNvSpPr>
+          <p:nvPr>
+            <p:ph type="body" idx="1"/>
+          </p:nvPr>
+        </p:nvSpPr>
+        <p:spPr/>
+        <p:txBody>
+          <a:bodyPr/>
+          <a:lstStyle/>
+          <a:p>
+            <a:r>
+              <a:t>Talking points:</a:t>
+            </a:r>
+          </a:p>
+          <a:p>
+            <a:r>
+              <a:t>- The same content builder as in Pong and Flappy Bird</a:t>
+            </a:r>
+          </a:p>
+          <a:p>
+            <a:r>
+              <a:t>- But here, all steps share one Content project</a:t>
+            </a:r>
+          </a:p>
+          <a:p>
+            <a:r>
+              <a:t>  - Content/Assets: the raw images and XML definitions</a:t>
+            </a:r>
+          </a:p>
+          <a:p>
+            <a:r>
+              <a:t>  - Content/Builder/Builder.cs: the build rules, in C#</a:t>
+            </a:r>
+          </a:p>
+          <a:p>
+            <a:r>
+              <a:t>- The rules decide how each asset is processed</a:t>
+            </a:r>
+          </a:p>
+          <a:p>
+            <a:r>
+              <a:t>  - PNG images are built into textures (magenta = transparent)</a:t>
+            </a:r>
+          </a:p>
+          <a:p>
+            <a:r>
+              <a:t>  - XML definitions are copied as they are</a:t>
+            </a:r>
+          </a:p>
+        </p:txBody>
+      </p:sp>
+    </p:spTree>
+  </p:cSld>
+  <p:clrMapOvr>
+    <a:masterClrMapping/>
+  </p:clrMapOvr>
+</p:notes>
+</file>
+
 <file path=ppt/notesSlides/notesSlide26.xml><?xml version="1.0" encoding="utf-8"?>
 <p:notes xmlns:a="http://schemas.openxmlformats.org/drawingml/2006/main" xmlns:r="http://schemas.openxmlformats.org/officeDocument/2006/relationships" xmlns:mc="http://schemas.openxmlformats.org/markup-compatibility/2006" xmlns:mv="urn:schemas-microsoft-com:mac:vml" xmlns:p="http://schemas.openxmlformats.org/presentationml/2006/main" xmlns:c="http://schemas.openxmlformats.org/drawingml/2006/chart" xmlns:dgm="http://schemas.openxmlformats.org/drawingml/2006/diagram" xmlns:o="urn:schemas-microsoft-com:office:office" xmlns:v="urn:schemas-microsoft-com:vml" xmlns:pvml="urn:schemas-microsoft-com:office:powerpoint" xmlns:com="http://schemas.openxmlformats.org/drawingml/2006/compatibility" xmlns:p14="http://schemas.microsoft.com/office/powerpoint/2010/main" xmlns:p15="http://schemas.microsoft.com/office/powerpoint/2012/main" xmlns:ahyp="http://schemas.microsoft.com/office/drawing/2018/hyperlinkcolor" showMasterPhAnim="0" showMasterSp="0">
   <p:cSld>
@@ -2131,20 +2459,60 @@
           </a:bodyPr>
           <a:lstStyle/>
           <a:p>
-            <a:pPr indent="0" lvl="0" marL="0" rtl="0" algn="l">
-              <a:spcBef>
-                <a:spcPts val="0"/>
-              </a:spcBef>
-              <a:spcAft>
-                <a:spcPts val="0"/>
-              </a:spcAft>
-              <a:buNone/>
-            </a:pPr>
-            <a:r>
-              <a:rPr lang="en"/>
+            <a:r>
               <a:t>Nominal vs. structural typing (records)</a:t>
             </a:r>
-            <a:endParaRPr/>
+          </a:p>
+          <a:p/>
+          <a:p>
+            <a:r>
+              <a:t>Talking points:</a:t>
+            </a:r>
+          </a:p>
+          <a:p>
+            <a:r>
+              <a:t>- No need to add basic AABB collision detection to our library</a:t>
+            </a:r>
+          </a:p>
+          <a:p>
+            <a:r>
+              <a:t>- Rectangle.Intersects(Rectangle)</a:t>
+            </a:r>
+          </a:p>
+          <a:p>
+            <a:r>
+              <a:t>  - Provided by MonoGame</a:t>
+            </a:r>
+          </a:p>
+          <a:p>
+            <a:r>
+              <a:t>    - performs an an AABB collision check for us</a:t>
+            </a:r>
+          </a:p>
+          <a:p>
+            <a:r>
+              <a:t>- Rectangle.Contains()</a:t>
+            </a:r>
+          </a:p>
+          <a:p>
+            <a:r>
+              <a:t>  - Checks if Rectangle/Vector2/Point is contained within the Rectangle</a:t>
+            </a:r>
+          </a:p>
+          <a:p>
+            <a:r>
+              <a:t>- No Circles though</a:t>
+            </a:r>
+          </a:p>
+          <a:p>
+            <a:r>
+              <a:t>  - Add a Circle struct to GMDCore</a:t>
+            </a:r>
+          </a:p>
+          <a:p>
+            <a:r>
+              <a:t>  - Add an Intersects(Circle) method for other Circles</a:t>
+            </a:r>
           </a:p>
         </p:txBody>
       </p:sp>
@@ -2826,19 +3194,39 @@
           </a:bodyPr>
           <a:lstStyle/>
           <a:p>
-            <a:pPr indent="0" lvl="0" marL="0" rtl="0" algn="l">
-              <a:spcBef>
-                <a:spcPts val="0"/>
-              </a:spcBef>
-              <a:spcAft>
-                <a:spcPts val="0"/>
-              </a:spcAft>
-              <a:buNone/>
-            </a:pPr>
-            <a:r>
-              <a:t/>
-            </a:r>
-            <a:endParaRPr/>
+            <a:r>
+              <a:t>Talking points:</a:t>
+            </a:r>
+          </a:p>
+          <a:p>
+            <a:r>
+              <a:t>- All Source code for today’s game can be found here:</a:t>
+            </a:r>
+          </a:p>
+          <a:p>
+            <a:r>
+              <a:t>  - github.com/Metamate/gar-games (folder 03-snake)</a:t>
+            </a:r>
+          </a:p>
+          <a:p>
+            <a:r>
+              <a:t>- The game is built up in steps: Snake0 → Snake9</a:t>
+            </a:r>
+          </a:p>
+          <a:p>
+            <a:r>
+              <a:t>  - Each step is a separate project that adds one concept</a:t>
+            </a:r>
+          </a:p>
+          <a:p>
+            <a:r>
+              <a:t>  - Compare neighbouring steps to see exactly what changed</a:t>
+            </a:r>
+          </a:p>
+          <a:p>
+            <a:r>
+              <a:t>- Snake9 is the finished game, and the starting point for the exercises</a:t>
+            </a:r>
           </a:p>
         </p:txBody>
       </p:sp>
@@ -11385,7 +11773,7 @@
         <p:spPr>
           <a:xfrm>
             <a:off x="311700" y="885950"/>
-            <a:ext cx="8520600" cy="4023300"/>
+            <a:ext cx="8520600" cy="521208"/>
           </a:xfrm>
           <a:prstGeom prst="rect">
             <a:avLst/>
@@ -11409,94 +11797,521 @@
             </a:pPr>
             <a:r>
               <a:rPr lang="en"/>
-              <a:t>Input happens every frame, but the snake acts on a tick</a:t>
+              <a:t>The snake acts once per tick; the player can press twice between two ticks.</a:t>
             </a:r>
             <a:endParaRPr/>
           </a:p>
-          <a:p>
-            <a:pPr indent="-317500" lvl="1" marL="914400" rtl="0" algn="l">
-              <a:spcBef>
-                <a:spcPts val="0"/>
-              </a:spcBef>
-              <a:spcAft>
-                <a:spcPts val="0"/>
-              </a:spcAft>
-              <a:buSzPts val="1400"/>
-              <a:buChar char="○"/>
-            </a:pPr>
-            <a:r>
-              <a:rPr lang="en"/>
-              <a:t>Up, then Left between two ticks: the second press overwrites the first</a:t>
-            </a:r>
-            <a:endParaRPr/>
-          </a:p>
-          <a:p>
-            <a:pPr indent="-330200" lvl="0" marL="457200" rtl="0" algn="l">
-              <a:spcBef>
-                <a:spcPts val="0"/>
-              </a:spcBef>
-              <a:spcAft>
-                <a:spcPts val="0"/>
-              </a:spcAft>
-              <a:buSzPts val="1600"/>
-              <a:buChar char="●"/>
-            </a:pPr>
-            <a:r>
-              <a:rPr lang="en"/>
-              <a:t>Queue the turns, and use one per tick</a:t>
-            </a:r>
-            <a:endParaRPr/>
-          </a:p>
-          <a:p>
-            <a:pPr indent="-317500" lvl="1" marL="914400" rtl="0" algn="l">
-              <a:spcBef>
-                <a:spcPts val="0"/>
-              </a:spcBef>
-              <a:spcAft>
-                <a:spcPts val="0"/>
-              </a:spcAft>
-              <a:buSzPts val="1400"/>
-              <a:buChar char="○"/>
-            </a:pPr>
-            <a:r>
-              <a:rPr lang="en"/>
-              <a:t>Check each turn against the last queued direction</a:t>
-            </a:r>
-            <a:endParaRPr/>
-          </a:p>
-          <a:p>
-            <a:pPr indent="-317500" lvl="1" marL="914400" rtl="0" algn="l">
-              <a:spcBef>
-                <a:spcPts val="0"/>
-              </a:spcBef>
-              <a:spcAft>
-                <a:spcPts val="0"/>
-              </a:spcAft>
-              <a:buSzPts val="1400"/>
-              <a:buChar char="○"/>
-            </a:pPr>
-            <a:r>
-              <a:rPr lang="en"/>
-              <a:t>Keep the queue short: two turns</a:t>
-            </a:r>
-            <a:endParaRPr/>
-          </a:p>
-          <a:p>
-            <a:pPr indent="-330200" lvl="0" marL="457200" rtl="0" algn="l">
-              <a:spcBef>
-                <a:spcPts val="0"/>
-              </a:spcBef>
-              <a:spcAft>
-                <a:spcPts val="0"/>
-              </a:spcAft>
-              <a:buSzPts val="1600"/>
-              <a:buChar char="●"/>
-            </a:pPr>
-            <a:r>
-              <a:rPr lang="en"/>
-              <a:t>Common in games: a jump pressed just before landing still counts</a:t>
-            </a:r>
-            <a:endParaRPr/>
+        </p:txBody>
+      </p:sp>
+      <p:cxnSp>
+        <p:nvCxnSpPr>
+          <p:cNvPr id="295" name="Connector 294"/>
+          <p:cNvCxnSpPr/>
+          <p:nvPr/>
+        </p:nvCxnSpPr>
+        <p:spPr>
+          <a:xfrm>
+            <a:off x="548640" y="2011680"/>
+            <a:ext cx="7955280" cy="0"/>
+          </a:xfrm>
+          <a:prstGeom prst="line">
+            <a:avLst/>
+          </a:prstGeom>
+          <a:ln w="25400">
+            <a:solidFill>
+              <a:srgbClr val="9AA3AB"/>
+            </a:solidFill>
+            <a:tailEnd type="triangle"/>
+          </a:ln>
+        </p:spPr>
+        <p:style>
+          <a:lnRef idx="2">
+            <a:schemeClr val="accent1"/>
+          </a:lnRef>
+          <a:fillRef idx="0">
+            <a:schemeClr val="accent1"/>
+          </a:fillRef>
+          <a:effectRef idx="1">
+            <a:schemeClr val="accent1"/>
+          </a:effectRef>
+          <a:fontRef idx="minor">
+            <a:schemeClr val="tx1"/>
+          </a:fontRef>
+        </p:style>
+      </p:cxnSp>
+      <p:sp>
+        <p:nvSpPr>
+          <p:cNvPr id="296" name="Rectangle 295"/>
+          <p:cNvSpPr/>
+          <p:nvPr/>
+        </p:nvSpPr>
+        <p:spPr>
+          <a:xfrm>
+            <a:off x="1051560" y="1783080"/>
+            <a:ext cx="91440" cy="457200"/>
+          </a:xfrm>
+          <a:prstGeom prst="rect">
+            <a:avLst/>
+          </a:prstGeom>
+          <a:solidFill>
+            <a:srgbClr val="D45D35"/>
+          </a:solidFill>
+          <a:ln>
+            <a:noFill/>
+          </a:ln>
+          <a:effectLst/>
+        </p:spPr>
+        <p:style>
+          <a:lnRef idx="1">
+            <a:schemeClr val="accent1"/>
+          </a:lnRef>
+          <a:fillRef idx="3">
+            <a:schemeClr val="accent1"/>
+          </a:fillRef>
+          <a:effectRef idx="2">
+            <a:schemeClr val="accent1"/>
+          </a:effectRef>
+          <a:fontRef idx="minor">
+            <a:schemeClr val="lt1"/>
+          </a:fontRef>
+        </p:style>
+        <p:txBody>
+          <a:bodyPr rtlCol="0" anchor="ctr" wrap="square" lIns="73152" rIns="73152"/>
+          <a:lstStyle/>
+          <a:p>
+            <a:pPr algn="ctr"/>
+            <a:r>
+              <a:rPr sz="1400" b="0">
+                <a:solidFill>
+                  <a:srgbClr val="DEE2E6"/>
+                </a:solidFill>
+              </a:rPr>
+              <a:t/>
+            </a:r>
+          </a:p>
+        </p:txBody>
+      </p:sp>
+      <p:sp>
+        <p:nvSpPr>
+          <p:cNvPr id="297" name="TextBox 296"/>
+          <p:cNvSpPr txBox="1"/>
+          <p:nvPr/>
+        </p:nvSpPr>
+        <p:spPr>
+          <a:xfrm>
+            <a:off x="640080" y="2286000"/>
+            <a:ext cx="914400" cy="274320"/>
+          </a:xfrm>
+          <a:prstGeom prst="rect">
+            <a:avLst/>
+          </a:prstGeom>
+          <a:noFill/>
+        </p:spPr>
+        <p:txBody>
+          <a:bodyPr wrap="square">
+            <a:spAutoFit/>
+          </a:bodyPr>
+          <a:lstStyle/>
+          <a:p>
+            <a:pPr algn="ctr"/>
+            <a:r>
+              <a:rPr sz="1200" b="0" i="0">
+                <a:solidFill>
+                  <a:srgbClr val="9AA3AB"/>
+                </a:solidFill>
+              </a:rPr>
+              <a:t>tick</a:t>
+            </a:r>
+          </a:p>
+        </p:txBody>
+      </p:sp>
+      <p:sp>
+        <p:nvSpPr>
+          <p:cNvPr id="298" name="Rectangle 297"/>
+          <p:cNvSpPr/>
+          <p:nvPr/>
+        </p:nvSpPr>
+        <p:spPr>
+          <a:xfrm>
+            <a:off x="7452359" y="1783080"/>
+            <a:ext cx="91440" cy="457200"/>
+          </a:xfrm>
+          <a:prstGeom prst="rect">
+            <a:avLst/>
+          </a:prstGeom>
+          <a:solidFill>
+            <a:srgbClr val="D45D35"/>
+          </a:solidFill>
+          <a:ln>
+            <a:noFill/>
+          </a:ln>
+          <a:effectLst/>
+        </p:spPr>
+        <p:style>
+          <a:lnRef idx="1">
+            <a:schemeClr val="accent1"/>
+          </a:lnRef>
+          <a:fillRef idx="3">
+            <a:schemeClr val="accent1"/>
+          </a:fillRef>
+          <a:effectRef idx="2">
+            <a:schemeClr val="accent1"/>
+          </a:effectRef>
+          <a:fontRef idx="minor">
+            <a:schemeClr val="lt1"/>
+          </a:fontRef>
+        </p:style>
+        <p:txBody>
+          <a:bodyPr rtlCol="0" anchor="ctr" wrap="square" lIns="73152" rIns="73152"/>
+          <a:lstStyle/>
+          <a:p>
+            <a:pPr algn="ctr"/>
+            <a:r>
+              <a:rPr sz="1400" b="0">
+                <a:solidFill>
+                  <a:srgbClr val="DEE2E6"/>
+                </a:solidFill>
+              </a:rPr>
+              <a:t/>
+            </a:r>
+          </a:p>
+        </p:txBody>
+      </p:sp>
+      <p:sp>
+        <p:nvSpPr>
+          <p:cNvPr id="299" name="TextBox 298"/>
+          <p:cNvSpPr txBox="1"/>
+          <p:nvPr/>
+        </p:nvSpPr>
+        <p:spPr>
+          <a:xfrm>
+            <a:off x="7040879" y="2286000"/>
+            <a:ext cx="914400" cy="274320"/>
+          </a:xfrm>
+          <a:prstGeom prst="rect">
+            <a:avLst/>
+          </a:prstGeom>
+          <a:noFill/>
+        </p:spPr>
+        <p:txBody>
+          <a:bodyPr wrap="square">
+            <a:spAutoFit/>
+          </a:bodyPr>
+          <a:lstStyle/>
+          <a:p>
+            <a:pPr algn="ctr"/>
+            <a:r>
+              <a:rPr sz="1200" b="0" i="0">
+                <a:solidFill>
+                  <a:srgbClr val="9AA3AB"/>
+                </a:solidFill>
+              </a:rPr>
+              <a:t>tick</a:t>
+            </a:r>
+          </a:p>
+        </p:txBody>
+      </p:sp>
+      <p:sp>
+        <p:nvSpPr>
+          <p:cNvPr id="300" name="Rounded Rectangle 299"/>
+          <p:cNvSpPr/>
+          <p:nvPr/>
+        </p:nvSpPr>
+        <p:spPr>
+          <a:xfrm>
+            <a:off x="2880360" y="1325880"/>
+            <a:ext cx="822960" cy="411480"/>
+          </a:xfrm>
+          <a:prstGeom prst="roundRect">
+            <a:avLst>
+              <a:gd name="adj" fmla="val 12000"/>
+            </a:avLst>
+          </a:prstGeom>
+          <a:solidFill>
+            <a:srgbClr val="2E3338"/>
+          </a:solidFill>
+          <a:ln>
+            <a:noFill/>
+          </a:ln>
+          <a:effectLst/>
+        </p:spPr>
+        <p:style>
+          <a:lnRef idx="1">
+            <a:schemeClr val="accent1"/>
+          </a:lnRef>
+          <a:fillRef idx="3">
+            <a:schemeClr val="accent1"/>
+          </a:fillRef>
+          <a:effectRef idx="2">
+            <a:schemeClr val="accent1"/>
+          </a:effectRef>
+          <a:fontRef idx="minor">
+            <a:schemeClr val="lt1"/>
+          </a:fontRef>
+        </p:style>
+        <p:txBody>
+          <a:bodyPr rtlCol="0" anchor="ctr" wrap="square" lIns="73152" rIns="73152"/>
+          <a:lstStyle/>
+          <a:p>
+            <a:pPr algn="ctr"/>
+            <a:r>
+              <a:rPr sz="1400" b="1">
+                <a:solidFill>
+                  <a:srgbClr val="DEE2E6"/>
+                </a:solidFill>
+              </a:rPr>
+              <a:t>Up</a:t>
+            </a:r>
+          </a:p>
+        </p:txBody>
+      </p:sp>
+      <p:cxnSp>
+        <p:nvCxnSpPr>
+          <p:cNvPr id="301" name="Connector 300"/>
+          <p:cNvCxnSpPr/>
+          <p:nvPr/>
+        </p:nvCxnSpPr>
+        <p:spPr>
+          <a:xfrm>
+            <a:off x="3291840" y="1755648"/>
+            <a:ext cx="0" cy="210312"/>
+          </a:xfrm>
+          <a:prstGeom prst="line">
+            <a:avLst/>
+          </a:prstGeom>
+          <a:ln w="25400">
+            <a:solidFill>
+              <a:srgbClr val="9AA3AB"/>
+            </a:solidFill>
+            <a:tailEnd type="triangle"/>
+          </a:ln>
+        </p:spPr>
+        <p:style>
+          <a:lnRef idx="2">
+            <a:schemeClr val="accent1"/>
+          </a:lnRef>
+          <a:fillRef idx="0">
+            <a:schemeClr val="accent1"/>
+          </a:fillRef>
+          <a:effectRef idx="1">
+            <a:schemeClr val="accent1"/>
+          </a:effectRef>
+          <a:fontRef idx="minor">
+            <a:schemeClr val="tx1"/>
+          </a:fontRef>
+        </p:style>
+      </p:cxnSp>
+      <p:sp>
+        <p:nvSpPr>
+          <p:cNvPr id="302" name="Rounded Rectangle 301"/>
+          <p:cNvSpPr/>
+          <p:nvPr/>
+        </p:nvSpPr>
+        <p:spPr>
+          <a:xfrm>
+            <a:off x="4709159" y="1325880"/>
+            <a:ext cx="822960" cy="411480"/>
+          </a:xfrm>
+          <a:prstGeom prst="roundRect">
+            <a:avLst>
+              <a:gd name="adj" fmla="val 12000"/>
+            </a:avLst>
+          </a:prstGeom>
+          <a:solidFill>
+            <a:srgbClr val="2E3338"/>
+          </a:solidFill>
+          <a:ln>
+            <a:noFill/>
+          </a:ln>
+          <a:effectLst/>
+        </p:spPr>
+        <p:style>
+          <a:lnRef idx="1">
+            <a:schemeClr val="accent1"/>
+          </a:lnRef>
+          <a:fillRef idx="3">
+            <a:schemeClr val="accent1"/>
+          </a:fillRef>
+          <a:effectRef idx="2">
+            <a:schemeClr val="accent1"/>
+          </a:effectRef>
+          <a:fontRef idx="minor">
+            <a:schemeClr val="lt1"/>
+          </a:fontRef>
+        </p:style>
+        <p:txBody>
+          <a:bodyPr rtlCol="0" anchor="ctr" wrap="square" lIns="73152" rIns="73152"/>
+          <a:lstStyle/>
+          <a:p>
+            <a:pPr algn="ctr"/>
+            <a:r>
+              <a:rPr sz="1400" b="1">
+                <a:solidFill>
+                  <a:srgbClr val="DEE2E6"/>
+                </a:solidFill>
+              </a:rPr>
+              <a:t>Left</a:t>
+            </a:r>
+          </a:p>
+        </p:txBody>
+      </p:sp>
+      <p:cxnSp>
+        <p:nvCxnSpPr>
+          <p:cNvPr id="303" name="Connector 302"/>
+          <p:cNvCxnSpPr/>
+          <p:nvPr/>
+        </p:nvCxnSpPr>
+        <p:spPr>
+          <a:xfrm>
+            <a:off x="5120640" y="1755648"/>
+            <a:ext cx="0" cy="210312"/>
+          </a:xfrm>
+          <a:prstGeom prst="line">
+            <a:avLst/>
+          </a:prstGeom>
+          <a:ln w="25400">
+            <a:solidFill>
+              <a:srgbClr val="9AA3AB"/>
+            </a:solidFill>
+            <a:tailEnd type="triangle"/>
+          </a:ln>
+        </p:spPr>
+        <p:style>
+          <a:lnRef idx="2">
+            <a:schemeClr val="accent1"/>
+          </a:lnRef>
+          <a:fillRef idx="0">
+            <a:schemeClr val="accent1"/>
+          </a:fillRef>
+          <a:effectRef idx="1">
+            <a:schemeClr val="accent1"/>
+          </a:effectRef>
+          <a:fontRef idx="minor">
+            <a:schemeClr val="tx1"/>
+          </a:fontRef>
+        </p:style>
+      </p:cxnSp>
+      <p:sp>
+        <p:nvSpPr>
+          <p:cNvPr id="304" name="TextBox 303"/>
+          <p:cNvSpPr txBox="1"/>
+          <p:nvPr/>
+        </p:nvSpPr>
+        <p:spPr>
+          <a:xfrm>
+            <a:off x="548640" y="2743200"/>
+            <a:ext cx="3840480" cy="822960"/>
+          </a:xfrm>
+          <a:prstGeom prst="rect">
+            <a:avLst/>
+          </a:prstGeom>
+          <a:noFill/>
+        </p:spPr>
+        <p:txBody>
+          <a:bodyPr wrap="square">
+            <a:spAutoFit/>
+          </a:bodyPr>
+          <a:lstStyle/>
+          <a:p>
+            <a:pPr algn="l"/>
+            <a:r>
+              <a:rPr sz="1500" b="1" i="0">
+                <a:solidFill>
+                  <a:srgbClr val="DEE2E6"/>
+                </a:solidFill>
+              </a:rPr>
+              <a:t>Keep only the last key:</a:t>
+            </a:r>
+          </a:p>
+          <a:p>
+            <a:pPr algn="l"/>
+            <a:r>
+              <a:rPr sz="1500" b="1" i="0">
+                <a:solidFill>
+                  <a:srgbClr val="DEE2E6"/>
+                </a:solidFill>
+              </a:rPr>
+              <a:t>Left overwrites Up, and the turn is lost.</a:t>
+            </a:r>
+          </a:p>
+        </p:txBody>
+      </p:sp>
+      <p:sp>
+        <p:nvSpPr>
+          <p:cNvPr id="305" name="TextBox 304"/>
+          <p:cNvSpPr txBox="1"/>
+          <p:nvPr/>
+        </p:nvSpPr>
+        <p:spPr>
+          <a:xfrm>
+            <a:off x="4572000" y="2743200"/>
+            <a:ext cx="4023360" cy="822960"/>
+          </a:xfrm>
+          <a:prstGeom prst="rect">
+            <a:avLst/>
+          </a:prstGeom>
+          <a:noFill/>
+        </p:spPr>
+        <p:txBody>
+          <a:bodyPr wrap="square">
+            <a:spAutoFit/>
+          </a:bodyPr>
+          <a:lstStyle/>
+          <a:p>
+            <a:pPr algn="l"/>
+            <a:r>
+              <a:rPr sz="1500" b="1" i="0">
+                <a:solidFill>
+                  <a:srgbClr val="DEE2E6"/>
+                </a:solidFill>
+              </a:rPr>
+              <a:t>Queue them (at most two):</a:t>
+            </a:r>
+          </a:p>
+          <a:p>
+            <a:pPr algn="l"/>
+            <a:r>
+              <a:rPr sz="1500" b="1" i="0">
+                <a:solidFill>
+                  <a:srgbClr val="DEE2E6"/>
+                </a:solidFill>
+              </a:rPr>
+              <a:t>Up on this tick, Left on the next.</a:t>
+            </a:r>
+          </a:p>
+        </p:txBody>
+      </p:sp>
+      <p:sp>
+        <p:nvSpPr>
+          <p:cNvPr id="306" name="TextBox 305"/>
+          <p:cNvSpPr txBox="1"/>
+          <p:nvPr/>
+        </p:nvSpPr>
+        <p:spPr>
+          <a:xfrm>
+            <a:off x="548640" y="3749039"/>
+            <a:ext cx="8046720" cy="365760"/>
+          </a:xfrm>
+          <a:prstGeom prst="rect">
+            <a:avLst/>
+          </a:prstGeom>
+          <a:noFill/>
+        </p:spPr>
+        <p:txBody>
+          <a:bodyPr wrap="square">
+            <a:spAutoFit/>
+          </a:bodyPr>
+          <a:lstStyle/>
+          <a:p>
+            <a:pPr algn="ctr"/>
+            <a:r>
+              <a:rPr sz="1300" b="0" i="0">
+                <a:solidFill>
+                  <a:srgbClr val="9AA3AB"/>
+                </a:solidFill>
+              </a:rPr>
+              <a:t>The same trick lets a jump pressed just before landing still count.</a:t>
+            </a:r>
           </a:p>
         </p:txBody>
       </p:sp>
@@ -14876,7 +15691,7 @@
         <p:spPr>
           <a:xfrm>
             <a:off x="311700" y="885950"/>
-            <a:ext cx="8520600" cy="4023300"/>
+            <a:ext cx="8520600" cy="521208"/>
           </a:xfrm>
           <a:prstGeom prst="rect">
             <a:avLst/>
@@ -14900,163 +15715,164 @@
             </a:pPr>
             <a:r>
               <a:rPr lang="en"/>
-              <a:t>No need to add basic AABB collision detection to our library</a:t>
+              <a:t>MonoGame checks rectangles for us; circles we add to GMDCore.</a:t>
             </a:r>
             <a:endParaRPr/>
           </a:p>
-          <a:p>
-            <a:pPr indent="-330200" lvl="0" marL="457200" rtl="0" algn="l">
-              <a:spcBef>
-                <a:spcPts val="0"/>
-              </a:spcBef>
-              <a:spcAft>
-                <a:spcPts val="0"/>
-              </a:spcAft>
-              <a:buSzPts val="1600"/>
-              <a:buChar char="●"/>
-            </a:pPr>
-            <a:r>
-              <a:rPr lang="en" u="sng">
-                <a:solidFill>
-                  <a:schemeClr val="hlink"/>
-                </a:solidFill>
-                <a:hlinkClick r:id="rId3"/>
-              </a:rPr>
-              <a:t>Rectangle.Intersects(Rectangle)</a:t>
-            </a:r>
-            <a:endParaRPr/>
-          </a:p>
-          <a:p>
-            <a:pPr indent="-317500" lvl="1" marL="914400" rtl="0" algn="l">
-              <a:spcBef>
-                <a:spcPts val="0"/>
-              </a:spcBef>
-              <a:spcAft>
-                <a:spcPts val="0"/>
-              </a:spcAft>
-              <a:buSzPts val="1400"/>
-              <a:buChar char="○"/>
-            </a:pPr>
-            <a:r>
-              <a:rPr lang="en"/>
-              <a:t>Provided by MonoGame</a:t>
-            </a:r>
-            <a:endParaRPr/>
-          </a:p>
-          <a:p>
-            <a:pPr indent="-304800" lvl="2" marL="1371600" rtl="0" algn="l">
-              <a:spcBef>
-                <a:spcPts val="0"/>
-              </a:spcBef>
-              <a:spcAft>
-                <a:spcPts val="0"/>
-              </a:spcAft>
-              <a:buSzPts val="1200"/>
-              <a:buChar char="■"/>
-            </a:pPr>
-            <a:r>
-              <a:rPr lang="en"/>
-              <a:t>performs an an AABB collision check for us</a:t>
-            </a:r>
-            <a:endParaRPr/>
-          </a:p>
-          <a:p>
-            <a:pPr indent="-330200" lvl="0" marL="457200" rtl="0" algn="l">
-              <a:spcBef>
-                <a:spcPts val="0"/>
-              </a:spcBef>
-              <a:spcAft>
-                <a:spcPts val="0"/>
-              </a:spcAft>
-              <a:buSzPts val="1600"/>
-              <a:buChar char="●"/>
-            </a:pPr>
-            <a:r>
-              <a:rPr lang="en" u="sng">
-                <a:solidFill>
-                  <a:schemeClr val="hlink"/>
-                </a:solidFill>
-                <a:hlinkClick r:id="rId4"/>
-              </a:rPr>
-              <a:t>Rectangle.Contains()</a:t>
-            </a:r>
-            <a:endParaRPr/>
-          </a:p>
-          <a:p>
-            <a:pPr indent="-317500" lvl="1" marL="914400" rtl="0" algn="l">
-              <a:spcBef>
-                <a:spcPts val="0"/>
-              </a:spcBef>
-              <a:spcAft>
-                <a:spcPts val="0"/>
-              </a:spcAft>
-              <a:buSzPts val="1400"/>
-              <a:buChar char="○"/>
-            </a:pPr>
-            <a:r>
-              <a:rPr lang="en"/>
-              <a:t>Checks if Rectangle/Vector2/Point is contained within the Rectangle</a:t>
-            </a:r>
-            <a:endParaRPr/>
-          </a:p>
-          <a:p>
-            <a:pPr indent="-330200" lvl="0" marL="457200" rtl="0" algn="l">
-              <a:spcBef>
-                <a:spcPts val="0"/>
-              </a:spcBef>
-              <a:spcAft>
-                <a:spcPts val="0"/>
-              </a:spcAft>
-              <a:buSzPts val="1600"/>
-              <a:buChar char="●"/>
-            </a:pPr>
-            <a:r>
-              <a:rPr lang="en"/>
-              <a:t>No Circles though</a:t>
-            </a:r>
-            <a:endParaRPr/>
-          </a:p>
-          <a:p>
-            <a:pPr indent="-317500" lvl="1" marL="914400" rtl="0" algn="l">
-              <a:spcBef>
-                <a:spcPts val="0"/>
-              </a:spcBef>
-              <a:spcAft>
-                <a:spcPts val="0"/>
-              </a:spcAft>
-              <a:buSzPts val="1400"/>
-              <a:buChar char="○"/>
-            </a:pPr>
-            <a:r>
-              <a:rPr lang="en"/>
-              <a:t>Add a Circle struct to GMDCore</a:t>
-            </a:r>
-            <a:endParaRPr/>
-          </a:p>
-          <a:p>
-            <a:pPr indent="-317500" lvl="1" marL="914400" rtl="0" algn="l">
-              <a:spcBef>
-                <a:spcPts val="0"/>
-              </a:spcBef>
-              <a:spcAft>
-                <a:spcPts val="0"/>
-              </a:spcAft>
-              <a:buSzPts val="1400"/>
-              <a:buChar char="○"/>
-            </a:pPr>
-            <a:r>
-              <a:rPr lang="en"/>
-              <a:t>Add an Intersects(Ci</a:t>
-            </a:r>
-            <a:r>
-              <a:rPr lang="en"/>
-              <a:t>rcl</a:t>
-            </a:r>
-            <a:r>
-              <a:rPr lang="en"/>
-              <a:t>e) method for other Circles</a:t>
-            </a:r>
-            <a:endParaRPr/>
+        </p:txBody>
+      </p:sp>
+      <p:sp>
+        <p:nvSpPr>
+          <p:cNvPr id="255" name="Rectangle 254"/>
+          <p:cNvSpPr/>
+          <p:nvPr/>
+        </p:nvSpPr>
+        <p:spPr>
+          <a:xfrm>
+            <a:off x="548640" y="1417320"/>
+            <a:ext cx="8046720" cy="1737360"/>
+          </a:xfrm>
+          <a:prstGeom prst="rect">
+            <a:avLst/>
+          </a:prstGeom>
+          <a:solidFill>
+            <a:srgbClr val="17191C"/>
+          </a:solidFill>
+          <a:ln>
+            <a:noFill/>
+          </a:ln>
+          <a:effectLst/>
+        </p:spPr>
+        <p:style>
+          <a:lnRef idx="1">
+            <a:schemeClr val="accent1"/>
+          </a:lnRef>
+          <a:fillRef idx="3">
+            <a:schemeClr val="accent1"/>
+          </a:fillRef>
+          <a:effectRef idx="2">
+            <a:schemeClr val="accent1"/>
+          </a:effectRef>
+          <a:fontRef idx="minor">
+            <a:schemeClr val="lt1"/>
+          </a:fontRef>
+        </p:style>
+        <p:txBody>
+          <a:bodyPr rtlCol="0" anchor="ctr" wrap="square" lIns="164592" rIns="73152"/>
+          <a:lstStyle/>
+          <a:p>
+            <a:pPr algn="l"/>
+            <a:r>
+              <a:rPr sz="1400" b="0">
+                <a:solidFill>
+                  <a:srgbClr val="DEE2E6"/>
+                </a:solidFill>
+              </a:rPr>
+              <a:t/>
+            </a:r>
+            <a:r>
+              <a:rPr sz="1200">
+                <a:solidFill>
+                  <a:srgbClr val="DEE2E6"/>
+                </a:solidFill>
+                <a:latin typeface="Consolas"/>
+              </a:rPr>
+              <a:t>bool hit = a.Intersects(b);            // Rectangle: AABB, built in</a:t>
+            </a:r>
+          </a:p>
+          <a:p>
+            <a:pPr algn="l"/>
+            <a:r>
+              <a:rPr sz="1200">
+                <a:solidFill>
+                  <a:srgbClr val="DEE2E6"/>
+                </a:solidFill>
+                <a:latin typeface="Consolas"/>
+              </a:rPr>
+              <a:t> </a:t>
+            </a:r>
+          </a:p>
+          <a:p>
+            <a:pPr algn="l"/>
+            <a:r>
+              <a:rPr sz="1200">
+                <a:solidFill>
+                  <a:srgbClr val="DEE2E6"/>
+                </a:solidFill>
+                <a:latin typeface="Consolas"/>
+              </a:rPr>
+              <a:t>public readonly record struct Circle   // GMDCore</a:t>
+            </a:r>
+          </a:p>
+          <a:p>
+            <a:pPr algn="l"/>
+            <a:r>
+              <a:rPr sz="1200">
+                <a:solidFill>
+                  <a:srgbClr val="DEE2E6"/>
+                </a:solidFill>
+                <a:latin typeface="Consolas"/>
+              </a:rPr>
+              <a:t>{</a:t>
+            </a:r>
+          </a:p>
+          <a:p>
+            <a:pPr algn="l"/>
+            <a:r>
+              <a:rPr sz="1200">
+                <a:solidFill>
+                  <a:srgbClr val="DEE2E6"/>
+                </a:solidFill>
+                <a:latin typeface="Consolas"/>
+              </a:rPr>
+              <a:t>    public bool Intersects(Circle other) =&gt; ...   // squared distances, no square root</a:t>
+            </a:r>
+          </a:p>
+          <a:p>
+            <a:pPr algn="l"/>
+            <a:r>
+              <a:rPr sz="1200">
+                <a:solidFill>
+                  <a:srgbClr val="DEE2E6"/>
+                </a:solidFill>
+                <a:latin typeface="Consolas"/>
+              </a:rPr>
+              <a:t>}</a:t>
+            </a:r>
+          </a:p>
+        </p:txBody>
+      </p:sp>
+      <p:sp>
+        <p:nvSpPr>
+          <p:cNvPr id="256" name="TextBox 255"/>
+          <p:cNvSpPr txBox="1"/>
+          <p:nvPr/>
+        </p:nvSpPr>
+        <p:spPr>
+          <a:xfrm>
+            <a:off x="457200" y="3383280"/>
+            <a:ext cx="8229600" cy="731520"/>
+          </a:xfrm>
+          <a:prstGeom prst="rect">
+            <a:avLst/>
+          </a:prstGeom>
+          <a:noFill/>
+        </p:spPr>
+        <p:txBody>
+          <a:bodyPr wrap="square">
+            <a:spAutoFit/>
+          </a:bodyPr>
+          <a:lstStyle/>
+          <a:p>
+            <a:pPr algn="ctr"/>
+            <a:r>
+              <a:rPr sz="1600" b="1" i="0">
+                <a:solidFill>
+                  <a:srgbClr val="DEE2E6"/>
+                </a:solidFill>
+              </a:rPr>
+              <a:t>Why compare squared distances?</a:t>
+            </a:r>
           </a:p>
         </p:txBody>
       </p:sp>
@@ -18842,6 +19658,179 @@
 </p:sld>
 </file>
 
+<file path=ppt/slides/slide35.xml><?xml version="1.0" encoding="utf-8"?>
+<p:sld xmlns:a="http://schemas.openxmlformats.org/drawingml/2006/main" xmlns:p="http://schemas.openxmlformats.org/presentationml/2006/main" xmlns:r="http://schemas.openxmlformats.org/officeDocument/2006/relationships">
+  <p:cSld>
+    <p:spTree>
+      <p:nvGrpSpPr>
+        <p:cNvPr id="1" name=""/>
+        <p:cNvGrpSpPr/>
+        <p:nvPr/>
+      </p:nvGrpSpPr>
+      <p:grpSpPr/>
+      <p:sp>
+        <p:nvSpPr>
+          <p:cNvPr id="2" name="Title 1"/>
+          <p:cNvSpPr>
+            <a:spLocks noGrp="1"/>
+          </p:cNvSpPr>
+          <p:nvPr>
+            <p:ph type="title"/>
+          </p:nvPr>
+        </p:nvSpPr>
+        <p:spPr/>
+        <p:txBody>
+          <a:bodyPr/>
+          <a:lstStyle/>
+          <a:p>
+            <a:pPr indent="0" lvl="0" marL="0" rtl="0" algn="l">
+              <a:spcBef>
+                <a:spcPts val="0"/>
+              </a:spcBef>
+              <a:spcAft>
+                <a:spcPts val="0"/>
+              </a:spcAft>
+              <a:buNone/>
+            </a:pPr>
+            <a:r>
+              <a:rPr lang="en"/>
+              <a:t>Check Yourself</a:t>
+            </a:r>
+            <a:endParaRPr/>
+          </a:p>
+        </p:txBody>
+      </p:sp>
+      <p:sp>
+        <p:nvSpPr>
+          <p:cNvPr id="3" name="Text Placeholder 2"/>
+          <p:cNvSpPr>
+            <a:spLocks noGrp="1"/>
+          </p:cNvSpPr>
+          <p:nvPr>
+            <p:ph type="body" idx="1"/>
+          </p:nvPr>
+        </p:nvSpPr>
+        <p:spPr>
+          <a:xfrm>
+            <a:off x="311700" y="885950"/>
+            <a:ext cx="8520600" cy="1719072"/>
+          </a:xfrm>
+        </p:spPr>
+        <p:txBody>
+          <a:bodyPr/>
+          <a:lstStyle/>
+          <a:p>
+            <a:pPr indent="-330200" lvl="0" marL="457200" rtl="0" algn="l">
+              <a:spcBef>
+                <a:spcPts val="0"/>
+              </a:spcBef>
+              <a:spcAft>
+                <a:spcPts val="0"/>
+              </a:spcAft>
+              <a:buSzPts val="1600"/>
+              <a:buChar char="●"/>
+            </a:pPr>
+            <a:r>
+              <a:rPr lang="en"/>
+              <a:t>Why prefer a texture atlas over many individual image files?</a:t>
+            </a:r>
+            <a:endParaRPr/>
+          </a:p>
+          <a:p>
+            <a:pPr indent="-330200" lvl="0" marL="457200" rtl="0" algn="l">
+              <a:spcBef>
+                <a:spcPts val="0"/>
+              </a:spcBef>
+              <a:spcAft>
+                <a:spcPts val="0"/>
+              </a:spcAft>
+              <a:buSzPts val="1600"/>
+              <a:buChar char="●"/>
+            </a:pPr>
+            <a:r>
+              <a:rPr lang="en"/>
+              <a:t>Why subtract the tick duration from the accumulator instead of resetting it?</a:t>
+            </a:r>
+            <a:endParaRPr/>
+          </a:p>
+          <a:p>
+            <a:pPr indent="-330200" lvl="0" marL="457200" rtl="0" algn="l">
+              <a:spcBef>
+                <a:spcPts val="0"/>
+              </a:spcBef>
+              <a:spcAft>
+                <a:spcPts val="0"/>
+              </a:spcAft>
+              <a:buSzPts val="1600"/>
+              <a:buChar char="●"/>
+            </a:pPr>
+            <a:r>
+              <a:rPr lang="en"/>
+              <a:t>What problems come from reading the keyboard inside gameplay code?</a:t>
+            </a:r>
+            <a:endParaRPr/>
+          </a:p>
+          <a:p>
+            <a:pPr indent="-330200" lvl="0" marL="457200" rtl="0" algn="l">
+              <a:spcBef>
+                <a:spcPts val="0"/>
+              </a:spcBef>
+              <a:spcAft>
+                <a:spcPts val="0"/>
+              </a:spcAft>
+              <a:buSzPts val="1600"/>
+              <a:buChar char="●"/>
+            </a:pPr>
+            <a:r>
+              <a:rPr lang="en"/>
+              <a:t>Why check a buffered turn against the last buffered direction?</a:t>
+            </a:r>
+            <a:endParaRPr/>
+          </a:p>
+        </p:txBody>
+      </p:sp>
+      <p:sp>
+        <p:nvSpPr>
+          <p:cNvPr id="4" name="TextBox 3"/>
+          <p:cNvSpPr txBox="1"/>
+          <p:nvPr/>
+        </p:nvSpPr>
+        <p:spPr>
+          <a:xfrm>
+            <a:off x="457200" y="3182112"/>
+            <a:ext cx="8229600" cy="457200"/>
+          </a:xfrm>
+          <a:prstGeom prst="rect">
+            <a:avLst/>
+          </a:prstGeom>
+          <a:noFill/>
+        </p:spPr>
+        <p:txBody>
+          <a:bodyPr wrap="square">
+            <a:spAutoFit/>
+          </a:bodyPr>
+          <a:lstStyle/>
+          <a:p>
+            <a:pPr algn="ctr"/>
+            <a:r>
+              <a:rPr sz="1400" b="0" i="0">
+                <a:solidFill>
+                  <a:srgbClr val="9AA3AB"/>
+                </a:solidFill>
+              </a:rPr>
+              <a:t>The answers, and more questions, are on the course site.</a:t>
+            </a:r>
+          </a:p>
+        </p:txBody>
+      </p:sp>
+    </p:spTree>
+  </p:cSld>
+  <p:clrMapOvr>
+    <a:masterClrMapping/>
+  </p:clrMapOvr>
+</p:sld>
+</file>
+
 <file path=ppt/slides/slide4.xml><?xml version="1.0" encoding="utf-8"?>
 <p:sld xmlns:a="http://schemas.openxmlformats.org/drawingml/2006/main" xmlns:r="http://schemas.openxmlformats.org/officeDocument/2006/relationships" xmlns:mc="http://schemas.openxmlformats.org/markup-compatibility/2006" xmlns:mv="urn:schemas-microsoft-com:mac:vml" xmlns:p="http://schemas.openxmlformats.org/presentationml/2006/main" xmlns:c="http://schemas.openxmlformats.org/drawingml/2006/chart" xmlns:dgm="http://schemas.openxmlformats.org/drawingml/2006/diagram" xmlns:o="urn:schemas-microsoft-com:office:office" xmlns:v="urn:schemas-microsoft-com:vml" xmlns:pvml="urn:schemas-microsoft-com:office:powerpoint" xmlns:com="http://schemas.openxmlformats.org/drawingml/2006/compatibility" xmlns:p14="http://schemas.microsoft.com/office/powerpoint/2010/main" xmlns:p15="http://schemas.microsoft.com/office/powerpoint/2012/main" xmlns:ahyp="http://schemas.microsoft.com/office/drawing/2018/hyperlinkcolor">
   <p:cSld>
@@ -18910,7 +19899,7 @@
         <p:spPr>
           <a:xfrm>
             <a:off x="311700" y="885950"/>
-            <a:ext cx="8520600" cy="4023300"/>
+            <a:ext cx="8520600" cy="1289304"/>
           </a:xfrm>
           <a:prstGeom prst="rect">
             <a:avLst/>
@@ -18934,29 +19923,7 @@
             </a:pPr>
             <a:r>
               <a:rPr lang="en"/>
-              <a:t>All Source code for today’s game can be found here:</a:t>
-            </a:r>
-            <a:endParaRPr/>
-          </a:p>
-          <a:p>
-            <a:pPr indent="-317500" lvl="1" marL="914400" rtl="0" algn="l">
-              <a:spcBef>
-                <a:spcPts val="0"/>
-              </a:spcBef>
-              <a:spcAft>
-                <a:spcPts val="0"/>
-              </a:spcAft>
-              <a:buSzPts val="1400"/>
-              <a:buChar char="○"/>
-            </a:pPr>
-            <a:r>
-              <a:rPr lang="en" u="sng">
-                <a:solidFill>
-                  <a:schemeClr val="hlink"/>
-                </a:solidFill>
-                <a:hlinkClick r:id="rId3"/>
-              </a:rPr>
-              <a:t>github.com/Metamate/gar-games (folder 03-snake)</a:t>
+              <a:t>github.com/Metamate/gar-games, folder 03-snake</a:t>
             </a:r>
             <a:endParaRPr/>
           </a:p>
@@ -18973,41 +19940,7 @@
             </a:pPr>
             <a:r>
               <a:rPr lang="en"/>
-              <a:t>The game is built up in steps: Snake0 → Snake9</a:t>
-            </a:r>
-            <a:endParaRPr/>
-          </a:p>
-          <a:p>
-            <a:pPr indent="-317500" lvl="1" marL="914400" rtl="0" algn="l">
-              <a:spcBef>
-                <a:spcPts val="0"/>
-              </a:spcBef>
-              <a:spcAft>
-                <a:spcPts val="0"/>
-              </a:spcAft>
-              <a:buSzPts val="1400"/>
-              <a:buChar char="○"/>
-            </a:pPr>
-            <a:r>
-              <a:rPr lang="en"/>
-              <a:t>Each step is a separate project that adds one concept</a:t>
-            </a:r>
-            <a:endParaRPr/>
-          </a:p>
-          <a:p>
-            <a:pPr indent="-317500" lvl="1" marL="914400" rtl="0" algn="l">
-              <a:spcBef>
-                <a:spcPts val="0"/>
-              </a:spcBef>
-              <a:spcAft>
-                <a:spcPts val="0"/>
-              </a:spcAft>
-              <a:buSzPts val="1400"/>
-              <a:buChar char="○"/>
-            </a:pPr>
-            <a:r>
-              <a:rPr lang="en"/>
-              <a:t>Compare neighbouring steps to see exactly what changed</a:t>
+              <a:t>Its README: the steps (Snake0 to Snake9), a map of the code, how to run it</a:t>
             </a:r>
             <a:endParaRPr/>
           </a:p>
@@ -19024,7 +19957,7 @@
             </a:pPr>
             <a:r>
               <a:rPr lang="en"/>
-              <a:t>Snake9 is the finished game, and the starting point for the exercises</a:t>
+              <a:t>The course site: today’s concepts in full, the exercises, and questions to check yourself</a:t>
             </a:r>
             <a:endParaRPr/>
           </a:p>
@@ -19106,7 +20039,7 @@
         <p:spPr>
           <a:xfrm>
             <a:off x="311700" y="885950"/>
-            <a:ext cx="8520600" cy="4023300"/>
+            <a:ext cx="8520600" cy="521208"/>
           </a:xfrm>
           <a:prstGeom prst="rect">
             <a:avLst/>
@@ -19130,111 +20063,413 @@
             </a:pPr>
             <a:r>
               <a:rPr lang="en"/>
-              <a:t>The same content builder as in Pong and Flappy Bird</a:t>
+              <a:t>One Content project, shared by every step. Builder.cs decides what happens to each file.</a:t>
             </a:r>
             <a:endParaRPr/>
           </a:p>
-          <a:p>
-            <a:pPr indent="-330200" lvl="0" marL="457200" rtl="0" algn="l">
-              <a:spcBef>
-                <a:spcPts val="0"/>
-              </a:spcBef>
-              <a:spcAft>
-                <a:spcPts val="0"/>
-              </a:spcAft>
-              <a:buSzPts val="1600"/>
-              <a:buChar char="●"/>
-            </a:pPr>
-            <a:r>
-              <a:rPr lang="en"/>
-              <a:t>But here, all steps share one Content project</a:t>
-            </a:r>
-            <a:endParaRPr/>
-          </a:p>
-          <a:p>
-            <a:pPr indent="-317500" lvl="1" marL="914400" rtl="0" algn="l">
-              <a:spcBef>
-                <a:spcPts val="0"/>
-              </a:spcBef>
-              <a:spcAft>
-                <a:spcPts val="0"/>
-              </a:spcAft>
-              <a:buSzPts val="1400"/>
-              <a:buChar char="○"/>
-            </a:pPr>
-            <a:r>
-              <a:rPr lang="en"/>
-              <a:t>Content/Assets: the raw images and XML definitions</a:t>
-            </a:r>
-            <a:endParaRPr/>
-          </a:p>
-          <a:p>
-            <a:pPr indent="-317500" lvl="1" marL="914400" rtl="0" algn="l">
-              <a:spcBef>
-                <a:spcPts val="0"/>
-              </a:spcBef>
-              <a:spcAft>
-                <a:spcPts val="0"/>
-              </a:spcAft>
-              <a:buSzPts val="1400"/>
-              <a:buChar char="○"/>
-            </a:pPr>
-            <a:r>
-              <a:rPr lang="en"/>
-              <a:t>Content/Builder/Builder.cs: the build rules, in C#</a:t>
-            </a:r>
-            <a:endParaRPr/>
-          </a:p>
-          <a:p>
-            <a:pPr indent="-330200" lvl="0" marL="457200" rtl="0" algn="l">
-              <a:spcBef>
-                <a:spcPts val="0"/>
-              </a:spcBef>
-              <a:spcAft>
-                <a:spcPts val="0"/>
-              </a:spcAft>
-              <a:buSzPts val="1600"/>
-              <a:buChar char="●"/>
-            </a:pPr>
-            <a:r>
-              <a:rPr lang="en"/>
-              <a:t>The rules decide how each asset is processed</a:t>
-            </a:r>
-            <a:endParaRPr/>
-          </a:p>
-          <a:p>
-            <a:pPr indent="-317500" lvl="1" marL="914400" rtl="0" algn="l">
-              <a:spcBef>
-                <a:spcPts val="0"/>
-              </a:spcBef>
-              <a:spcAft>
-                <a:spcPts val="0"/>
-              </a:spcAft>
-              <a:buSzPts val="1400"/>
-              <a:buChar char="○"/>
-            </a:pPr>
-            <a:r>
-              <a:rPr lang="en"/>
-              <a:t>PNG images are built into textures (magenta = transparent)</a:t>
-            </a:r>
-            <a:endParaRPr/>
-          </a:p>
-          <a:p>
-            <a:pPr indent="-317500" lvl="1" marL="914400" rtl="0" algn="l">
-              <a:spcBef>
-                <a:spcPts val="0"/>
-              </a:spcBef>
-              <a:spcAft>
-                <a:spcPts val="0"/>
-              </a:spcAft>
-              <a:buSzPts val="1400"/>
-              <a:buChar char="○"/>
-            </a:pPr>
-            <a:r>
-              <a:rPr lang="en"/>
-              <a:t>XML definitions are copied as they are</a:t>
-            </a:r>
-            <a:endParaRPr/>
+        </p:txBody>
+      </p:sp>
+      <p:sp>
+        <p:nvSpPr>
+          <p:cNvPr id="59" name="Rounded Rectangle 58"/>
+          <p:cNvSpPr/>
+          <p:nvPr/>
+        </p:nvSpPr>
+        <p:spPr>
+          <a:xfrm>
+            <a:off x="411480" y="1600200"/>
+            <a:ext cx="1874519" cy="868680"/>
+          </a:xfrm>
+          <a:prstGeom prst="roundRect">
+            <a:avLst>
+              <a:gd name="adj" fmla="val 12000"/>
+            </a:avLst>
+          </a:prstGeom>
+          <a:solidFill>
+            <a:srgbClr val="2E3338"/>
+          </a:solidFill>
+          <a:ln>
+            <a:noFill/>
+          </a:ln>
+          <a:effectLst/>
+        </p:spPr>
+        <p:style>
+          <a:lnRef idx="1">
+            <a:schemeClr val="accent1"/>
+          </a:lnRef>
+          <a:fillRef idx="3">
+            <a:schemeClr val="accent1"/>
+          </a:fillRef>
+          <a:effectRef idx="2">
+            <a:schemeClr val="accent1"/>
+          </a:effectRef>
+          <a:fontRef idx="minor">
+            <a:schemeClr val="lt1"/>
+          </a:fontRef>
+        </p:style>
+        <p:txBody>
+          <a:bodyPr rtlCol="0" anchor="ctr" wrap="square" lIns="73152" rIns="73152"/>
+          <a:lstStyle/>
+          <a:p>
+            <a:pPr algn="ctr"/>
+            <a:r>
+              <a:rPr sz="1400" b="1">
+                <a:solidFill>
+                  <a:srgbClr val="DEE2E6"/>
+                </a:solidFill>
+              </a:rPr>
+              <a:t>Content/Assets</a:t>
+            </a:r>
+          </a:p>
+          <a:p>
+            <a:pPr algn="ctr"/>
+            <a:r>
+              <a:rPr sz="1200" b="0">
+                <a:solidFill>
+                  <a:srgbClr val="9AA3AB"/>
+                </a:solidFill>
+              </a:rPr>
+              <a:t>images, XML</a:t>
+            </a:r>
+          </a:p>
+        </p:txBody>
+      </p:sp>
+      <p:cxnSp>
+        <p:nvCxnSpPr>
+          <p:cNvPr id="60" name="Connector 59"/>
+          <p:cNvCxnSpPr/>
+          <p:nvPr/>
+        </p:nvCxnSpPr>
+        <p:spPr>
+          <a:xfrm>
+            <a:off x="2304288" y="2034540"/>
+            <a:ext cx="237744" cy="0"/>
+          </a:xfrm>
+          <a:prstGeom prst="line">
+            <a:avLst/>
+          </a:prstGeom>
+          <a:ln w="25400">
+            <a:solidFill>
+              <a:srgbClr val="9AA3AB"/>
+            </a:solidFill>
+            <a:tailEnd type="triangle"/>
+          </a:ln>
+        </p:spPr>
+        <p:style>
+          <a:lnRef idx="2">
+            <a:schemeClr val="accent1"/>
+          </a:lnRef>
+          <a:fillRef idx="0">
+            <a:schemeClr val="accent1"/>
+          </a:fillRef>
+          <a:effectRef idx="1">
+            <a:schemeClr val="accent1"/>
+          </a:effectRef>
+          <a:fontRef idx="minor">
+            <a:schemeClr val="tx1"/>
+          </a:fontRef>
+        </p:style>
+      </p:cxnSp>
+      <p:sp>
+        <p:nvSpPr>
+          <p:cNvPr id="61" name="Rounded Rectangle 60"/>
+          <p:cNvSpPr/>
+          <p:nvPr/>
+        </p:nvSpPr>
+        <p:spPr>
+          <a:xfrm>
+            <a:off x="2560320" y="1600200"/>
+            <a:ext cx="1874519" cy="868680"/>
+          </a:xfrm>
+          <a:prstGeom prst="roundRect">
+            <a:avLst>
+              <a:gd name="adj" fmla="val 12000"/>
+            </a:avLst>
+          </a:prstGeom>
+          <a:solidFill>
+            <a:srgbClr val="2E3338"/>
+          </a:solidFill>
+          <a:ln w="25400">
+            <a:solidFill>
+              <a:srgbClr val="D45D35"/>
+            </a:solidFill>
+          </a:ln>
+          <a:effectLst/>
+        </p:spPr>
+        <p:style>
+          <a:lnRef idx="1">
+            <a:schemeClr val="accent1"/>
+          </a:lnRef>
+          <a:fillRef idx="3">
+            <a:schemeClr val="accent1"/>
+          </a:fillRef>
+          <a:effectRef idx="2">
+            <a:schemeClr val="accent1"/>
+          </a:effectRef>
+          <a:fontRef idx="minor">
+            <a:schemeClr val="lt1"/>
+          </a:fontRef>
+        </p:style>
+        <p:txBody>
+          <a:bodyPr rtlCol="0" anchor="ctr" wrap="square" lIns="73152" rIns="73152"/>
+          <a:lstStyle/>
+          <a:p>
+            <a:pPr algn="ctr"/>
+            <a:r>
+              <a:rPr sz="1400" b="1">
+                <a:solidFill>
+                  <a:srgbClr val="DEE2E6"/>
+                </a:solidFill>
+              </a:rPr>
+              <a:t>Builder.cs</a:t>
+            </a:r>
+          </a:p>
+          <a:p>
+            <a:pPr algn="ctr"/>
+            <a:r>
+              <a:rPr sz="1200" b="0">
+                <a:solidFill>
+                  <a:srgbClr val="9AA3AB"/>
+                </a:solidFill>
+              </a:rPr>
+              <a:t>rules, in C#</a:t>
+            </a:r>
+          </a:p>
+        </p:txBody>
+      </p:sp>
+      <p:cxnSp>
+        <p:nvCxnSpPr>
+          <p:cNvPr id="62" name="Connector 61"/>
+          <p:cNvCxnSpPr/>
+          <p:nvPr/>
+        </p:nvCxnSpPr>
+        <p:spPr>
+          <a:xfrm>
+            <a:off x="4453127" y="2034540"/>
+            <a:ext cx="237745" cy="0"/>
+          </a:xfrm>
+          <a:prstGeom prst="line">
+            <a:avLst/>
+          </a:prstGeom>
+          <a:ln w="25400">
+            <a:solidFill>
+              <a:srgbClr val="9AA3AB"/>
+            </a:solidFill>
+            <a:tailEnd type="triangle"/>
+          </a:ln>
+        </p:spPr>
+        <p:style>
+          <a:lnRef idx="2">
+            <a:schemeClr val="accent1"/>
+          </a:lnRef>
+          <a:fillRef idx="0">
+            <a:schemeClr val="accent1"/>
+          </a:fillRef>
+          <a:effectRef idx="1">
+            <a:schemeClr val="accent1"/>
+          </a:effectRef>
+          <a:fontRef idx="minor">
+            <a:schemeClr val="tx1"/>
+          </a:fontRef>
+        </p:style>
+      </p:cxnSp>
+      <p:sp>
+        <p:nvSpPr>
+          <p:cNvPr id="63" name="Rounded Rectangle 62"/>
+          <p:cNvSpPr/>
+          <p:nvPr/>
+        </p:nvSpPr>
+        <p:spPr>
+          <a:xfrm>
+            <a:off x="4709159" y="1600200"/>
+            <a:ext cx="1874519" cy="868680"/>
+          </a:xfrm>
+          <a:prstGeom prst="roundRect">
+            <a:avLst>
+              <a:gd name="adj" fmla="val 12000"/>
+            </a:avLst>
+          </a:prstGeom>
+          <a:solidFill>
+            <a:srgbClr val="2E3338"/>
+          </a:solidFill>
+          <a:ln>
+            <a:noFill/>
+          </a:ln>
+          <a:effectLst/>
+        </p:spPr>
+        <p:style>
+          <a:lnRef idx="1">
+            <a:schemeClr val="accent1"/>
+          </a:lnRef>
+          <a:fillRef idx="3">
+            <a:schemeClr val="accent1"/>
+          </a:fillRef>
+          <a:effectRef idx="2">
+            <a:schemeClr val="accent1"/>
+          </a:effectRef>
+          <a:fontRef idx="minor">
+            <a:schemeClr val="lt1"/>
+          </a:fontRef>
+        </p:style>
+        <p:txBody>
+          <a:bodyPr rtlCol="0" anchor="ctr" wrap="square" lIns="73152" rIns="73152"/>
+          <a:lstStyle/>
+          <a:p>
+            <a:pPr algn="ctr"/>
+            <a:r>
+              <a:rPr sz="1400" b="1">
+                <a:solidFill>
+                  <a:srgbClr val="DEE2E6"/>
+                </a:solidFill>
+              </a:rPr>
+              <a:t>The content builder</a:t>
+            </a:r>
+          </a:p>
+          <a:p>
+            <a:pPr algn="ctr"/>
+            <a:r>
+              <a:rPr sz="1200" b="0">
+                <a:solidFill>
+                  <a:srgbClr val="9AA3AB"/>
+                </a:solidFill>
+              </a:rPr>
+              <a:t>runs on build</a:t>
+            </a:r>
+          </a:p>
+        </p:txBody>
+      </p:sp>
+      <p:cxnSp>
+        <p:nvCxnSpPr>
+          <p:cNvPr id="64" name="Connector 63"/>
+          <p:cNvCxnSpPr/>
+          <p:nvPr/>
+        </p:nvCxnSpPr>
+        <p:spPr>
+          <a:xfrm>
+            <a:off x="6601967" y="2034540"/>
+            <a:ext cx="237745" cy="0"/>
+          </a:xfrm>
+          <a:prstGeom prst="line">
+            <a:avLst/>
+          </a:prstGeom>
+          <a:ln w="25400">
+            <a:solidFill>
+              <a:srgbClr val="9AA3AB"/>
+            </a:solidFill>
+            <a:tailEnd type="triangle"/>
+          </a:ln>
+        </p:spPr>
+        <p:style>
+          <a:lnRef idx="2">
+            <a:schemeClr val="accent1"/>
+          </a:lnRef>
+          <a:fillRef idx="0">
+            <a:schemeClr val="accent1"/>
+          </a:fillRef>
+          <a:effectRef idx="1">
+            <a:schemeClr val="accent1"/>
+          </a:effectRef>
+          <a:fontRef idx="minor">
+            <a:schemeClr val="tx1"/>
+          </a:fontRef>
+        </p:style>
+      </p:cxnSp>
+      <p:sp>
+        <p:nvSpPr>
+          <p:cNvPr id="65" name="Rounded Rectangle 64"/>
+          <p:cNvSpPr/>
+          <p:nvPr/>
+        </p:nvSpPr>
+        <p:spPr>
+          <a:xfrm>
+            <a:off x="6857999" y="1600200"/>
+            <a:ext cx="1874519" cy="868680"/>
+          </a:xfrm>
+          <a:prstGeom prst="roundRect">
+            <a:avLst>
+              <a:gd name="adj" fmla="val 12000"/>
+            </a:avLst>
+          </a:prstGeom>
+          <a:solidFill>
+            <a:srgbClr val="2E3338"/>
+          </a:solidFill>
+          <a:ln>
+            <a:noFill/>
+          </a:ln>
+          <a:effectLst/>
+        </p:spPr>
+        <p:style>
+          <a:lnRef idx="1">
+            <a:schemeClr val="accent1"/>
+          </a:lnRef>
+          <a:fillRef idx="3">
+            <a:schemeClr val="accent1"/>
+          </a:fillRef>
+          <a:effectRef idx="2">
+            <a:schemeClr val="accent1"/>
+          </a:effectRef>
+          <a:fontRef idx="minor">
+            <a:schemeClr val="lt1"/>
+          </a:fontRef>
+        </p:style>
+        <p:txBody>
+          <a:bodyPr rtlCol="0" anchor="ctr" wrap="square" lIns="73152" rIns="73152"/>
+          <a:lstStyle/>
+          <a:p>
+            <a:pPr algn="ctr"/>
+            <a:r>
+              <a:rPr sz="1400" b="1">
+                <a:solidFill>
+                  <a:srgbClr val="DEE2E6"/>
+                </a:solidFill>
+              </a:rPr>
+              <a:t>bin/.../Content</a:t>
+            </a:r>
+          </a:p>
+          <a:p>
+            <a:pPr algn="ctr"/>
+            <a:r>
+              <a:rPr sz="1200" b="0">
+                <a:solidFill>
+                  <a:srgbClr val="9AA3AB"/>
+                </a:solidFill>
+              </a:rPr>
+              <a:t>.xnb files, XML</a:t>
+            </a:r>
+          </a:p>
+        </p:txBody>
+      </p:sp>
+      <p:sp>
+        <p:nvSpPr>
+          <p:cNvPr id="66" name="TextBox 65"/>
+          <p:cNvSpPr txBox="1"/>
+          <p:nvPr/>
+        </p:nvSpPr>
+        <p:spPr>
+          <a:xfrm>
+            <a:off x="411480" y="2697480"/>
+            <a:ext cx="8321040" cy="548640"/>
+          </a:xfrm>
+          <a:prstGeom prst="rect">
+            <a:avLst/>
+          </a:prstGeom>
+          <a:noFill/>
+        </p:spPr>
+        <p:txBody>
+          <a:bodyPr wrap="square">
+            <a:spAutoFit/>
+          </a:bodyPr>
+          <a:lstStyle/>
+          <a:p>
+            <a:pPr algn="ctr"/>
+            <a:r>
+              <a:rPr sz="1400" b="0" i="0">
+                <a:solidFill>
+                  <a:srgbClr val="9AA3AB"/>
+                </a:solidFill>
+              </a:rPr>
+              <a:t>PNG images become textures (magenta is see-through). XML definitions are copied as they are.</a:t>
+            </a:r>
           </a:p>
         </p:txBody>
       </p:sp>
@@ -19315,7 +20550,7 @@
         <p:spPr>
           <a:xfrm>
             <a:off x="311700" y="885950"/>
-            <a:ext cx="8520600" cy="4023300"/>
+            <a:ext cx="8520600" cy="521208"/>
           </a:xfrm>
           <a:prstGeom prst="rect">
             <a:avLst/>
@@ -19339,94 +20574,278 @@
             </a:pPr>
             <a:r>
               <a:rPr lang="en"/>
-              <a:t>The XML files describe the assets</a:t>
+              <a:t>The XML describes the assets; the code only reads it.</a:t>
             </a:r>
             <a:endParaRPr/>
           </a:p>
-          <a:p>
-            <a:pPr indent="-317500" lvl="1" marL="914400" rtl="0" algn="l">
-              <a:spcBef>
-                <a:spcPts val="0"/>
-              </a:spcBef>
-              <a:spcAft>
-                <a:spcPts val="0"/>
-              </a:spcAft>
-              <a:buSzPts val="1400"/>
-              <a:buChar char="○"/>
-            </a:pPr>
-            <a:r>
-              <a:rPr lang="en"/>
-              <a:t>Which part of the image is the snake, how the bat’s animation runs, which tile goes where</a:t>
-            </a:r>
-            <a:endParaRPr/>
-          </a:p>
-          <a:p>
-            <a:pPr indent="-330200" lvl="0" marL="457200" rtl="0" algn="l">
-              <a:spcBef>
-                <a:spcPts val="0"/>
-              </a:spcBef>
-              <a:spcAft>
-                <a:spcPts val="0"/>
-              </a:spcAft>
-              <a:buSzPts val="1600"/>
-              <a:buChar char="●"/>
-            </a:pPr>
-            <a:r>
-              <a:rPr lang="en"/>
-              <a:t>Data can change without the code changing</a:t>
-            </a:r>
-            <a:endParaRPr/>
-          </a:p>
-          <a:p>
-            <a:pPr indent="-317500" lvl="1" marL="914400" rtl="0" algn="l">
-              <a:spcBef>
-                <a:spcPts val="0"/>
-              </a:spcBef>
-              <a:spcAft>
-                <a:spcPts val="0"/>
-              </a:spcAft>
-              <a:buSzPts val="1400"/>
-              <a:buChar char="○"/>
-            </a:pPr>
-            <a:r>
-              <a:rPr lang="en"/>
-              <a:t>A new frame, a faster animation or a new room: edit a file, not C#</a:t>
-            </a:r>
-            <a:endParaRPr/>
-          </a:p>
-          <a:p>
-            <a:pPr indent="-317500" lvl="1" marL="914400" rtl="0" algn="l">
-              <a:spcBef>
-                <a:spcPts val="0"/>
-              </a:spcBef>
-              <a:spcAft>
-                <a:spcPts val="0"/>
-              </a:spcAft>
-              <a:buSzPts val="1400"/>
-              <a:buChar char="○"/>
-            </a:pPr>
-            <a:r>
-              <a:rPr lang="en"/>
-              <a:t>Artists and designers can work without touching the code</a:t>
-            </a:r>
-            <a:endParaRPr/>
-          </a:p>
-          <a:p>
-            <a:pPr indent="-330200" lvl="0" marL="457200" rtl="0" algn="l">
-              <a:spcBef>
-                <a:spcPts val="0"/>
-              </a:spcBef>
-              <a:spcAft>
-                <a:spcPts val="0"/>
-              </a:spcAft>
-              <a:buSzPts val="1600"/>
-              <a:buChar char="●"/>
-            </a:pPr>
-            <a:r>
-              <a:rPr lang="en"/>
-              <a:t>The code gets smaller and more general</a:t>
-            </a:r>
-            <a:endParaRPr/>
+        </p:txBody>
+      </p:sp>
+      <p:sp>
+        <p:nvSpPr>
+          <p:cNvPr id="295" name="Rectangle 294"/>
+          <p:cNvSpPr/>
+          <p:nvPr/>
+        </p:nvSpPr>
+        <p:spPr>
+          <a:xfrm>
+            <a:off x="411480" y="1371600"/>
+            <a:ext cx="4937760" cy="2377440"/>
+          </a:xfrm>
+          <a:prstGeom prst="rect">
+            <a:avLst/>
+          </a:prstGeom>
+          <a:solidFill>
+            <a:srgbClr val="17191C"/>
+          </a:solidFill>
+          <a:ln>
+            <a:noFill/>
+          </a:ln>
+          <a:effectLst/>
+        </p:spPr>
+        <p:style>
+          <a:lnRef idx="1">
+            <a:schemeClr val="accent1"/>
+          </a:lnRef>
+          <a:fillRef idx="3">
+            <a:schemeClr val="accent1"/>
+          </a:fillRef>
+          <a:effectRef idx="2">
+            <a:schemeClr val="accent1"/>
+          </a:effectRef>
+          <a:fontRef idx="minor">
+            <a:schemeClr val="lt1"/>
+          </a:fontRef>
+        </p:style>
+        <p:txBody>
+          <a:bodyPr rtlCol="0" anchor="ctr" wrap="square" lIns="164592" rIns="73152"/>
+          <a:lstStyle/>
+          <a:p>
+            <a:pPr algn="l"/>
+            <a:r>
+              <a:rPr sz="1400" b="0">
+                <a:solidFill>
+                  <a:srgbClr val="DEE2E6"/>
+                </a:solidFill>
+              </a:rPr>
+              <a:t/>
+            </a:r>
+            <a:r>
+              <a:rPr sz="1100">
+                <a:solidFill>
+                  <a:srgbClr val="DEE2E6"/>
+                </a:solidFill>
+                <a:latin typeface="Consolas"/>
+              </a:rPr>
+              <a:t>&lt;Region name="bat-1" x="20" y="0" width="20" height="20" /&gt;</a:t>
+            </a:r>
+          </a:p>
+          <a:p>
+            <a:pPr algn="l"/>
+            <a:r>
+              <a:rPr sz="1100">
+                <a:solidFill>
+                  <a:srgbClr val="DEE2E6"/>
+                </a:solidFill>
+                <a:latin typeface="Consolas"/>
+              </a:rPr>
+              <a:t>&lt;Region name="bat-2" x="20" y="20" width="20" height="20" /&gt;</a:t>
+            </a:r>
+          </a:p>
+          <a:p>
+            <a:pPr algn="l"/>
+            <a:r>
+              <a:rPr sz="1100">
+                <a:solidFill>
+                  <a:srgbClr val="DEE2E6"/>
+                </a:solidFill>
+                <a:latin typeface="Consolas"/>
+              </a:rPr>
+              <a:t>&lt;Region name="bat-3" x="40" y="0" width="20" height="20" /&gt;</a:t>
+            </a:r>
+          </a:p>
+          <a:p>
+            <a:pPr algn="l"/>
+            <a:r>
+              <a:rPr sz="1100">
+                <a:solidFill>
+                  <a:srgbClr val="DEE2E6"/>
+                </a:solidFill>
+                <a:latin typeface="Consolas"/>
+              </a:rPr>
+              <a:t> </a:t>
+            </a:r>
+          </a:p>
+          <a:p>
+            <a:pPr algn="l"/>
+            <a:r>
+              <a:rPr sz="1100">
+                <a:solidFill>
+                  <a:srgbClr val="DEE2E6"/>
+                </a:solidFill>
+                <a:latin typeface="Consolas"/>
+              </a:rPr>
+              <a:t>&lt;Animation name="bat-animation" delay="200"&gt;</a:t>
+            </a:r>
+          </a:p>
+          <a:p>
+            <a:pPr algn="l"/>
+            <a:r>
+              <a:rPr sz="1100">
+                <a:solidFill>
+                  <a:srgbClr val="DEE2E6"/>
+                </a:solidFill>
+                <a:latin typeface="Consolas"/>
+              </a:rPr>
+              <a:t>    &lt;Frame region="bat-1" /&gt;</a:t>
+            </a:r>
+          </a:p>
+          <a:p>
+            <a:pPr algn="l"/>
+            <a:r>
+              <a:rPr sz="1100">
+                <a:solidFill>
+                  <a:srgbClr val="DEE2E6"/>
+                </a:solidFill>
+                <a:latin typeface="Consolas"/>
+              </a:rPr>
+              <a:t>    &lt;Frame region="bat-2" /&gt;</a:t>
+            </a:r>
+          </a:p>
+          <a:p>
+            <a:pPr algn="l"/>
+            <a:r>
+              <a:rPr sz="1100">
+                <a:solidFill>
+                  <a:srgbClr val="DEE2E6"/>
+                </a:solidFill>
+                <a:latin typeface="Consolas"/>
+              </a:rPr>
+              <a:t>    &lt;Frame region="bat-1" /&gt;</a:t>
+            </a:r>
+          </a:p>
+          <a:p>
+            <a:pPr algn="l"/>
+            <a:r>
+              <a:rPr sz="1100">
+                <a:solidFill>
+                  <a:srgbClr val="DEE2E6"/>
+                </a:solidFill>
+                <a:latin typeface="Consolas"/>
+              </a:rPr>
+              <a:t>    &lt;Frame region="bat-3" /&gt;</a:t>
+            </a:r>
+          </a:p>
+          <a:p>
+            <a:pPr algn="l"/>
+            <a:r>
+              <a:rPr sz="1100">
+                <a:solidFill>
+                  <a:srgbClr val="DEE2E6"/>
+                </a:solidFill>
+                <a:latin typeface="Consolas"/>
+              </a:rPr>
+              <a:t>&lt;/Animation&gt;</a:t>
+            </a:r>
+          </a:p>
+        </p:txBody>
+      </p:sp>
+      <p:sp>
+        <p:nvSpPr>
+          <p:cNvPr id="296" name="TextBox 295"/>
+          <p:cNvSpPr txBox="1"/>
+          <p:nvPr/>
+        </p:nvSpPr>
+        <p:spPr>
+          <a:xfrm>
+            <a:off x="5577840" y="1463040"/>
+            <a:ext cx="3200400" cy="2194560"/>
+          </a:xfrm>
+          <a:prstGeom prst="rect">
+            <a:avLst/>
+          </a:prstGeom>
+          <a:noFill/>
+        </p:spPr>
+        <p:txBody>
+          <a:bodyPr wrap="square">
+            <a:spAutoFit/>
+          </a:bodyPr>
+          <a:lstStyle/>
+          <a:p>
+            <a:pPr algn="l"/>
+            <a:r>
+              <a:rPr sz="1700" b="1" i="0">
+                <a:solidFill>
+                  <a:srgbClr val="DEE2E6"/>
+                </a:solidFill>
+              </a:rPr>
+              <a:t>A faster bat?</a:t>
+            </a:r>
+          </a:p>
+          <a:p>
+            <a:pPr algn="l"/>
+            <a:r>
+              <a:rPr sz="1700" b="1" i="0">
+                <a:solidFill>
+                  <a:srgbClr val="DEE2E6"/>
+                </a:solidFill>
+              </a:rPr>
+              <a:t/>
+            </a:r>
+          </a:p>
+          <a:p>
+            <a:pPr algn="l"/>
+            <a:r>
+              <a:rPr sz="1700" b="1" i="0">
+                <a:solidFill>
+                  <a:srgbClr val="DEE2E6"/>
+                </a:solidFill>
+              </a:rPr>
+              <a:t>An extra frame?</a:t>
+            </a:r>
+          </a:p>
+          <a:p>
+            <a:pPr algn="l"/>
+            <a:r>
+              <a:rPr sz="1700" b="1" i="0">
+                <a:solidFill>
+                  <a:srgbClr val="DEE2E6"/>
+                </a:solidFill>
+              </a:rPr>
+              <a:t/>
+            </a:r>
+          </a:p>
+          <a:p>
+            <a:pPr algn="l"/>
+            <a:r>
+              <a:rPr sz="1700" b="1" i="0">
+                <a:solidFill>
+                  <a:srgbClr val="DEE2E6"/>
+                </a:solidFill>
+              </a:rPr>
+              <a:t>A new room?</a:t>
+            </a:r>
+          </a:p>
+          <a:p>
+            <a:pPr algn="l"/>
+            <a:r>
+              <a:rPr sz="1700" b="1" i="0">
+                <a:solidFill>
+                  <a:srgbClr val="DEE2E6"/>
+                </a:solidFill>
+              </a:rPr>
+              <a:t/>
+            </a:r>
+          </a:p>
+          <a:p>
+            <a:pPr algn="l"/>
+            <a:r>
+              <a:rPr sz="1700" b="1" i="0">
+                <a:solidFill>
+                  <a:srgbClr val="DEE2E6"/>
+                </a:solidFill>
+              </a:rPr>
+              <a:t>Which of these need a C# change?</a:t>
+            </a:r>
           </a:p>
         </p:txBody>
       </p:sp>

--- a/slides/03 Snake.pptx
+++ b/slides/03 Snake.pptx
@@ -815,19 +815,14 @@
           </a:bodyPr>
           <a:lstStyle/>
           <a:p>
-            <a:pPr indent="0" lvl="0" marL="0" rtl="0" algn="l">
-              <a:spcBef>
-                <a:spcPts val="0"/>
-              </a:spcBef>
-              <a:spcAft>
-                <a:spcPts val="0"/>
-              </a:spcAft>
-              <a:buNone/>
-            </a:pPr>
-            <a:r>
-              <a:t/>
-            </a:r>
-            <a:endParaRPr/>
+            <a:r>
+              <a:t>Welcome. Today we build Snake. The main topic: assets as data.</a:t>
+            </a:r>
+          </a:p>
+          <a:p>
+            <a:r>
+              <a:t>Start by playing the finished game, Snake9, before any code.</a:t>
+            </a:r>
           </a:p>
         </p:txBody>
       </p:sp>
@@ -914,19 +909,19 @@
           </a:bodyPr>
           <a:lstStyle/>
           <a:p>
-            <a:pPr indent="0" lvl="0" marL="0" rtl="0" algn="l">
-              <a:spcBef>
-                <a:spcPts val="0"/>
-              </a:spcBef>
-              <a:spcAft>
-                <a:spcPts val="0"/>
-              </a:spcAft>
-              <a:buNone/>
-            </a:pPr>
-            <a:r>
-              <a:t/>
-            </a:r>
-            <a:endParaRPr/>
+            <a:r>
+              <a:t>Demo: open Snake1 and Snake2 side by side (a diff tool, or two editor panes), then run Snake2.</a:t>
+            </a:r>
+          </a:p>
+          <a:p>
+            <a:r>
+              <a:t>- the Sprite class in GMDCore</a:t>
+            </a:r>
+          </a:p>
+          <a:p>
+            <a:r>
+              <a:t>- drawing through a sprite instead of the region</a:t>
+            </a:r>
           </a:p>
         </p:txBody>
       </p:sp>
@@ -1013,19 +1008,9 @@
           </a:bodyPr>
           <a:lstStyle/>
           <a:p>
-            <a:pPr indent="0" lvl="0" marL="0" rtl="0" algn="l">
-              <a:spcBef>
-                <a:spcPts val="0"/>
-              </a:spcBef>
-              <a:spcAft>
-                <a:spcPts val="0"/>
-              </a:spcAft>
-              <a:buNone/>
-            </a:pPr>
-            <a:r>
-              <a:t/>
-            </a:r>
-            <a:endParaRPr/>
+            <a:r>
+              <a:t>Where art comes from: draw it yourself (Aseprite is a good pixel editor), or use free packs with a clear licence.</a:t>
+            </a:r>
           </a:p>
         </p:txBody>
       </p:sp>
@@ -1112,19 +1097,9 @@
           </a:bodyPr>
           <a:lstStyle/>
           <a:p>
-            <a:pPr indent="0" lvl="0" marL="0" rtl="0" algn="l">
-              <a:spcBef>
-                <a:spcPts val="0"/>
-              </a:spcBef>
-              <a:spcAft>
-                <a:spcPts val="0"/>
-              </a:spcAft>
-              <a:buNone/>
-            </a:pPr>
-            <a:r>
-              <a:t/>
-            </a:r>
-            <a:endParaRPr/>
+            <a:r>
+              <a:t>An animation: a list of regions and a delay. The bottom bat cycles through the three above.</a:t>
+            </a:r>
           </a:p>
         </p:txBody>
       </p:sp>
@@ -1211,19 +1186,271 @@
           </a:bodyPr>
           <a:lstStyle/>
           <a:p>
-            <a:pPr indent="0" lvl="0" marL="0" rtl="0" algn="l">
-              <a:spcBef>
-                <a:spcPts val="0"/>
-              </a:spcBef>
-              <a:spcAft>
-                <a:spcPts val="0"/>
-              </a:spcAft>
-              <a:buNone/>
-            </a:pPr>
-            <a:r>
-              <a:t/>
-            </a:r>
-            <a:endParaRPr/>
+            <a:r>
+              <a:t>Demo: open Snake2 and Snake3 side by side (a diff tool, or two editor panes), then run Snake3.</a:t>
+            </a:r>
+          </a:p>
+          <a:p>
+            <a:r>
+              <a:t>- the Animations section of the XML</a:t>
+            </a:r>
+          </a:p>
+          <a:p>
+            <a:r>
+              <a:t>- AnimatedSprite advancing frames with elapsed time</a:t>
+            </a:r>
+          </a:p>
+        </p:txBody>
+      </p:sp>
+    </p:spTree>
+  </p:cSld>
+  <p:clrMapOvr>
+    <a:masterClrMapping/>
+  </p:clrMapOvr>
+</p:notes>
+</file>
+
+<file path=ppt/notesSlides/notesSlide16.xml><?xml version="1.0" encoding="utf-8"?>
+<p:notes xmlns:a="http://schemas.openxmlformats.org/drawingml/2006/main" xmlns:p="http://schemas.openxmlformats.org/presentationml/2006/main" xmlns:r="http://schemas.openxmlformats.org/officeDocument/2006/relationships">
+  <p:cSld>
+    <p:spTree>
+      <p:nvGrpSpPr>
+        <p:cNvPr id="1" name=""/>
+        <p:cNvGrpSpPr/>
+        <p:nvPr/>
+      </p:nvGrpSpPr>
+      <p:grpSpPr>
+        <a:xfrm>
+          <a:off x="0" y="0"/>
+          <a:ext cx="0" cy="0"/>
+          <a:chOff x="0" y="0"/>
+          <a:chExt cx="0" cy="0"/>
+        </a:xfrm>
+      </p:grpSpPr>
+      <p:sp>
+        <p:nvSpPr>
+          <p:cNvPr id="2" name="Slide Image Placeholder 1"/>
+          <p:cNvSpPr>
+            <a:spLocks noGrp="1"/>
+          </p:cNvSpPr>
+          <p:nvPr>
+            <p:ph type="sldImg" idx="2"/>
+          </p:nvPr>
+        </p:nvSpPr>
+        <p:spPr/>
+      </p:sp>
+      <p:sp>
+        <p:nvSpPr>
+          <p:cNvPr id="3" name="Notes Placeholder 2"/>
+          <p:cNvSpPr>
+            <a:spLocks noGrp="1"/>
+          </p:cNvSpPr>
+          <p:nvPr>
+            <p:ph type="body" idx="1"/>
+          </p:nvPr>
+        </p:nvSpPr>
+        <p:spPr/>
+        <p:txBody>
+          <a:bodyPr/>
+          <a:lstStyle/>
+          <a:p>
+            <a:r>
+              <a:t>Give the project groups five minutes with these questions.</a:t>
+            </a:r>
+          </a:p>
+          <a:p>
+            <a:r>
+              <a:t>Ask two groups to share one answer each. Push for concrete classes and files, not intentions.</a:t>
+            </a:r>
+          </a:p>
+        </p:txBody>
+      </p:sp>
+    </p:spTree>
+  </p:cSld>
+  <p:clrMapOvr>
+    <a:masterClrMapping/>
+  </p:clrMapOvr>
+</p:notes>
+</file>
+
+<file path=ppt/notesSlides/notesSlide17.xml><?xml version="1.0" encoding="utf-8"?>
+<p:notes xmlns:a="http://schemas.openxmlformats.org/drawingml/2006/main" xmlns:p="http://schemas.openxmlformats.org/presentationml/2006/main" xmlns:r="http://schemas.openxmlformats.org/officeDocument/2006/relationships">
+  <p:cSld>
+    <p:spTree>
+      <p:nvGrpSpPr>
+        <p:cNvPr id="1" name=""/>
+        <p:cNvGrpSpPr/>
+        <p:nvPr/>
+      </p:nvGrpSpPr>
+      <p:grpSpPr>
+        <a:xfrm>
+          <a:off x="0" y="0"/>
+          <a:ext cx="0" cy="0"/>
+          <a:chOff x="0" y="0"/>
+          <a:chExt cx="0" cy="0"/>
+        </a:xfrm>
+      </p:grpSpPr>
+      <p:sp>
+        <p:nvSpPr>
+          <p:cNvPr id="2" name="Slide Image Placeholder 1"/>
+          <p:cNvSpPr>
+            <a:spLocks noGrp="1"/>
+          </p:cNvSpPr>
+          <p:nvPr>
+            <p:ph type="sldImg" idx="2"/>
+          </p:nvPr>
+        </p:nvSpPr>
+        <p:spPr/>
+      </p:sp>
+      <p:sp>
+        <p:nvSpPr>
+          <p:cNvPr id="3" name="Notes Placeholder 2"/>
+          <p:cNvSpPr>
+            <a:spLocks noGrp="1"/>
+          </p:cNvSpPr>
+          <p:nvPr>
+            <p:ph type="body" idx="1"/>
+          </p:nvPr>
+        </p:nvSpPr>
+        <p:spPr/>
+        <p:txBody>
+          <a:bodyPr/>
+          <a:lstStyle/>
+          <a:p>
+            <a:r>
+              <a:t>Groups and a concept before session 04, a repository from gar-starter, and a first architecture sketch.</a:t>
+            </a:r>
+          </a:p>
+        </p:txBody>
+      </p:sp>
+    </p:spTree>
+  </p:cSld>
+  <p:clrMapOvr>
+    <a:masterClrMapping/>
+  </p:clrMapOvr>
+</p:notes>
+</file>
+
+<file path=ppt/notesSlides/notesSlide18.xml><?xml version="1.0" encoding="utf-8"?>
+<p:notes xmlns:a="http://schemas.openxmlformats.org/drawingml/2006/main" xmlns:p="http://schemas.openxmlformats.org/presentationml/2006/main" xmlns:r="http://schemas.openxmlformats.org/officeDocument/2006/relationships">
+  <p:cSld>
+    <p:spTree>
+      <p:nvGrpSpPr>
+        <p:cNvPr id="1" name=""/>
+        <p:cNvGrpSpPr/>
+        <p:nvPr/>
+      </p:nvGrpSpPr>
+      <p:grpSpPr>
+        <a:xfrm>
+          <a:off x="0" y="0"/>
+          <a:ext cx="0" cy="0"/>
+          <a:chOff x="0" y="0"/>
+          <a:chExt cx="0" cy="0"/>
+        </a:xfrm>
+      </p:grpSpPr>
+      <p:sp>
+        <p:nvSpPr>
+          <p:cNvPr id="2" name="Slide Image Placeholder 1"/>
+          <p:cNvSpPr>
+            <a:spLocks noGrp="1"/>
+          </p:cNvSpPr>
+          <p:nvPr>
+            <p:ph type="sldImg" idx="2"/>
+          </p:nvPr>
+        </p:nvSpPr>
+        <p:spPr/>
+      </p:sp>
+      <p:sp>
+        <p:nvSpPr>
+          <p:cNvPr id="3" name="Notes Placeholder 2"/>
+          <p:cNvSpPr>
+            <a:spLocks noGrp="1"/>
+          </p:cNvSpPr>
+          <p:nvPr>
+            <p:ph type="body" idx="1"/>
+          </p:nvPr>
+        </p:nvSpPr>
+        <p:spPr/>
+        <p:txBody>
+          <a:bodyPr/>
+          <a:lstStyle/>
+          <a:p>
+            <a:r>
+              <a:t>For fast students: pull the tick timer out into a reusable FixedTimer in GMDCore.</a:t>
+            </a:r>
+          </a:p>
+        </p:txBody>
+      </p:sp>
+    </p:spTree>
+  </p:cSld>
+  <p:clrMapOvr>
+    <a:masterClrMapping/>
+  </p:clrMapOvr>
+</p:notes>
+</file>
+
+<file path=ppt/notesSlides/notesSlide19.xml><?xml version="1.0" encoding="utf-8"?>
+<p:notes xmlns:a="http://schemas.openxmlformats.org/drawingml/2006/main" xmlns:p="http://schemas.openxmlformats.org/presentationml/2006/main" xmlns:r="http://schemas.openxmlformats.org/officeDocument/2006/relationships">
+  <p:cSld>
+    <p:spTree>
+      <p:nvGrpSpPr>
+        <p:cNvPr id="1" name=""/>
+        <p:cNvGrpSpPr/>
+        <p:nvPr/>
+      </p:nvGrpSpPr>
+      <p:grpSpPr>
+        <a:xfrm>
+          <a:off x="0" y="0"/>
+          <a:ext cx="0" cy="0"/>
+          <a:chOff x="0" y="0"/>
+          <a:chExt cx="0" cy="0"/>
+        </a:xfrm>
+      </p:grpSpPr>
+      <p:sp>
+        <p:nvSpPr>
+          <p:cNvPr id="2" name="Slide Image Placeholder 1"/>
+          <p:cNvSpPr>
+            <a:spLocks noGrp="1"/>
+          </p:cNvSpPr>
+          <p:nvPr>
+            <p:ph type="sldImg" idx="2"/>
+          </p:nvPr>
+        </p:nvSpPr>
+        <p:spPr/>
+      </p:sp>
+      <p:sp>
+        <p:nvSpPr>
+          <p:cNvPr id="3" name="Notes Placeholder 2"/>
+          <p:cNvSpPr>
+            <a:spLocks noGrp="1"/>
+          </p:cNvSpPr>
+          <p:nvPr>
+            <p:ph type="body" idx="1"/>
+          </p:nvPr>
+        </p:nvSpPr>
+        <p:spPr/>
+        <p:txBody>
+          <a:bodyPr/>
+          <a:lstStyle/>
+          <a:p>
+            <a:r>
+              <a:t>Demo: open Snake5 and Snake7 side by side (a diff tool, or two editor panes), then run Snake7.</a:t>
+            </a:r>
+          </a:p>
+          <a:p>
+            <a:r>
+              <a:t>- Snake5: the tick accumulator</a:t>
+            </a:r>
+          </a:p>
+          <a:p>
+            <a:r>
+              <a:t>- Snake6: GameController</a:t>
+            </a:r>
+          </a:p>
+          <a:p>
+            <a:r>
+              <a:t>- Snake7: the queue of turns</a:t>
+            </a:r>
           </a:p>
         </p:txBody>
       </p:sp>
@@ -1310,19 +1537,140 @@
           </a:bodyPr>
           <a:lstStyle/>
           <a:p>
-            <a:pPr indent="0" lvl="0" marL="0" rtl="0" algn="l">
-              <a:spcBef>
-                <a:spcPts val="0"/>
-              </a:spcBef>
-              <a:spcAft>
-                <a:spcPts val="0"/>
-              </a:spcAft>
-              <a:buNone/>
-            </a:pPr>
-            <a:r>
-              <a:t/>
-            </a:r>
-            <a:endParaRPr/>
+            <a:r>
+              <a:t>Run Snake9 and play it for a minute.</a:t>
+            </a:r>
+          </a:p>
+          <a:p>
+            <a:r>
+              <a:t>Ask: what would you need to build this? Collect answers on the board, and come back to them at the end.</a:t>
+            </a:r>
+          </a:p>
+        </p:txBody>
+      </p:sp>
+    </p:spTree>
+  </p:cSld>
+  <p:clrMapOvr>
+    <a:masterClrMapping/>
+  </p:clrMapOvr>
+</p:notes>
+</file>
+
+<file path=ppt/notesSlides/notesSlide20.xml><?xml version="1.0" encoding="utf-8"?>
+<p:notes xmlns:a="http://schemas.openxmlformats.org/drawingml/2006/main" xmlns:p="http://schemas.openxmlformats.org/presentationml/2006/main" xmlns:r="http://schemas.openxmlformats.org/officeDocument/2006/relationships">
+  <p:cSld>
+    <p:spTree>
+      <p:nvGrpSpPr>
+        <p:cNvPr id="1" name=""/>
+        <p:cNvGrpSpPr/>
+        <p:nvPr/>
+      </p:nvGrpSpPr>
+      <p:grpSpPr>
+        <a:xfrm>
+          <a:off x="0" y="0"/>
+          <a:ext cx="0" cy="0"/>
+          <a:chOff x="0" y="0"/>
+          <a:chExt cx="0" cy="0"/>
+        </a:xfrm>
+      </p:grpSpPr>
+      <p:sp>
+        <p:nvSpPr>
+          <p:cNvPr id="2" name="Slide Image Placeholder 1"/>
+          <p:cNvSpPr>
+            <a:spLocks noGrp="1"/>
+          </p:cNvSpPr>
+          <p:nvPr>
+            <p:ph type="sldImg" idx="2"/>
+          </p:nvPr>
+        </p:nvSpPr>
+        <p:spPr/>
+      </p:sp>
+      <p:sp>
+        <p:nvSpPr>
+          <p:cNvPr id="3" name="Notes Placeholder 2"/>
+          <p:cNvSpPr>
+            <a:spLocks noGrp="1"/>
+          </p:cNvSpPr>
+          <p:nvPr>
+            <p:ph type="body" idx="1"/>
+          </p:nvPr>
+        </p:nvSpPr>
+        <p:spPr/>
+        <p:txBody>
+          <a:bodyPr/>
+          <a:lstStyle/>
+          <a:p>
+            <a:r>
+              <a:t>The game asks for Up, never for W. The keys live in one place, GameController.</a:t>
+            </a:r>
+          </a:p>
+          <a:p>
+            <a:r>
+              <a:t>Ask: what changes to support a gamepad? Answer: only GameController.</a:t>
+            </a:r>
+          </a:p>
+        </p:txBody>
+      </p:sp>
+    </p:spTree>
+  </p:cSld>
+  <p:clrMapOvr>
+    <a:masterClrMapping/>
+  </p:clrMapOvr>
+</p:notes>
+</file>
+
+<file path=ppt/notesSlides/notesSlide21.xml><?xml version="1.0" encoding="utf-8"?>
+<p:notes xmlns:a="http://schemas.openxmlformats.org/drawingml/2006/main" xmlns:p="http://schemas.openxmlformats.org/presentationml/2006/main" xmlns:r="http://schemas.openxmlformats.org/officeDocument/2006/relationships">
+  <p:cSld>
+    <p:spTree>
+      <p:nvGrpSpPr>
+        <p:cNvPr id="1" name=""/>
+        <p:cNvGrpSpPr/>
+        <p:nvPr/>
+      </p:nvGrpSpPr>
+      <p:grpSpPr>
+        <a:xfrm>
+          <a:off x="0" y="0"/>
+          <a:ext cx="0" cy="0"/>
+          <a:chOff x="0" y="0"/>
+          <a:chExt cx="0" cy="0"/>
+        </a:xfrm>
+      </p:grpSpPr>
+      <p:sp>
+        <p:nvSpPr>
+          <p:cNvPr id="2" name="Slide Image Placeholder 1"/>
+          <p:cNvSpPr>
+            <a:spLocks noGrp="1"/>
+          </p:cNvSpPr>
+          <p:nvPr>
+            <p:ph type="sldImg" idx="2"/>
+          </p:nvPr>
+        </p:nvSpPr>
+        <p:spPr/>
+      </p:sp>
+      <p:sp>
+        <p:nvSpPr>
+          <p:cNvPr id="3" name="Notes Placeholder 2"/>
+          <p:cNvSpPr>
+            <a:spLocks noGrp="1"/>
+          </p:cNvSpPr>
+          <p:nvPr>
+            <p:ph type="body" idx="1"/>
+          </p:nvPr>
+        </p:nvSpPr>
+        <p:spPr/>
+        <p:txBody>
+          <a:bodyPr/>
+          <a:lstStyle/>
+          <a:p>
+            <a:r>
+              <a:t>The snake moves one cell per tick, however fast the game runs. The accumulator collects real time.</a:t>
+            </a:r>
+          </a:p>
+          <a:p>
+            <a:r>
+              <a:t>Ask: why subtract the tick, not reset to zero? Answer: the leftover time carries over, so ticks stay even.</a:t>
+            </a:r>
           </a:p>
         </p:txBody>
       </p:sp>
@@ -1379,7 +1727,56 @@
           <a:lstStyle/>
           <a:p>
             <a:r>
-              <a:t>Ask, let them answer in pairs for a minute, then take a few answers. These are the site’s Check yourself questions.</a:t>
+              <a:t>Ask one question at a time. Pairs discuss for a minute, then take two or three answers.</a:t>
+            </a:r>
+          </a:p>
+          <a:p>
+            <a:r>
+              <a:t>Expected answers (from the course site):</a:t>
+            </a:r>
+          </a:p>
+          <a:p/>
+          <a:p>
+            <a:r>
+              <a:t>Q: Why prefer a texture atlas over many individual image files?</a:t>
+            </a:r>
+          </a:p>
+          <a:p>
+            <a:r>
+              <a:t>A: Drawing from one texture lets SpriteBatch batch many sprites into few draw calls. Switching textures between draws breaks the batch and costs performance.</a:t>
+            </a:r>
+          </a:p>
+          <a:p/>
+          <a:p>
+            <a:r>
+              <a:t>Q: Why subtract the tick duration from the accumulator instead of resetting it to zero?</a:t>
+            </a:r>
+          </a:p>
+          <a:p>
+            <a:r>
+              <a:t>A: The leftover time carries over to the next tick. Resetting it would throw away a bit of time every tick, so the ticks would drift and depend on the frame rate.</a:t>
+            </a:r>
+          </a:p>
+          <a:p/>
+          <a:p>
+            <a:r>
+              <a:t>Q: What problems come from reading the keyboard directly inside gameplay code?</a:t>
+            </a:r>
+          </a:p>
+          <a:p>
+            <a:r>
+              <a:t>A: Keys are hardcoded throughout the game, so rebinding, supporting a gamepad or letting an AI drive the same entity means editing gameplay code in many places.</a:t>
+            </a:r>
+          </a:p>
+          <a:p/>
+          <a:p>
+            <a:r>
+              <a:t>Q: Why check a buffered turn against the last buffered direction?</a:t>
+            </a:r>
+          </a:p>
+          <a:p>
+            <a:r>
+              <a:t>A: The snake only turns on the next tick. Checking against its current direction would allow two quick turns that together reverse it into its own neck.</a:t>
             </a:r>
           </a:p>
         </p:txBody>
@@ -1437,37 +1834,12 @@
           <a:lstStyle/>
           <a:p>
             <a:r>
-              <a:t>Talking points:</a:t>
-            </a:r>
-          </a:p>
-          <a:p>
-            <a:r>
-              <a:t>- Input happens every frame, but the snake acts on a tick</a:t>
-            </a:r>
-          </a:p>
-          <a:p>
-            <a:r>
-              <a:t>  - Up, then Left between two ticks: the second press overwrites the first</a:t>
-            </a:r>
-          </a:p>
-          <a:p>
-            <a:r>
-              <a:t>- Queue the turns, and use one per tick</a:t>
-            </a:r>
-          </a:p>
-          <a:p>
-            <a:r>
-              <a:t>  - Check each turn against the last queued direction</a:t>
-            </a:r>
-          </a:p>
-          <a:p>
-            <a:r>
-              <a:t>  - Keep the queue short: two turns</a:t>
-            </a:r>
-          </a:p>
-          <a:p>
-            <a:r>
-              <a:t>- Common in games: a jump pressed just before landing still counts</a:t>
+              <a:t>Act it out: press Up then Left quickly between two ticks. Keep only the last key and the Up is lost.</a:t>
+            </a:r>
+          </a:p>
+          <a:p>
+            <a:r>
+              <a:t>Queue them instead, at most two. Same idea as a jump pressed just before landing.</a:t>
             </a:r>
           </a:p>
         </p:txBody>
@@ -1525,37 +1897,12 @@
           <a:lstStyle/>
           <a:p>
             <a:r>
-              <a:t>Talking points:</a:t>
-            </a:r>
-          </a:p>
-          <a:p>
-            <a:r>
-              <a:t>- The XML files describe the assets</a:t>
-            </a:r>
-          </a:p>
-          <a:p>
-            <a:r>
-              <a:t>  - Which part of the image is the snake, how the bat’s animation runs, which tile goes where</a:t>
-            </a:r>
-          </a:p>
-          <a:p>
-            <a:r>
-              <a:t>- Data can change without the code changing</a:t>
-            </a:r>
-          </a:p>
-          <a:p>
-            <a:r>
-              <a:t>  - A new frame, a faster animation or a new room: edit a file, not C#</a:t>
-            </a:r>
-          </a:p>
-          <a:p>
-            <a:r>
-              <a:t>  - Artists and designers can work without touching the code</a:t>
-            </a:r>
-          </a:p>
-          <a:p>
-            <a:r>
-              <a:t>- The code gets smaller and more general</a:t>
+              <a:t>Read the three questions on the right, and let the class answer each.</a:t>
+            </a:r>
+          </a:p>
+          <a:p>
+            <a:r>
+              <a:t>Answer: none of them need C#. A faster bat is a delay, an extra frame is a Frame line, a new room is the tilemap file.</a:t>
             </a:r>
           </a:p>
         </p:txBody>
@@ -1613,42 +1960,12 @@
           <a:lstStyle/>
           <a:p>
             <a:r>
-              <a:t>Talking points:</a:t>
-            </a:r>
-          </a:p>
-          <a:p>
-            <a:r>
-              <a:t>- The same content builder as in Pong and Flappy Bird</a:t>
-            </a:r>
-          </a:p>
-          <a:p>
-            <a:r>
-              <a:t>- But here, all steps share one Content project</a:t>
-            </a:r>
-          </a:p>
-          <a:p>
-            <a:r>
-              <a:t>  - Content/Assets: the raw images and XML definitions</a:t>
-            </a:r>
-          </a:p>
-          <a:p>
-            <a:r>
-              <a:t>  - Content/Builder/Builder.cs: the build rules, in C#</a:t>
-            </a:r>
-          </a:p>
-          <a:p>
-            <a:r>
-              <a:t>- The rules decide how each asset is processed</a:t>
-            </a:r>
-          </a:p>
-          <a:p>
-            <a:r>
-              <a:t>  - PNG images are built into textures (magenta = transparent)</a:t>
-            </a:r>
-          </a:p>
-          <a:p>
-            <a:r>
-              <a:t>  - XML definitions are copied as they are</a:t>
+              <a:t>Follow the pipeline left to right. The new part: all steps share one Content project.</a:t>
+            </a:r>
+          </a:p>
+          <a:p>
+            <a:r>
+              <a:t>Show Builder.cs: PNGs become textures, XML is copied as it is.</a:t>
             </a:r>
           </a:p>
         </p:txBody>
@@ -1736,19 +2053,9 @@
           </a:bodyPr>
           <a:lstStyle/>
           <a:p>
-            <a:pPr indent="0" lvl="0" marL="0" rtl="0" algn="l">
-              <a:spcBef>
-                <a:spcPts val="0"/>
-              </a:spcBef>
-              <a:spcAft>
-                <a:spcPts val="0"/>
-              </a:spcAft>
-              <a:buNone/>
-            </a:pPr>
-            <a:r>
-              <a:t/>
-            </a:r>
-            <a:endParaRPr/>
+            <a:r>
+              <a:t>Three levels: distance, shapes (boxes, circles), polygons. Use the simplest that looks right.</a:t>
+            </a:r>
           </a:p>
         </p:txBody>
       </p:sp>
@@ -1835,19 +2142,9 @@
           </a:bodyPr>
           <a:lstStyle/>
           <a:p>
-            <a:pPr indent="0" lvl="0" marL="0" rtl="0" algn="l">
-              <a:spcBef>
-                <a:spcPts val="0"/>
-              </a:spcBef>
-              <a:spcAft>
-                <a:spcPts val="0"/>
-              </a:spcAft>
-              <a:buNone/>
-            </a:pPr>
-            <a:r>
-              <a:t/>
-            </a:r>
-            <a:endParaRPr/>
+            <a:r>
+              <a:t>Ask the question: why not Vector2.Distance? Answer: it takes a square root. Compare squared distances instead: same answer, cheaper.</a:t>
+            </a:r>
           </a:p>
         </p:txBody>
       </p:sp>
@@ -1934,147 +2231,9 @@
           </a:bodyPr>
           <a:lstStyle/>
           <a:p>
-            <a:pPr indent="0" lvl="0" marL="0" rtl="0" algn="l">
-              <a:spcBef>
-                <a:spcPts val="0"/>
-              </a:spcBef>
-              <a:spcAft>
-                <a:spcPts val="0"/>
-              </a:spcAft>
-              <a:buNone/>
-            </a:pPr>
-            <a:r>
-              <a:rPr lang="en"/>
-              <a:t>Circle</a:t>
-            </a:r>
-            <a:endParaRPr/>
-          </a:p>
-          <a:p>
-            <a:pPr indent="0" lvl="0" marL="0" rtl="0" algn="l">
-              <a:spcBef>
-                <a:spcPts val="0"/>
-              </a:spcBef>
-              <a:spcAft>
-                <a:spcPts val="0"/>
-              </a:spcAft>
-              <a:buNone/>
-            </a:pPr>
-            <a:r>
-              <a:rPr lang="en"/>
-              <a:t>Better for round objects like balls and coins.</a:t>
-            </a:r>
-            <a:endParaRPr/>
-          </a:p>
-          <a:p>
-            <a:pPr indent="0" lvl="0" marL="0" rtl="0" algn="l">
-              <a:spcBef>
-                <a:spcPts val="0"/>
-              </a:spcBef>
-              <a:spcAft>
-                <a:spcPts val="0"/>
-              </a:spcAft>
-              <a:buNone/>
-            </a:pPr>
-            <a:r>
-              <a:rPr lang="en"/>
-              <a:t>More accurate for rotating objects.</a:t>
-            </a:r>
-            <a:endParaRPr/>
-          </a:p>
-          <a:p>
-            <a:pPr indent="0" lvl="0" marL="0" rtl="0" algn="l">
-              <a:spcBef>
-                <a:spcPts val="0"/>
-              </a:spcBef>
-              <a:spcAft>
-                <a:spcPts val="0"/>
-              </a:spcAft>
-              <a:buNone/>
-            </a:pPr>
-            <a:r>
-              <a:rPr lang="en"/>
-              <a:t>A simpler check for overlap than rectangles.</a:t>
-            </a:r>
-            <a:endParaRPr/>
-          </a:p>
-          <a:p>
-            <a:pPr indent="0" lvl="0" marL="0" rtl="0" algn="l">
-              <a:spcBef>
-                <a:spcPts val="0"/>
-              </a:spcBef>
-              <a:spcAft>
-                <a:spcPts val="0"/>
-              </a:spcAft>
-              <a:buNone/>
-            </a:pPr>
-            <a:r>
-              <a:t/>
-            </a:r>
-            <a:endParaRPr/>
-          </a:p>
-          <a:p>
-            <a:pPr indent="0" lvl="0" marL="0" rtl="0" algn="l">
-              <a:spcBef>
-                <a:spcPts val="0"/>
-              </a:spcBef>
-              <a:spcAft>
-                <a:spcPts val="0"/>
-              </a:spcAft>
-              <a:buNone/>
-            </a:pPr>
-            <a:r>
-              <a:rPr lang="en"/>
-              <a:t>Rectangle</a:t>
-            </a:r>
-            <a:endParaRPr/>
-          </a:p>
-          <a:p>
-            <a:pPr indent="0" lvl="0" marL="0" rtl="0" algn="l">
-              <a:spcBef>
-                <a:spcPts val="0"/>
-              </a:spcBef>
-              <a:spcAft>
-                <a:spcPts val="0"/>
-              </a:spcAft>
-              <a:buNone/>
-            </a:pPr>
-            <a:r>
-              <a:rPr lang="en"/>
-              <a:t>Great for walls, platforms, and most game objects.</a:t>
-            </a:r>
-            <a:endParaRPr/>
-          </a:p>
-          <a:p>
-            <a:pPr indent="0" lvl="0" marL="0" rtl="0" algn="l">
-              <a:spcBef>
-                <a:spcPts val="0"/>
-              </a:spcBef>
-              <a:spcAft>
-                <a:spcPts val="0"/>
-              </a:spcAft>
-              <a:buNone/>
-            </a:pPr>
-            <a:r>
-              <a:rPr lang="en"/>
-              <a:t>Easy to visualize and debug.</a:t>
-            </a:r>
-            <a:endParaRPr/>
-          </a:p>
-          <a:p>
-            <a:pPr indent="0" lvl="0" marL="0" rtl="0" algn="l">
-              <a:spcBef>
-                <a:spcPts val="0"/>
-              </a:spcBef>
-              <a:spcAft>
-                <a:spcPts val="0"/>
-              </a:spcAft>
-              <a:buNone/>
-            </a:pPr>
-            <a:r>
-              <a:rPr lang="en"/>
-              <a:t>Works well with tile-based games.</a:t>
-            </a:r>
-            <a:endParaRPr/>
+            <a:r>
+              <a:t>Circles or rectangles? Circles for round and rotating things; rectangles for boxes and tiles. Pick per object.</a:t>
+            </a:r>
           </a:p>
         </p:txBody>
       </p:sp>
@@ -2161,19 +2320,9 @@
           </a:bodyPr>
           <a:lstStyle/>
           <a:p>
-            <a:pPr indent="0" lvl="0" marL="0" rtl="0" algn="l">
-              <a:spcBef>
-                <a:spcPts val="0"/>
-              </a:spcBef>
-              <a:spcAft>
-                <a:spcPts val="0"/>
-              </a:spcAft>
-              <a:buNone/>
-            </a:pPr>
-            <a:r>
-              <a:t/>
-            </a:r>
-            <a:endParaRPr/>
+            <a:r>
+              <a:t>Detection says they touch; response says what happens: block, trigger, or bounce (Vector2.Reflect).</a:t>
+            </a:r>
           </a:p>
         </p:txBody>
       </p:sp>
@@ -2260,19 +2409,14 @@
           </a:bodyPr>
           <a:lstStyle/>
           <a:p>
-            <a:pPr indent="0" lvl="0" marL="0" rtl="0" algn="l">
-              <a:spcBef>
-                <a:spcPts val="0"/>
-              </a:spcBef>
-              <a:spcAft>
-                <a:spcPts val="0"/>
-              </a:spcAft>
-              <a:buNone/>
-            </a:pPr>
-            <a:r>
-              <a:t/>
-            </a:r>
-            <a:endParaRPr/>
+            <a:r>
+              <a:t>The main topic: assets as data. The art, the animations and the room are described in XML, and the code only reads them.</a:t>
+            </a:r>
+          </a:p>
+          <a:p>
+            <a:r>
+              <a:t>Then movement on a fixed tick, and input as actions.</a:t>
+            </a:r>
           </a:p>
         </p:txBody>
       </p:sp>
@@ -2359,20 +2503,14 @@
           </a:bodyPr>
           <a:lstStyle/>
           <a:p>
-            <a:pPr indent="0" lvl="0" marL="0" rtl="0" algn="l">
-              <a:spcBef>
-                <a:spcPts val="0"/>
-              </a:spcBef>
-              <a:spcAft>
-                <a:spcPts val="0"/>
-              </a:spcAft>
-              <a:buNone/>
-            </a:pPr>
-            <a:r>
-              <a:rPr lang="en"/>
-              <a:t>Broad &amp; Narrow phase</a:t>
-            </a:r>
-            <a:endParaRPr/>
+            <a:r>
+              <a:t>Every pair: n(n−1)/2 checks. 100 objects, 4,950 checks a frame. Broad phase first (cheap, rough), narrow phase only for candidates.</a:t>
+            </a:r>
+          </a:p>
+          <a:p>
+            <a:r>
+              <a:t>Vampire Survivors comes back to this with a grid.</a:t>
+            </a:r>
           </a:p>
         </p:txBody>
       </p:sp>
@@ -2460,58 +2598,12 @@
           <a:lstStyle/>
           <a:p>
             <a:r>
-              <a:t>Nominal vs. structural typing (records)</a:t>
-            </a:r>
-          </a:p>
-          <a:p/>
-          <a:p>
-            <a:r>
-              <a:t>Talking points:</a:t>
-            </a:r>
-          </a:p>
-          <a:p>
-            <a:r>
-              <a:t>- No need to add basic AABB collision detection to our library</a:t>
-            </a:r>
-          </a:p>
-          <a:p>
-            <a:r>
-              <a:t>- Rectangle.Intersects(Rectangle)</a:t>
-            </a:r>
-          </a:p>
-          <a:p>
-            <a:r>
-              <a:t>  - Provided by MonoGame</a:t>
-            </a:r>
-          </a:p>
-          <a:p>
-            <a:r>
-              <a:t>    - performs an an AABB collision check for us</a:t>
-            </a:r>
-          </a:p>
-          <a:p>
-            <a:r>
-              <a:t>- Rectangle.Contains()</a:t>
-            </a:r>
-          </a:p>
-          <a:p>
-            <a:r>
-              <a:t>  - Checks if Rectangle/Vector2/Point is contained within the Rectangle</a:t>
-            </a:r>
-          </a:p>
-          <a:p>
-            <a:r>
-              <a:t>- No Circles though</a:t>
-            </a:r>
-          </a:p>
-          <a:p>
-            <a:r>
-              <a:t>  - Add a Circle struct to GMDCore</a:t>
-            </a:r>
-          </a:p>
-          <a:p>
-            <a:r>
-              <a:t>  - Add an Intersects(Circle) method for other Circles</a:t>
+              <a:t>Rectangles: MonoGame has Intersects. Circles: we add a Circle struct to GMDCore.</a:t>
+            </a:r>
+          </a:p>
+          <a:p>
+            <a:r>
+              <a:t>Ask the question. Answer: squaring is cheap, square roots are not, and the comparison gives the same result.</a:t>
             </a:r>
           </a:p>
         </p:txBody>
@@ -2599,20 +2691,19 @@
           </a:bodyPr>
           <a:lstStyle/>
           <a:p>
-            <a:pPr indent="0" lvl="0" marL="0" rtl="0" algn="l">
-              <a:spcBef>
-                <a:spcPts val="0"/>
-              </a:spcBef>
-              <a:spcAft>
-                <a:spcPts val="0"/>
-              </a:spcAft>
-              <a:buNone/>
-            </a:pPr>
-            <a:r>
-              <a:rPr lang="en"/>
-              <a:t>Nominal vs. structural typing (records)</a:t>
-            </a:r>
-            <a:endParaRPr/>
+            <a:r>
+              <a:t>Demo: open Snake8 and Snake9 side by side (a diff tool, or two editor panes), then run Snake9.</a:t>
+            </a:r>
+          </a:p>
+          <a:p>
+            <a:r>
+              <a:t>- eating the bat grows the snake</a:t>
+            </a:r>
+          </a:p>
+          <a:p>
+            <a:r>
+              <a:t>- hitting itself or a wall ends the game</a:t>
+            </a:r>
           </a:p>
         </p:txBody>
       </p:sp>
@@ -2699,19 +2790,9 @@
           </a:bodyPr>
           <a:lstStyle/>
           <a:p>
-            <a:pPr indent="0" lvl="0" marL="0" rtl="0" algn="l">
-              <a:spcBef>
-                <a:spcPts val="0"/>
-              </a:spcBef>
-              <a:spcAft>
-                <a:spcPts val="0"/>
-              </a:spcAft>
-              <a:buNone/>
-            </a:pPr>
-            <a:r>
-              <a:t/>
-            </a:r>
-            <a:endParaRPr/>
+            <a:r>
+              <a:t>A tileset: an image cut into equal tiles, numbered left to right, top to bottom.</a:t>
+            </a:r>
           </a:p>
         </p:txBody>
       </p:sp>
@@ -2798,19 +2879,9 @@
           </a:bodyPr>
           <a:lstStyle/>
           <a:p>
-            <a:pPr indent="0" lvl="0" marL="0" rtl="0" algn="l">
-              <a:spcBef>
-                <a:spcPts val="0"/>
-              </a:spcBef>
-              <a:spcAft>
-                <a:spcPts val="0"/>
-              </a:spcAft>
-              <a:buNone/>
-            </a:pPr>
-            <a:r>
-              <a:t/>
-            </a:r>
-            <a:endParaRPr/>
+            <a:r>
+              <a:t>The numbers in the middle are the room. Find tile 6 (the torch) and tile 9 (the floor) together.</a:t>
+            </a:r>
           </a:p>
         </p:txBody>
       </p:sp>
@@ -2897,19 +2968,24 @@
           </a:bodyPr>
           <a:lstStyle/>
           <a:p>
-            <a:pPr indent="0" lvl="0" marL="0" rtl="0" algn="l">
-              <a:spcBef>
-                <a:spcPts val="0"/>
-              </a:spcBef>
-              <a:spcAft>
-                <a:spcPts val="0"/>
-              </a:spcAft>
-              <a:buNone/>
-            </a:pPr>
-            <a:r>
-              <a:t/>
-            </a:r>
-            <a:endParaRPr/>
+            <a:r>
+              <a:t>Demo: open Snake3 and Snake4 side by side (a diff tool, or two editor panes), then run Snake4.</a:t>
+            </a:r>
+          </a:p>
+          <a:p>
+            <a:r>
+              <a:t>- tilemap-definition.xml</a:t>
+            </a:r>
+          </a:p>
+          <a:p>
+            <a:r>
+              <a:t>- Tilemap.FromFile</a:t>
+            </a:r>
+          </a:p>
+          <a:p>
+            <a:r>
+              <a:t>- change one number, rebuild, and watch the room change</a:t>
+            </a:r>
           </a:p>
         </p:txBody>
       </p:sp>
@@ -2996,19 +3072,9 @@
           </a:bodyPr>
           <a:lstStyle/>
           <a:p>
-            <a:pPr indent="0" lvl="0" marL="0" rtl="0" algn="l">
-              <a:spcBef>
-                <a:spcPts val="0"/>
-              </a:spcBef>
-              <a:spcAft>
-                <a:spcPts val="0"/>
-              </a:spcAft>
-              <a:buNone/>
-            </a:pPr>
-            <a:r>
-              <a:t/>
-            </a:r>
-            <a:endParaRPr/>
+            <a:r>
+              <a:t>Exercise: a second enemy with its own animation, and a new room layout. Ask afterwards: how much C# did you change? Ideally none.</a:t>
+            </a:r>
           </a:p>
         </p:txBody>
       </p:sp>
@@ -3095,19 +3161,9 @@
           </a:bodyPr>
           <a:lstStyle/>
           <a:p>
-            <a:pPr indent="0" lvl="0" marL="0" rtl="0" algn="l">
-              <a:spcBef>
-                <a:spcPts val="0"/>
-              </a:spcBef>
-              <a:spcAft>
-                <a:spcPts val="0"/>
-              </a:spcAft>
-              <a:buNone/>
-            </a:pPr>
-            <a:r>
-              <a:t/>
-            </a:r>
-            <a:endParaRPr/>
+            <a:r>
+              <a:t>Start from Snake9. Ask for the speed-up exercise: where does that rule belong? In the snake, or in the game?</a:t>
+            </a:r>
           </a:p>
         </p:txBody>
       </p:sp>
@@ -3195,37 +3251,12 @@
           <a:lstStyle/>
           <a:p>
             <a:r>
-              <a:t>Talking points:</a:t>
-            </a:r>
-          </a:p>
-          <a:p>
-            <a:r>
-              <a:t>- All Source code for today’s game can be found here:</a:t>
-            </a:r>
-          </a:p>
-          <a:p>
-            <a:r>
-              <a:t>  - github.com/Metamate/gar-games (folder 03-snake)</a:t>
-            </a:r>
-          </a:p>
-          <a:p>
-            <a:r>
-              <a:t>- The game is built up in steps: Snake0 → Snake9</a:t>
-            </a:r>
-          </a:p>
-          <a:p>
-            <a:r>
-              <a:t>  - Each step is a separate project that adds one concept</a:t>
-            </a:r>
-          </a:p>
-          <a:p>
-            <a:r>
-              <a:t>  - Compare neighbouring steps to see exactly what changed</a:t>
-            </a:r>
-          </a:p>
-          <a:p>
-            <a:r>
-              <a:t>- Snake9 is the finished game, and the starting point for the exercises</a:t>
+              <a:t>Open gar-games/03-snake live. Show the README: the step table, the code map, how to run a step.</a:t>
+            </a:r>
+          </a:p>
+          <a:p>
+            <a:r>
+              <a:t>Say: the site explains the ideas, the README helps you find them in the code, the slides are for today.</a:t>
             </a:r>
           </a:p>
         </p:txBody>
@@ -3313,19 +3344,9 @@
           </a:bodyPr>
           <a:lstStyle/>
           <a:p>
-            <a:pPr indent="0" lvl="0" marL="0" rtl="0" algn="l">
-              <a:spcBef>
-                <a:spcPts val="0"/>
-              </a:spcBef>
-              <a:spcAft>
-                <a:spcPts val="0"/>
-              </a:spcAft>
-              <a:buNone/>
-            </a:pPr>
-            <a:r>
-              <a:t/>
-            </a:r>
-            <a:endParaRPr/>
+            <a:r>
+              <a:t>Many small images: a texture switch for every draw. One atlas: one texture, many regions. Fewer switches, faster drawing, one file to manage.</a:t>
+            </a:r>
           </a:p>
         </p:txBody>
       </p:sp>
@@ -3412,19 +3433,9 @@
           </a:bodyPr>
           <a:lstStyle/>
           <a:p>
-            <a:pPr indent="0" lvl="0" marL="0" rtl="0" algn="l">
-              <a:spcBef>
-                <a:spcPts val="0"/>
-              </a:spcBef>
-              <a:spcAft>
-                <a:spcPts val="0"/>
-              </a:spcAft>
-              <a:buNone/>
-            </a:pPr>
-            <a:r>
-              <a:t/>
-            </a:r>
-            <a:endParaRPr/>
+            <a:r>
+              <a:t>The whole game’s art in one image.</a:t>
+            </a:r>
           </a:p>
         </p:txBody>
       </p:sp>
@@ -3511,24 +3522,9 @@
           </a:bodyPr>
           <a:lstStyle/>
           <a:p>
-            <a:pPr indent="0" lvl="0" marL="0" rtl="0" algn="l">
-              <a:spcBef>
-                <a:spcPts val="0"/>
-              </a:spcBef>
-              <a:spcAft>
-                <a:spcPts val="0"/>
-              </a:spcAft>
-              <a:buNone/>
-            </a:pPr>
-            <a:r>
-              <a:rPr lang="en"/>
-              <a:t>We </a:t>
-            </a:r>
-            <a:r>
-              <a:rPr lang="en"/>
-              <a:t>no longer reference a Texture2D directly</a:t>
-            </a:r>
-            <a:endParaRPr/>
+            <a:r>
+              <a:t>A region: a rectangle inside the atlas, with a name. We no longer reference a Texture2D directly; we ask the atlas for a region.</a:t>
+            </a:r>
           </a:p>
         </p:txBody>
       </p:sp>
@@ -3615,19 +3611,24 @@
           </a:bodyPr>
           <a:lstStyle/>
           <a:p>
-            <a:pPr indent="0" lvl="0" marL="0" rtl="0" algn="l">
-              <a:spcBef>
-                <a:spcPts val="0"/>
-              </a:spcBef>
-              <a:spcAft>
-                <a:spcPts val="0"/>
-              </a:spcAft>
-              <a:buNone/>
-            </a:pPr>
-            <a:r>
-              <a:t/>
-            </a:r>
-            <a:endParaRPr/>
+            <a:r>
+              <a:t>Demo: open Snake0 and Snake1 side by side (a diff tool, or two editor panes), then run Snake1.</a:t>
+            </a:r>
+          </a:p>
+          <a:p>
+            <a:r>
+              <a:t>- the hardcoded rectangles become names in atlas-definition.xml</a:t>
+            </a:r>
+          </a:p>
+          <a:p>
+            <a:r>
+              <a:t>- TextureAtlas.FromFile reads the XML</a:t>
+            </a:r>
+          </a:p>
+          <a:p>
+            <a:r>
+              <a:t>- Game1 asks for regions by name</a:t>
+            </a:r>
           </a:p>
         </p:txBody>
       </p:sp>
@@ -3714,19 +3715,9 @@
           </a:bodyPr>
           <a:lstStyle/>
           <a:p>
-            <a:pPr indent="0" lvl="0" marL="0" rtl="0" algn="l">
-              <a:spcBef>
-                <a:spcPts val="0"/>
-              </a:spcBef>
-              <a:spcAft>
-                <a:spcPts val="0"/>
-              </a:spcAft>
-              <a:buNone/>
-            </a:pPr>
-            <a:r>
-              <a:t/>
-            </a:r>
-            <a:endParaRPr/>
+            <a:r>
+              <a:t>A sprite: a region plus how to draw it (rotation, scale, colour, origin). Point at the labels on the picture.</a:t>
+            </a:r>
           </a:p>
         </p:txBody>
       </p:sp>
@@ -18619,6 +18610,179 @@
 </file>
 
 <file path=ppt/slides/slide33.xml><?xml version="1.0" encoding="utf-8"?>
+<p:sld xmlns:a="http://schemas.openxmlformats.org/drawingml/2006/main" xmlns:p="http://schemas.openxmlformats.org/presentationml/2006/main" xmlns:r="http://schemas.openxmlformats.org/officeDocument/2006/relationships">
+  <p:cSld>
+    <p:spTree>
+      <p:nvGrpSpPr>
+        <p:cNvPr id="1" name=""/>
+        <p:cNvGrpSpPr/>
+        <p:nvPr/>
+      </p:nvGrpSpPr>
+      <p:grpSpPr/>
+      <p:sp>
+        <p:nvSpPr>
+          <p:cNvPr id="2" name="Title 1"/>
+          <p:cNvSpPr>
+            <a:spLocks noGrp="1"/>
+          </p:cNvSpPr>
+          <p:nvPr>
+            <p:ph type="title"/>
+          </p:nvPr>
+        </p:nvSpPr>
+        <p:spPr/>
+        <p:txBody>
+          <a:bodyPr/>
+          <a:lstStyle/>
+          <a:p>
+            <a:pPr indent="0" lvl="0" marL="0" rtl="0" algn="l">
+              <a:spcBef>
+                <a:spcPts val="0"/>
+              </a:spcBef>
+              <a:spcAft>
+                <a:spcPts val="0"/>
+              </a:spcAft>
+              <a:buNone/>
+            </a:pPr>
+            <a:r>
+              <a:rPr lang="en"/>
+              <a:t>Check Yourself</a:t>
+            </a:r>
+            <a:endParaRPr/>
+          </a:p>
+        </p:txBody>
+      </p:sp>
+      <p:sp>
+        <p:nvSpPr>
+          <p:cNvPr id="3" name="Text Placeholder 2"/>
+          <p:cNvSpPr>
+            <a:spLocks noGrp="1"/>
+          </p:cNvSpPr>
+          <p:nvPr>
+            <p:ph type="body" idx="1"/>
+          </p:nvPr>
+        </p:nvSpPr>
+        <p:spPr>
+          <a:xfrm>
+            <a:off x="311700" y="885950"/>
+            <a:ext cx="8520600" cy="1719072"/>
+          </a:xfrm>
+        </p:spPr>
+        <p:txBody>
+          <a:bodyPr/>
+          <a:lstStyle/>
+          <a:p>
+            <a:pPr indent="-330200" lvl="0" marL="457200" rtl="0" algn="l">
+              <a:spcBef>
+                <a:spcPts val="0"/>
+              </a:spcBef>
+              <a:spcAft>
+                <a:spcPts val="0"/>
+              </a:spcAft>
+              <a:buSzPts val="1600"/>
+              <a:buChar char="●"/>
+            </a:pPr>
+            <a:r>
+              <a:rPr lang="en"/>
+              <a:t>Why prefer a texture atlas over many individual image files?</a:t>
+            </a:r>
+            <a:endParaRPr/>
+          </a:p>
+          <a:p>
+            <a:pPr indent="-330200" lvl="0" marL="457200" rtl="0" algn="l">
+              <a:spcBef>
+                <a:spcPts val="0"/>
+              </a:spcBef>
+              <a:spcAft>
+                <a:spcPts val="0"/>
+              </a:spcAft>
+              <a:buSzPts val="1600"/>
+              <a:buChar char="●"/>
+            </a:pPr>
+            <a:r>
+              <a:rPr lang="en"/>
+              <a:t>Why subtract the tick duration from the accumulator instead of resetting it?</a:t>
+            </a:r>
+            <a:endParaRPr/>
+          </a:p>
+          <a:p>
+            <a:pPr indent="-330200" lvl="0" marL="457200" rtl="0" algn="l">
+              <a:spcBef>
+                <a:spcPts val="0"/>
+              </a:spcBef>
+              <a:spcAft>
+                <a:spcPts val="0"/>
+              </a:spcAft>
+              <a:buSzPts val="1600"/>
+              <a:buChar char="●"/>
+            </a:pPr>
+            <a:r>
+              <a:rPr lang="en"/>
+              <a:t>What problems come from reading the keyboard inside gameplay code?</a:t>
+            </a:r>
+            <a:endParaRPr/>
+          </a:p>
+          <a:p>
+            <a:pPr indent="-330200" lvl="0" marL="457200" rtl="0" algn="l">
+              <a:spcBef>
+                <a:spcPts val="0"/>
+              </a:spcBef>
+              <a:spcAft>
+                <a:spcPts val="0"/>
+              </a:spcAft>
+              <a:buSzPts val="1600"/>
+              <a:buChar char="●"/>
+            </a:pPr>
+            <a:r>
+              <a:rPr lang="en"/>
+              <a:t>Why check a buffered turn against the last buffered direction?</a:t>
+            </a:r>
+            <a:endParaRPr/>
+          </a:p>
+        </p:txBody>
+      </p:sp>
+      <p:sp>
+        <p:nvSpPr>
+          <p:cNvPr id="4" name="TextBox 3"/>
+          <p:cNvSpPr txBox="1"/>
+          <p:nvPr/>
+        </p:nvSpPr>
+        <p:spPr>
+          <a:xfrm>
+            <a:off x="457200" y="3182112"/>
+            <a:ext cx="8229600" cy="457200"/>
+          </a:xfrm>
+          <a:prstGeom prst="rect">
+            <a:avLst/>
+          </a:prstGeom>
+          <a:noFill/>
+        </p:spPr>
+        <p:txBody>
+          <a:bodyPr wrap="square">
+            <a:spAutoFit/>
+          </a:bodyPr>
+          <a:lstStyle/>
+          <a:p>
+            <a:pPr algn="ctr"/>
+            <a:r>
+              <a:rPr sz="1400" b="0" i="0">
+                <a:solidFill>
+                  <a:srgbClr val="9AA3AB"/>
+                </a:solidFill>
+              </a:rPr>
+              <a:t>The answers, and more questions, are on the course site.</a:t>
+            </a:r>
+          </a:p>
+        </p:txBody>
+      </p:sp>
+    </p:spTree>
+  </p:cSld>
+  <p:clrMapOvr>
+    <a:masterClrMapping/>
+  </p:clrMapOvr>
+</p:sld>
+</file>
+
+<file path=ppt/slides/slide34.xml><?xml version="1.0" encoding="utf-8"?>
 <p:sld xmlns:a="http://schemas.openxmlformats.org/drawingml/2006/main" xmlns:r="http://schemas.openxmlformats.org/officeDocument/2006/relationships" xmlns:mc="http://schemas.openxmlformats.org/markup-compatibility/2006" xmlns:mv="urn:schemas-microsoft-com:mac:vml" xmlns:p="http://schemas.openxmlformats.org/presentationml/2006/main" xmlns:c="http://schemas.openxmlformats.org/drawingml/2006/chart" xmlns:dgm="http://schemas.openxmlformats.org/drawingml/2006/diagram" xmlns:o="urn:schemas-microsoft-com:office:office" xmlns:v="urn:schemas-microsoft-com:vml" xmlns:pvml="urn:schemas-microsoft-com:office:powerpoint" xmlns:com="http://schemas.openxmlformats.org/drawingml/2006/compatibility" xmlns:p14="http://schemas.microsoft.com/office/powerpoint/2010/main" xmlns:p15="http://schemas.microsoft.com/office/powerpoint/2012/main" xmlns:ahyp="http://schemas.microsoft.com/office/drawing/2018/hyperlinkcolor">
   <p:cSld>
     <p:spTree>
@@ -19450,7 +19614,7 @@
 </p:sld>
 </file>
 
-<file path=ppt/slides/slide34.xml><?xml version="1.0" encoding="utf-8"?>
+<file path=ppt/slides/slide35.xml><?xml version="1.0" encoding="utf-8"?>
 <p:sld xmlns:a="http://schemas.openxmlformats.org/drawingml/2006/main" xmlns:r="http://schemas.openxmlformats.org/officeDocument/2006/relationships" xmlns:mc="http://schemas.openxmlformats.org/markup-compatibility/2006" xmlns:mv="urn:schemas-microsoft-com:mac:vml" xmlns:p="http://schemas.openxmlformats.org/presentationml/2006/main" xmlns:c="http://schemas.openxmlformats.org/drawingml/2006/chart" xmlns:dgm="http://schemas.openxmlformats.org/drawingml/2006/diagram" xmlns:o="urn:schemas-microsoft-com:office:office" xmlns:v="urn:schemas-microsoft-com:vml" xmlns:pvml="urn:schemas-microsoft-com:office:powerpoint" xmlns:com="http://schemas.openxmlformats.org/drawingml/2006/compatibility" xmlns:p14="http://schemas.microsoft.com/office/powerpoint/2010/main" xmlns:p15="http://schemas.microsoft.com/office/powerpoint/2012/main" xmlns:ahyp="http://schemas.microsoft.com/office/drawing/2018/hyperlinkcolor">
   <p:cSld>
     <p:spTree>
@@ -19647,179 +19811,6 @@
               <a:t>Your repository starts from the gar-starter template on GitHub</a:t>
             </a:r>
             <a:endParaRPr/>
-          </a:p>
-        </p:txBody>
-      </p:sp>
-    </p:spTree>
-  </p:cSld>
-  <p:clrMapOvr>
-    <a:masterClrMapping/>
-  </p:clrMapOvr>
-</p:sld>
-</file>
-
-<file path=ppt/slides/slide35.xml><?xml version="1.0" encoding="utf-8"?>
-<p:sld xmlns:a="http://schemas.openxmlformats.org/drawingml/2006/main" xmlns:p="http://schemas.openxmlformats.org/presentationml/2006/main" xmlns:r="http://schemas.openxmlformats.org/officeDocument/2006/relationships">
-  <p:cSld>
-    <p:spTree>
-      <p:nvGrpSpPr>
-        <p:cNvPr id="1" name=""/>
-        <p:cNvGrpSpPr/>
-        <p:nvPr/>
-      </p:nvGrpSpPr>
-      <p:grpSpPr/>
-      <p:sp>
-        <p:nvSpPr>
-          <p:cNvPr id="2" name="Title 1"/>
-          <p:cNvSpPr>
-            <a:spLocks noGrp="1"/>
-          </p:cNvSpPr>
-          <p:nvPr>
-            <p:ph type="title"/>
-          </p:nvPr>
-        </p:nvSpPr>
-        <p:spPr/>
-        <p:txBody>
-          <a:bodyPr/>
-          <a:lstStyle/>
-          <a:p>
-            <a:pPr indent="0" lvl="0" marL="0" rtl="0" algn="l">
-              <a:spcBef>
-                <a:spcPts val="0"/>
-              </a:spcBef>
-              <a:spcAft>
-                <a:spcPts val="0"/>
-              </a:spcAft>
-              <a:buNone/>
-            </a:pPr>
-            <a:r>
-              <a:rPr lang="en"/>
-              <a:t>Check Yourself</a:t>
-            </a:r>
-            <a:endParaRPr/>
-          </a:p>
-        </p:txBody>
-      </p:sp>
-      <p:sp>
-        <p:nvSpPr>
-          <p:cNvPr id="3" name="Text Placeholder 2"/>
-          <p:cNvSpPr>
-            <a:spLocks noGrp="1"/>
-          </p:cNvSpPr>
-          <p:nvPr>
-            <p:ph type="body" idx="1"/>
-          </p:nvPr>
-        </p:nvSpPr>
-        <p:spPr>
-          <a:xfrm>
-            <a:off x="311700" y="885950"/>
-            <a:ext cx="8520600" cy="1719072"/>
-          </a:xfrm>
-        </p:spPr>
-        <p:txBody>
-          <a:bodyPr/>
-          <a:lstStyle/>
-          <a:p>
-            <a:pPr indent="-330200" lvl="0" marL="457200" rtl="0" algn="l">
-              <a:spcBef>
-                <a:spcPts val="0"/>
-              </a:spcBef>
-              <a:spcAft>
-                <a:spcPts val="0"/>
-              </a:spcAft>
-              <a:buSzPts val="1600"/>
-              <a:buChar char="●"/>
-            </a:pPr>
-            <a:r>
-              <a:rPr lang="en"/>
-              <a:t>Why prefer a texture atlas over many individual image files?</a:t>
-            </a:r>
-            <a:endParaRPr/>
-          </a:p>
-          <a:p>
-            <a:pPr indent="-330200" lvl="0" marL="457200" rtl="0" algn="l">
-              <a:spcBef>
-                <a:spcPts val="0"/>
-              </a:spcBef>
-              <a:spcAft>
-                <a:spcPts val="0"/>
-              </a:spcAft>
-              <a:buSzPts val="1600"/>
-              <a:buChar char="●"/>
-            </a:pPr>
-            <a:r>
-              <a:rPr lang="en"/>
-              <a:t>Why subtract the tick duration from the accumulator instead of resetting it?</a:t>
-            </a:r>
-            <a:endParaRPr/>
-          </a:p>
-          <a:p>
-            <a:pPr indent="-330200" lvl="0" marL="457200" rtl="0" algn="l">
-              <a:spcBef>
-                <a:spcPts val="0"/>
-              </a:spcBef>
-              <a:spcAft>
-                <a:spcPts val="0"/>
-              </a:spcAft>
-              <a:buSzPts val="1600"/>
-              <a:buChar char="●"/>
-            </a:pPr>
-            <a:r>
-              <a:rPr lang="en"/>
-              <a:t>What problems come from reading the keyboard inside gameplay code?</a:t>
-            </a:r>
-            <a:endParaRPr/>
-          </a:p>
-          <a:p>
-            <a:pPr indent="-330200" lvl="0" marL="457200" rtl="0" algn="l">
-              <a:spcBef>
-                <a:spcPts val="0"/>
-              </a:spcBef>
-              <a:spcAft>
-                <a:spcPts val="0"/>
-              </a:spcAft>
-              <a:buSzPts val="1600"/>
-              <a:buChar char="●"/>
-            </a:pPr>
-            <a:r>
-              <a:rPr lang="en"/>
-              <a:t>Why check a buffered turn against the last buffered direction?</a:t>
-            </a:r>
-            <a:endParaRPr/>
-          </a:p>
-        </p:txBody>
-      </p:sp>
-      <p:sp>
-        <p:nvSpPr>
-          <p:cNvPr id="4" name="TextBox 3"/>
-          <p:cNvSpPr txBox="1"/>
-          <p:nvPr/>
-        </p:nvSpPr>
-        <p:spPr>
-          <a:xfrm>
-            <a:off x="457200" y="3182112"/>
-            <a:ext cx="8229600" cy="457200"/>
-          </a:xfrm>
-          <a:prstGeom prst="rect">
-            <a:avLst/>
-          </a:prstGeom>
-          <a:noFill/>
-        </p:spPr>
-        <p:txBody>
-          <a:bodyPr wrap="square">
-            <a:spAutoFit/>
-          </a:bodyPr>
-          <a:lstStyle/>
-          <a:p>
-            <a:pPr algn="ctr"/>
-            <a:r>
-              <a:rPr sz="1400" b="0" i="0">
-                <a:solidFill>
-                  <a:srgbClr val="9AA3AB"/>
-                </a:solidFill>
-              </a:rPr>
-              <a:t>The answers, and more questions, are on the course site.</a:t>
-            </a:r>
           </a:p>
         </p:txBody>
       </p:sp>

--- a/slides/03 Snake.pptx
+++ b/slides/03 Snake.pptx
@@ -3073,7 +3073,12 @@
           <a:lstStyle/>
           <a:p>
             <a:r>
-              <a:t>Exercise: a second enemy with its own animation, and a new room layout. Ask afterwards: how much C# did you change? Ideally none.</a:t>
+              <a:t>Exercise: the beetle is drawn in the atlas but not described. Two regions and an animation in the XML, then one line of C# (the animation name), then a new room layout.</a:t>
+            </a:r>
+          </a:p>
+          <a:p>
+            <a:r>
+              <a:t>Ask afterwards: how much C# did you change? One string. And for a beetle next to the bat? A lot: Game1 handles the bat by name (its collisions, its bounces). That is the next architecture problem, not a data one.</a:t>
             </a:r>
           </a:p>
         </p:txBody>
@@ -3163,6 +3168,11 @@
           <a:p>
             <a:r>
               <a:t>Start from Snake9. Ask for the speed-up exercise: where does that rule belong? In the snake, or in the game?</a:t>
+            </a:r>
+          </a:p>
+          <a:p>
+            <a:r>
+              <a:t>Gamepad: a press needs last frame’s state, so it goes through a GamePadInfo in GMDCore. In the game, only GameController changes. Geometry Wars has a finished GamePadInfo to compare with.</a:t>
             </a:r>
           </a:p>
         </p:txBody>
@@ -16534,7 +16544,7 @@
         <p:spPr>
           <a:xfrm>
             <a:off x="311700" y="885950"/>
-            <a:ext cx="8520600" cy="1248900"/>
+            <a:ext cx="8520600" cy="1673352"/>
           </a:xfrm>
           <a:prstGeom prst="rect">
             <a:avLst/>
@@ -16542,7 +16552,7 @@
         </p:spPr>
         <p:txBody>
           <a:bodyPr anchorCtr="0" anchor="t" bIns="91425" lIns="91425" spcFirstLastPara="1" rIns="91425" wrap="square" tIns="91425">
-            <a:normAutofit lnSpcReduction="20000"/>
+            <a:normAutofit/>
           </a:bodyPr>
           <a:lstStyle/>
           <a:p>
@@ -16558,24 +16568,7 @@
             </a:pPr>
             <a:r>
               <a:rPr lang="en"/>
-              <a:t>Add a second enemy with its own animation</a:t>
-            </a:r>
-            <a:endParaRPr/>
-          </a:p>
-          <a:p>
-            <a:pPr indent="-317500" lvl="1" marL="914400" rtl="0" algn="l">
-              <a:spcBef>
-                <a:spcPts val="0"/>
-              </a:spcBef>
-              <a:spcAft>
-                <a:spcPts val="0"/>
-              </a:spcAft>
-              <a:buSzPts val="1400"/>
-              <a:buChar char="○"/>
-            </a:pPr>
-            <a:r>
-              <a:rPr lang="en"/>
-              <a:t>New regions and an animation in atlas-definition.xml</a:t>
+              <a:t>A beetle is in the atlas image, but not in the data</a:t>
             </a:r>
             <a:endParaRPr/>
           </a:p>
@@ -16592,7 +16585,7 @@
             </a:pPr>
             <a:r>
               <a:rPr lang="en"/>
-              <a:t>Change the room layout in tilemap-definition.xml</a:t>
+              <a:t>Describe it in atlas-definition.xml: two regions, one animation</a:t>
             </a:r>
             <a:endParaRPr/>
           </a:p>
@@ -16609,42 +16602,29 @@
             </a:pPr>
             <a:r>
               <a:rPr lang="en"/>
-              <a:t>How much C# did you need to change?</a:t>
+              <a:t>Make the enemy a beetle; then change the room in tilemap-definition.xml</a:t>
+            </a:r>
+            <a:endParaRPr/>
+          </a:p>
+          <a:p>
+            <a:pPr indent="-330200" lvl="0" marL="457200" rtl="0" algn="l">
+              <a:spcBef>
+                <a:spcPts val="0"/>
+              </a:spcBef>
+              <a:spcAft>
+                <a:spcPts val="0"/>
+              </a:spcAft>
+              <a:buSzPts val="1600"/>
+              <a:buChar char="●"/>
+            </a:pPr>
+            <a:r>
+              <a:rPr lang="en"/>
+              <a:t>How much C# did you change? And for a beetle next to the bat?</a:t>
             </a:r>
             <a:endParaRPr/>
           </a:p>
         </p:txBody>
       </p:sp>
-      <p:pic>
-        <p:nvPicPr>
-          <p:cNvPr id="288" name="Google Shape;288;p44">
-            <a:hlinkClick r:id="rId3"/>
-          </p:cNvPr>
-          <p:cNvPicPr preferRelativeResize="0"/>
-          <p:nvPr/>
-        </p:nvPicPr>
-        <p:blipFill>
-          <a:blip r:embed="rId4">
-            <a:alphaModFix/>
-          </a:blip>
-          <a:stretch>
-            <a:fillRect/>
-          </a:stretch>
-        </p:blipFill>
-        <p:spPr>
-          <a:xfrm>
-            <a:off x="2004288" y="2252475"/>
-            <a:ext cx="5135416" cy="2703850"/>
-          </a:xfrm>
-          <a:prstGeom prst="rect">
-            <a:avLst/>
-          </a:prstGeom>
-          <a:noFill/>
-          <a:ln>
-            <a:noFill/>
-          </a:ln>
-        </p:spPr>
-      </p:pic>
     </p:spTree>
   </p:cSld>
   <p:clrMapOvr>
@@ -17004,7 +16984,7 @@
         <p:spPr>
           <a:xfrm>
             <a:off x="311700" y="885950"/>
-            <a:ext cx="8520600" cy="4023300"/>
+            <a:ext cx="8520600" cy="2057400"/>
           </a:xfrm>
           <a:prstGeom prst="rect">
             <a:avLst/>
@@ -17050,23 +17030,6 @@
             <a:endParaRPr/>
           </a:p>
           <a:p>
-            <a:pPr indent="-317500" lvl="1" marL="914400" rtl="0" algn="l">
-              <a:spcBef>
-                <a:spcPts val="0"/>
-              </a:spcBef>
-              <a:spcAft>
-                <a:spcPts val="0"/>
-              </a:spcAft>
-              <a:buSzPts val="1400"/>
-              <a:buChar char="○"/>
-            </a:pPr>
-            <a:r>
-              <a:rPr lang="en"/>
-              <a:t>Where does that rule belong?</a:t>
-            </a:r>
-            <a:endParaRPr/>
-          </a:p>
-          <a:p>
             <a:pPr indent="-330200" lvl="0" marL="457200" rtl="0" algn="l">
               <a:spcBef>
                 <a:spcPts val="0"/>
@@ -17079,7 +17042,24 @@
             </a:pPr>
             <a:r>
               <a:rPr lang="en"/>
-              <a:t>New input: add gamepad support by changing only GameController</a:t>
+              <a:t>Where does that rule belong?</a:t>
+            </a:r>
+            <a:endParaRPr/>
+          </a:p>
+          <a:p>
+            <a:pPr indent="-330200" lvl="0" marL="457200" rtl="0" algn="l">
+              <a:spcBef>
+                <a:spcPts val="0"/>
+              </a:spcBef>
+              <a:spcAft>
+                <a:spcPts val="0"/>
+              </a:spcAft>
+              <a:buSzPts val="1600"/>
+              <a:buChar char="●"/>
+            </a:pPr>
+            <a:r>
+              <a:rPr lang="en"/>
+              <a:t>New input: the D-pad, through a GamePadInfo in GMDCore</a:t>
             </a:r>
             <a:endParaRPr/>
           </a:p>

--- a/slides/03 Snake.pptx
+++ b/slides/03 Snake.pptx
@@ -1260,7 +1260,7 @@
           </a:p>
           <a:p>
             <a:r>
-              <a:t>Ask two groups to share one answer each. Push for concrete classes and files, not intentions.</a:t>
+              <a:t>Ask two groups to share one answer each, and push them to name actual classes and files.</a:t>
             </a:r>
           </a:p>
         </p:txBody>
@@ -19911,7 +19911,7 @@
             </a:pPr>
             <a:r>
               <a:rPr lang="en"/>
-              <a:t>Its README: the steps (Snake0 to Snake9), a map of the code, how to run it</a:t>
+              <a:t>Its README: the steps (Snake0 to Snake9), where things are in the code, how to run it</a:t>
             </a:r>
             <a:endParaRPr/>
           </a:p>

--- a/slides/03 Snake.pptx
+++ b/slides/03 Snake.pptx
@@ -9,6 +9,7 @@
   </p:notesMasterIdLst>
   <p:sldIdLst>
     <p:sldId id="256" r:id="rId6"/>
+    <p:sldId id="303" r:id="rId29"/>
     <p:sldId id="257" r:id="rId7"/>
     <p:sldId id="258" r:id="rId8"/>
     <p:sldId id="259" r:id="rId9"/>
@@ -1198,6 +1199,69 @@
           <a:p>
             <a:r>
               <a:t>- AnimatedSprite advancing frames with elapsed time</a:t>
+            </a:r>
+          </a:p>
+        </p:txBody>
+      </p:sp>
+    </p:spTree>
+  </p:cSld>
+  <p:clrMapOvr>
+    <a:masterClrMapping/>
+  </p:clrMapOvr>
+</p:notes>
+</file>
+
+<file path=ppt/notesSlides/notesSlide15.xml><?xml version="1.0" encoding="utf-8"?>
+<p:notes xmlns:a="http://schemas.openxmlformats.org/drawingml/2006/main" xmlns:p="http://schemas.openxmlformats.org/presentationml/2006/main" xmlns:r="http://schemas.openxmlformats.org/officeDocument/2006/relationships">
+  <p:cSld>
+    <p:spTree>
+      <p:nvGrpSpPr>
+        <p:cNvPr id="1" name=""/>
+        <p:cNvGrpSpPr/>
+        <p:nvPr/>
+      </p:nvGrpSpPr>
+      <p:grpSpPr>
+        <a:xfrm>
+          <a:off x="0" y="0"/>
+          <a:ext cx="0" cy="0"/>
+          <a:chOff x="0" y="0"/>
+          <a:chExt cx="0" cy="0"/>
+        </a:xfrm>
+      </p:grpSpPr>
+      <p:sp>
+        <p:nvSpPr>
+          <p:cNvPr id="2" name="Slide Image Placeholder 1"/>
+          <p:cNvSpPr>
+            <a:spLocks noGrp="1"/>
+          </p:cNvSpPr>
+          <p:nvPr>
+            <p:ph type="sldImg" idx="2"/>
+          </p:nvPr>
+        </p:nvSpPr>
+        <p:spPr/>
+      </p:sp>
+      <p:sp>
+        <p:nvSpPr>
+          <p:cNvPr id="3" name="Notes Placeholder 2"/>
+          <p:cNvSpPr>
+            <a:spLocks noGrp="1"/>
+          </p:cNvSpPr>
+          <p:nvPr>
+            <p:ph type="body" idx="1"/>
+          </p:nvPr>
+        </p:nvSpPr>
+        <p:spPr/>
+        <p:txBody>
+          <a:bodyPr/>
+          <a:lstStyle/>
+          <a:p>
+            <a:r>
+              <a:t>The original: Snake. Ask who has played it, and what they remember of how it plays.</a:t>
+            </a:r>
+          </a:p>
+          <a:p>
+            <a:r>
+              <a:t>Today we build the parts that matter for the architecture, not the whole game.</a:t>
             </a:r>
           </a:p>
         </p:txBody>
@@ -7405,6 +7469,176 @@
   <p:cSld>
     <p:spTree>
       <p:nvGrpSpPr>
+        <p:cNvPr id="83" name="Shape 83"/>
+        <p:cNvGrpSpPr/>
+        <p:nvPr/>
+      </p:nvGrpSpPr>
+      <p:grpSpPr>
+        <a:xfrm>
+          <a:off x="0" y="0"/>
+          <a:ext cx="0" cy="0"/>
+          <a:chOff x="0" y="0"/>
+          <a:chExt cx="0" cy="0"/>
+        </a:xfrm>
+      </p:grpSpPr>
+      <p:sp>
+        <p:nvSpPr>
+          <p:cNvPr id="84" name="Google Shape;84;p15"/>
+          <p:cNvSpPr txBox="1"/>
+          <p:nvPr>
+            <p:ph type="title"/>
+          </p:nvPr>
+        </p:nvSpPr>
+        <p:spPr>
+          <a:xfrm>
+            <a:off x="311700" y="195615"/>
+            <a:ext cx="8520600" cy="572700"/>
+          </a:xfrm>
+          <a:prstGeom prst="rect">
+            <a:avLst/>
+          </a:prstGeom>
+        </p:spPr>
+        <p:txBody>
+          <a:bodyPr anchorCtr="0" anchor="t" bIns="91425" lIns="91425" spcFirstLastPara="1" rIns="91425" wrap="square" tIns="91425">
+            <a:normAutofit fontScale="90000"/>
+          </a:bodyPr>
+          <a:lstStyle/>
+          <a:p>
+            <a:pPr indent="0" lvl="0" marL="0" rtl="0" algn="l">
+              <a:spcBef>
+                <a:spcPts val="0"/>
+              </a:spcBef>
+              <a:spcAft>
+                <a:spcPts val="0"/>
+              </a:spcAft>
+              <a:buNone/>
+            </a:pPr>
+            <a:r>
+              <a:rPr lang="en"/>
+              <a:t>Texture Region</a:t>
+            </a:r>
+            <a:endParaRPr/>
+          </a:p>
+        </p:txBody>
+      </p:sp>
+      <p:pic>
+        <p:nvPicPr>
+          <p:cNvPr id="85" name="Picture 87" descr="snake_atlas.png"/>
+          <p:cNvPicPr>
+            <a:picLocks noChangeAspect="1"/>
+          </p:cNvPicPr>
+          <p:nvPr/>
+        </p:nvPicPr>
+        <p:blipFill>
+          <a:blip r:embed="rId4"/>
+          <a:stretch>
+            <a:fillRect/>
+          </a:stretch>
+        </p:blipFill>
+        <p:spPr>
+          <a:xfrm>
+            <a:off x="3897617" y="1560179"/>
+            <a:ext cx="1348766" cy="2023149"/>
+          </a:xfrm>
+          <a:prstGeom prst="rect">
+            <a:avLst/>
+          </a:prstGeom>
+        </p:spPr>
+      </p:pic>
+      <p:sp>
+        <p:nvSpPr>
+          <p:cNvPr id="86" name="Google Shape;86;p15"/>
+          <p:cNvSpPr/>
+          <p:nvPr/>
+        </p:nvSpPr>
+        <p:spPr>
+          <a:xfrm>
+            <a:off x="3872328" y="1534890"/>
+            <a:ext cx="387769" cy="387769"/>
+          </a:xfrm>
+          <a:prstGeom prst="rect">
+            <a:avLst/>
+          </a:prstGeom>
+          <a:noFill/>
+          <a:ln cap="flat" cmpd="sng" w="19050">
+            <a:solidFill>
+              <a:schemeClr val="accent6"/>
+            </a:solidFill>
+            <a:prstDash val="solid"/>
+            <a:round/>
+            <a:headEnd len="sm" w="sm" type="none"/>
+            <a:tailEnd len="sm" w="sm" type="none"/>
+          </a:ln>
+        </p:spPr>
+        <p:txBody>
+          <a:bodyPr anchorCtr="0" anchor="ctr" bIns="91425" lIns="91425" spcFirstLastPara="1" rIns="91425" wrap="square" tIns="91425">
+            <a:noAutofit/>
+          </a:bodyPr>
+          <a:lstStyle/>
+          <a:p>
+            <a:pPr indent="0" lvl="0" marL="0" rtl="0" algn="ctr">
+              <a:spcBef>
+                <a:spcPts val="0"/>
+              </a:spcBef>
+              <a:spcAft>
+                <a:spcPts val="0"/>
+              </a:spcAft>
+              <a:buNone/>
+            </a:pPr>
+            <a:r>
+              <a:rPr/>
+              <a:t/>
+            </a:r>
+            <a:endParaRPr>
+              <a:latin typeface="Roboto Light"/>
+              <a:ea typeface="Roboto Light"/>
+              <a:cs typeface="Roboto Light"/>
+              <a:sym typeface="Roboto Light"/>
+            </a:endParaRPr>
+          </a:p>
+        </p:txBody>
+      </p:sp>
+      <p:cxnSp>
+        <p:nvCxnSpPr>
+          <p:cNvPr id="87" name="Google Shape;87;p15"/>
+          <p:cNvCxnSpPr>
+            <a:endCxn id="86" idx="0"/>
+          </p:cNvCxnSpPr>
+          <p:nvPr/>
+        </p:nvCxnSpPr>
+        <p:spPr>
+          <a:xfrm>
+            <a:off x="3571128" y="1084290"/>
+            <a:ext cx="435300" cy="450600"/>
+          </a:xfrm>
+          <a:prstGeom prst="straightConnector1">
+            <a:avLst/>
+          </a:prstGeom>
+          <a:noFill/>
+          <a:ln cap="flat" cmpd="sng" w="9525">
+            <a:solidFill>
+              <a:schemeClr val="accent6"/>
+            </a:solidFill>
+            <a:prstDash val="solid"/>
+            <a:round/>
+            <a:headEnd len="med" w="med" type="none"/>
+            <a:tailEnd len="med" w="med" type="triangle"/>
+          </a:ln>
+        </p:spPr>
+      </p:cxnSp>
+    </p:spTree>
+  </p:cSld>
+  <p:clrMapOvr>
+    <a:masterClrMapping/>
+  </p:clrMapOvr>
+</p:sld>
+</file>
+
+<file path=ppt/slides/slide11.xml><?xml version="1.0" encoding="utf-8"?>
+<p:sld xmlns:a="http://schemas.openxmlformats.org/drawingml/2006/main" xmlns:r="http://schemas.openxmlformats.org/officeDocument/2006/relationships" xmlns:mc="http://schemas.openxmlformats.org/markup-compatibility/2006" xmlns:mv="urn:schemas-microsoft-com:mac:vml" xmlns:p="http://schemas.openxmlformats.org/presentationml/2006/main" xmlns:c="http://schemas.openxmlformats.org/drawingml/2006/chart" xmlns:dgm="http://schemas.openxmlformats.org/drawingml/2006/diagram" xmlns:o="urn:schemas-microsoft-com:office:office" xmlns:v="urn:schemas-microsoft-com:vml" xmlns:pvml="urn:schemas-microsoft-com:office:powerpoint" xmlns:com="http://schemas.openxmlformats.org/drawingml/2006/compatibility" xmlns:p14="http://schemas.microsoft.com/office/powerpoint/2010/main" xmlns:p15="http://schemas.microsoft.com/office/powerpoint/2012/main" xmlns:ahyp="http://schemas.microsoft.com/office/drawing/2018/hyperlinkcolor">
+  <p:cSld>
+    <p:spTree>
+      <p:nvGrpSpPr>
         <p:cNvPr id="91" name="Shape 91"/>
         <p:cNvGrpSpPr/>
         <p:nvPr/>
@@ -7539,7 +7773,7 @@
 </p:sld>
 </file>
 
-<file path=ppt/slides/slide11.xml><?xml version="1.0" encoding="utf-8"?>
+<file path=ppt/slides/slide12.xml><?xml version="1.0" encoding="utf-8"?>
 <p:sld xmlns:a="http://schemas.openxmlformats.org/drawingml/2006/main" xmlns:r="http://schemas.openxmlformats.org/officeDocument/2006/relationships" xmlns:mc="http://schemas.openxmlformats.org/markup-compatibility/2006" xmlns:mv="urn:schemas-microsoft-com:mac:vml" xmlns:p="http://schemas.openxmlformats.org/presentationml/2006/main" xmlns:c="http://schemas.openxmlformats.org/drawingml/2006/chart" xmlns:dgm="http://schemas.openxmlformats.org/drawingml/2006/diagram" xmlns:o="urn:schemas-microsoft-com:office:office" xmlns:v="urn:schemas-microsoft-com:vml" xmlns:pvml="urn:schemas-microsoft-com:office:powerpoint" xmlns:com="http://schemas.openxmlformats.org/drawingml/2006/compatibility" xmlns:p14="http://schemas.microsoft.com/office/powerpoint/2010/main" xmlns:p15="http://schemas.microsoft.com/office/powerpoint/2012/main" xmlns:ahyp="http://schemas.microsoft.com/office/drawing/2018/hyperlinkcolor">
   <p:cSld>
     <p:spTree>
@@ -8275,7 +8509,7 @@
 </p:sld>
 </file>
 
-<file path=ppt/slides/slide12.xml><?xml version="1.0" encoding="utf-8"?>
+<file path=ppt/slides/slide13.xml><?xml version="1.0" encoding="utf-8"?>
 <p:sld xmlns:a="http://schemas.openxmlformats.org/drawingml/2006/main" xmlns:r="http://schemas.openxmlformats.org/officeDocument/2006/relationships" xmlns:mc="http://schemas.openxmlformats.org/markup-compatibility/2006" xmlns:mv="urn:schemas-microsoft-com:mac:vml" xmlns:p="http://schemas.openxmlformats.org/presentationml/2006/main" xmlns:c="http://schemas.openxmlformats.org/drawingml/2006/chart" xmlns:dgm="http://schemas.openxmlformats.org/drawingml/2006/diagram" xmlns:o="urn:schemas-microsoft-com:office:office" xmlns:v="urn:schemas-microsoft-com:vml" xmlns:pvml="urn:schemas-microsoft-com:office:powerpoint" xmlns:com="http://schemas.openxmlformats.org/drawingml/2006/compatibility" xmlns:p14="http://schemas.microsoft.com/office/powerpoint/2010/main" xmlns:p15="http://schemas.microsoft.com/office/powerpoint/2012/main" xmlns:ahyp="http://schemas.microsoft.com/office/drawing/2018/hyperlinkcolor">
   <p:cSld>
     <p:spTree>
@@ -8409,7 +8643,7 @@
 </p:sld>
 </file>
 
-<file path=ppt/slides/slide13.xml><?xml version="1.0" encoding="utf-8"?>
+<file path=ppt/slides/slide14.xml><?xml version="1.0" encoding="utf-8"?>
 <p:sld xmlns:a="http://schemas.openxmlformats.org/drawingml/2006/main" xmlns:r="http://schemas.openxmlformats.org/officeDocument/2006/relationships" xmlns:mc="http://schemas.openxmlformats.org/markup-compatibility/2006" xmlns:mv="urn:schemas-microsoft-com:mac:vml" xmlns:p="http://schemas.openxmlformats.org/presentationml/2006/main" xmlns:c="http://schemas.openxmlformats.org/drawingml/2006/chart" xmlns:dgm="http://schemas.openxmlformats.org/drawingml/2006/diagram" xmlns:o="urn:schemas-microsoft-com:office:office" xmlns:v="urn:schemas-microsoft-com:vml" xmlns:pvml="urn:schemas-microsoft-com:office:powerpoint" xmlns:com="http://schemas.openxmlformats.org/drawingml/2006/compatibility" xmlns:p14="http://schemas.microsoft.com/office/powerpoint/2010/main" xmlns:p15="http://schemas.microsoft.com/office/powerpoint/2012/main" xmlns:ahyp="http://schemas.microsoft.com/office/drawing/2018/hyperlinkcolor">
   <p:cSld>
     <p:spTree>
@@ -8502,7 +8736,7 @@
 </p:sld>
 </file>
 
-<file path=ppt/slides/slide14.xml><?xml version="1.0" encoding="utf-8"?>
+<file path=ppt/slides/slide15.xml><?xml version="1.0" encoding="utf-8"?>
 <p:sld xmlns:a="http://schemas.openxmlformats.org/drawingml/2006/main" xmlns:r="http://schemas.openxmlformats.org/officeDocument/2006/relationships" xmlns:mc="http://schemas.openxmlformats.org/markup-compatibility/2006" xmlns:mv="urn:schemas-microsoft-com:mac:vml" xmlns:p="http://schemas.openxmlformats.org/presentationml/2006/main" xmlns:c="http://schemas.openxmlformats.org/drawingml/2006/chart" xmlns:dgm="http://schemas.openxmlformats.org/drawingml/2006/diagram" xmlns:o="urn:schemas-microsoft-com:office:office" xmlns:v="urn:schemas-microsoft-com:vml" xmlns:pvml="urn:schemas-microsoft-com:office:powerpoint" xmlns:com="http://schemas.openxmlformats.org/drawingml/2006/compatibility" xmlns:p14="http://schemas.microsoft.com/office/powerpoint/2010/main" xmlns:p15="http://schemas.microsoft.com/office/powerpoint/2012/main" xmlns:ahyp="http://schemas.microsoft.com/office/drawing/2018/hyperlinkcolor">
   <p:cSld>
     <p:spTree>
@@ -8666,7 +8900,7 @@
 </p:sld>
 </file>
 
-<file path=ppt/slides/slide15.xml><?xml version="1.0" encoding="utf-8"?>
+<file path=ppt/slides/slide16.xml><?xml version="1.0" encoding="utf-8"?>
 <p:sld xmlns:a="http://schemas.openxmlformats.org/drawingml/2006/main" xmlns:r="http://schemas.openxmlformats.org/officeDocument/2006/relationships" xmlns:mc="http://schemas.openxmlformats.org/markup-compatibility/2006" xmlns:mv="urn:schemas-microsoft-com:mac:vml" xmlns:p="http://schemas.openxmlformats.org/presentationml/2006/main" xmlns:c="http://schemas.openxmlformats.org/drawingml/2006/chart" xmlns:dgm="http://schemas.openxmlformats.org/drawingml/2006/diagram" xmlns:o="urn:schemas-microsoft-com:office:office" xmlns:v="urn:schemas-microsoft-com:vml" xmlns:pvml="urn:schemas-microsoft-com:office:powerpoint" xmlns:com="http://schemas.openxmlformats.org/drawingml/2006/compatibility" xmlns:p14="http://schemas.microsoft.com/office/powerpoint/2010/main" xmlns:p15="http://schemas.microsoft.com/office/powerpoint/2012/main" xmlns:ahyp="http://schemas.microsoft.com/office/drawing/2018/hyperlinkcolor">
   <p:cSld>
     <p:spTree>
@@ -8800,7 +9034,7 @@
 </p:sld>
 </file>
 
-<file path=ppt/slides/slide16.xml><?xml version="1.0" encoding="utf-8"?>
+<file path=ppt/slides/slide17.xml><?xml version="1.0" encoding="utf-8"?>
 <p:sld xmlns:a="http://schemas.openxmlformats.org/drawingml/2006/main" xmlns:r="http://schemas.openxmlformats.org/officeDocument/2006/relationships" xmlns:mc="http://schemas.openxmlformats.org/markup-compatibility/2006" xmlns:mv="urn:schemas-microsoft-com:mac:vml" xmlns:p="http://schemas.openxmlformats.org/presentationml/2006/main" xmlns:c="http://schemas.openxmlformats.org/drawingml/2006/chart" xmlns:dgm="http://schemas.openxmlformats.org/drawingml/2006/diagram" xmlns:o="urn:schemas-microsoft-com:office:office" xmlns:v="urn:schemas-microsoft-com:vml" xmlns:pvml="urn:schemas-microsoft-com:office:powerpoint" xmlns:com="http://schemas.openxmlformats.org/drawingml/2006/compatibility" xmlns:p14="http://schemas.microsoft.com/office/powerpoint/2010/main" xmlns:p15="http://schemas.microsoft.com/office/powerpoint/2012/main" xmlns:ahyp="http://schemas.microsoft.com/office/drawing/2018/hyperlinkcolor">
   <p:cSld>
     <p:spTree>
@@ -9033,7 +9267,7 @@
 </p:sld>
 </file>
 
-<file path=ppt/slides/slide17.xml><?xml version="1.0" encoding="utf-8"?>
+<file path=ppt/slides/slide18.xml><?xml version="1.0" encoding="utf-8"?>
 <p:sld xmlns:a="http://schemas.openxmlformats.org/drawingml/2006/main" xmlns:r="http://schemas.openxmlformats.org/officeDocument/2006/relationships" xmlns:mc="http://schemas.openxmlformats.org/markup-compatibility/2006" xmlns:mv="urn:schemas-microsoft-com:mac:vml" xmlns:p="http://schemas.openxmlformats.org/presentationml/2006/main" xmlns:c="http://schemas.openxmlformats.org/drawingml/2006/chart" xmlns:dgm="http://schemas.openxmlformats.org/drawingml/2006/diagram" xmlns:o="urn:schemas-microsoft-com:office:office" xmlns:v="urn:schemas-microsoft-com:vml" xmlns:pvml="urn:schemas-microsoft-com:office:powerpoint" xmlns:com="http://schemas.openxmlformats.org/drawingml/2006/compatibility" xmlns:p14="http://schemas.microsoft.com/office/powerpoint/2010/main" xmlns:p15="http://schemas.microsoft.com/office/powerpoint/2012/main" xmlns:ahyp="http://schemas.microsoft.com/office/drawing/2018/hyperlinkcolor">
   <p:cSld>
     <p:spTree>
@@ -10132,7 +10366,7 @@
 </p:sld>
 </file>
 
-<file path=ppt/slides/slide18.xml><?xml version="1.0" encoding="utf-8"?>
+<file path=ppt/slides/slide19.xml><?xml version="1.0" encoding="utf-8"?>
 <p:sld xmlns:a="http://schemas.openxmlformats.org/drawingml/2006/main" xmlns:r="http://schemas.openxmlformats.org/officeDocument/2006/relationships" xmlns:mc="http://schemas.openxmlformats.org/markup-compatibility/2006" xmlns:mv="urn:schemas-microsoft-com:mac:vml" xmlns:p="http://schemas.openxmlformats.org/presentationml/2006/main" xmlns:c="http://schemas.openxmlformats.org/drawingml/2006/chart" xmlns:dgm="http://schemas.openxmlformats.org/drawingml/2006/diagram" xmlns:o="urn:schemas-microsoft-com:office:office" xmlns:v="urn:schemas-microsoft-com:vml" xmlns:pvml="urn:schemas-microsoft-com:office:powerpoint" xmlns:com="http://schemas.openxmlformats.org/drawingml/2006/compatibility" xmlns:p14="http://schemas.microsoft.com/office/powerpoint/2010/main" xmlns:p15="http://schemas.microsoft.com/office/powerpoint/2012/main" xmlns:ahyp="http://schemas.microsoft.com/office/drawing/2018/hyperlinkcolor">
   <p:cSld>
     <p:spTree>
@@ -10266,7 +10500,7 @@
 </p:sld>
 </file>
 
-<file path=ppt/slides/slide19.xml><?xml version="1.0" encoding="utf-8"?>
+<file path=ppt/slides/slide2.xml><?xml version="1.0" encoding="utf-8"?>
 <p:sld xmlns:a="http://schemas.openxmlformats.org/drawingml/2006/main" xmlns:p="http://schemas.openxmlformats.org/presentationml/2006/main" xmlns:r="http://schemas.openxmlformats.org/officeDocument/2006/relationships">
   <p:cSld>
     <p:spTree>
@@ -10278,8 +10512,10 @@
       <p:grpSpPr/>
       <p:sp>
         <p:nvSpPr>
-          <p:cNvPr id="140" name="Google Shape;140;p23"/>
-          <p:cNvSpPr txBox="1"/>
+          <p:cNvPr id="2" name="Title 1"/>
+          <p:cNvSpPr>
+            <a:spLocks noGrp="1"/>
+          </p:cNvSpPr>
           <p:nvPr>
             <p:ph type="title"/>
           </p:nvPr>
@@ -10289,14 +10525,9 @@
             <a:off x="311700" y="195615"/>
             <a:ext cx="8520600" cy="572700"/>
           </a:xfrm>
-          <a:prstGeom prst="rect">
-            <a:avLst/>
-          </a:prstGeom>
         </p:spPr>
         <p:txBody>
-          <a:bodyPr anchorCtr="0" anchor="t" bIns="91425" lIns="91425" spcFirstLastPara="1" rIns="91425" wrap="square" tIns="91425">
-            <a:normAutofit fontScale="90000"/>
-          </a:bodyPr>
+          <a:bodyPr/>
           <a:lstStyle/>
           <a:p>
             <a:pPr indent="0" lvl="0" marL="0" rtl="0" algn="l">
@@ -10310,696 +10541,7 @@
             </a:pPr>
             <a:r>
               <a:rPr lang="en"/>
-              <a:t>Fixed-Tick Movement</a:t>
-            </a:r>
-            <a:endParaRPr/>
-          </a:p>
-        </p:txBody>
-      </p:sp>
-      <p:sp>
-        <p:nvSpPr>
-          <p:cNvPr id="293" name="Google Shape;293;p45"/>
-          <p:cNvSpPr txBox="1"/>
-          <p:nvPr>
-            <p:ph type="title"/>
-          </p:nvPr>
-        </p:nvSpPr>
-        <p:spPr>
-          <a:xfrm>
-            <a:off x="311700" y="1152475"/>
-            <a:ext cx="3700000" cy="3500000"/>
-          </a:xfrm>
-          <a:prstGeom prst="rect">
-            <a:avLst/>
-          </a:prstGeom>
-        </p:spPr>
-        <p:txBody>
-          <a:bodyPr anchorCtr="0" anchor="t" bIns="91425" lIns="91425" spcFirstLastPara="1" rIns="91425" wrap="square" tIns="91425">
-            <a:normAutofit fontScale="90000"/>
-          </a:bodyPr>
-          <a:lstStyle/>
-          <a:p>
-            <a:pPr indent="-330200" lvl="0" marL="457200" rtl="0" algn="l">
-              <a:buClr>
-                <a:srgbClr val="DEE2E6"/>
-              </a:buClr>
-              <a:spcBef>
-                <a:spcPts val="0"/>
-              </a:spcBef>
-              <a:spcAft>
-                <a:spcPts val="0"/>
-              </a:spcAft>
-              <a:buSzPts val="1600"/>
-              <a:buChar char="●"/>
-            </a:pPr>
-            <a:r>
-              <a:rPr lang="en" sz="1600">
-                <a:solidFill>
-                  <a:srgbClr val="DEE2E6"/>
-                </a:solidFill>
-              </a:rPr>
-              <a:t>A snake jumps one cell at a time, however fast the game runs</a:t>
-            </a:r>
-            <a:endParaRPr/>
-          </a:p>
-          <a:p>
-            <a:pPr indent="-330200" lvl="0" marL="457200" rtl="0" algn="l">
-              <a:buClr>
-                <a:srgbClr val="DEE2E6"/>
-              </a:buClr>
-              <a:spcBef>
-                <a:spcPts val="0"/>
-              </a:spcBef>
-              <a:spcAft>
-                <a:spcPts val="0"/>
-              </a:spcAft>
-              <a:buSzPts val="1600"/>
-              <a:buChar char="●"/>
-            </a:pPr>
-            <a:r>
-              <a:rPr lang="en" sz="1600">
-                <a:solidFill>
-                  <a:srgbClr val="DEE2E6"/>
-                </a:solidFill>
-              </a:rPr>
-              <a:t>An accumulator collects real time</a:t>
-            </a:r>
-            <a:endParaRPr/>
-          </a:p>
-          <a:p>
-            <a:pPr indent="-317500" lvl="1" marL="914400" rtl="0" algn="l">
-              <a:buClr>
-                <a:srgbClr val="6C757D"/>
-              </a:buClr>
-              <a:spcBef>
-                <a:spcPts val="0"/>
-              </a:spcBef>
-              <a:spcAft>
-                <a:spcPts val="0"/>
-              </a:spcAft>
-              <a:buSzPts val="1400"/>
-              <a:buChar char="○"/>
-            </a:pPr>
-            <a:r>
-              <a:rPr lang="en" sz="1400">
-                <a:solidFill>
-                  <a:srgbClr val="6C757D"/>
-                </a:solidFill>
-              </a:rPr>
-              <a:t>Move once for every full tick</a:t>
-            </a:r>
-            <a:endParaRPr/>
-          </a:p>
-          <a:p>
-            <a:pPr indent="-317500" lvl="1" marL="914400" rtl="0" algn="l">
-              <a:buClr>
-                <a:srgbClr val="6C757D"/>
-              </a:buClr>
-              <a:spcBef>
-                <a:spcPts val="0"/>
-              </a:spcBef>
-              <a:spcAft>
-                <a:spcPts val="0"/>
-              </a:spcAft>
-              <a:buSzPts val="1400"/>
-              <a:buChar char="○"/>
-            </a:pPr>
-            <a:r>
-              <a:rPr lang="en" sz="1400">
-                <a:solidFill>
-                  <a:srgbClr val="6C757D"/>
-                </a:solidFill>
-              </a:rPr>
-              <a:t>Subtract, don’t reset: leftover time carries over</a:t>
-            </a:r>
-            <a:endParaRPr/>
-          </a:p>
-          <a:p>
-            <a:pPr indent="-330200" lvl="0" marL="457200" rtl="0" algn="l">
-              <a:buClr>
-                <a:srgbClr val="DEE2E6"/>
-              </a:buClr>
-              <a:spcBef>
-                <a:spcPts val="0"/>
-              </a:spcBef>
-              <a:spcAft>
-                <a:spcPts val="0"/>
-              </a:spcAft>
-              <a:buSzPts val="1600"/>
-              <a:buChar char="●"/>
-            </a:pPr>
-            <a:r>
-              <a:rPr lang="en" sz="1600">
-                <a:solidFill>
-                  <a:srgbClr val="DEE2E6"/>
-                </a:solidFill>
-              </a:rPr>
-              <a:t>Pong’s fixed timestep, in practice</a:t>
-            </a:r>
-            <a:endParaRPr/>
-          </a:p>
-        </p:txBody>
-      </p:sp>
-      <p:sp>
-        <p:nvSpPr>
-          <p:cNvPr id="141" name="Google Shape;141;p23"/>
-          <p:cNvSpPr txBox="1"/>
-          <p:nvPr>
-            <p:ph idx="2" type="body"/>
-          </p:nvPr>
-        </p:nvSpPr>
-        <p:spPr>
-          <a:xfrm>
-            <a:off x="4150000" y="1152475"/>
-            <a:ext cx="4750000" cy="3600000"/>
-          </a:xfrm>
-          <a:prstGeom prst="rect">
-            <a:avLst/>
-          </a:prstGeom>
-        </p:spPr>
-        <p:txBody>
-          <a:bodyPr anchorCtr="0" anchor="t" bIns="91425" lIns="91425" spcFirstLastPara="1" rIns="91425" wrap="square" tIns="91425">
-            <a:noAutofit/>
-          </a:bodyPr>
-          <a:lstStyle/>
-          <a:p>
-            <a:pPr indent="0" lvl="0" marL="0" rtl="0" algn="l">
-              <a:lnSpc>
-                <a:spcPct val="115000"/>
-              </a:lnSpc>
-              <a:spcBef>
-                <a:spcPts val="0"/>
-              </a:spcBef>
-              <a:spcAft>
-                <a:spcPts val="0"/>
-              </a:spcAft>
-              <a:buNone/>
-            </a:pPr>
-            <a:r>
-              <a:rPr lang="en" sz="1000">
-                <a:highlight>
-                  <a:schemeClr val="dk2"/>
-                </a:highlight>
-                <a:latin typeface="Consolas"/>
-                <a:ea typeface="Consolas"/>
-                <a:cs typeface="Consolas"/>
-                <a:sym typeface="Consolas"/>
-              </a:rPr>
-              <a:t>TimeSpan TickDuration =</a:t>
-            </a:r>
-            <a:endParaRPr sz="1000">
-              <a:solidFill>
-                <a:srgbClr val="CCCCCC"/>
-              </a:solidFill>
-              <a:highlight>
-                <a:schemeClr val="dk2"/>
-              </a:highlight>
-              <a:latin typeface="Consolas"/>
-              <a:ea typeface="Consolas"/>
-              <a:cs typeface="Consolas"/>
-              <a:sym typeface="Consolas"/>
-            </a:endParaRPr>
-          </a:p>
-          <a:p>
-            <a:pPr indent="0" lvl="0" marL="0" rtl="0" algn="l">
-              <a:lnSpc>
-                <a:spcPct val="115000"/>
-              </a:lnSpc>
-              <a:spcBef>
-                <a:spcPts val="0"/>
-              </a:spcBef>
-              <a:spcAft>
-                <a:spcPts val="0"/>
-              </a:spcAft>
-              <a:buNone/>
-            </a:pPr>
-            <a:r>
-              <a:rPr lang="en" sz="1000">
-                <a:highlight>
-                  <a:schemeClr val="dk2"/>
-                </a:highlight>
-                <a:latin typeface="Consolas"/>
-                <a:ea typeface="Consolas"/>
-                <a:cs typeface="Consolas"/>
-                <a:sym typeface="Consolas"/>
-              </a:rPr>
-              <a:t>    TimeSpan.FromMilliseconds(200);</a:t>
-            </a:r>
-            <a:endParaRPr sz="1000">
-              <a:solidFill>
-                <a:srgbClr val="CCCCCC"/>
-              </a:solidFill>
-              <a:highlight>
-                <a:schemeClr val="dk2"/>
-              </a:highlight>
-              <a:latin typeface="Consolas"/>
-              <a:ea typeface="Consolas"/>
-              <a:cs typeface="Consolas"/>
-              <a:sym typeface="Consolas"/>
-            </a:endParaRPr>
-          </a:p>
-          <a:p>
-            <a:pPr indent="0" lvl="0" marL="0" rtl="0" algn="l">
-              <a:lnSpc>
-                <a:spcPct val="115000"/>
-              </a:lnSpc>
-              <a:spcBef>
-                <a:spcPts val="0"/>
-              </a:spcBef>
-              <a:spcAft>
-                <a:spcPts val="0"/>
-              </a:spcAft>
-              <a:buNone/>
-            </a:pPr>
-            <a:r>
-              <a:rPr lang="en" sz="1000">
-                <a:highlight>
-                  <a:schemeClr val="dk2"/>
-                </a:highlight>
-                <a:latin typeface="Consolas"/>
-                <a:ea typeface="Consolas"/>
-                <a:cs typeface="Consolas"/>
-                <a:sym typeface="Consolas"/>
-              </a:rPr>
-              <a:t/>
-            </a:r>
-            <a:endParaRPr sz="1000">
-              <a:solidFill>
-                <a:srgbClr val="CCCCCC"/>
-              </a:solidFill>
-              <a:highlight>
-                <a:schemeClr val="dk2"/>
-              </a:highlight>
-              <a:latin typeface="Consolas"/>
-              <a:ea typeface="Consolas"/>
-              <a:cs typeface="Consolas"/>
-              <a:sym typeface="Consolas"/>
-            </a:endParaRPr>
-          </a:p>
-          <a:p>
-            <a:pPr indent="0" lvl="0" marL="0" rtl="0" algn="l">
-              <a:lnSpc>
-                <a:spcPct val="115000"/>
-              </a:lnSpc>
-              <a:spcBef>
-                <a:spcPts val="0"/>
-              </a:spcBef>
-              <a:spcAft>
-                <a:spcPts val="0"/>
-              </a:spcAft>
-              <a:buNone/>
-            </a:pPr>
-            <a:r>
-              <a:rPr lang="en" sz="1000">
-                <a:highlight>
-                  <a:schemeClr val="dk2"/>
-                </a:highlight>
-                <a:latin typeface="Consolas"/>
-                <a:ea typeface="Consolas"/>
-                <a:cs typeface="Consolas"/>
-                <a:sym typeface="Consolas"/>
-              </a:rPr>
-              <a:t>public void Update(GameTime gameTime)</a:t>
-            </a:r>
-            <a:endParaRPr sz="1000">
-              <a:solidFill>
-                <a:srgbClr val="CCCCCC"/>
-              </a:solidFill>
-              <a:highlight>
-                <a:schemeClr val="dk2"/>
-              </a:highlight>
-              <a:latin typeface="Consolas"/>
-              <a:ea typeface="Consolas"/>
-              <a:cs typeface="Consolas"/>
-              <a:sym typeface="Consolas"/>
-            </a:endParaRPr>
-          </a:p>
-          <a:p>
-            <a:pPr indent="0" lvl="0" marL="0" rtl="0" algn="l">
-              <a:lnSpc>
-                <a:spcPct val="115000"/>
-              </a:lnSpc>
-              <a:spcBef>
-                <a:spcPts val="0"/>
-              </a:spcBef>
-              <a:spcAft>
-                <a:spcPts val="0"/>
-              </a:spcAft>
-              <a:buNone/>
-            </a:pPr>
-            <a:r>
-              <a:rPr lang="en" sz="1000">
-                <a:highlight>
-                  <a:schemeClr val="dk2"/>
-                </a:highlight>
-                <a:latin typeface="Consolas"/>
-                <a:ea typeface="Consolas"/>
-                <a:cs typeface="Consolas"/>
-                <a:sym typeface="Consolas"/>
-              </a:rPr>
-              <a:t>{</a:t>
-            </a:r>
-            <a:endParaRPr sz="1000">
-              <a:solidFill>
-                <a:srgbClr val="CCCCCC"/>
-              </a:solidFill>
-              <a:highlight>
-                <a:schemeClr val="dk2"/>
-              </a:highlight>
-              <a:latin typeface="Consolas"/>
-              <a:ea typeface="Consolas"/>
-              <a:cs typeface="Consolas"/>
-              <a:sym typeface="Consolas"/>
-            </a:endParaRPr>
-          </a:p>
-          <a:p>
-            <a:pPr indent="0" lvl="0" marL="0" rtl="0" algn="l">
-              <a:lnSpc>
-                <a:spcPct val="115000"/>
-              </a:lnSpc>
-              <a:spcBef>
-                <a:spcPts val="0"/>
-              </a:spcBef>
-              <a:spcAft>
-                <a:spcPts val="0"/>
-              </a:spcAft>
-              <a:buNone/>
-            </a:pPr>
-            <a:r>
-              <a:rPr lang="en" sz="1000">
-                <a:highlight>
-                  <a:schemeClr val="dk2"/>
-                </a:highlight>
-                <a:latin typeface="Consolas"/>
-                <a:ea typeface="Consolas"/>
-                <a:cs typeface="Consolas"/>
-                <a:sym typeface="Consolas"/>
-              </a:rPr>
-              <a:t>    _elapsed += gameTime.ElapsedGameTime;</a:t>
-            </a:r>
-            <a:endParaRPr sz="1000">
-              <a:solidFill>
-                <a:srgbClr val="CCCCCC"/>
-              </a:solidFill>
-              <a:highlight>
-                <a:schemeClr val="dk2"/>
-              </a:highlight>
-              <a:latin typeface="Consolas"/>
-              <a:ea typeface="Consolas"/>
-              <a:cs typeface="Consolas"/>
-              <a:sym typeface="Consolas"/>
-            </a:endParaRPr>
-          </a:p>
-          <a:p>
-            <a:pPr indent="0" lvl="0" marL="0" rtl="0" algn="l">
-              <a:lnSpc>
-                <a:spcPct val="115000"/>
-              </a:lnSpc>
-              <a:spcBef>
-                <a:spcPts val="0"/>
-              </a:spcBef>
-              <a:spcAft>
-                <a:spcPts val="0"/>
-              </a:spcAft>
-              <a:buNone/>
-            </a:pPr>
-            <a:r>
-              <a:rPr lang="en" sz="1000">
-                <a:highlight>
-                  <a:schemeClr val="dk2"/>
-                </a:highlight>
-                <a:latin typeface="Consolas"/>
-                <a:ea typeface="Consolas"/>
-                <a:cs typeface="Consolas"/>
-                <a:sym typeface="Consolas"/>
-              </a:rPr>
-              <a:t>    while (_elapsed &gt;= TickDuration)</a:t>
-            </a:r>
-            <a:endParaRPr sz="1000">
-              <a:solidFill>
-                <a:srgbClr val="CCCCCC"/>
-              </a:solidFill>
-              <a:highlight>
-                <a:schemeClr val="dk2"/>
-              </a:highlight>
-              <a:latin typeface="Consolas"/>
-              <a:ea typeface="Consolas"/>
-              <a:cs typeface="Consolas"/>
-              <a:sym typeface="Consolas"/>
-            </a:endParaRPr>
-          </a:p>
-          <a:p>
-            <a:pPr indent="0" lvl="0" marL="0" rtl="0" algn="l">
-              <a:lnSpc>
-                <a:spcPct val="115000"/>
-              </a:lnSpc>
-              <a:spcBef>
-                <a:spcPts val="0"/>
-              </a:spcBef>
-              <a:spcAft>
-                <a:spcPts val="0"/>
-              </a:spcAft>
-              <a:buNone/>
-            </a:pPr>
-            <a:r>
-              <a:rPr lang="en" sz="1000">
-                <a:highlight>
-                  <a:schemeClr val="dk2"/>
-                </a:highlight>
-                <a:latin typeface="Consolas"/>
-                <a:ea typeface="Consolas"/>
-                <a:cs typeface="Consolas"/>
-                <a:sym typeface="Consolas"/>
-              </a:rPr>
-              <a:t>    {</a:t>
-            </a:r>
-            <a:endParaRPr sz="1000">
-              <a:solidFill>
-                <a:srgbClr val="CCCCCC"/>
-              </a:solidFill>
-              <a:highlight>
-                <a:schemeClr val="dk2"/>
-              </a:highlight>
-              <a:latin typeface="Consolas"/>
-              <a:ea typeface="Consolas"/>
-              <a:cs typeface="Consolas"/>
-              <a:sym typeface="Consolas"/>
-            </a:endParaRPr>
-          </a:p>
-          <a:p>
-            <a:pPr indent="0" lvl="0" marL="0" rtl="0" algn="l">
-              <a:lnSpc>
-                <a:spcPct val="115000"/>
-              </a:lnSpc>
-              <a:spcBef>
-                <a:spcPts val="0"/>
-              </a:spcBef>
-              <a:spcAft>
-                <a:spcPts val="0"/>
-              </a:spcAft>
-              <a:buNone/>
-            </a:pPr>
-            <a:r>
-              <a:rPr lang="en" sz="1000">
-                <a:highlight>
-                  <a:schemeClr val="dk2"/>
-                </a:highlight>
-                <a:latin typeface="Consolas"/>
-                <a:ea typeface="Consolas"/>
-                <a:cs typeface="Consolas"/>
-                <a:sym typeface="Consolas"/>
-              </a:rPr>
-              <a:t>        _elapsed -= TickDuration;</a:t>
-            </a:r>
-            <a:endParaRPr sz="1000">
-              <a:solidFill>
-                <a:srgbClr val="CCCCCC"/>
-              </a:solidFill>
-              <a:highlight>
-                <a:schemeClr val="dk2"/>
-              </a:highlight>
-              <a:latin typeface="Consolas"/>
-              <a:ea typeface="Consolas"/>
-              <a:cs typeface="Consolas"/>
-              <a:sym typeface="Consolas"/>
-            </a:endParaRPr>
-          </a:p>
-          <a:p>
-            <a:pPr indent="0" lvl="0" marL="0" rtl="0" algn="l">
-              <a:lnSpc>
-                <a:spcPct val="115000"/>
-              </a:lnSpc>
-              <a:spcBef>
-                <a:spcPts val="0"/>
-              </a:spcBef>
-              <a:spcAft>
-                <a:spcPts val="0"/>
-              </a:spcAft>
-              <a:buNone/>
-            </a:pPr>
-            <a:r>
-              <a:rPr lang="en" sz="1000">
-                <a:highlight>
-                  <a:schemeClr val="dk2"/>
-                </a:highlight>
-                <a:latin typeface="Consolas"/>
-                <a:ea typeface="Consolas"/>
-                <a:cs typeface="Consolas"/>
-                <a:sym typeface="Consolas"/>
-              </a:rPr>
-              <a:t>        Move();</a:t>
-            </a:r>
-            <a:endParaRPr sz="1000">
-              <a:solidFill>
-                <a:srgbClr val="CCCCCC"/>
-              </a:solidFill>
-              <a:highlight>
-                <a:schemeClr val="dk2"/>
-              </a:highlight>
-              <a:latin typeface="Consolas"/>
-              <a:ea typeface="Consolas"/>
-              <a:cs typeface="Consolas"/>
-              <a:sym typeface="Consolas"/>
-            </a:endParaRPr>
-          </a:p>
-          <a:p>
-            <a:pPr indent="0" lvl="0" marL="0" rtl="0" algn="l">
-              <a:lnSpc>
-                <a:spcPct val="115000"/>
-              </a:lnSpc>
-              <a:spcBef>
-                <a:spcPts val="0"/>
-              </a:spcBef>
-              <a:spcAft>
-                <a:spcPts val="0"/>
-              </a:spcAft>
-              <a:buNone/>
-            </a:pPr>
-            <a:r>
-              <a:rPr lang="en" sz="1000">
-                <a:highlight>
-                  <a:schemeClr val="dk2"/>
-                </a:highlight>
-                <a:latin typeface="Consolas"/>
-                <a:ea typeface="Consolas"/>
-                <a:cs typeface="Consolas"/>
-                <a:sym typeface="Consolas"/>
-              </a:rPr>
-              <a:t>    }</a:t>
-            </a:r>
-            <a:endParaRPr sz="1000">
-              <a:solidFill>
-                <a:srgbClr val="CCCCCC"/>
-              </a:solidFill>
-              <a:highlight>
-                <a:schemeClr val="dk2"/>
-              </a:highlight>
-              <a:latin typeface="Consolas"/>
-              <a:ea typeface="Consolas"/>
-              <a:cs typeface="Consolas"/>
-              <a:sym typeface="Consolas"/>
-            </a:endParaRPr>
-          </a:p>
-          <a:p>
-            <a:pPr indent="0" lvl="0" marL="0" rtl="0" algn="l">
-              <a:lnSpc>
-                <a:spcPct val="115000"/>
-              </a:lnSpc>
-              <a:spcBef>
-                <a:spcPts val="0"/>
-              </a:spcBef>
-              <a:spcAft>
-                <a:spcPts val="0"/>
-              </a:spcAft>
-              <a:buNone/>
-            </a:pPr>
-            <a:r>
-              <a:rPr lang="en" sz="1000">
-                <a:highlight>
-                  <a:schemeClr val="dk2"/>
-                </a:highlight>
-                <a:latin typeface="Consolas"/>
-                <a:ea typeface="Consolas"/>
-                <a:cs typeface="Consolas"/>
-                <a:sym typeface="Consolas"/>
-              </a:rPr>
-              <a:t>}</a:t>
-            </a:r>
-            <a:endParaRPr sz="1000">
-              <a:solidFill>
-                <a:srgbClr val="CCCCCC"/>
-              </a:solidFill>
-              <a:highlight>
-                <a:schemeClr val="dk2"/>
-              </a:highlight>
-              <a:latin typeface="Consolas"/>
-              <a:ea typeface="Consolas"/>
-              <a:cs typeface="Consolas"/>
-              <a:sym typeface="Consolas"/>
-            </a:endParaRPr>
-          </a:p>
-        </p:txBody>
-      </p:sp>
-    </p:spTree>
-  </p:cSld>
-  <p:clrMapOvr>
-    <a:masterClrMapping/>
-  </p:clrMapOvr>
-</p:sld>
-</file>
-
-<file path=ppt/slides/slide2.xml><?xml version="1.0" encoding="utf-8"?>
-<p:sld xmlns:a="http://schemas.openxmlformats.org/drawingml/2006/main" xmlns:r="http://schemas.openxmlformats.org/officeDocument/2006/relationships" xmlns:mc="http://schemas.openxmlformats.org/markup-compatibility/2006" xmlns:mv="urn:schemas-microsoft-com:mac:vml" xmlns:p="http://schemas.openxmlformats.org/presentationml/2006/main" xmlns:c="http://schemas.openxmlformats.org/drawingml/2006/chart" xmlns:dgm="http://schemas.openxmlformats.org/drawingml/2006/diagram" xmlns:o="urn:schemas-microsoft-com:office:office" xmlns:v="urn:schemas-microsoft-com:vml" xmlns:pvml="urn:schemas-microsoft-com:office:powerpoint" xmlns:com="http://schemas.openxmlformats.org/drawingml/2006/compatibility" xmlns:p14="http://schemas.microsoft.com/office/powerpoint/2010/main" xmlns:p15="http://schemas.microsoft.com/office/powerpoint/2012/main" xmlns:ahyp="http://schemas.microsoft.com/office/drawing/2018/hyperlinkcolor">
-  <p:cSld>
-    <p:spTree>
-      <p:nvGrpSpPr>
-        <p:cNvPr id="44" name="Shape 44"/>
-        <p:cNvGrpSpPr/>
-        <p:nvPr/>
-      </p:nvGrpSpPr>
-      <p:grpSpPr>
-        <a:xfrm>
-          <a:off x="0" y="0"/>
-          <a:ext cx="0" cy="0"/>
-          <a:chOff x="0" y="0"/>
-          <a:chExt cx="0" cy="0"/>
-        </a:xfrm>
-      </p:grpSpPr>
-      <p:sp>
-        <p:nvSpPr>
-          <p:cNvPr id="45" name="Google Shape;45;p10"/>
-          <p:cNvSpPr txBox="1"/>
-          <p:nvPr>
-            <p:ph type="title"/>
-          </p:nvPr>
-        </p:nvSpPr>
-        <p:spPr>
-          <a:xfrm>
-            <a:off x="311700" y="195615"/>
-            <a:ext cx="8520600" cy="572700"/>
-          </a:xfrm>
-          <a:prstGeom prst="rect">
-            <a:avLst/>
-          </a:prstGeom>
-        </p:spPr>
-        <p:txBody>
-          <a:bodyPr anchorCtr="0" anchor="t" bIns="91425" lIns="91425" spcFirstLastPara="1" rIns="91425" wrap="square" tIns="91425">
-            <a:normAutofit fontScale="90000"/>
-          </a:bodyPr>
-          <a:lstStyle/>
-          <a:p>
-            <a:pPr indent="0" lvl="0" marL="0" rtl="0" algn="l">
-              <a:spcBef>
-                <a:spcPts val="0"/>
-              </a:spcBef>
-              <a:spcAft>
-                <a:spcPts val="0"/>
-              </a:spcAft>
-              <a:buNone/>
-            </a:pPr>
-            <a:r>
-              <a:rPr lang="en"/>
-              <a:t>Today’s Goal</a:t>
+              <a:t>Snake</a:t>
             </a:r>
             <a:endParaRPr/>
           </a:p>
@@ -11007,28 +10549,62 @@
       </p:sp>
       <p:pic>
         <p:nvPicPr>
-          <p:cNvPr id="46" name="Picture 46" descr="snake9.png"/>
+          <p:cNvPr id="3" name="Picture 2" descr="snake.gif"/>
           <p:cNvPicPr>
             <a:picLocks noChangeAspect="1"/>
           </p:cNvPicPr>
           <p:nvPr/>
         </p:nvPicPr>
         <p:blipFill>
-          <a:blip r:embed="rId4"/>
+          <a:blip r:embed="rId2"/>
           <a:stretch>
             <a:fillRect/>
           </a:stretch>
         </p:blipFill>
         <p:spPr>
           <a:xfrm>
-            <a:off x="1846087" y="1626274"/>
-            <a:ext cx="5451825" cy="3066651"/>
+            <a:off x="2743200" y="960120"/>
+            <a:ext cx="3657600" cy="3657600"/>
           </a:xfrm>
           <a:prstGeom prst="rect">
             <a:avLst/>
           </a:prstGeom>
         </p:spPr>
       </p:pic>
+      <p:sp>
+        <p:nvSpPr>
+          <p:cNvPr id="4" name="TextBox 3"/>
+          <p:cNvSpPr txBox="1"/>
+          <p:nvPr/>
+        </p:nvSpPr>
+        <p:spPr>
+          <a:xfrm>
+            <a:off x="457200" y="4736592"/>
+            <a:ext cx="8229600" cy="274320"/>
+          </a:xfrm>
+          <a:prstGeom prst="rect">
+            <a:avLst/>
+          </a:prstGeom>
+          <a:noFill/>
+        </p:spPr>
+        <p:txBody>
+          <a:bodyPr wrap="square">
+            <a:spAutoFit/>
+          </a:bodyPr>
+          <a:lstStyle/>
+          <a:p>
+            <a:pPr algn="ctr"/>
+            <a:r>
+              <a:rPr sz="900" b="0" i="0">
+                <a:solidFill>
+                  <a:srgbClr val="9AA3AB"/>
+                </a:solidFill>
+              </a:rPr>
+              <a:t>Snake goes back to Blockade (Gremlin, 1976). Image: Ustone07, CC BY-SA 3.0, via Wikimedia Commons.</a:t>
+            </a:r>
+          </a:p>
+        </p:txBody>
+      </p:sp>
     </p:spTree>
   </p:cSld>
   <p:clrMapOvr>
@@ -11081,7 +10657,7 @@
             </a:pPr>
             <a:r>
               <a:rPr lang="en"/>
-              <a:t>Input as Actions</a:t>
+              <a:t>Fixed-Tick Movement</a:t>
             </a:r>
             <a:endParaRPr/>
           </a:p>
@@ -11129,7 +10705,31 @@
                   <a:srgbClr val="DEE2E6"/>
                 </a:solidFill>
               </a:rPr>
-              <a:t>Snake5 reads the keys directly</a:t>
+              <a:t>A snake jumps one cell at a time, however fast the game runs</a:t>
+            </a:r>
+            <a:endParaRPr/>
+          </a:p>
+          <a:p>
+            <a:pPr indent="-330200" lvl="0" marL="457200" rtl="0" algn="l">
+              <a:buClr>
+                <a:srgbClr val="DEE2E6"/>
+              </a:buClr>
+              <a:spcBef>
+                <a:spcPts val="0"/>
+              </a:spcBef>
+              <a:spcAft>
+                <a:spcPts val="0"/>
+              </a:spcAft>
+              <a:buSzPts val="1600"/>
+              <a:buChar char="●"/>
+            </a:pPr>
+            <a:r>
+              <a:rPr lang="en" sz="1600">
+                <a:solidFill>
+                  <a:srgbClr val="DEE2E6"/>
+                </a:solidFill>
+              </a:rPr>
+              <a:t>An accumulator collects real time</a:t>
             </a:r>
             <a:endParaRPr/>
           </a:p>
@@ -11153,7 +10753,31 @@
                   <a:srgbClr val="6C757D"/>
                 </a:solidFill>
               </a:rPr>
-              <a:t>Keys are hardwired to what they do</a:t>
+              <a:t>Move once for every full tick</a:t>
+            </a:r>
+            <a:endParaRPr/>
+          </a:p>
+          <a:p>
+            <a:pPr indent="-317500" lvl="1" marL="914400" rtl="0" algn="l">
+              <a:buClr>
+                <a:srgbClr val="6C757D"/>
+              </a:buClr>
+              <a:spcBef>
+                <a:spcPts val="0"/>
+              </a:spcBef>
+              <a:spcAft>
+                <a:spcPts val="0"/>
+              </a:spcAft>
+              <a:buSzPts val="1400"/>
+              <a:buChar char="○"/>
+            </a:pPr>
+            <a:r>
+              <a:rPr lang="en" sz="1400">
+                <a:solidFill>
+                  <a:srgbClr val="6C757D"/>
+                </a:solidFill>
+              </a:rPr>
+              <a:t>Subtract, don’t reset: leftover time carries over</a:t>
             </a:r>
             <a:endParaRPr/>
           </a:p>
@@ -11177,79 +10801,7 @@
                   <a:srgbClr val="DEE2E6"/>
                 </a:solidFill>
               </a:rPr>
-              <a:t>A GameController maps keys to actions</a:t>
-            </a:r>
-            <a:endParaRPr/>
-          </a:p>
-          <a:p>
-            <a:pPr indent="-317500" lvl="1" marL="914400" rtl="0" algn="l">
-              <a:buClr>
-                <a:srgbClr val="6C757D"/>
-              </a:buClr>
-              <a:spcBef>
-                <a:spcPts val="0"/>
-              </a:spcBef>
-              <a:spcAft>
-                <a:spcPts val="0"/>
-              </a:spcAft>
-              <a:buSzPts val="1400"/>
-              <a:buChar char="○"/>
-            </a:pPr>
-            <a:r>
-              <a:rPr lang="en" sz="1400">
-                <a:solidFill>
-                  <a:srgbClr val="6C757D"/>
-                </a:solidFill>
-              </a:rPr>
-              <a:t>The game asks for “up”, never for W</a:t>
-            </a:r>
-            <a:endParaRPr/>
-          </a:p>
-          <a:p>
-            <a:pPr indent="-317500" lvl="1" marL="914400" rtl="0" algn="l">
-              <a:buClr>
-                <a:srgbClr val="6C757D"/>
-              </a:buClr>
-              <a:spcBef>
-                <a:spcPts val="0"/>
-              </a:spcBef>
-              <a:spcAft>
-                <a:spcPts val="0"/>
-              </a:spcAft>
-              <a:buSzPts val="1400"/>
-              <a:buChar char="○"/>
-            </a:pPr>
-            <a:r>
-              <a:rPr lang="en" sz="1400">
-                <a:solidFill>
-                  <a:srgbClr val="6C757D"/>
-                </a:solidFill>
-              </a:rPr>
-              <a:t>The controls live in one place</a:t>
-            </a:r>
-            <a:endParaRPr/>
-          </a:p>
-          <a:p>
-            <a:pPr indent="-330200" lvl="0" marL="457200" rtl="0" algn="l">
-              <a:buClr>
-                <a:srgbClr val="DEE2E6"/>
-              </a:buClr>
-              <a:spcBef>
-                <a:spcPts val="0"/>
-              </a:spcBef>
-              <a:spcAft>
-                <a:spcPts val="0"/>
-              </a:spcAft>
-              <a:buSzPts val="1600"/>
-              <a:buChar char="●"/>
-            </a:pPr>
-            <a:r>
-              <a:rPr lang="en" sz="1600">
-                <a:solidFill>
-                  <a:srgbClr val="DEE2E6"/>
-                </a:solidFill>
-              </a:rPr>
-              <a:t>Sokoban goes one step further: actions become objects</a:t>
+              <a:t>Pong’s fixed timestep, in practice</a:t>
             </a:r>
             <a:endParaRPr/>
           </a:p>
@@ -11300,7 +10852,7 @@
                 <a:cs typeface="Consolas"/>
                 <a:sym typeface="Consolas"/>
               </a:rPr>
-              <a:t>public static class GameController</a:t>
+              <a:t>TimeSpan TickDuration =</a:t>
             </a:r>
             <a:endParaRPr sz="1000">
               <a:solidFill>
@@ -11338,7 +10890,7 @@
                 <a:cs typeface="Consolas"/>
                 <a:sym typeface="Consolas"/>
               </a:rPr>
-              <a:t>{</a:t>
+              <a:t>    TimeSpan.FromMilliseconds(200);</a:t>
             </a:r>
             <a:endParaRPr sz="1000">
               <a:solidFill>
@@ -11376,7 +10928,7 @@
                 <a:cs typeface="Consolas"/>
                 <a:sym typeface="Consolas"/>
               </a:rPr>
-              <a:t>    public static bool Up =&gt;</a:t>
+              <a:t/>
             </a:r>
             <a:endParaRPr sz="1000">
               <a:solidFill>
@@ -11414,7 +10966,7 @@
                 <a:cs typeface="Consolas"/>
                 <a:sym typeface="Consolas"/>
               </a:rPr>
-              <a:t>        WasPressed(Keys.W) ||</a:t>
+              <a:t>public void Update(GameTime gameTime)</a:t>
             </a:r>
             <a:endParaRPr sz="1000">
               <a:solidFill>
@@ -11452,7 +11004,7 @@
                 <a:cs typeface="Consolas"/>
                 <a:sym typeface="Consolas"/>
               </a:rPr>
-              <a:t>        WasPressed(Keys.Up);</a:t>
+              <a:t>{</a:t>
             </a:r>
             <a:endParaRPr sz="1000">
               <a:solidFill>
@@ -11490,7 +11042,7 @@
                 <a:cs typeface="Consolas"/>
                 <a:sym typeface="Consolas"/>
               </a:rPr>
-              <a:t>    // Down, Left, Right...</a:t>
+              <a:t>    _elapsed += gameTime.ElapsedGameTime;</a:t>
             </a:r>
             <a:endParaRPr sz="1000">
               <a:solidFill>
@@ -11528,7 +11080,7 @@
                 <a:cs typeface="Consolas"/>
                 <a:sym typeface="Consolas"/>
               </a:rPr>
-              <a:t>}</a:t>
+              <a:t>    while (_elapsed &gt;= TickDuration)</a:t>
             </a:r>
             <a:endParaRPr sz="1000">
               <a:solidFill>
@@ -11566,7 +11118,7 @@
                 <a:cs typeface="Consolas"/>
                 <a:sym typeface="Consolas"/>
               </a:rPr>
-              <a:t/>
+              <a:t>    {</a:t>
             </a:r>
             <a:endParaRPr sz="1000">
               <a:solidFill>
@@ -11604,7 +11156,7 @@
                 <a:cs typeface="Consolas"/>
                 <a:sym typeface="Consolas"/>
               </a:rPr>
-              <a:t>// In the game</a:t>
+              <a:t>        _elapsed -= TickDuration;</a:t>
             </a:r>
             <a:endParaRPr sz="1000">
               <a:solidFill>
@@ -11642,7 +11194,7 @@
                 <a:cs typeface="Consolas"/>
                 <a:sym typeface="Consolas"/>
               </a:rPr>
-              <a:t>if (GameController.Up)</a:t>
+              <a:t>        Move();</a:t>
             </a:r>
             <a:endParaRPr sz="1000">
               <a:solidFill>
@@ -11680,7 +11232,7 @@
                 <a:cs typeface="Consolas"/>
                 <a:sym typeface="Consolas"/>
               </a:rPr>
-              <a:t>    _snake.Turn(Direction.Up);</a:t>
+              <a:t>    }</a:t>
             </a:r>
             <a:endParaRPr sz="1000">
               <a:solidFill>
@@ -11695,6 +11247,44 @@
               <a:sym typeface="Consolas"/>
             </a:endParaRPr>
           </a:p>
+          <a:p>
+            <a:pPr indent="0" lvl="0" marL="0" rtl="0" algn="l">
+              <a:lnSpc>
+                <a:spcPct val="115000"/>
+              </a:lnSpc>
+              <a:spcBef>
+                <a:spcPts val="0"/>
+              </a:spcBef>
+              <a:spcAft>
+                <a:spcPts val="0"/>
+              </a:spcAft>
+              <a:buNone/>
+            </a:pPr>
+            <a:r>
+              <a:rPr lang="en" sz="1000">
+                <a:highlight>
+                  <a:schemeClr val="dk2"/>
+                </a:highlight>
+                <a:latin typeface="Consolas"/>
+                <a:ea typeface="Consolas"/>
+                <a:cs typeface="Consolas"/>
+                <a:sym typeface="Consolas"/>
+              </a:rPr>
+              <a:t>}</a:t>
+            </a:r>
+            <a:endParaRPr sz="1000">
+              <a:solidFill>
+                <a:srgbClr val="CCCCCC"/>
+              </a:solidFill>
+              <a:highlight>
+                <a:schemeClr val="dk2"/>
+              </a:highlight>
+              <a:latin typeface="Consolas"/>
+              <a:ea typeface="Consolas"/>
+              <a:cs typeface="Consolas"/>
+              <a:sym typeface="Consolas"/>
+            </a:endParaRPr>
+          </a:p>
         </p:txBody>
       </p:sp>
     </p:spTree>
@@ -11706,6 +11296,674 @@
 </file>
 
 <file path=ppt/slides/slide21.xml><?xml version="1.0" encoding="utf-8"?>
+<p:sld xmlns:a="http://schemas.openxmlformats.org/drawingml/2006/main" xmlns:p="http://schemas.openxmlformats.org/presentationml/2006/main" xmlns:r="http://schemas.openxmlformats.org/officeDocument/2006/relationships">
+  <p:cSld>
+    <p:spTree>
+      <p:nvGrpSpPr>
+        <p:cNvPr id="1" name=""/>
+        <p:cNvGrpSpPr/>
+        <p:nvPr/>
+      </p:nvGrpSpPr>
+      <p:grpSpPr/>
+      <p:sp>
+        <p:nvSpPr>
+          <p:cNvPr id="140" name="Google Shape;140;p23"/>
+          <p:cNvSpPr txBox="1"/>
+          <p:nvPr>
+            <p:ph type="title"/>
+          </p:nvPr>
+        </p:nvSpPr>
+        <p:spPr>
+          <a:xfrm>
+            <a:off x="311700" y="195615"/>
+            <a:ext cx="8520600" cy="572700"/>
+          </a:xfrm>
+          <a:prstGeom prst="rect">
+            <a:avLst/>
+          </a:prstGeom>
+        </p:spPr>
+        <p:txBody>
+          <a:bodyPr anchorCtr="0" anchor="t" bIns="91425" lIns="91425" spcFirstLastPara="1" rIns="91425" wrap="square" tIns="91425">
+            <a:normAutofit fontScale="90000"/>
+          </a:bodyPr>
+          <a:lstStyle/>
+          <a:p>
+            <a:pPr indent="0" lvl="0" marL="0" rtl="0" algn="l">
+              <a:spcBef>
+                <a:spcPts val="0"/>
+              </a:spcBef>
+              <a:spcAft>
+                <a:spcPts val="0"/>
+              </a:spcAft>
+              <a:buNone/>
+            </a:pPr>
+            <a:r>
+              <a:rPr lang="en"/>
+              <a:t>Input as Actions</a:t>
+            </a:r>
+            <a:endParaRPr/>
+          </a:p>
+        </p:txBody>
+      </p:sp>
+      <p:sp>
+        <p:nvSpPr>
+          <p:cNvPr id="293" name="Google Shape;293;p45"/>
+          <p:cNvSpPr txBox="1"/>
+          <p:nvPr>
+            <p:ph type="title"/>
+          </p:nvPr>
+        </p:nvSpPr>
+        <p:spPr>
+          <a:xfrm>
+            <a:off x="311700" y="1152475"/>
+            <a:ext cx="3700000" cy="3500000"/>
+          </a:xfrm>
+          <a:prstGeom prst="rect">
+            <a:avLst/>
+          </a:prstGeom>
+        </p:spPr>
+        <p:txBody>
+          <a:bodyPr anchorCtr="0" anchor="t" bIns="91425" lIns="91425" spcFirstLastPara="1" rIns="91425" wrap="square" tIns="91425">
+            <a:normAutofit fontScale="90000"/>
+          </a:bodyPr>
+          <a:lstStyle/>
+          <a:p>
+            <a:pPr indent="-330200" lvl="0" marL="457200" rtl="0" algn="l">
+              <a:buClr>
+                <a:srgbClr val="DEE2E6"/>
+              </a:buClr>
+              <a:spcBef>
+                <a:spcPts val="0"/>
+              </a:spcBef>
+              <a:spcAft>
+                <a:spcPts val="0"/>
+              </a:spcAft>
+              <a:buSzPts val="1600"/>
+              <a:buChar char="●"/>
+            </a:pPr>
+            <a:r>
+              <a:rPr lang="en" sz="1600">
+                <a:solidFill>
+                  <a:srgbClr val="DEE2E6"/>
+                </a:solidFill>
+              </a:rPr>
+              <a:t>Snake5 reads the keys directly</a:t>
+            </a:r>
+            <a:endParaRPr/>
+          </a:p>
+          <a:p>
+            <a:pPr indent="-317500" lvl="1" marL="914400" rtl="0" algn="l">
+              <a:buClr>
+                <a:srgbClr val="6C757D"/>
+              </a:buClr>
+              <a:spcBef>
+                <a:spcPts val="0"/>
+              </a:spcBef>
+              <a:spcAft>
+                <a:spcPts val="0"/>
+              </a:spcAft>
+              <a:buSzPts val="1400"/>
+              <a:buChar char="○"/>
+            </a:pPr>
+            <a:r>
+              <a:rPr lang="en" sz="1400">
+                <a:solidFill>
+                  <a:srgbClr val="6C757D"/>
+                </a:solidFill>
+              </a:rPr>
+              <a:t>Keys are hardwired to what they do</a:t>
+            </a:r>
+            <a:endParaRPr/>
+          </a:p>
+          <a:p>
+            <a:pPr indent="-330200" lvl="0" marL="457200" rtl="0" algn="l">
+              <a:buClr>
+                <a:srgbClr val="DEE2E6"/>
+              </a:buClr>
+              <a:spcBef>
+                <a:spcPts val="0"/>
+              </a:spcBef>
+              <a:spcAft>
+                <a:spcPts val="0"/>
+              </a:spcAft>
+              <a:buSzPts val="1600"/>
+              <a:buChar char="●"/>
+            </a:pPr>
+            <a:r>
+              <a:rPr lang="en" sz="1600">
+                <a:solidFill>
+                  <a:srgbClr val="DEE2E6"/>
+                </a:solidFill>
+              </a:rPr>
+              <a:t>A GameController maps keys to actions</a:t>
+            </a:r>
+            <a:endParaRPr/>
+          </a:p>
+          <a:p>
+            <a:pPr indent="-317500" lvl="1" marL="914400" rtl="0" algn="l">
+              <a:buClr>
+                <a:srgbClr val="6C757D"/>
+              </a:buClr>
+              <a:spcBef>
+                <a:spcPts val="0"/>
+              </a:spcBef>
+              <a:spcAft>
+                <a:spcPts val="0"/>
+              </a:spcAft>
+              <a:buSzPts val="1400"/>
+              <a:buChar char="○"/>
+            </a:pPr>
+            <a:r>
+              <a:rPr lang="en" sz="1400">
+                <a:solidFill>
+                  <a:srgbClr val="6C757D"/>
+                </a:solidFill>
+              </a:rPr>
+              <a:t>The game asks for “up”, never for W</a:t>
+            </a:r>
+            <a:endParaRPr/>
+          </a:p>
+          <a:p>
+            <a:pPr indent="-317500" lvl="1" marL="914400" rtl="0" algn="l">
+              <a:buClr>
+                <a:srgbClr val="6C757D"/>
+              </a:buClr>
+              <a:spcBef>
+                <a:spcPts val="0"/>
+              </a:spcBef>
+              <a:spcAft>
+                <a:spcPts val="0"/>
+              </a:spcAft>
+              <a:buSzPts val="1400"/>
+              <a:buChar char="○"/>
+            </a:pPr>
+            <a:r>
+              <a:rPr lang="en" sz="1400">
+                <a:solidFill>
+                  <a:srgbClr val="6C757D"/>
+                </a:solidFill>
+              </a:rPr>
+              <a:t>The controls live in one place</a:t>
+            </a:r>
+            <a:endParaRPr/>
+          </a:p>
+          <a:p>
+            <a:pPr indent="-330200" lvl="0" marL="457200" rtl="0" algn="l">
+              <a:buClr>
+                <a:srgbClr val="DEE2E6"/>
+              </a:buClr>
+              <a:spcBef>
+                <a:spcPts val="0"/>
+              </a:spcBef>
+              <a:spcAft>
+                <a:spcPts val="0"/>
+              </a:spcAft>
+              <a:buSzPts val="1600"/>
+              <a:buChar char="●"/>
+            </a:pPr>
+            <a:r>
+              <a:rPr lang="en" sz="1600">
+                <a:solidFill>
+                  <a:srgbClr val="DEE2E6"/>
+                </a:solidFill>
+              </a:rPr>
+              <a:t>Sokoban goes one step further: actions become objects</a:t>
+            </a:r>
+            <a:endParaRPr/>
+          </a:p>
+        </p:txBody>
+      </p:sp>
+      <p:sp>
+        <p:nvSpPr>
+          <p:cNvPr id="141" name="Google Shape;141;p23"/>
+          <p:cNvSpPr txBox="1"/>
+          <p:nvPr>
+            <p:ph idx="2" type="body"/>
+          </p:nvPr>
+        </p:nvSpPr>
+        <p:spPr>
+          <a:xfrm>
+            <a:off x="4150000" y="1152475"/>
+            <a:ext cx="4750000" cy="3600000"/>
+          </a:xfrm>
+          <a:prstGeom prst="rect">
+            <a:avLst/>
+          </a:prstGeom>
+        </p:spPr>
+        <p:txBody>
+          <a:bodyPr anchorCtr="0" anchor="t" bIns="91425" lIns="91425" spcFirstLastPara="1" rIns="91425" wrap="square" tIns="91425">
+            <a:noAutofit/>
+          </a:bodyPr>
+          <a:lstStyle/>
+          <a:p>
+            <a:pPr indent="0" lvl="0" marL="0" rtl="0" algn="l">
+              <a:lnSpc>
+                <a:spcPct val="115000"/>
+              </a:lnSpc>
+              <a:spcBef>
+                <a:spcPts val="0"/>
+              </a:spcBef>
+              <a:spcAft>
+                <a:spcPts val="0"/>
+              </a:spcAft>
+              <a:buNone/>
+            </a:pPr>
+            <a:r>
+              <a:rPr lang="en" sz="1000">
+                <a:highlight>
+                  <a:schemeClr val="dk2"/>
+                </a:highlight>
+                <a:latin typeface="Consolas"/>
+                <a:ea typeface="Consolas"/>
+                <a:cs typeface="Consolas"/>
+                <a:sym typeface="Consolas"/>
+              </a:rPr>
+              <a:t>public static class GameController</a:t>
+            </a:r>
+            <a:endParaRPr sz="1000">
+              <a:solidFill>
+                <a:srgbClr val="CCCCCC"/>
+              </a:solidFill>
+              <a:highlight>
+                <a:schemeClr val="dk2"/>
+              </a:highlight>
+              <a:latin typeface="Consolas"/>
+              <a:ea typeface="Consolas"/>
+              <a:cs typeface="Consolas"/>
+              <a:sym typeface="Consolas"/>
+            </a:endParaRPr>
+          </a:p>
+          <a:p>
+            <a:pPr indent="0" lvl="0" marL="0" rtl="0" algn="l">
+              <a:lnSpc>
+                <a:spcPct val="115000"/>
+              </a:lnSpc>
+              <a:spcBef>
+                <a:spcPts val="0"/>
+              </a:spcBef>
+              <a:spcAft>
+                <a:spcPts val="0"/>
+              </a:spcAft>
+              <a:buNone/>
+            </a:pPr>
+            <a:r>
+              <a:rPr lang="en" sz="1000">
+                <a:highlight>
+                  <a:schemeClr val="dk2"/>
+                </a:highlight>
+                <a:latin typeface="Consolas"/>
+                <a:ea typeface="Consolas"/>
+                <a:cs typeface="Consolas"/>
+                <a:sym typeface="Consolas"/>
+              </a:rPr>
+              <a:t>{</a:t>
+            </a:r>
+            <a:endParaRPr sz="1000">
+              <a:solidFill>
+                <a:srgbClr val="CCCCCC"/>
+              </a:solidFill>
+              <a:highlight>
+                <a:schemeClr val="dk2"/>
+              </a:highlight>
+              <a:latin typeface="Consolas"/>
+              <a:ea typeface="Consolas"/>
+              <a:cs typeface="Consolas"/>
+              <a:sym typeface="Consolas"/>
+            </a:endParaRPr>
+          </a:p>
+          <a:p>
+            <a:pPr indent="0" lvl="0" marL="0" rtl="0" algn="l">
+              <a:lnSpc>
+                <a:spcPct val="115000"/>
+              </a:lnSpc>
+              <a:spcBef>
+                <a:spcPts val="0"/>
+              </a:spcBef>
+              <a:spcAft>
+                <a:spcPts val="0"/>
+              </a:spcAft>
+              <a:buNone/>
+            </a:pPr>
+            <a:r>
+              <a:rPr lang="en" sz="1000">
+                <a:highlight>
+                  <a:schemeClr val="dk2"/>
+                </a:highlight>
+                <a:latin typeface="Consolas"/>
+                <a:ea typeface="Consolas"/>
+                <a:cs typeface="Consolas"/>
+                <a:sym typeface="Consolas"/>
+              </a:rPr>
+              <a:t>    public static bool Up =&gt;</a:t>
+            </a:r>
+            <a:endParaRPr sz="1000">
+              <a:solidFill>
+                <a:srgbClr val="CCCCCC"/>
+              </a:solidFill>
+              <a:highlight>
+                <a:schemeClr val="dk2"/>
+              </a:highlight>
+              <a:latin typeface="Consolas"/>
+              <a:ea typeface="Consolas"/>
+              <a:cs typeface="Consolas"/>
+              <a:sym typeface="Consolas"/>
+            </a:endParaRPr>
+          </a:p>
+          <a:p>
+            <a:pPr indent="0" lvl="0" marL="0" rtl="0" algn="l">
+              <a:lnSpc>
+                <a:spcPct val="115000"/>
+              </a:lnSpc>
+              <a:spcBef>
+                <a:spcPts val="0"/>
+              </a:spcBef>
+              <a:spcAft>
+                <a:spcPts val="0"/>
+              </a:spcAft>
+              <a:buNone/>
+            </a:pPr>
+            <a:r>
+              <a:rPr lang="en" sz="1000">
+                <a:highlight>
+                  <a:schemeClr val="dk2"/>
+                </a:highlight>
+                <a:latin typeface="Consolas"/>
+                <a:ea typeface="Consolas"/>
+                <a:cs typeface="Consolas"/>
+                <a:sym typeface="Consolas"/>
+              </a:rPr>
+              <a:t>        WasPressed(Keys.W) ||</a:t>
+            </a:r>
+            <a:endParaRPr sz="1000">
+              <a:solidFill>
+                <a:srgbClr val="CCCCCC"/>
+              </a:solidFill>
+              <a:highlight>
+                <a:schemeClr val="dk2"/>
+              </a:highlight>
+              <a:latin typeface="Consolas"/>
+              <a:ea typeface="Consolas"/>
+              <a:cs typeface="Consolas"/>
+              <a:sym typeface="Consolas"/>
+            </a:endParaRPr>
+          </a:p>
+          <a:p>
+            <a:pPr indent="0" lvl="0" marL="0" rtl="0" algn="l">
+              <a:lnSpc>
+                <a:spcPct val="115000"/>
+              </a:lnSpc>
+              <a:spcBef>
+                <a:spcPts val="0"/>
+              </a:spcBef>
+              <a:spcAft>
+                <a:spcPts val="0"/>
+              </a:spcAft>
+              <a:buNone/>
+            </a:pPr>
+            <a:r>
+              <a:rPr lang="en" sz="1000">
+                <a:highlight>
+                  <a:schemeClr val="dk2"/>
+                </a:highlight>
+                <a:latin typeface="Consolas"/>
+                <a:ea typeface="Consolas"/>
+                <a:cs typeface="Consolas"/>
+                <a:sym typeface="Consolas"/>
+              </a:rPr>
+              <a:t>        WasPressed(Keys.Up);</a:t>
+            </a:r>
+            <a:endParaRPr sz="1000">
+              <a:solidFill>
+                <a:srgbClr val="CCCCCC"/>
+              </a:solidFill>
+              <a:highlight>
+                <a:schemeClr val="dk2"/>
+              </a:highlight>
+              <a:latin typeface="Consolas"/>
+              <a:ea typeface="Consolas"/>
+              <a:cs typeface="Consolas"/>
+              <a:sym typeface="Consolas"/>
+            </a:endParaRPr>
+          </a:p>
+          <a:p>
+            <a:pPr indent="0" lvl="0" marL="0" rtl="0" algn="l">
+              <a:lnSpc>
+                <a:spcPct val="115000"/>
+              </a:lnSpc>
+              <a:spcBef>
+                <a:spcPts val="0"/>
+              </a:spcBef>
+              <a:spcAft>
+                <a:spcPts val="0"/>
+              </a:spcAft>
+              <a:buNone/>
+            </a:pPr>
+            <a:r>
+              <a:rPr lang="en" sz="1000">
+                <a:highlight>
+                  <a:schemeClr val="dk2"/>
+                </a:highlight>
+                <a:latin typeface="Consolas"/>
+                <a:ea typeface="Consolas"/>
+                <a:cs typeface="Consolas"/>
+                <a:sym typeface="Consolas"/>
+              </a:rPr>
+              <a:t>    // Down, Left, Right...</a:t>
+            </a:r>
+            <a:endParaRPr sz="1000">
+              <a:solidFill>
+                <a:srgbClr val="CCCCCC"/>
+              </a:solidFill>
+              <a:highlight>
+                <a:schemeClr val="dk2"/>
+              </a:highlight>
+              <a:latin typeface="Consolas"/>
+              <a:ea typeface="Consolas"/>
+              <a:cs typeface="Consolas"/>
+              <a:sym typeface="Consolas"/>
+            </a:endParaRPr>
+          </a:p>
+          <a:p>
+            <a:pPr indent="0" lvl="0" marL="0" rtl="0" algn="l">
+              <a:lnSpc>
+                <a:spcPct val="115000"/>
+              </a:lnSpc>
+              <a:spcBef>
+                <a:spcPts val="0"/>
+              </a:spcBef>
+              <a:spcAft>
+                <a:spcPts val="0"/>
+              </a:spcAft>
+              <a:buNone/>
+            </a:pPr>
+            <a:r>
+              <a:rPr lang="en" sz="1000">
+                <a:highlight>
+                  <a:schemeClr val="dk2"/>
+                </a:highlight>
+                <a:latin typeface="Consolas"/>
+                <a:ea typeface="Consolas"/>
+                <a:cs typeface="Consolas"/>
+                <a:sym typeface="Consolas"/>
+              </a:rPr>
+              <a:t>}</a:t>
+            </a:r>
+            <a:endParaRPr sz="1000">
+              <a:solidFill>
+                <a:srgbClr val="CCCCCC"/>
+              </a:solidFill>
+              <a:highlight>
+                <a:schemeClr val="dk2"/>
+              </a:highlight>
+              <a:latin typeface="Consolas"/>
+              <a:ea typeface="Consolas"/>
+              <a:cs typeface="Consolas"/>
+              <a:sym typeface="Consolas"/>
+            </a:endParaRPr>
+          </a:p>
+          <a:p>
+            <a:pPr indent="0" lvl="0" marL="0" rtl="0" algn="l">
+              <a:lnSpc>
+                <a:spcPct val="115000"/>
+              </a:lnSpc>
+              <a:spcBef>
+                <a:spcPts val="0"/>
+              </a:spcBef>
+              <a:spcAft>
+                <a:spcPts val="0"/>
+              </a:spcAft>
+              <a:buNone/>
+            </a:pPr>
+            <a:r>
+              <a:rPr lang="en" sz="1000">
+                <a:highlight>
+                  <a:schemeClr val="dk2"/>
+                </a:highlight>
+                <a:latin typeface="Consolas"/>
+                <a:ea typeface="Consolas"/>
+                <a:cs typeface="Consolas"/>
+                <a:sym typeface="Consolas"/>
+              </a:rPr>
+              <a:t/>
+            </a:r>
+            <a:endParaRPr sz="1000">
+              <a:solidFill>
+                <a:srgbClr val="CCCCCC"/>
+              </a:solidFill>
+              <a:highlight>
+                <a:schemeClr val="dk2"/>
+              </a:highlight>
+              <a:latin typeface="Consolas"/>
+              <a:ea typeface="Consolas"/>
+              <a:cs typeface="Consolas"/>
+              <a:sym typeface="Consolas"/>
+            </a:endParaRPr>
+          </a:p>
+          <a:p>
+            <a:pPr indent="0" lvl="0" marL="0" rtl="0" algn="l">
+              <a:lnSpc>
+                <a:spcPct val="115000"/>
+              </a:lnSpc>
+              <a:spcBef>
+                <a:spcPts val="0"/>
+              </a:spcBef>
+              <a:spcAft>
+                <a:spcPts val="0"/>
+              </a:spcAft>
+              <a:buNone/>
+            </a:pPr>
+            <a:r>
+              <a:rPr lang="en" sz="1000">
+                <a:highlight>
+                  <a:schemeClr val="dk2"/>
+                </a:highlight>
+                <a:latin typeface="Consolas"/>
+                <a:ea typeface="Consolas"/>
+                <a:cs typeface="Consolas"/>
+                <a:sym typeface="Consolas"/>
+              </a:rPr>
+              <a:t>// In the game</a:t>
+            </a:r>
+            <a:endParaRPr sz="1000">
+              <a:solidFill>
+                <a:srgbClr val="CCCCCC"/>
+              </a:solidFill>
+              <a:highlight>
+                <a:schemeClr val="dk2"/>
+              </a:highlight>
+              <a:latin typeface="Consolas"/>
+              <a:ea typeface="Consolas"/>
+              <a:cs typeface="Consolas"/>
+              <a:sym typeface="Consolas"/>
+            </a:endParaRPr>
+          </a:p>
+          <a:p>
+            <a:pPr indent="0" lvl="0" marL="0" rtl="0" algn="l">
+              <a:lnSpc>
+                <a:spcPct val="115000"/>
+              </a:lnSpc>
+              <a:spcBef>
+                <a:spcPts val="0"/>
+              </a:spcBef>
+              <a:spcAft>
+                <a:spcPts val="0"/>
+              </a:spcAft>
+              <a:buNone/>
+            </a:pPr>
+            <a:r>
+              <a:rPr lang="en" sz="1000">
+                <a:highlight>
+                  <a:schemeClr val="dk2"/>
+                </a:highlight>
+                <a:latin typeface="Consolas"/>
+                <a:ea typeface="Consolas"/>
+                <a:cs typeface="Consolas"/>
+                <a:sym typeface="Consolas"/>
+              </a:rPr>
+              <a:t>if (GameController.Up)</a:t>
+            </a:r>
+            <a:endParaRPr sz="1000">
+              <a:solidFill>
+                <a:srgbClr val="CCCCCC"/>
+              </a:solidFill>
+              <a:highlight>
+                <a:schemeClr val="dk2"/>
+              </a:highlight>
+              <a:latin typeface="Consolas"/>
+              <a:ea typeface="Consolas"/>
+              <a:cs typeface="Consolas"/>
+              <a:sym typeface="Consolas"/>
+            </a:endParaRPr>
+          </a:p>
+          <a:p>
+            <a:pPr indent="0" lvl="0" marL="0" rtl="0" algn="l">
+              <a:lnSpc>
+                <a:spcPct val="115000"/>
+              </a:lnSpc>
+              <a:spcBef>
+                <a:spcPts val="0"/>
+              </a:spcBef>
+              <a:spcAft>
+                <a:spcPts val="0"/>
+              </a:spcAft>
+              <a:buNone/>
+            </a:pPr>
+            <a:r>
+              <a:rPr lang="en" sz="1000">
+                <a:highlight>
+                  <a:schemeClr val="dk2"/>
+                </a:highlight>
+                <a:latin typeface="Consolas"/>
+                <a:ea typeface="Consolas"/>
+                <a:cs typeface="Consolas"/>
+                <a:sym typeface="Consolas"/>
+              </a:rPr>
+              <a:t>    _snake.Turn(Direction.Up);</a:t>
+            </a:r>
+            <a:endParaRPr sz="1000">
+              <a:solidFill>
+                <a:srgbClr val="CCCCCC"/>
+              </a:solidFill>
+              <a:highlight>
+                <a:schemeClr val="dk2"/>
+              </a:highlight>
+              <a:latin typeface="Consolas"/>
+              <a:ea typeface="Consolas"/>
+              <a:cs typeface="Consolas"/>
+              <a:sym typeface="Consolas"/>
+            </a:endParaRPr>
+          </a:p>
+        </p:txBody>
+      </p:sp>
+    </p:spTree>
+  </p:cSld>
+  <p:clrMapOvr>
+    <a:masterClrMapping/>
+  </p:clrMapOvr>
+</p:sld>
+</file>
+
+<file path=ppt/slides/slide22.xml><?xml version="1.0" encoding="utf-8"?>
 <p:sld xmlns:a="http://schemas.openxmlformats.org/drawingml/2006/main" xmlns:p="http://schemas.openxmlformats.org/presentationml/2006/main" xmlns:r="http://schemas.openxmlformats.org/officeDocument/2006/relationships">
   <p:cSld>
     <p:spTree>
@@ -12324,7 +12582,7 @@
 </p:sld>
 </file>
 
-<file path=ppt/slides/slide22.xml><?xml version="1.0" encoding="utf-8"?>
+<file path=ppt/slides/slide23.xml><?xml version="1.0" encoding="utf-8"?>
 <p:sld xmlns:a="http://schemas.openxmlformats.org/drawingml/2006/main" xmlns:p="http://schemas.openxmlformats.org/presentationml/2006/main" xmlns:r="http://schemas.openxmlformats.org/officeDocument/2006/relationships">
   <p:cSld>
     <p:spTree>
@@ -12451,7 +12709,7 @@
 </p:sld>
 </file>
 
-<file path=ppt/slides/slide23.xml><?xml version="1.0" encoding="utf-8"?>
+<file path=ppt/slides/slide24.xml><?xml version="1.0" encoding="utf-8"?>
 <p:sld xmlns:a="http://schemas.openxmlformats.org/drawingml/2006/main" xmlns:r="http://schemas.openxmlformats.org/officeDocument/2006/relationships" xmlns:mc="http://schemas.openxmlformats.org/markup-compatibility/2006" xmlns:mv="urn:schemas-microsoft-com:mac:vml" xmlns:p="http://schemas.openxmlformats.org/presentationml/2006/main" xmlns:c="http://schemas.openxmlformats.org/drawingml/2006/chart" xmlns:dgm="http://schemas.openxmlformats.org/drawingml/2006/diagram" xmlns:o="urn:schemas-microsoft-com:office:office" xmlns:v="urn:schemas-microsoft-com:vml" xmlns:pvml="urn:schemas-microsoft-com:office:powerpoint" xmlns:com="http://schemas.openxmlformats.org/drawingml/2006/compatibility" xmlns:p14="http://schemas.microsoft.com/office/powerpoint/2010/main" xmlns:p15="http://schemas.microsoft.com/office/powerpoint/2012/main" xmlns:ahyp="http://schemas.microsoft.com/office/drawing/2018/hyperlinkcolor">
   <p:cSld>
     <p:spTree>
@@ -12907,7 +13165,7 @@
 </p:sld>
 </file>
 
-<file path=ppt/slides/slide24.xml><?xml version="1.0" encoding="utf-8"?>
+<file path=ppt/slides/slide25.xml><?xml version="1.0" encoding="utf-8"?>
 <p:sld xmlns:a="http://schemas.openxmlformats.org/drawingml/2006/main" xmlns:r="http://schemas.openxmlformats.org/officeDocument/2006/relationships" xmlns:mc="http://schemas.openxmlformats.org/markup-compatibility/2006" xmlns:mv="urn:schemas-microsoft-com:mac:vml" xmlns:p="http://schemas.openxmlformats.org/presentationml/2006/main" xmlns:c="http://schemas.openxmlformats.org/drawingml/2006/chart" xmlns:dgm="http://schemas.openxmlformats.org/drawingml/2006/diagram" xmlns:o="urn:schemas-microsoft-com:office:office" xmlns:v="urn:schemas-microsoft-com:vml" xmlns:pvml="urn:schemas-microsoft-com:office:powerpoint" xmlns:com="http://schemas.openxmlformats.org/drawingml/2006/compatibility" xmlns:p14="http://schemas.microsoft.com/office/powerpoint/2010/main" xmlns:p15="http://schemas.microsoft.com/office/powerpoint/2012/main" xmlns:ahyp="http://schemas.microsoft.com/office/drawing/2018/hyperlinkcolor">
   <p:cSld>
     <p:spTree>
@@ -14959,7 +15217,7 @@
 </p:sld>
 </file>
 
-<file path=ppt/slides/slide25.xml><?xml version="1.0" encoding="utf-8"?>
+<file path=ppt/slides/slide26.xml><?xml version="1.0" encoding="utf-8"?>
 <p:sld xmlns:a="http://schemas.openxmlformats.org/drawingml/2006/main" xmlns:r="http://schemas.openxmlformats.org/officeDocument/2006/relationships" xmlns:mc="http://schemas.openxmlformats.org/markup-compatibility/2006" xmlns:mv="urn:schemas-microsoft-com:mac:vml" xmlns:p="http://schemas.openxmlformats.org/presentationml/2006/main" xmlns:c="http://schemas.openxmlformats.org/drawingml/2006/chart" xmlns:dgm="http://schemas.openxmlformats.org/drawingml/2006/diagram" xmlns:o="urn:schemas-microsoft-com:office:office" xmlns:v="urn:schemas-microsoft-com:vml" xmlns:pvml="urn:schemas-microsoft-com:office:powerpoint" xmlns:com="http://schemas.openxmlformats.org/drawingml/2006/compatibility" xmlns:p14="http://schemas.microsoft.com/office/powerpoint/2010/main" xmlns:p15="http://schemas.microsoft.com/office/powerpoint/2012/main" xmlns:ahyp="http://schemas.microsoft.com/office/drawing/2018/hyperlinkcolor">
   <p:cSld>
     <p:spTree>
@@ -15134,7 +15392,7 @@
 </p:sld>
 </file>
 
-<file path=ppt/slides/slide26.xml><?xml version="1.0" encoding="utf-8"?>
+<file path=ppt/slides/slide27.xml><?xml version="1.0" encoding="utf-8"?>
 <p:sld xmlns:a="http://schemas.openxmlformats.org/drawingml/2006/main" xmlns:r="http://schemas.openxmlformats.org/officeDocument/2006/relationships" xmlns:mc="http://schemas.openxmlformats.org/markup-compatibility/2006" xmlns:mv="urn:schemas-microsoft-com:mac:vml" xmlns:p="http://schemas.openxmlformats.org/presentationml/2006/main" xmlns:c="http://schemas.openxmlformats.org/drawingml/2006/chart" xmlns:dgm="http://schemas.openxmlformats.org/drawingml/2006/diagram" xmlns:o="urn:schemas-microsoft-com:office:office" xmlns:v="urn:schemas-microsoft-com:vml" xmlns:pvml="urn:schemas-microsoft-com:office:powerpoint" xmlns:com="http://schemas.openxmlformats.org/drawingml/2006/compatibility" xmlns:p14="http://schemas.microsoft.com/office/powerpoint/2010/main" xmlns:p15="http://schemas.microsoft.com/office/powerpoint/2012/main" xmlns:ahyp="http://schemas.microsoft.com/office/drawing/2018/hyperlinkcolor">
   <p:cSld>
     <p:spTree>
@@ -15367,7 +15625,7 @@
 </p:sld>
 </file>
 
-<file path=ppt/slides/slide27.xml><?xml version="1.0" encoding="utf-8"?>
+<file path=ppt/slides/slide28.xml><?xml version="1.0" encoding="utf-8"?>
 <p:sld xmlns:a="http://schemas.openxmlformats.org/drawingml/2006/main" xmlns:r="http://schemas.openxmlformats.org/officeDocument/2006/relationships" xmlns:mc="http://schemas.openxmlformats.org/markup-compatibility/2006" xmlns:mv="urn:schemas-microsoft-com:mac:vml" xmlns:p="http://schemas.openxmlformats.org/presentationml/2006/main" xmlns:c="http://schemas.openxmlformats.org/drawingml/2006/chart" xmlns:dgm="http://schemas.openxmlformats.org/drawingml/2006/diagram" xmlns:o="urn:schemas-microsoft-com:office:office" xmlns:v="urn:schemas-microsoft-com:vml" xmlns:pvml="urn:schemas-microsoft-com:office:powerpoint" xmlns:com="http://schemas.openxmlformats.org/drawingml/2006/compatibility" xmlns:p14="http://schemas.microsoft.com/office/powerpoint/2010/main" xmlns:p15="http://schemas.microsoft.com/office/powerpoint/2012/main" xmlns:ahyp="http://schemas.microsoft.com/office/drawing/2018/hyperlinkcolor">
   <p:cSld>
     <p:spTree>
@@ -15616,7 +15874,7 @@
 </p:sld>
 </file>
 
-<file path=ppt/slides/slide28.xml><?xml version="1.0" encoding="utf-8"?>
+<file path=ppt/slides/slide29.xml><?xml version="1.0" encoding="utf-8"?>
 <p:sld xmlns:a="http://schemas.openxmlformats.org/drawingml/2006/main" xmlns:r="http://schemas.openxmlformats.org/officeDocument/2006/relationships" xmlns:mc="http://schemas.openxmlformats.org/markup-compatibility/2006" xmlns:mv="urn:schemas-microsoft-com:mac:vml" xmlns:p="http://schemas.openxmlformats.org/presentationml/2006/main" xmlns:c="http://schemas.openxmlformats.org/drawingml/2006/chart" xmlns:dgm="http://schemas.openxmlformats.org/drawingml/2006/diagram" xmlns:o="urn:schemas-microsoft-com:office:office" xmlns:v="urn:schemas-microsoft-com:vml" xmlns:pvml="urn:schemas-microsoft-com:office:powerpoint" xmlns:com="http://schemas.openxmlformats.org/drawingml/2006/compatibility" xmlns:p14="http://schemas.microsoft.com/office/powerpoint/2010/main" xmlns:p15="http://schemas.microsoft.com/office/powerpoint/2012/main" xmlns:ahyp="http://schemas.microsoft.com/office/drawing/2018/hyperlinkcolor">
   <p:cSld>
     <p:spTree>
@@ -15885,7 +16143,96 @@
 </p:sld>
 </file>
 
-<file path=ppt/slides/slide29.xml><?xml version="1.0" encoding="utf-8"?>
+<file path=ppt/slides/slide3.xml><?xml version="1.0" encoding="utf-8"?>
+<p:sld xmlns:a="http://schemas.openxmlformats.org/drawingml/2006/main" xmlns:r="http://schemas.openxmlformats.org/officeDocument/2006/relationships" xmlns:mc="http://schemas.openxmlformats.org/markup-compatibility/2006" xmlns:mv="urn:schemas-microsoft-com:mac:vml" xmlns:p="http://schemas.openxmlformats.org/presentationml/2006/main" xmlns:c="http://schemas.openxmlformats.org/drawingml/2006/chart" xmlns:dgm="http://schemas.openxmlformats.org/drawingml/2006/diagram" xmlns:o="urn:schemas-microsoft-com:office:office" xmlns:v="urn:schemas-microsoft-com:vml" xmlns:pvml="urn:schemas-microsoft-com:office:powerpoint" xmlns:com="http://schemas.openxmlformats.org/drawingml/2006/compatibility" xmlns:p14="http://schemas.microsoft.com/office/powerpoint/2010/main" xmlns:p15="http://schemas.microsoft.com/office/powerpoint/2012/main" xmlns:ahyp="http://schemas.microsoft.com/office/drawing/2018/hyperlinkcolor">
+  <p:cSld>
+    <p:spTree>
+      <p:nvGrpSpPr>
+        <p:cNvPr id="44" name="Shape 44"/>
+        <p:cNvGrpSpPr/>
+        <p:nvPr/>
+      </p:nvGrpSpPr>
+      <p:grpSpPr>
+        <a:xfrm>
+          <a:off x="0" y="0"/>
+          <a:ext cx="0" cy="0"/>
+          <a:chOff x="0" y="0"/>
+          <a:chExt cx="0" cy="0"/>
+        </a:xfrm>
+      </p:grpSpPr>
+      <p:sp>
+        <p:nvSpPr>
+          <p:cNvPr id="45" name="Google Shape;45;p10"/>
+          <p:cNvSpPr txBox="1"/>
+          <p:nvPr>
+            <p:ph type="title"/>
+          </p:nvPr>
+        </p:nvSpPr>
+        <p:spPr>
+          <a:xfrm>
+            <a:off x="311700" y="195615"/>
+            <a:ext cx="8520600" cy="572700"/>
+          </a:xfrm>
+          <a:prstGeom prst="rect">
+            <a:avLst/>
+          </a:prstGeom>
+        </p:spPr>
+        <p:txBody>
+          <a:bodyPr anchorCtr="0" anchor="t" bIns="91425" lIns="91425" spcFirstLastPara="1" rIns="91425" wrap="square" tIns="91425">
+            <a:normAutofit fontScale="90000"/>
+          </a:bodyPr>
+          <a:lstStyle/>
+          <a:p>
+            <a:pPr indent="0" lvl="0" marL="0" rtl="0" algn="l">
+              <a:spcBef>
+                <a:spcPts val="0"/>
+              </a:spcBef>
+              <a:spcAft>
+                <a:spcPts val="0"/>
+              </a:spcAft>
+              <a:buNone/>
+            </a:pPr>
+            <a:r>
+              <a:rPr lang="en"/>
+              <a:t>Today’s Goal</a:t>
+            </a:r>
+            <a:endParaRPr/>
+          </a:p>
+        </p:txBody>
+      </p:sp>
+      <p:pic>
+        <p:nvPicPr>
+          <p:cNvPr id="46" name="Picture 46" descr="snake9.png"/>
+          <p:cNvPicPr>
+            <a:picLocks noChangeAspect="1"/>
+          </p:cNvPicPr>
+          <p:nvPr/>
+        </p:nvPicPr>
+        <p:blipFill>
+          <a:blip r:embed="rId4"/>
+          <a:stretch>
+            <a:fillRect/>
+          </a:stretch>
+        </p:blipFill>
+        <p:spPr>
+          <a:xfrm>
+            <a:off x="1846087" y="1626274"/>
+            <a:ext cx="5451825" cy="3066651"/>
+          </a:xfrm>
+          <a:prstGeom prst="rect">
+            <a:avLst/>
+          </a:prstGeom>
+        </p:spPr>
+      </p:pic>
+    </p:spTree>
+  </p:cSld>
+  <p:clrMapOvr>
+    <a:masterClrMapping/>
+  </p:clrMapOvr>
+</p:sld>
+</file>
+
+<file path=ppt/slides/slide30.xml><?xml version="1.0" encoding="utf-8"?>
 <p:sld xmlns:a="http://schemas.openxmlformats.org/drawingml/2006/main" xmlns:r="http://schemas.openxmlformats.org/officeDocument/2006/relationships" xmlns:mc="http://schemas.openxmlformats.org/markup-compatibility/2006" xmlns:mv="urn:schemas-microsoft-com:mac:vml" xmlns:p="http://schemas.openxmlformats.org/presentationml/2006/main" xmlns:c="http://schemas.openxmlformats.org/drawingml/2006/chart" xmlns:dgm="http://schemas.openxmlformats.org/drawingml/2006/diagram" xmlns:o="urn:schemas-microsoft-com:office:office" xmlns:v="urn:schemas-microsoft-com:vml" xmlns:pvml="urn:schemas-microsoft-com:office:powerpoint" xmlns:com="http://schemas.openxmlformats.org/drawingml/2006/compatibility" xmlns:p14="http://schemas.microsoft.com/office/powerpoint/2010/main" xmlns:p15="http://schemas.microsoft.com/office/powerpoint/2012/main" xmlns:ahyp="http://schemas.microsoft.com/office/drawing/2018/hyperlinkcolor">
   <p:cSld>
     <p:spTree>
@@ -16019,456 +16366,7 @@
 </p:sld>
 </file>
 
-<file path=ppt/slides/slide3.xml><?xml version="1.0" encoding="utf-8"?>
-<p:sld xmlns:a="http://schemas.openxmlformats.org/drawingml/2006/main" xmlns:r="http://schemas.openxmlformats.org/officeDocument/2006/relationships" xmlns:mc="http://schemas.openxmlformats.org/markup-compatibility/2006" xmlns:mv="urn:schemas-microsoft-com:mac:vml" xmlns:p="http://schemas.openxmlformats.org/presentationml/2006/main" xmlns:c="http://schemas.openxmlformats.org/drawingml/2006/chart" xmlns:dgm="http://schemas.openxmlformats.org/drawingml/2006/diagram" xmlns:o="urn:schemas-microsoft-com:office:office" xmlns:v="urn:schemas-microsoft-com:vml" xmlns:pvml="urn:schemas-microsoft-com:office:powerpoint" xmlns:com="http://schemas.openxmlformats.org/drawingml/2006/compatibility" xmlns:p14="http://schemas.microsoft.com/office/powerpoint/2010/main" xmlns:p15="http://schemas.microsoft.com/office/powerpoint/2012/main" xmlns:ahyp="http://schemas.microsoft.com/office/drawing/2018/hyperlinkcolor">
-  <p:cSld>
-    <p:spTree>
-      <p:nvGrpSpPr>
-        <p:cNvPr id="50" name="Shape 50"/>
-        <p:cNvGrpSpPr/>
-        <p:nvPr/>
-      </p:nvGrpSpPr>
-      <p:grpSpPr>
-        <a:xfrm>
-          <a:off x="0" y="0"/>
-          <a:ext cx="0" cy="0"/>
-          <a:chOff x="0" y="0"/>
-          <a:chExt cx="0" cy="0"/>
-        </a:xfrm>
-      </p:grpSpPr>
-      <p:sp>
-        <p:nvSpPr>
-          <p:cNvPr id="51" name="Google Shape;51;p11"/>
-          <p:cNvSpPr txBox="1"/>
-          <p:nvPr>
-            <p:ph type="title"/>
-          </p:nvPr>
-        </p:nvSpPr>
-        <p:spPr>
-          <a:xfrm>
-            <a:off x="311700" y="195615"/>
-            <a:ext cx="8520600" cy="572700"/>
-          </a:xfrm>
-          <a:prstGeom prst="rect">
-            <a:avLst/>
-          </a:prstGeom>
-        </p:spPr>
-        <p:txBody>
-          <a:bodyPr anchorCtr="0" anchor="t" bIns="91425" lIns="91425" spcFirstLastPara="1" rIns="91425" wrap="square" tIns="91425">
-            <a:normAutofit fontScale="90000"/>
-          </a:bodyPr>
-          <a:lstStyle/>
-          <a:p>
-            <a:pPr indent="0" lvl="0" marL="0" rtl="0" algn="l">
-              <a:spcBef>
-                <a:spcPts val="0"/>
-              </a:spcBef>
-              <a:spcAft>
-                <a:spcPts val="0"/>
-              </a:spcAft>
-              <a:buNone/>
-            </a:pPr>
-            <a:r>
-              <a:rPr lang="en"/>
-              <a:t>Today’s Topics</a:t>
-            </a:r>
-            <a:endParaRPr/>
-          </a:p>
-        </p:txBody>
-      </p:sp>
-      <p:sp>
-        <p:nvSpPr>
-          <p:cNvPr id="52" name="Google Shape;52;p11"/>
-          <p:cNvSpPr txBox="1"/>
-          <p:nvPr>
-            <p:ph idx="1" type="body"/>
-          </p:nvPr>
-        </p:nvSpPr>
-        <p:spPr>
-          <a:xfrm>
-            <a:off x="311700" y="885950"/>
-            <a:ext cx="8520600" cy="4023300"/>
-          </a:xfrm>
-          <a:prstGeom prst="rect">
-            <a:avLst/>
-          </a:prstGeom>
-        </p:spPr>
-        <p:txBody>
-          <a:bodyPr anchorCtr="0" anchor="t" bIns="91425" lIns="91425" spcFirstLastPara="1" rIns="91425" wrap="square" tIns="91425">
-            <a:normAutofit/>
-          </a:bodyPr>
-          <a:lstStyle/>
-          <a:p>
-            <a:pPr indent="-330200" lvl="0" marL="457200" rtl="0" algn="l">
-              <a:spcBef>
-                <a:spcPts val="0"/>
-              </a:spcBef>
-              <a:spcAft>
-                <a:spcPts val="0"/>
-              </a:spcAft>
-              <a:buSzPts val="1600"/>
-              <a:buChar char="●"/>
-            </a:pPr>
-            <a:r>
-              <a:rPr lang="en"/>
-              <a:t>Assets as Data</a:t>
-            </a:r>
-            <a:endParaRPr/>
-          </a:p>
-          <a:p>
-            <a:pPr indent="-330200" lvl="0" marL="457200" rtl="0" algn="l">
-              <a:spcBef>
-                <a:spcPts val="0"/>
-              </a:spcBef>
-              <a:spcAft>
-                <a:spcPts val="0"/>
-              </a:spcAft>
-              <a:buSzPts val="1600"/>
-              <a:buChar char="●"/>
-            </a:pPr>
-            <a:r>
-              <a:rPr lang="en"/>
-              <a:t>Texture Atlases</a:t>
-            </a:r>
-            <a:endParaRPr/>
-          </a:p>
-          <a:p>
-            <a:pPr indent="-330200" lvl="0" marL="457200" rtl="0" algn="l">
-              <a:spcBef>
-                <a:spcPts val="0"/>
-              </a:spcBef>
-              <a:spcAft>
-                <a:spcPts val="0"/>
-              </a:spcAft>
-              <a:buSzPts val="1600"/>
-              <a:buChar char="●"/>
-            </a:pPr>
-            <a:r>
-              <a:rPr lang="en"/>
-              <a:t>Sprites &amp; Animation</a:t>
-            </a:r>
-            <a:endParaRPr/>
-          </a:p>
-          <a:p>
-            <a:pPr indent="-330200" lvl="0" marL="457200" rtl="0" algn="l">
-              <a:spcBef>
-                <a:spcPts val="0"/>
-              </a:spcBef>
-              <a:spcAft>
-                <a:spcPts val="0"/>
-              </a:spcAft>
-              <a:buSzPts val="1600"/>
-              <a:buChar char="●"/>
-            </a:pPr>
-            <a:r>
-              <a:rPr lang="en"/>
-              <a:t>Fixed-Tick Movement</a:t>
-            </a:r>
-            <a:endParaRPr/>
-          </a:p>
-          <a:p>
-            <a:pPr indent="-330200" lvl="0" marL="457200" rtl="0" algn="l">
-              <a:spcBef>
-                <a:spcPts val="0"/>
-              </a:spcBef>
-              <a:spcAft>
-                <a:spcPts val="0"/>
-              </a:spcAft>
-              <a:buSzPts val="1600"/>
-              <a:buChar char="●"/>
-            </a:pPr>
-            <a:r>
-              <a:rPr lang="en"/>
-              <a:t>Input as Actions &amp; Buffering</a:t>
-            </a:r>
-            <a:endParaRPr/>
-          </a:p>
-        </p:txBody>
-      </p:sp>
-    </p:spTree>
-  </p:cSld>
-  <p:clrMapOvr>
-    <a:masterClrMapping/>
-  </p:clrMapOvr>
-  <p:timing>
-    <p:tnLst>
-      <p:par>
-        <p:cTn dur="indefinite" nodeType="tmRoot" restart="never">
-          <p:childTnLst>
-            <p:seq concurrent="1" nextAc="seek">
-              <p:cTn dur="indefinite" id="2" nodeType="mainSeq">
-                <p:childTnLst>
-                  <p:par>
-                    <p:cTn fill="hold">
-                      <p:stCondLst>
-                        <p:cond delay="indefinite"/>
-                      </p:stCondLst>
-                      <p:childTnLst>
-                        <p:par>
-                          <p:cTn fill="hold">
-                            <p:stCondLst>
-                              <p:cond delay="0"/>
-                            </p:stCondLst>
-                            <p:childTnLst>
-                              <p:par>
-                                <p:cTn fill="hold" nodeType="clickEffect" presetClass="entr" presetID="1" presetSubtype="0">
-                                  <p:stCondLst>
-                                    <p:cond delay="0"/>
-                                  </p:stCondLst>
-                                  <p:childTnLst>
-                                    <p:set>
-                                      <p:cBhvr>
-                                        <p:cTn dur="1" fill="hold">
-                                          <p:stCondLst>
-                                            <p:cond delay="0"/>
-                                          </p:stCondLst>
-                                        </p:cTn>
-                                        <p:tgtEl>
-                                          <p:spTgt spid="52">
-                                            <p:txEl>
-                                              <p:pRg end="0" st="0"/>
-                                            </p:txEl>
-                                          </p:spTgt>
-                                        </p:tgtEl>
-                                        <p:attrNameLst>
-                                          <p:attrName>style.visibility</p:attrName>
-                                        </p:attrNameLst>
-                                      </p:cBhvr>
-                                      <p:to>
-                                        <p:strVal val="visible"/>
-                                      </p:to>
-                                    </p:set>
-                                  </p:childTnLst>
-                                </p:cTn>
-                              </p:par>
-                            </p:childTnLst>
-                          </p:cTn>
-                        </p:par>
-                      </p:childTnLst>
-                    </p:cTn>
-                  </p:par>
-                  <p:par>
-                    <p:cTn fill="hold">
-                      <p:stCondLst>
-                        <p:cond delay="indefinite"/>
-                      </p:stCondLst>
-                      <p:childTnLst>
-                        <p:par>
-                          <p:cTn fill="hold">
-                            <p:stCondLst>
-                              <p:cond delay="0"/>
-                            </p:stCondLst>
-                            <p:childTnLst>
-                              <p:par>
-                                <p:cTn fill="hold" nodeType="clickEffect" presetClass="entr" presetID="1" presetSubtype="0">
-                                  <p:stCondLst>
-                                    <p:cond delay="0"/>
-                                  </p:stCondLst>
-                                  <p:childTnLst>
-                                    <p:set>
-                                      <p:cBhvr>
-                                        <p:cTn dur="1" fill="hold">
-                                          <p:stCondLst>
-                                            <p:cond delay="0"/>
-                                          </p:stCondLst>
-                                        </p:cTn>
-                                        <p:tgtEl>
-                                          <p:spTgt spid="52">
-                                            <p:txEl>
-                                              <p:pRg end="1" st="1"/>
-                                            </p:txEl>
-                                          </p:spTgt>
-                                        </p:tgtEl>
-                                        <p:attrNameLst>
-                                          <p:attrName>style.visibility</p:attrName>
-                                        </p:attrNameLst>
-                                      </p:cBhvr>
-                                      <p:to>
-                                        <p:strVal val="visible"/>
-                                      </p:to>
-                                    </p:set>
-                                  </p:childTnLst>
-                                </p:cTn>
-                              </p:par>
-                            </p:childTnLst>
-                          </p:cTn>
-                        </p:par>
-                      </p:childTnLst>
-                    </p:cTn>
-                  </p:par>
-                  <p:par>
-                    <p:cTn fill="hold">
-                      <p:stCondLst>
-                        <p:cond delay="indefinite"/>
-                      </p:stCondLst>
-                      <p:childTnLst>
-                        <p:par>
-                          <p:cTn fill="hold">
-                            <p:stCondLst>
-                              <p:cond delay="0"/>
-                            </p:stCondLst>
-                            <p:childTnLst>
-                              <p:par>
-                                <p:cTn fill="hold" nodeType="clickEffect" presetClass="entr" presetID="1" presetSubtype="0">
-                                  <p:stCondLst>
-                                    <p:cond delay="0"/>
-                                  </p:stCondLst>
-                                  <p:childTnLst>
-                                    <p:set>
-                                      <p:cBhvr>
-                                        <p:cTn dur="1" fill="hold">
-                                          <p:stCondLst>
-                                            <p:cond delay="0"/>
-                                          </p:stCondLst>
-                                        </p:cTn>
-                                        <p:tgtEl>
-                                          <p:spTgt spid="52">
-                                            <p:txEl>
-                                              <p:pRg end="2" st="2"/>
-                                            </p:txEl>
-                                          </p:spTgt>
-                                        </p:tgtEl>
-                                        <p:attrNameLst>
-                                          <p:attrName>style.visibility</p:attrName>
-                                        </p:attrNameLst>
-                                      </p:cBhvr>
-                                      <p:to>
-                                        <p:strVal val="visible"/>
-                                      </p:to>
-                                    </p:set>
-                                  </p:childTnLst>
-                                </p:cTn>
-                              </p:par>
-                            </p:childTnLst>
-                          </p:cTn>
-                        </p:par>
-                      </p:childTnLst>
-                    </p:cTn>
-                  </p:par>
-                  <p:par>
-                    <p:cTn fill="hold">
-                      <p:stCondLst>
-                        <p:cond delay="indefinite"/>
-                      </p:stCondLst>
-                      <p:childTnLst>
-                        <p:par>
-                          <p:cTn fill="hold">
-                            <p:stCondLst>
-                              <p:cond delay="0"/>
-                            </p:stCondLst>
-                            <p:childTnLst>
-                              <p:par>
-                                <p:cTn fill="hold" nodeType="clickEffect" presetClass="entr" presetID="1" presetSubtype="0">
-                                  <p:stCondLst>
-                                    <p:cond delay="0"/>
-                                  </p:stCondLst>
-                                  <p:childTnLst>
-                                    <p:set>
-                                      <p:cBhvr>
-                                        <p:cTn dur="1" fill="hold">
-                                          <p:stCondLst>
-                                            <p:cond delay="0"/>
-                                          </p:stCondLst>
-                                        </p:cTn>
-                                        <p:tgtEl>
-                                          <p:spTgt spid="52">
-                                            <p:txEl>
-                                              <p:pRg end="3" st="3"/>
-                                            </p:txEl>
-                                          </p:spTgt>
-                                        </p:tgtEl>
-                                        <p:attrNameLst>
-                                          <p:attrName>style.visibility</p:attrName>
-                                        </p:attrNameLst>
-                                      </p:cBhvr>
-                                      <p:to>
-                                        <p:strVal val="visible"/>
-                                      </p:to>
-                                    </p:set>
-                                  </p:childTnLst>
-                                </p:cTn>
-                              </p:par>
-                            </p:childTnLst>
-                          </p:cTn>
-                        </p:par>
-                      </p:childTnLst>
-                    </p:cTn>
-                  </p:par>
-                  <p:par>
-                    <p:cTn fill="hold">
-                      <p:stCondLst>
-                        <p:cond delay="indefinite"/>
-                      </p:stCondLst>
-                      <p:childTnLst>
-                        <p:par>
-                          <p:cTn fill="hold">
-                            <p:stCondLst>
-                              <p:cond delay="0"/>
-                            </p:stCondLst>
-                            <p:childTnLst>
-                              <p:par>
-                                <p:cTn fill="hold" nodeType="clickEffect" presetClass="entr" presetID="1" presetSubtype="0">
-                                  <p:stCondLst>
-                                    <p:cond delay="0"/>
-                                  </p:stCondLst>
-                                  <p:childTnLst>
-                                    <p:set>
-                                      <p:cBhvr>
-                                        <p:cTn dur="1" fill="hold">
-                                          <p:stCondLst>
-                                            <p:cond delay="0"/>
-                                          </p:stCondLst>
-                                        </p:cTn>
-                                        <p:tgtEl>
-                                          <p:spTgt spid="52">
-                                            <p:txEl>
-                                              <p:pRg end="4" st="4"/>
-                                            </p:txEl>
-                                          </p:spTgt>
-                                        </p:tgtEl>
-                                        <p:attrNameLst>
-                                          <p:attrName>style.visibility</p:attrName>
-                                        </p:attrNameLst>
-                                      </p:cBhvr>
-                                      <p:to>
-                                        <p:strVal val="visible"/>
-                                      </p:to>
-                                    </p:set>
-                                  </p:childTnLst>
-                                </p:cTn>
-                              </p:par>
-                            </p:childTnLst>
-                          </p:cTn>
-                        </p:par>
-                      </p:childTnLst>
-                    </p:cTn>
-                  </p:par>
-                </p:childTnLst>
-              </p:cTn>
-              <p:prevCondLst>
-                <p:cond evt="onPrev">
-                  <p:tgtEl>
-                    <p:sldTgt/>
-                  </p:tgtEl>
-                </p:cond>
-              </p:prevCondLst>
-              <p:nextCondLst>
-                <p:cond evt="onNext">
-                  <p:tgtEl>
-                    <p:sldTgt/>
-                  </p:tgtEl>
-                </p:cond>
-              </p:nextCondLst>
-            </p:seq>
-          </p:childTnLst>
-        </p:cTn>
-      </p:par>
-    </p:tnLst>
-  </p:timing>
-</p:sld>
-</file>
-
-<file path=ppt/slides/slide30.xml><?xml version="1.0" encoding="utf-8"?>
+<file path=ppt/slides/slide31.xml><?xml version="1.0" encoding="utf-8"?>
 <p:sld xmlns:a="http://schemas.openxmlformats.org/drawingml/2006/main" xmlns:r="http://schemas.openxmlformats.org/officeDocument/2006/relationships" xmlns:mc="http://schemas.openxmlformats.org/markup-compatibility/2006" xmlns:mv="urn:schemas-microsoft-com:mac:vml" xmlns:p="http://schemas.openxmlformats.org/presentationml/2006/main" xmlns:c="http://schemas.openxmlformats.org/drawingml/2006/chart" xmlns:dgm="http://schemas.openxmlformats.org/drawingml/2006/diagram" xmlns:o="urn:schemas-microsoft-com:office:office" xmlns:v="urn:schemas-microsoft-com:vml" xmlns:pvml="urn:schemas-microsoft-com:office:powerpoint" xmlns:com="http://schemas.openxmlformats.org/drawingml/2006/compatibility" xmlns:p14="http://schemas.microsoft.com/office/powerpoint/2010/main" xmlns:p15="http://schemas.microsoft.com/office/powerpoint/2012/main" xmlns:ahyp="http://schemas.microsoft.com/office/drawing/2018/hyperlinkcolor">
   <p:cSld>
     <p:spTree>
@@ -16908,855 +16806,6 @@
 </p:sld>
 </file>
 
-<file path=ppt/slides/slide31.xml><?xml version="1.0" encoding="utf-8"?>
-<p:sld xmlns:a="http://schemas.openxmlformats.org/drawingml/2006/main" xmlns:r="http://schemas.openxmlformats.org/officeDocument/2006/relationships" xmlns:mc="http://schemas.openxmlformats.org/markup-compatibility/2006" xmlns:mv="urn:schemas-microsoft-com:mac:vml" xmlns:p="http://schemas.openxmlformats.org/presentationml/2006/main" xmlns:c="http://schemas.openxmlformats.org/drawingml/2006/chart" xmlns:dgm="http://schemas.openxmlformats.org/drawingml/2006/diagram" xmlns:o="urn:schemas-microsoft-com:office:office" xmlns:v="urn:schemas-microsoft-com:vml" xmlns:pvml="urn:schemas-microsoft-com:office:powerpoint" xmlns:com="http://schemas.openxmlformats.org/drawingml/2006/compatibility" xmlns:p14="http://schemas.microsoft.com/office/powerpoint/2010/main" xmlns:p15="http://schemas.microsoft.com/office/powerpoint/2012/main" xmlns:ahyp="http://schemas.microsoft.com/office/drawing/2018/hyperlinkcolor">
-  <p:cSld>
-    <p:spTree>
-      <p:nvGrpSpPr>
-        <p:cNvPr id="292" name="Shape 292"/>
-        <p:cNvGrpSpPr/>
-        <p:nvPr/>
-      </p:nvGrpSpPr>
-      <p:grpSpPr>
-        <a:xfrm>
-          <a:off x="0" y="0"/>
-          <a:ext cx="0" cy="0"/>
-          <a:chOff x="0" y="0"/>
-          <a:chExt cx="0" cy="0"/>
-        </a:xfrm>
-      </p:grpSpPr>
-      <p:sp>
-        <p:nvSpPr>
-          <p:cNvPr id="293" name="Google Shape;293;p45"/>
-          <p:cNvSpPr txBox="1"/>
-          <p:nvPr>
-            <p:ph type="title"/>
-          </p:nvPr>
-        </p:nvSpPr>
-        <p:spPr>
-          <a:xfrm>
-            <a:off x="311700" y="195615"/>
-            <a:ext cx="8520600" cy="572700"/>
-          </a:xfrm>
-          <a:prstGeom prst="rect">
-            <a:avLst/>
-          </a:prstGeom>
-        </p:spPr>
-        <p:txBody>
-          <a:bodyPr anchorCtr="0" anchor="t" bIns="91425" lIns="91425" spcFirstLastPara="1" rIns="91425" wrap="square" tIns="91425">
-            <a:normAutofit fontScale="90000"/>
-          </a:bodyPr>
-          <a:lstStyle/>
-          <a:p>
-            <a:pPr indent="0" lvl="0" marL="0" rtl="0" algn="l">
-              <a:spcBef>
-                <a:spcPts val="0"/>
-              </a:spcBef>
-              <a:spcAft>
-                <a:spcPts val="0"/>
-              </a:spcAft>
-              <a:buNone/>
-            </a:pPr>
-            <a:r>
-              <a:rPr lang="en">
-                <a:solidFill>
-                  <a:schemeClr val="accent5"/>
-                </a:solidFill>
-              </a:rPr>
-              <a:t>Exercises</a:t>
-            </a:r>
-            <a:endParaRPr>
-              <a:solidFill>
-                <a:schemeClr val="accent5"/>
-              </a:solidFill>
-            </a:endParaRPr>
-          </a:p>
-        </p:txBody>
-      </p:sp>
-      <p:sp>
-        <p:nvSpPr>
-          <p:cNvPr id="294" name="Google Shape;294;p45"/>
-          <p:cNvSpPr txBox="1"/>
-          <p:nvPr>
-            <p:ph idx="1" type="body"/>
-          </p:nvPr>
-        </p:nvSpPr>
-        <p:spPr>
-          <a:xfrm>
-            <a:off x="311700" y="885950"/>
-            <a:ext cx="8520600" cy="2057400"/>
-          </a:xfrm>
-          <a:prstGeom prst="rect">
-            <a:avLst/>
-          </a:prstGeom>
-        </p:spPr>
-        <p:txBody>
-          <a:bodyPr anchorCtr="0" anchor="t" bIns="91425" lIns="91425" spcFirstLastPara="1" rIns="91425" wrap="square" tIns="91425">
-            <a:normAutofit/>
-          </a:bodyPr>
-          <a:lstStyle/>
-          <a:p>
-            <a:pPr indent="-330200" lvl="0" marL="457200" rtl="0" algn="l">
-              <a:spcBef>
-                <a:spcPts val="0"/>
-              </a:spcBef>
-              <a:spcAft>
-                <a:spcPts val="0"/>
-              </a:spcAft>
-              <a:buSzPts val="1600"/>
-              <a:buChar char="●"/>
-            </a:pPr>
-            <a:r>
-              <a:rPr lang="en"/>
-              <a:t>Start from Snake9, the finished game</a:t>
-            </a:r>
-            <a:endParaRPr/>
-          </a:p>
-          <a:p>
-            <a:pPr indent="-330200" lvl="0" marL="457200" rtl="0" algn="l">
-              <a:spcBef>
-                <a:spcPts val="0"/>
-              </a:spcBef>
-              <a:spcAft>
-                <a:spcPts val="0"/>
-              </a:spcAft>
-              <a:buSzPts val="1600"/>
-              <a:buChar char="●"/>
-            </a:pPr>
-            <a:r>
-              <a:rPr lang="en"/>
-              <a:t>Speed up: make the tick shorter every time the snake eats</a:t>
-            </a:r>
-            <a:endParaRPr/>
-          </a:p>
-          <a:p>
-            <a:pPr indent="-330200" lvl="0" marL="457200" rtl="0" algn="l">
-              <a:spcBef>
-                <a:spcPts val="0"/>
-              </a:spcBef>
-              <a:spcAft>
-                <a:spcPts val="0"/>
-              </a:spcAft>
-              <a:buSzPts val="1600"/>
-              <a:buChar char="●"/>
-            </a:pPr>
-            <a:r>
-              <a:rPr lang="en"/>
-              <a:t>Where does that rule belong?</a:t>
-            </a:r>
-            <a:endParaRPr/>
-          </a:p>
-          <a:p>
-            <a:pPr indent="-330200" lvl="0" marL="457200" rtl="0" algn="l">
-              <a:spcBef>
-                <a:spcPts val="0"/>
-              </a:spcBef>
-              <a:spcAft>
-                <a:spcPts val="0"/>
-              </a:spcAft>
-              <a:buSzPts val="1600"/>
-              <a:buChar char="●"/>
-            </a:pPr>
-            <a:r>
-              <a:rPr lang="en"/>
-              <a:t>New input: the D-pad, through a GamePadInfo in GMDCore</a:t>
-            </a:r>
-            <a:endParaRPr/>
-          </a:p>
-          <a:p>
-            <a:pPr indent="-330200" lvl="0" marL="457200" rtl="0" algn="l">
-              <a:spcBef>
-                <a:spcPts val="0"/>
-              </a:spcBef>
-              <a:spcAft>
-                <a:spcPts val="0"/>
-              </a:spcAft>
-              <a:buSzPts val="1600"/>
-              <a:buChar char="●"/>
-            </a:pPr>
-            <a:r>
-              <a:rPr lang="en"/>
-              <a:t>Pause: while paused, the snake doesn’t move and turns aren’t buffered</a:t>
-            </a:r>
-            <a:endParaRPr/>
-          </a:p>
-        </p:txBody>
-      </p:sp>
-    </p:spTree>
-  </p:cSld>
-  <p:clrMapOvr>
-    <a:masterClrMapping/>
-  </p:clrMapOvr>
-  <p:timing>
-    <p:tnLst>
-      <p:par>
-        <p:cTn dur="indefinite" nodeType="tmRoot" restart="never">
-          <p:childTnLst>
-            <p:seq concurrent="1" nextAc="seek">
-              <p:cTn dur="indefinite" id="2" nodeType="mainSeq">
-                <p:childTnLst>
-                  <p:par>
-                    <p:cTn fill="hold">
-                      <p:stCondLst>
-                        <p:cond delay="indefinite"/>
-                      </p:stCondLst>
-                      <p:childTnLst>
-                        <p:par>
-                          <p:cTn fill="hold">
-                            <p:stCondLst>
-                              <p:cond delay="0"/>
-                            </p:stCondLst>
-                            <p:childTnLst>
-                              <p:par>
-                                <p:cTn fill="hold" nodeType="clickEffect" presetClass="entr" presetID="1" presetSubtype="0">
-                                  <p:stCondLst>
-                                    <p:cond delay="0"/>
-                                  </p:stCondLst>
-                                  <p:childTnLst>
-                                    <p:set>
-                                      <p:cBhvr>
-                                        <p:cTn dur="1" fill="hold">
-                                          <p:stCondLst>
-                                            <p:cond delay="0"/>
-                                          </p:stCondLst>
-                                        </p:cTn>
-                                        <p:tgtEl>
-                                          <p:spTgt spid="294">
-                                            <p:txEl>
-                                              <p:pRg end="0" st="0"/>
-                                            </p:txEl>
-                                          </p:spTgt>
-                                        </p:tgtEl>
-                                        <p:attrNameLst>
-                                          <p:attrName>style.visibility</p:attrName>
-                                        </p:attrNameLst>
-                                      </p:cBhvr>
-                                      <p:to>
-                                        <p:strVal val="visible"/>
-                                      </p:to>
-                                    </p:set>
-                                  </p:childTnLst>
-                                </p:cTn>
-                              </p:par>
-                            </p:childTnLst>
-                          </p:cTn>
-                        </p:par>
-                      </p:childTnLst>
-                    </p:cTn>
-                  </p:par>
-                  <p:par>
-                    <p:cTn fill="hold">
-                      <p:stCondLst>
-                        <p:cond delay="indefinite"/>
-                      </p:stCondLst>
-                      <p:childTnLst>
-                        <p:par>
-                          <p:cTn fill="hold">
-                            <p:stCondLst>
-                              <p:cond delay="0"/>
-                            </p:stCondLst>
-                            <p:childTnLst>
-                              <p:par>
-                                <p:cTn fill="hold" nodeType="clickEffect" presetClass="entr" presetID="1" presetSubtype="0">
-                                  <p:stCondLst>
-                                    <p:cond delay="0"/>
-                                  </p:stCondLst>
-                                  <p:childTnLst>
-                                    <p:set>
-                                      <p:cBhvr>
-                                        <p:cTn dur="1" fill="hold">
-                                          <p:stCondLst>
-                                            <p:cond delay="0"/>
-                                          </p:stCondLst>
-                                        </p:cTn>
-                                        <p:tgtEl>
-                                          <p:spTgt spid="294">
-                                            <p:txEl>
-                                              <p:pRg end="1" st="1"/>
-                                            </p:txEl>
-                                          </p:spTgt>
-                                        </p:tgtEl>
-                                        <p:attrNameLst>
-                                          <p:attrName>style.visibility</p:attrName>
-                                        </p:attrNameLst>
-                                      </p:cBhvr>
-                                      <p:to>
-                                        <p:strVal val="visible"/>
-                                      </p:to>
-                                    </p:set>
-                                  </p:childTnLst>
-                                </p:cTn>
-                              </p:par>
-                            </p:childTnLst>
-                          </p:cTn>
-                        </p:par>
-                      </p:childTnLst>
-                    </p:cTn>
-                  </p:par>
-                  <p:par>
-                    <p:cTn fill="hold">
-                      <p:stCondLst>
-                        <p:cond delay="indefinite"/>
-                      </p:stCondLst>
-                      <p:childTnLst>
-                        <p:par>
-                          <p:cTn fill="hold">
-                            <p:stCondLst>
-                              <p:cond delay="0"/>
-                            </p:stCondLst>
-                            <p:childTnLst>
-                              <p:par>
-                                <p:cTn fill="hold" nodeType="clickEffect" presetClass="entr" presetID="1" presetSubtype="0">
-                                  <p:stCondLst>
-                                    <p:cond delay="0"/>
-                                  </p:stCondLst>
-                                  <p:childTnLst>
-                                    <p:set>
-                                      <p:cBhvr>
-                                        <p:cTn dur="1" fill="hold">
-                                          <p:stCondLst>
-                                            <p:cond delay="0"/>
-                                          </p:stCondLst>
-                                        </p:cTn>
-                                        <p:tgtEl>
-                                          <p:spTgt spid="294">
-                                            <p:txEl>
-                                              <p:pRg end="2" st="2"/>
-                                            </p:txEl>
-                                          </p:spTgt>
-                                        </p:tgtEl>
-                                        <p:attrNameLst>
-                                          <p:attrName>style.visibility</p:attrName>
-                                        </p:attrNameLst>
-                                      </p:cBhvr>
-                                      <p:to>
-                                        <p:strVal val="visible"/>
-                                      </p:to>
-                                    </p:set>
-                                  </p:childTnLst>
-                                </p:cTn>
-                              </p:par>
-                            </p:childTnLst>
-                          </p:cTn>
-                        </p:par>
-                      </p:childTnLst>
-                    </p:cTn>
-                  </p:par>
-                  <p:par>
-                    <p:cTn fill="hold">
-                      <p:stCondLst>
-                        <p:cond delay="indefinite"/>
-                      </p:stCondLst>
-                      <p:childTnLst>
-                        <p:par>
-                          <p:cTn fill="hold">
-                            <p:stCondLst>
-                              <p:cond delay="0"/>
-                            </p:stCondLst>
-                            <p:childTnLst>
-                              <p:par>
-                                <p:cTn fill="hold" nodeType="clickEffect" presetClass="entr" presetID="1" presetSubtype="0">
-                                  <p:stCondLst>
-                                    <p:cond delay="0"/>
-                                  </p:stCondLst>
-                                  <p:childTnLst>
-                                    <p:set>
-                                      <p:cBhvr>
-                                        <p:cTn dur="1" fill="hold">
-                                          <p:stCondLst>
-                                            <p:cond delay="0"/>
-                                          </p:stCondLst>
-                                        </p:cTn>
-                                        <p:tgtEl>
-                                          <p:spTgt spid="294">
-                                            <p:txEl>
-                                              <p:pRg end="3" st="3"/>
-                                            </p:txEl>
-                                          </p:spTgt>
-                                        </p:tgtEl>
-                                        <p:attrNameLst>
-                                          <p:attrName>style.visibility</p:attrName>
-                                        </p:attrNameLst>
-                                      </p:cBhvr>
-                                      <p:to>
-                                        <p:strVal val="visible"/>
-                                      </p:to>
-                                    </p:set>
-                                  </p:childTnLst>
-                                </p:cTn>
-                              </p:par>
-                            </p:childTnLst>
-                          </p:cTn>
-                        </p:par>
-                      </p:childTnLst>
-                    </p:cTn>
-                  </p:par>
-                  <p:par>
-                    <p:cTn fill="hold">
-                      <p:stCondLst>
-                        <p:cond delay="indefinite"/>
-                      </p:stCondLst>
-                      <p:childTnLst>
-                        <p:par>
-                          <p:cTn fill="hold">
-                            <p:stCondLst>
-                              <p:cond delay="0"/>
-                            </p:stCondLst>
-                            <p:childTnLst>
-                              <p:par>
-                                <p:cTn fill="hold" nodeType="clickEffect" presetClass="entr" presetID="1" presetSubtype="0">
-                                  <p:stCondLst>
-                                    <p:cond delay="0"/>
-                                  </p:stCondLst>
-                                  <p:childTnLst>
-                                    <p:set>
-                                      <p:cBhvr>
-                                        <p:cTn dur="1" fill="hold">
-                                          <p:stCondLst>
-                                            <p:cond delay="0"/>
-                                          </p:stCondLst>
-                                        </p:cTn>
-                                        <p:tgtEl>
-                                          <p:spTgt spid="294">
-                                            <p:txEl>
-                                              <p:pRg end="4" st="4"/>
-                                            </p:txEl>
-                                          </p:spTgt>
-                                        </p:tgtEl>
-                                        <p:attrNameLst>
-                                          <p:attrName>style.visibility</p:attrName>
-                                        </p:attrNameLst>
-                                      </p:cBhvr>
-                                      <p:to>
-                                        <p:strVal val="visible"/>
-                                      </p:to>
-                                    </p:set>
-                                  </p:childTnLst>
-                                </p:cTn>
-                              </p:par>
-                            </p:childTnLst>
-                          </p:cTn>
-                        </p:par>
-                      </p:childTnLst>
-                    </p:cTn>
-                  </p:par>
-                  <p:par>
-                    <p:cTn fill="hold">
-                      <p:stCondLst>
-                        <p:cond delay="indefinite"/>
-                      </p:stCondLst>
-                      <p:childTnLst>
-                        <p:par>
-                          <p:cTn fill="hold">
-                            <p:stCondLst>
-                              <p:cond delay="0"/>
-                            </p:stCondLst>
-                            <p:childTnLst>
-                              <p:par>
-                                <p:cTn fill="hold" nodeType="clickEffect" presetClass="entr" presetID="1" presetSubtype="0">
-                                  <p:stCondLst>
-                                    <p:cond delay="0"/>
-                                  </p:stCondLst>
-                                  <p:childTnLst>
-                                    <p:set>
-                                      <p:cBhvr>
-                                        <p:cTn dur="1" fill="hold">
-                                          <p:stCondLst>
-                                            <p:cond delay="0"/>
-                                          </p:stCondLst>
-                                        </p:cTn>
-                                        <p:tgtEl>
-                                          <p:spTgt spid="294">
-                                            <p:txEl>
-                                              <p:pRg end="5" st="5"/>
-                                            </p:txEl>
-                                          </p:spTgt>
-                                        </p:tgtEl>
-                                        <p:attrNameLst>
-                                          <p:attrName>style.visibility</p:attrName>
-                                        </p:attrNameLst>
-                                      </p:cBhvr>
-                                      <p:to>
-                                        <p:strVal val="visible"/>
-                                      </p:to>
-                                    </p:set>
-                                  </p:childTnLst>
-                                </p:cTn>
-                              </p:par>
-                            </p:childTnLst>
-                          </p:cTn>
-                        </p:par>
-                      </p:childTnLst>
-                    </p:cTn>
-                  </p:par>
-                  <p:par>
-                    <p:cTn fill="hold">
-                      <p:stCondLst>
-                        <p:cond delay="indefinite"/>
-                      </p:stCondLst>
-                      <p:childTnLst>
-                        <p:par>
-                          <p:cTn fill="hold">
-                            <p:stCondLst>
-                              <p:cond delay="0"/>
-                            </p:stCondLst>
-                            <p:childTnLst>
-                              <p:par>
-                                <p:cTn fill="hold" nodeType="clickEffect" presetClass="entr" presetID="1" presetSubtype="0">
-                                  <p:stCondLst>
-                                    <p:cond delay="0"/>
-                                  </p:stCondLst>
-                                  <p:childTnLst>
-                                    <p:set>
-                                      <p:cBhvr>
-                                        <p:cTn dur="1" fill="hold">
-                                          <p:stCondLst>
-                                            <p:cond delay="0"/>
-                                          </p:stCondLst>
-                                        </p:cTn>
-                                        <p:tgtEl>
-                                          <p:spTgt spid="294">
-                                            <p:txEl>
-                                              <p:pRg end="6" st="6"/>
-                                            </p:txEl>
-                                          </p:spTgt>
-                                        </p:tgtEl>
-                                        <p:attrNameLst>
-                                          <p:attrName>style.visibility</p:attrName>
-                                        </p:attrNameLst>
-                                      </p:cBhvr>
-                                      <p:to>
-                                        <p:strVal val="visible"/>
-                                      </p:to>
-                                    </p:set>
-                                  </p:childTnLst>
-                                </p:cTn>
-                              </p:par>
-                            </p:childTnLst>
-                          </p:cTn>
-                        </p:par>
-                      </p:childTnLst>
-                    </p:cTn>
-                  </p:par>
-                  <p:par>
-                    <p:cTn fill="hold">
-                      <p:stCondLst>
-                        <p:cond delay="indefinite"/>
-                      </p:stCondLst>
-                      <p:childTnLst>
-                        <p:par>
-                          <p:cTn fill="hold">
-                            <p:stCondLst>
-                              <p:cond delay="0"/>
-                            </p:stCondLst>
-                            <p:childTnLst>
-                              <p:par>
-                                <p:cTn fill="hold" nodeType="clickEffect" presetClass="entr" presetID="1" presetSubtype="0">
-                                  <p:stCondLst>
-                                    <p:cond delay="0"/>
-                                  </p:stCondLst>
-                                  <p:childTnLst>
-                                    <p:set>
-                                      <p:cBhvr>
-                                        <p:cTn dur="1" fill="hold">
-                                          <p:stCondLst>
-                                            <p:cond delay="0"/>
-                                          </p:stCondLst>
-                                        </p:cTn>
-                                        <p:tgtEl>
-                                          <p:spTgt spid="294">
-                                            <p:txEl>
-                                              <p:pRg end="7" st="7"/>
-                                            </p:txEl>
-                                          </p:spTgt>
-                                        </p:tgtEl>
-                                        <p:attrNameLst>
-                                          <p:attrName>style.visibility</p:attrName>
-                                        </p:attrNameLst>
-                                      </p:cBhvr>
-                                      <p:to>
-                                        <p:strVal val="visible"/>
-                                      </p:to>
-                                    </p:set>
-                                  </p:childTnLst>
-                                </p:cTn>
-                              </p:par>
-                            </p:childTnLst>
-                          </p:cTn>
-                        </p:par>
-                      </p:childTnLst>
-                    </p:cTn>
-                  </p:par>
-                  <p:par>
-                    <p:cTn fill="hold">
-                      <p:stCondLst>
-                        <p:cond delay="indefinite"/>
-                      </p:stCondLst>
-                      <p:childTnLst>
-                        <p:par>
-                          <p:cTn fill="hold">
-                            <p:stCondLst>
-                              <p:cond delay="0"/>
-                            </p:stCondLst>
-                            <p:childTnLst>
-                              <p:par>
-                                <p:cTn fill="hold" nodeType="clickEffect" presetClass="entr" presetID="1" presetSubtype="0">
-                                  <p:stCondLst>
-                                    <p:cond delay="0"/>
-                                  </p:stCondLst>
-                                  <p:childTnLst>
-                                    <p:set>
-                                      <p:cBhvr>
-                                        <p:cTn dur="1" fill="hold">
-                                          <p:stCondLst>
-                                            <p:cond delay="0"/>
-                                          </p:stCondLst>
-                                        </p:cTn>
-                                        <p:tgtEl>
-                                          <p:spTgt spid="294">
-                                            <p:txEl>
-                                              <p:pRg end="8" st="8"/>
-                                            </p:txEl>
-                                          </p:spTgt>
-                                        </p:tgtEl>
-                                        <p:attrNameLst>
-                                          <p:attrName>style.visibility</p:attrName>
-                                        </p:attrNameLst>
-                                      </p:cBhvr>
-                                      <p:to>
-                                        <p:strVal val="visible"/>
-                                      </p:to>
-                                    </p:set>
-                                  </p:childTnLst>
-                                </p:cTn>
-                              </p:par>
-                            </p:childTnLst>
-                          </p:cTn>
-                        </p:par>
-                      </p:childTnLst>
-                    </p:cTn>
-                  </p:par>
-                  <p:par>
-                    <p:cTn fill="hold">
-                      <p:stCondLst>
-                        <p:cond delay="indefinite"/>
-                      </p:stCondLst>
-                      <p:childTnLst>
-                        <p:par>
-                          <p:cTn fill="hold">
-                            <p:stCondLst>
-                              <p:cond delay="0"/>
-                            </p:stCondLst>
-                            <p:childTnLst>
-                              <p:par>
-                                <p:cTn fill="hold" nodeType="clickEffect" presetClass="entr" presetID="1" presetSubtype="0">
-                                  <p:stCondLst>
-                                    <p:cond delay="0"/>
-                                  </p:stCondLst>
-                                  <p:childTnLst>
-                                    <p:set>
-                                      <p:cBhvr>
-                                        <p:cTn dur="1" fill="hold">
-                                          <p:stCondLst>
-                                            <p:cond delay="0"/>
-                                          </p:stCondLst>
-                                        </p:cTn>
-                                        <p:tgtEl>
-                                          <p:spTgt spid="294">
-                                            <p:txEl>
-                                              <p:pRg end="9" st="9"/>
-                                            </p:txEl>
-                                          </p:spTgt>
-                                        </p:tgtEl>
-                                        <p:attrNameLst>
-                                          <p:attrName>style.visibility</p:attrName>
-                                        </p:attrNameLst>
-                                      </p:cBhvr>
-                                      <p:to>
-                                        <p:strVal val="visible"/>
-                                      </p:to>
-                                    </p:set>
-                                  </p:childTnLst>
-                                </p:cTn>
-                              </p:par>
-                            </p:childTnLst>
-                          </p:cTn>
-                        </p:par>
-                      </p:childTnLst>
-                    </p:cTn>
-                  </p:par>
-                  <p:par>
-                    <p:cTn fill="hold">
-                      <p:stCondLst>
-                        <p:cond delay="indefinite"/>
-                      </p:stCondLst>
-                      <p:childTnLst>
-                        <p:par>
-                          <p:cTn fill="hold">
-                            <p:stCondLst>
-                              <p:cond delay="0"/>
-                            </p:stCondLst>
-                            <p:childTnLst>
-                              <p:par>
-                                <p:cTn fill="hold" nodeType="clickEffect" presetClass="entr" presetID="1" presetSubtype="0">
-                                  <p:stCondLst>
-                                    <p:cond delay="0"/>
-                                  </p:stCondLst>
-                                  <p:childTnLst>
-                                    <p:set>
-                                      <p:cBhvr>
-                                        <p:cTn dur="1" fill="hold">
-                                          <p:stCondLst>
-                                            <p:cond delay="0"/>
-                                          </p:stCondLst>
-                                        </p:cTn>
-                                        <p:tgtEl>
-                                          <p:spTgt spid="294">
-                                            <p:txEl>
-                                              <p:pRg end="10" st="10"/>
-                                            </p:txEl>
-                                          </p:spTgt>
-                                        </p:tgtEl>
-                                        <p:attrNameLst>
-                                          <p:attrName>style.visibility</p:attrName>
-                                        </p:attrNameLst>
-                                      </p:cBhvr>
-                                      <p:to>
-                                        <p:strVal val="visible"/>
-                                      </p:to>
-                                    </p:set>
-                                  </p:childTnLst>
-                                </p:cTn>
-                              </p:par>
-                            </p:childTnLst>
-                          </p:cTn>
-                        </p:par>
-                      </p:childTnLst>
-                    </p:cTn>
-                  </p:par>
-                  <p:par>
-                    <p:cTn fill="hold">
-                      <p:stCondLst>
-                        <p:cond delay="indefinite"/>
-                      </p:stCondLst>
-                      <p:childTnLst>
-                        <p:par>
-                          <p:cTn fill="hold">
-                            <p:stCondLst>
-                              <p:cond delay="0"/>
-                            </p:stCondLst>
-                            <p:childTnLst>
-                              <p:par>
-                                <p:cTn fill="hold" nodeType="clickEffect" presetClass="entr" presetID="1" presetSubtype="0">
-                                  <p:stCondLst>
-                                    <p:cond delay="0"/>
-                                  </p:stCondLst>
-                                  <p:childTnLst>
-                                    <p:set>
-                                      <p:cBhvr>
-                                        <p:cTn dur="1" fill="hold">
-                                          <p:stCondLst>
-                                            <p:cond delay="0"/>
-                                          </p:stCondLst>
-                                        </p:cTn>
-                                        <p:tgtEl>
-                                          <p:spTgt spid="294">
-                                            <p:txEl>
-                                              <p:pRg end="11" st="11"/>
-                                            </p:txEl>
-                                          </p:spTgt>
-                                        </p:tgtEl>
-                                        <p:attrNameLst>
-                                          <p:attrName>style.visibility</p:attrName>
-                                        </p:attrNameLst>
-                                      </p:cBhvr>
-                                      <p:to>
-                                        <p:strVal val="visible"/>
-                                      </p:to>
-                                    </p:set>
-                                  </p:childTnLst>
-                                </p:cTn>
-                              </p:par>
-                            </p:childTnLst>
-                          </p:cTn>
-                        </p:par>
-                      </p:childTnLst>
-                    </p:cTn>
-                  </p:par>
-                  <p:par>
-                    <p:cTn fill="hold">
-                      <p:stCondLst>
-                        <p:cond delay="indefinite"/>
-                      </p:stCondLst>
-                      <p:childTnLst>
-                        <p:par>
-                          <p:cTn fill="hold">
-                            <p:stCondLst>
-                              <p:cond delay="0"/>
-                            </p:stCondLst>
-                            <p:childTnLst>
-                              <p:par>
-                                <p:cTn fill="hold" nodeType="clickEffect" presetClass="entr" presetID="1" presetSubtype="0">
-                                  <p:stCondLst>
-                                    <p:cond delay="0"/>
-                                  </p:stCondLst>
-                                  <p:childTnLst>
-                                    <p:set>
-                                      <p:cBhvr>
-                                        <p:cTn dur="1" fill="hold">
-                                          <p:stCondLst>
-                                            <p:cond delay="0"/>
-                                          </p:stCondLst>
-                                        </p:cTn>
-                                        <p:tgtEl>
-                                          <p:spTgt spid="294">
-                                            <p:txEl>
-                                              <p:pRg end="12" st="12"/>
-                                            </p:txEl>
-                                          </p:spTgt>
-                                        </p:tgtEl>
-                                        <p:attrNameLst>
-                                          <p:attrName>style.visibility</p:attrName>
-                                        </p:attrNameLst>
-                                      </p:cBhvr>
-                                      <p:to>
-                                        <p:strVal val="visible"/>
-                                      </p:to>
-                                    </p:set>
-                                  </p:childTnLst>
-                                </p:cTn>
-                              </p:par>
-                            </p:childTnLst>
-                          </p:cTn>
-                        </p:par>
-                      </p:childTnLst>
-                    </p:cTn>
-                  </p:par>
-                </p:childTnLst>
-              </p:cTn>
-              <p:prevCondLst>
-                <p:cond evt="onPrev">
-                  <p:tgtEl>
-                    <p:sldTgt/>
-                  </p:tgtEl>
-                </p:cond>
-              </p:prevCondLst>
-              <p:nextCondLst>
-                <p:cond evt="onNext">
-                  <p:tgtEl>
-                    <p:sldTgt/>
-                  </p:tgtEl>
-                </p:cond>
-              </p:nextCondLst>
-            </p:seq>
-          </p:childTnLst>
-        </p:cTn>
-      </p:par>
-    </p:tnLst>
-  </p:timing>
-</p:sld>
-</file>
-
 <file path=ppt/slides/slide32.xml><?xml version="1.0" encoding="utf-8"?>
 <p:sld xmlns:a="http://schemas.openxmlformats.org/drawingml/2006/main" xmlns:r="http://schemas.openxmlformats.org/officeDocument/2006/relationships" xmlns:mc="http://schemas.openxmlformats.org/markup-compatibility/2006" xmlns:mv="urn:schemas-microsoft-com:mac:vml" xmlns:p="http://schemas.openxmlformats.org/presentationml/2006/main" xmlns:c="http://schemas.openxmlformats.org/drawingml/2006/chart" xmlns:dgm="http://schemas.openxmlformats.org/drawingml/2006/diagram" xmlns:o="urn:schemas-microsoft-com:office:office" xmlns:v="urn:schemas-microsoft-com:vml" xmlns:pvml="urn:schemas-microsoft-com:office:powerpoint" xmlns:com="http://schemas.openxmlformats.org/drawingml/2006/compatibility" xmlns:p14="http://schemas.microsoft.com/office/powerpoint/2010/main" xmlns:p15="http://schemas.microsoft.com/office/powerpoint/2012/main" xmlns:ahyp="http://schemas.microsoft.com/office/drawing/2018/hyperlinkcolor">
   <p:cSld>
@@ -17812,7 +16861,7 @@
                   <a:schemeClr val="accent5"/>
                 </a:solidFill>
               </a:rPr>
-              <a:t>Exercise: Refactor (Stretch)</a:t>
+              <a:t>Exercises</a:t>
             </a:r>
             <a:endParaRPr>
               <a:solidFill>
@@ -17833,7 +16882,7 @@
         <p:spPr>
           <a:xfrm>
             <a:off x="311700" y="885950"/>
-            <a:ext cx="8520600" cy="4023300"/>
+            <a:ext cx="8520600" cy="2057400"/>
           </a:xfrm>
           <a:prstGeom prst="rect">
             <a:avLst/>
@@ -17857,7 +16906,7 @@
             </a:pPr>
             <a:r>
               <a:rPr lang="en"/>
-              <a:t>The tick timer lives in the Snake class</a:t>
+              <a:t>Start from Snake9, the finished game</a:t>
             </a:r>
             <a:endParaRPr/>
           </a:p>
@@ -17874,24 +16923,7 @@
             </a:pPr>
             <a:r>
               <a:rPr lang="en"/>
-              <a:t>Move it into a reusable FixedTimer class in GMDCore</a:t>
-            </a:r>
-            <a:endParaRPr/>
-          </a:p>
-          <a:p>
-            <a:pPr indent="-317500" lvl="1" marL="914400" rtl="0" algn="l">
-              <a:spcBef>
-                <a:spcPts val="0"/>
-              </a:spcBef>
-              <a:spcAft>
-                <a:spcPts val="0"/>
-              </a:spcAft>
-              <a:buSzPts val="1400"/>
-              <a:buChar char="○"/>
-            </a:pPr>
-            <a:r>
-              <a:rPr lang="en"/>
-              <a:t>It calls back on every tick</a:t>
+              <a:t>Speed up: make the tick shorter every time the snake eats</a:t>
             </a:r>
             <a:endParaRPr/>
           </a:p>
@@ -17908,7 +16940,41 @@
             </a:pPr>
             <a:r>
               <a:rPr lang="en"/>
-              <a:t>Use it for the snake</a:t>
+              <a:t>Where does that rule belong?</a:t>
+            </a:r>
+            <a:endParaRPr/>
+          </a:p>
+          <a:p>
+            <a:pPr indent="-330200" lvl="0" marL="457200" rtl="0" algn="l">
+              <a:spcBef>
+                <a:spcPts val="0"/>
+              </a:spcBef>
+              <a:spcAft>
+                <a:spcPts val="0"/>
+              </a:spcAft>
+              <a:buSzPts val="1600"/>
+              <a:buChar char="●"/>
+            </a:pPr>
+            <a:r>
+              <a:rPr lang="en"/>
+              <a:t>New input: the D-pad, through a GamePadInfo in GMDCore</a:t>
+            </a:r>
+            <a:endParaRPr/>
+          </a:p>
+          <a:p>
+            <a:pPr indent="-330200" lvl="0" marL="457200" rtl="0" algn="l">
+              <a:spcBef>
+                <a:spcPts val="0"/>
+              </a:spcBef>
+              <a:spcAft>
+                <a:spcPts val="0"/>
+              </a:spcAft>
+              <a:buSzPts val="1600"/>
+              <a:buChar char="●"/>
+            </a:pPr>
+            <a:r>
+              <a:rPr lang="en"/>
+              <a:t>Pause: while paused, the snake doesn’t move and turns aren’t buffered</a:t>
             </a:r>
             <a:endParaRPr/>
           </a:p>
@@ -18590,179 +17656,6 @@
 </file>
 
 <file path=ppt/slides/slide33.xml><?xml version="1.0" encoding="utf-8"?>
-<p:sld xmlns:a="http://schemas.openxmlformats.org/drawingml/2006/main" xmlns:p="http://schemas.openxmlformats.org/presentationml/2006/main" xmlns:r="http://schemas.openxmlformats.org/officeDocument/2006/relationships">
-  <p:cSld>
-    <p:spTree>
-      <p:nvGrpSpPr>
-        <p:cNvPr id="1" name=""/>
-        <p:cNvGrpSpPr/>
-        <p:nvPr/>
-      </p:nvGrpSpPr>
-      <p:grpSpPr/>
-      <p:sp>
-        <p:nvSpPr>
-          <p:cNvPr id="2" name="Title 1"/>
-          <p:cNvSpPr>
-            <a:spLocks noGrp="1"/>
-          </p:cNvSpPr>
-          <p:nvPr>
-            <p:ph type="title"/>
-          </p:nvPr>
-        </p:nvSpPr>
-        <p:spPr/>
-        <p:txBody>
-          <a:bodyPr/>
-          <a:lstStyle/>
-          <a:p>
-            <a:pPr indent="0" lvl="0" marL="0" rtl="0" algn="l">
-              <a:spcBef>
-                <a:spcPts val="0"/>
-              </a:spcBef>
-              <a:spcAft>
-                <a:spcPts val="0"/>
-              </a:spcAft>
-              <a:buNone/>
-            </a:pPr>
-            <a:r>
-              <a:rPr lang="en"/>
-              <a:t>Check Yourself</a:t>
-            </a:r>
-            <a:endParaRPr/>
-          </a:p>
-        </p:txBody>
-      </p:sp>
-      <p:sp>
-        <p:nvSpPr>
-          <p:cNvPr id="3" name="Text Placeholder 2"/>
-          <p:cNvSpPr>
-            <a:spLocks noGrp="1"/>
-          </p:cNvSpPr>
-          <p:nvPr>
-            <p:ph type="body" idx="1"/>
-          </p:nvPr>
-        </p:nvSpPr>
-        <p:spPr>
-          <a:xfrm>
-            <a:off x="311700" y="885950"/>
-            <a:ext cx="8520600" cy="1719072"/>
-          </a:xfrm>
-        </p:spPr>
-        <p:txBody>
-          <a:bodyPr/>
-          <a:lstStyle/>
-          <a:p>
-            <a:pPr indent="-330200" lvl="0" marL="457200" rtl="0" algn="l">
-              <a:spcBef>
-                <a:spcPts val="0"/>
-              </a:spcBef>
-              <a:spcAft>
-                <a:spcPts val="0"/>
-              </a:spcAft>
-              <a:buSzPts val="1600"/>
-              <a:buChar char="●"/>
-            </a:pPr>
-            <a:r>
-              <a:rPr lang="en"/>
-              <a:t>Why prefer a texture atlas over many individual image files?</a:t>
-            </a:r>
-            <a:endParaRPr/>
-          </a:p>
-          <a:p>
-            <a:pPr indent="-330200" lvl="0" marL="457200" rtl="0" algn="l">
-              <a:spcBef>
-                <a:spcPts val="0"/>
-              </a:spcBef>
-              <a:spcAft>
-                <a:spcPts val="0"/>
-              </a:spcAft>
-              <a:buSzPts val="1600"/>
-              <a:buChar char="●"/>
-            </a:pPr>
-            <a:r>
-              <a:rPr lang="en"/>
-              <a:t>Why subtract the tick duration from the accumulator instead of resetting it?</a:t>
-            </a:r>
-            <a:endParaRPr/>
-          </a:p>
-          <a:p>
-            <a:pPr indent="-330200" lvl="0" marL="457200" rtl="0" algn="l">
-              <a:spcBef>
-                <a:spcPts val="0"/>
-              </a:spcBef>
-              <a:spcAft>
-                <a:spcPts val="0"/>
-              </a:spcAft>
-              <a:buSzPts val="1600"/>
-              <a:buChar char="●"/>
-            </a:pPr>
-            <a:r>
-              <a:rPr lang="en"/>
-              <a:t>What problems come from reading the keyboard inside gameplay code?</a:t>
-            </a:r>
-            <a:endParaRPr/>
-          </a:p>
-          <a:p>
-            <a:pPr indent="-330200" lvl="0" marL="457200" rtl="0" algn="l">
-              <a:spcBef>
-                <a:spcPts val="0"/>
-              </a:spcBef>
-              <a:spcAft>
-                <a:spcPts val="0"/>
-              </a:spcAft>
-              <a:buSzPts val="1600"/>
-              <a:buChar char="●"/>
-            </a:pPr>
-            <a:r>
-              <a:rPr lang="en"/>
-              <a:t>Why check a buffered turn against the last buffered direction?</a:t>
-            </a:r>
-            <a:endParaRPr/>
-          </a:p>
-        </p:txBody>
-      </p:sp>
-      <p:sp>
-        <p:nvSpPr>
-          <p:cNvPr id="4" name="TextBox 3"/>
-          <p:cNvSpPr txBox="1"/>
-          <p:nvPr/>
-        </p:nvSpPr>
-        <p:spPr>
-          <a:xfrm>
-            <a:off x="457200" y="3182112"/>
-            <a:ext cx="8229600" cy="457200"/>
-          </a:xfrm>
-          <a:prstGeom prst="rect">
-            <a:avLst/>
-          </a:prstGeom>
-          <a:noFill/>
-        </p:spPr>
-        <p:txBody>
-          <a:bodyPr wrap="square">
-            <a:spAutoFit/>
-          </a:bodyPr>
-          <a:lstStyle/>
-          <a:p>
-            <a:pPr algn="ctr"/>
-            <a:r>
-              <a:rPr sz="1400" b="0" i="0">
-                <a:solidFill>
-                  <a:srgbClr val="9AA3AB"/>
-                </a:solidFill>
-              </a:rPr>
-              <a:t>The answers, and more questions, are on the course site.</a:t>
-            </a:r>
-          </a:p>
-        </p:txBody>
-      </p:sp>
-    </p:spTree>
-  </p:cSld>
-  <p:clrMapOvr>
-    <a:masterClrMapping/>
-  </p:clrMapOvr>
-</p:sld>
-</file>
-
-<file path=ppt/slides/slide34.xml><?xml version="1.0" encoding="utf-8"?>
 <p:sld xmlns:a="http://schemas.openxmlformats.org/drawingml/2006/main" xmlns:r="http://schemas.openxmlformats.org/officeDocument/2006/relationships" xmlns:mc="http://schemas.openxmlformats.org/markup-compatibility/2006" xmlns:mv="urn:schemas-microsoft-com:mac:vml" xmlns:p="http://schemas.openxmlformats.org/presentationml/2006/main" xmlns:c="http://schemas.openxmlformats.org/drawingml/2006/chart" xmlns:dgm="http://schemas.openxmlformats.org/drawingml/2006/diagram" xmlns:o="urn:schemas-microsoft-com:office:office" xmlns:v="urn:schemas-microsoft-com:vml" xmlns:pvml="urn:schemas-microsoft-com:office:powerpoint" xmlns:com="http://schemas.openxmlformats.org/drawingml/2006/compatibility" xmlns:p14="http://schemas.microsoft.com/office/powerpoint/2010/main" xmlns:p15="http://schemas.microsoft.com/office/powerpoint/2012/main" xmlns:ahyp="http://schemas.microsoft.com/office/drawing/2018/hyperlinkcolor">
   <p:cSld>
     <p:spTree>
@@ -18817,7 +17710,7 @@
                   <a:schemeClr val="accent5"/>
                 </a:solidFill>
               </a:rPr>
-              <a:t>Apply It to Your Project</a:t>
+              <a:t>Exercise: Refactor (Stretch)</a:t>
             </a:r>
             <a:endParaRPr>
               <a:solidFill>
@@ -18862,7 +17755,7 @@
             </a:pPr>
             <a:r>
               <a:rPr lang="en"/>
-              <a:t>Which assets and settings are hardcoded, and could live in data files?</a:t>
+              <a:t>The tick timer lives in the Snake class</a:t>
             </a:r>
             <a:endParaRPr/>
           </a:p>
@@ -18879,7 +17772,7 @@
             </a:pPr>
             <a:r>
               <a:rPr lang="en"/>
-              <a:t>What are the actions in your game?</a:t>
+              <a:t>Move it into a reusable FixedTimer class in GMDCore</a:t>
             </a:r>
             <a:endParaRPr/>
           </a:p>
@@ -18896,7 +17789,7 @@
             </a:pPr>
             <a:r>
               <a:rPr lang="en"/>
-              <a:t>List them separately from the keys and buttons that trigger them</a:t>
+              <a:t>It calls back on every tick</a:t>
             </a:r>
             <a:endParaRPr/>
           </a:p>
@@ -18913,7 +17806,7 @@
             </a:pPr>
             <a:r>
               <a:rPr lang="en"/>
-              <a:t>Does anything in your game happen on a fixed tick?</a:t>
+              <a:t>Use it for the snake</a:t>
             </a:r>
             <a:endParaRPr/>
           </a:p>
@@ -19594,7 +18487,1012 @@
 </p:sld>
 </file>
 
+<file path=ppt/slides/slide34.xml><?xml version="1.0" encoding="utf-8"?>
+<p:sld xmlns:a="http://schemas.openxmlformats.org/drawingml/2006/main" xmlns:p="http://schemas.openxmlformats.org/presentationml/2006/main" xmlns:r="http://schemas.openxmlformats.org/officeDocument/2006/relationships">
+  <p:cSld>
+    <p:spTree>
+      <p:nvGrpSpPr>
+        <p:cNvPr id="1" name=""/>
+        <p:cNvGrpSpPr/>
+        <p:nvPr/>
+      </p:nvGrpSpPr>
+      <p:grpSpPr/>
+      <p:sp>
+        <p:nvSpPr>
+          <p:cNvPr id="2" name="Title 1"/>
+          <p:cNvSpPr>
+            <a:spLocks noGrp="1"/>
+          </p:cNvSpPr>
+          <p:nvPr>
+            <p:ph type="title"/>
+          </p:nvPr>
+        </p:nvSpPr>
+        <p:spPr/>
+        <p:txBody>
+          <a:bodyPr/>
+          <a:lstStyle/>
+          <a:p>
+            <a:pPr indent="0" lvl="0" marL="0" rtl="0" algn="l">
+              <a:spcBef>
+                <a:spcPts val="0"/>
+              </a:spcBef>
+              <a:spcAft>
+                <a:spcPts val="0"/>
+              </a:spcAft>
+              <a:buNone/>
+            </a:pPr>
+            <a:r>
+              <a:rPr lang="en"/>
+              <a:t>Check Yourself</a:t>
+            </a:r>
+            <a:endParaRPr/>
+          </a:p>
+        </p:txBody>
+      </p:sp>
+      <p:sp>
+        <p:nvSpPr>
+          <p:cNvPr id="3" name="Text Placeholder 2"/>
+          <p:cNvSpPr>
+            <a:spLocks noGrp="1"/>
+          </p:cNvSpPr>
+          <p:nvPr>
+            <p:ph type="body" idx="1"/>
+          </p:nvPr>
+        </p:nvSpPr>
+        <p:spPr>
+          <a:xfrm>
+            <a:off x="311700" y="885950"/>
+            <a:ext cx="8520600" cy="1719072"/>
+          </a:xfrm>
+        </p:spPr>
+        <p:txBody>
+          <a:bodyPr/>
+          <a:lstStyle/>
+          <a:p>
+            <a:pPr indent="-330200" lvl="0" marL="457200" rtl="0" algn="l">
+              <a:spcBef>
+                <a:spcPts val="0"/>
+              </a:spcBef>
+              <a:spcAft>
+                <a:spcPts val="0"/>
+              </a:spcAft>
+              <a:buSzPts val="1600"/>
+              <a:buChar char="●"/>
+            </a:pPr>
+            <a:r>
+              <a:rPr lang="en"/>
+              <a:t>Why prefer a texture atlas over many individual image files?</a:t>
+            </a:r>
+            <a:endParaRPr/>
+          </a:p>
+          <a:p>
+            <a:pPr indent="-330200" lvl="0" marL="457200" rtl="0" algn="l">
+              <a:spcBef>
+                <a:spcPts val="0"/>
+              </a:spcBef>
+              <a:spcAft>
+                <a:spcPts val="0"/>
+              </a:spcAft>
+              <a:buSzPts val="1600"/>
+              <a:buChar char="●"/>
+            </a:pPr>
+            <a:r>
+              <a:rPr lang="en"/>
+              <a:t>Why subtract the tick duration from the accumulator instead of resetting it?</a:t>
+            </a:r>
+            <a:endParaRPr/>
+          </a:p>
+          <a:p>
+            <a:pPr indent="-330200" lvl="0" marL="457200" rtl="0" algn="l">
+              <a:spcBef>
+                <a:spcPts val="0"/>
+              </a:spcBef>
+              <a:spcAft>
+                <a:spcPts val="0"/>
+              </a:spcAft>
+              <a:buSzPts val="1600"/>
+              <a:buChar char="●"/>
+            </a:pPr>
+            <a:r>
+              <a:rPr lang="en"/>
+              <a:t>What problems come from reading the keyboard inside gameplay code?</a:t>
+            </a:r>
+            <a:endParaRPr/>
+          </a:p>
+          <a:p>
+            <a:pPr indent="-330200" lvl="0" marL="457200" rtl="0" algn="l">
+              <a:spcBef>
+                <a:spcPts val="0"/>
+              </a:spcBef>
+              <a:spcAft>
+                <a:spcPts val="0"/>
+              </a:spcAft>
+              <a:buSzPts val="1600"/>
+              <a:buChar char="●"/>
+            </a:pPr>
+            <a:r>
+              <a:rPr lang="en"/>
+              <a:t>Why check a buffered turn against the last buffered direction?</a:t>
+            </a:r>
+            <a:endParaRPr/>
+          </a:p>
+        </p:txBody>
+      </p:sp>
+      <p:sp>
+        <p:nvSpPr>
+          <p:cNvPr id="4" name="TextBox 3"/>
+          <p:cNvSpPr txBox="1"/>
+          <p:nvPr/>
+        </p:nvSpPr>
+        <p:spPr>
+          <a:xfrm>
+            <a:off x="457200" y="3182112"/>
+            <a:ext cx="8229600" cy="457200"/>
+          </a:xfrm>
+          <a:prstGeom prst="rect">
+            <a:avLst/>
+          </a:prstGeom>
+          <a:noFill/>
+        </p:spPr>
+        <p:txBody>
+          <a:bodyPr wrap="square">
+            <a:spAutoFit/>
+          </a:bodyPr>
+          <a:lstStyle/>
+          <a:p>
+            <a:pPr algn="ctr"/>
+            <a:r>
+              <a:rPr sz="1400" b="0" i="0">
+                <a:solidFill>
+                  <a:srgbClr val="9AA3AB"/>
+                </a:solidFill>
+              </a:rPr>
+              <a:t>The answers, and more questions, are on the course site.</a:t>
+            </a:r>
+          </a:p>
+        </p:txBody>
+      </p:sp>
+    </p:spTree>
+  </p:cSld>
+  <p:clrMapOvr>
+    <a:masterClrMapping/>
+  </p:clrMapOvr>
+</p:sld>
+</file>
+
 <file path=ppt/slides/slide35.xml><?xml version="1.0" encoding="utf-8"?>
+<p:sld xmlns:a="http://schemas.openxmlformats.org/drawingml/2006/main" xmlns:r="http://schemas.openxmlformats.org/officeDocument/2006/relationships" xmlns:mc="http://schemas.openxmlformats.org/markup-compatibility/2006" xmlns:mv="urn:schemas-microsoft-com:mac:vml" xmlns:p="http://schemas.openxmlformats.org/presentationml/2006/main" xmlns:c="http://schemas.openxmlformats.org/drawingml/2006/chart" xmlns:dgm="http://schemas.openxmlformats.org/drawingml/2006/diagram" xmlns:o="urn:schemas-microsoft-com:office:office" xmlns:v="urn:schemas-microsoft-com:vml" xmlns:pvml="urn:schemas-microsoft-com:office:powerpoint" xmlns:com="http://schemas.openxmlformats.org/drawingml/2006/compatibility" xmlns:p14="http://schemas.microsoft.com/office/powerpoint/2010/main" xmlns:p15="http://schemas.microsoft.com/office/powerpoint/2012/main" xmlns:ahyp="http://schemas.microsoft.com/office/drawing/2018/hyperlinkcolor">
+  <p:cSld>
+    <p:spTree>
+      <p:nvGrpSpPr>
+        <p:cNvPr id="292" name="Shape 292"/>
+        <p:cNvGrpSpPr/>
+        <p:nvPr/>
+      </p:nvGrpSpPr>
+      <p:grpSpPr>
+        <a:xfrm>
+          <a:off x="0" y="0"/>
+          <a:ext cx="0" cy="0"/>
+          <a:chOff x="0" y="0"/>
+          <a:chExt cx="0" cy="0"/>
+        </a:xfrm>
+      </p:grpSpPr>
+      <p:sp>
+        <p:nvSpPr>
+          <p:cNvPr id="293" name="Google Shape;293;p45"/>
+          <p:cNvSpPr txBox="1"/>
+          <p:nvPr>
+            <p:ph type="title"/>
+          </p:nvPr>
+        </p:nvSpPr>
+        <p:spPr>
+          <a:xfrm>
+            <a:off x="311700" y="195615"/>
+            <a:ext cx="8520600" cy="572700"/>
+          </a:xfrm>
+          <a:prstGeom prst="rect">
+            <a:avLst/>
+          </a:prstGeom>
+        </p:spPr>
+        <p:txBody>
+          <a:bodyPr anchorCtr="0" anchor="t" bIns="91425" lIns="91425" spcFirstLastPara="1" rIns="91425" wrap="square" tIns="91425">
+            <a:normAutofit fontScale="90000"/>
+          </a:bodyPr>
+          <a:lstStyle/>
+          <a:p>
+            <a:pPr indent="0" lvl="0" marL="0" rtl="0" algn="l">
+              <a:spcBef>
+                <a:spcPts val="0"/>
+              </a:spcBef>
+              <a:spcAft>
+                <a:spcPts val="0"/>
+              </a:spcAft>
+              <a:buNone/>
+            </a:pPr>
+            <a:r>
+              <a:rPr lang="en">
+                <a:solidFill>
+                  <a:schemeClr val="accent5"/>
+                </a:solidFill>
+              </a:rPr>
+              <a:t>Apply It to Your Project</a:t>
+            </a:r>
+            <a:endParaRPr>
+              <a:solidFill>
+                <a:schemeClr val="accent5"/>
+              </a:solidFill>
+            </a:endParaRPr>
+          </a:p>
+        </p:txBody>
+      </p:sp>
+      <p:sp>
+        <p:nvSpPr>
+          <p:cNvPr id="294" name="Google Shape;294;p45"/>
+          <p:cNvSpPr txBox="1"/>
+          <p:nvPr>
+            <p:ph idx="1" type="body"/>
+          </p:nvPr>
+        </p:nvSpPr>
+        <p:spPr>
+          <a:xfrm>
+            <a:off x="311700" y="885950"/>
+            <a:ext cx="8520600" cy="4023300"/>
+          </a:xfrm>
+          <a:prstGeom prst="rect">
+            <a:avLst/>
+          </a:prstGeom>
+        </p:spPr>
+        <p:txBody>
+          <a:bodyPr anchorCtr="0" anchor="t" bIns="91425" lIns="91425" spcFirstLastPara="1" rIns="91425" wrap="square" tIns="91425">
+            <a:normAutofit/>
+          </a:bodyPr>
+          <a:lstStyle/>
+          <a:p>
+            <a:pPr indent="-330200" lvl="0" marL="457200" rtl="0" algn="l">
+              <a:spcBef>
+                <a:spcPts val="0"/>
+              </a:spcBef>
+              <a:spcAft>
+                <a:spcPts val="0"/>
+              </a:spcAft>
+              <a:buSzPts val="1600"/>
+              <a:buChar char="●"/>
+            </a:pPr>
+            <a:r>
+              <a:rPr lang="en"/>
+              <a:t>Which assets and settings are hardcoded, and could live in data files?</a:t>
+            </a:r>
+            <a:endParaRPr/>
+          </a:p>
+          <a:p>
+            <a:pPr indent="-330200" lvl="0" marL="457200" rtl="0" algn="l">
+              <a:spcBef>
+                <a:spcPts val="0"/>
+              </a:spcBef>
+              <a:spcAft>
+                <a:spcPts val="0"/>
+              </a:spcAft>
+              <a:buSzPts val="1600"/>
+              <a:buChar char="●"/>
+            </a:pPr>
+            <a:r>
+              <a:rPr lang="en"/>
+              <a:t>What are the actions in your game?</a:t>
+            </a:r>
+            <a:endParaRPr/>
+          </a:p>
+          <a:p>
+            <a:pPr indent="-317500" lvl="1" marL="914400" rtl="0" algn="l">
+              <a:spcBef>
+                <a:spcPts val="0"/>
+              </a:spcBef>
+              <a:spcAft>
+                <a:spcPts val="0"/>
+              </a:spcAft>
+              <a:buSzPts val="1400"/>
+              <a:buChar char="○"/>
+            </a:pPr>
+            <a:r>
+              <a:rPr lang="en"/>
+              <a:t>List them separately from the keys and buttons that trigger them</a:t>
+            </a:r>
+            <a:endParaRPr/>
+          </a:p>
+          <a:p>
+            <a:pPr indent="-330200" lvl="0" marL="457200" rtl="0" algn="l">
+              <a:spcBef>
+                <a:spcPts val="0"/>
+              </a:spcBef>
+              <a:spcAft>
+                <a:spcPts val="0"/>
+              </a:spcAft>
+              <a:buSzPts val="1600"/>
+              <a:buChar char="●"/>
+            </a:pPr>
+            <a:r>
+              <a:rPr lang="en"/>
+              <a:t>Does anything in your game happen on a fixed tick?</a:t>
+            </a:r>
+            <a:endParaRPr/>
+          </a:p>
+        </p:txBody>
+      </p:sp>
+    </p:spTree>
+  </p:cSld>
+  <p:clrMapOvr>
+    <a:masterClrMapping/>
+  </p:clrMapOvr>
+  <p:timing>
+    <p:tnLst>
+      <p:par>
+        <p:cTn dur="indefinite" nodeType="tmRoot" restart="never">
+          <p:childTnLst>
+            <p:seq concurrent="1" nextAc="seek">
+              <p:cTn dur="indefinite" id="2" nodeType="mainSeq">
+                <p:childTnLst>
+                  <p:par>
+                    <p:cTn fill="hold">
+                      <p:stCondLst>
+                        <p:cond delay="indefinite"/>
+                      </p:stCondLst>
+                      <p:childTnLst>
+                        <p:par>
+                          <p:cTn fill="hold">
+                            <p:stCondLst>
+                              <p:cond delay="0"/>
+                            </p:stCondLst>
+                            <p:childTnLst>
+                              <p:par>
+                                <p:cTn fill="hold" nodeType="clickEffect" presetClass="entr" presetID="1" presetSubtype="0">
+                                  <p:stCondLst>
+                                    <p:cond delay="0"/>
+                                  </p:stCondLst>
+                                  <p:childTnLst>
+                                    <p:set>
+                                      <p:cBhvr>
+                                        <p:cTn dur="1" fill="hold">
+                                          <p:stCondLst>
+                                            <p:cond delay="0"/>
+                                          </p:stCondLst>
+                                        </p:cTn>
+                                        <p:tgtEl>
+                                          <p:spTgt spid="294">
+                                            <p:txEl>
+                                              <p:pRg end="0" st="0"/>
+                                            </p:txEl>
+                                          </p:spTgt>
+                                        </p:tgtEl>
+                                        <p:attrNameLst>
+                                          <p:attrName>style.visibility</p:attrName>
+                                        </p:attrNameLst>
+                                      </p:cBhvr>
+                                      <p:to>
+                                        <p:strVal val="visible"/>
+                                      </p:to>
+                                    </p:set>
+                                  </p:childTnLst>
+                                </p:cTn>
+                              </p:par>
+                            </p:childTnLst>
+                          </p:cTn>
+                        </p:par>
+                      </p:childTnLst>
+                    </p:cTn>
+                  </p:par>
+                  <p:par>
+                    <p:cTn fill="hold">
+                      <p:stCondLst>
+                        <p:cond delay="indefinite"/>
+                      </p:stCondLst>
+                      <p:childTnLst>
+                        <p:par>
+                          <p:cTn fill="hold">
+                            <p:stCondLst>
+                              <p:cond delay="0"/>
+                            </p:stCondLst>
+                            <p:childTnLst>
+                              <p:par>
+                                <p:cTn fill="hold" nodeType="clickEffect" presetClass="entr" presetID="1" presetSubtype="0">
+                                  <p:stCondLst>
+                                    <p:cond delay="0"/>
+                                  </p:stCondLst>
+                                  <p:childTnLst>
+                                    <p:set>
+                                      <p:cBhvr>
+                                        <p:cTn dur="1" fill="hold">
+                                          <p:stCondLst>
+                                            <p:cond delay="0"/>
+                                          </p:stCondLst>
+                                        </p:cTn>
+                                        <p:tgtEl>
+                                          <p:spTgt spid="294">
+                                            <p:txEl>
+                                              <p:pRg end="1" st="1"/>
+                                            </p:txEl>
+                                          </p:spTgt>
+                                        </p:tgtEl>
+                                        <p:attrNameLst>
+                                          <p:attrName>style.visibility</p:attrName>
+                                        </p:attrNameLst>
+                                      </p:cBhvr>
+                                      <p:to>
+                                        <p:strVal val="visible"/>
+                                      </p:to>
+                                    </p:set>
+                                  </p:childTnLst>
+                                </p:cTn>
+                              </p:par>
+                            </p:childTnLst>
+                          </p:cTn>
+                        </p:par>
+                      </p:childTnLst>
+                    </p:cTn>
+                  </p:par>
+                  <p:par>
+                    <p:cTn fill="hold">
+                      <p:stCondLst>
+                        <p:cond delay="indefinite"/>
+                      </p:stCondLst>
+                      <p:childTnLst>
+                        <p:par>
+                          <p:cTn fill="hold">
+                            <p:stCondLst>
+                              <p:cond delay="0"/>
+                            </p:stCondLst>
+                            <p:childTnLst>
+                              <p:par>
+                                <p:cTn fill="hold" nodeType="clickEffect" presetClass="entr" presetID="1" presetSubtype="0">
+                                  <p:stCondLst>
+                                    <p:cond delay="0"/>
+                                  </p:stCondLst>
+                                  <p:childTnLst>
+                                    <p:set>
+                                      <p:cBhvr>
+                                        <p:cTn dur="1" fill="hold">
+                                          <p:stCondLst>
+                                            <p:cond delay="0"/>
+                                          </p:stCondLst>
+                                        </p:cTn>
+                                        <p:tgtEl>
+                                          <p:spTgt spid="294">
+                                            <p:txEl>
+                                              <p:pRg end="2" st="2"/>
+                                            </p:txEl>
+                                          </p:spTgt>
+                                        </p:tgtEl>
+                                        <p:attrNameLst>
+                                          <p:attrName>style.visibility</p:attrName>
+                                        </p:attrNameLst>
+                                      </p:cBhvr>
+                                      <p:to>
+                                        <p:strVal val="visible"/>
+                                      </p:to>
+                                    </p:set>
+                                  </p:childTnLst>
+                                </p:cTn>
+                              </p:par>
+                            </p:childTnLst>
+                          </p:cTn>
+                        </p:par>
+                      </p:childTnLst>
+                    </p:cTn>
+                  </p:par>
+                  <p:par>
+                    <p:cTn fill="hold">
+                      <p:stCondLst>
+                        <p:cond delay="indefinite"/>
+                      </p:stCondLst>
+                      <p:childTnLst>
+                        <p:par>
+                          <p:cTn fill="hold">
+                            <p:stCondLst>
+                              <p:cond delay="0"/>
+                            </p:stCondLst>
+                            <p:childTnLst>
+                              <p:par>
+                                <p:cTn fill="hold" nodeType="clickEffect" presetClass="entr" presetID="1" presetSubtype="0">
+                                  <p:stCondLst>
+                                    <p:cond delay="0"/>
+                                  </p:stCondLst>
+                                  <p:childTnLst>
+                                    <p:set>
+                                      <p:cBhvr>
+                                        <p:cTn dur="1" fill="hold">
+                                          <p:stCondLst>
+                                            <p:cond delay="0"/>
+                                          </p:stCondLst>
+                                        </p:cTn>
+                                        <p:tgtEl>
+                                          <p:spTgt spid="294">
+                                            <p:txEl>
+                                              <p:pRg end="3" st="3"/>
+                                            </p:txEl>
+                                          </p:spTgt>
+                                        </p:tgtEl>
+                                        <p:attrNameLst>
+                                          <p:attrName>style.visibility</p:attrName>
+                                        </p:attrNameLst>
+                                      </p:cBhvr>
+                                      <p:to>
+                                        <p:strVal val="visible"/>
+                                      </p:to>
+                                    </p:set>
+                                  </p:childTnLst>
+                                </p:cTn>
+                              </p:par>
+                            </p:childTnLst>
+                          </p:cTn>
+                        </p:par>
+                      </p:childTnLst>
+                    </p:cTn>
+                  </p:par>
+                  <p:par>
+                    <p:cTn fill="hold">
+                      <p:stCondLst>
+                        <p:cond delay="indefinite"/>
+                      </p:stCondLst>
+                      <p:childTnLst>
+                        <p:par>
+                          <p:cTn fill="hold">
+                            <p:stCondLst>
+                              <p:cond delay="0"/>
+                            </p:stCondLst>
+                            <p:childTnLst>
+                              <p:par>
+                                <p:cTn fill="hold" nodeType="clickEffect" presetClass="entr" presetID="1" presetSubtype="0">
+                                  <p:stCondLst>
+                                    <p:cond delay="0"/>
+                                  </p:stCondLst>
+                                  <p:childTnLst>
+                                    <p:set>
+                                      <p:cBhvr>
+                                        <p:cTn dur="1" fill="hold">
+                                          <p:stCondLst>
+                                            <p:cond delay="0"/>
+                                          </p:stCondLst>
+                                        </p:cTn>
+                                        <p:tgtEl>
+                                          <p:spTgt spid="294">
+                                            <p:txEl>
+                                              <p:pRg end="4" st="4"/>
+                                            </p:txEl>
+                                          </p:spTgt>
+                                        </p:tgtEl>
+                                        <p:attrNameLst>
+                                          <p:attrName>style.visibility</p:attrName>
+                                        </p:attrNameLst>
+                                      </p:cBhvr>
+                                      <p:to>
+                                        <p:strVal val="visible"/>
+                                      </p:to>
+                                    </p:set>
+                                  </p:childTnLst>
+                                </p:cTn>
+                              </p:par>
+                            </p:childTnLst>
+                          </p:cTn>
+                        </p:par>
+                      </p:childTnLst>
+                    </p:cTn>
+                  </p:par>
+                  <p:par>
+                    <p:cTn fill="hold">
+                      <p:stCondLst>
+                        <p:cond delay="indefinite"/>
+                      </p:stCondLst>
+                      <p:childTnLst>
+                        <p:par>
+                          <p:cTn fill="hold">
+                            <p:stCondLst>
+                              <p:cond delay="0"/>
+                            </p:stCondLst>
+                            <p:childTnLst>
+                              <p:par>
+                                <p:cTn fill="hold" nodeType="clickEffect" presetClass="entr" presetID="1" presetSubtype="0">
+                                  <p:stCondLst>
+                                    <p:cond delay="0"/>
+                                  </p:stCondLst>
+                                  <p:childTnLst>
+                                    <p:set>
+                                      <p:cBhvr>
+                                        <p:cTn dur="1" fill="hold">
+                                          <p:stCondLst>
+                                            <p:cond delay="0"/>
+                                          </p:stCondLst>
+                                        </p:cTn>
+                                        <p:tgtEl>
+                                          <p:spTgt spid="294">
+                                            <p:txEl>
+                                              <p:pRg end="5" st="5"/>
+                                            </p:txEl>
+                                          </p:spTgt>
+                                        </p:tgtEl>
+                                        <p:attrNameLst>
+                                          <p:attrName>style.visibility</p:attrName>
+                                        </p:attrNameLst>
+                                      </p:cBhvr>
+                                      <p:to>
+                                        <p:strVal val="visible"/>
+                                      </p:to>
+                                    </p:set>
+                                  </p:childTnLst>
+                                </p:cTn>
+                              </p:par>
+                            </p:childTnLst>
+                          </p:cTn>
+                        </p:par>
+                      </p:childTnLst>
+                    </p:cTn>
+                  </p:par>
+                  <p:par>
+                    <p:cTn fill="hold">
+                      <p:stCondLst>
+                        <p:cond delay="indefinite"/>
+                      </p:stCondLst>
+                      <p:childTnLst>
+                        <p:par>
+                          <p:cTn fill="hold">
+                            <p:stCondLst>
+                              <p:cond delay="0"/>
+                            </p:stCondLst>
+                            <p:childTnLst>
+                              <p:par>
+                                <p:cTn fill="hold" nodeType="clickEffect" presetClass="entr" presetID="1" presetSubtype="0">
+                                  <p:stCondLst>
+                                    <p:cond delay="0"/>
+                                  </p:stCondLst>
+                                  <p:childTnLst>
+                                    <p:set>
+                                      <p:cBhvr>
+                                        <p:cTn dur="1" fill="hold">
+                                          <p:stCondLst>
+                                            <p:cond delay="0"/>
+                                          </p:stCondLst>
+                                        </p:cTn>
+                                        <p:tgtEl>
+                                          <p:spTgt spid="294">
+                                            <p:txEl>
+                                              <p:pRg end="6" st="6"/>
+                                            </p:txEl>
+                                          </p:spTgt>
+                                        </p:tgtEl>
+                                        <p:attrNameLst>
+                                          <p:attrName>style.visibility</p:attrName>
+                                        </p:attrNameLst>
+                                      </p:cBhvr>
+                                      <p:to>
+                                        <p:strVal val="visible"/>
+                                      </p:to>
+                                    </p:set>
+                                  </p:childTnLst>
+                                </p:cTn>
+                              </p:par>
+                            </p:childTnLst>
+                          </p:cTn>
+                        </p:par>
+                      </p:childTnLst>
+                    </p:cTn>
+                  </p:par>
+                  <p:par>
+                    <p:cTn fill="hold">
+                      <p:stCondLst>
+                        <p:cond delay="indefinite"/>
+                      </p:stCondLst>
+                      <p:childTnLst>
+                        <p:par>
+                          <p:cTn fill="hold">
+                            <p:stCondLst>
+                              <p:cond delay="0"/>
+                            </p:stCondLst>
+                            <p:childTnLst>
+                              <p:par>
+                                <p:cTn fill="hold" nodeType="clickEffect" presetClass="entr" presetID="1" presetSubtype="0">
+                                  <p:stCondLst>
+                                    <p:cond delay="0"/>
+                                  </p:stCondLst>
+                                  <p:childTnLst>
+                                    <p:set>
+                                      <p:cBhvr>
+                                        <p:cTn dur="1" fill="hold">
+                                          <p:stCondLst>
+                                            <p:cond delay="0"/>
+                                          </p:stCondLst>
+                                        </p:cTn>
+                                        <p:tgtEl>
+                                          <p:spTgt spid="294">
+                                            <p:txEl>
+                                              <p:pRg end="7" st="7"/>
+                                            </p:txEl>
+                                          </p:spTgt>
+                                        </p:tgtEl>
+                                        <p:attrNameLst>
+                                          <p:attrName>style.visibility</p:attrName>
+                                        </p:attrNameLst>
+                                      </p:cBhvr>
+                                      <p:to>
+                                        <p:strVal val="visible"/>
+                                      </p:to>
+                                    </p:set>
+                                  </p:childTnLst>
+                                </p:cTn>
+                              </p:par>
+                            </p:childTnLst>
+                          </p:cTn>
+                        </p:par>
+                      </p:childTnLst>
+                    </p:cTn>
+                  </p:par>
+                  <p:par>
+                    <p:cTn fill="hold">
+                      <p:stCondLst>
+                        <p:cond delay="indefinite"/>
+                      </p:stCondLst>
+                      <p:childTnLst>
+                        <p:par>
+                          <p:cTn fill="hold">
+                            <p:stCondLst>
+                              <p:cond delay="0"/>
+                            </p:stCondLst>
+                            <p:childTnLst>
+                              <p:par>
+                                <p:cTn fill="hold" nodeType="clickEffect" presetClass="entr" presetID="1" presetSubtype="0">
+                                  <p:stCondLst>
+                                    <p:cond delay="0"/>
+                                  </p:stCondLst>
+                                  <p:childTnLst>
+                                    <p:set>
+                                      <p:cBhvr>
+                                        <p:cTn dur="1" fill="hold">
+                                          <p:stCondLst>
+                                            <p:cond delay="0"/>
+                                          </p:stCondLst>
+                                        </p:cTn>
+                                        <p:tgtEl>
+                                          <p:spTgt spid="294">
+                                            <p:txEl>
+                                              <p:pRg end="8" st="8"/>
+                                            </p:txEl>
+                                          </p:spTgt>
+                                        </p:tgtEl>
+                                        <p:attrNameLst>
+                                          <p:attrName>style.visibility</p:attrName>
+                                        </p:attrNameLst>
+                                      </p:cBhvr>
+                                      <p:to>
+                                        <p:strVal val="visible"/>
+                                      </p:to>
+                                    </p:set>
+                                  </p:childTnLst>
+                                </p:cTn>
+                              </p:par>
+                            </p:childTnLst>
+                          </p:cTn>
+                        </p:par>
+                      </p:childTnLst>
+                    </p:cTn>
+                  </p:par>
+                  <p:par>
+                    <p:cTn fill="hold">
+                      <p:stCondLst>
+                        <p:cond delay="indefinite"/>
+                      </p:stCondLst>
+                      <p:childTnLst>
+                        <p:par>
+                          <p:cTn fill="hold">
+                            <p:stCondLst>
+                              <p:cond delay="0"/>
+                            </p:stCondLst>
+                            <p:childTnLst>
+                              <p:par>
+                                <p:cTn fill="hold" nodeType="clickEffect" presetClass="entr" presetID="1" presetSubtype="0">
+                                  <p:stCondLst>
+                                    <p:cond delay="0"/>
+                                  </p:stCondLst>
+                                  <p:childTnLst>
+                                    <p:set>
+                                      <p:cBhvr>
+                                        <p:cTn dur="1" fill="hold">
+                                          <p:stCondLst>
+                                            <p:cond delay="0"/>
+                                          </p:stCondLst>
+                                        </p:cTn>
+                                        <p:tgtEl>
+                                          <p:spTgt spid="294">
+                                            <p:txEl>
+                                              <p:pRg end="9" st="9"/>
+                                            </p:txEl>
+                                          </p:spTgt>
+                                        </p:tgtEl>
+                                        <p:attrNameLst>
+                                          <p:attrName>style.visibility</p:attrName>
+                                        </p:attrNameLst>
+                                      </p:cBhvr>
+                                      <p:to>
+                                        <p:strVal val="visible"/>
+                                      </p:to>
+                                    </p:set>
+                                  </p:childTnLst>
+                                </p:cTn>
+                              </p:par>
+                            </p:childTnLst>
+                          </p:cTn>
+                        </p:par>
+                      </p:childTnLst>
+                    </p:cTn>
+                  </p:par>
+                  <p:par>
+                    <p:cTn fill="hold">
+                      <p:stCondLst>
+                        <p:cond delay="indefinite"/>
+                      </p:stCondLst>
+                      <p:childTnLst>
+                        <p:par>
+                          <p:cTn fill="hold">
+                            <p:stCondLst>
+                              <p:cond delay="0"/>
+                            </p:stCondLst>
+                            <p:childTnLst>
+                              <p:par>
+                                <p:cTn fill="hold" nodeType="clickEffect" presetClass="entr" presetID="1" presetSubtype="0">
+                                  <p:stCondLst>
+                                    <p:cond delay="0"/>
+                                  </p:stCondLst>
+                                  <p:childTnLst>
+                                    <p:set>
+                                      <p:cBhvr>
+                                        <p:cTn dur="1" fill="hold">
+                                          <p:stCondLst>
+                                            <p:cond delay="0"/>
+                                          </p:stCondLst>
+                                        </p:cTn>
+                                        <p:tgtEl>
+                                          <p:spTgt spid="294">
+                                            <p:txEl>
+                                              <p:pRg end="10" st="10"/>
+                                            </p:txEl>
+                                          </p:spTgt>
+                                        </p:tgtEl>
+                                        <p:attrNameLst>
+                                          <p:attrName>style.visibility</p:attrName>
+                                        </p:attrNameLst>
+                                      </p:cBhvr>
+                                      <p:to>
+                                        <p:strVal val="visible"/>
+                                      </p:to>
+                                    </p:set>
+                                  </p:childTnLst>
+                                </p:cTn>
+                              </p:par>
+                            </p:childTnLst>
+                          </p:cTn>
+                        </p:par>
+                      </p:childTnLst>
+                    </p:cTn>
+                  </p:par>
+                  <p:par>
+                    <p:cTn fill="hold">
+                      <p:stCondLst>
+                        <p:cond delay="indefinite"/>
+                      </p:stCondLst>
+                      <p:childTnLst>
+                        <p:par>
+                          <p:cTn fill="hold">
+                            <p:stCondLst>
+                              <p:cond delay="0"/>
+                            </p:stCondLst>
+                            <p:childTnLst>
+                              <p:par>
+                                <p:cTn fill="hold" nodeType="clickEffect" presetClass="entr" presetID="1" presetSubtype="0">
+                                  <p:stCondLst>
+                                    <p:cond delay="0"/>
+                                  </p:stCondLst>
+                                  <p:childTnLst>
+                                    <p:set>
+                                      <p:cBhvr>
+                                        <p:cTn dur="1" fill="hold">
+                                          <p:stCondLst>
+                                            <p:cond delay="0"/>
+                                          </p:stCondLst>
+                                        </p:cTn>
+                                        <p:tgtEl>
+                                          <p:spTgt spid="294">
+                                            <p:txEl>
+                                              <p:pRg end="11" st="11"/>
+                                            </p:txEl>
+                                          </p:spTgt>
+                                        </p:tgtEl>
+                                        <p:attrNameLst>
+                                          <p:attrName>style.visibility</p:attrName>
+                                        </p:attrNameLst>
+                                      </p:cBhvr>
+                                      <p:to>
+                                        <p:strVal val="visible"/>
+                                      </p:to>
+                                    </p:set>
+                                  </p:childTnLst>
+                                </p:cTn>
+                              </p:par>
+                            </p:childTnLst>
+                          </p:cTn>
+                        </p:par>
+                      </p:childTnLst>
+                    </p:cTn>
+                  </p:par>
+                  <p:par>
+                    <p:cTn fill="hold">
+                      <p:stCondLst>
+                        <p:cond delay="indefinite"/>
+                      </p:stCondLst>
+                      <p:childTnLst>
+                        <p:par>
+                          <p:cTn fill="hold">
+                            <p:stCondLst>
+                              <p:cond delay="0"/>
+                            </p:stCondLst>
+                            <p:childTnLst>
+                              <p:par>
+                                <p:cTn fill="hold" nodeType="clickEffect" presetClass="entr" presetID="1" presetSubtype="0">
+                                  <p:stCondLst>
+                                    <p:cond delay="0"/>
+                                  </p:stCondLst>
+                                  <p:childTnLst>
+                                    <p:set>
+                                      <p:cBhvr>
+                                        <p:cTn dur="1" fill="hold">
+                                          <p:stCondLst>
+                                            <p:cond delay="0"/>
+                                          </p:stCondLst>
+                                        </p:cTn>
+                                        <p:tgtEl>
+                                          <p:spTgt spid="294">
+                                            <p:txEl>
+                                              <p:pRg end="12" st="12"/>
+                                            </p:txEl>
+                                          </p:spTgt>
+                                        </p:tgtEl>
+                                        <p:attrNameLst>
+                                          <p:attrName>style.visibility</p:attrName>
+                                        </p:attrNameLst>
+                                      </p:cBhvr>
+                                      <p:to>
+                                        <p:strVal val="visible"/>
+                                      </p:to>
+                                    </p:set>
+                                  </p:childTnLst>
+                                </p:cTn>
+                              </p:par>
+                            </p:childTnLst>
+                          </p:cTn>
+                        </p:par>
+                      </p:childTnLst>
+                    </p:cTn>
+                  </p:par>
+                </p:childTnLst>
+              </p:cTn>
+              <p:prevCondLst>
+                <p:cond evt="onPrev">
+                  <p:tgtEl>
+                    <p:sldTgt/>
+                  </p:tgtEl>
+                </p:cond>
+              </p:prevCondLst>
+              <p:nextCondLst>
+                <p:cond evt="onNext">
+                  <p:tgtEl>
+                    <p:sldTgt/>
+                  </p:tgtEl>
+                </p:cond>
+              </p:nextCondLst>
+            </p:seq>
+          </p:childTnLst>
+        </p:cTn>
+      </p:par>
+    </p:tnLst>
+  </p:timing>
+</p:sld>
+</file>
+
+<file path=ppt/slides/slide36.xml><?xml version="1.0" encoding="utf-8"?>
 <p:sld xmlns:a="http://schemas.openxmlformats.org/drawingml/2006/main" xmlns:r="http://schemas.openxmlformats.org/officeDocument/2006/relationships" xmlns:mc="http://schemas.openxmlformats.org/markup-compatibility/2006" xmlns:mv="urn:schemas-microsoft-com:mac:vml" xmlns:p="http://schemas.openxmlformats.org/presentationml/2006/main" xmlns:c="http://schemas.openxmlformats.org/drawingml/2006/chart" xmlns:dgm="http://schemas.openxmlformats.org/drawingml/2006/diagram" xmlns:o="urn:schemas-microsoft-com:office:office" xmlns:v="urn:schemas-microsoft-com:vml" xmlns:pvml="urn:schemas-microsoft-com:office:powerpoint" xmlns:com="http://schemas.openxmlformats.org/drawingml/2006/compatibility" xmlns:p14="http://schemas.microsoft.com/office/powerpoint/2010/main" xmlns:p15="http://schemas.microsoft.com/office/powerpoint/2012/main" xmlns:ahyp="http://schemas.microsoft.com/office/drawing/2018/hyperlinkcolor">
   <p:cSld>
     <p:spTree>
@@ -19807,6 +19705,455 @@
   <p:cSld>
     <p:spTree>
       <p:nvGrpSpPr>
+        <p:cNvPr id="50" name="Shape 50"/>
+        <p:cNvGrpSpPr/>
+        <p:nvPr/>
+      </p:nvGrpSpPr>
+      <p:grpSpPr>
+        <a:xfrm>
+          <a:off x="0" y="0"/>
+          <a:ext cx="0" cy="0"/>
+          <a:chOff x="0" y="0"/>
+          <a:chExt cx="0" cy="0"/>
+        </a:xfrm>
+      </p:grpSpPr>
+      <p:sp>
+        <p:nvSpPr>
+          <p:cNvPr id="51" name="Google Shape;51;p11"/>
+          <p:cNvSpPr txBox="1"/>
+          <p:nvPr>
+            <p:ph type="title"/>
+          </p:nvPr>
+        </p:nvSpPr>
+        <p:spPr>
+          <a:xfrm>
+            <a:off x="311700" y="195615"/>
+            <a:ext cx="8520600" cy="572700"/>
+          </a:xfrm>
+          <a:prstGeom prst="rect">
+            <a:avLst/>
+          </a:prstGeom>
+        </p:spPr>
+        <p:txBody>
+          <a:bodyPr anchorCtr="0" anchor="t" bIns="91425" lIns="91425" spcFirstLastPara="1" rIns="91425" wrap="square" tIns="91425">
+            <a:normAutofit fontScale="90000"/>
+          </a:bodyPr>
+          <a:lstStyle/>
+          <a:p>
+            <a:pPr indent="0" lvl="0" marL="0" rtl="0" algn="l">
+              <a:spcBef>
+                <a:spcPts val="0"/>
+              </a:spcBef>
+              <a:spcAft>
+                <a:spcPts val="0"/>
+              </a:spcAft>
+              <a:buNone/>
+            </a:pPr>
+            <a:r>
+              <a:rPr lang="en"/>
+              <a:t>Today’s Topics</a:t>
+            </a:r>
+            <a:endParaRPr/>
+          </a:p>
+        </p:txBody>
+      </p:sp>
+      <p:sp>
+        <p:nvSpPr>
+          <p:cNvPr id="52" name="Google Shape;52;p11"/>
+          <p:cNvSpPr txBox="1"/>
+          <p:nvPr>
+            <p:ph idx="1" type="body"/>
+          </p:nvPr>
+        </p:nvSpPr>
+        <p:spPr>
+          <a:xfrm>
+            <a:off x="311700" y="885950"/>
+            <a:ext cx="8520600" cy="4023300"/>
+          </a:xfrm>
+          <a:prstGeom prst="rect">
+            <a:avLst/>
+          </a:prstGeom>
+        </p:spPr>
+        <p:txBody>
+          <a:bodyPr anchorCtr="0" anchor="t" bIns="91425" lIns="91425" spcFirstLastPara="1" rIns="91425" wrap="square" tIns="91425">
+            <a:normAutofit/>
+          </a:bodyPr>
+          <a:lstStyle/>
+          <a:p>
+            <a:pPr indent="-330200" lvl="0" marL="457200" rtl="0" algn="l">
+              <a:spcBef>
+                <a:spcPts val="0"/>
+              </a:spcBef>
+              <a:spcAft>
+                <a:spcPts val="0"/>
+              </a:spcAft>
+              <a:buSzPts val="1600"/>
+              <a:buChar char="●"/>
+            </a:pPr>
+            <a:r>
+              <a:rPr lang="en"/>
+              <a:t>Assets as Data</a:t>
+            </a:r>
+            <a:endParaRPr/>
+          </a:p>
+          <a:p>
+            <a:pPr indent="-330200" lvl="0" marL="457200" rtl="0" algn="l">
+              <a:spcBef>
+                <a:spcPts val="0"/>
+              </a:spcBef>
+              <a:spcAft>
+                <a:spcPts val="0"/>
+              </a:spcAft>
+              <a:buSzPts val="1600"/>
+              <a:buChar char="●"/>
+            </a:pPr>
+            <a:r>
+              <a:rPr lang="en"/>
+              <a:t>Texture Atlases</a:t>
+            </a:r>
+            <a:endParaRPr/>
+          </a:p>
+          <a:p>
+            <a:pPr indent="-330200" lvl="0" marL="457200" rtl="0" algn="l">
+              <a:spcBef>
+                <a:spcPts val="0"/>
+              </a:spcBef>
+              <a:spcAft>
+                <a:spcPts val="0"/>
+              </a:spcAft>
+              <a:buSzPts val="1600"/>
+              <a:buChar char="●"/>
+            </a:pPr>
+            <a:r>
+              <a:rPr lang="en"/>
+              <a:t>Sprites &amp; Animation</a:t>
+            </a:r>
+            <a:endParaRPr/>
+          </a:p>
+          <a:p>
+            <a:pPr indent="-330200" lvl="0" marL="457200" rtl="0" algn="l">
+              <a:spcBef>
+                <a:spcPts val="0"/>
+              </a:spcBef>
+              <a:spcAft>
+                <a:spcPts val="0"/>
+              </a:spcAft>
+              <a:buSzPts val="1600"/>
+              <a:buChar char="●"/>
+            </a:pPr>
+            <a:r>
+              <a:rPr lang="en"/>
+              <a:t>Fixed-Tick Movement</a:t>
+            </a:r>
+            <a:endParaRPr/>
+          </a:p>
+          <a:p>
+            <a:pPr indent="-330200" lvl="0" marL="457200" rtl="0" algn="l">
+              <a:spcBef>
+                <a:spcPts val="0"/>
+              </a:spcBef>
+              <a:spcAft>
+                <a:spcPts val="0"/>
+              </a:spcAft>
+              <a:buSzPts val="1600"/>
+              <a:buChar char="●"/>
+            </a:pPr>
+            <a:r>
+              <a:rPr lang="en"/>
+              <a:t>Input as Actions &amp; Buffering</a:t>
+            </a:r>
+            <a:endParaRPr/>
+          </a:p>
+        </p:txBody>
+      </p:sp>
+    </p:spTree>
+  </p:cSld>
+  <p:clrMapOvr>
+    <a:masterClrMapping/>
+  </p:clrMapOvr>
+  <p:timing>
+    <p:tnLst>
+      <p:par>
+        <p:cTn dur="indefinite" nodeType="tmRoot" restart="never">
+          <p:childTnLst>
+            <p:seq concurrent="1" nextAc="seek">
+              <p:cTn dur="indefinite" id="2" nodeType="mainSeq">
+                <p:childTnLst>
+                  <p:par>
+                    <p:cTn fill="hold">
+                      <p:stCondLst>
+                        <p:cond delay="indefinite"/>
+                      </p:stCondLst>
+                      <p:childTnLst>
+                        <p:par>
+                          <p:cTn fill="hold">
+                            <p:stCondLst>
+                              <p:cond delay="0"/>
+                            </p:stCondLst>
+                            <p:childTnLst>
+                              <p:par>
+                                <p:cTn fill="hold" nodeType="clickEffect" presetClass="entr" presetID="1" presetSubtype="0">
+                                  <p:stCondLst>
+                                    <p:cond delay="0"/>
+                                  </p:stCondLst>
+                                  <p:childTnLst>
+                                    <p:set>
+                                      <p:cBhvr>
+                                        <p:cTn dur="1" fill="hold">
+                                          <p:stCondLst>
+                                            <p:cond delay="0"/>
+                                          </p:stCondLst>
+                                        </p:cTn>
+                                        <p:tgtEl>
+                                          <p:spTgt spid="52">
+                                            <p:txEl>
+                                              <p:pRg end="0" st="0"/>
+                                            </p:txEl>
+                                          </p:spTgt>
+                                        </p:tgtEl>
+                                        <p:attrNameLst>
+                                          <p:attrName>style.visibility</p:attrName>
+                                        </p:attrNameLst>
+                                      </p:cBhvr>
+                                      <p:to>
+                                        <p:strVal val="visible"/>
+                                      </p:to>
+                                    </p:set>
+                                  </p:childTnLst>
+                                </p:cTn>
+                              </p:par>
+                            </p:childTnLst>
+                          </p:cTn>
+                        </p:par>
+                      </p:childTnLst>
+                    </p:cTn>
+                  </p:par>
+                  <p:par>
+                    <p:cTn fill="hold">
+                      <p:stCondLst>
+                        <p:cond delay="indefinite"/>
+                      </p:stCondLst>
+                      <p:childTnLst>
+                        <p:par>
+                          <p:cTn fill="hold">
+                            <p:stCondLst>
+                              <p:cond delay="0"/>
+                            </p:stCondLst>
+                            <p:childTnLst>
+                              <p:par>
+                                <p:cTn fill="hold" nodeType="clickEffect" presetClass="entr" presetID="1" presetSubtype="0">
+                                  <p:stCondLst>
+                                    <p:cond delay="0"/>
+                                  </p:stCondLst>
+                                  <p:childTnLst>
+                                    <p:set>
+                                      <p:cBhvr>
+                                        <p:cTn dur="1" fill="hold">
+                                          <p:stCondLst>
+                                            <p:cond delay="0"/>
+                                          </p:stCondLst>
+                                        </p:cTn>
+                                        <p:tgtEl>
+                                          <p:spTgt spid="52">
+                                            <p:txEl>
+                                              <p:pRg end="1" st="1"/>
+                                            </p:txEl>
+                                          </p:spTgt>
+                                        </p:tgtEl>
+                                        <p:attrNameLst>
+                                          <p:attrName>style.visibility</p:attrName>
+                                        </p:attrNameLst>
+                                      </p:cBhvr>
+                                      <p:to>
+                                        <p:strVal val="visible"/>
+                                      </p:to>
+                                    </p:set>
+                                  </p:childTnLst>
+                                </p:cTn>
+                              </p:par>
+                            </p:childTnLst>
+                          </p:cTn>
+                        </p:par>
+                      </p:childTnLst>
+                    </p:cTn>
+                  </p:par>
+                  <p:par>
+                    <p:cTn fill="hold">
+                      <p:stCondLst>
+                        <p:cond delay="indefinite"/>
+                      </p:stCondLst>
+                      <p:childTnLst>
+                        <p:par>
+                          <p:cTn fill="hold">
+                            <p:stCondLst>
+                              <p:cond delay="0"/>
+                            </p:stCondLst>
+                            <p:childTnLst>
+                              <p:par>
+                                <p:cTn fill="hold" nodeType="clickEffect" presetClass="entr" presetID="1" presetSubtype="0">
+                                  <p:stCondLst>
+                                    <p:cond delay="0"/>
+                                  </p:stCondLst>
+                                  <p:childTnLst>
+                                    <p:set>
+                                      <p:cBhvr>
+                                        <p:cTn dur="1" fill="hold">
+                                          <p:stCondLst>
+                                            <p:cond delay="0"/>
+                                          </p:stCondLst>
+                                        </p:cTn>
+                                        <p:tgtEl>
+                                          <p:spTgt spid="52">
+                                            <p:txEl>
+                                              <p:pRg end="2" st="2"/>
+                                            </p:txEl>
+                                          </p:spTgt>
+                                        </p:tgtEl>
+                                        <p:attrNameLst>
+                                          <p:attrName>style.visibility</p:attrName>
+                                        </p:attrNameLst>
+                                      </p:cBhvr>
+                                      <p:to>
+                                        <p:strVal val="visible"/>
+                                      </p:to>
+                                    </p:set>
+                                  </p:childTnLst>
+                                </p:cTn>
+                              </p:par>
+                            </p:childTnLst>
+                          </p:cTn>
+                        </p:par>
+                      </p:childTnLst>
+                    </p:cTn>
+                  </p:par>
+                  <p:par>
+                    <p:cTn fill="hold">
+                      <p:stCondLst>
+                        <p:cond delay="indefinite"/>
+                      </p:stCondLst>
+                      <p:childTnLst>
+                        <p:par>
+                          <p:cTn fill="hold">
+                            <p:stCondLst>
+                              <p:cond delay="0"/>
+                            </p:stCondLst>
+                            <p:childTnLst>
+                              <p:par>
+                                <p:cTn fill="hold" nodeType="clickEffect" presetClass="entr" presetID="1" presetSubtype="0">
+                                  <p:stCondLst>
+                                    <p:cond delay="0"/>
+                                  </p:stCondLst>
+                                  <p:childTnLst>
+                                    <p:set>
+                                      <p:cBhvr>
+                                        <p:cTn dur="1" fill="hold">
+                                          <p:stCondLst>
+                                            <p:cond delay="0"/>
+                                          </p:stCondLst>
+                                        </p:cTn>
+                                        <p:tgtEl>
+                                          <p:spTgt spid="52">
+                                            <p:txEl>
+                                              <p:pRg end="3" st="3"/>
+                                            </p:txEl>
+                                          </p:spTgt>
+                                        </p:tgtEl>
+                                        <p:attrNameLst>
+                                          <p:attrName>style.visibility</p:attrName>
+                                        </p:attrNameLst>
+                                      </p:cBhvr>
+                                      <p:to>
+                                        <p:strVal val="visible"/>
+                                      </p:to>
+                                    </p:set>
+                                  </p:childTnLst>
+                                </p:cTn>
+                              </p:par>
+                            </p:childTnLst>
+                          </p:cTn>
+                        </p:par>
+                      </p:childTnLst>
+                    </p:cTn>
+                  </p:par>
+                  <p:par>
+                    <p:cTn fill="hold">
+                      <p:stCondLst>
+                        <p:cond delay="indefinite"/>
+                      </p:stCondLst>
+                      <p:childTnLst>
+                        <p:par>
+                          <p:cTn fill="hold">
+                            <p:stCondLst>
+                              <p:cond delay="0"/>
+                            </p:stCondLst>
+                            <p:childTnLst>
+                              <p:par>
+                                <p:cTn fill="hold" nodeType="clickEffect" presetClass="entr" presetID="1" presetSubtype="0">
+                                  <p:stCondLst>
+                                    <p:cond delay="0"/>
+                                  </p:stCondLst>
+                                  <p:childTnLst>
+                                    <p:set>
+                                      <p:cBhvr>
+                                        <p:cTn dur="1" fill="hold">
+                                          <p:stCondLst>
+                                            <p:cond delay="0"/>
+                                          </p:stCondLst>
+                                        </p:cTn>
+                                        <p:tgtEl>
+                                          <p:spTgt spid="52">
+                                            <p:txEl>
+                                              <p:pRg end="4" st="4"/>
+                                            </p:txEl>
+                                          </p:spTgt>
+                                        </p:tgtEl>
+                                        <p:attrNameLst>
+                                          <p:attrName>style.visibility</p:attrName>
+                                        </p:attrNameLst>
+                                      </p:cBhvr>
+                                      <p:to>
+                                        <p:strVal val="visible"/>
+                                      </p:to>
+                                    </p:set>
+                                  </p:childTnLst>
+                                </p:cTn>
+                              </p:par>
+                            </p:childTnLst>
+                          </p:cTn>
+                        </p:par>
+                      </p:childTnLst>
+                    </p:cTn>
+                  </p:par>
+                </p:childTnLst>
+              </p:cTn>
+              <p:prevCondLst>
+                <p:cond evt="onPrev">
+                  <p:tgtEl>
+                    <p:sldTgt/>
+                  </p:tgtEl>
+                </p:cond>
+              </p:prevCondLst>
+              <p:nextCondLst>
+                <p:cond evt="onNext">
+                  <p:tgtEl>
+                    <p:sldTgt/>
+                  </p:tgtEl>
+                </p:cond>
+              </p:nextCondLst>
+            </p:seq>
+          </p:childTnLst>
+        </p:cTn>
+      </p:par>
+    </p:tnLst>
+  </p:timing>
+</p:sld>
+</file>
+
+<file path=ppt/slides/slide5.xml><?xml version="1.0" encoding="utf-8"?>
+<p:sld xmlns:a="http://schemas.openxmlformats.org/drawingml/2006/main" xmlns:r="http://schemas.openxmlformats.org/officeDocument/2006/relationships" xmlns:mc="http://schemas.openxmlformats.org/markup-compatibility/2006" xmlns:mv="urn:schemas-microsoft-com:mac:vml" xmlns:p="http://schemas.openxmlformats.org/presentationml/2006/main" xmlns:c="http://schemas.openxmlformats.org/drawingml/2006/chart" xmlns:dgm="http://schemas.openxmlformats.org/drawingml/2006/diagram" xmlns:o="urn:schemas-microsoft-com:office:office" xmlns:v="urn:schemas-microsoft-com:vml" xmlns:pvml="urn:schemas-microsoft-com:office:powerpoint" xmlns:com="http://schemas.openxmlformats.org/drawingml/2006/compatibility" xmlns:p14="http://schemas.microsoft.com/office/powerpoint/2010/main" xmlns:p15="http://schemas.microsoft.com/office/powerpoint/2012/main" xmlns:ahyp="http://schemas.microsoft.com/office/drawing/2018/hyperlinkcolor">
+  <p:cSld>
+    <p:spTree>
+      <p:nvGrpSpPr>
         <p:cNvPr id="56" name="Shape 56"/>
         <p:cNvGrpSpPr/>
         <p:nvPr/>
@@ -19942,7 +20289,7 @@
 </p:sld>
 </file>
 
-<file path=ppt/slides/slide5.xml><?xml version="1.0" encoding="utf-8"?>
+<file path=ppt/slides/slide6.xml><?xml version="1.0" encoding="utf-8"?>
 <p:sld xmlns:a="http://schemas.openxmlformats.org/drawingml/2006/main" xmlns:r="http://schemas.openxmlformats.org/officeDocument/2006/relationships" xmlns:mc="http://schemas.openxmlformats.org/markup-compatibility/2006" xmlns:mv="urn:schemas-microsoft-com:mac:vml" xmlns:p="http://schemas.openxmlformats.org/presentationml/2006/main" xmlns:c="http://schemas.openxmlformats.org/drawingml/2006/chart" xmlns:dgm="http://schemas.openxmlformats.org/drawingml/2006/diagram" xmlns:o="urn:schemas-microsoft-com:office:office" xmlns:v="urn:schemas-microsoft-com:vml" xmlns:pvml="urn:schemas-microsoft-com:office:powerpoint" xmlns:com="http://schemas.openxmlformats.org/drawingml/2006/compatibility" xmlns:p14="http://schemas.microsoft.com/office/powerpoint/2010/main" xmlns:p15="http://schemas.microsoft.com/office/powerpoint/2012/main" xmlns:ahyp="http://schemas.microsoft.com/office/drawing/2018/hyperlinkcolor">
   <p:cSld>
     <p:spTree>
@@ -20452,7 +20799,7 @@
 </p:sld>
 </file>
 
-<file path=ppt/slides/slide6.xml><?xml version="1.0" encoding="utf-8"?>
+<file path=ppt/slides/slide7.xml><?xml version="1.0" encoding="utf-8"?>
 <p:sld xmlns:a="http://schemas.openxmlformats.org/drawingml/2006/main" xmlns:p="http://schemas.openxmlformats.org/presentationml/2006/main" xmlns:r="http://schemas.openxmlformats.org/officeDocument/2006/relationships">
   <p:cSld>
     <p:spTree>
@@ -20828,7 +21175,7 @@
 </p:sld>
 </file>
 
-<file path=ppt/slides/slide7.xml><?xml version="1.0" encoding="utf-8"?>
+<file path=ppt/slides/slide8.xml><?xml version="1.0" encoding="utf-8"?>
 <p:sld xmlns:a="http://schemas.openxmlformats.org/drawingml/2006/main" xmlns:r="http://schemas.openxmlformats.org/officeDocument/2006/relationships" xmlns:mc="http://schemas.openxmlformats.org/markup-compatibility/2006" xmlns:mv="urn:schemas-microsoft-com:mac:vml" xmlns:p="http://schemas.openxmlformats.org/presentationml/2006/main" xmlns:c="http://schemas.openxmlformats.org/drawingml/2006/chart" xmlns:dgm="http://schemas.openxmlformats.org/drawingml/2006/diagram" xmlns:o="urn:schemas-microsoft-com:office:office" xmlns:v="urn:schemas-microsoft-com:vml" xmlns:pvml="urn:schemas-microsoft-com:office:powerpoint" xmlns:com="http://schemas.openxmlformats.org/drawingml/2006/compatibility" xmlns:p14="http://schemas.microsoft.com/office/powerpoint/2010/main" xmlns:p15="http://schemas.microsoft.com/office/powerpoint/2012/main" xmlns:ahyp="http://schemas.microsoft.com/office/drawing/2018/hyperlinkcolor">
   <p:cSld>
     <p:spTree>
@@ -21705,7 +22052,7 @@
 </p:sld>
 </file>
 
-<file path=ppt/slides/slide8.xml><?xml version="1.0" encoding="utf-8"?>
+<file path=ppt/slides/slide9.xml><?xml version="1.0" encoding="utf-8"?>
 <p:sld xmlns:a="http://schemas.openxmlformats.org/drawingml/2006/main" xmlns:r="http://schemas.openxmlformats.org/officeDocument/2006/relationships" xmlns:mc="http://schemas.openxmlformats.org/markup-compatibility/2006" xmlns:mv="urn:schemas-microsoft-com:mac:vml" xmlns:p="http://schemas.openxmlformats.org/presentationml/2006/main" xmlns:c="http://schemas.openxmlformats.org/drawingml/2006/chart" xmlns:dgm="http://schemas.openxmlformats.org/drawingml/2006/diagram" xmlns:o="urn:schemas-microsoft-com:office:office" xmlns:v="urn:schemas-microsoft-com:vml" xmlns:pvml="urn:schemas-microsoft-com:office:powerpoint" xmlns:com="http://schemas.openxmlformats.org/drawingml/2006/compatibility" xmlns:p14="http://schemas.microsoft.com/office/powerpoint/2010/main" xmlns:p15="http://schemas.microsoft.com/office/powerpoint/2012/main" xmlns:ahyp="http://schemas.microsoft.com/office/drawing/2018/hyperlinkcolor">
   <p:cSld>
     <p:spTree>
@@ -21786,176 +22133,6 @@
           </a:prstGeom>
         </p:spPr>
       </p:pic>
-    </p:spTree>
-  </p:cSld>
-  <p:clrMapOvr>
-    <a:masterClrMapping/>
-  </p:clrMapOvr>
-</p:sld>
-</file>
-
-<file path=ppt/slides/slide9.xml><?xml version="1.0" encoding="utf-8"?>
-<p:sld xmlns:a="http://schemas.openxmlformats.org/drawingml/2006/main" xmlns:r="http://schemas.openxmlformats.org/officeDocument/2006/relationships" xmlns:mc="http://schemas.openxmlformats.org/markup-compatibility/2006" xmlns:mv="urn:schemas-microsoft-com:mac:vml" xmlns:p="http://schemas.openxmlformats.org/presentationml/2006/main" xmlns:c="http://schemas.openxmlformats.org/drawingml/2006/chart" xmlns:dgm="http://schemas.openxmlformats.org/drawingml/2006/diagram" xmlns:o="urn:schemas-microsoft-com:office:office" xmlns:v="urn:schemas-microsoft-com:vml" xmlns:pvml="urn:schemas-microsoft-com:office:powerpoint" xmlns:com="http://schemas.openxmlformats.org/drawingml/2006/compatibility" xmlns:p14="http://schemas.microsoft.com/office/powerpoint/2010/main" xmlns:p15="http://schemas.microsoft.com/office/powerpoint/2012/main" xmlns:ahyp="http://schemas.microsoft.com/office/drawing/2018/hyperlinkcolor">
-  <p:cSld>
-    <p:spTree>
-      <p:nvGrpSpPr>
-        <p:cNvPr id="83" name="Shape 83"/>
-        <p:cNvGrpSpPr/>
-        <p:nvPr/>
-      </p:nvGrpSpPr>
-      <p:grpSpPr>
-        <a:xfrm>
-          <a:off x="0" y="0"/>
-          <a:ext cx="0" cy="0"/>
-          <a:chOff x="0" y="0"/>
-          <a:chExt cx="0" cy="0"/>
-        </a:xfrm>
-      </p:grpSpPr>
-      <p:sp>
-        <p:nvSpPr>
-          <p:cNvPr id="84" name="Google Shape;84;p15"/>
-          <p:cNvSpPr txBox="1"/>
-          <p:nvPr>
-            <p:ph type="title"/>
-          </p:nvPr>
-        </p:nvSpPr>
-        <p:spPr>
-          <a:xfrm>
-            <a:off x="311700" y="195615"/>
-            <a:ext cx="8520600" cy="572700"/>
-          </a:xfrm>
-          <a:prstGeom prst="rect">
-            <a:avLst/>
-          </a:prstGeom>
-        </p:spPr>
-        <p:txBody>
-          <a:bodyPr anchorCtr="0" anchor="t" bIns="91425" lIns="91425" spcFirstLastPara="1" rIns="91425" wrap="square" tIns="91425">
-            <a:normAutofit fontScale="90000"/>
-          </a:bodyPr>
-          <a:lstStyle/>
-          <a:p>
-            <a:pPr indent="0" lvl="0" marL="0" rtl="0" algn="l">
-              <a:spcBef>
-                <a:spcPts val="0"/>
-              </a:spcBef>
-              <a:spcAft>
-                <a:spcPts val="0"/>
-              </a:spcAft>
-              <a:buNone/>
-            </a:pPr>
-            <a:r>
-              <a:rPr lang="en"/>
-              <a:t>Texture Region</a:t>
-            </a:r>
-            <a:endParaRPr/>
-          </a:p>
-        </p:txBody>
-      </p:sp>
-      <p:pic>
-        <p:nvPicPr>
-          <p:cNvPr id="85" name="Picture 87" descr="snake_atlas.png"/>
-          <p:cNvPicPr>
-            <a:picLocks noChangeAspect="1"/>
-          </p:cNvPicPr>
-          <p:nvPr/>
-        </p:nvPicPr>
-        <p:blipFill>
-          <a:blip r:embed="rId4"/>
-          <a:stretch>
-            <a:fillRect/>
-          </a:stretch>
-        </p:blipFill>
-        <p:spPr>
-          <a:xfrm>
-            <a:off x="3897617" y="1560179"/>
-            <a:ext cx="1348766" cy="2023149"/>
-          </a:xfrm>
-          <a:prstGeom prst="rect">
-            <a:avLst/>
-          </a:prstGeom>
-        </p:spPr>
-      </p:pic>
-      <p:sp>
-        <p:nvSpPr>
-          <p:cNvPr id="86" name="Google Shape;86;p15"/>
-          <p:cNvSpPr/>
-          <p:nvPr/>
-        </p:nvSpPr>
-        <p:spPr>
-          <a:xfrm>
-            <a:off x="3872328" y="1534890"/>
-            <a:ext cx="387769" cy="387769"/>
-          </a:xfrm>
-          <a:prstGeom prst="rect">
-            <a:avLst/>
-          </a:prstGeom>
-          <a:noFill/>
-          <a:ln cap="flat" cmpd="sng" w="19050">
-            <a:solidFill>
-              <a:schemeClr val="accent6"/>
-            </a:solidFill>
-            <a:prstDash val="solid"/>
-            <a:round/>
-            <a:headEnd len="sm" w="sm" type="none"/>
-            <a:tailEnd len="sm" w="sm" type="none"/>
-          </a:ln>
-        </p:spPr>
-        <p:txBody>
-          <a:bodyPr anchorCtr="0" anchor="ctr" bIns="91425" lIns="91425" spcFirstLastPara="1" rIns="91425" wrap="square" tIns="91425">
-            <a:noAutofit/>
-          </a:bodyPr>
-          <a:lstStyle/>
-          <a:p>
-            <a:pPr indent="0" lvl="0" marL="0" rtl="0" algn="ctr">
-              <a:spcBef>
-                <a:spcPts val="0"/>
-              </a:spcBef>
-              <a:spcAft>
-                <a:spcPts val="0"/>
-              </a:spcAft>
-              <a:buNone/>
-            </a:pPr>
-            <a:r>
-              <a:rPr/>
-              <a:t/>
-            </a:r>
-            <a:endParaRPr>
-              <a:latin typeface="Roboto Light"/>
-              <a:ea typeface="Roboto Light"/>
-              <a:cs typeface="Roboto Light"/>
-              <a:sym typeface="Roboto Light"/>
-            </a:endParaRPr>
-          </a:p>
-        </p:txBody>
-      </p:sp>
-      <p:cxnSp>
-        <p:nvCxnSpPr>
-          <p:cNvPr id="87" name="Google Shape;87;p15"/>
-          <p:cNvCxnSpPr>
-            <a:endCxn id="86" idx="0"/>
-          </p:cNvCxnSpPr>
-          <p:nvPr/>
-        </p:nvCxnSpPr>
-        <p:spPr>
-          <a:xfrm>
-            <a:off x="3571128" y="1084290"/>
-            <a:ext cx="435300" cy="450600"/>
-          </a:xfrm>
-          <a:prstGeom prst="straightConnector1">
-            <a:avLst/>
-          </a:prstGeom>
-          <a:noFill/>
-          <a:ln cap="flat" cmpd="sng" w="9525">
-            <a:solidFill>
-              <a:schemeClr val="accent6"/>
-            </a:solidFill>
-            <a:prstDash val="solid"/>
-            <a:round/>
-            <a:headEnd len="med" w="med" type="none"/>
-            <a:tailEnd len="med" w="med" type="triangle"/>
-          </a:ln>
-        </p:spPr>
-      </p:cxnSp>
     </p:spTree>
   </p:cSld>
   <p:clrMapOvr>

--- a/slides/03 Snake.pptx
+++ b/slides/03 Snake.pptx
@@ -19,18 +19,23 @@
     <p:sldId id="261" r:id="rId11"/>
     <p:sldId id="262" r:id="rId12"/>
     <p:sldId id="263" r:id="rId13"/>
+    <p:sldId id="308" r:id="rId24"/>
     <p:sldId id="264" r:id="rId14"/>
     <p:sldId id="265" r:id="rId15"/>
+    <p:sldId id="307" r:id="rId25"/>
     <p:sldId id="266" r:id="rId16"/>
     <p:sldId id="267" r:id="rId17"/>
     <p:sldId id="268" r:id="rId18"/>
+    <p:sldId id="306" r:id="rId26"/>
     <p:sldId id="288" r:id="rId38"/>
     <p:sldId id="289" r:id="rId39"/>
     <p:sldId id="290" r:id="rId40"/>
+    <p:sldId id="305" r:id="rId27"/>
     <p:sldId id="298" r:id="rId57"/>
     <p:sldId id="299" r:id="rId58"/>
     <p:sldId id="300" r:id="rId59"/>
     <p:sldId id="301" r:id="rId60"/>
+    <p:sldId id="304" r:id="rId28"/>
     <p:sldId id="281" r:id="rId31"/>
     <p:sldId id="282" r:id="rId32"/>
     <p:sldId id="283" r:id="rId33"/>
@@ -1211,6 +1216,69 @@
 </p:notes>
 </file>
 
+<file path=ppt/notesSlides/notesSlide14.xml><?xml version="1.0" encoding="utf-8"?>
+<p:notes xmlns:a="http://schemas.openxmlformats.org/drawingml/2006/main" xmlns:p="http://schemas.openxmlformats.org/presentationml/2006/main" xmlns:r="http://schemas.openxmlformats.org/officeDocument/2006/relationships">
+  <p:cSld>
+    <p:spTree>
+      <p:nvGrpSpPr>
+        <p:cNvPr id="1" name=""/>
+        <p:cNvGrpSpPr/>
+        <p:nvPr/>
+      </p:nvGrpSpPr>
+      <p:grpSpPr>
+        <a:xfrm>
+          <a:off x="0" y="0"/>
+          <a:ext cx="0" cy="0"/>
+          <a:chOff x="0" y="0"/>
+          <a:chExt cx="0" cy="0"/>
+        </a:xfrm>
+      </p:grpSpPr>
+      <p:sp>
+        <p:nvSpPr>
+          <p:cNvPr id="2" name="Slide Image Placeholder 1"/>
+          <p:cNvSpPr>
+            <a:spLocks noGrp="1"/>
+          </p:cNvSpPr>
+          <p:nvPr>
+            <p:ph type="sldImg" idx="2"/>
+          </p:nvPr>
+        </p:nvSpPr>
+        <p:spPr/>
+      </p:sp>
+      <p:sp>
+        <p:nvSpPr>
+          <p:cNvPr id="3" name="Notes Placeholder 2"/>
+          <p:cNvSpPr>
+            <a:spLocks noGrp="1"/>
+          </p:cNvSpPr>
+          <p:nvPr>
+            <p:ph type="body" idx="1"/>
+          </p:nvPr>
+        </p:nvSpPr>
+        <p:spPr/>
+        <p:txBody>
+          <a:bodyPr/>
+          <a:lstStyle/>
+          <a:p>
+            <a:r>
+              <a:t>Pairs, about 7 minutes. Speed: TickDuration in Snake. Keys: GameController only.</a:t>
+            </a:r>
+          </a:p>
+          <a:p>
+            <a:r>
+              <a:t>If there is time: press two turns within one tick in Snake6, then in Snake7, and compare.</a:t>
+            </a:r>
+          </a:p>
+        </p:txBody>
+      </p:sp>
+    </p:spTree>
+  </p:cSld>
+  <p:clrMapOvr>
+    <a:masterClrMapping/>
+  </p:clrMapOvr>
+</p:notes>
+</file>
+
 <file path=ppt/notesSlides/notesSlide15.xml><?xml version="1.0" encoding="utf-8"?>
 <p:notes xmlns:a="http://schemas.openxmlformats.org/drawingml/2006/main" xmlns:p="http://schemas.openxmlformats.org/presentationml/2006/main" xmlns:r="http://schemas.openxmlformats.org/officeDocument/2006/relationships">
   <p:cSld>
@@ -3249,6 +3317,127 @@
 </p:notes>
 </file>
 
+<file path=ppt/notesSlides/notesSlide38.xml><?xml version="1.0" encoding="utf-8"?>
+<p:notes xmlns:a="http://schemas.openxmlformats.org/drawingml/2006/main" xmlns:p="http://schemas.openxmlformats.org/presentationml/2006/main" xmlns:r="http://schemas.openxmlformats.org/officeDocument/2006/relationships">
+  <p:cSld>
+    <p:spTree>
+      <p:nvGrpSpPr>
+        <p:cNvPr id="1" name=""/>
+        <p:cNvGrpSpPr/>
+        <p:nvPr/>
+      </p:nvGrpSpPr>
+      <p:grpSpPr>
+        <a:xfrm>
+          <a:off x="0" y="0"/>
+          <a:ext cx="0" cy="0"/>
+          <a:chOff x="0" y="0"/>
+          <a:chExt cx="0" cy="0"/>
+        </a:xfrm>
+      </p:grpSpPr>
+      <p:sp>
+        <p:nvSpPr>
+          <p:cNvPr id="2" name="Slide Image Placeholder 1"/>
+          <p:cNvSpPr>
+            <a:spLocks noGrp="1"/>
+          </p:cNvSpPr>
+          <p:nvPr>
+            <p:ph type="sldImg" idx="2"/>
+          </p:nvPr>
+        </p:nvSpPr>
+        <p:spPr/>
+      </p:sp>
+      <p:sp>
+        <p:nvSpPr>
+          <p:cNvPr id="3" name="Notes Placeholder 2"/>
+          <p:cNvSpPr>
+            <a:spLocks noGrp="1"/>
+          </p:cNvSpPr>
+          <p:nvPr>
+            <p:ph type="body" idx="1"/>
+          </p:nvPr>
+        </p:nvSpPr>
+        <p:spPr/>
+        <p:txBody>
+          <a:bodyPr/>
+          <a:lstStyle/>
+          <a:p>
+            <a:r>
+              <a:t>Pairs, about 5 minutes, in Snake4.</a:t>
+            </a:r>
+          </a:p>
+          <a:p>
+            <a:r>
+              <a:t>Answer for the 20: the tileset has 16 tiles (0 to 15), so the game fails when it draws the room. Same lesson as the misspelled region: data errors appear at runtime.</a:t>
+            </a:r>
+          </a:p>
+        </p:txBody>
+      </p:sp>
+    </p:spTree>
+  </p:cSld>
+  <p:clrMapOvr>
+    <a:masterClrMapping/>
+  </p:clrMapOvr>
+</p:notes>
+</file>
+
+<file path=ppt/notesSlides/notesSlide39.xml><?xml version="1.0" encoding="utf-8"?>
+<p:notes xmlns:a="http://schemas.openxmlformats.org/drawingml/2006/main" xmlns:p="http://schemas.openxmlformats.org/presentationml/2006/main" xmlns:r="http://schemas.openxmlformats.org/officeDocument/2006/relationships">
+  <p:cSld>
+    <p:spTree>
+      <p:nvGrpSpPr>
+        <p:cNvPr id="1" name=""/>
+        <p:cNvGrpSpPr/>
+        <p:nvPr/>
+      </p:nvGrpSpPr>
+      <p:grpSpPr>
+        <a:xfrm>
+          <a:off x="0" y="0"/>
+          <a:ext cx="0" cy="0"/>
+          <a:chOff x="0" y="0"/>
+          <a:chExt cx="0" cy="0"/>
+        </a:xfrm>
+      </p:grpSpPr>
+      <p:sp>
+        <p:nvSpPr>
+          <p:cNvPr id="2" name="Slide Image Placeholder 1"/>
+          <p:cNvSpPr>
+            <a:spLocks noGrp="1"/>
+          </p:cNvSpPr>
+          <p:nvPr>
+            <p:ph type="sldImg" idx="2"/>
+          </p:nvPr>
+        </p:nvSpPr>
+        <p:spPr/>
+      </p:sp>
+      <p:sp>
+        <p:nvSpPr>
+          <p:cNvPr id="3" name="Notes Placeholder 2"/>
+          <p:cNvSpPr>
+            <a:spLocks noGrp="1"/>
+          </p:cNvSpPr>
+          <p:nvPr>
+            <p:ph type="body" idx="1"/>
+          </p:nvPr>
+        </p:nvSpPr>
+        <p:spPr/>
+        <p:txBody>
+          <a:bodyPr/>
+          <a:lstStyle/>
+          <a:p>
+            <a:r>
+              <a:t>Pairs, about 5 minutes, in Snake3. The delay attribute and one more Frame line. Ask afterwards: how much C# did you change? None.</a:t>
+            </a:r>
+          </a:p>
+        </p:txBody>
+      </p:sp>
+    </p:spTree>
+  </p:cSld>
+  <p:clrMapOvr>
+    <a:masterClrMapping/>
+  </p:clrMapOvr>
+</p:notes>
+</file>
+
 <file path=ppt/notesSlides/notesSlide4.xml><?xml version="1.0" encoding="utf-8"?>
 <p:notes xmlns:a="http://schemas.openxmlformats.org/drawingml/2006/main" xmlns:r="http://schemas.openxmlformats.org/officeDocument/2006/relationships" xmlns:mc="http://schemas.openxmlformats.org/markup-compatibility/2006" xmlns:mv="urn:schemas-microsoft-com:mac:vml" xmlns:p="http://schemas.openxmlformats.org/presentationml/2006/main" xmlns:c="http://schemas.openxmlformats.org/drawingml/2006/chart" xmlns:dgm="http://schemas.openxmlformats.org/drawingml/2006/diagram" xmlns:o="urn:schemas-microsoft-com:office:office" xmlns:v="urn:schemas-microsoft-com:vml" xmlns:pvml="urn:schemas-microsoft-com:office:powerpoint" xmlns:com="http://schemas.openxmlformats.org/drawingml/2006/compatibility" xmlns:p14="http://schemas.microsoft.com/office/powerpoint/2010/main" xmlns:p15="http://schemas.microsoft.com/office/powerpoint/2012/main" xmlns:ahyp="http://schemas.microsoft.com/office/drawing/2018/hyperlinkcolor" showMasterPhAnim="0" showMasterSp="0">
   <p:cSld>
@@ -3331,6 +3520,132 @@
           <a:p>
             <a:r>
               <a:t>Say: the site explains the ideas, the README helps you find them in the code, the slides are for today.</a:t>
+            </a:r>
+          </a:p>
+        </p:txBody>
+      </p:sp>
+    </p:spTree>
+  </p:cSld>
+  <p:clrMapOvr>
+    <a:masterClrMapping/>
+  </p:clrMapOvr>
+</p:notes>
+</file>
+
+<file path=ppt/notesSlides/notesSlide40.xml><?xml version="1.0" encoding="utf-8"?>
+<p:notes xmlns:a="http://schemas.openxmlformats.org/drawingml/2006/main" xmlns:p="http://schemas.openxmlformats.org/presentationml/2006/main" xmlns:r="http://schemas.openxmlformats.org/officeDocument/2006/relationships">
+  <p:cSld>
+    <p:spTree>
+      <p:nvGrpSpPr>
+        <p:cNvPr id="1" name=""/>
+        <p:cNvGrpSpPr/>
+        <p:nvPr/>
+      </p:nvGrpSpPr>
+      <p:grpSpPr>
+        <a:xfrm>
+          <a:off x="0" y="0"/>
+          <a:ext cx="0" cy="0"/>
+          <a:chOff x="0" y="0"/>
+          <a:chExt cx="0" cy="0"/>
+        </a:xfrm>
+      </p:grpSpPr>
+      <p:sp>
+        <p:nvSpPr>
+          <p:cNvPr id="2" name="Slide Image Placeholder 1"/>
+          <p:cNvSpPr>
+            <a:spLocks noGrp="1"/>
+          </p:cNvSpPr>
+          <p:nvPr>
+            <p:ph type="sldImg" idx="2"/>
+          </p:nvPr>
+        </p:nvSpPr>
+        <p:spPr/>
+      </p:sp>
+      <p:sp>
+        <p:nvSpPr>
+          <p:cNvPr id="3" name="Notes Placeholder 2"/>
+          <p:cNvSpPr>
+            <a:spLocks noGrp="1"/>
+          </p:cNvSpPr>
+          <p:nvPr>
+            <p:ph type="body" idx="1"/>
+          </p:nvPr>
+        </p:nvSpPr>
+        <p:spPr/>
+        <p:txBody>
+          <a:bodyPr/>
+          <a:lstStyle/>
+          <a:p>
+            <a:r>
+              <a:t>Pairs, about 5 minutes. Scale and rotation speed are at the top of Game1.</a:t>
+            </a:r>
+          </a:p>
+          <a:p>
+            <a:r>
+              <a:t>Answer: without CenterOrigin the bat spins around its top-left corner, because the origin is where rotation and scale start from.</a:t>
+            </a:r>
+          </a:p>
+        </p:txBody>
+      </p:sp>
+    </p:spTree>
+  </p:cSld>
+  <p:clrMapOvr>
+    <a:masterClrMapping/>
+  </p:clrMapOvr>
+</p:notes>
+</file>
+
+<file path=ppt/notesSlides/notesSlide41.xml><?xml version="1.0" encoding="utf-8"?>
+<p:notes xmlns:a="http://schemas.openxmlformats.org/drawingml/2006/main" xmlns:p="http://schemas.openxmlformats.org/presentationml/2006/main" xmlns:r="http://schemas.openxmlformats.org/officeDocument/2006/relationships">
+  <p:cSld>
+    <p:spTree>
+      <p:nvGrpSpPr>
+        <p:cNvPr id="1" name=""/>
+        <p:cNvGrpSpPr/>
+        <p:nvPr/>
+      </p:nvGrpSpPr>
+      <p:grpSpPr>
+        <a:xfrm>
+          <a:off x="0" y="0"/>
+          <a:ext cx="0" cy="0"/>
+          <a:chOff x="0" y="0"/>
+          <a:chExt cx="0" cy="0"/>
+        </a:xfrm>
+      </p:grpSpPr>
+      <p:sp>
+        <p:nvSpPr>
+          <p:cNvPr id="2" name="Slide Image Placeholder 1"/>
+          <p:cNvSpPr>
+            <a:spLocks noGrp="1"/>
+          </p:cNvSpPr>
+          <p:nvPr>
+            <p:ph type="sldImg" idx="2"/>
+          </p:nvPr>
+        </p:nvSpPr>
+        <p:spPr/>
+      </p:sp>
+      <p:sp>
+        <p:nvSpPr>
+          <p:cNvPr id="3" name="Notes Placeholder 2"/>
+          <p:cNvSpPr>
+            <a:spLocks noGrp="1"/>
+          </p:cNvSpPr>
+          <p:nvPr>
+            <p:ph type="body" idx="1"/>
+          </p:nvPr>
+        </p:nvSpPr>
+        <p:spPr/>
+        <p:txBody>
+          <a:bodyPr/>
+          <a:lstStyle/>
+          <a:p>
+            <a:r>
+              <a:t>Pairs, about 5 minutes, in Snake1. Moving the bat-1 rectangle is enough; no C#.</a:t>
+            </a:r>
+          </a:p>
+          <a:p>
+            <a:r>
+              <a:t>Ask about the misspelling. Answer: the game stops at start-up (the atlas looks names up in a dictionary). A mistake in data shows up when the game runs, not when it compiles.</a:t>
             </a:r>
           </a:p>
         </p:txBody>
@@ -7774,6 +8089,128 @@
 </file>
 
 <file path=ppt/slides/slide12.xml><?xml version="1.0" encoding="utf-8"?>
+<p:sld xmlns:a="http://schemas.openxmlformats.org/drawingml/2006/main" xmlns:p="http://schemas.openxmlformats.org/presentationml/2006/main" xmlns:r="http://schemas.openxmlformats.org/officeDocument/2006/relationships">
+  <p:cSld>
+    <p:spTree>
+      <p:nvGrpSpPr>
+        <p:cNvPr id="1" name=""/>
+        <p:cNvGrpSpPr/>
+        <p:nvPr/>
+      </p:nvGrpSpPr>
+      <p:grpSpPr/>
+      <p:sp>
+        <p:nvSpPr>
+          <p:cNvPr id="2" name="Title 1"/>
+          <p:cNvSpPr>
+            <a:spLocks noGrp="1"/>
+          </p:cNvSpPr>
+          <p:nvPr>
+            <p:ph type="title"/>
+          </p:nvPr>
+        </p:nvSpPr>
+        <p:spPr/>
+        <p:txBody>
+          <a:bodyPr/>
+          <a:lstStyle/>
+          <a:p>
+            <a:pPr indent="0" lvl="0" marL="0" rtl="0" algn="l">
+              <a:spcBef>
+                <a:spcPts val="0"/>
+              </a:spcBef>
+              <a:spcAft>
+                <a:spcPts val="0"/>
+              </a:spcAft>
+              <a:buNone/>
+            </a:pPr>
+            <a:r>
+              <a:rPr lang="en"/>
+              <a:t>Try It: Regions by Name</a:t>
+            </a:r>
+            <a:endParaRPr/>
+          </a:p>
+        </p:txBody>
+      </p:sp>
+      <p:sp>
+        <p:nvSpPr>
+          <p:cNvPr id="3" name="Text Placeholder 2"/>
+          <p:cNvSpPr>
+            <a:spLocks noGrp="1"/>
+          </p:cNvSpPr>
+          <p:nvPr>
+            <p:ph type="body" idx="1"/>
+          </p:nvPr>
+        </p:nvSpPr>
+        <p:spPr>
+          <a:xfrm>
+            <a:off x="311700" y="885950"/>
+            <a:ext cx="8520600" cy="1289304"/>
+          </a:xfrm>
+        </p:spPr>
+        <p:txBody>
+          <a:bodyPr/>
+          <a:lstStyle/>
+          <a:p>
+            <a:pPr indent="-330200" lvl="0" marL="457200" rtl="0" algn="l">
+              <a:spcBef>
+                <a:spcPts val="0"/>
+              </a:spcBef>
+              <a:spcAft>
+                <a:spcPts val="0"/>
+              </a:spcAft>
+              <a:buSzPts val="1600"/>
+              <a:buChar char="●"/>
+            </a:pPr>
+            <a:r>
+              <a:rPr lang="en"/>
+              <a:t>In Snake1, only atlas-definition.xml changes:</a:t>
+            </a:r>
+            <a:endParaRPr/>
+          </a:p>
+          <a:p>
+            <a:pPr indent="-330200" lvl="0" marL="457200" rtl="0" algn="l">
+              <a:spcBef>
+                <a:spcPts val="0"/>
+              </a:spcBef>
+              <a:spcAft>
+                <a:spcPts val="0"/>
+              </a:spcAft>
+              <a:buSzPts val="1600"/>
+              <a:buChar char="●"/>
+            </a:pPr>
+            <a:r>
+              <a:rPr lang="en"/>
+              <a:t>Draw the bat with its second frame (x 20, y 20)</a:t>
+            </a:r>
+            <a:endParaRPr/>
+          </a:p>
+          <a:p>
+            <a:pPr indent="-330200" lvl="0" marL="457200" rtl="0" algn="l">
+              <a:spcBef>
+                <a:spcPts val="0"/>
+              </a:spcBef>
+              <a:spcAft>
+                <a:spcPts val="0"/>
+              </a:spcAft>
+              <a:buSzPts val="1600"/>
+              <a:buChar char="●"/>
+            </a:pPr>
+            <a:r>
+              <a:rPr lang="en"/>
+              <a:t>Then misspell bat-1 in the XML. What happens, and when?</a:t>
+            </a:r>
+            <a:endParaRPr/>
+          </a:p>
+        </p:txBody>
+      </p:sp>
+    </p:spTree>
+  </p:cSld>
+  <p:clrMapOvr>
+    <a:masterClrMapping/>
+  </p:clrMapOvr>
+</p:sld>
+</file>
+
+<file path=ppt/slides/slide13.xml><?xml version="1.0" encoding="utf-8"?>
 <p:sld xmlns:a="http://schemas.openxmlformats.org/drawingml/2006/main" xmlns:r="http://schemas.openxmlformats.org/officeDocument/2006/relationships" xmlns:mc="http://schemas.openxmlformats.org/markup-compatibility/2006" xmlns:mv="urn:schemas-microsoft-com:mac:vml" xmlns:p="http://schemas.openxmlformats.org/presentationml/2006/main" xmlns:c="http://schemas.openxmlformats.org/drawingml/2006/chart" xmlns:dgm="http://schemas.openxmlformats.org/drawingml/2006/diagram" xmlns:o="urn:schemas-microsoft-com:office:office" xmlns:v="urn:schemas-microsoft-com:vml" xmlns:pvml="urn:schemas-microsoft-com:office:powerpoint" xmlns:com="http://schemas.openxmlformats.org/drawingml/2006/compatibility" xmlns:p14="http://schemas.microsoft.com/office/powerpoint/2010/main" xmlns:p15="http://schemas.microsoft.com/office/powerpoint/2012/main" xmlns:ahyp="http://schemas.microsoft.com/office/drawing/2018/hyperlinkcolor">
   <p:cSld>
     <p:spTree>
@@ -8509,7 +8946,7 @@
 </p:sld>
 </file>
 
-<file path=ppt/slides/slide13.xml><?xml version="1.0" encoding="utf-8"?>
+<file path=ppt/slides/slide14.xml><?xml version="1.0" encoding="utf-8"?>
 <p:sld xmlns:a="http://schemas.openxmlformats.org/drawingml/2006/main" xmlns:r="http://schemas.openxmlformats.org/officeDocument/2006/relationships" xmlns:mc="http://schemas.openxmlformats.org/markup-compatibility/2006" xmlns:mv="urn:schemas-microsoft-com:mac:vml" xmlns:p="http://schemas.openxmlformats.org/presentationml/2006/main" xmlns:c="http://schemas.openxmlformats.org/drawingml/2006/chart" xmlns:dgm="http://schemas.openxmlformats.org/drawingml/2006/diagram" xmlns:o="urn:schemas-microsoft-com:office:office" xmlns:v="urn:schemas-microsoft-com:vml" xmlns:pvml="urn:schemas-microsoft-com:office:powerpoint" xmlns:com="http://schemas.openxmlformats.org/drawingml/2006/compatibility" xmlns:p14="http://schemas.microsoft.com/office/powerpoint/2010/main" xmlns:p15="http://schemas.microsoft.com/office/powerpoint/2012/main" xmlns:ahyp="http://schemas.microsoft.com/office/drawing/2018/hyperlinkcolor">
   <p:cSld>
     <p:spTree>
@@ -8643,7 +9080,129 @@
 </p:sld>
 </file>
 
-<file path=ppt/slides/slide14.xml><?xml version="1.0" encoding="utf-8"?>
+<file path=ppt/slides/slide15.xml><?xml version="1.0" encoding="utf-8"?>
+<p:sld xmlns:a="http://schemas.openxmlformats.org/drawingml/2006/main" xmlns:p="http://schemas.openxmlformats.org/presentationml/2006/main" xmlns:r="http://schemas.openxmlformats.org/officeDocument/2006/relationships">
+  <p:cSld>
+    <p:spTree>
+      <p:nvGrpSpPr>
+        <p:cNvPr id="1" name=""/>
+        <p:cNvGrpSpPr/>
+        <p:nvPr/>
+      </p:nvGrpSpPr>
+      <p:grpSpPr/>
+      <p:sp>
+        <p:nvSpPr>
+          <p:cNvPr id="2" name="Title 1"/>
+          <p:cNvSpPr>
+            <a:spLocks noGrp="1"/>
+          </p:cNvSpPr>
+          <p:nvPr>
+            <p:ph type="title"/>
+          </p:nvPr>
+        </p:nvSpPr>
+        <p:spPr/>
+        <p:txBody>
+          <a:bodyPr/>
+          <a:lstStyle/>
+          <a:p>
+            <a:pPr indent="0" lvl="0" marL="0" rtl="0" algn="l">
+              <a:spcBef>
+                <a:spcPts val="0"/>
+              </a:spcBef>
+              <a:spcAft>
+                <a:spcPts val="0"/>
+              </a:spcAft>
+              <a:buNone/>
+            </a:pPr>
+            <a:r>
+              <a:rPr lang="en"/>
+              <a:t>Try It: A Sprite</a:t>
+            </a:r>
+            <a:endParaRPr/>
+          </a:p>
+        </p:txBody>
+      </p:sp>
+      <p:sp>
+        <p:nvSpPr>
+          <p:cNvPr id="3" name="Text Placeholder 2"/>
+          <p:cNvSpPr>
+            <a:spLocks noGrp="1"/>
+          </p:cNvSpPr>
+          <p:nvPr>
+            <p:ph type="body" idx="1"/>
+          </p:nvPr>
+        </p:nvSpPr>
+        <p:spPr>
+          <a:xfrm>
+            <a:off x="311700" y="885950"/>
+            <a:ext cx="8520600" cy="1289304"/>
+          </a:xfrm>
+        </p:spPr>
+        <p:txBody>
+          <a:bodyPr/>
+          <a:lstStyle/>
+          <a:p>
+            <a:pPr indent="-330200" lvl="0" marL="457200" rtl="0" algn="l">
+              <a:spcBef>
+                <a:spcPts val="0"/>
+              </a:spcBef>
+              <a:spcAft>
+                <a:spcPts val="0"/>
+              </a:spcAft>
+              <a:buSzPts val="1600"/>
+              <a:buChar char="●"/>
+            </a:pPr>
+            <a:r>
+              <a:rPr lang="en"/>
+              <a:t>In Snake2:</a:t>
+            </a:r>
+            <a:endParaRPr/>
+          </a:p>
+          <a:p>
+            <a:pPr indent="-330200" lvl="0" marL="457200" rtl="0" algn="l">
+              <a:spcBef>
+                <a:spcPts val="0"/>
+              </a:spcBef>
+              <a:spcAft>
+                <a:spcPts val="0"/>
+              </a:spcAft>
+              <a:buSzPts val="1600"/>
+              <a:buChar char="●"/>
+            </a:pPr>
+            <a:r>
+              <a:rPr lang="en"/>
+              <a:t>Make the bat bigger, and spin it the other way</a:t>
+            </a:r>
+            <a:endParaRPr/>
+          </a:p>
+          <a:p>
+            <a:pPr indent="-330200" lvl="0" marL="457200" rtl="0" algn="l">
+              <a:spcBef>
+                <a:spcPts val="0"/>
+              </a:spcBef>
+              <a:spcAft>
+                <a:spcPts val="0"/>
+              </a:spcAft>
+              <a:buSzPts val="1600"/>
+              <a:buChar char="●"/>
+            </a:pPr>
+            <a:r>
+              <a:rPr lang="en"/>
+              <a:t>Then remove CenterOrigin(). What changes, and why?</a:t>
+            </a:r>
+            <a:endParaRPr/>
+          </a:p>
+        </p:txBody>
+      </p:sp>
+    </p:spTree>
+  </p:cSld>
+  <p:clrMapOvr>
+    <a:masterClrMapping/>
+  </p:clrMapOvr>
+</p:sld>
+</file>
+
+<file path=ppt/slides/slide16.xml><?xml version="1.0" encoding="utf-8"?>
 <p:sld xmlns:a="http://schemas.openxmlformats.org/drawingml/2006/main" xmlns:r="http://schemas.openxmlformats.org/officeDocument/2006/relationships" xmlns:mc="http://schemas.openxmlformats.org/markup-compatibility/2006" xmlns:mv="urn:schemas-microsoft-com:mac:vml" xmlns:p="http://schemas.openxmlformats.org/presentationml/2006/main" xmlns:c="http://schemas.openxmlformats.org/drawingml/2006/chart" xmlns:dgm="http://schemas.openxmlformats.org/drawingml/2006/diagram" xmlns:o="urn:schemas-microsoft-com:office:office" xmlns:v="urn:schemas-microsoft-com:vml" xmlns:pvml="urn:schemas-microsoft-com:office:powerpoint" xmlns:com="http://schemas.openxmlformats.org/drawingml/2006/compatibility" xmlns:p14="http://schemas.microsoft.com/office/powerpoint/2010/main" xmlns:p15="http://schemas.microsoft.com/office/powerpoint/2012/main" xmlns:ahyp="http://schemas.microsoft.com/office/drawing/2018/hyperlinkcolor">
   <p:cSld>
     <p:spTree>
@@ -8736,7 +9295,7 @@
 </p:sld>
 </file>
 
-<file path=ppt/slides/slide15.xml><?xml version="1.0" encoding="utf-8"?>
+<file path=ppt/slides/slide17.xml><?xml version="1.0" encoding="utf-8"?>
 <p:sld xmlns:a="http://schemas.openxmlformats.org/drawingml/2006/main" xmlns:r="http://schemas.openxmlformats.org/officeDocument/2006/relationships" xmlns:mc="http://schemas.openxmlformats.org/markup-compatibility/2006" xmlns:mv="urn:schemas-microsoft-com:mac:vml" xmlns:p="http://schemas.openxmlformats.org/presentationml/2006/main" xmlns:c="http://schemas.openxmlformats.org/drawingml/2006/chart" xmlns:dgm="http://schemas.openxmlformats.org/drawingml/2006/diagram" xmlns:o="urn:schemas-microsoft-com:office:office" xmlns:v="urn:schemas-microsoft-com:vml" xmlns:pvml="urn:schemas-microsoft-com:office:powerpoint" xmlns:com="http://schemas.openxmlformats.org/drawingml/2006/compatibility" xmlns:p14="http://schemas.microsoft.com/office/powerpoint/2010/main" xmlns:p15="http://schemas.microsoft.com/office/powerpoint/2012/main" xmlns:ahyp="http://schemas.microsoft.com/office/drawing/2018/hyperlinkcolor">
   <p:cSld>
     <p:spTree>
@@ -8900,7 +9459,7 @@
 </p:sld>
 </file>
 
-<file path=ppt/slides/slide16.xml><?xml version="1.0" encoding="utf-8"?>
+<file path=ppt/slides/slide18.xml><?xml version="1.0" encoding="utf-8"?>
 <p:sld xmlns:a="http://schemas.openxmlformats.org/drawingml/2006/main" xmlns:r="http://schemas.openxmlformats.org/officeDocument/2006/relationships" xmlns:mc="http://schemas.openxmlformats.org/markup-compatibility/2006" xmlns:mv="urn:schemas-microsoft-com:mac:vml" xmlns:p="http://schemas.openxmlformats.org/presentationml/2006/main" xmlns:c="http://schemas.openxmlformats.org/drawingml/2006/chart" xmlns:dgm="http://schemas.openxmlformats.org/drawingml/2006/diagram" xmlns:o="urn:schemas-microsoft-com:office:office" xmlns:v="urn:schemas-microsoft-com:vml" xmlns:pvml="urn:schemas-microsoft-com:office:powerpoint" xmlns:com="http://schemas.openxmlformats.org/drawingml/2006/compatibility" xmlns:p14="http://schemas.microsoft.com/office/powerpoint/2010/main" xmlns:p15="http://schemas.microsoft.com/office/powerpoint/2012/main" xmlns:ahyp="http://schemas.microsoft.com/office/drawing/2018/hyperlinkcolor">
   <p:cSld>
     <p:spTree>
@@ -9034,7 +9593,242 @@
 </p:sld>
 </file>
 
-<file path=ppt/slides/slide17.xml><?xml version="1.0" encoding="utf-8"?>
+<file path=ppt/slides/slide19.xml><?xml version="1.0" encoding="utf-8"?>
+<p:sld xmlns:a="http://schemas.openxmlformats.org/drawingml/2006/main" xmlns:p="http://schemas.openxmlformats.org/presentationml/2006/main" xmlns:r="http://schemas.openxmlformats.org/officeDocument/2006/relationships">
+  <p:cSld>
+    <p:spTree>
+      <p:nvGrpSpPr>
+        <p:cNvPr id="1" name=""/>
+        <p:cNvGrpSpPr/>
+        <p:nvPr/>
+      </p:nvGrpSpPr>
+      <p:grpSpPr/>
+      <p:sp>
+        <p:nvSpPr>
+          <p:cNvPr id="2" name="Title 1"/>
+          <p:cNvSpPr>
+            <a:spLocks noGrp="1"/>
+          </p:cNvSpPr>
+          <p:nvPr>
+            <p:ph type="title"/>
+          </p:nvPr>
+        </p:nvSpPr>
+        <p:spPr/>
+        <p:txBody>
+          <a:bodyPr/>
+          <a:lstStyle/>
+          <a:p>
+            <a:pPr indent="0" lvl="0" marL="0" rtl="0" algn="l">
+              <a:spcBef>
+                <a:spcPts val="0"/>
+              </a:spcBef>
+              <a:spcAft>
+                <a:spcPts val="0"/>
+              </a:spcAft>
+              <a:buNone/>
+            </a:pPr>
+            <a:r>
+              <a:rPr lang="en"/>
+              <a:t>Try It: Animation Speed</a:t>
+            </a:r>
+            <a:endParaRPr/>
+          </a:p>
+        </p:txBody>
+      </p:sp>
+      <p:sp>
+        <p:nvSpPr>
+          <p:cNvPr id="3" name="Text Placeholder 2"/>
+          <p:cNvSpPr>
+            <a:spLocks noGrp="1"/>
+          </p:cNvSpPr>
+          <p:nvPr>
+            <p:ph type="body" idx="1"/>
+          </p:nvPr>
+        </p:nvSpPr>
+        <p:spPr>
+          <a:xfrm>
+            <a:off x="311700" y="885950"/>
+            <a:ext cx="8520600" cy="1289304"/>
+          </a:xfrm>
+        </p:spPr>
+        <p:txBody>
+          <a:bodyPr/>
+          <a:lstStyle/>
+          <a:p>
+            <a:pPr indent="-330200" lvl="0" marL="457200" rtl="0" algn="l">
+              <a:spcBef>
+                <a:spcPts val="0"/>
+              </a:spcBef>
+              <a:spcAft>
+                <a:spcPts val="0"/>
+              </a:spcAft>
+              <a:buSzPts val="1600"/>
+              <a:buChar char="●"/>
+            </a:pPr>
+            <a:r>
+              <a:rPr lang="en"/>
+              <a:t>In the XML only:</a:t>
+            </a:r>
+            <a:endParaRPr/>
+          </a:p>
+          <a:p>
+            <a:pPr indent="-330200" lvl="0" marL="457200" rtl="0" algn="l">
+              <a:spcBef>
+                <a:spcPts val="0"/>
+              </a:spcBef>
+              <a:spcAft>
+                <a:spcPts val="0"/>
+              </a:spcAft>
+              <a:buSzPts val="1600"/>
+              <a:buChar char="●"/>
+            </a:pPr>
+            <a:r>
+              <a:rPr lang="en"/>
+              <a:t>Make the bat flap twice as fast, and the snake breathe slower</a:t>
+            </a:r>
+            <a:endParaRPr/>
+          </a:p>
+          <a:p>
+            <a:pPr indent="-330200" lvl="0" marL="457200" rtl="0" algn="l">
+              <a:spcBef>
+                <a:spcPts val="0"/>
+              </a:spcBef>
+              <a:spcAft>
+                <a:spcPts val="0"/>
+              </a:spcAft>
+              <a:buSzPts val="1600"/>
+              <a:buChar char="●"/>
+            </a:pPr>
+            <a:r>
+              <a:rPr lang="en"/>
+              <a:t>Give the bat’s animation one more frame</a:t>
+            </a:r>
+            <a:endParaRPr/>
+          </a:p>
+        </p:txBody>
+      </p:sp>
+    </p:spTree>
+  </p:cSld>
+  <p:clrMapOvr>
+    <a:masterClrMapping/>
+  </p:clrMapOvr>
+</p:sld>
+</file>
+
+<file path=ppt/slides/slide2.xml><?xml version="1.0" encoding="utf-8"?>
+<p:sld xmlns:a="http://schemas.openxmlformats.org/drawingml/2006/main" xmlns:p="http://schemas.openxmlformats.org/presentationml/2006/main" xmlns:r="http://schemas.openxmlformats.org/officeDocument/2006/relationships">
+  <p:cSld>
+    <p:spTree>
+      <p:nvGrpSpPr>
+        <p:cNvPr id="1" name=""/>
+        <p:cNvGrpSpPr/>
+        <p:nvPr/>
+      </p:nvGrpSpPr>
+      <p:grpSpPr/>
+      <p:sp>
+        <p:nvSpPr>
+          <p:cNvPr id="2" name="Title 1"/>
+          <p:cNvSpPr>
+            <a:spLocks noGrp="1"/>
+          </p:cNvSpPr>
+          <p:nvPr>
+            <p:ph type="title"/>
+          </p:nvPr>
+        </p:nvSpPr>
+        <p:spPr>
+          <a:xfrm>
+            <a:off x="311700" y="195615"/>
+            <a:ext cx="8520600" cy="572700"/>
+          </a:xfrm>
+        </p:spPr>
+        <p:txBody>
+          <a:bodyPr/>
+          <a:lstStyle/>
+          <a:p>
+            <a:pPr indent="0" lvl="0" marL="0" rtl="0" algn="l">
+              <a:spcBef>
+                <a:spcPts val="0"/>
+              </a:spcBef>
+              <a:spcAft>
+                <a:spcPts val="0"/>
+              </a:spcAft>
+              <a:buNone/>
+            </a:pPr>
+            <a:r>
+              <a:rPr lang="en"/>
+              <a:t>Snake</a:t>
+            </a:r>
+            <a:endParaRPr/>
+          </a:p>
+        </p:txBody>
+      </p:sp>
+      <p:pic>
+        <p:nvPicPr>
+          <p:cNvPr id="3" name="Picture 2" descr="snake.gif"/>
+          <p:cNvPicPr>
+            <a:picLocks noChangeAspect="1"/>
+          </p:cNvPicPr>
+          <p:nvPr/>
+        </p:nvPicPr>
+        <p:blipFill>
+          <a:blip r:embed="rId2"/>
+          <a:stretch>
+            <a:fillRect/>
+          </a:stretch>
+        </p:blipFill>
+        <p:spPr>
+          <a:xfrm>
+            <a:off x="2743200" y="960120"/>
+            <a:ext cx="3657600" cy="3657600"/>
+          </a:xfrm>
+          <a:prstGeom prst="rect">
+            <a:avLst/>
+          </a:prstGeom>
+        </p:spPr>
+      </p:pic>
+      <p:sp>
+        <p:nvSpPr>
+          <p:cNvPr id="4" name="TextBox 3"/>
+          <p:cNvSpPr txBox="1"/>
+          <p:nvPr/>
+        </p:nvSpPr>
+        <p:spPr>
+          <a:xfrm>
+            <a:off x="457200" y="4736592"/>
+            <a:ext cx="8229600" cy="274320"/>
+          </a:xfrm>
+          <a:prstGeom prst="rect">
+            <a:avLst/>
+          </a:prstGeom>
+          <a:noFill/>
+        </p:spPr>
+        <p:txBody>
+          <a:bodyPr wrap="square">
+            <a:spAutoFit/>
+          </a:bodyPr>
+          <a:lstStyle/>
+          <a:p>
+            <a:pPr algn="ctr"/>
+            <a:r>
+              <a:rPr sz="900" b="0" i="0">
+                <a:solidFill>
+                  <a:srgbClr val="9AA3AB"/>
+                </a:solidFill>
+              </a:rPr>
+              <a:t>Snake goes back to Blockade (Gremlin, 1976). Image: Ustone07, CC BY-SA 3.0, via Wikimedia Commons.</a:t>
+            </a:r>
+          </a:p>
+        </p:txBody>
+      </p:sp>
+    </p:spTree>
+  </p:cSld>
+  <p:clrMapOvr>
+    <a:masterClrMapping/>
+  </p:clrMapOvr>
+</p:sld>
+</file>
+
+<file path=ppt/slides/slide20.xml><?xml version="1.0" encoding="utf-8"?>
 <p:sld xmlns:a="http://schemas.openxmlformats.org/drawingml/2006/main" xmlns:r="http://schemas.openxmlformats.org/officeDocument/2006/relationships" xmlns:mc="http://schemas.openxmlformats.org/markup-compatibility/2006" xmlns:mv="urn:schemas-microsoft-com:mac:vml" xmlns:p="http://schemas.openxmlformats.org/presentationml/2006/main" xmlns:c="http://schemas.openxmlformats.org/drawingml/2006/chart" xmlns:dgm="http://schemas.openxmlformats.org/drawingml/2006/diagram" xmlns:o="urn:schemas-microsoft-com:office:office" xmlns:v="urn:schemas-microsoft-com:vml" xmlns:pvml="urn:schemas-microsoft-com:office:powerpoint" xmlns:com="http://schemas.openxmlformats.org/drawingml/2006/compatibility" xmlns:p14="http://schemas.microsoft.com/office/powerpoint/2010/main" xmlns:p15="http://schemas.microsoft.com/office/powerpoint/2012/main" xmlns:ahyp="http://schemas.microsoft.com/office/drawing/2018/hyperlinkcolor">
   <p:cSld>
     <p:spTree>
@@ -9267,7 +10061,7 @@
 </p:sld>
 </file>
 
-<file path=ppt/slides/slide18.xml><?xml version="1.0" encoding="utf-8"?>
+<file path=ppt/slides/slide21.xml><?xml version="1.0" encoding="utf-8"?>
 <p:sld xmlns:a="http://schemas.openxmlformats.org/drawingml/2006/main" xmlns:r="http://schemas.openxmlformats.org/officeDocument/2006/relationships" xmlns:mc="http://schemas.openxmlformats.org/markup-compatibility/2006" xmlns:mv="urn:schemas-microsoft-com:mac:vml" xmlns:p="http://schemas.openxmlformats.org/presentationml/2006/main" xmlns:c="http://schemas.openxmlformats.org/drawingml/2006/chart" xmlns:dgm="http://schemas.openxmlformats.org/drawingml/2006/diagram" xmlns:o="urn:schemas-microsoft-com:office:office" xmlns:v="urn:schemas-microsoft-com:vml" xmlns:pvml="urn:schemas-microsoft-com:office:powerpoint" xmlns:com="http://schemas.openxmlformats.org/drawingml/2006/compatibility" xmlns:p14="http://schemas.microsoft.com/office/powerpoint/2010/main" xmlns:p15="http://schemas.microsoft.com/office/powerpoint/2012/main" xmlns:ahyp="http://schemas.microsoft.com/office/drawing/2018/hyperlinkcolor">
   <p:cSld>
     <p:spTree>
@@ -10366,7 +11160,7 @@
 </p:sld>
 </file>
 
-<file path=ppt/slides/slide19.xml><?xml version="1.0" encoding="utf-8"?>
+<file path=ppt/slides/slide22.xml><?xml version="1.0" encoding="utf-8"?>
 <p:sld xmlns:a="http://schemas.openxmlformats.org/drawingml/2006/main" xmlns:r="http://schemas.openxmlformats.org/officeDocument/2006/relationships" xmlns:mc="http://schemas.openxmlformats.org/markup-compatibility/2006" xmlns:mv="urn:schemas-microsoft-com:mac:vml" xmlns:p="http://schemas.openxmlformats.org/presentationml/2006/main" xmlns:c="http://schemas.openxmlformats.org/drawingml/2006/chart" xmlns:dgm="http://schemas.openxmlformats.org/drawingml/2006/diagram" xmlns:o="urn:schemas-microsoft-com:office:office" xmlns:v="urn:schemas-microsoft-com:vml" xmlns:pvml="urn:schemas-microsoft-com:office:powerpoint" xmlns:com="http://schemas.openxmlformats.org/drawingml/2006/compatibility" xmlns:p14="http://schemas.microsoft.com/office/powerpoint/2010/main" xmlns:p15="http://schemas.microsoft.com/office/powerpoint/2012/main" xmlns:ahyp="http://schemas.microsoft.com/office/drawing/2018/hyperlinkcolor">
   <p:cSld>
     <p:spTree>
@@ -10500,7 +11294,7 @@
 </p:sld>
 </file>
 
-<file path=ppt/slides/slide2.xml><?xml version="1.0" encoding="utf-8"?>
+<file path=ppt/slides/slide23.xml><?xml version="1.0" encoding="utf-8"?>
 <p:sld xmlns:a="http://schemas.openxmlformats.org/drawingml/2006/main" xmlns:p="http://schemas.openxmlformats.org/presentationml/2006/main" xmlns:r="http://schemas.openxmlformats.org/officeDocument/2006/relationships">
   <p:cSld>
     <p:spTree>
@@ -10520,88 +11314,97 @@
             <p:ph type="title"/>
           </p:nvPr>
         </p:nvSpPr>
+        <p:spPr/>
+        <p:txBody>
+          <a:bodyPr/>
+          <a:lstStyle/>
+          <a:p>
+            <a:pPr indent="0" lvl="0" marL="0" rtl="0" algn="l">
+              <a:spcBef>
+                <a:spcPts val="0"/>
+              </a:spcBef>
+              <a:spcAft>
+                <a:spcPts val="0"/>
+              </a:spcAft>
+              <a:buNone/>
+            </a:pPr>
+            <a:r>
+              <a:rPr lang="en"/>
+              <a:t>Try It: A New Room</a:t>
+            </a:r>
+            <a:endParaRPr/>
+          </a:p>
+        </p:txBody>
+      </p:sp>
+      <p:sp>
+        <p:nvSpPr>
+          <p:cNvPr id="3" name="Text Placeholder 2"/>
+          <p:cNvSpPr>
+            <a:spLocks noGrp="1"/>
+          </p:cNvSpPr>
+          <p:nvPr>
+            <p:ph type="body" idx="1"/>
+          </p:nvPr>
+        </p:nvSpPr>
         <p:spPr>
           <a:xfrm>
-            <a:off x="311700" y="195615"/>
-            <a:ext cx="8520600" cy="572700"/>
+            <a:off x="311700" y="885950"/>
+            <a:ext cx="8520600" cy="1289304"/>
           </a:xfrm>
         </p:spPr>
         <p:txBody>
           <a:bodyPr/>
           <a:lstStyle/>
           <a:p>
-            <a:pPr indent="0" lvl="0" marL="0" rtl="0" algn="l">
-              <a:spcBef>
-                <a:spcPts val="0"/>
-              </a:spcBef>
-              <a:spcAft>
-                <a:spcPts val="0"/>
-              </a:spcAft>
-              <a:buNone/>
+            <a:pPr indent="-330200" lvl="0" marL="457200" rtl="0" algn="l">
+              <a:spcBef>
+                <a:spcPts val="0"/>
+              </a:spcBef>
+              <a:spcAft>
+                <a:spcPts val="0"/>
+              </a:spcAft>
+              <a:buSzPts val="1600"/>
+              <a:buChar char="●"/>
             </a:pPr>
             <a:r>
               <a:rPr lang="en"/>
-              <a:t>Snake</a:t>
+              <a:t>In tilemap-definition.xml:</a:t>
             </a:r>
             <a:endParaRPr/>
           </a:p>
-        </p:txBody>
-      </p:sp>
-      <p:pic>
-        <p:nvPicPr>
-          <p:cNvPr id="3" name="Picture 2" descr="snake.gif"/>
-          <p:cNvPicPr>
-            <a:picLocks noChangeAspect="1"/>
-          </p:cNvPicPr>
-          <p:nvPr/>
-        </p:nvPicPr>
-        <p:blipFill>
-          <a:blip r:embed="rId2"/>
-          <a:stretch>
-            <a:fillRect/>
-          </a:stretch>
-        </p:blipFill>
-        <p:spPr>
-          <a:xfrm>
-            <a:off x="2743200" y="960120"/>
-            <a:ext cx="3657600" cy="3657600"/>
-          </a:xfrm>
-          <a:prstGeom prst="rect">
-            <a:avLst/>
-          </a:prstGeom>
-        </p:spPr>
-      </p:pic>
-      <p:sp>
-        <p:nvSpPr>
-          <p:cNvPr id="4" name="TextBox 3"/>
-          <p:cNvSpPr txBox="1"/>
-          <p:nvPr/>
-        </p:nvSpPr>
-        <p:spPr>
-          <a:xfrm>
-            <a:off x="457200" y="4736592"/>
-            <a:ext cx="8229600" cy="274320"/>
-          </a:xfrm>
-          <a:prstGeom prst="rect">
-            <a:avLst/>
-          </a:prstGeom>
-          <a:noFill/>
-        </p:spPr>
-        <p:txBody>
-          <a:bodyPr wrap="square">
-            <a:spAutoFit/>
-          </a:bodyPr>
-          <a:lstStyle/>
-          <a:p>
-            <a:pPr algn="ctr"/>
-            <a:r>
-              <a:rPr sz="900" b="0" i="0">
-                <a:solidFill>
-                  <a:srgbClr val="9AA3AB"/>
-                </a:solidFill>
-              </a:rPr>
-              <a:t>Snake goes back to Blockade (Gremlin, 1976). Image: Ustone07, CC BY-SA 3.0, via Wikimedia Commons.</a:t>
-            </a:r>
+          <a:p>
+            <a:pPr indent="-330200" lvl="0" marL="457200" rtl="0" algn="l">
+              <a:spcBef>
+                <a:spcPts val="0"/>
+              </a:spcBef>
+              <a:spcAft>
+                <a:spcPts val="0"/>
+              </a:spcAft>
+              <a:buSzPts val="1600"/>
+              <a:buChar char="●"/>
+            </a:pPr>
+            <a:r>
+              <a:rPr lang="en"/>
+              <a:t>Rearrange the room: move the torches, add cracks</a:t>
+            </a:r>
+            <a:endParaRPr/>
+          </a:p>
+          <a:p>
+            <a:pPr indent="-330200" lvl="0" marL="457200" rtl="0" algn="l">
+              <a:spcBef>
+                <a:spcPts val="0"/>
+              </a:spcBef>
+              <a:spcAft>
+                <a:spcPts val="0"/>
+              </a:spcAft>
+              <a:buSzPts val="1600"/>
+              <a:buChar char="●"/>
+            </a:pPr>
+            <a:r>
+              <a:rPr lang="en"/>
+              <a:t>Then put a 20 in it. What happens, and when?</a:t>
+            </a:r>
+            <a:endParaRPr/>
           </a:p>
         </p:txBody>
       </p:sp>
@@ -10613,7 +11416,7 @@
 </p:sld>
 </file>
 
-<file path=ppt/slides/slide20.xml><?xml version="1.0" encoding="utf-8"?>
+<file path=ppt/slides/slide24.xml><?xml version="1.0" encoding="utf-8"?>
 <p:sld xmlns:a="http://schemas.openxmlformats.org/drawingml/2006/main" xmlns:p="http://schemas.openxmlformats.org/presentationml/2006/main" xmlns:r="http://schemas.openxmlformats.org/officeDocument/2006/relationships">
   <p:cSld>
     <p:spTree>
@@ -11295,7 +12098,7 @@
 </p:sld>
 </file>
 
-<file path=ppt/slides/slide21.xml><?xml version="1.0" encoding="utf-8"?>
+<file path=ppt/slides/slide25.xml><?xml version="1.0" encoding="utf-8"?>
 <p:sld xmlns:a="http://schemas.openxmlformats.org/drawingml/2006/main" xmlns:p="http://schemas.openxmlformats.org/presentationml/2006/main" xmlns:r="http://schemas.openxmlformats.org/officeDocument/2006/relationships">
   <p:cSld>
     <p:spTree>
@@ -11963,7 +12766,7 @@
 </p:sld>
 </file>
 
-<file path=ppt/slides/slide22.xml><?xml version="1.0" encoding="utf-8"?>
+<file path=ppt/slides/slide26.xml><?xml version="1.0" encoding="utf-8"?>
 <p:sld xmlns:a="http://schemas.openxmlformats.org/drawingml/2006/main" xmlns:p="http://schemas.openxmlformats.org/presentationml/2006/main" xmlns:r="http://schemas.openxmlformats.org/officeDocument/2006/relationships">
   <p:cSld>
     <p:spTree>
@@ -12582,7 +13385,7 @@
 </p:sld>
 </file>
 
-<file path=ppt/slides/slide23.xml><?xml version="1.0" encoding="utf-8"?>
+<file path=ppt/slides/slide27.xml><?xml version="1.0" encoding="utf-8"?>
 <p:sld xmlns:a="http://schemas.openxmlformats.org/drawingml/2006/main" xmlns:p="http://schemas.openxmlformats.org/presentationml/2006/main" xmlns:r="http://schemas.openxmlformats.org/officeDocument/2006/relationships">
   <p:cSld>
     <p:spTree>
@@ -12709,7 +13512,146 @@
 </p:sld>
 </file>
 
-<file path=ppt/slides/slide24.xml><?xml version="1.0" encoding="utf-8"?>
+<file path=ppt/slides/slide28.xml><?xml version="1.0" encoding="utf-8"?>
+<p:sld xmlns:a="http://schemas.openxmlformats.org/drawingml/2006/main" xmlns:p="http://schemas.openxmlformats.org/presentationml/2006/main" xmlns:r="http://schemas.openxmlformats.org/officeDocument/2006/relationships">
+  <p:cSld>
+    <p:spTree>
+      <p:nvGrpSpPr>
+        <p:cNvPr id="1" name=""/>
+        <p:cNvGrpSpPr/>
+        <p:nvPr/>
+      </p:nvGrpSpPr>
+      <p:grpSpPr/>
+      <p:sp>
+        <p:nvSpPr>
+          <p:cNvPr id="2" name="Title 1"/>
+          <p:cNvSpPr>
+            <a:spLocks noGrp="1"/>
+          </p:cNvSpPr>
+          <p:nvPr>
+            <p:ph type="title"/>
+          </p:nvPr>
+        </p:nvSpPr>
+        <p:spPr/>
+        <p:txBody>
+          <a:bodyPr/>
+          <a:lstStyle/>
+          <a:p>
+            <a:pPr indent="0" lvl="0" marL="0" rtl="0" algn="l">
+              <a:spcBef>
+                <a:spcPts val="0"/>
+              </a:spcBef>
+              <a:spcAft>
+                <a:spcPts val="0"/>
+              </a:spcAft>
+              <a:buNone/>
+            </a:pPr>
+            <a:r>
+              <a:rPr lang="en"/>
+              <a:t>Try It: Ticks and Keys</a:t>
+            </a:r>
+            <a:endParaRPr/>
+          </a:p>
+        </p:txBody>
+      </p:sp>
+      <p:sp>
+        <p:nvSpPr>
+          <p:cNvPr id="3" name="Text Placeholder 2"/>
+          <p:cNvSpPr>
+            <a:spLocks noGrp="1"/>
+          </p:cNvSpPr>
+          <p:nvPr>
+            <p:ph type="body" idx="1"/>
+          </p:nvPr>
+        </p:nvSpPr>
+        <p:spPr>
+          <a:xfrm>
+            <a:off x="311700" y="885950"/>
+            <a:ext cx="8520600" cy="1673352"/>
+          </a:xfrm>
+        </p:spPr>
+        <p:txBody>
+          <a:bodyPr/>
+          <a:lstStyle/>
+          <a:p>
+            <a:pPr indent="-330200" lvl="0" marL="457200" rtl="0" algn="l">
+              <a:spcBef>
+                <a:spcPts val="0"/>
+              </a:spcBef>
+              <a:spcAft>
+                <a:spcPts val="0"/>
+              </a:spcAft>
+              <a:buSzPts val="1600"/>
+              <a:buChar char="●"/>
+            </a:pPr>
+            <a:r>
+              <a:rPr lang="en"/>
+              <a:t>In Snake7:</a:t>
+            </a:r>
+            <a:endParaRPr/>
+          </a:p>
+          <a:p>
+            <a:pPr indent="-330200" lvl="0" marL="457200" rtl="0" algn="l">
+              <a:spcBef>
+                <a:spcPts val="0"/>
+              </a:spcBef>
+              <a:spcAft>
+                <a:spcPts val="0"/>
+              </a:spcAft>
+              <a:buSzPts val="1600"/>
+              <a:buChar char="●"/>
+            </a:pPr>
+            <a:r>
+              <a:rPr lang="en"/>
+              <a:t>Make the snake twice as fast</a:t>
+            </a:r>
+            <a:endParaRPr/>
+          </a:p>
+          <a:p>
+            <a:pPr indent="-330200" lvl="0" marL="457200" rtl="0" algn="l">
+              <a:spcBef>
+                <a:spcPts val="0"/>
+              </a:spcBef>
+              <a:spcAft>
+                <a:spcPts val="0"/>
+              </a:spcAft>
+              <a:buSzPts val="1600"/>
+              <a:buChar char="●"/>
+            </a:pPr>
+            <a:r>
+              <a:rPr lang="en"/>
+              <a:t>Add I, J, K and L as a third set of keys</a:t>
+            </a:r>
+            <a:endParaRPr/>
+          </a:p>
+          <a:p>
+            <a:pPr indent="-330200" lvl="0" marL="457200" rtl="0" algn="l">
+              <a:spcBef>
+                <a:spcPts val="0"/>
+              </a:spcBef>
+              <a:spcAft>
+                <a:spcPts val="0"/>
+              </a:spcAft>
+              <a:buSzPts val="1600"/>
+              <a:buChar char="●"/>
+            </a:pPr>
+            <a:r>
+              <a:rPr lang="en"/>
+              <a:t>Which file did each change need?</a:t>
+            </a:r>
+            <a:endParaRPr/>
+          </a:p>
+        </p:txBody>
+      </p:sp>
+    </p:spTree>
+  </p:cSld>
+  <p:clrMapOvr>
+    <a:masterClrMapping/>
+  </p:clrMapOvr>
+</p:sld>
+</file>
+
+<file path=ppt/slides/slide29.xml><?xml version="1.0" encoding="utf-8"?>
 <p:sld xmlns:a="http://schemas.openxmlformats.org/drawingml/2006/main" xmlns:r="http://schemas.openxmlformats.org/officeDocument/2006/relationships" xmlns:mc="http://schemas.openxmlformats.org/markup-compatibility/2006" xmlns:mv="urn:schemas-microsoft-com:mac:vml" xmlns:p="http://schemas.openxmlformats.org/presentationml/2006/main" xmlns:c="http://schemas.openxmlformats.org/drawingml/2006/chart" xmlns:dgm="http://schemas.openxmlformats.org/drawingml/2006/diagram" xmlns:o="urn:schemas-microsoft-com:office:office" xmlns:v="urn:schemas-microsoft-com:vml" xmlns:pvml="urn:schemas-microsoft-com:office:powerpoint" xmlns:com="http://schemas.openxmlformats.org/drawingml/2006/compatibility" xmlns:p14="http://schemas.microsoft.com/office/powerpoint/2010/main" xmlns:p15="http://schemas.microsoft.com/office/powerpoint/2012/main" xmlns:ahyp="http://schemas.microsoft.com/office/drawing/2018/hyperlinkcolor">
   <p:cSld>
     <p:spTree>
@@ -13165,7 +14107,96 @@
 </p:sld>
 </file>
 
-<file path=ppt/slides/slide25.xml><?xml version="1.0" encoding="utf-8"?>
+<file path=ppt/slides/slide3.xml><?xml version="1.0" encoding="utf-8"?>
+<p:sld xmlns:a="http://schemas.openxmlformats.org/drawingml/2006/main" xmlns:r="http://schemas.openxmlformats.org/officeDocument/2006/relationships" xmlns:mc="http://schemas.openxmlformats.org/markup-compatibility/2006" xmlns:mv="urn:schemas-microsoft-com:mac:vml" xmlns:p="http://schemas.openxmlformats.org/presentationml/2006/main" xmlns:c="http://schemas.openxmlformats.org/drawingml/2006/chart" xmlns:dgm="http://schemas.openxmlformats.org/drawingml/2006/diagram" xmlns:o="urn:schemas-microsoft-com:office:office" xmlns:v="urn:schemas-microsoft-com:vml" xmlns:pvml="urn:schemas-microsoft-com:office:powerpoint" xmlns:com="http://schemas.openxmlformats.org/drawingml/2006/compatibility" xmlns:p14="http://schemas.microsoft.com/office/powerpoint/2010/main" xmlns:p15="http://schemas.microsoft.com/office/powerpoint/2012/main" xmlns:ahyp="http://schemas.microsoft.com/office/drawing/2018/hyperlinkcolor">
+  <p:cSld>
+    <p:spTree>
+      <p:nvGrpSpPr>
+        <p:cNvPr id="44" name="Shape 44"/>
+        <p:cNvGrpSpPr/>
+        <p:nvPr/>
+      </p:nvGrpSpPr>
+      <p:grpSpPr>
+        <a:xfrm>
+          <a:off x="0" y="0"/>
+          <a:ext cx="0" cy="0"/>
+          <a:chOff x="0" y="0"/>
+          <a:chExt cx="0" cy="0"/>
+        </a:xfrm>
+      </p:grpSpPr>
+      <p:sp>
+        <p:nvSpPr>
+          <p:cNvPr id="45" name="Google Shape;45;p10"/>
+          <p:cNvSpPr txBox="1"/>
+          <p:nvPr>
+            <p:ph type="title"/>
+          </p:nvPr>
+        </p:nvSpPr>
+        <p:spPr>
+          <a:xfrm>
+            <a:off x="311700" y="195615"/>
+            <a:ext cx="8520600" cy="572700"/>
+          </a:xfrm>
+          <a:prstGeom prst="rect">
+            <a:avLst/>
+          </a:prstGeom>
+        </p:spPr>
+        <p:txBody>
+          <a:bodyPr anchorCtr="0" anchor="t" bIns="91425" lIns="91425" spcFirstLastPara="1" rIns="91425" wrap="square" tIns="91425">
+            <a:normAutofit fontScale="90000"/>
+          </a:bodyPr>
+          <a:lstStyle/>
+          <a:p>
+            <a:pPr indent="0" lvl="0" marL="0" rtl="0" algn="l">
+              <a:spcBef>
+                <a:spcPts val="0"/>
+              </a:spcBef>
+              <a:spcAft>
+                <a:spcPts val="0"/>
+              </a:spcAft>
+              <a:buNone/>
+            </a:pPr>
+            <a:r>
+              <a:rPr lang="en"/>
+              <a:t>Today’s Goal</a:t>
+            </a:r>
+            <a:endParaRPr/>
+          </a:p>
+        </p:txBody>
+      </p:sp>
+      <p:pic>
+        <p:nvPicPr>
+          <p:cNvPr id="46" name="Picture 46" descr="snake9.png"/>
+          <p:cNvPicPr>
+            <a:picLocks noChangeAspect="1"/>
+          </p:cNvPicPr>
+          <p:nvPr/>
+        </p:nvPicPr>
+        <p:blipFill>
+          <a:blip r:embed="rId4"/>
+          <a:stretch>
+            <a:fillRect/>
+          </a:stretch>
+        </p:blipFill>
+        <p:spPr>
+          <a:xfrm>
+            <a:off x="1846087" y="1626274"/>
+            <a:ext cx="5451825" cy="3066651"/>
+          </a:xfrm>
+          <a:prstGeom prst="rect">
+            <a:avLst/>
+          </a:prstGeom>
+        </p:spPr>
+      </p:pic>
+    </p:spTree>
+  </p:cSld>
+  <p:clrMapOvr>
+    <a:masterClrMapping/>
+  </p:clrMapOvr>
+</p:sld>
+</file>
+
+<file path=ppt/slides/slide30.xml><?xml version="1.0" encoding="utf-8"?>
 <p:sld xmlns:a="http://schemas.openxmlformats.org/drawingml/2006/main" xmlns:r="http://schemas.openxmlformats.org/officeDocument/2006/relationships" xmlns:mc="http://schemas.openxmlformats.org/markup-compatibility/2006" xmlns:mv="urn:schemas-microsoft-com:mac:vml" xmlns:p="http://schemas.openxmlformats.org/presentationml/2006/main" xmlns:c="http://schemas.openxmlformats.org/drawingml/2006/chart" xmlns:dgm="http://schemas.openxmlformats.org/drawingml/2006/diagram" xmlns:o="urn:schemas-microsoft-com:office:office" xmlns:v="urn:schemas-microsoft-com:vml" xmlns:pvml="urn:schemas-microsoft-com:office:powerpoint" xmlns:com="http://schemas.openxmlformats.org/drawingml/2006/compatibility" xmlns:p14="http://schemas.microsoft.com/office/powerpoint/2010/main" xmlns:p15="http://schemas.microsoft.com/office/powerpoint/2012/main" xmlns:ahyp="http://schemas.microsoft.com/office/drawing/2018/hyperlinkcolor">
   <p:cSld>
     <p:spTree>
@@ -15217,7 +16248,7 @@
 </p:sld>
 </file>
 
-<file path=ppt/slides/slide26.xml><?xml version="1.0" encoding="utf-8"?>
+<file path=ppt/slides/slide31.xml><?xml version="1.0" encoding="utf-8"?>
 <p:sld xmlns:a="http://schemas.openxmlformats.org/drawingml/2006/main" xmlns:r="http://schemas.openxmlformats.org/officeDocument/2006/relationships" xmlns:mc="http://schemas.openxmlformats.org/markup-compatibility/2006" xmlns:mv="urn:schemas-microsoft-com:mac:vml" xmlns:p="http://schemas.openxmlformats.org/presentationml/2006/main" xmlns:c="http://schemas.openxmlformats.org/drawingml/2006/chart" xmlns:dgm="http://schemas.openxmlformats.org/drawingml/2006/diagram" xmlns:o="urn:schemas-microsoft-com:office:office" xmlns:v="urn:schemas-microsoft-com:vml" xmlns:pvml="urn:schemas-microsoft-com:office:powerpoint" xmlns:com="http://schemas.openxmlformats.org/drawingml/2006/compatibility" xmlns:p14="http://schemas.microsoft.com/office/powerpoint/2010/main" xmlns:p15="http://schemas.microsoft.com/office/powerpoint/2012/main" xmlns:ahyp="http://schemas.microsoft.com/office/drawing/2018/hyperlinkcolor">
   <p:cSld>
     <p:spTree>
@@ -15392,7 +16423,7 @@
 </p:sld>
 </file>
 
-<file path=ppt/slides/slide27.xml><?xml version="1.0" encoding="utf-8"?>
+<file path=ppt/slides/slide32.xml><?xml version="1.0" encoding="utf-8"?>
 <p:sld xmlns:a="http://schemas.openxmlformats.org/drawingml/2006/main" xmlns:r="http://schemas.openxmlformats.org/officeDocument/2006/relationships" xmlns:mc="http://schemas.openxmlformats.org/markup-compatibility/2006" xmlns:mv="urn:schemas-microsoft-com:mac:vml" xmlns:p="http://schemas.openxmlformats.org/presentationml/2006/main" xmlns:c="http://schemas.openxmlformats.org/drawingml/2006/chart" xmlns:dgm="http://schemas.openxmlformats.org/drawingml/2006/diagram" xmlns:o="urn:schemas-microsoft-com:office:office" xmlns:v="urn:schemas-microsoft-com:vml" xmlns:pvml="urn:schemas-microsoft-com:office:powerpoint" xmlns:com="http://schemas.openxmlformats.org/drawingml/2006/compatibility" xmlns:p14="http://schemas.microsoft.com/office/powerpoint/2010/main" xmlns:p15="http://schemas.microsoft.com/office/powerpoint/2012/main" xmlns:ahyp="http://schemas.microsoft.com/office/drawing/2018/hyperlinkcolor">
   <p:cSld>
     <p:spTree>
@@ -15625,7 +16656,7 @@
 </p:sld>
 </file>
 
-<file path=ppt/slides/slide28.xml><?xml version="1.0" encoding="utf-8"?>
+<file path=ppt/slides/slide33.xml><?xml version="1.0" encoding="utf-8"?>
 <p:sld xmlns:a="http://schemas.openxmlformats.org/drawingml/2006/main" xmlns:r="http://schemas.openxmlformats.org/officeDocument/2006/relationships" xmlns:mc="http://schemas.openxmlformats.org/markup-compatibility/2006" xmlns:mv="urn:schemas-microsoft-com:mac:vml" xmlns:p="http://schemas.openxmlformats.org/presentationml/2006/main" xmlns:c="http://schemas.openxmlformats.org/drawingml/2006/chart" xmlns:dgm="http://schemas.openxmlformats.org/drawingml/2006/diagram" xmlns:o="urn:schemas-microsoft-com:office:office" xmlns:v="urn:schemas-microsoft-com:vml" xmlns:pvml="urn:schemas-microsoft-com:office:powerpoint" xmlns:com="http://schemas.openxmlformats.org/drawingml/2006/compatibility" xmlns:p14="http://schemas.microsoft.com/office/powerpoint/2010/main" xmlns:p15="http://schemas.microsoft.com/office/powerpoint/2012/main" xmlns:ahyp="http://schemas.microsoft.com/office/drawing/2018/hyperlinkcolor">
   <p:cSld>
     <p:spTree>
@@ -15874,7 +16905,7 @@
 </p:sld>
 </file>
 
-<file path=ppt/slides/slide29.xml><?xml version="1.0" encoding="utf-8"?>
+<file path=ppt/slides/slide34.xml><?xml version="1.0" encoding="utf-8"?>
 <p:sld xmlns:a="http://schemas.openxmlformats.org/drawingml/2006/main" xmlns:r="http://schemas.openxmlformats.org/officeDocument/2006/relationships" xmlns:mc="http://schemas.openxmlformats.org/markup-compatibility/2006" xmlns:mv="urn:schemas-microsoft-com:mac:vml" xmlns:p="http://schemas.openxmlformats.org/presentationml/2006/main" xmlns:c="http://schemas.openxmlformats.org/drawingml/2006/chart" xmlns:dgm="http://schemas.openxmlformats.org/drawingml/2006/diagram" xmlns:o="urn:schemas-microsoft-com:office:office" xmlns:v="urn:schemas-microsoft-com:vml" xmlns:pvml="urn:schemas-microsoft-com:office:powerpoint" xmlns:com="http://schemas.openxmlformats.org/drawingml/2006/compatibility" xmlns:p14="http://schemas.microsoft.com/office/powerpoint/2010/main" xmlns:p15="http://schemas.microsoft.com/office/powerpoint/2012/main" xmlns:ahyp="http://schemas.microsoft.com/office/drawing/2018/hyperlinkcolor">
   <p:cSld>
     <p:spTree>
@@ -16143,96 +17174,7 @@
 </p:sld>
 </file>
 
-<file path=ppt/slides/slide3.xml><?xml version="1.0" encoding="utf-8"?>
-<p:sld xmlns:a="http://schemas.openxmlformats.org/drawingml/2006/main" xmlns:r="http://schemas.openxmlformats.org/officeDocument/2006/relationships" xmlns:mc="http://schemas.openxmlformats.org/markup-compatibility/2006" xmlns:mv="urn:schemas-microsoft-com:mac:vml" xmlns:p="http://schemas.openxmlformats.org/presentationml/2006/main" xmlns:c="http://schemas.openxmlformats.org/drawingml/2006/chart" xmlns:dgm="http://schemas.openxmlformats.org/drawingml/2006/diagram" xmlns:o="urn:schemas-microsoft-com:office:office" xmlns:v="urn:schemas-microsoft-com:vml" xmlns:pvml="urn:schemas-microsoft-com:office:powerpoint" xmlns:com="http://schemas.openxmlformats.org/drawingml/2006/compatibility" xmlns:p14="http://schemas.microsoft.com/office/powerpoint/2010/main" xmlns:p15="http://schemas.microsoft.com/office/powerpoint/2012/main" xmlns:ahyp="http://schemas.microsoft.com/office/drawing/2018/hyperlinkcolor">
-  <p:cSld>
-    <p:spTree>
-      <p:nvGrpSpPr>
-        <p:cNvPr id="44" name="Shape 44"/>
-        <p:cNvGrpSpPr/>
-        <p:nvPr/>
-      </p:nvGrpSpPr>
-      <p:grpSpPr>
-        <a:xfrm>
-          <a:off x="0" y="0"/>
-          <a:ext cx="0" cy="0"/>
-          <a:chOff x="0" y="0"/>
-          <a:chExt cx="0" cy="0"/>
-        </a:xfrm>
-      </p:grpSpPr>
-      <p:sp>
-        <p:nvSpPr>
-          <p:cNvPr id="45" name="Google Shape;45;p10"/>
-          <p:cNvSpPr txBox="1"/>
-          <p:nvPr>
-            <p:ph type="title"/>
-          </p:nvPr>
-        </p:nvSpPr>
-        <p:spPr>
-          <a:xfrm>
-            <a:off x="311700" y="195615"/>
-            <a:ext cx="8520600" cy="572700"/>
-          </a:xfrm>
-          <a:prstGeom prst="rect">
-            <a:avLst/>
-          </a:prstGeom>
-        </p:spPr>
-        <p:txBody>
-          <a:bodyPr anchorCtr="0" anchor="t" bIns="91425" lIns="91425" spcFirstLastPara="1" rIns="91425" wrap="square" tIns="91425">
-            <a:normAutofit fontScale="90000"/>
-          </a:bodyPr>
-          <a:lstStyle/>
-          <a:p>
-            <a:pPr indent="0" lvl="0" marL="0" rtl="0" algn="l">
-              <a:spcBef>
-                <a:spcPts val="0"/>
-              </a:spcBef>
-              <a:spcAft>
-                <a:spcPts val="0"/>
-              </a:spcAft>
-              <a:buNone/>
-            </a:pPr>
-            <a:r>
-              <a:rPr lang="en"/>
-              <a:t>Today’s Goal</a:t>
-            </a:r>
-            <a:endParaRPr/>
-          </a:p>
-        </p:txBody>
-      </p:sp>
-      <p:pic>
-        <p:nvPicPr>
-          <p:cNvPr id="46" name="Picture 46" descr="snake9.png"/>
-          <p:cNvPicPr>
-            <a:picLocks noChangeAspect="1"/>
-          </p:cNvPicPr>
-          <p:nvPr/>
-        </p:nvPicPr>
-        <p:blipFill>
-          <a:blip r:embed="rId4"/>
-          <a:stretch>
-            <a:fillRect/>
-          </a:stretch>
-        </p:blipFill>
-        <p:spPr>
-          <a:xfrm>
-            <a:off x="1846087" y="1626274"/>
-            <a:ext cx="5451825" cy="3066651"/>
-          </a:xfrm>
-          <a:prstGeom prst="rect">
-            <a:avLst/>
-          </a:prstGeom>
-        </p:spPr>
-      </p:pic>
-    </p:spTree>
-  </p:cSld>
-  <p:clrMapOvr>
-    <a:masterClrMapping/>
-  </p:clrMapOvr>
-</p:sld>
-</file>
-
-<file path=ppt/slides/slide30.xml><?xml version="1.0" encoding="utf-8"?>
+<file path=ppt/slides/slide35.xml><?xml version="1.0" encoding="utf-8"?>
 <p:sld xmlns:a="http://schemas.openxmlformats.org/drawingml/2006/main" xmlns:r="http://schemas.openxmlformats.org/officeDocument/2006/relationships" xmlns:mc="http://schemas.openxmlformats.org/markup-compatibility/2006" xmlns:mv="urn:schemas-microsoft-com:mac:vml" xmlns:p="http://schemas.openxmlformats.org/presentationml/2006/main" xmlns:c="http://schemas.openxmlformats.org/drawingml/2006/chart" xmlns:dgm="http://schemas.openxmlformats.org/drawingml/2006/diagram" xmlns:o="urn:schemas-microsoft-com:office:office" xmlns:v="urn:schemas-microsoft-com:vml" xmlns:pvml="urn:schemas-microsoft-com:office:powerpoint" xmlns:com="http://schemas.openxmlformats.org/drawingml/2006/compatibility" xmlns:p14="http://schemas.microsoft.com/office/powerpoint/2010/main" xmlns:p15="http://schemas.microsoft.com/office/powerpoint/2012/main" xmlns:ahyp="http://schemas.microsoft.com/office/drawing/2018/hyperlinkcolor">
   <p:cSld>
     <p:spTree>
@@ -16366,7 +17308,7 @@
 </p:sld>
 </file>
 
-<file path=ppt/slides/slide31.xml><?xml version="1.0" encoding="utf-8"?>
+<file path=ppt/slides/slide36.xml><?xml version="1.0" encoding="utf-8"?>
 <p:sld xmlns:a="http://schemas.openxmlformats.org/drawingml/2006/main" xmlns:r="http://schemas.openxmlformats.org/officeDocument/2006/relationships" xmlns:mc="http://schemas.openxmlformats.org/markup-compatibility/2006" xmlns:mv="urn:schemas-microsoft-com:mac:vml" xmlns:p="http://schemas.openxmlformats.org/presentationml/2006/main" xmlns:c="http://schemas.openxmlformats.org/drawingml/2006/chart" xmlns:dgm="http://schemas.openxmlformats.org/drawingml/2006/diagram" xmlns:o="urn:schemas-microsoft-com:office:office" xmlns:v="urn:schemas-microsoft-com:vml" xmlns:pvml="urn:schemas-microsoft-com:office:powerpoint" xmlns:com="http://schemas.openxmlformats.org/drawingml/2006/compatibility" xmlns:p14="http://schemas.microsoft.com/office/powerpoint/2010/main" xmlns:p15="http://schemas.microsoft.com/office/powerpoint/2012/main" xmlns:ahyp="http://schemas.microsoft.com/office/drawing/2018/hyperlinkcolor">
   <p:cSld>
     <p:spTree>
@@ -16806,7 +17748,7 @@
 </p:sld>
 </file>
 
-<file path=ppt/slides/slide32.xml><?xml version="1.0" encoding="utf-8"?>
+<file path=ppt/slides/slide37.xml><?xml version="1.0" encoding="utf-8"?>
 <p:sld xmlns:a="http://schemas.openxmlformats.org/drawingml/2006/main" xmlns:r="http://schemas.openxmlformats.org/officeDocument/2006/relationships" xmlns:mc="http://schemas.openxmlformats.org/markup-compatibility/2006" xmlns:mv="urn:schemas-microsoft-com:mac:vml" xmlns:p="http://schemas.openxmlformats.org/presentationml/2006/main" xmlns:c="http://schemas.openxmlformats.org/drawingml/2006/chart" xmlns:dgm="http://schemas.openxmlformats.org/drawingml/2006/diagram" xmlns:o="urn:schemas-microsoft-com:office:office" xmlns:v="urn:schemas-microsoft-com:vml" xmlns:pvml="urn:schemas-microsoft-com:office:powerpoint" xmlns:com="http://schemas.openxmlformats.org/drawingml/2006/compatibility" xmlns:p14="http://schemas.microsoft.com/office/powerpoint/2010/main" xmlns:p15="http://schemas.microsoft.com/office/powerpoint/2012/main" xmlns:ahyp="http://schemas.microsoft.com/office/drawing/2018/hyperlinkcolor">
   <p:cSld>
     <p:spTree>
@@ -17655,7 +18597,7 @@
 </p:sld>
 </file>
 
-<file path=ppt/slides/slide33.xml><?xml version="1.0" encoding="utf-8"?>
+<file path=ppt/slides/slide38.xml><?xml version="1.0" encoding="utf-8"?>
 <p:sld xmlns:a="http://schemas.openxmlformats.org/drawingml/2006/main" xmlns:r="http://schemas.openxmlformats.org/officeDocument/2006/relationships" xmlns:mc="http://schemas.openxmlformats.org/markup-compatibility/2006" xmlns:mv="urn:schemas-microsoft-com:mac:vml" xmlns:p="http://schemas.openxmlformats.org/presentationml/2006/main" xmlns:c="http://schemas.openxmlformats.org/drawingml/2006/chart" xmlns:dgm="http://schemas.openxmlformats.org/drawingml/2006/diagram" xmlns:o="urn:schemas-microsoft-com:office:office" xmlns:v="urn:schemas-microsoft-com:vml" xmlns:pvml="urn:schemas-microsoft-com:office:powerpoint" xmlns:com="http://schemas.openxmlformats.org/drawingml/2006/compatibility" xmlns:p14="http://schemas.microsoft.com/office/powerpoint/2010/main" xmlns:p15="http://schemas.microsoft.com/office/powerpoint/2012/main" xmlns:ahyp="http://schemas.microsoft.com/office/drawing/2018/hyperlinkcolor">
   <p:cSld>
     <p:spTree>
@@ -18487,7 +19429,7 @@
 </p:sld>
 </file>
 
-<file path=ppt/slides/slide34.xml><?xml version="1.0" encoding="utf-8"?>
+<file path=ppt/slides/slide39.xml><?xml version="1.0" encoding="utf-8"?>
 <p:sld xmlns:a="http://schemas.openxmlformats.org/drawingml/2006/main" xmlns:p="http://schemas.openxmlformats.org/presentationml/2006/main" xmlns:r="http://schemas.openxmlformats.org/officeDocument/2006/relationships">
   <p:cSld>
     <p:spTree>
@@ -18660,7 +19602,456 @@
 </p:sld>
 </file>
 
-<file path=ppt/slides/slide35.xml><?xml version="1.0" encoding="utf-8"?>
+<file path=ppt/slides/slide4.xml><?xml version="1.0" encoding="utf-8"?>
+<p:sld xmlns:a="http://schemas.openxmlformats.org/drawingml/2006/main" xmlns:r="http://schemas.openxmlformats.org/officeDocument/2006/relationships" xmlns:mc="http://schemas.openxmlformats.org/markup-compatibility/2006" xmlns:mv="urn:schemas-microsoft-com:mac:vml" xmlns:p="http://schemas.openxmlformats.org/presentationml/2006/main" xmlns:c="http://schemas.openxmlformats.org/drawingml/2006/chart" xmlns:dgm="http://schemas.openxmlformats.org/drawingml/2006/diagram" xmlns:o="urn:schemas-microsoft-com:office:office" xmlns:v="urn:schemas-microsoft-com:vml" xmlns:pvml="urn:schemas-microsoft-com:office:powerpoint" xmlns:com="http://schemas.openxmlformats.org/drawingml/2006/compatibility" xmlns:p14="http://schemas.microsoft.com/office/powerpoint/2010/main" xmlns:p15="http://schemas.microsoft.com/office/powerpoint/2012/main" xmlns:ahyp="http://schemas.microsoft.com/office/drawing/2018/hyperlinkcolor">
+  <p:cSld>
+    <p:spTree>
+      <p:nvGrpSpPr>
+        <p:cNvPr id="50" name="Shape 50"/>
+        <p:cNvGrpSpPr/>
+        <p:nvPr/>
+      </p:nvGrpSpPr>
+      <p:grpSpPr>
+        <a:xfrm>
+          <a:off x="0" y="0"/>
+          <a:ext cx="0" cy="0"/>
+          <a:chOff x="0" y="0"/>
+          <a:chExt cx="0" cy="0"/>
+        </a:xfrm>
+      </p:grpSpPr>
+      <p:sp>
+        <p:nvSpPr>
+          <p:cNvPr id="51" name="Google Shape;51;p11"/>
+          <p:cNvSpPr txBox="1"/>
+          <p:nvPr>
+            <p:ph type="title"/>
+          </p:nvPr>
+        </p:nvSpPr>
+        <p:spPr>
+          <a:xfrm>
+            <a:off x="311700" y="195615"/>
+            <a:ext cx="8520600" cy="572700"/>
+          </a:xfrm>
+          <a:prstGeom prst="rect">
+            <a:avLst/>
+          </a:prstGeom>
+        </p:spPr>
+        <p:txBody>
+          <a:bodyPr anchorCtr="0" anchor="t" bIns="91425" lIns="91425" spcFirstLastPara="1" rIns="91425" wrap="square" tIns="91425">
+            <a:normAutofit fontScale="90000"/>
+          </a:bodyPr>
+          <a:lstStyle/>
+          <a:p>
+            <a:pPr indent="0" lvl="0" marL="0" rtl="0" algn="l">
+              <a:spcBef>
+                <a:spcPts val="0"/>
+              </a:spcBef>
+              <a:spcAft>
+                <a:spcPts val="0"/>
+              </a:spcAft>
+              <a:buNone/>
+            </a:pPr>
+            <a:r>
+              <a:rPr lang="en"/>
+              <a:t>Today’s Topics</a:t>
+            </a:r>
+            <a:endParaRPr/>
+          </a:p>
+        </p:txBody>
+      </p:sp>
+      <p:sp>
+        <p:nvSpPr>
+          <p:cNvPr id="52" name="Google Shape;52;p11"/>
+          <p:cNvSpPr txBox="1"/>
+          <p:nvPr>
+            <p:ph idx="1" type="body"/>
+          </p:nvPr>
+        </p:nvSpPr>
+        <p:spPr>
+          <a:xfrm>
+            <a:off x="311700" y="885950"/>
+            <a:ext cx="8520600" cy="4023300"/>
+          </a:xfrm>
+          <a:prstGeom prst="rect">
+            <a:avLst/>
+          </a:prstGeom>
+        </p:spPr>
+        <p:txBody>
+          <a:bodyPr anchorCtr="0" anchor="t" bIns="91425" lIns="91425" spcFirstLastPara="1" rIns="91425" wrap="square" tIns="91425">
+            <a:normAutofit/>
+          </a:bodyPr>
+          <a:lstStyle/>
+          <a:p>
+            <a:pPr indent="-330200" lvl="0" marL="457200" rtl="0" algn="l">
+              <a:spcBef>
+                <a:spcPts val="0"/>
+              </a:spcBef>
+              <a:spcAft>
+                <a:spcPts val="0"/>
+              </a:spcAft>
+              <a:buSzPts val="1600"/>
+              <a:buChar char="●"/>
+            </a:pPr>
+            <a:r>
+              <a:rPr lang="en"/>
+              <a:t>Assets as Data</a:t>
+            </a:r>
+            <a:endParaRPr/>
+          </a:p>
+          <a:p>
+            <a:pPr indent="-330200" lvl="0" marL="457200" rtl="0" algn="l">
+              <a:spcBef>
+                <a:spcPts val="0"/>
+              </a:spcBef>
+              <a:spcAft>
+                <a:spcPts val="0"/>
+              </a:spcAft>
+              <a:buSzPts val="1600"/>
+              <a:buChar char="●"/>
+            </a:pPr>
+            <a:r>
+              <a:rPr lang="en"/>
+              <a:t>Texture Atlases</a:t>
+            </a:r>
+            <a:endParaRPr/>
+          </a:p>
+          <a:p>
+            <a:pPr indent="-330200" lvl="0" marL="457200" rtl="0" algn="l">
+              <a:spcBef>
+                <a:spcPts val="0"/>
+              </a:spcBef>
+              <a:spcAft>
+                <a:spcPts val="0"/>
+              </a:spcAft>
+              <a:buSzPts val="1600"/>
+              <a:buChar char="●"/>
+            </a:pPr>
+            <a:r>
+              <a:rPr lang="en"/>
+              <a:t>Sprites &amp; Animation</a:t>
+            </a:r>
+            <a:endParaRPr/>
+          </a:p>
+          <a:p>
+            <a:pPr indent="-330200" lvl="0" marL="457200" rtl="0" algn="l">
+              <a:spcBef>
+                <a:spcPts val="0"/>
+              </a:spcBef>
+              <a:spcAft>
+                <a:spcPts val="0"/>
+              </a:spcAft>
+              <a:buSzPts val="1600"/>
+              <a:buChar char="●"/>
+            </a:pPr>
+            <a:r>
+              <a:rPr lang="en"/>
+              <a:t>Fixed-Tick Movement</a:t>
+            </a:r>
+            <a:endParaRPr/>
+          </a:p>
+          <a:p>
+            <a:pPr indent="-330200" lvl="0" marL="457200" rtl="0" algn="l">
+              <a:spcBef>
+                <a:spcPts val="0"/>
+              </a:spcBef>
+              <a:spcAft>
+                <a:spcPts val="0"/>
+              </a:spcAft>
+              <a:buSzPts val="1600"/>
+              <a:buChar char="●"/>
+            </a:pPr>
+            <a:r>
+              <a:rPr lang="en"/>
+              <a:t>Input as Actions &amp; Buffering</a:t>
+            </a:r>
+            <a:endParaRPr/>
+          </a:p>
+        </p:txBody>
+      </p:sp>
+    </p:spTree>
+  </p:cSld>
+  <p:clrMapOvr>
+    <a:masterClrMapping/>
+  </p:clrMapOvr>
+  <p:timing>
+    <p:tnLst>
+      <p:par>
+        <p:cTn dur="indefinite" nodeType="tmRoot" restart="never">
+          <p:childTnLst>
+            <p:seq concurrent="1" nextAc="seek">
+              <p:cTn dur="indefinite" id="2" nodeType="mainSeq">
+                <p:childTnLst>
+                  <p:par>
+                    <p:cTn fill="hold">
+                      <p:stCondLst>
+                        <p:cond delay="indefinite"/>
+                      </p:stCondLst>
+                      <p:childTnLst>
+                        <p:par>
+                          <p:cTn fill="hold">
+                            <p:stCondLst>
+                              <p:cond delay="0"/>
+                            </p:stCondLst>
+                            <p:childTnLst>
+                              <p:par>
+                                <p:cTn fill="hold" nodeType="clickEffect" presetClass="entr" presetID="1" presetSubtype="0">
+                                  <p:stCondLst>
+                                    <p:cond delay="0"/>
+                                  </p:stCondLst>
+                                  <p:childTnLst>
+                                    <p:set>
+                                      <p:cBhvr>
+                                        <p:cTn dur="1" fill="hold">
+                                          <p:stCondLst>
+                                            <p:cond delay="0"/>
+                                          </p:stCondLst>
+                                        </p:cTn>
+                                        <p:tgtEl>
+                                          <p:spTgt spid="52">
+                                            <p:txEl>
+                                              <p:pRg end="0" st="0"/>
+                                            </p:txEl>
+                                          </p:spTgt>
+                                        </p:tgtEl>
+                                        <p:attrNameLst>
+                                          <p:attrName>style.visibility</p:attrName>
+                                        </p:attrNameLst>
+                                      </p:cBhvr>
+                                      <p:to>
+                                        <p:strVal val="visible"/>
+                                      </p:to>
+                                    </p:set>
+                                  </p:childTnLst>
+                                </p:cTn>
+                              </p:par>
+                            </p:childTnLst>
+                          </p:cTn>
+                        </p:par>
+                      </p:childTnLst>
+                    </p:cTn>
+                  </p:par>
+                  <p:par>
+                    <p:cTn fill="hold">
+                      <p:stCondLst>
+                        <p:cond delay="indefinite"/>
+                      </p:stCondLst>
+                      <p:childTnLst>
+                        <p:par>
+                          <p:cTn fill="hold">
+                            <p:stCondLst>
+                              <p:cond delay="0"/>
+                            </p:stCondLst>
+                            <p:childTnLst>
+                              <p:par>
+                                <p:cTn fill="hold" nodeType="clickEffect" presetClass="entr" presetID="1" presetSubtype="0">
+                                  <p:stCondLst>
+                                    <p:cond delay="0"/>
+                                  </p:stCondLst>
+                                  <p:childTnLst>
+                                    <p:set>
+                                      <p:cBhvr>
+                                        <p:cTn dur="1" fill="hold">
+                                          <p:stCondLst>
+                                            <p:cond delay="0"/>
+                                          </p:stCondLst>
+                                        </p:cTn>
+                                        <p:tgtEl>
+                                          <p:spTgt spid="52">
+                                            <p:txEl>
+                                              <p:pRg end="1" st="1"/>
+                                            </p:txEl>
+                                          </p:spTgt>
+                                        </p:tgtEl>
+                                        <p:attrNameLst>
+                                          <p:attrName>style.visibility</p:attrName>
+                                        </p:attrNameLst>
+                                      </p:cBhvr>
+                                      <p:to>
+                                        <p:strVal val="visible"/>
+                                      </p:to>
+                                    </p:set>
+                                  </p:childTnLst>
+                                </p:cTn>
+                              </p:par>
+                            </p:childTnLst>
+                          </p:cTn>
+                        </p:par>
+                      </p:childTnLst>
+                    </p:cTn>
+                  </p:par>
+                  <p:par>
+                    <p:cTn fill="hold">
+                      <p:stCondLst>
+                        <p:cond delay="indefinite"/>
+                      </p:stCondLst>
+                      <p:childTnLst>
+                        <p:par>
+                          <p:cTn fill="hold">
+                            <p:stCondLst>
+                              <p:cond delay="0"/>
+                            </p:stCondLst>
+                            <p:childTnLst>
+                              <p:par>
+                                <p:cTn fill="hold" nodeType="clickEffect" presetClass="entr" presetID="1" presetSubtype="0">
+                                  <p:stCondLst>
+                                    <p:cond delay="0"/>
+                                  </p:stCondLst>
+                                  <p:childTnLst>
+                                    <p:set>
+                                      <p:cBhvr>
+                                        <p:cTn dur="1" fill="hold">
+                                          <p:stCondLst>
+                                            <p:cond delay="0"/>
+                                          </p:stCondLst>
+                                        </p:cTn>
+                                        <p:tgtEl>
+                                          <p:spTgt spid="52">
+                                            <p:txEl>
+                                              <p:pRg end="2" st="2"/>
+                                            </p:txEl>
+                                          </p:spTgt>
+                                        </p:tgtEl>
+                                        <p:attrNameLst>
+                                          <p:attrName>style.visibility</p:attrName>
+                                        </p:attrNameLst>
+                                      </p:cBhvr>
+                                      <p:to>
+                                        <p:strVal val="visible"/>
+                                      </p:to>
+                                    </p:set>
+                                  </p:childTnLst>
+                                </p:cTn>
+                              </p:par>
+                            </p:childTnLst>
+                          </p:cTn>
+                        </p:par>
+                      </p:childTnLst>
+                    </p:cTn>
+                  </p:par>
+                  <p:par>
+                    <p:cTn fill="hold">
+                      <p:stCondLst>
+                        <p:cond delay="indefinite"/>
+                      </p:stCondLst>
+                      <p:childTnLst>
+                        <p:par>
+                          <p:cTn fill="hold">
+                            <p:stCondLst>
+                              <p:cond delay="0"/>
+                            </p:stCondLst>
+                            <p:childTnLst>
+                              <p:par>
+                                <p:cTn fill="hold" nodeType="clickEffect" presetClass="entr" presetID="1" presetSubtype="0">
+                                  <p:stCondLst>
+                                    <p:cond delay="0"/>
+                                  </p:stCondLst>
+                                  <p:childTnLst>
+                                    <p:set>
+                                      <p:cBhvr>
+                                        <p:cTn dur="1" fill="hold">
+                                          <p:stCondLst>
+                                            <p:cond delay="0"/>
+                                          </p:stCondLst>
+                                        </p:cTn>
+                                        <p:tgtEl>
+                                          <p:spTgt spid="52">
+                                            <p:txEl>
+                                              <p:pRg end="3" st="3"/>
+                                            </p:txEl>
+                                          </p:spTgt>
+                                        </p:tgtEl>
+                                        <p:attrNameLst>
+                                          <p:attrName>style.visibility</p:attrName>
+                                        </p:attrNameLst>
+                                      </p:cBhvr>
+                                      <p:to>
+                                        <p:strVal val="visible"/>
+                                      </p:to>
+                                    </p:set>
+                                  </p:childTnLst>
+                                </p:cTn>
+                              </p:par>
+                            </p:childTnLst>
+                          </p:cTn>
+                        </p:par>
+                      </p:childTnLst>
+                    </p:cTn>
+                  </p:par>
+                  <p:par>
+                    <p:cTn fill="hold">
+                      <p:stCondLst>
+                        <p:cond delay="indefinite"/>
+                      </p:stCondLst>
+                      <p:childTnLst>
+                        <p:par>
+                          <p:cTn fill="hold">
+                            <p:stCondLst>
+                              <p:cond delay="0"/>
+                            </p:stCondLst>
+                            <p:childTnLst>
+                              <p:par>
+                                <p:cTn fill="hold" nodeType="clickEffect" presetClass="entr" presetID="1" presetSubtype="0">
+                                  <p:stCondLst>
+                                    <p:cond delay="0"/>
+                                  </p:stCondLst>
+                                  <p:childTnLst>
+                                    <p:set>
+                                      <p:cBhvr>
+                                        <p:cTn dur="1" fill="hold">
+                                          <p:stCondLst>
+                                            <p:cond delay="0"/>
+                                          </p:stCondLst>
+                                        </p:cTn>
+                                        <p:tgtEl>
+                                          <p:spTgt spid="52">
+                                            <p:txEl>
+                                              <p:pRg end="4" st="4"/>
+                                            </p:txEl>
+                                          </p:spTgt>
+                                        </p:tgtEl>
+                                        <p:attrNameLst>
+                                          <p:attrName>style.visibility</p:attrName>
+                                        </p:attrNameLst>
+                                      </p:cBhvr>
+                                      <p:to>
+                                        <p:strVal val="visible"/>
+                                      </p:to>
+                                    </p:set>
+                                  </p:childTnLst>
+                                </p:cTn>
+                              </p:par>
+                            </p:childTnLst>
+                          </p:cTn>
+                        </p:par>
+                      </p:childTnLst>
+                    </p:cTn>
+                  </p:par>
+                </p:childTnLst>
+              </p:cTn>
+              <p:prevCondLst>
+                <p:cond evt="onPrev">
+                  <p:tgtEl>
+                    <p:sldTgt/>
+                  </p:tgtEl>
+                </p:cond>
+              </p:prevCondLst>
+              <p:nextCondLst>
+                <p:cond evt="onNext">
+                  <p:tgtEl>
+                    <p:sldTgt/>
+                  </p:tgtEl>
+                </p:cond>
+              </p:nextCondLst>
+            </p:seq>
+          </p:childTnLst>
+        </p:cTn>
+      </p:par>
+    </p:tnLst>
+  </p:timing>
+</p:sld>
+</file>
+
+<file path=ppt/slides/slide40.xml><?xml version="1.0" encoding="utf-8"?>
 <p:sld xmlns:a="http://schemas.openxmlformats.org/drawingml/2006/main" xmlns:r="http://schemas.openxmlformats.org/officeDocument/2006/relationships" xmlns:mc="http://schemas.openxmlformats.org/markup-compatibility/2006" xmlns:mv="urn:schemas-microsoft-com:mac:vml" xmlns:p="http://schemas.openxmlformats.org/presentationml/2006/main" xmlns:c="http://schemas.openxmlformats.org/drawingml/2006/chart" xmlns:dgm="http://schemas.openxmlformats.org/drawingml/2006/diagram" xmlns:o="urn:schemas-microsoft-com:office:office" xmlns:v="urn:schemas-microsoft-com:vml" xmlns:pvml="urn:schemas-microsoft-com:office:powerpoint" xmlns:com="http://schemas.openxmlformats.org/drawingml/2006/compatibility" xmlns:p14="http://schemas.microsoft.com/office/powerpoint/2010/main" xmlns:p15="http://schemas.microsoft.com/office/powerpoint/2012/main" xmlns:ahyp="http://schemas.microsoft.com/office/drawing/2018/hyperlinkcolor">
   <p:cSld>
     <p:spTree>
@@ -19492,7 +20883,7 @@
 </p:sld>
 </file>
 
-<file path=ppt/slides/slide36.xml><?xml version="1.0" encoding="utf-8"?>
+<file path=ppt/slides/slide41.xml><?xml version="1.0" encoding="utf-8"?>
 <p:sld xmlns:a="http://schemas.openxmlformats.org/drawingml/2006/main" xmlns:r="http://schemas.openxmlformats.org/officeDocument/2006/relationships" xmlns:mc="http://schemas.openxmlformats.org/markup-compatibility/2006" xmlns:mv="urn:schemas-microsoft-com:mac:vml" xmlns:p="http://schemas.openxmlformats.org/presentationml/2006/main" xmlns:c="http://schemas.openxmlformats.org/drawingml/2006/chart" xmlns:dgm="http://schemas.openxmlformats.org/drawingml/2006/diagram" xmlns:o="urn:schemas-microsoft-com:office:office" xmlns:v="urn:schemas-microsoft-com:vml" xmlns:pvml="urn:schemas-microsoft-com:office:powerpoint" xmlns:com="http://schemas.openxmlformats.org/drawingml/2006/compatibility" xmlns:p14="http://schemas.microsoft.com/office/powerpoint/2010/main" xmlns:p15="http://schemas.microsoft.com/office/powerpoint/2012/main" xmlns:ahyp="http://schemas.microsoft.com/office/drawing/2018/hyperlinkcolor">
   <p:cSld>
     <p:spTree>
@@ -19697,455 +21088,6 @@
   <p:clrMapOvr>
     <a:masterClrMapping/>
   </p:clrMapOvr>
-</p:sld>
-</file>
-
-<file path=ppt/slides/slide4.xml><?xml version="1.0" encoding="utf-8"?>
-<p:sld xmlns:a="http://schemas.openxmlformats.org/drawingml/2006/main" xmlns:r="http://schemas.openxmlformats.org/officeDocument/2006/relationships" xmlns:mc="http://schemas.openxmlformats.org/markup-compatibility/2006" xmlns:mv="urn:schemas-microsoft-com:mac:vml" xmlns:p="http://schemas.openxmlformats.org/presentationml/2006/main" xmlns:c="http://schemas.openxmlformats.org/drawingml/2006/chart" xmlns:dgm="http://schemas.openxmlformats.org/drawingml/2006/diagram" xmlns:o="urn:schemas-microsoft-com:office:office" xmlns:v="urn:schemas-microsoft-com:vml" xmlns:pvml="urn:schemas-microsoft-com:office:powerpoint" xmlns:com="http://schemas.openxmlformats.org/drawingml/2006/compatibility" xmlns:p14="http://schemas.microsoft.com/office/powerpoint/2010/main" xmlns:p15="http://schemas.microsoft.com/office/powerpoint/2012/main" xmlns:ahyp="http://schemas.microsoft.com/office/drawing/2018/hyperlinkcolor">
-  <p:cSld>
-    <p:spTree>
-      <p:nvGrpSpPr>
-        <p:cNvPr id="50" name="Shape 50"/>
-        <p:cNvGrpSpPr/>
-        <p:nvPr/>
-      </p:nvGrpSpPr>
-      <p:grpSpPr>
-        <a:xfrm>
-          <a:off x="0" y="0"/>
-          <a:ext cx="0" cy="0"/>
-          <a:chOff x="0" y="0"/>
-          <a:chExt cx="0" cy="0"/>
-        </a:xfrm>
-      </p:grpSpPr>
-      <p:sp>
-        <p:nvSpPr>
-          <p:cNvPr id="51" name="Google Shape;51;p11"/>
-          <p:cNvSpPr txBox="1"/>
-          <p:nvPr>
-            <p:ph type="title"/>
-          </p:nvPr>
-        </p:nvSpPr>
-        <p:spPr>
-          <a:xfrm>
-            <a:off x="311700" y="195615"/>
-            <a:ext cx="8520600" cy="572700"/>
-          </a:xfrm>
-          <a:prstGeom prst="rect">
-            <a:avLst/>
-          </a:prstGeom>
-        </p:spPr>
-        <p:txBody>
-          <a:bodyPr anchorCtr="0" anchor="t" bIns="91425" lIns="91425" spcFirstLastPara="1" rIns="91425" wrap="square" tIns="91425">
-            <a:normAutofit fontScale="90000"/>
-          </a:bodyPr>
-          <a:lstStyle/>
-          <a:p>
-            <a:pPr indent="0" lvl="0" marL="0" rtl="0" algn="l">
-              <a:spcBef>
-                <a:spcPts val="0"/>
-              </a:spcBef>
-              <a:spcAft>
-                <a:spcPts val="0"/>
-              </a:spcAft>
-              <a:buNone/>
-            </a:pPr>
-            <a:r>
-              <a:rPr lang="en"/>
-              <a:t>Today’s Topics</a:t>
-            </a:r>
-            <a:endParaRPr/>
-          </a:p>
-        </p:txBody>
-      </p:sp>
-      <p:sp>
-        <p:nvSpPr>
-          <p:cNvPr id="52" name="Google Shape;52;p11"/>
-          <p:cNvSpPr txBox="1"/>
-          <p:nvPr>
-            <p:ph idx="1" type="body"/>
-          </p:nvPr>
-        </p:nvSpPr>
-        <p:spPr>
-          <a:xfrm>
-            <a:off x="311700" y="885950"/>
-            <a:ext cx="8520600" cy="4023300"/>
-          </a:xfrm>
-          <a:prstGeom prst="rect">
-            <a:avLst/>
-          </a:prstGeom>
-        </p:spPr>
-        <p:txBody>
-          <a:bodyPr anchorCtr="0" anchor="t" bIns="91425" lIns="91425" spcFirstLastPara="1" rIns="91425" wrap="square" tIns="91425">
-            <a:normAutofit/>
-          </a:bodyPr>
-          <a:lstStyle/>
-          <a:p>
-            <a:pPr indent="-330200" lvl="0" marL="457200" rtl="0" algn="l">
-              <a:spcBef>
-                <a:spcPts val="0"/>
-              </a:spcBef>
-              <a:spcAft>
-                <a:spcPts val="0"/>
-              </a:spcAft>
-              <a:buSzPts val="1600"/>
-              <a:buChar char="●"/>
-            </a:pPr>
-            <a:r>
-              <a:rPr lang="en"/>
-              <a:t>Assets as Data</a:t>
-            </a:r>
-            <a:endParaRPr/>
-          </a:p>
-          <a:p>
-            <a:pPr indent="-330200" lvl="0" marL="457200" rtl="0" algn="l">
-              <a:spcBef>
-                <a:spcPts val="0"/>
-              </a:spcBef>
-              <a:spcAft>
-                <a:spcPts val="0"/>
-              </a:spcAft>
-              <a:buSzPts val="1600"/>
-              <a:buChar char="●"/>
-            </a:pPr>
-            <a:r>
-              <a:rPr lang="en"/>
-              <a:t>Texture Atlases</a:t>
-            </a:r>
-            <a:endParaRPr/>
-          </a:p>
-          <a:p>
-            <a:pPr indent="-330200" lvl="0" marL="457200" rtl="0" algn="l">
-              <a:spcBef>
-                <a:spcPts val="0"/>
-              </a:spcBef>
-              <a:spcAft>
-                <a:spcPts val="0"/>
-              </a:spcAft>
-              <a:buSzPts val="1600"/>
-              <a:buChar char="●"/>
-            </a:pPr>
-            <a:r>
-              <a:rPr lang="en"/>
-              <a:t>Sprites &amp; Animation</a:t>
-            </a:r>
-            <a:endParaRPr/>
-          </a:p>
-          <a:p>
-            <a:pPr indent="-330200" lvl="0" marL="457200" rtl="0" algn="l">
-              <a:spcBef>
-                <a:spcPts val="0"/>
-              </a:spcBef>
-              <a:spcAft>
-                <a:spcPts val="0"/>
-              </a:spcAft>
-              <a:buSzPts val="1600"/>
-              <a:buChar char="●"/>
-            </a:pPr>
-            <a:r>
-              <a:rPr lang="en"/>
-              <a:t>Fixed-Tick Movement</a:t>
-            </a:r>
-            <a:endParaRPr/>
-          </a:p>
-          <a:p>
-            <a:pPr indent="-330200" lvl="0" marL="457200" rtl="0" algn="l">
-              <a:spcBef>
-                <a:spcPts val="0"/>
-              </a:spcBef>
-              <a:spcAft>
-                <a:spcPts val="0"/>
-              </a:spcAft>
-              <a:buSzPts val="1600"/>
-              <a:buChar char="●"/>
-            </a:pPr>
-            <a:r>
-              <a:rPr lang="en"/>
-              <a:t>Input as Actions &amp; Buffering</a:t>
-            </a:r>
-            <a:endParaRPr/>
-          </a:p>
-        </p:txBody>
-      </p:sp>
-    </p:spTree>
-  </p:cSld>
-  <p:clrMapOvr>
-    <a:masterClrMapping/>
-  </p:clrMapOvr>
-  <p:timing>
-    <p:tnLst>
-      <p:par>
-        <p:cTn dur="indefinite" nodeType="tmRoot" restart="never">
-          <p:childTnLst>
-            <p:seq concurrent="1" nextAc="seek">
-              <p:cTn dur="indefinite" id="2" nodeType="mainSeq">
-                <p:childTnLst>
-                  <p:par>
-                    <p:cTn fill="hold">
-                      <p:stCondLst>
-                        <p:cond delay="indefinite"/>
-                      </p:stCondLst>
-                      <p:childTnLst>
-                        <p:par>
-                          <p:cTn fill="hold">
-                            <p:stCondLst>
-                              <p:cond delay="0"/>
-                            </p:stCondLst>
-                            <p:childTnLst>
-                              <p:par>
-                                <p:cTn fill="hold" nodeType="clickEffect" presetClass="entr" presetID="1" presetSubtype="0">
-                                  <p:stCondLst>
-                                    <p:cond delay="0"/>
-                                  </p:stCondLst>
-                                  <p:childTnLst>
-                                    <p:set>
-                                      <p:cBhvr>
-                                        <p:cTn dur="1" fill="hold">
-                                          <p:stCondLst>
-                                            <p:cond delay="0"/>
-                                          </p:stCondLst>
-                                        </p:cTn>
-                                        <p:tgtEl>
-                                          <p:spTgt spid="52">
-                                            <p:txEl>
-                                              <p:pRg end="0" st="0"/>
-                                            </p:txEl>
-                                          </p:spTgt>
-                                        </p:tgtEl>
-                                        <p:attrNameLst>
-                                          <p:attrName>style.visibility</p:attrName>
-                                        </p:attrNameLst>
-                                      </p:cBhvr>
-                                      <p:to>
-                                        <p:strVal val="visible"/>
-                                      </p:to>
-                                    </p:set>
-                                  </p:childTnLst>
-                                </p:cTn>
-                              </p:par>
-                            </p:childTnLst>
-                          </p:cTn>
-                        </p:par>
-                      </p:childTnLst>
-                    </p:cTn>
-                  </p:par>
-                  <p:par>
-                    <p:cTn fill="hold">
-                      <p:stCondLst>
-                        <p:cond delay="indefinite"/>
-                      </p:stCondLst>
-                      <p:childTnLst>
-                        <p:par>
-                          <p:cTn fill="hold">
-                            <p:stCondLst>
-                              <p:cond delay="0"/>
-                            </p:stCondLst>
-                            <p:childTnLst>
-                              <p:par>
-                                <p:cTn fill="hold" nodeType="clickEffect" presetClass="entr" presetID="1" presetSubtype="0">
-                                  <p:stCondLst>
-                                    <p:cond delay="0"/>
-                                  </p:stCondLst>
-                                  <p:childTnLst>
-                                    <p:set>
-                                      <p:cBhvr>
-                                        <p:cTn dur="1" fill="hold">
-                                          <p:stCondLst>
-                                            <p:cond delay="0"/>
-                                          </p:stCondLst>
-                                        </p:cTn>
-                                        <p:tgtEl>
-                                          <p:spTgt spid="52">
-                                            <p:txEl>
-                                              <p:pRg end="1" st="1"/>
-                                            </p:txEl>
-                                          </p:spTgt>
-                                        </p:tgtEl>
-                                        <p:attrNameLst>
-                                          <p:attrName>style.visibility</p:attrName>
-                                        </p:attrNameLst>
-                                      </p:cBhvr>
-                                      <p:to>
-                                        <p:strVal val="visible"/>
-                                      </p:to>
-                                    </p:set>
-                                  </p:childTnLst>
-                                </p:cTn>
-                              </p:par>
-                            </p:childTnLst>
-                          </p:cTn>
-                        </p:par>
-                      </p:childTnLst>
-                    </p:cTn>
-                  </p:par>
-                  <p:par>
-                    <p:cTn fill="hold">
-                      <p:stCondLst>
-                        <p:cond delay="indefinite"/>
-                      </p:stCondLst>
-                      <p:childTnLst>
-                        <p:par>
-                          <p:cTn fill="hold">
-                            <p:stCondLst>
-                              <p:cond delay="0"/>
-                            </p:stCondLst>
-                            <p:childTnLst>
-                              <p:par>
-                                <p:cTn fill="hold" nodeType="clickEffect" presetClass="entr" presetID="1" presetSubtype="0">
-                                  <p:stCondLst>
-                                    <p:cond delay="0"/>
-                                  </p:stCondLst>
-                                  <p:childTnLst>
-                                    <p:set>
-                                      <p:cBhvr>
-                                        <p:cTn dur="1" fill="hold">
-                                          <p:stCondLst>
-                                            <p:cond delay="0"/>
-                                          </p:stCondLst>
-                                        </p:cTn>
-                                        <p:tgtEl>
-                                          <p:spTgt spid="52">
-                                            <p:txEl>
-                                              <p:pRg end="2" st="2"/>
-                                            </p:txEl>
-                                          </p:spTgt>
-                                        </p:tgtEl>
-                                        <p:attrNameLst>
-                                          <p:attrName>style.visibility</p:attrName>
-                                        </p:attrNameLst>
-                                      </p:cBhvr>
-                                      <p:to>
-                                        <p:strVal val="visible"/>
-                                      </p:to>
-                                    </p:set>
-                                  </p:childTnLst>
-                                </p:cTn>
-                              </p:par>
-                            </p:childTnLst>
-                          </p:cTn>
-                        </p:par>
-                      </p:childTnLst>
-                    </p:cTn>
-                  </p:par>
-                  <p:par>
-                    <p:cTn fill="hold">
-                      <p:stCondLst>
-                        <p:cond delay="indefinite"/>
-                      </p:stCondLst>
-                      <p:childTnLst>
-                        <p:par>
-                          <p:cTn fill="hold">
-                            <p:stCondLst>
-                              <p:cond delay="0"/>
-                            </p:stCondLst>
-                            <p:childTnLst>
-                              <p:par>
-                                <p:cTn fill="hold" nodeType="clickEffect" presetClass="entr" presetID="1" presetSubtype="0">
-                                  <p:stCondLst>
-                                    <p:cond delay="0"/>
-                                  </p:stCondLst>
-                                  <p:childTnLst>
-                                    <p:set>
-                                      <p:cBhvr>
-                                        <p:cTn dur="1" fill="hold">
-                                          <p:stCondLst>
-                                            <p:cond delay="0"/>
-                                          </p:stCondLst>
-                                        </p:cTn>
-                                        <p:tgtEl>
-                                          <p:spTgt spid="52">
-                                            <p:txEl>
-                                              <p:pRg end="3" st="3"/>
-                                            </p:txEl>
-                                          </p:spTgt>
-                                        </p:tgtEl>
-                                        <p:attrNameLst>
-                                          <p:attrName>style.visibility</p:attrName>
-                                        </p:attrNameLst>
-                                      </p:cBhvr>
-                                      <p:to>
-                                        <p:strVal val="visible"/>
-                                      </p:to>
-                                    </p:set>
-                                  </p:childTnLst>
-                                </p:cTn>
-                              </p:par>
-                            </p:childTnLst>
-                          </p:cTn>
-                        </p:par>
-                      </p:childTnLst>
-                    </p:cTn>
-                  </p:par>
-                  <p:par>
-                    <p:cTn fill="hold">
-                      <p:stCondLst>
-                        <p:cond delay="indefinite"/>
-                      </p:stCondLst>
-                      <p:childTnLst>
-                        <p:par>
-                          <p:cTn fill="hold">
-                            <p:stCondLst>
-                              <p:cond delay="0"/>
-                            </p:stCondLst>
-                            <p:childTnLst>
-                              <p:par>
-                                <p:cTn fill="hold" nodeType="clickEffect" presetClass="entr" presetID="1" presetSubtype="0">
-                                  <p:stCondLst>
-                                    <p:cond delay="0"/>
-                                  </p:stCondLst>
-                                  <p:childTnLst>
-                                    <p:set>
-                                      <p:cBhvr>
-                                        <p:cTn dur="1" fill="hold">
-                                          <p:stCondLst>
-                                            <p:cond delay="0"/>
-                                          </p:stCondLst>
-                                        </p:cTn>
-                                        <p:tgtEl>
-                                          <p:spTgt spid="52">
-                                            <p:txEl>
-                                              <p:pRg end="4" st="4"/>
-                                            </p:txEl>
-                                          </p:spTgt>
-                                        </p:tgtEl>
-                                        <p:attrNameLst>
-                                          <p:attrName>style.visibility</p:attrName>
-                                        </p:attrNameLst>
-                                      </p:cBhvr>
-                                      <p:to>
-                                        <p:strVal val="visible"/>
-                                      </p:to>
-                                    </p:set>
-                                  </p:childTnLst>
-                                </p:cTn>
-                              </p:par>
-                            </p:childTnLst>
-                          </p:cTn>
-                        </p:par>
-                      </p:childTnLst>
-                    </p:cTn>
-                  </p:par>
-                </p:childTnLst>
-              </p:cTn>
-              <p:prevCondLst>
-                <p:cond evt="onPrev">
-                  <p:tgtEl>
-                    <p:sldTgt/>
-                  </p:tgtEl>
-                </p:cond>
-              </p:prevCondLst>
-              <p:nextCondLst>
-                <p:cond evt="onNext">
-                  <p:tgtEl>
-                    <p:sldTgt/>
-                  </p:tgtEl>
-                </p:cond>
-              </p:nextCondLst>
-            </p:seq>
-          </p:childTnLst>
-        </p:cTn>
-      </p:par>
-    </p:tnLst>
-  </p:timing>
 </p:sld>
 </file>
 

--- a/slides/03 Snake.pptx
+++ b/slides/03 Snake.pptx
@@ -3205,7 +3205,7 @@
           <a:lstStyle/>
           <a:p>
             <a:r>
-              <a:t>Exercise: the beetle is drawn in the atlas but not described. Two regions and an animation in the XML, then one line of C# (the animation name), then a new room layout.</a:t>
+              <a:t>Exercise: the beetle is drawn in the atlas but not described. Two regions and an animation in the XML, then one line of C# (the animation name).</a:t>
             </a:r>
           </a:p>
           <a:p>
@@ -17442,7 +17442,7 @@
             </a:pPr>
             <a:r>
               <a:rPr lang="en"/>
-              <a:t>Make the enemy a beetle; then change the room in tilemap-definition.xml</a:t>
+              <a:t>Make the enemy a beetle: which line of C# changes?</a:t>
             </a:r>
             <a:endParaRPr/>
           </a:p>

--- a/slides/03 Snake.pptx
+++ b/slides/03 Snake.pptx
@@ -14166,14 +14166,14 @@
       </p:sp>
       <p:pic>
         <p:nvPicPr>
-          <p:cNvPr id="46" name="Picture 46" descr="snake9.png"/>
+          <p:cNvPr id="46" name="Picture 46" descr="snake.gif"/>
           <p:cNvPicPr>
             <a:picLocks noChangeAspect="1"/>
           </p:cNvPicPr>
           <p:nvPr/>
         </p:nvPicPr>
         <p:blipFill>
-          <a:blip r:embed="rId4"/>
+          <a:blip r:embed="rId3"/>
           <a:stretch>
             <a:fillRect/>
           </a:stretch>
@@ -14181,7 +14181,7 @@
         <p:spPr>
           <a:xfrm>
             <a:off x="1846087" y="1626274"/>
-            <a:ext cx="5451825" cy="3066651"/>
+            <a:ext cx="5451824" cy="3066651"/>
           </a:xfrm>
           <a:prstGeom prst="rect">
             <a:avLst/>

--- a/slides/03 Snake.pptx
+++ b/slides/03 Snake.pptx
@@ -48,7 +48,6 @@
     <p:sldId id="293" r:id="rId52"/>
     <p:sldId id="302" r:id="rId30"/>
     <p:sldId id="294" r:id="rId53"/>
-    <p:sldId id="296" r:id="rId55"/>
   </p:sldIdLst>
   <p:sldSz cy="5143500" cx="9144000"/>
   <p:notesSz cx="6858000" cy="9144000"/>
@@ -1393,64 +1392,6 @@
           <a:p>
             <a:r>
               <a:t>Ask two groups to share one answer each, and push them to name actual classes and files.</a:t>
-            </a:r>
-          </a:p>
-        </p:txBody>
-      </p:sp>
-    </p:spTree>
-  </p:cSld>
-  <p:clrMapOvr>
-    <a:masterClrMapping/>
-  </p:clrMapOvr>
-</p:notes>
-</file>
-
-<file path=ppt/notesSlides/notesSlide17.xml><?xml version="1.0" encoding="utf-8"?>
-<p:notes xmlns:a="http://schemas.openxmlformats.org/drawingml/2006/main" xmlns:p="http://schemas.openxmlformats.org/presentationml/2006/main" xmlns:r="http://schemas.openxmlformats.org/officeDocument/2006/relationships">
-  <p:cSld>
-    <p:spTree>
-      <p:nvGrpSpPr>
-        <p:cNvPr id="1" name=""/>
-        <p:cNvGrpSpPr/>
-        <p:nvPr/>
-      </p:nvGrpSpPr>
-      <p:grpSpPr>
-        <a:xfrm>
-          <a:off x="0" y="0"/>
-          <a:ext cx="0" cy="0"/>
-          <a:chOff x="0" y="0"/>
-          <a:chExt cx="0" cy="0"/>
-        </a:xfrm>
-      </p:grpSpPr>
-      <p:sp>
-        <p:nvSpPr>
-          <p:cNvPr id="2" name="Slide Image Placeholder 1"/>
-          <p:cNvSpPr>
-            <a:spLocks noGrp="1"/>
-          </p:cNvSpPr>
-          <p:nvPr>
-            <p:ph type="sldImg" idx="2"/>
-          </p:nvPr>
-        </p:nvSpPr>
-        <p:spPr/>
-      </p:sp>
-      <p:sp>
-        <p:nvSpPr>
-          <p:cNvPr id="3" name="Notes Placeholder 2"/>
-          <p:cNvSpPr>
-            <a:spLocks noGrp="1"/>
-          </p:cNvSpPr>
-          <p:nvPr>
-            <p:ph type="body" idx="1"/>
-          </p:nvPr>
-        </p:nvSpPr>
-        <p:spPr/>
-        <p:txBody>
-          <a:bodyPr/>
-          <a:lstStyle/>
-          <a:p>
-            <a:r>
-              <a:t>Groups and a concept before session 04, a repository from gar-starter, and a first architecture sketch.</a:t>
             </a:r>
           </a:p>
         </p:txBody>
@@ -20883,214 +20824,6 @@
 </p:sld>
 </file>
 
-<file path=ppt/slides/slide41.xml><?xml version="1.0" encoding="utf-8"?>
-<p:sld xmlns:a="http://schemas.openxmlformats.org/drawingml/2006/main" xmlns:r="http://schemas.openxmlformats.org/officeDocument/2006/relationships" xmlns:mc="http://schemas.openxmlformats.org/markup-compatibility/2006" xmlns:mv="urn:schemas-microsoft-com:mac:vml" xmlns:p="http://schemas.openxmlformats.org/presentationml/2006/main" xmlns:c="http://schemas.openxmlformats.org/drawingml/2006/chart" xmlns:dgm="http://schemas.openxmlformats.org/drawingml/2006/diagram" xmlns:o="urn:schemas-microsoft-com:office:office" xmlns:v="urn:schemas-microsoft-com:vml" xmlns:pvml="urn:schemas-microsoft-com:office:powerpoint" xmlns:com="http://schemas.openxmlformats.org/drawingml/2006/compatibility" xmlns:p14="http://schemas.microsoft.com/office/powerpoint/2010/main" xmlns:p15="http://schemas.microsoft.com/office/powerpoint/2012/main" xmlns:ahyp="http://schemas.microsoft.com/office/drawing/2018/hyperlinkcolor">
-  <p:cSld>
-    <p:spTree>
-      <p:nvGrpSpPr>
-        <p:cNvPr id="56" name="Shape 56"/>
-        <p:cNvGrpSpPr/>
-        <p:nvPr/>
-      </p:nvGrpSpPr>
-      <p:grpSpPr>
-        <a:xfrm>
-          <a:off x="0" y="0"/>
-          <a:ext cx="0" cy="0"/>
-          <a:chOff x="0" y="0"/>
-          <a:chExt cx="0" cy="0"/>
-        </a:xfrm>
-      </p:grpSpPr>
-      <p:sp>
-        <p:nvSpPr>
-          <p:cNvPr id="57" name="Google Shape;57;p12"/>
-          <p:cNvSpPr txBox="1"/>
-          <p:nvPr>
-            <p:ph type="title"/>
-          </p:nvPr>
-        </p:nvSpPr>
-        <p:spPr>
-          <a:xfrm>
-            <a:off x="311700" y="195615"/>
-            <a:ext cx="8520600" cy="572700"/>
-          </a:xfrm>
-          <a:prstGeom prst="rect">
-            <a:avLst/>
-          </a:prstGeom>
-        </p:spPr>
-        <p:txBody>
-          <a:bodyPr anchorCtr="0" anchor="t" bIns="91425" lIns="91425" spcFirstLastPara="1" rIns="91425" wrap="square" tIns="91425">
-            <a:normAutofit fontScale="90000"/>
-          </a:bodyPr>
-          <a:lstStyle/>
-          <a:p>
-            <a:pPr indent="0" lvl="0" marL="0" rtl="0" algn="l">
-              <a:spcBef>
-                <a:spcPts val="0"/>
-              </a:spcBef>
-              <a:spcAft>
-                <a:spcPts val="0"/>
-              </a:spcAft>
-              <a:buNone/>
-            </a:pPr>
-            <a:r>
-              <a:rPr lang="en"/>
-              <a:t>Your Course Project</a:t>
-            </a:r>
-            <a:endParaRPr/>
-          </a:p>
-        </p:txBody>
-      </p:sp>
-      <p:sp>
-        <p:nvSpPr>
-          <p:cNvPr id="58" name="Google Shape;58;p12"/>
-          <p:cNvSpPr txBox="1"/>
-          <p:nvPr>
-            <p:ph idx="1" type="body"/>
-          </p:nvPr>
-        </p:nvSpPr>
-        <p:spPr>
-          <a:xfrm>
-            <a:off x="311700" y="885950"/>
-            <a:ext cx="8520600" cy="4023300"/>
-          </a:xfrm>
-          <a:prstGeom prst="rect">
-            <a:avLst/>
-          </a:prstGeom>
-        </p:spPr>
-        <p:txBody>
-          <a:bodyPr anchorCtr="0" anchor="t" bIns="91425" lIns="91425" spcFirstLastPara="1" rIns="91425" wrap="square" tIns="91425">
-            <a:normAutofit/>
-          </a:bodyPr>
-          <a:lstStyle/>
-          <a:p>
-            <a:pPr indent="-330200" lvl="0" marL="457200" rtl="0" algn="l">
-              <a:spcBef>
-                <a:spcPts val="0"/>
-              </a:spcBef>
-              <a:spcAft>
-                <a:spcPts val="0"/>
-              </a:spcAft>
-              <a:buSzPts val="1600"/>
-              <a:buChar char="●"/>
-            </a:pPr>
-            <a:r>
-              <a:rPr lang="en"/>
-              <a:t>Form groups of 1–3 students</a:t>
-            </a:r>
-            <a:endParaRPr/>
-          </a:p>
-          <a:p>
-            <a:pPr indent="-330200" lvl="0" marL="457200" rtl="0" algn="l">
-              <a:spcBef>
-                <a:spcPts val="0"/>
-              </a:spcBef>
-              <a:spcAft>
-                <a:spcPts val="0"/>
-              </a:spcAft>
-              <a:buSzPts val="1600"/>
-              <a:buChar char="●"/>
-            </a:pPr>
-            <a:r>
-              <a:rPr lang="en"/>
-              <a:t>Think of a game you want to create</a:t>
-            </a:r>
-            <a:endParaRPr/>
-          </a:p>
-          <a:p>
-            <a:pPr indent="-317500" lvl="1" marL="914400" rtl="0" algn="l">
-              <a:spcBef>
-                <a:spcPts val="0"/>
-              </a:spcBef>
-              <a:spcAft>
-                <a:spcPts val="0"/>
-              </a:spcAft>
-              <a:buSzPts val="1400"/>
-              <a:buChar char="○"/>
-            </a:pPr>
-            <a:r>
-              <a:rPr lang="en"/>
-              <a:t>Take inspiration from classic games!</a:t>
-            </a:r>
-            <a:endParaRPr/>
-          </a:p>
-          <a:p>
-            <a:pPr indent="-317500" lvl="1" marL="914400" rtl="0" algn="l">
-              <a:spcBef>
-                <a:spcPts val="0"/>
-              </a:spcBef>
-              <a:spcAft>
-                <a:spcPts val="0"/>
-              </a:spcAft>
-              <a:buSzPts val="1400"/>
-              <a:buChar char="○"/>
-            </a:pPr>
-            <a:r>
-              <a:rPr lang="en"/>
-              <a:t>Be mindful of scope (creep)</a:t>
-            </a:r>
-            <a:endParaRPr/>
-          </a:p>
-          <a:p>
-            <a:pPr indent="-330200" lvl="0" marL="457200" rtl="0" algn="l">
-              <a:spcBef>
-                <a:spcPts val="0"/>
-              </a:spcBef>
-              <a:spcAft>
-                <a:spcPts val="0"/>
-              </a:spcAft>
-              <a:buSzPts val="1600"/>
-              <a:buChar char="●"/>
-            </a:pPr>
-            <a:r>
-              <a:rPr lang="en"/>
-              <a:t>Get it started in your own time, before session 04</a:t>
-            </a:r>
-            <a:endParaRPr/>
-          </a:p>
-          <a:p>
-            <a:pPr indent="-317500" lvl="1" marL="914400" rtl="0" algn="l">
-              <a:spcBef>
-                <a:spcPts val="0"/>
-              </a:spcBef>
-              <a:spcAft>
-                <a:spcPts val="0"/>
-              </a:spcAft>
-              <a:buSzPts val="1400"/>
-              <a:buChar char="○"/>
-            </a:pPr>
-            <a:r>
-              <a:rPr lang="en"/>
-              <a:t>Game concept, repository setup and a first architecture sketch</a:t>
-            </a:r>
-            <a:endParaRPr/>
-          </a:p>
-          <a:p>
-            <a:pPr indent="-317500" lvl="1" marL="914400" rtl="0" algn="l">
-              <a:spcBef>
-                <a:spcPts val="0"/>
-              </a:spcBef>
-              <a:spcAft>
-                <a:spcPts val="0"/>
-              </a:spcAft>
-              <a:buSzPts val="1400"/>
-              <a:buChar char="○"/>
-            </a:pPr>
-            <a:r>
-              <a:rPr lang="en"/>
-              <a:t>Your repository starts from the gar-starter template on GitHub</a:t>
-            </a:r>
-            <a:endParaRPr/>
-          </a:p>
-        </p:txBody>
-      </p:sp>
-    </p:spTree>
-  </p:cSld>
-  <p:clrMapOvr>
-    <a:masterClrMapping/>
-  </p:clrMapOvr>
-</p:sld>
-</file>
-
 <file path=ppt/slides/slide5.xml><?xml version="1.0" encoding="utf-8"?>
 <p:sld xmlns:a="http://schemas.openxmlformats.org/drawingml/2006/main" xmlns:r="http://schemas.openxmlformats.org/officeDocument/2006/relationships" xmlns:mc="http://schemas.openxmlformats.org/markup-compatibility/2006" xmlns:mv="urn:schemas-microsoft-com:mac:vml" xmlns:p="http://schemas.openxmlformats.org/presentationml/2006/main" xmlns:c="http://schemas.openxmlformats.org/drawingml/2006/chart" xmlns:dgm="http://schemas.openxmlformats.org/drawingml/2006/diagram" xmlns:o="urn:schemas-microsoft-com:office:office" xmlns:v="urn:schemas-microsoft-com:vml" xmlns:pvml="urn:schemas-microsoft-com:office:powerpoint" xmlns:com="http://schemas.openxmlformats.org/drawingml/2006/compatibility" xmlns:p14="http://schemas.microsoft.com/office/powerpoint/2010/main" xmlns:p15="http://schemas.microsoft.com/office/powerpoint/2012/main" xmlns:ahyp="http://schemas.microsoft.com/office/drawing/2018/hyperlinkcolor">
   <p:cSld>

--- a/slides/03 Snake.pptx
+++ b/slides/03 Snake.pptx
@@ -1103,7 +1103,7 @@
           <a:lstStyle/>
           <a:p>
             <a:r>
-              <a:t>An animation: a list of regions and a delay. The bottom bat cycles through the three above.</a:t>
+              <a:t>An animation: a list of regions and a delay. The bottom mouse cycles through the three above.</a:t>
             </a:r>
           </a:p>
         </p:txBody>
@@ -1975,7 +1975,7 @@
           </a:p>
           <a:p>
             <a:r>
-              <a:t>Answer: none of them need C#. A faster bat is a delay, an extra frame is a Frame line, a new room is the tilemap file.</a:t>
+              <a:t>Answer: none of them need C#. A faster mouse is a delay, an extra frame is a Frame line, a new room is the tilemap file.</a:t>
             </a:r>
           </a:p>
         </p:txBody>
@@ -2770,7 +2770,7 @@
           </a:p>
           <a:p>
             <a:r>
-              <a:t>- eating the bat grows the snake</a:t>
+              <a:t>- eating the mouse grows the snake</a:t>
             </a:r>
           </a:p>
           <a:p>
@@ -3151,7 +3151,7 @@
           </a:p>
           <a:p>
             <a:r>
-              <a:t>Ask afterwards: how much C# did you change? One string. And for a beetle next to the bat? A lot: Game1 handles the bat by name (its collisions, its bounces). That is the next architecture problem, not a data one.</a:t>
+              <a:t>Ask afterwards: how much C# did you change? One string. And for a beetle next to the mouse? A lot: Game1 handles the mouse by name (its collisions, its bounces). That is the next architecture problem, not a data one.</a:t>
             </a:r>
           </a:p>
         </p:txBody>
@@ -3523,7 +3523,7 @@
           </a:p>
           <a:p>
             <a:r>
-              <a:t>Answer: without CenterOrigin the bat spins around its top-left corner, because the origin is where rotation and scale start from.</a:t>
+              <a:t>Answer: without CenterOrigin the mouse spins around its top-left corner, because the origin is where rotation and scale start from.</a:t>
             </a:r>
           </a:p>
         </p:txBody>
@@ -3581,7 +3581,7 @@
           <a:lstStyle/>
           <a:p>
             <a:r>
-              <a:t>Pairs, about 5 minutes, in Snake1. Moving the bat-1 rectangle is enough; no C#.</a:t>
+              <a:t>Pairs, about 5 minutes, in Snake1. Moving the mouse-1 rectangle is enough; no C#.</a:t>
             </a:r>
           </a:p>
           <a:p>
@@ -7779,14 +7779,14 @@
       </p:sp>
       <p:pic>
         <p:nvPicPr>
-          <p:cNvPr id="85" name="Picture 87" descr="snake_atlas.png"/>
+          <p:cNvPr id="85" name="Picture 87" descr="atlas_region.png"/>
           <p:cNvPicPr>
             <a:picLocks noChangeAspect="1"/>
           </p:cNvPicPr>
           <p:nvPr/>
         </p:nvPicPr>
         <p:blipFill>
-          <a:blip r:embed="rId4"/>
+          <a:blip r:embed="rId3"/>
           <a:stretch>
             <a:fillRect/>
           </a:stretch>
@@ -8120,7 +8120,7 @@
             </a:pPr>
             <a:r>
               <a:rPr lang="en"/>
-              <a:t>Draw the bat with its second frame (x 20, y 20)</a:t>
+              <a:t>Draw the mouse with its second frame (x 20, y 20)</a:t>
             </a:r>
             <a:endParaRPr/>
           </a:p>
@@ -8137,7 +8137,7 @@
             </a:pPr>
             <a:r>
               <a:rPr lang="en"/>
-              <a:t>Then misspell bat-1 in the XML. What happens, and when?</a:t>
+              <a:t>Then misspell mouse-1 in the XML. What happens, and when?</a:t>
             </a:r>
             <a:endParaRPr/>
           </a:p>
@@ -8396,20 +8396,20 @@
       </p:sp>
       <p:pic>
         <p:nvPicPr>
-          <p:cNvPr id="100" name="Picture 105" descr="snake_sprite.png"/>
+          <p:cNvPr id="100" name="Picture 105" descr="sprite.png"/>
           <p:cNvPicPr>
             <a:picLocks noChangeAspect="1"/>
           </p:cNvPicPr>
           <p:nvPr/>
         </p:nvPicPr>
         <p:blipFill>
-          <a:blip r:embed="rId4"/>
+          <a:blip r:embed="rId3"/>
           <a:stretch>
             <a:fillRect/>
           </a:stretch>
         </p:blipFill>
         <p:spPr>
-          <a:xfrm rot="20408050">
+          <a:xfrm>
             <a:off x="3478224" y="1282475"/>
             <a:ext cx="2187550" cy="2187550"/>
           </a:xfrm>
@@ -9112,7 +9112,7 @@
             </a:pPr>
             <a:r>
               <a:rPr lang="en"/>
-              <a:t>Make the bat bigger, and spin it the other way</a:t>
+              <a:t>Make the mouse bigger, and spin it the other way</a:t>
             </a:r>
             <a:endParaRPr/>
           </a:p>
@@ -9295,14 +9295,14 @@
       </p:sp>
       <p:pic>
         <p:nvPicPr>
-          <p:cNvPr id="123" name="Picture 123" descr="bat_animation.gif"/>
+          <p:cNvPr id="123" name="Picture 123" descr="animation.gif"/>
           <p:cNvPicPr>
             <a:picLocks noChangeAspect="1"/>
           </p:cNvPicPr>
           <p:nvPr/>
         </p:nvPicPr>
         <p:blipFill>
-          <a:blip r:embed="rId4"/>
+          <a:blip r:embed="rId3"/>
           <a:stretch>
             <a:fillRect/>
           </a:stretch>
@@ -9625,7 +9625,7 @@
             </a:pPr>
             <a:r>
               <a:rPr lang="en"/>
-              <a:t>Make the bat flap twice as fast, and the snake breathe slower</a:t>
+              <a:t>Make the mouse’s tail wiggle twice as fast, and the snake breathe slower</a:t>
             </a:r>
             <a:endParaRPr/>
           </a:p>
@@ -9642,7 +9642,7 @@
             </a:pPr>
             <a:r>
               <a:rPr lang="en"/>
-              <a:t>Give the bat’s animation one more frame</a:t>
+              <a:t>Give the mouse’s animation one more frame</a:t>
             </a:r>
             <a:endParaRPr/>
           </a:p>
@@ -9828,14 +9828,14 @@
       </p:sp>
       <p:pic>
         <p:nvPicPr>
-          <p:cNvPr id="266" name="Picture 267" descr="snake_tileset.png"/>
+          <p:cNvPr id="266" name="Picture 267" descr="tileset.png"/>
           <p:cNvPicPr>
             <a:picLocks noChangeAspect="1"/>
           </p:cNvPicPr>
           <p:nvPr/>
         </p:nvPicPr>
         <p:blipFill>
-          <a:blip r:embed="rId4"/>
+          <a:blip r:embed="rId3"/>
           <a:stretch>
             <a:fillRect/>
           </a:stretch>
@@ -9852,14 +9852,14 @@
       </p:pic>
       <p:pic>
         <p:nvPicPr>
-          <p:cNvPr id="267" name="Picture 267" descr="snake_tileset_labelled.png"/>
+          <p:cNvPr id="267" name="Picture 267" descr="tileset_numbers.png"/>
           <p:cNvPicPr>
             <a:picLocks noChangeAspect="1"/>
           </p:cNvPicPr>
           <p:nvPr/>
         </p:nvPicPr>
         <p:blipFill>
-          <a:blip r:embed="rId5"/>
+          <a:blip r:embed="rId6"/>
           <a:stretch>
             <a:fillRect/>
           </a:stretch>
@@ -10061,14 +10061,14 @@
       </p:sp>
       <p:pic>
         <p:nvPicPr>
-          <p:cNvPr id="273" name="Picture 275" descr="snake_tileset_labelled.png"/>
+          <p:cNvPr id="273" name="Picture 275" descr="tileset_numbers.png"/>
           <p:cNvPicPr>
             <a:picLocks noChangeAspect="1"/>
           </p:cNvPicPr>
           <p:nvPr/>
         </p:nvPicPr>
         <p:blipFill>
-          <a:blip r:embed="rId4"/>
+          <a:blip r:embed="rId3"/>
           <a:stretch>
             <a:fillRect/>
           </a:stretch>
@@ -10906,14 +10906,14 @@
       </p:sp>
       <p:pic>
         <p:nvPicPr>
-          <p:cNvPr id="275" name="Picture 275" descr="snake_room.png"/>
+          <p:cNvPr id="275" name="Picture 275" descr="room_tiles.png"/>
           <p:cNvPicPr>
             <a:picLocks noChangeAspect="1"/>
           </p:cNvPicPr>
           <p:nvPr/>
         </p:nvPicPr>
         <p:blipFill>
-          <a:blip r:embed="rId5"/>
+          <a:blip r:embed="rId6"/>
           <a:stretch>
             <a:fillRect/>
           </a:stretch>
@@ -14114,7 +14114,7 @@
           <p:nvPr/>
         </p:nvPicPr>
         <p:blipFill>
-          <a:blip r:embed="rId3"/>
+          <a:blip r:embed="rId4"/>
           <a:stretch>
             <a:fillRect/>
           </a:stretch>
@@ -17400,7 +17400,7 @@
             </a:pPr>
             <a:r>
               <a:rPr lang="en"/>
-              <a:t>How much C# did you change? And for a beetle next to the bat?</a:t>
+              <a:t>How much C# did you change? And for a beetle next to the mouse?</a:t>
             </a:r>
             <a:endParaRPr/>
           </a:p>
@@ -21615,7 +21615,7 @@
           <a:p>
             <a:pPr algn="l"/>
             <a:r>
-              <a:rPr sz="1400" b="0">
+              <a:rPr sz="1300" b="0">
                 <a:solidFill>
                   <a:srgbClr val="DEE2E6"/>
                 </a:solidFill>
@@ -21623,43 +21623,43 @@
               <a:t/>
             </a:r>
             <a:r>
-              <a:rPr sz="1100">
+              <a:rPr sz="1000">
                 <a:solidFill>
                   <a:srgbClr val="DEE2E6"/>
                 </a:solidFill>
                 <a:latin typeface="Consolas"/>
               </a:rPr>
-              <a:t>&lt;Region name="bat-1" x="20" y="0" width="20" height="20" /&gt;</a:t>
+              <a:t>&lt;Region name="mouse-1" x="20" y="0" width="20" height="20" /&gt;</a:t>
             </a:r>
           </a:p>
           <a:p>
             <a:pPr algn="l"/>
             <a:r>
-              <a:rPr sz="1100">
+              <a:rPr sz="1000">
                 <a:solidFill>
                   <a:srgbClr val="DEE2E6"/>
                 </a:solidFill>
                 <a:latin typeface="Consolas"/>
               </a:rPr>
-              <a:t>&lt;Region name="bat-2" x="20" y="20" width="20" height="20" /&gt;</a:t>
+              <a:t>&lt;Region name="mouse-2" x="20" y="20" width="20" height="20" /&gt;</a:t>
             </a:r>
           </a:p>
           <a:p>
             <a:pPr algn="l"/>
             <a:r>
-              <a:rPr sz="1100">
+              <a:rPr sz="1000">
                 <a:solidFill>
                   <a:srgbClr val="DEE2E6"/>
                 </a:solidFill>
                 <a:latin typeface="Consolas"/>
               </a:rPr>
-              <a:t>&lt;Region name="bat-3" x="40" y="0" width="20" height="20" /&gt;</a:t>
+              <a:t>&lt;Region name="mouse-3" x="40" y="0" width="20" height="20" /&gt;</a:t>
             </a:r>
           </a:p>
           <a:p>
             <a:pPr algn="l"/>
             <a:r>
-              <a:rPr sz="1100">
+              <a:rPr sz="1000">
                 <a:solidFill>
                   <a:srgbClr val="DEE2E6"/>
                 </a:solidFill>
@@ -21671,67 +21671,67 @@
           <a:p>
             <a:pPr algn="l"/>
             <a:r>
-              <a:rPr sz="1100">
+              <a:rPr sz="1000">
                 <a:solidFill>
                   <a:srgbClr val="DEE2E6"/>
                 </a:solidFill>
                 <a:latin typeface="Consolas"/>
               </a:rPr>
-              <a:t>&lt;Animation name="bat-animation" delay="200"&gt;</a:t>
+              <a:t>&lt;Animation name="mouse-animation" delay="200"&gt;</a:t>
             </a:r>
           </a:p>
           <a:p>
             <a:pPr algn="l"/>
             <a:r>
-              <a:rPr sz="1100">
+              <a:rPr sz="1000">
                 <a:solidFill>
                   <a:srgbClr val="DEE2E6"/>
                 </a:solidFill>
                 <a:latin typeface="Consolas"/>
               </a:rPr>
-              <a:t>    &lt;Frame region="bat-1" /&gt;</a:t>
+              <a:t>    &lt;Frame region="mouse-1" /&gt;</a:t>
             </a:r>
           </a:p>
           <a:p>
             <a:pPr algn="l"/>
             <a:r>
-              <a:rPr sz="1100">
+              <a:rPr sz="1000">
                 <a:solidFill>
                   <a:srgbClr val="DEE2E6"/>
                 </a:solidFill>
                 <a:latin typeface="Consolas"/>
               </a:rPr>
-              <a:t>    &lt;Frame region="bat-2" /&gt;</a:t>
+              <a:t>    &lt;Frame region="mouse-2" /&gt;</a:t>
             </a:r>
           </a:p>
           <a:p>
             <a:pPr algn="l"/>
             <a:r>
-              <a:rPr sz="1100">
+              <a:rPr sz="1000">
                 <a:solidFill>
                   <a:srgbClr val="DEE2E6"/>
                 </a:solidFill>
                 <a:latin typeface="Consolas"/>
               </a:rPr>
-              <a:t>    &lt;Frame region="bat-1" /&gt;</a:t>
+              <a:t>    &lt;Frame region="mouse-1" /&gt;</a:t>
             </a:r>
           </a:p>
           <a:p>
             <a:pPr algn="l"/>
             <a:r>
-              <a:rPr sz="1100">
+              <a:rPr sz="1000">
                 <a:solidFill>
                   <a:srgbClr val="DEE2E6"/>
                 </a:solidFill>
                 <a:latin typeface="Consolas"/>
               </a:rPr>
-              <a:t>    &lt;Frame region="bat-3" /&gt;</a:t>
+              <a:t>    &lt;Frame region="mouse-3" /&gt;</a:t>
             </a:r>
           </a:p>
           <a:p>
             <a:pPr algn="l"/>
             <a:r>
-              <a:rPr sz="1100">
+              <a:rPr sz="1000">
                 <a:solidFill>
                   <a:srgbClr val="DEE2E6"/>
                 </a:solidFill>
@@ -21771,7 +21771,7 @@
                   <a:srgbClr val="DEE2E6"/>
                 </a:solidFill>
               </a:rPr>
-              <a:t>A faster bat?</a:t>
+              <a:t>A faster mouse?</a:t>
             </a:r>
           </a:p>
           <a:p>
@@ -21909,14 +21909,14 @@
       </p:sp>
       <p:pic>
         <p:nvPicPr>
-          <p:cNvPr id="64" name="Picture 73" descr="bat1.png"/>
+          <p:cNvPr id="64" name="Picture 73" descr="mouse1.png"/>
           <p:cNvPicPr>
             <a:picLocks noChangeAspect="1"/>
           </p:cNvPicPr>
           <p:nvPr/>
         </p:nvPicPr>
         <p:blipFill>
-          <a:blip r:embed="rId6"/>
+          <a:blip r:embed="rId3"/>
           <a:stretch>
             <a:fillRect/>
           </a:stretch>
@@ -21933,7 +21933,7 @@
       </p:pic>
       <p:pic>
         <p:nvPicPr>
-          <p:cNvPr id="65" name="Picture 73" descr="snake1.png"/>
+          <p:cNvPr id="65" name="Picture 73" descr="image.png"/>
           <p:cNvPicPr>
             <a:picLocks noChangeAspect="1"/>
           </p:cNvPicPr>
@@ -21957,7 +21957,7 @@
       </p:pic>
       <p:pic>
         <p:nvPicPr>
-          <p:cNvPr id="66" name="Picture 73" descr="snake2.png"/>
+          <p:cNvPr id="66" name="Picture 73" descr="image.png"/>
           <p:cNvPicPr>
             <a:picLocks noChangeAspect="1"/>
           </p:cNvPicPr>
@@ -21981,14 +21981,14 @@
       </p:pic>
       <p:pic>
         <p:nvPicPr>
-          <p:cNvPr id="67" name="Picture 73" descr="snake_atlas.png"/>
+          <p:cNvPr id="67" name="Picture 73" descr="atlas.png"/>
           <p:cNvPicPr>
             <a:picLocks noChangeAspect="1"/>
           </p:cNvPicPr>
           <p:nvPr/>
         </p:nvPicPr>
         <p:blipFill>
-          <a:blip r:embed="rId8"/>
+          <a:blip r:embed="rId10"/>
           <a:stretch>
             <a:fillRect/>
           </a:stretch>
@@ -22005,14 +22005,14 @@
       </p:pic>
       <p:pic>
         <p:nvPicPr>
-          <p:cNvPr id="68" name="Picture 73" descr="floor.png"/>
+          <p:cNvPr id="68" name="Picture 73" descr="grass.png"/>
           <p:cNvPicPr>
             <a:picLocks noChangeAspect="1"/>
           </p:cNvPicPr>
           <p:nvPr/>
         </p:nvPicPr>
         <p:blipFill>
-          <a:blip r:embed="rId7"/>
+          <a:blip r:embed="rId9"/>
           <a:stretch>
             <a:fillRect/>
           </a:stretch>
@@ -22187,7 +22187,7 @@
                 <a:cs typeface="VT323"/>
                 <a:sym typeface="VT323"/>
               </a:rPr>
-              <a:t>bat1.png</a:t>
+              <a:t>mouse1.png</a:t>
             </a:r>
             <a:endParaRPr sz="900">
               <a:solidFill>
@@ -22245,7 +22245,7 @@
                 <a:cs typeface="VT323"/>
                 <a:sym typeface="VT323"/>
               </a:rPr>
-              <a:t>floor.png</a:t>
+              <a:t>grass.png</a:t>
             </a:r>
             <a:endParaRPr sz="900">
               <a:solidFill>
@@ -22786,14 +22786,14 @@
       </p:sp>
       <p:pic>
         <p:nvPicPr>
-          <p:cNvPr id="79" name="Picture 79" descr="snake_atlas.png"/>
+          <p:cNvPr id="79" name="Picture 79" descr="atlas.png"/>
           <p:cNvPicPr>
             <a:picLocks noChangeAspect="1"/>
           </p:cNvPicPr>
           <p:nvPr/>
         </p:nvPicPr>
         <p:blipFill>
-          <a:blip r:embed="rId4"/>
+          <a:blip r:embed="rId3"/>
           <a:stretch>
             <a:fillRect/>
           </a:stretch>

--- a/slides/03 Snake.pptx
+++ b/slides/03 Snake.pptx
@@ -3518,7 +3518,7 @@
           <a:lstStyle/>
           <a:p>
             <a:r>
-              <a:t>Pairs, about 5 minutes. Scale and rotation speed are at the top of Game1.</a:t>
+              <a:t>Pairs, about 5 minutes. The rotation speed is a constant at the top of Game1; the scale is set in LoadContent.</a:t>
             </a:r>
           </a:p>
           <a:p>

--- a/slides/03 Snake.pptx
+++ b/slides/03 Snake.pptx
@@ -920,7 +920,7 @@
           </a:p>
           <a:p>
             <a:r>
-              <a:t>- the Sprite class in GMDCore</a:t>
+              <a:t>- the Sprite class in GARCore</a:t>
             </a:r>
           </a:p>
           <a:p>
@@ -1449,7 +1449,7 @@
           <a:lstStyle/>
           <a:p>
             <a:r>
-              <a:t>For fast students: pull the tick timer out into a reusable FixedTimer in GMDCore.</a:t>
+              <a:t>For fast students: pull the tick timer out into a reusable FixedTimer in GARCore.</a:t>
             </a:r>
           </a:p>
         </p:txBody>
@@ -2671,7 +2671,7 @@
           <a:lstStyle/>
           <a:p>
             <a:r>
-              <a:t>Rectangles: MonoGame has Intersects. Circles: we add a Circle struct to GMDCore.</a:t>
+              <a:t>Rectangles: MonoGame has Intersects. Circles: we add a Circle struct to GARCore.</a:t>
             </a:r>
           </a:p>
           <a:p>
@@ -3245,7 +3245,7 @@
           </a:p>
           <a:p>
             <a:r>
-              <a:t>Gamepad: a press needs last frame’s state, so it goes through a GamePadInfo in GMDCore. In the game, only GameController changes. Geometry Wars has a finished GamePadInfo to compare with.</a:t>
+              <a:t>Gamepad: a press needs last frame’s state, so it goes through a GamePadInfo in GARCore. In the game, only GameController changes. Geometry Wars has a finished GamePadInfo to compare with.</a:t>
             </a:r>
           </a:p>
         </p:txBody>
@@ -16901,7 +16901,7 @@
                   <a:schemeClr val="accent5"/>
                 </a:solidFill>
               </a:rPr>
-              <a:t>Refactoring Collisions to GMDCore</a:t>
+              <a:t>Refactoring Collisions to GARCore</a:t>
             </a:r>
             <a:endParaRPr>
               <a:solidFill>
@@ -16946,7 +16946,7 @@
             </a:pPr>
             <a:r>
               <a:rPr lang="en"/>
-              <a:t>MonoGame checks rectangles for us; circles we add to GMDCore.</a:t>
+              <a:t>MonoGame checks rectangles for us; circles we add to GARCore.</a:t>
             </a:r>
             <a:endParaRPr/>
           </a:p>
@@ -17032,7 +17032,7 @@
                 </a:solidFill>
                 <a:latin typeface="Consolas"/>
               </a:rPr>
-              <a:t>public readonly record struct Circle   // GMDCore</a:t>
+              <a:t>public readonly record struct Circle   // GARCore</a:t>
             </a:r>
           </a:p>
           <a:p>
@@ -17840,7 +17840,7 @@
             </a:pPr>
             <a:r>
               <a:rPr lang="en"/>
-              <a:t>New input: the D-pad, through a GamePadInfo in GMDCore</a:t>
+              <a:t>New input: the D-pad, through a GamePadInfo in GARCore</a:t>
             </a:r>
             <a:endParaRPr/>
           </a:p>
@@ -18655,7 +18655,7 @@
             </a:pPr>
             <a:r>
               <a:rPr lang="en"/>
-              <a:t>Move it into a reusable FixedTimer class in GMDCore</a:t>
+              <a:t>Move it into a reusable FixedTimer class in GARCore</a:t>
             </a:r>
             <a:endParaRPr/>
           </a:p>

--- a/slides/03 Snake.pptx
+++ b/slides/03 Snake.pptx
@@ -19611,7 +19611,7 @@
         <p:spPr>
           <a:xfrm>
             <a:off x="311700" y="885950"/>
-            <a:ext cx="8520600" cy="4023300"/>
+            <a:ext cx="8520600" cy="2441448"/>
           </a:xfrm>
           <a:prstGeom prst="rect">
             <a:avLst/>
@@ -19622,6 +19622,23 @@
             <a:normAutofit/>
           </a:bodyPr>
           <a:lstStyle/>
+          <a:p>
+            <a:pPr indent="-330200" lvl="0" marL="457200" rtl="0" algn="l">
+              <a:spcBef>
+                <a:spcPts val="0"/>
+              </a:spcBef>
+              <a:spcAft>
+                <a:spcPts val="0"/>
+              </a:spcAft>
+              <a:buSzPts val="1600"/>
+              <a:buChar char="●"/>
+            </a:pPr>
+            <a:r>
+              <a:rPr lang="en" b="1"/>
+              <a:t>Main topic: Assets as data</a:t>
+            </a:r>
+            <a:endParaRPr/>
+          </a:p>
           <a:p>
             <a:pPr indent="-330200" lvl="0" marL="457200" rtl="0" algn="l">
               <a:spcBef>

--- a/slides/03 Snake.pptx
+++ b/slides/03 Snake.pptx
@@ -2483,7 +2483,7 @@
           <a:lstStyle/>
           <a:p>
             <a:r>
-              <a:t>The main topic: assets as data. The art, the animations and the room are described in XML, and the code only reads them.</a:t>
+              <a:t>Today’s main topic is assets as data. The art, the animations and the room are described in XML, and the code only reads them.</a:t>
             </a:r>
           </a:p>
           <a:p>

--- a/slides/03 Snake.pptx
+++ b/slides/03 Snake.pptx
@@ -1328,7 +1328,7 @@
           </a:p>
           <a:p>
             <a:r>
-              <a:t>Today we build the parts that matter for the architecture, not the whole game.</a:t>
+              <a:t>Today we build the parts that matter for the architecture.</a:t>
             </a:r>
           </a:p>
         </p:txBody>
@@ -3151,7 +3151,7 @@
           </a:p>
           <a:p>
             <a:r>
-              <a:t>Ask afterwards: how much C# did you change? One string. And for a beetle next to the mouse? A lot: Game1 handles the mouse by name (its collisions, its bounces). That is the next architecture problem, not a data one.</a:t>
+              <a:t>Ask afterwards: how much C# did you change? One string. And for a beetle next to the mouse? A lot: Game1 handles the mouse by name (its collisions, its bounces). Data can’t fix that; it’s the next architecture problem.</a:t>
             </a:r>
           </a:p>
         </p:txBody>
@@ -3586,7 +3586,7 @@
           </a:p>
           <a:p>
             <a:r>
-              <a:t>Ask about the misspelling. Answer: the game stops at start-up (the atlas looks names up in a dictionary). A mistake in data shows up when the game runs, not when it compiles.</a:t>
+              <a:t>Ask about the misspelling. Answer: the game stops at start-up (the atlas looks names up in a dictionary). A mistake in data only shows up when the game runs.</a:t>
             </a:r>
           </a:p>
         </p:txBody>
@@ -17304,7 +17304,7 @@
                   <a:schemeClr val="accent5"/>
                 </a:solidFill>
               </a:rPr>
-              <a:t>Exercise: Data, Not Code</a:t>
+              <a:t>Exercise: A Beetle From Data</a:t>
             </a:r>
             <a:endParaRPr>
               <a:solidFill>

--- a/slides/03 Snake.pptx
+++ b/slides/03 Snake.pptx
@@ -7786,7 +7786,7 @@
           <p:nvPr/>
         </p:nvPicPr>
         <p:blipFill>
-          <a:blip r:embed="rId3"/>
+          <a:blip r:embed="rId4"/>
           <a:stretch>
             <a:fillRect/>
           </a:stretch>
@@ -8403,7 +8403,7 @@
           <p:nvPr/>
         </p:nvPicPr>
         <p:blipFill>
-          <a:blip r:embed="rId3"/>
+          <a:blip r:embed="rId4"/>
           <a:stretch>
             <a:fillRect/>
           </a:stretch>
@@ -9302,7 +9302,7 @@
           <p:nvPr/>
         </p:nvPicPr>
         <p:blipFill>
-          <a:blip r:embed="rId3"/>
+          <a:blip r:embed="rId4"/>
           <a:stretch>
             <a:fillRect/>
           </a:stretch>
@@ -14114,7 +14114,7 @@
           <p:nvPr/>
         </p:nvPicPr>
         <p:blipFill>
-          <a:blip r:embed="rId4"/>
+          <a:blip r:embed="rId3"/>
           <a:stretch>
             <a:fillRect/>
           </a:stretch>
@@ -21933,7 +21933,7 @@
           <p:nvPr/>
         </p:nvPicPr>
         <p:blipFill>
-          <a:blip r:embed="rId3"/>
+          <a:blip r:embed="rId6"/>
           <a:stretch>
             <a:fillRect/>
           </a:stretch>
@@ -21950,14 +21950,14 @@
       </p:pic>
       <p:pic>
         <p:nvPicPr>
-          <p:cNvPr id="65" name="Picture 73" descr="image.png"/>
+          <p:cNvPr id="65" name="Picture 73" descr="snake1.png"/>
           <p:cNvPicPr>
             <a:picLocks noChangeAspect="1"/>
           </p:cNvPicPr>
           <p:nvPr/>
         </p:nvPicPr>
         <p:blipFill>
-          <a:blip r:embed="rId4"/>
+          <a:blip r:embed="rId8"/>
           <a:stretch>
             <a:fillRect/>
           </a:stretch>
@@ -21974,14 +21974,14 @@
       </p:pic>
       <p:pic>
         <p:nvPicPr>
-          <p:cNvPr id="66" name="Picture 73" descr="image.png"/>
+          <p:cNvPr id="66" name="Picture 73" descr="snake2.png"/>
           <p:cNvPicPr>
             <a:picLocks noChangeAspect="1"/>
           </p:cNvPicPr>
           <p:nvPr/>
         </p:nvPicPr>
         <p:blipFill>
-          <a:blip r:embed="rId5"/>
+          <a:blip r:embed="rId7"/>
           <a:stretch>
             <a:fillRect/>
           </a:stretch>
@@ -22005,7 +22005,7 @@
           <p:nvPr/>
         </p:nvPicPr>
         <p:blipFill>
-          <a:blip r:embed="rId10"/>
+          <a:blip r:embed="rId11"/>
           <a:stretch>
             <a:fillRect/>
           </a:stretch>
@@ -22022,7 +22022,7 @@
       </p:pic>
       <p:pic>
         <p:nvPicPr>
-          <p:cNvPr id="68" name="Picture 73" descr="grass.png"/>
+          <p:cNvPr id="68" name="Picture 73" descr="image.png"/>
           <p:cNvPicPr>
             <a:picLocks noChangeAspect="1"/>
           </p:cNvPicPr>
@@ -22810,7 +22810,7 @@
           <p:nvPr/>
         </p:nvPicPr>
         <p:blipFill>
-          <a:blip r:embed="rId3"/>
+          <a:blip r:embed="rId4"/>
           <a:stretch>
             <a:fillRect/>
           </a:stretch>

--- a/slides/03 Snake.pptx
+++ b/slides/03 Snake.pptx
@@ -1103,7 +1103,7 @@
           <a:lstStyle/>
           <a:p>
             <a:r>
-              <a:t>An animation: a list of regions and a delay. The bottom mouse cycles through the three above.</a:t>
+              <a:t>An animation: a list of regions and a delay. The bottom apple cycles through the three above.</a:t>
             </a:r>
           </a:p>
         </p:txBody>
@@ -1975,7 +1975,7 @@
           </a:p>
           <a:p>
             <a:r>
-              <a:t>Answer: none of them need C#. A faster mouse is a delay, an extra frame is a Frame line, a new room is the tilemap file.</a:t>
+              <a:t>Answer: none of them need C#. A faster animation is a delay, an extra frame is a Frame line, a new room is the tilemap file.</a:t>
             </a:r>
           </a:p>
         </p:txBody>
@@ -2770,7 +2770,7 @@
           </a:p>
           <a:p>
             <a:r>
-              <a:t>- eating the mouse grows the snake</a:t>
+              <a:t>- eating the apple grows the snake</a:t>
             </a:r>
           </a:p>
           <a:p>
@@ -3151,7 +3151,7 @@
           </a:p>
           <a:p>
             <a:r>
-              <a:t>Ask afterwards: how much C# did you change? One string. And for a beetle next to the mouse? A lot: Game1 handles the mouse by name (its collisions, its bounces). Data can’t fix that; it’s the next architecture problem.</a:t>
+              <a:t>Ask afterwards: how much C# did you change? One string. And for a beetle next to the apple? A lot: Game1 handles the apple by name (its field, its respawn, its collision). Data can’t fix that; it’s the next architecture problem.</a:t>
             </a:r>
           </a:p>
         </p:txBody>
@@ -3523,7 +3523,7 @@
           </a:p>
           <a:p>
             <a:r>
-              <a:t>Answer: without CenterOrigin the mouse spins around its top-left corner, because the origin is where rotation and scale start from.</a:t>
+              <a:t>Answer: without CenterOrigin the apple spins around its top-left corner, because the origin is where rotation and scale start from.</a:t>
             </a:r>
           </a:p>
         </p:txBody>
@@ -3581,7 +3581,7 @@
           <a:lstStyle/>
           <a:p>
             <a:r>
-              <a:t>Pairs, about 5 minutes, in Snake1. Moving the mouse-1 rectangle is enough; no C#.</a:t>
+              <a:t>Pairs, about 5 minutes, in Snake1. Moving the apple-1 rectangle is enough; no C#.</a:t>
             </a:r>
           </a:p>
           <a:p>
@@ -8120,7 +8120,7 @@
             </a:pPr>
             <a:r>
               <a:rPr lang="en"/>
-              <a:t>Draw the mouse with its second frame (x 20, y 20)</a:t>
+              <a:t>Draw the apple with its second frame (x 20, y 20)</a:t>
             </a:r>
             <a:endParaRPr/>
           </a:p>
@@ -8137,7 +8137,7 @@
             </a:pPr>
             <a:r>
               <a:rPr lang="en"/>
-              <a:t>Then misspell mouse-1 in the XML. What happens, and when?</a:t>
+              <a:t>Then misspell apple-1 in the XML. What happens, and when?</a:t>
             </a:r>
             <a:endParaRPr/>
           </a:p>
@@ -9112,7 +9112,7 @@
             </a:pPr>
             <a:r>
               <a:rPr lang="en"/>
-              <a:t>Make the mouse bigger, and spin it the other way</a:t>
+              <a:t>Make the apple bigger, and spin it the other way</a:t>
             </a:r>
             <a:endParaRPr/>
           </a:p>
@@ -9625,7 +9625,7 @@
             </a:pPr>
             <a:r>
               <a:rPr lang="en"/>
-              <a:t>Make the mouse’s tail wiggle twice as fast, and the snake breathe slower</a:t>
+              <a:t>Make the apple’s leaf sway twice as fast, and the snake breathe slower</a:t>
             </a:r>
             <a:endParaRPr/>
           </a:p>
@@ -9642,7 +9642,7 @@
             </a:pPr>
             <a:r>
               <a:rPr lang="en"/>
-              <a:t>Give the mouse’s animation one more frame</a:t>
+              <a:t>Give the apple’s animation one more frame</a:t>
             </a:r>
             <a:endParaRPr/>
           </a:p>
@@ -17400,7 +17400,7 @@
             </a:pPr>
             <a:r>
               <a:rPr lang="en"/>
-              <a:t>How much C# did you change? And for a beetle next to the mouse?</a:t>
+              <a:t>How much C# did you change? And for a beetle next to the apple?</a:t>
             </a:r>
             <a:endParaRPr/>
           </a:p>
@@ -21646,7 +21646,7 @@
                 </a:solidFill>
                 <a:latin typeface="Consolas"/>
               </a:rPr>
-              <a:t>&lt;Region name="mouse-1" x="20" y="0" width="20" height="20" /&gt;</a:t>
+              <a:t>&lt;Region name="apple-1" x="20" y="0" width="20" height="20" /&gt;</a:t>
             </a:r>
           </a:p>
           <a:p>
@@ -21658,7 +21658,7 @@
                 </a:solidFill>
                 <a:latin typeface="Consolas"/>
               </a:rPr>
-              <a:t>&lt;Region name="mouse-2" x="20" y="20" width="20" height="20" /&gt;</a:t>
+              <a:t>&lt;Region name="apple-2" x="20" y="20" width="20" height="20" /&gt;</a:t>
             </a:r>
           </a:p>
           <a:p>
@@ -21670,7 +21670,7 @@
                 </a:solidFill>
                 <a:latin typeface="Consolas"/>
               </a:rPr>
-              <a:t>&lt;Region name="mouse-3" x="40" y="0" width="20" height="20" /&gt;</a:t>
+              <a:t>&lt;Region name="apple-3" x="40" y="0" width="20" height="20" /&gt;</a:t>
             </a:r>
           </a:p>
           <a:p>
@@ -21694,7 +21694,7 @@
                 </a:solidFill>
                 <a:latin typeface="Consolas"/>
               </a:rPr>
-              <a:t>&lt;Animation name="mouse-animation" delay="200"&gt;</a:t>
+              <a:t>&lt;Animation name="apple-animation" delay="200"&gt;</a:t>
             </a:r>
           </a:p>
           <a:p>
@@ -21706,7 +21706,7 @@
                 </a:solidFill>
                 <a:latin typeface="Consolas"/>
               </a:rPr>
-              <a:t>    &lt;Frame region="mouse-1" /&gt;</a:t>
+              <a:t>    &lt;Frame region="apple-1" /&gt;</a:t>
             </a:r>
           </a:p>
           <a:p>
@@ -21718,7 +21718,7 @@
                 </a:solidFill>
                 <a:latin typeface="Consolas"/>
               </a:rPr>
-              <a:t>    &lt;Frame region="mouse-2" /&gt;</a:t>
+              <a:t>    &lt;Frame region="apple-2" /&gt;</a:t>
             </a:r>
           </a:p>
           <a:p>
@@ -21730,7 +21730,7 @@
                 </a:solidFill>
                 <a:latin typeface="Consolas"/>
               </a:rPr>
-              <a:t>    &lt;Frame region="mouse-1" /&gt;</a:t>
+              <a:t>    &lt;Frame region="apple-1" /&gt;</a:t>
             </a:r>
           </a:p>
           <a:p>
@@ -21742,7 +21742,7 @@
                 </a:solidFill>
                 <a:latin typeface="Consolas"/>
               </a:rPr>
-              <a:t>    &lt;Frame region="mouse-3" /&gt;</a:t>
+              <a:t>    &lt;Frame region="apple-3" /&gt;</a:t>
             </a:r>
           </a:p>
           <a:p>
@@ -21788,7 +21788,7 @@
                   <a:srgbClr val="DEE2E6"/>
                 </a:solidFill>
               </a:rPr>
-              <a:t>A faster mouse?</a:t>
+              <a:t>A faster animation?</a:t>
             </a:r>
           </a:p>
           <a:p>
@@ -22204,7 +22204,7 @@
                 <a:cs typeface="VT323"/>
                 <a:sym typeface="VT323"/>
               </a:rPr>
-              <a:t>mouse1.png</a:t>
+              <a:t>apple1.png</a:t>
             </a:r>
             <a:endParaRPr sz="900">
               <a:solidFill>

--- a/slides/03 Snake.pptx
+++ b/slides/03 Snake.pptx
@@ -1103,7 +1103,7 @@
           <a:lstStyle/>
           <a:p>
             <a:r>
-              <a:t>An animation: a list of regions and a delay. The bottom apple cycles through the three above.</a:t>
+              <a:t>An animation: a list of regions and a delay. The head at the bottom plays the frames above: five with its eyes open, one with them closed, so it blinks.</a:t>
             </a:r>
           </a:p>
         </p:txBody>
@@ -2770,7 +2770,7 @@
           </a:p>
           <a:p>
             <a:r>
-              <a:t>- eating the apple grows the snake</a:t>
+              <a:t>- eating the food grows the snake and adds a point</a:t>
             </a:r>
           </a:p>
           <a:p>
@@ -2953,7 +2953,7 @@
           <a:lstStyle/>
           <a:p>
             <a:r>
-              <a:t>The numbers in the middle are the room. Find tile 6 (the torch) and tile 9 (the floor) together.</a:t>
+              <a:t>The numbers in the middle are the room. Find tile 4 (the floor) and the four corners together.</a:t>
             </a:r>
           </a:p>
         </p:txBody>
@@ -3146,12 +3146,12 @@
           <a:lstStyle/>
           <a:p>
             <a:r>
-              <a:t>Exercise: the beetle is drawn in the atlas but not described. Two regions and an animation in the XML, then one line of C# (the animation name).</a:t>
-            </a:r>
-          </a:p>
-          <a:p>
-            <a:r>
-              <a:t>Ask afterwards: how much C# did you change? One string. And for a beetle next to the apple? A lot: Game1 handles the apple by name (its field, its respawn, its collision). Data can’t fix that; it’s the next architecture problem.</a:t>
+              <a:t>Exercise: the bug is drawn in the atlas but not described. Two regions and an animation in the XML, then one line of C# (the animation name).</a:t>
+            </a:r>
+          </a:p>
+          <a:p>
+            <a:r>
+              <a:t>Ask afterwards: how much C# did you change? One string. And for a bug next to the food? A lot: Game1 handles the food by name (its field, its respawn, its collision). Data can’t fix that; it’s the next architecture problem.</a:t>
             </a:r>
           </a:p>
         </p:txBody>
@@ -3308,7 +3308,7 @@
           </a:p>
           <a:p>
             <a:r>
-              <a:t>Answer for the 20: the tileset has 16 tiles (0 to 15), so the game fails when it draws the room. Same lesson as the misspelled region: data errors appear at runtime.</a:t>
+              <a:t>The new wall doesn’t stop the snake: the tilemap is only a picture, and the room’s Rectangle decides. Answer for the 9: the tileset has 9 tiles (0 to 8), so the game fails when it draws the room. Same lesson as the misspelled region: data errors appear at runtime.</a:t>
             </a:r>
           </a:p>
         </p:txBody>
@@ -3523,7 +3523,7 @@
           </a:p>
           <a:p>
             <a:r>
-              <a:t>Answer: without CenterOrigin the apple spins around its top-left corner, because the origin is where rotation and scale start from.</a:t>
+              <a:t>Answer: without CenterOrigin the head spins around its top-left corner, because the origin is where rotation and scale start from.</a:t>
             </a:r>
           </a:p>
         </p:txBody>
@@ -3581,7 +3581,7 @@
           <a:lstStyle/>
           <a:p>
             <a:r>
-              <a:t>Pairs, about 5 minutes, in Snake1. Moving the apple-1 rectangle is enough; no C#.</a:t>
+              <a:t>Pairs, about 5 minutes, in Snake1. Moving the food-1 rectangle is enough; no C#.</a:t>
             </a:r>
           </a:p>
           <a:p>
@@ -7779,22 +7779,22 @@
       </p:sp>
       <p:pic>
         <p:nvPicPr>
-          <p:cNvPr id="85" name="Picture 87" descr="atlas_region.png"/>
+          <p:cNvPr id="85" name="Picture 87" descr="atlas.png"/>
           <p:cNvPicPr>
             <a:picLocks noChangeAspect="1"/>
           </p:cNvPicPr>
           <p:nvPr/>
         </p:nvPicPr>
         <p:blipFill>
-          <a:blip r:embed="rId4"/>
+          <a:blip r:embed="rId3"/>
           <a:stretch>
             <a:fillRect/>
           </a:stretch>
         </p:blipFill>
         <p:spPr>
           <a:xfrm>
-            <a:off x="3897617" y="1560179"/>
-            <a:ext cx="1348766" cy="2023149"/>
+            <a:off x="2743200" y="1325880"/>
+            <a:ext cx="3657600" cy="2286000"/>
           </a:xfrm>
           <a:prstGeom prst="rect">
             <a:avLst/>
@@ -7809,8 +7809,8 @@
         </p:nvSpPr>
         <p:spPr>
           <a:xfrm>
-            <a:off x="3872328" y="1534890"/>
-            <a:ext cx="387769" cy="387769"/>
+            <a:off x="3172968" y="1298448"/>
+            <a:ext cx="454914" cy="454914"/>
           </a:xfrm>
           <a:prstGeom prst="rect">
             <a:avLst/>
@@ -7864,7 +7864,7 @@
         </p:nvCxnSpPr>
         <p:spPr>
           <a:xfrm>
-            <a:off x="3571128" y="1084290"/>
+            <a:off x="2737668" y="847848"/>
             <a:ext cx="435300" cy="450600"/>
           </a:xfrm>
           <a:prstGeom prst="straightConnector1">
@@ -8120,7 +8120,7 @@
             </a:pPr>
             <a:r>
               <a:rPr lang="en"/>
-              <a:t>Draw the apple with its second frame (x 20, y 20)</a:t>
+              <a:t>Draw the food with its second frame (x 32, y 0)</a:t>
             </a:r>
             <a:endParaRPr/>
           </a:p>
@@ -8137,7 +8137,7 @@
             </a:pPr>
             <a:r>
               <a:rPr lang="en"/>
-              <a:t>Then misspell apple-1 in the XML. What happens, and when?</a:t>
+              <a:t>Then misspell food-1 in the XML. What happens, and when?</a:t>
             </a:r>
             <a:endParaRPr/>
           </a:p>
@@ -8403,7 +8403,7 @@
           <p:nvPr/>
         </p:nvPicPr>
         <p:blipFill>
-          <a:blip r:embed="rId4"/>
+          <a:blip r:embed="rId3"/>
           <a:stretch>
             <a:fillRect/>
           </a:stretch>
@@ -9112,7 +9112,7 @@
             </a:pPr>
             <a:r>
               <a:rPr lang="en"/>
-              <a:t>Make the apple bigger, and spin it the other way</a:t>
+              <a:t>Make the head bigger, and spin it the other way</a:t>
             </a:r>
             <a:endParaRPr/>
           </a:p>
@@ -9295,14 +9295,14 @@
       </p:sp>
       <p:pic>
         <p:nvPicPr>
-          <p:cNvPr id="123" name="Picture 123" descr="animation.gif"/>
+          <p:cNvPr id="123" name="Picture 123" descr="animation.png"/>
           <p:cNvPicPr>
             <a:picLocks noChangeAspect="1"/>
           </p:cNvPicPr>
           <p:nvPr/>
         </p:nvPicPr>
         <p:blipFill>
-          <a:blip r:embed="rId4"/>
+          <a:blip r:embed="rId3"/>
           <a:stretch>
             <a:fillRect/>
           </a:stretch>
@@ -9625,7 +9625,7 @@
             </a:pPr>
             <a:r>
               <a:rPr lang="en"/>
-              <a:t>Make the apple’s leaf sway twice as fast, and the snake breathe slower</a:t>
+              <a:t>Make the food pulse twice as fast, and the head blink less often</a:t>
             </a:r>
             <a:endParaRPr/>
           </a:p>
@@ -9642,7 +9642,7 @@
             </a:pPr>
             <a:r>
               <a:rPr lang="en"/>
-              <a:t>Give the apple’s animation one more frame</a:t>
+              <a:t>Give the food’s animation one more frame</a:t>
             </a:r>
             <a:endParaRPr/>
           </a:p>
@@ -9835,7 +9835,7 @@
           <p:nvPr/>
         </p:nvPicPr>
         <p:blipFill>
-          <a:blip r:embed="rId3"/>
+          <a:blip r:embed="rId5"/>
           <a:stretch>
             <a:fillRect/>
           </a:stretch>
@@ -9852,14 +9852,14 @@
       </p:pic>
       <p:pic>
         <p:nvPicPr>
-          <p:cNvPr id="267" name="Picture 267" descr="tileset_numbers.png"/>
+          <p:cNvPr id="267" name="Picture 267" descr="tileset_numbered.png"/>
           <p:cNvPicPr>
             <a:picLocks noChangeAspect="1"/>
           </p:cNvPicPr>
           <p:nvPr/>
         </p:nvPicPr>
         <p:blipFill>
-          <a:blip r:embed="rId6"/>
+          <a:blip r:embed="rId4"/>
           <a:stretch>
             <a:fillRect/>
           </a:stretch>
@@ -10061,14 +10061,14 @@
       </p:sp>
       <p:pic>
         <p:nvPicPr>
-          <p:cNvPr id="273" name="Picture 275" descr="tileset_numbers.png"/>
+          <p:cNvPr id="273" name="Picture 275" descr="tileset_numbered.png"/>
           <p:cNvPicPr>
             <a:picLocks noChangeAspect="1"/>
           </p:cNvPicPr>
           <p:nvPr/>
         </p:nvPicPr>
         <p:blipFill>
-          <a:blip r:embed="rId3"/>
+          <a:blip r:embed="rId5"/>
           <a:stretch>
             <a:fillRect/>
           </a:stretch>
@@ -10134,23 +10134,34 @@
                 <a:cs typeface="Consolas"/>
                 <a:sym typeface="Consolas"/>
               </a:rPr>
-              <a:t>00</a:t>
-            </a:r>
-            <a:r>
-              <a:rPr lang="en" sz="1000">
-                <a:solidFill>
-                  <a:srgbClr val="CCCCCC"/>
-                </a:solidFill>
-                <a:highlight>
-                  <a:srgbClr val="1F1F1F"/>
-                </a:highlight>
-                <a:latin typeface="Consolas"/>
-                <a:ea typeface="Consolas"/>
-                <a:cs typeface="Consolas"/>
-                <a:sym typeface="Consolas"/>
-              </a:rPr>
-              <a:t> </a:t>
-            </a:r>
+              <a:t>00 01 01 01 02</a:t>
+            </a:r>
+            <a:endParaRPr sz="1000">
+              <a:solidFill>
+                <a:srgbClr val="B5CEA8"/>
+              </a:solidFill>
+              <a:highlight>
+                <a:srgbClr val="1F1F1F"/>
+              </a:highlight>
+              <a:latin typeface="Consolas"/>
+              <a:ea typeface="Consolas"/>
+              <a:cs typeface="Consolas"/>
+              <a:sym typeface="Consolas"/>
+            </a:endParaRPr>
+          </a:p>
+          <a:p>
+            <a:pPr indent="0" lvl="0" marL="0" rtl="0" algn="l">
+              <a:lnSpc>
+                <a:spcPct val="157500"/>
+              </a:lnSpc>
+              <a:spcBef>
+                <a:spcPts val="0"/>
+              </a:spcBef>
+              <a:spcAft>
+                <a:spcPts val="0"/>
+              </a:spcAft>
+              <a:buNone/>
+            </a:pPr>
             <a:r>
               <a:rPr lang="en" sz="1000">
                 <a:solidFill>
@@ -10164,23 +10175,34 @@
                 <a:cs typeface="Consolas"/>
                 <a:sym typeface="Consolas"/>
               </a:rPr>
-              <a:t>01</a:t>
-            </a:r>
-            <a:r>
-              <a:rPr lang="en" sz="1000">
-                <a:solidFill>
-                  <a:srgbClr val="CCCCCC"/>
-                </a:solidFill>
-                <a:highlight>
-                  <a:srgbClr val="1F1F1F"/>
-                </a:highlight>
-                <a:latin typeface="Consolas"/>
-                <a:ea typeface="Consolas"/>
-                <a:cs typeface="Consolas"/>
-                <a:sym typeface="Consolas"/>
-              </a:rPr>
-              <a:t> </a:t>
-            </a:r>
+              <a:t>03 04 04 04 05</a:t>
+            </a:r>
+            <a:endParaRPr sz="1000">
+              <a:solidFill>
+                <a:srgbClr val="B5CEA8"/>
+              </a:solidFill>
+              <a:highlight>
+                <a:srgbClr val="1F1F1F"/>
+              </a:highlight>
+              <a:latin typeface="Consolas"/>
+              <a:ea typeface="Consolas"/>
+              <a:cs typeface="Consolas"/>
+              <a:sym typeface="Consolas"/>
+            </a:endParaRPr>
+          </a:p>
+          <a:p>
+            <a:pPr indent="0" lvl="0" marL="0" rtl="0" algn="l">
+              <a:lnSpc>
+                <a:spcPct val="157500"/>
+              </a:lnSpc>
+              <a:spcBef>
+                <a:spcPts val="0"/>
+              </a:spcBef>
+              <a:spcAft>
+                <a:spcPts val="0"/>
+              </a:spcAft>
+              <a:buNone/>
+            </a:pPr>
             <a:r>
               <a:rPr lang="en" sz="1000">
                 <a:solidFill>
@@ -10194,23 +10216,34 @@
                 <a:cs typeface="Consolas"/>
                 <a:sym typeface="Consolas"/>
               </a:rPr>
-              <a:t>02</a:t>
-            </a:r>
-            <a:r>
-              <a:rPr lang="en" sz="1000">
-                <a:solidFill>
-                  <a:srgbClr val="CCCCCC"/>
-                </a:solidFill>
-                <a:highlight>
-                  <a:srgbClr val="1F1F1F"/>
-                </a:highlight>
-                <a:latin typeface="Consolas"/>
-                <a:ea typeface="Consolas"/>
-                <a:cs typeface="Consolas"/>
-                <a:sym typeface="Consolas"/>
-              </a:rPr>
-              <a:t> </a:t>
-            </a:r>
+              <a:t>03 04 04 04 05</a:t>
+            </a:r>
+            <a:endParaRPr sz="1000">
+              <a:solidFill>
+                <a:srgbClr val="B5CEA8"/>
+              </a:solidFill>
+              <a:highlight>
+                <a:srgbClr val="1F1F1F"/>
+              </a:highlight>
+              <a:latin typeface="Consolas"/>
+              <a:ea typeface="Consolas"/>
+              <a:cs typeface="Consolas"/>
+              <a:sym typeface="Consolas"/>
+            </a:endParaRPr>
+          </a:p>
+          <a:p>
+            <a:pPr indent="0" lvl="0" marL="0" rtl="0" algn="l">
+              <a:lnSpc>
+                <a:spcPct val="157500"/>
+              </a:lnSpc>
+              <a:spcBef>
+                <a:spcPts val="0"/>
+              </a:spcBef>
+              <a:spcAft>
+                <a:spcPts val="0"/>
+              </a:spcAft>
+              <a:buNone/>
+            </a:pPr>
             <a:r>
               <a:rPr lang="en" sz="1000">
                 <a:solidFill>
@@ -10224,37 +10257,7 @@
                 <a:cs typeface="Consolas"/>
                 <a:sym typeface="Consolas"/>
               </a:rPr>
-              <a:t>01</a:t>
-            </a:r>
-            <a:r>
-              <a:rPr lang="en" sz="1000">
-                <a:solidFill>
-                  <a:srgbClr val="CCCCCC"/>
-                </a:solidFill>
-                <a:highlight>
-                  <a:srgbClr val="1F1F1F"/>
-                </a:highlight>
-                <a:latin typeface="Consolas"/>
-                <a:ea typeface="Consolas"/>
-                <a:cs typeface="Consolas"/>
-                <a:sym typeface="Consolas"/>
-              </a:rPr>
-              <a:t> </a:t>
-            </a:r>
-            <a:r>
-              <a:rPr lang="en" sz="1000">
-                <a:solidFill>
-                  <a:srgbClr val="B5CEA8"/>
-                </a:solidFill>
-                <a:highlight>
-                  <a:srgbClr val="1F1F1F"/>
-                </a:highlight>
-                <a:latin typeface="Consolas"/>
-                <a:ea typeface="Consolas"/>
-                <a:cs typeface="Consolas"/>
-                <a:sym typeface="Consolas"/>
-              </a:rPr>
-              <a:t>03</a:t>
+              <a:t>06 07 07 07 08</a:t>
             </a:r>
             <a:endParaRPr sz="1000">
               <a:solidFill>
@@ -10269,659 +10272,26 @@
               <a:sym typeface="Consolas"/>
             </a:endParaRPr>
           </a:p>
-          <a:p>
-            <a:pPr indent="0" lvl="0" marL="0" rtl="0" algn="l">
-              <a:lnSpc>
-                <a:spcPct val="157500"/>
-              </a:lnSpc>
-              <a:spcBef>
-                <a:spcPts val="0"/>
-              </a:spcBef>
-              <a:spcAft>
-                <a:spcPts val="0"/>
-              </a:spcAft>
-              <a:buNone/>
-            </a:pPr>
-            <a:r>
-              <a:rPr lang="en" sz="1000">
-                <a:solidFill>
-                  <a:srgbClr val="B5CEA8"/>
-                </a:solidFill>
-                <a:highlight>
-                  <a:srgbClr val="1F1F1F"/>
-                </a:highlight>
-                <a:latin typeface="Consolas"/>
-                <a:ea typeface="Consolas"/>
-                <a:cs typeface="Consolas"/>
-                <a:sym typeface="Consolas"/>
-              </a:rPr>
-              <a:t>04</a:t>
-            </a:r>
-            <a:r>
-              <a:rPr lang="en" sz="1000">
-                <a:solidFill>
-                  <a:srgbClr val="CCCCCC"/>
-                </a:solidFill>
-                <a:highlight>
-                  <a:srgbClr val="1F1F1F"/>
-                </a:highlight>
-                <a:latin typeface="Consolas"/>
-                <a:ea typeface="Consolas"/>
-                <a:cs typeface="Consolas"/>
-                <a:sym typeface="Consolas"/>
-              </a:rPr>
-              <a:t> </a:t>
-            </a:r>
-            <a:r>
-              <a:rPr lang="en" sz="1000">
-                <a:solidFill>
-                  <a:srgbClr val="B5CEA8"/>
-                </a:solidFill>
-                <a:highlight>
-                  <a:srgbClr val="1F1F1F"/>
-                </a:highlight>
-                <a:latin typeface="Consolas"/>
-                <a:ea typeface="Consolas"/>
-                <a:cs typeface="Consolas"/>
-                <a:sym typeface="Consolas"/>
-              </a:rPr>
-              <a:t>05</a:t>
-            </a:r>
-            <a:r>
-              <a:rPr lang="en" sz="1000">
-                <a:solidFill>
-                  <a:srgbClr val="CCCCCC"/>
-                </a:solidFill>
-                <a:highlight>
-                  <a:srgbClr val="1F1F1F"/>
-                </a:highlight>
-                <a:latin typeface="Consolas"/>
-                <a:ea typeface="Consolas"/>
-                <a:cs typeface="Consolas"/>
-                <a:sym typeface="Consolas"/>
-              </a:rPr>
-              <a:t> </a:t>
-            </a:r>
-            <a:r>
-              <a:rPr lang="en" sz="1000">
-                <a:solidFill>
-                  <a:srgbClr val="B5CEA8"/>
-                </a:solidFill>
-                <a:highlight>
-                  <a:srgbClr val="1F1F1F"/>
-                </a:highlight>
-                <a:latin typeface="Consolas"/>
-                <a:ea typeface="Consolas"/>
-                <a:cs typeface="Consolas"/>
-                <a:sym typeface="Consolas"/>
-              </a:rPr>
-              <a:t>06</a:t>
-            </a:r>
-            <a:r>
-              <a:rPr lang="en" sz="1000">
-                <a:solidFill>
-                  <a:srgbClr val="CCCCCC"/>
-                </a:solidFill>
-                <a:highlight>
-                  <a:srgbClr val="1F1F1F"/>
-                </a:highlight>
-                <a:latin typeface="Consolas"/>
-                <a:ea typeface="Consolas"/>
-                <a:cs typeface="Consolas"/>
-                <a:sym typeface="Consolas"/>
-              </a:rPr>
-              <a:t> </a:t>
-            </a:r>
-            <a:r>
-              <a:rPr lang="en" sz="1000">
-                <a:solidFill>
-                  <a:srgbClr val="B5CEA8"/>
-                </a:solidFill>
-                <a:highlight>
-                  <a:srgbClr val="1F1F1F"/>
-                </a:highlight>
-                <a:latin typeface="Consolas"/>
-                <a:ea typeface="Consolas"/>
-                <a:cs typeface="Consolas"/>
-                <a:sym typeface="Consolas"/>
-              </a:rPr>
-              <a:t>05</a:t>
-            </a:r>
-            <a:r>
-              <a:rPr lang="en" sz="1000">
-                <a:solidFill>
-                  <a:srgbClr val="CCCCCC"/>
-                </a:solidFill>
-                <a:highlight>
-                  <a:srgbClr val="1F1F1F"/>
-                </a:highlight>
-                <a:latin typeface="Consolas"/>
-                <a:ea typeface="Consolas"/>
-                <a:cs typeface="Consolas"/>
-                <a:sym typeface="Consolas"/>
-              </a:rPr>
-              <a:t> </a:t>
-            </a:r>
-            <a:r>
-              <a:rPr lang="en" sz="1000">
-                <a:solidFill>
-                  <a:srgbClr val="B5CEA8"/>
-                </a:solidFill>
-                <a:highlight>
-                  <a:srgbClr val="1F1F1F"/>
-                </a:highlight>
-                <a:latin typeface="Consolas"/>
-                <a:ea typeface="Consolas"/>
-                <a:cs typeface="Consolas"/>
-                <a:sym typeface="Consolas"/>
-              </a:rPr>
-              <a:t>07</a:t>
-            </a:r>
-            <a:endParaRPr sz="1000">
-              <a:solidFill>
-                <a:srgbClr val="B5CEA8"/>
-              </a:solidFill>
-              <a:highlight>
-                <a:srgbClr val="1F1F1F"/>
-              </a:highlight>
-              <a:latin typeface="Consolas"/>
-              <a:ea typeface="Consolas"/>
-              <a:cs typeface="Consolas"/>
-              <a:sym typeface="Consolas"/>
-            </a:endParaRPr>
-          </a:p>
-          <a:p>
-            <a:pPr indent="0" lvl="0" marL="0" rtl="0" algn="l">
-              <a:lnSpc>
-                <a:spcPct val="157500"/>
-              </a:lnSpc>
-              <a:spcBef>
-                <a:spcPts val="0"/>
-              </a:spcBef>
-              <a:spcAft>
-                <a:spcPts val="0"/>
-              </a:spcAft>
-              <a:buNone/>
-            </a:pPr>
-            <a:r>
-              <a:rPr lang="en" sz="1000">
-                <a:solidFill>
-                  <a:srgbClr val="B5CEA8"/>
-                </a:solidFill>
-                <a:highlight>
-                  <a:srgbClr val="1F1F1F"/>
-                </a:highlight>
-                <a:latin typeface="Consolas"/>
-                <a:ea typeface="Consolas"/>
-                <a:cs typeface="Consolas"/>
-                <a:sym typeface="Consolas"/>
-              </a:rPr>
-              <a:t>08</a:t>
-            </a:r>
-            <a:r>
-              <a:rPr lang="en" sz="1000">
-                <a:solidFill>
-                  <a:srgbClr val="CCCCCC"/>
-                </a:solidFill>
-                <a:highlight>
-                  <a:srgbClr val="1F1F1F"/>
-                </a:highlight>
-                <a:latin typeface="Consolas"/>
-                <a:ea typeface="Consolas"/>
-                <a:cs typeface="Consolas"/>
-                <a:sym typeface="Consolas"/>
-              </a:rPr>
-              <a:t> </a:t>
-            </a:r>
-            <a:r>
-              <a:rPr lang="en" sz="1000">
-                <a:solidFill>
-                  <a:srgbClr val="B5CEA8"/>
-                </a:solidFill>
-                <a:highlight>
-                  <a:srgbClr val="1F1F1F"/>
-                </a:highlight>
-                <a:latin typeface="Consolas"/>
-                <a:ea typeface="Consolas"/>
-                <a:cs typeface="Consolas"/>
-                <a:sym typeface="Consolas"/>
-              </a:rPr>
-              <a:t>09</a:t>
-            </a:r>
-            <a:r>
-              <a:rPr lang="en" sz="1000">
-                <a:solidFill>
-                  <a:srgbClr val="CCCCCC"/>
-                </a:solidFill>
-                <a:highlight>
-                  <a:srgbClr val="1F1F1F"/>
-                </a:highlight>
-                <a:latin typeface="Consolas"/>
-                <a:ea typeface="Consolas"/>
-                <a:cs typeface="Consolas"/>
-                <a:sym typeface="Consolas"/>
-              </a:rPr>
-              <a:t> </a:t>
-            </a:r>
-            <a:r>
-              <a:rPr lang="en" sz="1000">
-                <a:solidFill>
-                  <a:srgbClr val="B5CEA8"/>
-                </a:solidFill>
-                <a:highlight>
-                  <a:srgbClr val="1F1F1F"/>
-                </a:highlight>
-                <a:latin typeface="Consolas"/>
-                <a:ea typeface="Consolas"/>
-                <a:cs typeface="Consolas"/>
-                <a:sym typeface="Consolas"/>
-              </a:rPr>
-              <a:t>10</a:t>
-            </a:r>
-            <a:r>
-              <a:rPr lang="en" sz="1000">
-                <a:solidFill>
-                  <a:srgbClr val="CCCCCC"/>
-                </a:solidFill>
-                <a:highlight>
-                  <a:srgbClr val="1F1F1F"/>
-                </a:highlight>
-                <a:latin typeface="Consolas"/>
-                <a:ea typeface="Consolas"/>
-                <a:cs typeface="Consolas"/>
-                <a:sym typeface="Consolas"/>
-              </a:rPr>
-              <a:t> </a:t>
-            </a:r>
-            <a:r>
-              <a:rPr lang="en" sz="1000">
-                <a:solidFill>
-                  <a:srgbClr val="B5CEA8"/>
-                </a:solidFill>
-                <a:highlight>
-                  <a:srgbClr val="1F1F1F"/>
-                </a:highlight>
-                <a:latin typeface="Consolas"/>
-                <a:ea typeface="Consolas"/>
-                <a:cs typeface="Consolas"/>
-                <a:sym typeface="Consolas"/>
-              </a:rPr>
-              <a:t>09</a:t>
-            </a:r>
-            <a:r>
-              <a:rPr lang="en" sz="1000">
-                <a:solidFill>
-                  <a:srgbClr val="CCCCCC"/>
-                </a:solidFill>
-                <a:highlight>
-                  <a:srgbClr val="1F1F1F"/>
-                </a:highlight>
-                <a:latin typeface="Consolas"/>
-                <a:ea typeface="Consolas"/>
-                <a:cs typeface="Consolas"/>
-                <a:sym typeface="Consolas"/>
-              </a:rPr>
-              <a:t> </a:t>
-            </a:r>
-            <a:r>
-              <a:rPr lang="en" sz="1000">
-                <a:solidFill>
-                  <a:srgbClr val="B5CEA8"/>
-                </a:solidFill>
-                <a:highlight>
-                  <a:srgbClr val="1F1F1F"/>
-                </a:highlight>
-                <a:latin typeface="Consolas"/>
-                <a:ea typeface="Consolas"/>
-                <a:cs typeface="Consolas"/>
-                <a:sym typeface="Consolas"/>
-              </a:rPr>
-              <a:t>11</a:t>
-            </a:r>
-            <a:endParaRPr sz="1000">
-              <a:solidFill>
-                <a:srgbClr val="B5CEA8"/>
-              </a:solidFill>
-              <a:highlight>
-                <a:srgbClr val="1F1F1F"/>
-              </a:highlight>
-              <a:latin typeface="Consolas"/>
-              <a:ea typeface="Consolas"/>
-              <a:cs typeface="Consolas"/>
-              <a:sym typeface="Consolas"/>
-            </a:endParaRPr>
-          </a:p>
-          <a:p>
-            <a:pPr indent="0" lvl="0" marL="0" rtl="0" algn="l">
-              <a:lnSpc>
-                <a:spcPct val="157500"/>
-              </a:lnSpc>
-              <a:spcBef>
-                <a:spcPts val="0"/>
-              </a:spcBef>
-              <a:spcAft>
-                <a:spcPts val="0"/>
-              </a:spcAft>
-              <a:buNone/>
-            </a:pPr>
-            <a:r>
-              <a:rPr lang="en" sz="1000">
-                <a:solidFill>
-                  <a:srgbClr val="B5CEA8"/>
-                </a:solidFill>
-                <a:highlight>
-                  <a:srgbClr val="1F1F1F"/>
-                </a:highlight>
-                <a:latin typeface="Consolas"/>
-                <a:ea typeface="Consolas"/>
-                <a:cs typeface="Consolas"/>
-                <a:sym typeface="Consolas"/>
-              </a:rPr>
-              <a:t>04</a:t>
-            </a:r>
-            <a:r>
-              <a:rPr lang="en" sz="1000">
-                <a:solidFill>
-                  <a:srgbClr val="CCCCCC"/>
-                </a:solidFill>
-                <a:highlight>
-                  <a:srgbClr val="1F1F1F"/>
-                </a:highlight>
-                <a:latin typeface="Consolas"/>
-                <a:ea typeface="Consolas"/>
-                <a:cs typeface="Consolas"/>
-                <a:sym typeface="Consolas"/>
-              </a:rPr>
-              <a:t> </a:t>
-            </a:r>
-            <a:r>
-              <a:rPr lang="en" sz="1000">
-                <a:solidFill>
-                  <a:srgbClr val="B5CEA8"/>
-                </a:solidFill>
-                <a:highlight>
-                  <a:srgbClr val="1F1F1F"/>
-                </a:highlight>
-                <a:latin typeface="Consolas"/>
-                <a:ea typeface="Consolas"/>
-                <a:cs typeface="Consolas"/>
-                <a:sym typeface="Consolas"/>
-              </a:rPr>
-              <a:t>09</a:t>
-            </a:r>
-            <a:r>
-              <a:rPr lang="en" sz="1000">
-                <a:solidFill>
-                  <a:srgbClr val="CCCCCC"/>
-                </a:solidFill>
-                <a:highlight>
-                  <a:srgbClr val="1F1F1F"/>
-                </a:highlight>
-                <a:latin typeface="Consolas"/>
-                <a:ea typeface="Consolas"/>
-                <a:cs typeface="Consolas"/>
-                <a:sym typeface="Consolas"/>
-              </a:rPr>
-              <a:t> </a:t>
-            </a:r>
-            <a:r>
-              <a:rPr lang="en" sz="1000">
-                <a:solidFill>
-                  <a:srgbClr val="B5CEA8"/>
-                </a:solidFill>
-                <a:highlight>
-                  <a:srgbClr val="1F1F1F"/>
-                </a:highlight>
-                <a:latin typeface="Consolas"/>
-                <a:ea typeface="Consolas"/>
-                <a:cs typeface="Consolas"/>
-                <a:sym typeface="Consolas"/>
-              </a:rPr>
-              <a:t>09</a:t>
-            </a:r>
-            <a:r>
-              <a:rPr lang="en" sz="1000">
-                <a:solidFill>
-                  <a:srgbClr val="CCCCCC"/>
-                </a:solidFill>
-                <a:highlight>
-                  <a:srgbClr val="1F1F1F"/>
-                </a:highlight>
-                <a:latin typeface="Consolas"/>
-                <a:ea typeface="Consolas"/>
-                <a:cs typeface="Consolas"/>
-                <a:sym typeface="Consolas"/>
-              </a:rPr>
-              <a:t> </a:t>
-            </a:r>
-            <a:r>
-              <a:rPr lang="en" sz="1000">
-                <a:solidFill>
-                  <a:srgbClr val="B5CEA8"/>
-                </a:solidFill>
-                <a:highlight>
-                  <a:srgbClr val="1F1F1F"/>
-                </a:highlight>
-                <a:latin typeface="Consolas"/>
-                <a:ea typeface="Consolas"/>
-                <a:cs typeface="Consolas"/>
-                <a:sym typeface="Consolas"/>
-              </a:rPr>
-              <a:t>09</a:t>
-            </a:r>
-            <a:r>
-              <a:rPr lang="en" sz="1000">
-                <a:solidFill>
-                  <a:srgbClr val="CCCCCC"/>
-                </a:solidFill>
-                <a:highlight>
-                  <a:srgbClr val="1F1F1F"/>
-                </a:highlight>
-                <a:latin typeface="Consolas"/>
-                <a:ea typeface="Consolas"/>
-                <a:cs typeface="Consolas"/>
-                <a:sym typeface="Consolas"/>
-              </a:rPr>
-              <a:t> </a:t>
-            </a:r>
-            <a:r>
-              <a:rPr lang="en" sz="1000">
-                <a:solidFill>
-                  <a:srgbClr val="B5CEA8"/>
-                </a:solidFill>
-                <a:highlight>
-                  <a:srgbClr val="1F1F1F"/>
-                </a:highlight>
-                <a:latin typeface="Consolas"/>
-                <a:ea typeface="Consolas"/>
-                <a:cs typeface="Consolas"/>
-                <a:sym typeface="Consolas"/>
-              </a:rPr>
-              <a:t>07</a:t>
-            </a:r>
-            <a:endParaRPr sz="1000">
-              <a:solidFill>
-                <a:srgbClr val="B5CEA8"/>
-              </a:solidFill>
-              <a:highlight>
-                <a:srgbClr val="1F1F1F"/>
-              </a:highlight>
-              <a:latin typeface="Consolas"/>
-              <a:ea typeface="Consolas"/>
-              <a:cs typeface="Consolas"/>
-              <a:sym typeface="Consolas"/>
-            </a:endParaRPr>
-          </a:p>
-          <a:p>
-            <a:pPr indent="0" lvl="0" marL="0" rtl="0" algn="l">
-              <a:lnSpc>
-                <a:spcPct val="157500"/>
-              </a:lnSpc>
-              <a:spcBef>
-                <a:spcPts val="0"/>
-              </a:spcBef>
-              <a:spcAft>
-                <a:spcPts val="0"/>
-              </a:spcAft>
-              <a:buNone/>
-            </a:pPr>
-            <a:r>
-              <a:rPr lang="en" sz="1000">
-                <a:solidFill>
-                  <a:srgbClr val="B5CEA8"/>
-                </a:solidFill>
-                <a:highlight>
-                  <a:srgbClr val="1F1F1F"/>
-                </a:highlight>
-                <a:latin typeface="Consolas"/>
-                <a:ea typeface="Consolas"/>
-                <a:cs typeface="Consolas"/>
-                <a:sym typeface="Consolas"/>
-              </a:rPr>
-              <a:t>12</a:t>
-            </a:r>
-            <a:r>
-              <a:rPr lang="en" sz="1000">
-                <a:solidFill>
-                  <a:srgbClr val="CCCCCC"/>
-                </a:solidFill>
-                <a:highlight>
-                  <a:srgbClr val="1F1F1F"/>
-                </a:highlight>
-                <a:latin typeface="Consolas"/>
-                <a:ea typeface="Consolas"/>
-                <a:cs typeface="Consolas"/>
-                <a:sym typeface="Consolas"/>
-              </a:rPr>
-              <a:t> </a:t>
-            </a:r>
-            <a:r>
-              <a:rPr lang="en" sz="1000">
-                <a:solidFill>
-                  <a:srgbClr val="B5CEA8"/>
-                </a:solidFill>
-                <a:highlight>
-                  <a:srgbClr val="1F1F1F"/>
-                </a:highlight>
-                <a:latin typeface="Consolas"/>
-                <a:ea typeface="Consolas"/>
-                <a:cs typeface="Consolas"/>
-                <a:sym typeface="Consolas"/>
-              </a:rPr>
-              <a:t>13</a:t>
-            </a:r>
-            <a:r>
-              <a:rPr lang="en" sz="1000">
-                <a:solidFill>
-                  <a:srgbClr val="CCCCCC"/>
-                </a:solidFill>
-                <a:highlight>
-                  <a:srgbClr val="1F1F1F"/>
-                </a:highlight>
-                <a:latin typeface="Consolas"/>
-                <a:ea typeface="Consolas"/>
-                <a:cs typeface="Consolas"/>
-                <a:sym typeface="Consolas"/>
-              </a:rPr>
-              <a:t> </a:t>
-            </a:r>
-            <a:r>
-              <a:rPr lang="en" sz="1000">
-                <a:solidFill>
-                  <a:srgbClr val="B5CEA8"/>
-                </a:solidFill>
-                <a:highlight>
-                  <a:srgbClr val="1F1F1F"/>
-                </a:highlight>
-                <a:latin typeface="Consolas"/>
-                <a:ea typeface="Consolas"/>
-                <a:cs typeface="Consolas"/>
-                <a:sym typeface="Consolas"/>
-              </a:rPr>
-              <a:t>14</a:t>
-            </a:r>
-            <a:r>
-              <a:rPr lang="en" sz="1000">
-                <a:solidFill>
-                  <a:srgbClr val="CCCCCC"/>
-                </a:solidFill>
-                <a:highlight>
-                  <a:srgbClr val="1F1F1F"/>
-                </a:highlight>
-                <a:latin typeface="Consolas"/>
-                <a:ea typeface="Consolas"/>
-                <a:cs typeface="Consolas"/>
-                <a:sym typeface="Consolas"/>
-              </a:rPr>
-              <a:t> </a:t>
-            </a:r>
-            <a:r>
-              <a:rPr lang="en" sz="1000">
-                <a:solidFill>
-                  <a:srgbClr val="B5CEA8"/>
-                </a:solidFill>
-                <a:highlight>
-                  <a:srgbClr val="1F1F1F"/>
-                </a:highlight>
-                <a:latin typeface="Consolas"/>
-                <a:ea typeface="Consolas"/>
-                <a:cs typeface="Consolas"/>
-                <a:sym typeface="Consolas"/>
-              </a:rPr>
-              <a:t>13</a:t>
-            </a:r>
-            <a:r>
-              <a:rPr lang="en" sz="1000">
-                <a:solidFill>
-                  <a:srgbClr val="CCCCCC"/>
-                </a:solidFill>
-                <a:highlight>
-                  <a:srgbClr val="1F1F1F"/>
-                </a:highlight>
-                <a:latin typeface="Consolas"/>
-                <a:ea typeface="Consolas"/>
-                <a:cs typeface="Consolas"/>
-                <a:sym typeface="Consolas"/>
-              </a:rPr>
-              <a:t> </a:t>
-            </a:r>
-            <a:r>
-              <a:rPr lang="en" sz="1000">
-                <a:solidFill>
-                  <a:srgbClr val="B5CEA8"/>
-                </a:solidFill>
-                <a:highlight>
-                  <a:srgbClr val="1F1F1F"/>
-                </a:highlight>
-                <a:latin typeface="Consolas"/>
-                <a:ea typeface="Consolas"/>
-                <a:cs typeface="Consolas"/>
-                <a:sym typeface="Consolas"/>
-              </a:rPr>
-              <a:t>15</a:t>
-            </a:r>
-            <a:endParaRPr/>
-          </a:p>
         </p:txBody>
       </p:sp>
       <p:pic>
         <p:nvPicPr>
-          <p:cNvPr id="275" name="Picture 275" descr="room_tiles.png"/>
+          <p:cNvPr id="275" name="Picture 275" descr="room.png"/>
           <p:cNvPicPr>
             <a:picLocks noChangeAspect="1"/>
           </p:cNvPicPr>
           <p:nvPr/>
         </p:nvPicPr>
         <p:blipFill>
-          <a:blip r:embed="rId6"/>
+          <a:blip r:embed="rId4"/>
           <a:stretch>
             <a:fillRect/>
           </a:stretch>
         </p:blipFill>
         <p:spPr>
           <a:xfrm>
-            <a:off x="5323925" y="1114550"/>
-            <a:ext cx="3397050" cy="3397050"/>
+            <a:off x="5323925" y="1454255"/>
+            <a:ext cx="3397050" cy="2717640"/>
           </a:xfrm>
           <a:prstGeom prst="rect">
             <a:avLst/>
@@ -11326,7 +10696,7 @@
             </a:pPr>
             <a:r>
               <a:rPr lang="en"/>
-              <a:t>Rearrange the room: move the torches, add cracks</a:t>
+              <a:t>Rearrange the room: draw a wall across the middle</a:t>
             </a:r>
             <a:endParaRPr/>
           </a:p>
@@ -11343,7 +10713,7 @@
             </a:pPr>
             <a:r>
               <a:rPr lang="en"/>
-              <a:t>Then put a 20 in it. What happens, and when?</a:t>
+              <a:t>Then put a 9 in it. What happens, and when?</a:t>
             </a:r>
             <a:endParaRPr/>
           </a:p>
@@ -17304,7 +16674,7 @@
                   <a:schemeClr val="accent5"/>
                 </a:solidFill>
               </a:rPr>
-              <a:t>Exercise: A Beetle From Data</a:t>
+              <a:t>Exercise: A Bug From Data</a:t>
             </a:r>
             <a:endParaRPr>
               <a:solidFill>
@@ -17349,7 +16719,7 @@
             </a:pPr>
             <a:r>
               <a:rPr lang="en"/>
-              <a:t>A beetle is in the atlas image, but not in the data</a:t>
+              <a:t>A bug is in the atlas image, but not in the data</a:t>
             </a:r>
             <a:endParaRPr/>
           </a:p>
@@ -17383,7 +16753,7 @@
             </a:pPr>
             <a:r>
               <a:rPr lang="en"/>
-              <a:t>Make the enemy a beetle: which line of C# changes?</a:t>
+              <a:t>Make the snake eat a bug: which line of C# changes?</a:t>
             </a:r>
             <a:endParaRPr/>
           </a:p>
@@ -17400,7 +16770,7 @@
             </a:pPr>
             <a:r>
               <a:rPr lang="en"/>
-              <a:t>How much C# did you change? And for a beetle next to the apple?</a:t>
+              <a:t>How much C# did you change? And for a bug next to the food?</a:t>
             </a:r>
             <a:endParaRPr/>
           </a:p>
@@ -21637,122 +21007,115 @@
                   <a:srgbClr val="DEE2E6"/>
                 </a:solidFill>
               </a:rPr>
-              <a:t/>
-            </a:r>
-            <a:r>
-              <a:rPr sz="1000">
+              <a:t>&lt;Region name="head-1" x="8" y="0" width="7" height="7" /&gt;</a:t>
+            </a:r>
+          </a:p>
+          <a:p>
+            <a:pPr algn="l"/>
+            <a:r>
+              <a:rPr sz="1300" b="0">
                 <a:solidFill>
                   <a:srgbClr val="DEE2E6"/>
                 </a:solidFill>
-                <a:latin typeface="Consolas"/>
               </a:rPr>
-              <a:t>&lt;Region name="apple-1" x="20" y="0" width="20" height="20" /&gt;</a:t>
+              <a:t>&lt;Region name="head-2" x="16" y="0" width="7" height="7" /&gt;</a:t>
             </a:r>
           </a:p>
           <a:p>
             <a:pPr algn="l"/>
             <a:r>
-              <a:rPr sz="1000">
+              <a:rPr sz="1300" b="0">
                 <a:solidFill>
                   <a:srgbClr val="DEE2E6"/>
                 </a:solidFill>
-                <a:latin typeface="Consolas"/>
               </a:rPr>
-              <a:t>&lt;Region name="apple-2" x="20" y="20" width="20" height="20" /&gt;</a:t>
+              <a:t/>
             </a:r>
           </a:p>
           <a:p>
             <a:pPr algn="l"/>
             <a:r>
-              <a:rPr sz="1000">
+              <a:rPr sz="1300" b="0">
                 <a:solidFill>
                   <a:srgbClr val="DEE2E6"/>
                 </a:solidFill>
-                <a:latin typeface="Consolas"/>
               </a:rPr>
-              <a:t>&lt;Region name="apple-3" x="40" y="0" width="20" height="20" /&gt;</a:t>
+              <a:t>&lt;Animation name="head-animation" delay="250"&gt;</a:t>
             </a:r>
           </a:p>
           <a:p>
             <a:pPr algn="l"/>
             <a:r>
-              <a:rPr sz="1000">
+              <a:rPr sz="1300" b="0">
                 <a:solidFill>
                   <a:srgbClr val="DEE2E6"/>
                 </a:solidFill>
-                <a:latin typeface="Consolas"/>
               </a:rPr>
-              <a:t> </a:t>
+              <a:t>    &lt;Frame region="head-1" /&gt;</a:t>
             </a:r>
           </a:p>
           <a:p>
             <a:pPr algn="l"/>
             <a:r>
-              <a:rPr sz="1000">
+              <a:rPr sz="1300" b="0">
                 <a:solidFill>
                   <a:srgbClr val="DEE2E6"/>
                 </a:solidFill>
-                <a:latin typeface="Consolas"/>
               </a:rPr>
-              <a:t>&lt;Animation name="apple-animation" delay="200"&gt;</a:t>
+              <a:t>    &lt;Frame region="head-1" /&gt;</a:t>
             </a:r>
           </a:p>
           <a:p>
             <a:pPr algn="l"/>
             <a:r>
-              <a:rPr sz="1000">
+              <a:rPr sz="1300" b="0">
                 <a:solidFill>
                   <a:srgbClr val="DEE2E6"/>
                 </a:solidFill>
-                <a:latin typeface="Consolas"/>
               </a:rPr>
-              <a:t>    &lt;Frame region="apple-1" /&gt;</a:t>
+              <a:t>    &lt;Frame region="head-1" /&gt;</a:t>
             </a:r>
           </a:p>
           <a:p>
             <a:pPr algn="l"/>
             <a:r>
-              <a:rPr sz="1000">
+              <a:rPr sz="1300" b="0">
                 <a:solidFill>
                   <a:srgbClr val="DEE2E6"/>
                 </a:solidFill>
-                <a:latin typeface="Consolas"/>
               </a:rPr>
-              <a:t>    &lt;Frame region="apple-2" /&gt;</a:t>
+              <a:t>    &lt;Frame region="head-1" /&gt;</a:t>
             </a:r>
           </a:p>
           <a:p>
             <a:pPr algn="l"/>
             <a:r>
-              <a:rPr sz="1000">
+              <a:rPr sz="1300" b="0">
                 <a:solidFill>
                   <a:srgbClr val="DEE2E6"/>
                 </a:solidFill>
-                <a:latin typeface="Consolas"/>
               </a:rPr>
-              <a:t>    &lt;Frame region="apple-1" /&gt;</a:t>
+              <a:t>    &lt;Frame region="head-1" /&gt;</a:t>
             </a:r>
           </a:p>
           <a:p>
             <a:pPr algn="l"/>
             <a:r>
-              <a:rPr sz="1000">
+              <a:rPr sz="1300" b="0">
                 <a:solidFill>
                   <a:srgbClr val="DEE2E6"/>
                 </a:solidFill>
-                <a:latin typeface="Consolas"/>
               </a:rPr>
-              <a:t>    &lt;Frame region="apple-3" /&gt;</a:t>
+              <a:t>    &lt;Frame region="head-2" /&gt;</a:t>
             </a:r>
           </a:p>
           <a:p>
             <a:pPr algn="l"/>
             <a:r>
-              <a:rPr sz="1000">
+              <a:rPr sz="1300" b="0">
                 <a:solidFill>
                   <a:srgbClr val="DEE2E6"/>
                 </a:solidFill>
-                <a:latin typeface="Consolas"/>
               </a:rPr>
               <a:t>&lt;/Animation&gt;</a:t>
             </a:r>
@@ -21926,14 +21289,14 @@
       </p:sp>
       <p:pic>
         <p:nvPicPr>
-          <p:cNvPr id="64" name="Picture 73" descr="mouse1.png"/>
+          <p:cNvPr id="64" name="Picture 73" descr="single_food1.png"/>
           <p:cNvPicPr>
             <a:picLocks noChangeAspect="1"/>
           </p:cNvPicPr>
           <p:nvPr/>
         </p:nvPicPr>
         <p:blipFill>
-          <a:blip r:embed="rId6"/>
+          <a:blip r:embed="rId10"/>
           <a:stretch>
             <a:fillRect/>
           </a:stretch>
@@ -21950,14 +21313,14 @@
       </p:pic>
       <p:pic>
         <p:nvPicPr>
-          <p:cNvPr id="65" name="Picture 73" descr="snake1.png"/>
+          <p:cNvPr id="65" name="Picture 73" descr="single_body.png"/>
           <p:cNvPicPr>
             <a:picLocks noChangeAspect="1"/>
           </p:cNvPicPr>
           <p:nvPr/>
         </p:nvPicPr>
         <p:blipFill>
-          <a:blip r:embed="rId8"/>
+          <a:blip r:embed="rId5"/>
           <a:stretch>
             <a:fillRect/>
           </a:stretch>
@@ -21974,14 +21337,14 @@
       </p:pic>
       <p:pic>
         <p:nvPicPr>
-          <p:cNvPr id="66" name="Picture 73" descr="snake2.png"/>
+          <p:cNvPr id="66" name="Picture 73" descr="single_head1.png"/>
           <p:cNvPicPr>
             <a:picLocks noChangeAspect="1"/>
           </p:cNvPicPr>
           <p:nvPr/>
         </p:nvPicPr>
         <p:blipFill>
-          <a:blip r:embed="rId7"/>
+          <a:blip r:embed="rId4"/>
           <a:stretch>
             <a:fillRect/>
           </a:stretch>
@@ -22005,15 +21368,15 @@
           <p:nvPr/>
         </p:nvPicPr>
         <p:blipFill>
-          <a:blip r:embed="rId11"/>
+          <a:blip r:embed="rId12"/>
           <a:stretch>
             <a:fillRect/>
           </a:stretch>
         </p:blipFill>
         <p:spPr>
           <a:xfrm>
-            <a:off x="5364642" y="1560179"/>
-            <a:ext cx="1348766" cy="2023149"/>
+            <a:off x="4572000" y="1737360"/>
+            <a:ext cx="2926080" cy="1828800"/>
           </a:xfrm>
           <a:prstGeom prst="rect">
             <a:avLst/>
@@ -22022,14 +21385,14 @@
       </p:pic>
       <p:pic>
         <p:nvPicPr>
-          <p:cNvPr id="68" name="Picture 73" descr="image.png"/>
+          <p:cNvPr id="68" name="Picture 73" descr="single_digit0.png"/>
           <p:cNvPicPr>
             <a:picLocks noChangeAspect="1"/>
           </p:cNvPicPr>
           <p:nvPr/>
         </p:nvPicPr>
         <p:blipFill>
-          <a:blip r:embed="rId9"/>
+          <a:blip r:embed="rId3"/>
           <a:stretch>
             <a:fillRect/>
           </a:stretch>
@@ -22052,8 +21415,8 @@
         </p:nvSpPr>
         <p:spPr>
           <a:xfrm>
-            <a:off x="360725" y="2439050"/>
-            <a:ext cx="670800" cy="323400"/>
+            <a:off x="284645" y="2439050"/>
+            <a:ext cx="822960" cy="323400"/>
           </a:xfrm>
           <a:prstGeom prst="rect">
             <a:avLst/>
@@ -22064,7 +21427,7 @@
           </a:ln>
         </p:spPr>
         <p:txBody>
-          <a:bodyPr anchorCtr="0" anchor="t" bIns="91425" lIns="91425" spcFirstLastPara="1" rIns="91425" wrap="square" tIns="91425">
+          <a:bodyPr anchorCtr="0" anchor="t" bIns="91425" lIns="91425" spcFirstLastPara="1" rIns="91425" wrap="none" tIns="91425">
             <a:noAutofit/>
           </a:bodyPr>
           <a:lstStyle/>
@@ -22088,7 +21451,7 @@
                 <a:cs typeface="VT323"/>
                 <a:sym typeface="VT323"/>
               </a:rPr>
-              <a:t>snake1.png</a:t>
+              <a:t>body.png</a:t>
             </a:r>
             <a:endParaRPr sz="900">
               <a:solidFill>
@@ -22110,8 +21473,8 @@
         </p:nvSpPr>
         <p:spPr>
           <a:xfrm>
-            <a:off x="1076325" y="2439050"/>
-            <a:ext cx="670800" cy="323400"/>
+            <a:off x="1000246" y="2439050"/>
+            <a:ext cx="822960" cy="323400"/>
           </a:xfrm>
           <a:prstGeom prst="rect">
             <a:avLst/>
@@ -22122,7 +21485,7 @@
           </a:ln>
         </p:spPr>
         <p:txBody>
-          <a:bodyPr anchorCtr="0" anchor="t" bIns="91425" lIns="91425" spcFirstLastPara="1" rIns="91425" wrap="square" tIns="91425">
+          <a:bodyPr anchorCtr="0" anchor="t" bIns="91425" lIns="91425" spcFirstLastPara="1" rIns="91425" wrap="none" tIns="91425">
             <a:noAutofit/>
           </a:bodyPr>
           <a:lstStyle/>
@@ -22146,7 +21509,7 @@
                 <a:cs typeface="VT323"/>
                 <a:sym typeface="VT323"/>
               </a:rPr>
-              <a:t>snake2.png</a:t>
+              <a:t>head1.png</a:t>
             </a:r>
             <a:endParaRPr sz="900">
               <a:solidFill>
@@ -22168,8 +21531,8 @@
         </p:nvSpPr>
         <p:spPr>
           <a:xfrm>
-            <a:off x="1791925" y="2439050"/>
-            <a:ext cx="670800" cy="323400"/>
+            <a:off x="1715845" y="2439050"/>
+            <a:ext cx="822960" cy="323400"/>
           </a:xfrm>
           <a:prstGeom prst="rect">
             <a:avLst/>
@@ -22180,7 +21543,7 @@
           </a:ln>
         </p:spPr>
         <p:txBody>
-          <a:bodyPr anchorCtr="0" anchor="t" bIns="91425" lIns="91425" spcFirstLastPara="1" rIns="91425" wrap="square" tIns="91425">
+          <a:bodyPr anchorCtr="0" anchor="t" bIns="91425" lIns="91425" spcFirstLastPara="1" rIns="91425" wrap="none" tIns="91425">
             <a:noAutofit/>
           </a:bodyPr>
           <a:lstStyle/>
@@ -22204,7 +21567,7 @@
                 <a:cs typeface="VT323"/>
                 <a:sym typeface="VT323"/>
               </a:rPr>
-              <a:t>apple1.png</a:t>
+              <a:t>food1.png</a:t>
             </a:r>
             <a:endParaRPr sz="900">
               <a:solidFill>
@@ -22226,8 +21589,8 @@
         </p:nvSpPr>
         <p:spPr>
           <a:xfrm>
-            <a:off x="2574501" y="2439050"/>
-            <a:ext cx="691200" cy="323400"/>
+            <a:off x="2498407" y="2439050"/>
+            <a:ext cx="822960" cy="323400"/>
           </a:xfrm>
           <a:prstGeom prst="rect">
             <a:avLst/>
@@ -22238,7 +21601,7 @@
           </a:ln>
         </p:spPr>
         <p:txBody>
-          <a:bodyPr anchorCtr="0" anchor="t" bIns="91425" lIns="91425" spcFirstLastPara="1" rIns="91425" wrap="square" tIns="91425">
+          <a:bodyPr anchorCtr="0" anchor="t" bIns="91425" lIns="91425" spcFirstLastPara="1" rIns="91425" wrap="none" tIns="91425">
             <a:noAutofit/>
           </a:bodyPr>
           <a:lstStyle/>
@@ -22262,7 +21625,7 @@
                 <a:cs typeface="VT323"/>
                 <a:sym typeface="VT323"/>
               </a:rPr>
-              <a:t>grass.png</a:t>
+              <a:t>digit0.png</a:t>
             </a:r>
             <a:endParaRPr sz="900">
               <a:solidFill>
@@ -22284,7 +21647,7 @@
         </p:nvSpPr>
         <p:spPr>
           <a:xfrm>
-            <a:off x="5703625" y="3645825"/>
+            <a:off x="5699640" y="3657600"/>
             <a:ext cx="670800" cy="323400"/>
           </a:xfrm>
           <a:prstGeom prst="rect">
@@ -22810,15 +22173,15 @@
           <p:nvPr/>
         </p:nvPicPr>
         <p:blipFill>
-          <a:blip r:embed="rId4"/>
+          <a:blip r:embed="rId3"/>
           <a:stretch>
             <a:fillRect/>
           </a:stretch>
         </p:blipFill>
         <p:spPr>
           <a:xfrm>
-            <a:off x="3897617" y="1560179"/>
-            <a:ext cx="1348766" cy="2023149"/>
+            <a:off x="2743200" y="1325880"/>
+            <a:ext cx="3657600" cy="2286000"/>
           </a:xfrm>
           <a:prstGeom prst="rect">
             <a:avLst/>

--- a/slides/03 Snake.pptx
+++ b/slides/03 Snake.pptx
@@ -11004,7 +11004,7 @@
                 <a:cs typeface="Consolas"/>
                 <a:sym typeface="Consolas"/>
               </a:rPr>
-              <a:t>    TimeSpan.FromMilliseconds(200);</a:t>
+              <a:t>    TimeSpan.FromMilliseconds(100);</a:t>
             </a:r>
             <a:endParaRPr sz="1000">
               <a:solidFill>

--- a/slides/03 Snake.pptx
+++ b/slides/03 Snake.pptx
@@ -13484,7 +13484,7 @@
           <p:nvPr/>
         </p:nvPicPr>
         <p:blipFill>
-          <a:blip r:embed="rId3"/>
+          <a:blip r:embed="rId4"/>
           <a:stretch>
             <a:fillRect/>
           </a:stretch>

--- a/slides/03 Snake.pptx
+++ b/slides/03 Snake.pptx
@@ -19073,7 +19073,7 @@
             </a:pPr>
             <a:r>
               <a:rPr lang="en"/>
-              <a:t>Fixed-Tick Movement</a:t>
+              <a:t>Tilemaps</a:t>
             </a:r>
             <a:endParaRPr/>
           </a:p>
@@ -19090,7 +19090,41 @@
             </a:pPr>
             <a:r>
               <a:rPr lang="en"/>
+              <a:t>Fixed-Tick Movement</a:t>
+            </a:r>
+            <a:endParaRPr/>
+          </a:p>
+          <a:p>
+            <a:pPr indent="-330200" lvl="0" marL="457200" rtl="0" algn="l">
+              <a:spcBef>
+                <a:spcPts val="0"/>
+              </a:spcBef>
+              <a:spcAft>
+                <a:spcPts val="0"/>
+              </a:spcAft>
+              <a:buSzPts val="1600"/>
+              <a:buChar char="●"/>
+            </a:pPr>
+            <a:r>
+              <a:rPr lang="en"/>
               <a:t>Input as Actions &amp; Buffering</a:t>
+            </a:r>
+            <a:endParaRPr/>
+          </a:p>
+          <a:p>
+            <a:pPr indent="-330200" lvl="0" marL="457200" rtl="0" algn="l">
+              <a:spcBef>
+                <a:spcPts val="0"/>
+              </a:spcBef>
+              <a:spcAft>
+                <a:spcPts val="0"/>
+              </a:spcAft>
+              <a:buSzPts val="1600"/>
+              <a:buChar char="●"/>
+            </a:pPr>
+            <a:r>
+              <a:rPr lang="en"/>
+              <a:t>Collision Detection</a:t>
             </a:r>
             <a:endParaRPr/>
           </a:p>

--- a/slides/03 Snake.pptx
+++ b/slides/03 Snake.pptx
@@ -32,6 +32,7 @@
     <p:sldId id="290" r:id="rId40"/>
     <p:sldId id="305" r:id="rId27"/>
     <p:sldId id="298" r:id="rId57"/>
+    <p:sldId id="309" r:id="rId55"/>
     <p:sldId id="299" r:id="rId58"/>
     <p:sldId id="300" r:id="rId59"/>
     <p:sldId id="301" r:id="rId60"/>
@@ -1404,6 +1405,69 @@
 </p:notes>
 </file>
 
+<file path=ppt/notesSlides/notesSlide17.xml><?xml version="1.0" encoding="utf-8"?>
+<p:notes xmlns:a="http://schemas.openxmlformats.org/drawingml/2006/main" xmlns:p="http://schemas.openxmlformats.org/presentationml/2006/main" xmlns:r="http://schemas.openxmlformats.org/officeDocument/2006/relationships">
+  <p:cSld>
+    <p:spTree>
+      <p:nvGrpSpPr>
+        <p:cNvPr id="1" name=""/>
+        <p:cNvGrpSpPr/>
+        <p:nvPr/>
+      </p:nvGrpSpPr>
+      <p:grpSpPr>
+        <a:xfrm>
+          <a:off x="0" y="0"/>
+          <a:ext cx="0" cy="0"/>
+          <a:chOff x="0" y="0"/>
+          <a:chExt cx="0" cy="0"/>
+        </a:xfrm>
+      </p:grpSpPr>
+      <p:sp>
+        <p:nvSpPr>
+          <p:cNvPr id="2" name="Slide Image Placeholder 1"/>
+          <p:cNvSpPr>
+            <a:spLocks noGrp="1"/>
+          </p:cNvSpPr>
+          <p:nvPr>
+            <p:ph type="sldImg" idx="2"/>
+          </p:nvPr>
+        </p:nvSpPr>
+        <p:spPr/>
+      </p:sp>
+      <p:sp>
+        <p:nvSpPr>
+          <p:cNvPr id="3" name="Notes Placeholder 2"/>
+          <p:cNvSpPr>
+            <a:spLocks noGrp="1"/>
+          </p:cNvSpPr>
+          <p:nvPr>
+            <p:ph type="body" idx="1"/>
+          </p:nvPr>
+        </p:nvSpPr>
+        <p:spPr/>
+        <p:txBody>
+          <a:bodyPr/>
+          <a:lstStyle/>
+          <a:p>
+            <a:r>
+              <a:t>Frames are uneven; the accumulator collects their time. Every time it passes a tick, the snake moves once and one tick is subtracted.</a:t>
+            </a:r>
+          </a:p>
+          <a:p>
+            <a:r>
+              <a:t>Ask: what happens on a long frame? Answer: two moves in one frame, so the snake keeps its speed.</a:t>
+            </a:r>
+          </a:p>
+        </p:txBody>
+      </p:sp>
+    </p:spTree>
+  </p:cSld>
+  <p:clrMapOvr>
+    <a:masterClrMapping/>
+  </p:clrMapOvr>
+</p:notes>
+</file>
+
 <file path=ppt/notesSlides/notesSlide18.xml><?xml version="1.0" encoding="utf-8"?>
 <p:notes xmlns:a="http://schemas.openxmlformats.org/drawingml/2006/main" xmlns:p="http://schemas.openxmlformats.org/presentationml/2006/main" xmlns:r="http://schemas.openxmlformats.org/officeDocument/2006/relationships">
   <p:cSld>
@@ -2128,6 +2192,16 @@
           <a:p>
             <a:r>
               <a:t>Three levels: distance, shapes (boxes, circles), polygons. Use the simplest that looks right.</a:t>
+            </a:r>
+          </a:p>
+          <a:p>
+            <a:r>
+              <a:t>AABB, Circles</a:t>
+            </a:r>
+          </a:p>
+          <a:p>
+            <a:r>
+              <a:t>Complex polygon checks</a:t>
             </a:r>
           </a:p>
         </p:txBody>
@@ -9295,22 +9369,22 @@
       </p:sp>
       <p:pic>
         <p:nvPicPr>
-          <p:cNvPr id="123" name="Picture 123" descr="animation.png"/>
+          <p:cNvPr id="123" name="Picture 122" descr="animation.png"/>
           <p:cNvPicPr>
             <a:picLocks noChangeAspect="1"/>
           </p:cNvPicPr>
           <p:nvPr/>
         </p:nvPicPr>
         <p:blipFill>
-          <a:blip r:embed="rId3"/>
+          <a:blip r:embed="rId4"/>
           <a:stretch>
             <a:fillRect/>
           </a:stretch>
         </p:blipFill>
         <p:spPr>
           <a:xfrm>
-            <a:off x="2857500" y="857240"/>
-            <a:ext cx="3429000" cy="3429000"/>
+            <a:off x="320039" y="1051560"/>
+            <a:ext cx="8503920" cy="3188970"/>
           </a:xfrm>
           <a:prstGeom prst="rect">
             <a:avLst/>
@@ -11421,6 +11495,80 @@
       <p:grpSpPr/>
       <p:sp>
         <p:nvSpPr>
+          <p:cNvPr id="2" name="Title 1"/>
+          <p:cNvSpPr>
+            <a:spLocks noGrp="1"/>
+          </p:cNvSpPr>
+          <p:nvPr>
+            <p:ph type="title"/>
+          </p:nvPr>
+        </p:nvSpPr>
+        <p:spPr/>
+        <p:txBody>
+          <a:bodyPr/>
+          <a:lstStyle/>
+          <a:p>
+            <a:pPr indent="0" lvl="0" marL="0" rtl="0" algn="l">
+              <a:spcBef>
+                <a:spcPts val="0"/>
+              </a:spcBef>
+              <a:spcAft>
+                <a:spcPts val="0"/>
+              </a:spcAft>
+              <a:buNone/>
+            </a:pPr>
+            <a:r>
+              <a:rPr lang="en"/>
+              <a:t>The Accumulator</a:t>
+            </a:r>
+            <a:endParaRPr/>
+          </a:p>
+        </p:txBody>
+      </p:sp>
+      <p:pic>
+        <p:nvPicPr>
+          <p:cNvPr id="3" name="Picture 2" descr="tick.png"/>
+          <p:cNvPicPr>
+            <a:picLocks noChangeAspect="1"/>
+          </p:cNvPicPr>
+          <p:nvPr/>
+        </p:nvPicPr>
+        <p:blipFill>
+          <a:blip r:embed="rId2"/>
+          <a:stretch>
+            <a:fillRect/>
+          </a:stretch>
+        </p:blipFill>
+        <p:spPr>
+          <a:xfrm>
+            <a:off x="360381" y="1051560"/>
+            <a:ext cx="8423237" cy="3977640"/>
+          </a:xfrm>
+          <a:prstGeom prst="rect">
+            <a:avLst/>
+          </a:prstGeom>
+        </p:spPr>
+      </p:pic>
+    </p:spTree>
+  </p:cSld>
+  <p:clrMapOvr>
+    <a:masterClrMapping/>
+  </p:clrMapOvr>
+</p:sld>
+</file>
+
+<file path=ppt/slides/slide26.xml><?xml version="1.0" encoding="utf-8"?>
+<p:sld xmlns:a="http://schemas.openxmlformats.org/drawingml/2006/main" xmlns:p="http://schemas.openxmlformats.org/presentationml/2006/main" xmlns:r="http://schemas.openxmlformats.org/officeDocument/2006/relationships">
+  <p:cSld>
+    <p:spTree>
+      <p:nvGrpSpPr>
+        <p:cNvPr id="1" name=""/>
+        <p:cNvGrpSpPr/>
+        <p:nvPr/>
+      </p:nvGrpSpPr>
+      <p:grpSpPr/>
+      <p:sp>
+        <p:nvSpPr>
           <p:cNvPr id="140" name="Google Shape;140;p23"/>
           <p:cNvSpPr txBox="1"/>
           <p:nvPr>
@@ -12077,7 +12225,7 @@
 </p:sld>
 </file>
 
-<file path=ppt/slides/slide26.xml><?xml version="1.0" encoding="utf-8"?>
+<file path=ppt/slides/slide27.xml><?xml version="1.0" encoding="utf-8"?>
 <p:sld xmlns:a="http://schemas.openxmlformats.org/drawingml/2006/main" xmlns:p="http://schemas.openxmlformats.org/presentationml/2006/main" xmlns:r="http://schemas.openxmlformats.org/officeDocument/2006/relationships">
   <p:cSld>
     <p:spTree>
@@ -12696,7 +12844,7 @@
 </p:sld>
 </file>
 
-<file path=ppt/slides/slide27.xml><?xml version="1.0" encoding="utf-8"?>
+<file path=ppt/slides/slide28.xml><?xml version="1.0" encoding="utf-8"?>
 <p:sld xmlns:a="http://schemas.openxmlformats.org/drawingml/2006/main" xmlns:p="http://schemas.openxmlformats.org/presentationml/2006/main" xmlns:r="http://schemas.openxmlformats.org/officeDocument/2006/relationships">
   <p:cSld>
     <p:spTree>
@@ -12823,7 +12971,7 @@
 </p:sld>
 </file>
 
-<file path=ppt/slides/slide28.xml><?xml version="1.0" encoding="utf-8"?>
+<file path=ppt/slides/slide29.xml><?xml version="1.0" encoding="utf-8"?>
 <p:sld xmlns:a="http://schemas.openxmlformats.org/drawingml/2006/main" xmlns:p="http://schemas.openxmlformats.org/presentationml/2006/main" xmlns:r="http://schemas.openxmlformats.org/officeDocument/2006/relationships">
   <p:cSld>
     <p:spTree>
@@ -12959,462 +13107,6 @@
   <p:clrMapOvr>
     <a:masterClrMapping/>
   </p:clrMapOvr>
-</p:sld>
-</file>
-
-<file path=ppt/slides/slide29.xml><?xml version="1.0" encoding="utf-8"?>
-<p:sld xmlns:a="http://schemas.openxmlformats.org/drawingml/2006/main" xmlns:r="http://schemas.openxmlformats.org/officeDocument/2006/relationships" xmlns:mc="http://schemas.openxmlformats.org/markup-compatibility/2006" xmlns:mv="urn:schemas-microsoft-com:mac:vml" xmlns:p="http://schemas.openxmlformats.org/presentationml/2006/main" xmlns:c="http://schemas.openxmlformats.org/drawingml/2006/chart" xmlns:dgm="http://schemas.openxmlformats.org/drawingml/2006/diagram" xmlns:o="urn:schemas-microsoft-com:office:office" xmlns:v="urn:schemas-microsoft-com:vml" xmlns:pvml="urn:schemas-microsoft-com:office:powerpoint" xmlns:com="http://schemas.openxmlformats.org/drawingml/2006/compatibility" xmlns:p14="http://schemas.microsoft.com/office/powerpoint/2010/main" xmlns:p15="http://schemas.microsoft.com/office/powerpoint/2012/main" xmlns:ahyp="http://schemas.microsoft.com/office/drawing/2018/hyperlinkcolor">
-  <p:cSld>
-    <p:spTree>
-      <p:nvGrpSpPr>
-        <p:cNvPr id="212" name="Shape 212"/>
-        <p:cNvGrpSpPr/>
-        <p:nvPr/>
-      </p:nvGrpSpPr>
-      <p:grpSpPr>
-        <a:xfrm>
-          <a:off x="0" y="0"/>
-          <a:ext cx="0" cy="0"/>
-          <a:chOff x="0" y="0"/>
-          <a:chExt cx="0" cy="0"/>
-        </a:xfrm>
-      </p:grpSpPr>
-      <p:sp>
-        <p:nvSpPr>
-          <p:cNvPr id="213" name="Google Shape;213;p34"/>
-          <p:cNvSpPr txBox="1"/>
-          <p:nvPr>
-            <p:ph type="title"/>
-          </p:nvPr>
-        </p:nvSpPr>
-        <p:spPr>
-          <a:xfrm>
-            <a:off x="311700" y="195615"/>
-            <a:ext cx="8520600" cy="572700"/>
-          </a:xfrm>
-          <a:prstGeom prst="rect">
-            <a:avLst/>
-          </a:prstGeom>
-        </p:spPr>
-        <p:txBody>
-          <a:bodyPr anchorCtr="0" anchor="t" bIns="91425" lIns="91425" spcFirstLastPara="1" rIns="91425" wrap="square" tIns="91425">
-            <a:normAutofit fontScale="90000"/>
-          </a:bodyPr>
-          <a:lstStyle/>
-          <a:p>
-            <a:pPr indent="0" lvl="0" marL="0" rtl="0" algn="l">
-              <a:spcBef>
-                <a:spcPts val="0"/>
-              </a:spcBef>
-              <a:spcAft>
-                <a:spcPts val="0"/>
-              </a:spcAft>
-              <a:buNone/>
-            </a:pPr>
-            <a:r>
-              <a:rPr lang="en"/>
-              <a:t>Collision Detection</a:t>
-            </a:r>
-            <a:endParaRPr/>
-          </a:p>
-        </p:txBody>
-      </p:sp>
-      <p:sp>
-        <p:nvSpPr>
-          <p:cNvPr id="214" name="Google Shape;214;p34"/>
-          <p:cNvSpPr txBox="1"/>
-          <p:nvPr>
-            <p:ph idx="1" type="body"/>
-          </p:nvPr>
-        </p:nvSpPr>
-        <p:spPr>
-          <a:xfrm>
-            <a:off x="311700" y="890825"/>
-            <a:ext cx="8520600" cy="4023300"/>
-          </a:xfrm>
-          <a:prstGeom prst="rect">
-            <a:avLst/>
-          </a:prstGeom>
-        </p:spPr>
-        <p:txBody>
-          <a:bodyPr anchorCtr="0" anchor="t" bIns="91425" lIns="91425" spcFirstLastPara="1" rIns="91425" wrap="square" tIns="91425">
-            <a:normAutofit/>
-          </a:bodyPr>
-          <a:lstStyle/>
-          <a:p>
-            <a:pPr indent="-330200" lvl="0" marL="457200" rtl="0" algn="l">
-              <a:spcBef>
-                <a:spcPts val="0"/>
-              </a:spcBef>
-              <a:spcAft>
-                <a:spcPts val="0"/>
-              </a:spcAft>
-              <a:buSzPts val="1600"/>
-              <a:buChar char="●"/>
-            </a:pPr>
-            <a:r>
-              <a:rPr lang="en"/>
-              <a:t>Distance</a:t>
-            </a:r>
-            <a:endParaRPr/>
-          </a:p>
-          <a:p>
-            <a:pPr indent="-330200" lvl="0" marL="457200" rtl="0" algn="l">
-              <a:spcBef>
-                <a:spcPts val="0"/>
-              </a:spcBef>
-              <a:spcAft>
-                <a:spcPts val="0"/>
-              </a:spcAft>
-              <a:buSzPts val="1600"/>
-              <a:buChar char="●"/>
-            </a:pPr>
-            <a:r>
-              <a:rPr lang="en"/>
-              <a:t>Shape-based</a:t>
-            </a:r>
-            <a:endParaRPr/>
-          </a:p>
-          <a:p>
-            <a:pPr indent="-317500" lvl="1" marL="914400" rtl="0" algn="l">
-              <a:spcBef>
-                <a:spcPts val="0"/>
-              </a:spcBef>
-              <a:spcAft>
-                <a:spcPts val="0"/>
-              </a:spcAft>
-              <a:buSzPts val="1400"/>
-              <a:buChar char="○"/>
-            </a:pPr>
-            <a:r>
-              <a:rPr lang="en"/>
-              <a:t>AABB, Circles</a:t>
-            </a:r>
-            <a:endParaRPr/>
-          </a:p>
-          <a:p>
-            <a:pPr indent="-330200" lvl="0" marL="457200" rtl="0" algn="l">
-              <a:spcBef>
-                <a:spcPts val="0"/>
-              </a:spcBef>
-              <a:spcAft>
-                <a:spcPts val="0"/>
-              </a:spcAft>
-              <a:buSzPts val="1600"/>
-              <a:buChar char="●"/>
-            </a:pPr>
-            <a:r>
-              <a:rPr lang="en"/>
-              <a:t>Complex polygon checks</a:t>
-            </a:r>
-            <a:endParaRPr/>
-          </a:p>
-        </p:txBody>
-      </p:sp>
-      <p:pic>
-        <p:nvPicPr>
-          <p:cNvPr id="215" name="Google Shape;215;p34"/>
-          <p:cNvPicPr preferRelativeResize="0"/>
-          <p:nvPr/>
-        </p:nvPicPr>
-        <p:blipFill>
-          <a:blip r:embed="rId3">
-            <a:alphaModFix/>
-          </a:blip>
-          <a:stretch>
-            <a:fillRect/>
-          </a:stretch>
-        </p:blipFill>
-        <p:spPr>
-          <a:xfrm>
-            <a:off x="2795325" y="2235425"/>
-            <a:ext cx="3810000" cy="2571750"/>
-          </a:xfrm>
-          <a:prstGeom prst="rect">
-            <a:avLst/>
-          </a:prstGeom>
-          <a:noFill/>
-          <a:ln>
-            <a:noFill/>
-          </a:ln>
-        </p:spPr>
-      </p:pic>
-    </p:spTree>
-  </p:cSld>
-  <p:clrMapOvr>
-    <a:masterClrMapping/>
-  </p:clrMapOvr>
-  <p:timing>
-    <p:tnLst>
-      <p:par>
-        <p:cTn dur="indefinite" nodeType="tmRoot" restart="never">
-          <p:childTnLst>
-            <p:seq concurrent="1" nextAc="seek">
-              <p:cTn dur="indefinite" id="2" nodeType="mainSeq">
-                <p:childTnLst>
-                  <p:par>
-                    <p:cTn fill="hold">
-                      <p:stCondLst>
-                        <p:cond delay="indefinite"/>
-                      </p:stCondLst>
-                      <p:childTnLst>
-                        <p:par>
-                          <p:cTn fill="hold">
-                            <p:stCondLst>
-                              <p:cond delay="0"/>
-                            </p:stCondLst>
-                            <p:childTnLst>
-                              <p:par>
-                                <p:cTn fill="hold" nodeType="clickEffect" presetClass="entr" presetID="1" presetSubtype="0">
-                                  <p:stCondLst>
-                                    <p:cond delay="0"/>
-                                  </p:stCondLst>
-                                  <p:childTnLst>
-                                    <p:set>
-                                      <p:cBhvr>
-                                        <p:cTn dur="1" fill="hold">
-                                          <p:stCondLst>
-                                            <p:cond delay="0"/>
-                                          </p:stCondLst>
-                                        </p:cTn>
-                                        <p:tgtEl>
-                                          <p:spTgt spid="214">
-                                            <p:txEl>
-                                              <p:pRg end="0" st="0"/>
-                                            </p:txEl>
-                                          </p:spTgt>
-                                        </p:tgtEl>
-                                        <p:attrNameLst>
-                                          <p:attrName>style.visibility</p:attrName>
-                                        </p:attrNameLst>
-                                      </p:cBhvr>
-                                      <p:to>
-                                        <p:strVal val="visible"/>
-                                      </p:to>
-                                    </p:set>
-                                  </p:childTnLst>
-                                </p:cTn>
-                              </p:par>
-                            </p:childTnLst>
-                          </p:cTn>
-                        </p:par>
-                      </p:childTnLst>
-                    </p:cTn>
-                  </p:par>
-                  <p:par>
-                    <p:cTn fill="hold">
-                      <p:stCondLst>
-                        <p:cond delay="indefinite"/>
-                      </p:stCondLst>
-                      <p:childTnLst>
-                        <p:par>
-                          <p:cTn fill="hold">
-                            <p:stCondLst>
-                              <p:cond delay="0"/>
-                            </p:stCondLst>
-                            <p:childTnLst>
-                              <p:par>
-                                <p:cTn fill="hold" nodeType="clickEffect" presetClass="entr" presetID="1" presetSubtype="0">
-                                  <p:stCondLst>
-                                    <p:cond delay="0"/>
-                                  </p:stCondLst>
-                                  <p:childTnLst>
-                                    <p:set>
-                                      <p:cBhvr>
-                                        <p:cTn dur="1" fill="hold">
-                                          <p:stCondLst>
-                                            <p:cond delay="0"/>
-                                          </p:stCondLst>
-                                        </p:cTn>
-                                        <p:tgtEl>
-                                          <p:spTgt spid="214">
-                                            <p:txEl>
-                                              <p:pRg end="1" st="1"/>
-                                            </p:txEl>
-                                          </p:spTgt>
-                                        </p:tgtEl>
-                                        <p:attrNameLst>
-                                          <p:attrName>style.visibility</p:attrName>
-                                        </p:attrNameLst>
-                                      </p:cBhvr>
-                                      <p:to>
-                                        <p:strVal val="visible"/>
-                                      </p:to>
-                                    </p:set>
-                                  </p:childTnLst>
-                                </p:cTn>
-                              </p:par>
-                            </p:childTnLst>
-                          </p:cTn>
-                        </p:par>
-                      </p:childTnLst>
-                    </p:cTn>
-                  </p:par>
-                  <p:par>
-                    <p:cTn fill="hold">
-                      <p:stCondLst>
-                        <p:cond delay="indefinite"/>
-                      </p:stCondLst>
-                      <p:childTnLst>
-                        <p:par>
-                          <p:cTn fill="hold">
-                            <p:stCondLst>
-                              <p:cond delay="0"/>
-                            </p:stCondLst>
-                            <p:childTnLst>
-                              <p:par>
-                                <p:cTn fill="hold" nodeType="clickEffect" presetClass="entr" presetID="1" presetSubtype="0">
-                                  <p:stCondLst>
-                                    <p:cond delay="0"/>
-                                  </p:stCondLst>
-                                  <p:childTnLst>
-                                    <p:set>
-                                      <p:cBhvr>
-                                        <p:cTn dur="1" fill="hold">
-                                          <p:stCondLst>
-                                            <p:cond delay="0"/>
-                                          </p:stCondLst>
-                                        </p:cTn>
-                                        <p:tgtEl>
-                                          <p:spTgt spid="214">
-                                            <p:txEl>
-                                              <p:pRg end="2" st="2"/>
-                                            </p:txEl>
-                                          </p:spTgt>
-                                        </p:tgtEl>
-                                        <p:attrNameLst>
-                                          <p:attrName>style.visibility</p:attrName>
-                                        </p:attrNameLst>
-                                      </p:cBhvr>
-                                      <p:to>
-                                        <p:strVal val="visible"/>
-                                      </p:to>
-                                    </p:set>
-                                  </p:childTnLst>
-                                </p:cTn>
-                              </p:par>
-                            </p:childTnLst>
-                          </p:cTn>
-                        </p:par>
-                      </p:childTnLst>
-                    </p:cTn>
-                  </p:par>
-                  <p:par>
-                    <p:cTn fill="hold">
-                      <p:stCondLst>
-                        <p:cond delay="indefinite"/>
-                      </p:stCondLst>
-                      <p:childTnLst>
-                        <p:par>
-                          <p:cTn fill="hold">
-                            <p:stCondLst>
-                              <p:cond delay="0"/>
-                            </p:stCondLst>
-                            <p:childTnLst>
-                              <p:par>
-                                <p:cTn fill="hold" nodeType="clickEffect" presetClass="entr" presetID="1" presetSubtype="0">
-                                  <p:stCondLst>
-                                    <p:cond delay="0"/>
-                                  </p:stCondLst>
-                                  <p:childTnLst>
-                                    <p:set>
-                                      <p:cBhvr>
-                                        <p:cTn dur="1" fill="hold">
-                                          <p:stCondLst>
-                                            <p:cond delay="0"/>
-                                          </p:stCondLst>
-                                        </p:cTn>
-                                        <p:tgtEl>
-                                          <p:spTgt spid="214">
-                                            <p:txEl>
-                                              <p:pRg end="3" st="3"/>
-                                            </p:txEl>
-                                          </p:spTgt>
-                                        </p:tgtEl>
-                                        <p:attrNameLst>
-                                          <p:attrName>style.visibility</p:attrName>
-                                        </p:attrNameLst>
-                                      </p:cBhvr>
-                                      <p:to>
-                                        <p:strVal val="visible"/>
-                                      </p:to>
-                                    </p:set>
-                                  </p:childTnLst>
-                                </p:cTn>
-                              </p:par>
-                            </p:childTnLst>
-                          </p:cTn>
-                        </p:par>
-                      </p:childTnLst>
-                    </p:cTn>
-                  </p:par>
-                  <p:par>
-                    <p:cTn fill="hold">
-                      <p:stCondLst>
-                        <p:cond delay="indefinite"/>
-                      </p:stCondLst>
-                      <p:childTnLst>
-                        <p:par>
-                          <p:cTn fill="hold">
-                            <p:stCondLst>
-                              <p:cond delay="0"/>
-                            </p:stCondLst>
-                            <p:childTnLst>
-                              <p:par>
-                                <p:cTn fill="hold" nodeType="clickEffect" presetClass="entr" presetID="1" presetSubtype="0">
-                                  <p:stCondLst>
-                                    <p:cond delay="0"/>
-                                  </p:stCondLst>
-                                  <p:childTnLst>
-                                    <p:set>
-                                      <p:cBhvr>
-                                        <p:cTn dur="1" fill="hold">
-                                          <p:stCondLst>
-                                            <p:cond delay="0"/>
-                                          </p:stCondLst>
-                                        </p:cTn>
-                                        <p:tgtEl>
-                                          <p:spTgt spid="215"/>
-                                        </p:tgtEl>
-                                        <p:attrNameLst>
-                                          <p:attrName>style.visibility</p:attrName>
-                                        </p:attrNameLst>
-                                      </p:cBhvr>
-                                      <p:to>
-                                        <p:strVal val="visible"/>
-                                      </p:to>
-                                    </p:set>
-                                  </p:childTnLst>
-                                </p:cTn>
-                              </p:par>
-                            </p:childTnLst>
-                          </p:cTn>
-                        </p:par>
-                      </p:childTnLst>
-                    </p:cTn>
-                  </p:par>
-                </p:childTnLst>
-              </p:cTn>
-              <p:prevCondLst>
-                <p:cond evt="onPrev">
-                  <p:tgtEl>
-                    <p:sldTgt/>
-                  </p:tgtEl>
-                </p:cond>
-              </p:prevCondLst>
-              <p:nextCondLst>
-                <p:cond evt="onNext">
-                  <p:tgtEl>
-                    <p:sldTgt/>
-                  </p:tgtEl>
-                </p:cond>
-              </p:nextCondLst>
-            </p:seq>
-          </p:childTnLst>
-        </p:cTn>
-      </p:par>
-    </p:tnLst>
-  </p:timing>
 </p:sld>
 </file>
 
@@ -13508,6 +13200,95 @@
 </file>
 
 <file path=ppt/slides/slide30.xml><?xml version="1.0" encoding="utf-8"?>
+<p:sld xmlns:a="http://schemas.openxmlformats.org/drawingml/2006/main" xmlns:r="http://schemas.openxmlformats.org/officeDocument/2006/relationships" xmlns:mc="http://schemas.openxmlformats.org/markup-compatibility/2006" xmlns:mv="urn:schemas-microsoft-com:mac:vml" xmlns:p="http://schemas.openxmlformats.org/presentationml/2006/main" xmlns:c="http://schemas.openxmlformats.org/drawingml/2006/chart" xmlns:dgm="http://schemas.openxmlformats.org/drawingml/2006/diagram" xmlns:o="urn:schemas-microsoft-com:office:office" xmlns:v="urn:schemas-microsoft-com:vml" xmlns:pvml="urn:schemas-microsoft-com:office:powerpoint" xmlns:com="http://schemas.openxmlformats.org/drawingml/2006/compatibility" xmlns:p14="http://schemas.microsoft.com/office/powerpoint/2010/main" xmlns:p15="http://schemas.microsoft.com/office/powerpoint/2012/main" xmlns:ahyp="http://schemas.microsoft.com/office/drawing/2018/hyperlinkcolor">
+  <p:cSld>
+    <p:spTree>
+      <p:nvGrpSpPr>
+        <p:cNvPr id="212" name="Shape 212"/>
+        <p:cNvGrpSpPr/>
+        <p:nvPr/>
+      </p:nvGrpSpPr>
+      <p:grpSpPr>
+        <a:xfrm>
+          <a:off x="0" y="0"/>
+          <a:ext cx="0" cy="0"/>
+          <a:chOff x="0" y="0"/>
+          <a:chExt cx="0" cy="0"/>
+        </a:xfrm>
+      </p:grpSpPr>
+      <p:sp>
+        <p:nvSpPr>
+          <p:cNvPr id="213" name="Google Shape;213;p34"/>
+          <p:cNvSpPr txBox="1"/>
+          <p:nvPr>
+            <p:ph type="title"/>
+          </p:nvPr>
+        </p:nvSpPr>
+        <p:spPr>
+          <a:xfrm>
+            <a:off x="311700" y="195615"/>
+            <a:ext cx="8520600" cy="572700"/>
+          </a:xfrm>
+          <a:prstGeom prst="rect">
+            <a:avLst/>
+          </a:prstGeom>
+        </p:spPr>
+        <p:txBody>
+          <a:bodyPr anchorCtr="0" anchor="t" bIns="91425" lIns="91425" spcFirstLastPara="1" rIns="91425" wrap="square" tIns="91425">
+            <a:normAutofit fontScale="90000"/>
+          </a:bodyPr>
+          <a:lstStyle/>
+          <a:p>
+            <a:pPr indent="0" lvl="0" marL="0" rtl="0" algn="l">
+              <a:spcBef>
+                <a:spcPts val="0"/>
+              </a:spcBef>
+              <a:spcAft>
+                <a:spcPts val="0"/>
+              </a:spcAft>
+              <a:buNone/>
+            </a:pPr>
+            <a:r>
+              <a:rPr lang="en"/>
+              <a:t>Collision Detection</a:t>
+            </a:r>
+            <a:endParaRPr/>
+          </a:p>
+        </p:txBody>
+      </p:sp>
+      <p:pic>
+        <p:nvPicPr>
+          <p:cNvPr id="215" name="Picture 214" descr="circles.png"/>
+          <p:cNvPicPr>
+            <a:picLocks noChangeAspect="1"/>
+          </p:cNvPicPr>
+          <p:nvPr/>
+        </p:nvPicPr>
+        <p:blipFill>
+          <a:blip r:embed="rId4"/>
+          <a:stretch>
+            <a:fillRect/>
+          </a:stretch>
+        </p:blipFill>
+        <p:spPr>
+          <a:xfrm>
+            <a:off x="320039" y="1051560"/>
+            <a:ext cx="8503920" cy="3543300"/>
+          </a:xfrm>
+          <a:prstGeom prst="rect">
+            <a:avLst/>
+          </a:prstGeom>
+        </p:spPr>
+      </p:pic>
+    </p:spTree>
+  </p:cSld>
+  <p:clrMapOvr>
+    <a:masterClrMapping/>
+  </p:clrMapOvr>
+</p:sld>
+</file>
+
+<file path=ppt/slides/slide31.xml><?xml version="1.0" encoding="utf-8"?>
 <p:sld xmlns:a="http://schemas.openxmlformats.org/drawingml/2006/main" xmlns:r="http://schemas.openxmlformats.org/officeDocument/2006/relationships" xmlns:mc="http://schemas.openxmlformats.org/markup-compatibility/2006" xmlns:mv="urn:schemas-microsoft-com:mac:vml" xmlns:p="http://schemas.openxmlformats.org/presentationml/2006/main" xmlns:c="http://schemas.openxmlformats.org/drawingml/2006/chart" xmlns:dgm="http://schemas.openxmlformats.org/drawingml/2006/diagram" xmlns:o="urn:schemas-microsoft-com:office:office" xmlns:v="urn:schemas-microsoft-com:vml" xmlns:pvml="urn:schemas-microsoft-com:office:powerpoint" xmlns:com="http://schemas.openxmlformats.org/drawingml/2006/compatibility" xmlns:p14="http://schemas.microsoft.com/office/powerpoint/2010/main" xmlns:p15="http://schemas.microsoft.com/office/powerpoint/2012/main" xmlns:ahyp="http://schemas.microsoft.com/office/drawing/2018/hyperlinkcolor">
   <p:cSld>
     <p:spTree>
@@ -15559,7 +15340,7 @@
 </p:sld>
 </file>
 
-<file path=ppt/slides/slide31.xml><?xml version="1.0" encoding="utf-8"?>
+<file path=ppt/slides/slide32.xml><?xml version="1.0" encoding="utf-8"?>
 <p:sld xmlns:a="http://schemas.openxmlformats.org/drawingml/2006/main" xmlns:r="http://schemas.openxmlformats.org/officeDocument/2006/relationships" xmlns:mc="http://schemas.openxmlformats.org/markup-compatibility/2006" xmlns:mv="urn:schemas-microsoft-com:mac:vml" xmlns:p="http://schemas.openxmlformats.org/presentationml/2006/main" xmlns:c="http://schemas.openxmlformats.org/drawingml/2006/chart" xmlns:dgm="http://schemas.openxmlformats.org/drawingml/2006/diagram" xmlns:o="urn:schemas-microsoft-com:office:office" xmlns:v="urn:schemas-microsoft-com:vml" xmlns:pvml="urn:schemas-microsoft-com:office:powerpoint" xmlns:com="http://schemas.openxmlformats.org/drawingml/2006/compatibility" xmlns:p14="http://schemas.microsoft.com/office/powerpoint/2010/main" xmlns:p15="http://schemas.microsoft.com/office/powerpoint/2012/main" xmlns:ahyp="http://schemas.microsoft.com/office/drawing/2018/hyperlinkcolor">
   <p:cSld>
     <p:spTree>
@@ -15734,7 +15515,7 @@
 </p:sld>
 </file>
 
-<file path=ppt/slides/slide32.xml><?xml version="1.0" encoding="utf-8"?>
+<file path=ppt/slides/slide33.xml><?xml version="1.0" encoding="utf-8"?>
 <p:sld xmlns:a="http://schemas.openxmlformats.org/drawingml/2006/main" xmlns:r="http://schemas.openxmlformats.org/officeDocument/2006/relationships" xmlns:mc="http://schemas.openxmlformats.org/markup-compatibility/2006" xmlns:mv="urn:schemas-microsoft-com:mac:vml" xmlns:p="http://schemas.openxmlformats.org/presentationml/2006/main" xmlns:c="http://schemas.openxmlformats.org/drawingml/2006/chart" xmlns:dgm="http://schemas.openxmlformats.org/drawingml/2006/diagram" xmlns:o="urn:schemas-microsoft-com:office:office" xmlns:v="urn:schemas-microsoft-com:vml" xmlns:pvml="urn:schemas-microsoft-com:office:powerpoint" xmlns:com="http://schemas.openxmlformats.org/drawingml/2006/compatibility" xmlns:p14="http://schemas.microsoft.com/office/powerpoint/2010/main" xmlns:p15="http://schemas.microsoft.com/office/powerpoint/2012/main" xmlns:ahyp="http://schemas.microsoft.com/office/drawing/2018/hyperlinkcolor">
   <p:cSld>
     <p:spTree>
@@ -15967,7 +15748,7 @@
 </p:sld>
 </file>
 
-<file path=ppt/slides/slide33.xml><?xml version="1.0" encoding="utf-8"?>
+<file path=ppt/slides/slide34.xml><?xml version="1.0" encoding="utf-8"?>
 <p:sld xmlns:a="http://schemas.openxmlformats.org/drawingml/2006/main" xmlns:r="http://schemas.openxmlformats.org/officeDocument/2006/relationships" xmlns:mc="http://schemas.openxmlformats.org/markup-compatibility/2006" xmlns:mv="urn:schemas-microsoft-com:mac:vml" xmlns:p="http://schemas.openxmlformats.org/presentationml/2006/main" xmlns:c="http://schemas.openxmlformats.org/drawingml/2006/chart" xmlns:dgm="http://schemas.openxmlformats.org/drawingml/2006/diagram" xmlns:o="urn:schemas-microsoft-com:office:office" xmlns:v="urn:schemas-microsoft-com:vml" xmlns:pvml="urn:schemas-microsoft-com:office:powerpoint" xmlns:com="http://schemas.openxmlformats.org/drawingml/2006/compatibility" xmlns:p14="http://schemas.microsoft.com/office/powerpoint/2010/main" xmlns:p15="http://schemas.microsoft.com/office/powerpoint/2012/main" xmlns:ahyp="http://schemas.microsoft.com/office/drawing/2018/hyperlinkcolor">
   <p:cSld>
     <p:spTree>
@@ -16216,7 +15997,7 @@
 </p:sld>
 </file>
 
-<file path=ppt/slides/slide34.xml><?xml version="1.0" encoding="utf-8"?>
+<file path=ppt/slides/slide35.xml><?xml version="1.0" encoding="utf-8"?>
 <p:sld xmlns:a="http://schemas.openxmlformats.org/drawingml/2006/main" xmlns:r="http://schemas.openxmlformats.org/officeDocument/2006/relationships" xmlns:mc="http://schemas.openxmlformats.org/markup-compatibility/2006" xmlns:mv="urn:schemas-microsoft-com:mac:vml" xmlns:p="http://schemas.openxmlformats.org/presentationml/2006/main" xmlns:c="http://schemas.openxmlformats.org/drawingml/2006/chart" xmlns:dgm="http://schemas.openxmlformats.org/drawingml/2006/diagram" xmlns:o="urn:schemas-microsoft-com:office:office" xmlns:v="urn:schemas-microsoft-com:vml" xmlns:pvml="urn:schemas-microsoft-com:office:powerpoint" xmlns:com="http://schemas.openxmlformats.org/drawingml/2006/compatibility" xmlns:p14="http://schemas.microsoft.com/office/powerpoint/2010/main" xmlns:p15="http://schemas.microsoft.com/office/powerpoint/2012/main" xmlns:ahyp="http://schemas.microsoft.com/office/drawing/2018/hyperlinkcolor">
   <p:cSld>
     <p:spTree>
@@ -16485,7 +16266,7 @@
 </p:sld>
 </file>
 
-<file path=ppt/slides/slide35.xml><?xml version="1.0" encoding="utf-8"?>
+<file path=ppt/slides/slide36.xml><?xml version="1.0" encoding="utf-8"?>
 <p:sld xmlns:a="http://schemas.openxmlformats.org/drawingml/2006/main" xmlns:r="http://schemas.openxmlformats.org/officeDocument/2006/relationships" xmlns:mc="http://schemas.openxmlformats.org/markup-compatibility/2006" xmlns:mv="urn:schemas-microsoft-com:mac:vml" xmlns:p="http://schemas.openxmlformats.org/presentationml/2006/main" xmlns:c="http://schemas.openxmlformats.org/drawingml/2006/chart" xmlns:dgm="http://schemas.openxmlformats.org/drawingml/2006/diagram" xmlns:o="urn:schemas-microsoft-com:office:office" xmlns:v="urn:schemas-microsoft-com:vml" xmlns:pvml="urn:schemas-microsoft-com:office:powerpoint" xmlns:com="http://schemas.openxmlformats.org/drawingml/2006/compatibility" xmlns:p14="http://schemas.microsoft.com/office/powerpoint/2010/main" xmlns:p15="http://schemas.microsoft.com/office/powerpoint/2012/main" xmlns:ahyp="http://schemas.microsoft.com/office/drawing/2018/hyperlinkcolor">
   <p:cSld>
     <p:spTree>
@@ -16619,7 +16400,7 @@
 </p:sld>
 </file>
 
-<file path=ppt/slides/slide36.xml><?xml version="1.0" encoding="utf-8"?>
+<file path=ppt/slides/slide37.xml><?xml version="1.0" encoding="utf-8"?>
 <p:sld xmlns:a="http://schemas.openxmlformats.org/drawingml/2006/main" xmlns:r="http://schemas.openxmlformats.org/officeDocument/2006/relationships" xmlns:mc="http://schemas.openxmlformats.org/markup-compatibility/2006" xmlns:mv="urn:schemas-microsoft-com:mac:vml" xmlns:p="http://schemas.openxmlformats.org/presentationml/2006/main" xmlns:c="http://schemas.openxmlformats.org/drawingml/2006/chart" xmlns:dgm="http://schemas.openxmlformats.org/drawingml/2006/diagram" xmlns:o="urn:schemas-microsoft-com:office:office" xmlns:v="urn:schemas-microsoft-com:vml" xmlns:pvml="urn:schemas-microsoft-com:office:powerpoint" xmlns:com="http://schemas.openxmlformats.org/drawingml/2006/compatibility" xmlns:p14="http://schemas.microsoft.com/office/powerpoint/2010/main" xmlns:p15="http://schemas.microsoft.com/office/powerpoint/2012/main" xmlns:ahyp="http://schemas.microsoft.com/office/drawing/2018/hyperlinkcolor">
   <p:cSld>
     <p:spTree>
@@ -17059,855 +16840,6 @@
 </p:sld>
 </file>
 
-<file path=ppt/slides/slide37.xml><?xml version="1.0" encoding="utf-8"?>
-<p:sld xmlns:a="http://schemas.openxmlformats.org/drawingml/2006/main" xmlns:r="http://schemas.openxmlformats.org/officeDocument/2006/relationships" xmlns:mc="http://schemas.openxmlformats.org/markup-compatibility/2006" xmlns:mv="urn:schemas-microsoft-com:mac:vml" xmlns:p="http://schemas.openxmlformats.org/presentationml/2006/main" xmlns:c="http://schemas.openxmlformats.org/drawingml/2006/chart" xmlns:dgm="http://schemas.openxmlformats.org/drawingml/2006/diagram" xmlns:o="urn:schemas-microsoft-com:office:office" xmlns:v="urn:schemas-microsoft-com:vml" xmlns:pvml="urn:schemas-microsoft-com:office:powerpoint" xmlns:com="http://schemas.openxmlformats.org/drawingml/2006/compatibility" xmlns:p14="http://schemas.microsoft.com/office/powerpoint/2010/main" xmlns:p15="http://schemas.microsoft.com/office/powerpoint/2012/main" xmlns:ahyp="http://schemas.microsoft.com/office/drawing/2018/hyperlinkcolor">
-  <p:cSld>
-    <p:spTree>
-      <p:nvGrpSpPr>
-        <p:cNvPr id="292" name="Shape 292"/>
-        <p:cNvGrpSpPr/>
-        <p:nvPr/>
-      </p:nvGrpSpPr>
-      <p:grpSpPr>
-        <a:xfrm>
-          <a:off x="0" y="0"/>
-          <a:ext cx="0" cy="0"/>
-          <a:chOff x="0" y="0"/>
-          <a:chExt cx="0" cy="0"/>
-        </a:xfrm>
-      </p:grpSpPr>
-      <p:sp>
-        <p:nvSpPr>
-          <p:cNvPr id="293" name="Google Shape;293;p45"/>
-          <p:cNvSpPr txBox="1"/>
-          <p:nvPr>
-            <p:ph type="title"/>
-          </p:nvPr>
-        </p:nvSpPr>
-        <p:spPr>
-          <a:xfrm>
-            <a:off x="311700" y="195615"/>
-            <a:ext cx="8520600" cy="572700"/>
-          </a:xfrm>
-          <a:prstGeom prst="rect">
-            <a:avLst/>
-          </a:prstGeom>
-        </p:spPr>
-        <p:txBody>
-          <a:bodyPr anchorCtr="0" anchor="t" bIns="91425" lIns="91425" spcFirstLastPara="1" rIns="91425" wrap="square" tIns="91425">
-            <a:normAutofit fontScale="90000"/>
-          </a:bodyPr>
-          <a:lstStyle/>
-          <a:p>
-            <a:pPr indent="0" lvl="0" marL="0" rtl="0" algn="l">
-              <a:spcBef>
-                <a:spcPts val="0"/>
-              </a:spcBef>
-              <a:spcAft>
-                <a:spcPts val="0"/>
-              </a:spcAft>
-              <a:buNone/>
-            </a:pPr>
-            <a:r>
-              <a:rPr lang="en">
-                <a:solidFill>
-                  <a:schemeClr val="accent5"/>
-                </a:solidFill>
-              </a:rPr>
-              <a:t>Exercises</a:t>
-            </a:r>
-            <a:endParaRPr>
-              <a:solidFill>
-                <a:schemeClr val="accent5"/>
-              </a:solidFill>
-            </a:endParaRPr>
-          </a:p>
-        </p:txBody>
-      </p:sp>
-      <p:sp>
-        <p:nvSpPr>
-          <p:cNvPr id="294" name="Google Shape;294;p45"/>
-          <p:cNvSpPr txBox="1"/>
-          <p:nvPr>
-            <p:ph idx="1" type="body"/>
-          </p:nvPr>
-        </p:nvSpPr>
-        <p:spPr>
-          <a:xfrm>
-            <a:off x="311700" y="885950"/>
-            <a:ext cx="8520600" cy="2057400"/>
-          </a:xfrm>
-          <a:prstGeom prst="rect">
-            <a:avLst/>
-          </a:prstGeom>
-        </p:spPr>
-        <p:txBody>
-          <a:bodyPr anchorCtr="0" anchor="t" bIns="91425" lIns="91425" spcFirstLastPara="1" rIns="91425" wrap="square" tIns="91425">
-            <a:normAutofit/>
-          </a:bodyPr>
-          <a:lstStyle/>
-          <a:p>
-            <a:pPr indent="-330200" lvl="0" marL="457200" rtl="0" algn="l">
-              <a:spcBef>
-                <a:spcPts val="0"/>
-              </a:spcBef>
-              <a:spcAft>
-                <a:spcPts val="0"/>
-              </a:spcAft>
-              <a:buSzPts val="1600"/>
-              <a:buChar char="●"/>
-            </a:pPr>
-            <a:r>
-              <a:rPr lang="en"/>
-              <a:t>Start from Snake9, the finished game</a:t>
-            </a:r>
-            <a:endParaRPr/>
-          </a:p>
-          <a:p>
-            <a:pPr indent="-330200" lvl="0" marL="457200" rtl="0" algn="l">
-              <a:spcBef>
-                <a:spcPts val="0"/>
-              </a:spcBef>
-              <a:spcAft>
-                <a:spcPts val="0"/>
-              </a:spcAft>
-              <a:buSzPts val="1600"/>
-              <a:buChar char="●"/>
-            </a:pPr>
-            <a:r>
-              <a:rPr lang="en"/>
-              <a:t>Speed up: make the tick shorter every time the snake eats</a:t>
-            </a:r>
-            <a:endParaRPr/>
-          </a:p>
-          <a:p>
-            <a:pPr indent="-330200" lvl="0" marL="457200" rtl="0" algn="l">
-              <a:spcBef>
-                <a:spcPts val="0"/>
-              </a:spcBef>
-              <a:spcAft>
-                <a:spcPts val="0"/>
-              </a:spcAft>
-              <a:buSzPts val="1600"/>
-              <a:buChar char="●"/>
-            </a:pPr>
-            <a:r>
-              <a:rPr lang="en"/>
-              <a:t>Where does that rule belong?</a:t>
-            </a:r>
-            <a:endParaRPr/>
-          </a:p>
-          <a:p>
-            <a:pPr indent="-330200" lvl="0" marL="457200" rtl="0" algn="l">
-              <a:spcBef>
-                <a:spcPts val="0"/>
-              </a:spcBef>
-              <a:spcAft>
-                <a:spcPts val="0"/>
-              </a:spcAft>
-              <a:buSzPts val="1600"/>
-              <a:buChar char="●"/>
-            </a:pPr>
-            <a:r>
-              <a:rPr lang="en"/>
-              <a:t>New input: the D-pad, through a GamePadInfo in GARCore</a:t>
-            </a:r>
-            <a:endParaRPr/>
-          </a:p>
-          <a:p>
-            <a:pPr indent="-330200" lvl="0" marL="457200" rtl="0" algn="l">
-              <a:spcBef>
-                <a:spcPts val="0"/>
-              </a:spcBef>
-              <a:spcAft>
-                <a:spcPts val="0"/>
-              </a:spcAft>
-              <a:buSzPts val="1600"/>
-              <a:buChar char="●"/>
-            </a:pPr>
-            <a:r>
-              <a:rPr lang="en"/>
-              <a:t>Pause: while paused, the snake doesn’t move and turns aren’t buffered</a:t>
-            </a:r>
-            <a:endParaRPr/>
-          </a:p>
-        </p:txBody>
-      </p:sp>
-    </p:spTree>
-  </p:cSld>
-  <p:clrMapOvr>
-    <a:masterClrMapping/>
-  </p:clrMapOvr>
-  <p:timing>
-    <p:tnLst>
-      <p:par>
-        <p:cTn dur="indefinite" nodeType="tmRoot" restart="never">
-          <p:childTnLst>
-            <p:seq concurrent="1" nextAc="seek">
-              <p:cTn dur="indefinite" id="2" nodeType="mainSeq">
-                <p:childTnLst>
-                  <p:par>
-                    <p:cTn fill="hold">
-                      <p:stCondLst>
-                        <p:cond delay="indefinite"/>
-                      </p:stCondLst>
-                      <p:childTnLst>
-                        <p:par>
-                          <p:cTn fill="hold">
-                            <p:stCondLst>
-                              <p:cond delay="0"/>
-                            </p:stCondLst>
-                            <p:childTnLst>
-                              <p:par>
-                                <p:cTn fill="hold" nodeType="clickEffect" presetClass="entr" presetID="1" presetSubtype="0">
-                                  <p:stCondLst>
-                                    <p:cond delay="0"/>
-                                  </p:stCondLst>
-                                  <p:childTnLst>
-                                    <p:set>
-                                      <p:cBhvr>
-                                        <p:cTn dur="1" fill="hold">
-                                          <p:stCondLst>
-                                            <p:cond delay="0"/>
-                                          </p:stCondLst>
-                                        </p:cTn>
-                                        <p:tgtEl>
-                                          <p:spTgt spid="294">
-                                            <p:txEl>
-                                              <p:pRg end="0" st="0"/>
-                                            </p:txEl>
-                                          </p:spTgt>
-                                        </p:tgtEl>
-                                        <p:attrNameLst>
-                                          <p:attrName>style.visibility</p:attrName>
-                                        </p:attrNameLst>
-                                      </p:cBhvr>
-                                      <p:to>
-                                        <p:strVal val="visible"/>
-                                      </p:to>
-                                    </p:set>
-                                  </p:childTnLst>
-                                </p:cTn>
-                              </p:par>
-                            </p:childTnLst>
-                          </p:cTn>
-                        </p:par>
-                      </p:childTnLst>
-                    </p:cTn>
-                  </p:par>
-                  <p:par>
-                    <p:cTn fill="hold">
-                      <p:stCondLst>
-                        <p:cond delay="indefinite"/>
-                      </p:stCondLst>
-                      <p:childTnLst>
-                        <p:par>
-                          <p:cTn fill="hold">
-                            <p:stCondLst>
-                              <p:cond delay="0"/>
-                            </p:stCondLst>
-                            <p:childTnLst>
-                              <p:par>
-                                <p:cTn fill="hold" nodeType="clickEffect" presetClass="entr" presetID="1" presetSubtype="0">
-                                  <p:stCondLst>
-                                    <p:cond delay="0"/>
-                                  </p:stCondLst>
-                                  <p:childTnLst>
-                                    <p:set>
-                                      <p:cBhvr>
-                                        <p:cTn dur="1" fill="hold">
-                                          <p:stCondLst>
-                                            <p:cond delay="0"/>
-                                          </p:stCondLst>
-                                        </p:cTn>
-                                        <p:tgtEl>
-                                          <p:spTgt spid="294">
-                                            <p:txEl>
-                                              <p:pRg end="1" st="1"/>
-                                            </p:txEl>
-                                          </p:spTgt>
-                                        </p:tgtEl>
-                                        <p:attrNameLst>
-                                          <p:attrName>style.visibility</p:attrName>
-                                        </p:attrNameLst>
-                                      </p:cBhvr>
-                                      <p:to>
-                                        <p:strVal val="visible"/>
-                                      </p:to>
-                                    </p:set>
-                                  </p:childTnLst>
-                                </p:cTn>
-                              </p:par>
-                            </p:childTnLst>
-                          </p:cTn>
-                        </p:par>
-                      </p:childTnLst>
-                    </p:cTn>
-                  </p:par>
-                  <p:par>
-                    <p:cTn fill="hold">
-                      <p:stCondLst>
-                        <p:cond delay="indefinite"/>
-                      </p:stCondLst>
-                      <p:childTnLst>
-                        <p:par>
-                          <p:cTn fill="hold">
-                            <p:stCondLst>
-                              <p:cond delay="0"/>
-                            </p:stCondLst>
-                            <p:childTnLst>
-                              <p:par>
-                                <p:cTn fill="hold" nodeType="clickEffect" presetClass="entr" presetID="1" presetSubtype="0">
-                                  <p:stCondLst>
-                                    <p:cond delay="0"/>
-                                  </p:stCondLst>
-                                  <p:childTnLst>
-                                    <p:set>
-                                      <p:cBhvr>
-                                        <p:cTn dur="1" fill="hold">
-                                          <p:stCondLst>
-                                            <p:cond delay="0"/>
-                                          </p:stCondLst>
-                                        </p:cTn>
-                                        <p:tgtEl>
-                                          <p:spTgt spid="294">
-                                            <p:txEl>
-                                              <p:pRg end="2" st="2"/>
-                                            </p:txEl>
-                                          </p:spTgt>
-                                        </p:tgtEl>
-                                        <p:attrNameLst>
-                                          <p:attrName>style.visibility</p:attrName>
-                                        </p:attrNameLst>
-                                      </p:cBhvr>
-                                      <p:to>
-                                        <p:strVal val="visible"/>
-                                      </p:to>
-                                    </p:set>
-                                  </p:childTnLst>
-                                </p:cTn>
-                              </p:par>
-                            </p:childTnLst>
-                          </p:cTn>
-                        </p:par>
-                      </p:childTnLst>
-                    </p:cTn>
-                  </p:par>
-                  <p:par>
-                    <p:cTn fill="hold">
-                      <p:stCondLst>
-                        <p:cond delay="indefinite"/>
-                      </p:stCondLst>
-                      <p:childTnLst>
-                        <p:par>
-                          <p:cTn fill="hold">
-                            <p:stCondLst>
-                              <p:cond delay="0"/>
-                            </p:stCondLst>
-                            <p:childTnLst>
-                              <p:par>
-                                <p:cTn fill="hold" nodeType="clickEffect" presetClass="entr" presetID="1" presetSubtype="0">
-                                  <p:stCondLst>
-                                    <p:cond delay="0"/>
-                                  </p:stCondLst>
-                                  <p:childTnLst>
-                                    <p:set>
-                                      <p:cBhvr>
-                                        <p:cTn dur="1" fill="hold">
-                                          <p:stCondLst>
-                                            <p:cond delay="0"/>
-                                          </p:stCondLst>
-                                        </p:cTn>
-                                        <p:tgtEl>
-                                          <p:spTgt spid="294">
-                                            <p:txEl>
-                                              <p:pRg end="3" st="3"/>
-                                            </p:txEl>
-                                          </p:spTgt>
-                                        </p:tgtEl>
-                                        <p:attrNameLst>
-                                          <p:attrName>style.visibility</p:attrName>
-                                        </p:attrNameLst>
-                                      </p:cBhvr>
-                                      <p:to>
-                                        <p:strVal val="visible"/>
-                                      </p:to>
-                                    </p:set>
-                                  </p:childTnLst>
-                                </p:cTn>
-                              </p:par>
-                            </p:childTnLst>
-                          </p:cTn>
-                        </p:par>
-                      </p:childTnLst>
-                    </p:cTn>
-                  </p:par>
-                  <p:par>
-                    <p:cTn fill="hold">
-                      <p:stCondLst>
-                        <p:cond delay="indefinite"/>
-                      </p:stCondLst>
-                      <p:childTnLst>
-                        <p:par>
-                          <p:cTn fill="hold">
-                            <p:stCondLst>
-                              <p:cond delay="0"/>
-                            </p:stCondLst>
-                            <p:childTnLst>
-                              <p:par>
-                                <p:cTn fill="hold" nodeType="clickEffect" presetClass="entr" presetID="1" presetSubtype="0">
-                                  <p:stCondLst>
-                                    <p:cond delay="0"/>
-                                  </p:stCondLst>
-                                  <p:childTnLst>
-                                    <p:set>
-                                      <p:cBhvr>
-                                        <p:cTn dur="1" fill="hold">
-                                          <p:stCondLst>
-                                            <p:cond delay="0"/>
-                                          </p:stCondLst>
-                                        </p:cTn>
-                                        <p:tgtEl>
-                                          <p:spTgt spid="294">
-                                            <p:txEl>
-                                              <p:pRg end="4" st="4"/>
-                                            </p:txEl>
-                                          </p:spTgt>
-                                        </p:tgtEl>
-                                        <p:attrNameLst>
-                                          <p:attrName>style.visibility</p:attrName>
-                                        </p:attrNameLst>
-                                      </p:cBhvr>
-                                      <p:to>
-                                        <p:strVal val="visible"/>
-                                      </p:to>
-                                    </p:set>
-                                  </p:childTnLst>
-                                </p:cTn>
-                              </p:par>
-                            </p:childTnLst>
-                          </p:cTn>
-                        </p:par>
-                      </p:childTnLst>
-                    </p:cTn>
-                  </p:par>
-                  <p:par>
-                    <p:cTn fill="hold">
-                      <p:stCondLst>
-                        <p:cond delay="indefinite"/>
-                      </p:stCondLst>
-                      <p:childTnLst>
-                        <p:par>
-                          <p:cTn fill="hold">
-                            <p:stCondLst>
-                              <p:cond delay="0"/>
-                            </p:stCondLst>
-                            <p:childTnLst>
-                              <p:par>
-                                <p:cTn fill="hold" nodeType="clickEffect" presetClass="entr" presetID="1" presetSubtype="0">
-                                  <p:stCondLst>
-                                    <p:cond delay="0"/>
-                                  </p:stCondLst>
-                                  <p:childTnLst>
-                                    <p:set>
-                                      <p:cBhvr>
-                                        <p:cTn dur="1" fill="hold">
-                                          <p:stCondLst>
-                                            <p:cond delay="0"/>
-                                          </p:stCondLst>
-                                        </p:cTn>
-                                        <p:tgtEl>
-                                          <p:spTgt spid="294">
-                                            <p:txEl>
-                                              <p:pRg end="5" st="5"/>
-                                            </p:txEl>
-                                          </p:spTgt>
-                                        </p:tgtEl>
-                                        <p:attrNameLst>
-                                          <p:attrName>style.visibility</p:attrName>
-                                        </p:attrNameLst>
-                                      </p:cBhvr>
-                                      <p:to>
-                                        <p:strVal val="visible"/>
-                                      </p:to>
-                                    </p:set>
-                                  </p:childTnLst>
-                                </p:cTn>
-                              </p:par>
-                            </p:childTnLst>
-                          </p:cTn>
-                        </p:par>
-                      </p:childTnLst>
-                    </p:cTn>
-                  </p:par>
-                  <p:par>
-                    <p:cTn fill="hold">
-                      <p:stCondLst>
-                        <p:cond delay="indefinite"/>
-                      </p:stCondLst>
-                      <p:childTnLst>
-                        <p:par>
-                          <p:cTn fill="hold">
-                            <p:stCondLst>
-                              <p:cond delay="0"/>
-                            </p:stCondLst>
-                            <p:childTnLst>
-                              <p:par>
-                                <p:cTn fill="hold" nodeType="clickEffect" presetClass="entr" presetID="1" presetSubtype="0">
-                                  <p:stCondLst>
-                                    <p:cond delay="0"/>
-                                  </p:stCondLst>
-                                  <p:childTnLst>
-                                    <p:set>
-                                      <p:cBhvr>
-                                        <p:cTn dur="1" fill="hold">
-                                          <p:stCondLst>
-                                            <p:cond delay="0"/>
-                                          </p:stCondLst>
-                                        </p:cTn>
-                                        <p:tgtEl>
-                                          <p:spTgt spid="294">
-                                            <p:txEl>
-                                              <p:pRg end="6" st="6"/>
-                                            </p:txEl>
-                                          </p:spTgt>
-                                        </p:tgtEl>
-                                        <p:attrNameLst>
-                                          <p:attrName>style.visibility</p:attrName>
-                                        </p:attrNameLst>
-                                      </p:cBhvr>
-                                      <p:to>
-                                        <p:strVal val="visible"/>
-                                      </p:to>
-                                    </p:set>
-                                  </p:childTnLst>
-                                </p:cTn>
-                              </p:par>
-                            </p:childTnLst>
-                          </p:cTn>
-                        </p:par>
-                      </p:childTnLst>
-                    </p:cTn>
-                  </p:par>
-                  <p:par>
-                    <p:cTn fill="hold">
-                      <p:stCondLst>
-                        <p:cond delay="indefinite"/>
-                      </p:stCondLst>
-                      <p:childTnLst>
-                        <p:par>
-                          <p:cTn fill="hold">
-                            <p:stCondLst>
-                              <p:cond delay="0"/>
-                            </p:stCondLst>
-                            <p:childTnLst>
-                              <p:par>
-                                <p:cTn fill="hold" nodeType="clickEffect" presetClass="entr" presetID="1" presetSubtype="0">
-                                  <p:stCondLst>
-                                    <p:cond delay="0"/>
-                                  </p:stCondLst>
-                                  <p:childTnLst>
-                                    <p:set>
-                                      <p:cBhvr>
-                                        <p:cTn dur="1" fill="hold">
-                                          <p:stCondLst>
-                                            <p:cond delay="0"/>
-                                          </p:stCondLst>
-                                        </p:cTn>
-                                        <p:tgtEl>
-                                          <p:spTgt spid="294">
-                                            <p:txEl>
-                                              <p:pRg end="7" st="7"/>
-                                            </p:txEl>
-                                          </p:spTgt>
-                                        </p:tgtEl>
-                                        <p:attrNameLst>
-                                          <p:attrName>style.visibility</p:attrName>
-                                        </p:attrNameLst>
-                                      </p:cBhvr>
-                                      <p:to>
-                                        <p:strVal val="visible"/>
-                                      </p:to>
-                                    </p:set>
-                                  </p:childTnLst>
-                                </p:cTn>
-                              </p:par>
-                            </p:childTnLst>
-                          </p:cTn>
-                        </p:par>
-                      </p:childTnLst>
-                    </p:cTn>
-                  </p:par>
-                  <p:par>
-                    <p:cTn fill="hold">
-                      <p:stCondLst>
-                        <p:cond delay="indefinite"/>
-                      </p:stCondLst>
-                      <p:childTnLst>
-                        <p:par>
-                          <p:cTn fill="hold">
-                            <p:stCondLst>
-                              <p:cond delay="0"/>
-                            </p:stCondLst>
-                            <p:childTnLst>
-                              <p:par>
-                                <p:cTn fill="hold" nodeType="clickEffect" presetClass="entr" presetID="1" presetSubtype="0">
-                                  <p:stCondLst>
-                                    <p:cond delay="0"/>
-                                  </p:stCondLst>
-                                  <p:childTnLst>
-                                    <p:set>
-                                      <p:cBhvr>
-                                        <p:cTn dur="1" fill="hold">
-                                          <p:stCondLst>
-                                            <p:cond delay="0"/>
-                                          </p:stCondLst>
-                                        </p:cTn>
-                                        <p:tgtEl>
-                                          <p:spTgt spid="294">
-                                            <p:txEl>
-                                              <p:pRg end="8" st="8"/>
-                                            </p:txEl>
-                                          </p:spTgt>
-                                        </p:tgtEl>
-                                        <p:attrNameLst>
-                                          <p:attrName>style.visibility</p:attrName>
-                                        </p:attrNameLst>
-                                      </p:cBhvr>
-                                      <p:to>
-                                        <p:strVal val="visible"/>
-                                      </p:to>
-                                    </p:set>
-                                  </p:childTnLst>
-                                </p:cTn>
-                              </p:par>
-                            </p:childTnLst>
-                          </p:cTn>
-                        </p:par>
-                      </p:childTnLst>
-                    </p:cTn>
-                  </p:par>
-                  <p:par>
-                    <p:cTn fill="hold">
-                      <p:stCondLst>
-                        <p:cond delay="indefinite"/>
-                      </p:stCondLst>
-                      <p:childTnLst>
-                        <p:par>
-                          <p:cTn fill="hold">
-                            <p:stCondLst>
-                              <p:cond delay="0"/>
-                            </p:stCondLst>
-                            <p:childTnLst>
-                              <p:par>
-                                <p:cTn fill="hold" nodeType="clickEffect" presetClass="entr" presetID="1" presetSubtype="0">
-                                  <p:stCondLst>
-                                    <p:cond delay="0"/>
-                                  </p:stCondLst>
-                                  <p:childTnLst>
-                                    <p:set>
-                                      <p:cBhvr>
-                                        <p:cTn dur="1" fill="hold">
-                                          <p:stCondLst>
-                                            <p:cond delay="0"/>
-                                          </p:stCondLst>
-                                        </p:cTn>
-                                        <p:tgtEl>
-                                          <p:spTgt spid="294">
-                                            <p:txEl>
-                                              <p:pRg end="9" st="9"/>
-                                            </p:txEl>
-                                          </p:spTgt>
-                                        </p:tgtEl>
-                                        <p:attrNameLst>
-                                          <p:attrName>style.visibility</p:attrName>
-                                        </p:attrNameLst>
-                                      </p:cBhvr>
-                                      <p:to>
-                                        <p:strVal val="visible"/>
-                                      </p:to>
-                                    </p:set>
-                                  </p:childTnLst>
-                                </p:cTn>
-                              </p:par>
-                            </p:childTnLst>
-                          </p:cTn>
-                        </p:par>
-                      </p:childTnLst>
-                    </p:cTn>
-                  </p:par>
-                  <p:par>
-                    <p:cTn fill="hold">
-                      <p:stCondLst>
-                        <p:cond delay="indefinite"/>
-                      </p:stCondLst>
-                      <p:childTnLst>
-                        <p:par>
-                          <p:cTn fill="hold">
-                            <p:stCondLst>
-                              <p:cond delay="0"/>
-                            </p:stCondLst>
-                            <p:childTnLst>
-                              <p:par>
-                                <p:cTn fill="hold" nodeType="clickEffect" presetClass="entr" presetID="1" presetSubtype="0">
-                                  <p:stCondLst>
-                                    <p:cond delay="0"/>
-                                  </p:stCondLst>
-                                  <p:childTnLst>
-                                    <p:set>
-                                      <p:cBhvr>
-                                        <p:cTn dur="1" fill="hold">
-                                          <p:stCondLst>
-                                            <p:cond delay="0"/>
-                                          </p:stCondLst>
-                                        </p:cTn>
-                                        <p:tgtEl>
-                                          <p:spTgt spid="294">
-                                            <p:txEl>
-                                              <p:pRg end="10" st="10"/>
-                                            </p:txEl>
-                                          </p:spTgt>
-                                        </p:tgtEl>
-                                        <p:attrNameLst>
-                                          <p:attrName>style.visibility</p:attrName>
-                                        </p:attrNameLst>
-                                      </p:cBhvr>
-                                      <p:to>
-                                        <p:strVal val="visible"/>
-                                      </p:to>
-                                    </p:set>
-                                  </p:childTnLst>
-                                </p:cTn>
-                              </p:par>
-                            </p:childTnLst>
-                          </p:cTn>
-                        </p:par>
-                      </p:childTnLst>
-                    </p:cTn>
-                  </p:par>
-                  <p:par>
-                    <p:cTn fill="hold">
-                      <p:stCondLst>
-                        <p:cond delay="indefinite"/>
-                      </p:stCondLst>
-                      <p:childTnLst>
-                        <p:par>
-                          <p:cTn fill="hold">
-                            <p:stCondLst>
-                              <p:cond delay="0"/>
-                            </p:stCondLst>
-                            <p:childTnLst>
-                              <p:par>
-                                <p:cTn fill="hold" nodeType="clickEffect" presetClass="entr" presetID="1" presetSubtype="0">
-                                  <p:stCondLst>
-                                    <p:cond delay="0"/>
-                                  </p:stCondLst>
-                                  <p:childTnLst>
-                                    <p:set>
-                                      <p:cBhvr>
-                                        <p:cTn dur="1" fill="hold">
-                                          <p:stCondLst>
-                                            <p:cond delay="0"/>
-                                          </p:stCondLst>
-                                        </p:cTn>
-                                        <p:tgtEl>
-                                          <p:spTgt spid="294">
-                                            <p:txEl>
-                                              <p:pRg end="11" st="11"/>
-                                            </p:txEl>
-                                          </p:spTgt>
-                                        </p:tgtEl>
-                                        <p:attrNameLst>
-                                          <p:attrName>style.visibility</p:attrName>
-                                        </p:attrNameLst>
-                                      </p:cBhvr>
-                                      <p:to>
-                                        <p:strVal val="visible"/>
-                                      </p:to>
-                                    </p:set>
-                                  </p:childTnLst>
-                                </p:cTn>
-                              </p:par>
-                            </p:childTnLst>
-                          </p:cTn>
-                        </p:par>
-                      </p:childTnLst>
-                    </p:cTn>
-                  </p:par>
-                  <p:par>
-                    <p:cTn fill="hold">
-                      <p:stCondLst>
-                        <p:cond delay="indefinite"/>
-                      </p:stCondLst>
-                      <p:childTnLst>
-                        <p:par>
-                          <p:cTn fill="hold">
-                            <p:stCondLst>
-                              <p:cond delay="0"/>
-                            </p:stCondLst>
-                            <p:childTnLst>
-                              <p:par>
-                                <p:cTn fill="hold" nodeType="clickEffect" presetClass="entr" presetID="1" presetSubtype="0">
-                                  <p:stCondLst>
-                                    <p:cond delay="0"/>
-                                  </p:stCondLst>
-                                  <p:childTnLst>
-                                    <p:set>
-                                      <p:cBhvr>
-                                        <p:cTn dur="1" fill="hold">
-                                          <p:stCondLst>
-                                            <p:cond delay="0"/>
-                                          </p:stCondLst>
-                                        </p:cTn>
-                                        <p:tgtEl>
-                                          <p:spTgt spid="294">
-                                            <p:txEl>
-                                              <p:pRg end="12" st="12"/>
-                                            </p:txEl>
-                                          </p:spTgt>
-                                        </p:tgtEl>
-                                        <p:attrNameLst>
-                                          <p:attrName>style.visibility</p:attrName>
-                                        </p:attrNameLst>
-                                      </p:cBhvr>
-                                      <p:to>
-                                        <p:strVal val="visible"/>
-                                      </p:to>
-                                    </p:set>
-                                  </p:childTnLst>
-                                </p:cTn>
-                              </p:par>
-                            </p:childTnLst>
-                          </p:cTn>
-                        </p:par>
-                      </p:childTnLst>
-                    </p:cTn>
-                  </p:par>
-                </p:childTnLst>
-              </p:cTn>
-              <p:prevCondLst>
-                <p:cond evt="onPrev">
-                  <p:tgtEl>
-                    <p:sldTgt/>
-                  </p:tgtEl>
-                </p:cond>
-              </p:prevCondLst>
-              <p:nextCondLst>
-                <p:cond evt="onNext">
-                  <p:tgtEl>
-                    <p:sldTgt/>
-                  </p:tgtEl>
-                </p:cond>
-              </p:nextCondLst>
-            </p:seq>
-          </p:childTnLst>
-        </p:cTn>
-      </p:par>
-    </p:tnLst>
-  </p:timing>
-</p:sld>
-</file>
-
 <file path=ppt/slides/slide38.xml><?xml version="1.0" encoding="utf-8"?>
 <p:sld xmlns:a="http://schemas.openxmlformats.org/drawingml/2006/main" xmlns:r="http://schemas.openxmlformats.org/officeDocument/2006/relationships" xmlns:mc="http://schemas.openxmlformats.org/markup-compatibility/2006" xmlns:mv="urn:schemas-microsoft-com:mac:vml" xmlns:p="http://schemas.openxmlformats.org/presentationml/2006/main" xmlns:c="http://schemas.openxmlformats.org/drawingml/2006/chart" xmlns:dgm="http://schemas.openxmlformats.org/drawingml/2006/diagram" xmlns:o="urn:schemas-microsoft-com:office:office" xmlns:v="urn:schemas-microsoft-com:vml" xmlns:pvml="urn:schemas-microsoft-com:office:powerpoint" xmlns:com="http://schemas.openxmlformats.org/drawingml/2006/compatibility" xmlns:p14="http://schemas.microsoft.com/office/powerpoint/2010/main" xmlns:p15="http://schemas.microsoft.com/office/powerpoint/2012/main" xmlns:ahyp="http://schemas.microsoft.com/office/drawing/2018/hyperlinkcolor">
   <p:cSld>
@@ -17963,7 +16895,7 @@
                   <a:schemeClr val="accent5"/>
                 </a:solidFill>
               </a:rPr>
-              <a:t>Exercise: Refactor (Stretch)</a:t>
+              <a:t>Exercises</a:t>
             </a:r>
             <a:endParaRPr>
               <a:solidFill>
@@ -17984,7 +16916,7 @@
         <p:spPr>
           <a:xfrm>
             <a:off x="311700" y="885950"/>
-            <a:ext cx="8520600" cy="4023300"/>
+            <a:ext cx="8520600" cy="2057400"/>
           </a:xfrm>
           <a:prstGeom prst="rect">
             <a:avLst/>
@@ -18008,7 +16940,7 @@
             </a:pPr>
             <a:r>
               <a:rPr lang="en"/>
-              <a:t>The tick timer lives in the Snake class</a:t>
+              <a:t>Start from Snake9, the finished game</a:t>
             </a:r>
             <a:endParaRPr/>
           </a:p>
@@ -18025,24 +16957,7 @@
             </a:pPr>
             <a:r>
               <a:rPr lang="en"/>
-              <a:t>Move it into a reusable FixedTimer class in GARCore</a:t>
-            </a:r>
-            <a:endParaRPr/>
-          </a:p>
-          <a:p>
-            <a:pPr indent="-317500" lvl="1" marL="914400" rtl="0" algn="l">
-              <a:spcBef>
-                <a:spcPts val="0"/>
-              </a:spcBef>
-              <a:spcAft>
-                <a:spcPts val="0"/>
-              </a:spcAft>
-              <a:buSzPts val="1400"/>
-              <a:buChar char="○"/>
-            </a:pPr>
-            <a:r>
-              <a:rPr lang="en"/>
-              <a:t>It calls back on every tick</a:t>
+              <a:t>Speed up: make the tick shorter every time the snake eats</a:t>
             </a:r>
             <a:endParaRPr/>
           </a:p>
@@ -18059,7 +16974,41 @@
             </a:pPr>
             <a:r>
               <a:rPr lang="en"/>
-              <a:t>Use it for the snake</a:t>
+              <a:t>Where does that rule belong?</a:t>
+            </a:r>
+            <a:endParaRPr/>
+          </a:p>
+          <a:p>
+            <a:pPr indent="-330200" lvl="0" marL="457200" rtl="0" algn="l">
+              <a:spcBef>
+                <a:spcPts val="0"/>
+              </a:spcBef>
+              <a:spcAft>
+                <a:spcPts val="0"/>
+              </a:spcAft>
+              <a:buSzPts val="1600"/>
+              <a:buChar char="●"/>
+            </a:pPr>
+            <a:r>
+              <a:rPr lang="en"/>
+              <a:t>New input: the D-pad, through a GamePadInfo in GARCore</a:t>
+            </a:r>
+            <a:endParaRPr/>
+          </a:p>
+          <a:p>
+            <a:pPr indent="-330200" lvl="0" marL="457200" rtl="0" algn="l">
+              <a:spcBef>
+                <a:spcPts val="0"/>
+              </a:spcBef>
+              <a:spcAft>
+                <a:spcPts val="0"/>
+              </a:spcAft>
+              <a:buSzPts val="1600"/>
+              <a:buChar char="●"/>
+            </a:pPr>
+            <a:r>
+              <a:rPr lang="en"/>
+              <a:t>Pause: while paused, the snake doesn’t move and turns aren’t buffered</a:t>
             </a:r>
             <a:endParaRPr/>
           </a:p>
@@ -18741,28 +17690,43 @@
 </file>
 
 <file path=ppt/slides/slide39.xml><?xml version="1.0" encoding="utf-8"?>
-<p:sld xmlns:a="http://schemas.openxmlformats.org/drawingml/2006/main" xmlns:p="http://schemas.openxmlformats.org/presentationml/2006/main" xmlns:r="http://schemas.openxmlformats.org/officeDocument/2006/relationships">
+<p:sld xmlns:a="http://schemas.openxmlformats.org/drawingml/2006/main" xmlns:r="http://schemas.openxmlformats.org/officeDocument/2006/relationships" xmlns:mc="http://schemas.openxmlformats.org/markup-compatibility/2006" xmlns:mv="urn:schemas-microsoft-com:mac:vml" xmlns:p="http://schemas.openxmlformats.org/presentationml/2006/main" xmlns:c="http://schemas.openxmlformats.org/drawingml/2006/chart" xmlns:dgm="http://schemas.openxmlformats.org/drawingml/2006/diagram" xmlns:o="urn:schemas-microsoft-com:office:office" xmlns:v="urn:schemas-microsoft-com:vml" xmlns:pvml="urn:schemas-microsoft-com:office:powerpoint" xmlns:com="http://schemas.openxmlformats.org/drawingml/2006/compatibility" xmlns:p14="http://schemas.microsoft.com/office/powerpoint/2010/main" xmlns:p15="http://schemas.microsoft.com/office/powerpoint/2012/main" xmlns:ahyp="http://schemas.microsoft.com/office/drawing/2018/hyperlinkcolor">
   <p:cSld>
     <p:spTree>
       <p:nvGrpSpPr>
-        <p:cNvPr id="1" name=""/>
+        <p:cNvPr id="292" name="Shape 292"/>
         <p:cNvGrpSpPr/>
         <p:nvPr/>
       </p:nvGrpSpPr>
-      <p:grpSpPr/>
+      <p:grpSpPr>
+        <a:xfrm>
+          <a:off x="0" y="0"/>
+          <a:ext cx="0" cy="0"/>
+          <a:chOff x="0" y="0"/>
+          <a:chExt cx="0" cy="0"/>
+        </a:xfrm>
+      </p:grpSpPr>
       <p:sp>
         <p:nvSpPr>
-          <p:cNvPr id="2" name="Title 1"/>
-          <p:cNvSpPr>
-            <a:spLocks noGrp="1"/>
-          </p:cNvSpPr>
+          <p:cNvPr id="293" name="Google Shape;293;p45"/>
+          <p:cNvSpPr txBox="1"/>
           <p:nvPr>
             <p:ph type="title"/>
           </p:nvPr>
         </p:nvSpPr>
-        <p:spPr/>
+        <p:spPr>
+          <a:xfrm>
+            <a:off x="311700" y="195615"/>
+            <a:ext cx="8520600" cy="572700"/>
+          </a:xfrm>
+          <a:prstGeom prst="rect">
+            <a:avLst/>
+          </a:prstGeom>
+        </p:spPr>
         <p:txBody>
-          <a:bodyPr/>
+          <a:bodyPr anchorCtr="0" anchor="t" bIns="91425" lIns="91425" spcFirstLastPara="1" rIns="91425" wrap="square" tIns="91425">
+            <a:normAutofit fontScale="90000"/>
+          </a:bodyPr>
           <a:lstStyle/>
           <a:p>
             <a:pPr indent="0" lvl="0" marL="0" rtl="0" algn="l">
@@ -18775,133 +17739,110 @@
               <a:buNone/>
             </a:pPr>
             <a:r>
-              <a:rPr lang="en"/>
-              <a:t>Check Yourself</a:t>
-            </a:r>
-            <a:endParaRPr/>
+              <a:rPr lang="en">
+                <a:solidFill>
+                  <a:schemeClr val="accent5"/>
+                </a:solidFill>
+              </a:rPr>
+              <a:t>Exercise: Refactor (Stretch)</a:t>
+            </a:r>
+            <a:endParaRPr>
+              <a:solidFill>
+                <a:schemeClr val="accent5"/>
+              </a:solidFill>
+            </a:endParaRPr>
           </a:p>
         </p:txBody>
       </p:sp>
       <p:sp>
         <p:nvSpPr>
-          <p:cNvPr id="3" name="Text Placeholder 2"/>
-          <p:cNvSpPr>
-            <a:spLocks noGrp="1"/>
-          </p:cNvSpPr>
+          <p:cNvPr id="294" name="Google Shape;294;p45"/>
+          <p:cNvSpPr txBox="1"/>
           <p:nvPr>
-            <p:ph type="body" idx="1"/>
+            <p:ph idx="1" type="body"/>
           </p:nvPr>
         </p:nvSpPr>
         <p:spPr>
           <a:xfrm>
             <a:off x="311700" y="885950"/>
-            <a:ext cx="8520600" cy="1719072"/>
-          </a:xfrm>
-        </p:spPr>
-        <p:txBody>
-          <a:bodyPr/>
-          <a:lstStyle/>
-          <a:p>
-            <a:pPr indent="-330200" lvl="0" marL="457200" rtl="0" algn="l">
-              <a:spcBef>
-                <a:spcPts val="0"/>
-              </a:spcBef>
-              <a:spcAft>
-                <a:spcPts val="0"/>
-              </a:spcAft>
-              <a:buSzPts val="1600"/>
-              <a:buChar char="●"/>
-            </a:pPr>
-            <a:r>
-              <a:rPr lang="en"/>
-              <a:t>Why prefer a texture atlas over many individual image files?</a:t>
-            </a:r>
-            <a:endParaRPr/>
-          </a:p>
-          <a:p>
-            <a:pPr indent="-330200" lvl="0" marL="457200" rtl="0" algn="l">
-              <a:spcBef>
-                <a:spcPts val="0"/>
-              </a:spcBef>
-              <a:spcAft>
-                <a:spcPts val="0"/>
-              </a:spcAft>
-              <a:buSzPts val="1600"/>
-              <a:buChar char="●"/>
-            </a:pPr>
-            <a:r>
-              <a:rPr lang="en"/>
-              <a:t>Why subtract the tick duration from the accumulator instead of resetting it?</a:t>
-            </a:r>
-            <a:endParaRPr/>
-          </a:p>
-          <a:p>
-            <a:pPr indent="-330200" lvl="0" marL="457200" rtl="0" algn="l">
-              <a:spcBef>
-                <a:spcPts val="0"/>
-              </a:spcBef>
-              <a:spcAft>
-                <a:spcPts val="0"/>
-              </a:spcAft>
-              <a:buSzPts val="1600"/>
-              <a:buChar char="●"/>
-            </a:pPr>
-            <a:r>
-              <a:rPr lang="en"/>
-              <a:t>What problems come from reading the keyboard inside gameplay code?</a:t>
-            </a:r>
-            <a:endParaRPr/>
-          </a:p>
-          <a:p>
-            <a:pPr indent="-330200" lvl="0" marL="457200" rtl="0" algn="l">
-              <a:spcBef>
-                <a:spcPts val="0"/>
-              </a:spcBef>
-              <a:spcAft>
-                <a:spcPts val="0"/>
-              </a:spcAft>
-              <a:buSzPts val="1600"/>
-              <a:buChar char="●"/>
-            </a:pPr>
-            <a:r>
-              <a:rPr lang="en"/>
-              <a:t>Why check a buffered turn against the last buffered direction?</a:t>
-            </a:r>
-            <a:endParaRPr/>
-          </a:p>
-        </p:txBody>
-      </p:sp>
-      <p:sp>
-        <p:nvSpPr>
-          <p:cNvPr id="4" name="TextBox 3"/>
-          <p:cNvSpPr txBox="1"/>
-          <p:nvPr/>
-        </p:nvSpPr>
-        <p:spPr>
-          <a:xfrm>
-            <a:off x="457200" y="3182112"/>
-            <a:ext cx="8229600" cy="457200"/>
+            <a:ext cx="8520600" cy="4023300"/>
           </a:xfrm>
           <a:prstGeom prst="rect">
             <a:avLst/>
           </a:prstGeom>
-          <a:noFill/>
         </p:spPr>
         <p:txBody>
-          <a:bodyPr wrap="square">
-            <a:spAutoFit/>
+          <a:bodyPr anchorCtr="0" anchor="t" bIns="91425" lIns="91425" spcFirstLastPara="1" rIns="91425" wrap="square" tIns="91425">
+            <a:normAutofit/>
           </a:bodyPr>
           <a:lstStyle/>
           <a:p>
-            <a:pPr algn="ctr"/>
-            <a:r>
-              <a:rPr sz="1400" b="0" i="0">
-                <a:solidFill>
-                  <a:srgbClr val="9AA3AB"/>
-                </a:solidFill>
-              </a:rPr>
-              <a:t>The answers, and more questions, are on the course site.</a:t>
-            </a:r>
+            <a:pPr indent="-330200" lvl="0" marL="457200" rtl="0" algn="l">
+              <a:spcBef>
+                <a:spcPts val="0"/>
+              </a:spcBef>
+              <a:spcAft>
+                <a:spcPts val="0"/>
+              </a:spcAft>
+              <a:buSzPts val="1600"/>
+              <a:buChar char="●"/>
+            </a:pPr>
+            <a:r>
+              <a:rPr lang="en"/>
+              <a:t>The tick timer lives in the Snake class</a:t>
+            </a:r>
+            <a:endParaRPr/>
+          </a:p>
+          <a:p>
+            <a:pPr indent="-330200" lvl="0" marL="457200" rtl="0" algn="l">
+              <a:spcBef>
+                <a:spcPts val="0"/>
+              </a:spcBef>
+              <a:spcAft>
+                <a:spcPts val="0"/>
+              </a:spcAft>
+              <a:buSzPts val="1600"/>
+              <a:buChar char="●"/>
+            </a:pPr>
+            <a:r>
+              <a:rPr lang="en"/>
+              <a:t>Move it into a reusable FixedTimer class in GARCore</a:t>
+            </a:r>
+            <a:endParaRPr/>
+          </a:p>
+          <a:p>
+            <a:pPr indent="-317500" lvl="1" marL="914400" rtl="0" algn="l">
+              <a:spcBef>
+                <a:spcPts val="0"/>
+              </a:spcBef>
+              <a:spcAft>
+                <a:spcPts val="0"/>
+              </a:spcAft>
+              <a:buSzPts val="1400"/>
+              <a:buChar char="○"/>
+            </a:pPr>
+            <a:r>
+              <a:rPr lang="en"/>
+              <a:t>It calls back on every tick</a:t>
+            </a:r>
+            <a:endParaRPr/>
+          </a:p>
+          <a:p>
+            <a:pPr indent="-330200" lvl="0" marL="457200" rtl="0" algn="l">
+              <a:spcBef>
+                <a:spcPts val="0"/>
+              </a:spcBef>
+              <a:spcAft>
+                <a:spcPts val="0"/>
+              </a:spcAft>
+              <a:buSzPts val="1600"/>
+              <a:buChar char="●"/>
+            </a:pPr>
+            <a:r>
+              <a:rPr lang="en"/>
+              <a:t>Use it for the snake</a:t>
+            </a:r>
+            <a:endParaRPr/>
           </a:p>
         </p:txBody>
       </p:sp>
@@ -18910,6 +17851,673 @@
   <p:clrMapOvr>
     <a:masterClrMapping/>
   </p:clrMapOvr>
+  <p:timing>
+    <p:tnLst>
+      <p:par>
+        <p:cTn dur="indefinite" nodeType="tmRoot" restart="never">
+          <p:childTnLst>
+            <p:seq concurrent="1" nextAc="seek">
+              <p:cTn dur="indefinite" id="2" nodeType="mainSeq">
+                <p:childTnLst>
+                  <p:par>
+                    <p:cTn fill="hold">
+                      <p:stCondLst>
+                        <p:cond delay="indefinite"/>
+                      </p:stCondLst>
+                      <p:childTnLst>
+                        <p:par>
+                          <p:cTn fill="hold">
+                            <p:stCondLst>
+                              <p:cond delay="0"/>
+                            </p:stCondLst>
+                            <p:childTnLst>
+                              <p:par>
+                                <p:cTn fill="hold" nodeType="clickEffect" presetClass="entr" presetID="1" presetSubtype="0">
+                                  <p:stCondLst>
+                                    <p:cond delay="0"/>
+                                  </p:stCondLst>
+                                  <p:childTnLst>
+                                    <p:set>
+                                      <p:cBhvr>
+                                        <p:cTn dur="1" fill="hold">
+                                          <p:stCondLst>
+                                            <p:cond delay="0"/>
+                                          </p:stCondLst>
+                                        </p:cTn>
+                                        <p:tgtEl>
+                                          <p:spTgt spid="294">
+                                            <p:txEl>
+                                              <p:pRg end="0" st="0"/>
+                                            </p:txEl>
+                                          </p:spTgt>
+                                        </p:tgtEl>
+                                        <p:attrNameLst>
+                                          <p:attrName>style.visibility</p:attrName>
+                                        </p:attrNameLst>
+                                      </p:cBhvr>
+                                      <p:to>
+                                        <p:strVal val="visible"/>
+                                      </p:to>
+                                    </p:set>
+                                  </p:childTnLst>
+                                </p:cTn>
+                              </p:par>
+                            </p:childTnLst>
+                          </p:cTn>
+                        </p:par>
+                      </p:childTnLst>
+                    </p:cTn>
+                  </p:par>
+                  <p:par>
+                    <p:cTn fill="hold">
+                      <p:stCondLst>
+                        <p:cond delay="indefinite"/>
+                      </p:stCondLst>
+                      <p:childTnLst>
+                        <p:par>
+                          <p:cTn fill="hold">
+                            <p:stCondLst>
+                              <p:cond delay="0"/>
+                            </p:stCondLst>
+                            <p:childTnLst>
+                              <p:par>
+                                <p:cTn fill="hold" nodeType="clickEffect" presetClass="entr" presetID="1" presetSubtype="0">
+                                  <p:stCondLst>
+                                    <p:cond delay="0"/>
+                                  </p:stCondLst>
+                                  <p:childTnLst>
+                                    <p:set>
+                                      <p:cBhvr>
+                                        <p:cTn dur="1" fill="hold">
+                                          <p:stCondLst>
+                                            <p:cond delay="0"/>
+                                          </p:stCondLst>
+                                        </p:cTn>
+                                        <p:tgtEl>
+                                          <p:spTgt spid="294">
+                                            <p:txEl>
+                                              <p:pRg end="1" st="1"/>
+                                            </p:txEl>
+                                          </p:spTgt>
+                                        </p:tgtEl>
+                                        <p:attrNameLst>
+                                          <p:attrName>style.visibility</p:attrName>
+                                        </p:attrNameLst>
+                                      </p:cBhvr>
+                                      <p:to>
+                                        <p:strVal val="visible"/>
+                                      </p:to>
+                                    </p:set>
+                                  </p:childTnLst>
+                                </p:cTn>
+                              </p:par>
+                            </p:childTnLst>
+                          </p:cTn>
+                        </p:par>
+                      </p:childTnLst>
+                    </p:cTn>
+                  </p:par>
+                  <p:par>
+                    <p:cTn fill="hold">
+                      <p:stCondLst>
+                        <p:cond delay="indefinite"/>
+                      </p:stCondLst>
+                      <p:childTnLst>
+                        <p:par>
+                          <p:cTn fill="hold">
+                            <p:stCondLst>
+                              <p:cond delay="0"/>
+                            </p:stCondLst>
+                            <p:childTnLst>
+                              <p:par>
+                                <p:cTn fill="hold" nodeType="clickEffect" presetClass="entr" presetID="1" presetSubtype="0">
+                                  <p:stCondLst>
+                                    <p:cond delay="0"/>
+                                  </p:stCondLst>
+                                  <p:childTnLst>
+                                    <p:set>
+                                      <p:cBhvr>
+                                        <p:cTn dur="1" fill="hold">
+                                          <p:stCondLst>
+                                            <p:cond delay="0"/>
+                                          </p:stCondLst>
+                                        </p:cTn>
+                                        <p:tgtEl>
+                                          <p:spTgt spid="294">
+                                            <p:txEl>
+                                              <p:pRg end="2" st="2"/>
+                                            </p:txEl>
+                                          </p:spTgt>
+                                        </p:tgtEl>
+                                        <p:attrNameLst>
+                                          <p:attrName>style.visibility</p:attrName>
+                                        </p:attrNameLst>
+                                      </p:cBhvr>
+                                      <p:to>
+                                        <p:strVal val="visible"/>
+                                      </p:to>
+                                    </p:set>
+                                  </p:childTnLst>
+                                </p:cTn>
+                              </p:par>
+                            </p:childTnLst>
+                          </p:cTn>
+                        </p:par>
+                      </p:childTnLst>
+                    </p:cTn>
+                  </p:par>
+                  <p:par>
+                    <p:cTn fill="hold">
+                      <p:stCondLst>
+                        <p:cond delay="indefinite"/>
+                      </p:stCondLst>
+                      <p:childTnLst>
+                        <p:par>
+                          <p:cTn fill="hold">
+                            <p:stCondLst>
+                              <p:cond delay="0"/>
+                            </p:stCondLst>
+                            <p:childTnLst>
+                              <p:par>
+                                <p:cTn fill="hold" nodeType="clickEffect" presetClass="entr" presetID="1" presetSubtype="0">
+                                  <p:stCondLst>
+                                    <p:cond delay="0"/>
+                                  </p:stCondLst>
+                                  <p:childTnLst>
+                                    <p:set>
+                                      <p:cBhvr>
+                                        <p:cTn dur="1" fill="hold">
+                                          <p:stCondLst>
+                                            <p:cond delay="0"/>
+                                          </p:stCondLst>
+                                        </p:cTn>
+                                        <p:tgtEl>
+                                          <p:spTgt spid="294">
+                                            <p:txEl>
+                                              <p:pRg end="3" st="3"/>
+                                            </p:txEl>
+                                          </p:spTgt>
+                                        </p:tgtEl>
+                                        <p:attrNameLst>
+                                          <p:attrName>style.visibility</p:attrName>
+                                        </p:attrNameLst>
+                                      </p:cBhvr>
+                                      <p:to>
+                                        <p:strVal val="visible"/>
+                                      </p:to>
+                                    </p:set>
+                                  </p:childTnLst>
+                                </p:cTn>
+                              </p:par>
+                            </p:childTnLst>
+                          </p:cTn>
+                        </p:par>
+                      </p:childTnLst>
+                    </p:cTn>
+                  </p:par>
+                  <p:par>
+                    <p:cTn fill="hold">
+                      <p:stCondLst>
+                        <p:cond delay="indefinite"/>
+                      </p:stCondLst>
+                      <p:childTnLst>
+                        <p:par>
+                          <p:cTn fill="hold">
+                            <p:stCondLst>
+                              <p:cond delay="0"/>
+                            </p:stCondLst>
+                            <p:childTnLst>
+                              <p:par>
+                                <p:cTn fill="hold" nodeType="clickEffect" presetClass="entr" presetID="1" presetSubtype="0">
+                                  <p:stCondLst>
+                                    <p:cond delay="0"/>
+                                  </p:stCondLst>
+                                  <p:childTnLst>
+                                    <p:set>
+                                      <p:cBhvr>
+                                        <p:cTn dur="1" fill="hold">
+                                          <p:stCondLst>
+                                            <p:cond delay="0"/>
+                                          </p:stCondLst>
+                                        </p:cTn>
+                                        <p:tgtEl>
+                                          <p:spTgt spid="294">
+                                            <p:txEl>
+                                              <p:pRg end="4" st="4"/>
+                                            </p:txEl>
+                                          </p:spTgt>
+                                        </p:tgtEl>
+                                        <p:attrNameLst>
+                                          <p:attrName>style.visibility</p:attrName>
+                                        </p:attrNameLst>
+                                      </p:cBhvr>
+                                      <p:to>
+                                        <p:strVal val="visible"/>
+                                      </p:to>
+                                    </p:set>
+                                  </p:childTnLst>
+                                </p:cTn>
+                              </p:par>
+                            </p:childTnLst>
+                          </p:cTn>
+                        </p:par>
+                      </p:childTnLst>
+                    </p:cTn>
+                  </p:par>
+                  <p:par>
+                    <p:cTn fill="hold">
+                      <p:stCondLst>
+                        <p:cond delay="indefinite"/>
+                      </p:stCondLst>
+                      <p:childTnLst>
+                        <p:par>
+                          <p:cTn fill="hold">
+                            <p:stCondLst>
+                              <p:cond delay="0"/>
+                            </p:stCondLst>
+                            <p:childTnLst>
+                              <p:par>
+                                <p:cTn fill="hold" nodeType="clickEffect" presetClass="entr" presetID="1" presetSubtype="0">
+                                  <p:stCondLst>
+                                    <p:cond delay="0"/>
+                                  </p:stCondLst>
+                                  <p:childTnLst>
+                                    <p:set>
+                                      <p:cBhvr>
+                                        <p:cTn dur="1" fill="hold">
+                                          <p:stCondLst>
+                                            <p:cond delay="0"/>
+                                          </p:stCondLst>
+                                        </p:cTn>
+                                        <p:tgtEl>
+                                          <p:spTgt spid="294">
+                                            <p:txEl>
+                                              <p:pRg end="5" st="5"/>
+                                            </p:txEl>
+                                          </p:spTgt>
+                                        </p:tgtEl>
+                                        <p:attrNameLst>
+                                          <p:attrName>style.visibility</p:attrName>
+                                        </p:attrNameLst>
+                                      </p:cBhvr>
+                                      <p:to>
+                                        <p:strVal val="visible"/>
+                                      </p:to>
+                                    </p:set>
+                                  </p:childTnLst>
+                                </p:cTn>
+                              </p:par>
+                            </p:childTnLst>
+                          </p:cTn>
+                        </p:par>
+                      </p:childTnLst>
+                    </p:cTn>
+                  </p:par>
+                  <p:par>
+                    <p:cTn fill="hold">
+                      <p:stCondLst>
+                        <p:cond delay="indefinite"/>
+                      </p:stCondLst>
+                      <p:childTnLst>
+                        <p:par>
+                          <p:cTn fill="hold">
+                            <p:stCondLst>
+                              <p:cond delay="0"/>
+                            </p:stCondLst>
+                            <p:childTnLst>
+                              <p:par>
+                                <p:cTn fill="hold" nodeType="clickEffect" presetClass="entr" presetID="1" presetSubtype="0">
+                                  <p:stCondLst>
+                                    <p:cond delay="0"/>
+                                  </p:stCondLst>
+                                  <p:childTnLst>
+                                    <p:set>
+                                      <p:cBhvr>
+                                        <p:cTn dur="1" fill="hold">
+                                          <p:stCondLst>
+                                            <p:cond delay="0"/>
+                                          </p:stCondLst>
+                                        </p:cTn>
+                                        <p:tgtEl>
+                                          <p:spTgt spid="294">
+                                            <p:txEl>
+                                              <p:pRg end="6" st="6"/>
+                                            </p:txEl>
+                                          </p:spTgt>
+                                        </p:tgtEl>
+                                        <p:attrNameLst>
+                                          <p:attrName>style.visibility</p:attrName>
+                                        </p:attrNameLst>
+                                      </p:cBhvr>
+                                      <p:to>
+                                        <p:strVal val="visible"/>
+                                      </p:to>
+                                    </p:set>
+                                  </p:childTnLst>
+                                </p:cTn>
+                              </p:par>
+                            </p:childTnLst>
+                          </p:cTn>
+                        </p:par>
+                      </p:childTnLst>
+                    </p:cTn>
+                  </p:par>
+                  <p:par>
+                    <p:cTn fill="hold">
+                      <p:stCondLst>
+                        <p:cond delay="indefinite"/>
+                      </p:stCondLst>
+                      <p:childTnLst>
+                        <p:par>
+                          <p:cTn fill="hold">
+                            <p:stCondLst>
+                              <p:cond delay="0"/>
+                            </p:stCondLst>
+                            <p:childTnLst>
+                              <p:par>
+                                <p:cTn fill="hold" nodeType="clickEffect" presetClass="entr" presetID="1" presetSubtype="0">
+                                  <p:stCondLst>
+                                    <p:cond delay="0"/>
+                                  </p:stCondLst>
+                                  <p:childTnLst>
+                                    <p:set>
+                                      <p:cBhvr>
+                                        <p:cTn dur="1" fill="hold">
+                                          <p:stCondLst>
+                                            <p:cond delay="0"/>
+                                          </p:stCondLst>
+                                        </p:cTn>
+                                        <p:tgtEl>
+                                          <p:spTgt spid="294">
+                                            <p:txEl>
+                                              <p:pRg end="7" st="7"/>
+                                            </p:txEl>
+                                          </p:spTgt>
+                                        </p:tgtEl>
+                                        <p:attrNameLst>
+                                          <p:attrName>style.visibility</p:attrName>
+                                        </p:attrNameLst>
+                                      </p:cBhvr>
+                                      <p:to>
+                                        <p:strVal val="visible"/>
+                                      </p:to>
+                                    </p:set>
+                                  </p:childTnLst>
+                                </p:cTn>
+                              </p:par>
+                            </p:childTnLst>
+                          </p:cTn>
+                        </p:par>
+                      </p:childTnLst>
+                    </p:cTn>
+                  </p:par>
+                  <p:par>
+                    <p:cTn fill="hold">
+                      <p:stCondLst>
+                        <p:cond delay="indefinite"/>
+                      </p:stCondLst>
+                      <p:childTnLst>
+                        <p:par>
+                          <p:cTn fill="hold">
+                            <p:stCondLst>
+                              <p:cond delay="0"/>
+                            </p:stCondLst>
+                            <p:childTnLst>
+                              <p:par>
+                                <p:cTn fill="hold" nodeType="clickEffect" presetClass="entr" presetID="1" presetSubtype="0">
+                                  <p:stCondLst>
+                                    <p:cond delay="0"/>
+                                  </p:stCondLst>
+                                  <p:childTnLst>
+                                    <p:set>
+                                      <p:cBhvr>
+                                        <p:cTn dur="1" fill="hold">
+                                          <p:stCondLst>
+                                            <p:cond delay="0"/>
+                                          </p:stCondLst>
+                                        </p:cTn>
+                                        <p:tgtEl>
+                                          <p:spTgt spid="294">
+                                            <p:txEl>
+                                              <p:pRg end="8" st="8"/>
+                                            </p:txEl>
+                                          </p:spTgt>
+                                        </p:tgtEl>
+                                        <p:attrNameLst>
+                                          <p:attrName>style.visibility</p:attrName>
+                                        </p:attrNameLst>
+                                      </p:cBhvr>
+                                      <p:to>
+                                        <p:strVal val="visible"/>
+                                      </p:to>
+                                    </p:set>
+                                  </p:childTnLst>
+                                </p:cTn>
+                              </p:par>
+                            </p:childTnLst>
+                          </p:cTn>
+                        </p:par>
+                      </p:childTnLst>
+                    </p:cTn>
+                  </p:par>
+                  <p:par>
+                    <p:cTn fill="hold">
+                      <p:stCondLst>
+                        <p:cond delay="indefinite"/>
+                      </p:stCondLst>
+                      <p:childTnLst>
+                        <p:par>
+                          <p:cTn fill="hold">
+                            <p:stCondLst>
+                              <p:cond delay="0"/>
+                            </p:stCondLst>
+                            <p:childTnLst>
+                              <p:par>
+                                <p:cTn fill="hold" nodeType="clickEffect" presetClass="entr" presetID="1" presetSubtype="0">
+                                  <p:stCondLst>
+                                    <p:cond delay="0"/>
+                                  </p:stCondLst>
+                                  <p:childTnLst>
+                                    <p:set>
+                                      <p:cBhvr>
+                                        <p:cTn dur="1" fill="hold">
+                                          <p:stCondLst>
+                                            <p:cond delay="0"/>
+                                          </p:stCondLst>
+                                        </p:cTn>
+                                        <p:tgtEl>
+                                          <p:spTgt spid="294">
+                                            <p:txEl>
+                                              <p:pRg end="9" st="9"/>
+                                            </p:txEl>
+                                          </p:spTgt>
+                                        </p:tgtEl>
+                                        <p:attrNameLst>
+                                          <p:attrName>style.visibility</p:attrName>
+                                        </p:attrNameLst>
+                                      </p:cBhvr>
+                                      <p:to>
+                                        <p:strVal val="visible"/>
+                                      </p:to>
+                                    </p:set>
+                                  </p:childTnLst>
+                                </p:cTn>
+                              </p:par>
+                            </p:childTnLst>
+                          </p:cTn>
+                        </p:par>
+                      </p:childTnLst>
+                    </p:cTn>
+                  </p:par>
+                  <p:par>
+                    <p:cTn fill="hold">
+                      <p:stCondLst>
+                        <p:cond delay="indefinite"/>
+                      </p:stCondLst>
+                      <p:childTnLst>
+                        <p:par>
+                          <p:cTn fill="hold">
+                            <p:stCondLst>
+                              <p:cond delay="0"/>
+                            </p:stCondLst>
+                            <p:childTnLst>
+                              <p:par>
+                                <p:cTn fill="hold" nodeType="clickEffect" presetClass="entr" presetID="1" presetSubtype="0">
+                                  <p:stCondLst>
+                                    <p:cond delay="0"/>
+                                  </p:stCondLst>
+                                  <p:childTnLst>
+                                    <p:set>
+                                      <p:cBhvr>
+                                        <p:cTn dur="1" fill="hold">
+                                          <p:stCondLst>
+                                            <p:cond delay="0"/>
+                                          </p:stCondLst>
+                                        </p:cTn>
+                                        <p:tgtEl>
+                                          <p:spTgt spid="294">
+                                            <p:txEl>
+                                              <p:pRg end="10" st="10"/>
+                                            </p:txEl>
+                                          </p:spTgt>
+                                        </p:tgtEl>
+                                        <p:attrNameLst>
+                                          <p:attrName>style.visibility</p:attrName>
+                                        </p:attrNameLst>
+                                      </p:cBhvr>
+                                      <p:to>
+                                        <p:strVal val="visible"/>
+                                      </p:to>
+                                    </p:set>
+                                  </p:childTnLst>
+                                </p:cTn>
+                              </p:par>
+                            </p:childTnLst>
+                          </p:cTn>
+                        </p:par>
+                      </p:childTnLst>
+                    </p:cTn>
+                  </p:par>
+                  <p:par>
+                    <p:cTn fill="hold">
+                      <p:stCondLst>
+                        <p:cond delay="indefinite"/>
+                      </p:stCondLst>
+                      <p:childTnLst>
+                        <p:par>
+                          <p:cTn fill="hold">
+                            <p:stCondLst>
+                              <p:cond delay="0"/>
+                            </p:stCondLst>
+                            <p:childTnLst>
+                              <p:par>
+                                <p:cTn fill="hold" nodeType="clickEffect" presetClass="entr" presetID="1" presetSubtype="0">
+                                  <p:stCondLst>
+                                    <p:cond delay="0"/>
+                                  </p:stCondLst>
+                                  <p:childTnLst>
+                                    <p:set>
+                                      <p:cBhvr>
+                                        <p:cTn dur="1" fill="hold">
+                                          <p:stCondLst>
+                                            <p:cond delay="0"/>
+                                          </p:stCondLst>
+                                        </p:cTn>
+                                        <p:tgtEl>
+                                          <p:spTgt spid="294">
+                                            <p:txEl>
+                                              <p:pRg end="11" st="11"/>
+                                            </p:txEl>
+                                          </p:spTgt>
+                                        </p:tgtEl>
+                                        <p:attrNameLst>
+                                          <p:attrName>style.visibility</p:attrName>
+                                        </p:attrNameLst>
+                                      </p:cBhvr>
+                                      <p:to>
+                                        <p:strVal val="visible"/>
+                                      </p:to>
+                                    </p:set>
+                                  </p:childTnLst>
+                                </p:cTn>
+                              </p:par>
+                            </p:childTnLst>
+                          </p:cTn>
+                        </p:par>
+                      </p:childTnLst>
+                    </p:cTn>
+                  </p:par>
+                  <p:par>
+                    <p:cTn fill="hold">
+                      <p:stCondLst>
+                        <p:cond delay="indefinite"/>
+                      </p:stCondLst>
+                      <p:childTnLst>
+                        <p:par>
+                          <p:cTn fill="hold">
+                            <p:stCondLst>
+                              <p:cond delay="0"/>
+                            </p:stCondLst>
+                            <p:childTnLst>
+                              <p:par>
+                                <p:cTn fill="hold" nodeType="clickEffect" presetClass="entr" presetID="1" presetSubtype="0">
+                                  <p:stCondLst>
+                                    <p:cond delay="0"/>
+                                  </p:stCondLst>
+                                  <p:childTnLst>
+                                    <p:set>
+                                      <p:cBhvr>
+                                        <p:cTn dur="1" fill="hold">
+                                          <p:stCondLst>
+                                            <p:cond delay="0"/>
+                                          </p:stCondLst>
+                                        </p:cTn>
+                                        <p:tgtEl>
+                                          <p:spTgt spid="294">
+                                            <p:txEl>
+                                              <p:pRg end="12" st="12"/>
+                                            </p:txEl>
+                                          </p:spTgt>
+                                        </p:tgtEl>
+                                        <p:attrNameLst>
+                                          <p:attrName>style.visibility</p:attrName>
+                                        </p:attrNameLst>
+                                      </p:cBhvr>
+                                      <p:to>
+                                        <p:strVal val="visible"/>
+                                      </p:to>
+                                    </p:set>
+                                  </p:childTnLst>
+                                </p:cTn>
+                              </p:par>
+                            </p:childTnLst>
+                          </p:cTn>
+                        </p:par>
+                      </p:childTnLst>
+                    </p:cTn>
+                  </p:par>
+                </p:childTnLst>
+              </p:cTn>
+              <p:prevCondLst>
+                <p:cond evt="onPrev">
+                  <p:tgtEl>
+                    <p:sldTgt/>
+                  </p:tgtEl>
+                </p:cond>
+              </p:prevCondLst>
+              <p:nextCondLst>
+                <p:cond evt="onNext">
+                  <p:tgtEl>
+                    <p:sldTgt/>
+                  </p:tgtEl>
+                </p:cond>
+              </p:nextCondLst>
+            </p:seq>
+          </p:childTnLst>
+        </p:cTn>
+      </p:par>
+    </p:tnLst>
+  </p:timing>
 </p:sld>
 </file>
 
@@ -19414,6 +19022,179 @@
 </file>
 
 <file path=ppt/slides/slide40.xml><?xml version="1.0" encoding="utf-8"?>
+<p:sld xmlns:a="http://schemas.openxmlformats.org/drawingml/2006/main" xmlns:p="http://schemas.openxmlformats.org/presentationml/2006/main" xmlns:r="http://schemas.openxmlformats.org/officeDocument/2006/relationships">
+  <p:cSld>
+    <p:spTree>
+      <p:nvGrpSpPr>
+        <p:cNvPr id="1" name=""/>
+        <p:cNvGrpSpPr/>
+        <p:nvPr/>
+      </p:nvGrpSpPr>
+      <p:grpSpPr/>
+      <p:sp>
+        <p:nvSpPr>
+          <p:cNvPr id="2" name="Title 1"/>
+          <p:cNvSpPr>
+            <a:spLocks noGrp="1"/>
+          </p:cNvSpPr>
+          <p:nvPr>
+            <p:ph type="title"/>
+          </p:nvPr>
+        </p:nvSpPr>
+        <p:spPr/>
+        <p:txBody>
+          <a:bodyPr/>
+          <a:lstStyle/>
+          <a:p>
+            <a:pPr indent="0" lvl="0" marL="0" rtl="0" algn="l">
+              <a:spcBef>
+                <a:spcPts val="0"/>
+              </a:spcBef>
+              <a:spcAft>
+                <a:spcPts val="0"/>
+              </a:spcAft>
+              <a:buNone/>
+            </a:pPr>
+            <a:r>
+              <a:rPr lang="en"/>
+              <a:t>Check Yourself</a:t>
+            </a:r>
+            <a:endParaRPr/>
+          </a:p>
+        </p:txBody>
+      </p:sp>
+      <p:sp>
+        <p:nvSpPr>
+          <p:cNvPr id="3" name="Text Placeholder 2"/>
+          <p:cNvSpPr>
+            <a:spLocks noGrp="1"/>
+          </p:cNvSpPr>
+          <p:nvPr>
+            <p:ph type="body" idx="1"/>
+          </p:nvPr>
+        </p:nvSpPr>
+        <p:spPr>
+          <a:xfrm>
+            <a:off x="311700" y="885950"/>
+            <a:ext cx="8520600" cy="1719072"/>
+          </a:xfrm>
+        </p:spPr>
+        <p:txBody>
+          <a:bodyPr/>
+          <a:lstStyle/>
+          <a:p>
+            <a:pPr indent="-330200" lvl="0" marL="457200" rtl="0" algn="l">
+              <a:spcBef>
+                <a:spcPts val="0"/>
+              </a:spcBef>
+              <a:spcAft>
+                <a:spcPts val="0"/>
+              </a:spcAft>
+              <a:buSzPts val="1600"/>
+              <a:buChar char="●"/>
+            </a:pPr>
+            <a:r>
+              <a:rPr lang="en"/>
+              <a:t>Why prefer a texture atlas over many individual image files?</a:t>
+            </a:r>
+            <a:endParaRPr/>
+          </a:p>
+          <a:p>
+            <a:pPr indent="-330200" lvl="0" marL="457200" rtl="0" algn="l">
+              <a:spcBef>
+                <a:spcPts val="0"/>
+              </a:spcBef>
+              <a:spcAft>
+                <a:spcPts val="0"/>
+              </a:spcAft>
+              <a:buSzPts val="1600"/>
+              <a:buChar char="●"/>
+            </a:pPr>
+            <a:r>
+              <a:rPr lang="en"/>
+              <a:t>Why subtract the tick duration from the accumulator instead of resetting it?</a:t>
+            </a:r>
+            <a:endParaRPr/>
+          </a:p>
+          <a:p>
+            <a:pPr indent="-330200" lvl="0" marL="457200" rtl="0" algn="l">
+              <a:spcBef>
+                <a:spcPts val="0"/>
+              </a:spcBef>
+              <a:spcAft>
+                <a:spcPts val="0"/>
+              </a:spcAft>
+              <a:buSzPts val="1600"/>
+              <a:buChar char="●"/>
+            </a:pPr>
+            <a:r>
+              <a:rPr lang="en"/>
+              <a:t>What problems come from reading the keyboard inside gameplay code?</a:t>
+            </a:r>
+            <a:endParaRPr/>
+          </a:p>
+          <a:p>
+            <a:pPr indent="-330200" lvl="0" marL="457200" rtl="0" algn="l">
+              <a:spcBef>
+                <a:spcPts val="0"/>
+              </a:spcBef>
+              <a:spcAft>
+                <a:spcPts val="0"/>
+              </a:spcAft>
+              <a:buSzPts val="1600"/>
+              <a:buChar char="●"/>
+            </a:pPr>
+            <a:r>
+              <a:rPr lang="en"/>
+              <a:t>Why check a buffered turn against the last buffered direction?</a:t>
+            </a:r>
+            <a:endParaRPr/>
+          </a:p>
+        </p:txBody>
+      </p:sp>
+      <p:sp>
+        <p:nvSpPr>
+          <p:cNvPr id="4" name="TextBox 3"/>
+          <p:cNvSpPr txBox="1"/>
+          <p:nvPr/>
+        </p:nvSpPr>
+        <p:spPr>
+          <a:xfrm>
+            <a:off x="457200" y="3182112"/>
+            <a:ext cx="8229600" cy="457200"/>
+          </a:xfrm>
+          <a:prstGeom prst="rect">
+            <a:avLst/>
+          </a:prstGeom>
+          <a:noFill/>
+        </p:spPr>
+        <p:txBody>
+          <a:bodyPr wrap="square">
+            <a:spAutoFit/>
+          </a:bodyPr>
+          <a:lstStyle/>
+          <a:p>
+            <a:pPr algn="ctr"/>
+            <a:r>
+              <a:rPr sz="1400" b="0" i="0">
+                <a:solidFill>
+                  <a:srgbClr val="9AA3AB"/>
+                </a:solidFill>
+              </a:rPr>
+              <a:t>The answers, and more questions, are on the course site.</a:t>
+            </a:r>
+          </a:p>
+        </p:txBody>
+      </p:sp>
+    </p:spTree>
+  </p:cSld>
+  <p:clrMapOvr>
+    <a:masterClrMapping/>
+  </p:clrMapOvr>
+</p:sld>
+</file>
+
+<file path=ppt/slides/slide41.xml><?xml version="1.0" encoding="utf-8"?>
 <p:sld xmlns:a="http://schemas.openxmlformats.org/drawingml/2006/main" xmlns:r="http://schemas.openxmlformats.org/officeDocument/2006/relationships" xmlns:mc="http://schemas.openxmlformats.org/markup-compatibility/2006" xmlns:mv="urn:schemas-microsoft-com:mac:vml" xmlns:p="http://schemas.openxmlformats.org/presentationml/2006/main" xmlns:c="http://schemas.openxmlformats.org/drawingml/2006/chart" xmlns:dgm="http://schemas.openxmlformats.org/drawingml/2006/diagram" xmlns:o="urn:schemas-microsoft-com:office:office" xmlns:v="urn:schemas-microsoft-com:vml" xmlns:pvml="urn:schemas-microsoft-com:office:powerpoint" xmlns:com="http://schemas.openxmlformats.org/drawingml/2006/compatibility" xmlns:p14="http://schemas.microsoft.com/office/powerpoint/2010/main" xmlns:p15="http://schemas.microsoft.com/office/powerpoint/2012/main" xmlns:ahyp="http://schemas.microsoft.com/office/drawing/2018/hyperlinkcolor">
   <p:cSld>
     <p:spTree>

--- a/slides/03 Snake.pptx
+++ b/slides/03 Snake.pptx
@@ -2469,6 +2469,21 @@
           <a:p>
             <a:r>
               <a:t>Detection says they touch; response says what happens: block, trigger, or bounce (Vector2.Reflect).</a:t>
+            </a:r>
+          </a:p>
+          <a:p>
+            <a:r>
+              <a:t>Blocking to prevent objects from overlapping</a:t>
+            </a:r>
+          </a:p>
+          <a:p>
+            <a:r>
+              <a:t>Triggering events when objects collide</a:t>
+            </a:r>
+          </a:p>
+          <a:p>
+            <a:r>
+              <a:t>Bouncing to reflect objects off surfaces</a:t>
             </a:r>
           </a:p>
         </p:txBody>
@@ -9274,34 +9289,74 @@
           </a:p>
         </p:txBody>
       </p:sp>
-      <p:pic>
-        <p:nvPicPr>
-          <p:cNvPr id="117" name="Google Shape;117;p19"/>
-          <p:cNvPicPr preferRelativeResize="0"/>
+      <p:sp>
+        <p:nvSpPr>
+          <p:cNvPr id="117" name="TextBox 116"/>
+          <p:cNvSpPr txBox="1"/>
           <p:nvPr/>
-        </p:nvPicPr>
-        <p:blipFill>
-          <a:blip r:embed="rId3">
-            <a:alphaModFix/>
-          </a:blip>
-          <a:stretch>
-            <a:fillRect/>
-          </a:stretch>
-        </p:blipFill>
+        </p:nvSpPr>
         <p:spPr>
           <a:xfrm>
-            <a:off x="1638300" y="1156538"/>
-            <a:ext cx="5867400" cy="3362325"/>
+            <a:off x="457200" y="2011680"/>
+            <a:ext cx="8229600" cy="457200"/>
           </a:xfrm>
           <a:prstGeom prst="rect">
             <a:avLst/>
           </a:prstGeom>
           <a:noFill/>
-          <a:ln>
-            <a:noFill/>
-          </a:ln>
         </p:spPr>
-      </p:pic>
+        <p:txBody>
+          <a:bodyPr wrap="square">
+            <a:spAutoFit/>
+          </a:bodyPr>
+          <a:lstStyle/>
+          <a:p>
+            <a:pPr algn="ctr"/>
+            <a:r>
+              <a:rPr sz="2200" b="0" i="0">
+                <a:solidFill>
+                  <a:srgbClr val="DEE2E6"/>
+                </a:solidFill>
+              </a:rPr>
+              <a:t>Draw it yourself, in a pixel editor such as Aseprite</a:t>
+            </a:r>
+          </a:p>
+        </p:txBody>
+      </p:sp>
+      <p:sp>
+        <p:nvSpPr>
+          <p:cNvPr id="118" name="TextBox 117"/>
+          <p:cNvSpPr txBox="1"/>
+          <p:nvPr/>
+        </p:nvSpPr>
+        <p:spPr>
+          <a:xfrm>
+            <a:off x="457200" y="2560320"/>
+            <a:ext cx="8229600" cy="457200"/>
+          </a:xfrm>
+          <a:prstGeom prst="rect">
+            <a:avLst/>
+          </a:prstGeom>
+          <a:noFill/>
+        </p:spPr>
+        <p:txBody>
+          <a:bodyPr wrap="square">
+            <a:spAutoFit/>
+          </a:bodyPr>
+          <a:lstStyle/>
+          <a:p>
+            <a:pPr algn="ctr"/>
+            <a:r>
+              <a:rPr sz="1800" b="0" i="0">
+                <a:solidFill>
+                  <a:srgbClr val="9AA3AB"/>
+                </a:solidFill>
+              </a:rPr>
+              <a:t>Or use a free pack with a clear licence</a:t>
+            </a:r>
+          </a:p>
+        </p:txBody>
+      </p:sp>
     </p:spTree>
   </p:cSld>
   <p:clrMapOvr>
@@ -15129,34 +15184,6 @@
           </a:p>
         </p:txBody>
       </p:sp>
-      <p:pic>
-        <p:nvPicPr>
-          <p:cNvPr id="223" name="Google Shape;223;p35"/>
-          <p:cNvPicPr preferRelativeResize="0"/>
-          <p:nvPr/>
-        </p:nvPicPr>
-        <p:blipFill>
-          <a:blip r:embed="rId4">
-            <a:alphaModFix/>
-          </a:blip>
-          <a:stretch>
-            <a:fillRect/>
-          </a:stretch>
-        </p:blipFill>
-        <p:spPr>
-          <a:xfrm>
-            <a:off x="311700" y="2014863"/>
-            <a:ext cx="1926775" cy="2006025"/>
-          </a:xfrm>
-          <a:prstGeom prst="rect">
-            <a:avLst/>
-          </a:prstGeom>
-          <a:noFill/>
-          <a:ln>
-            <a:noFill/>
-          </a:ln>
-        </p:spPr>
-      </p:pic>
       <p:cxnSp>
         <p:nvCxnSpPr>
           <p:cNvPr id="224" name="Google Shape;224;p35"/>
@@ -15190,153 +15217,6 @@
   <p:clrMapOvr>
     <a:masterClrMapping/>
   </p:clrMapOvr>
-  <p:timing>
-    <p:tnLst>
-      <p:par>
-        <p:cTn dur="indefinite" nodeType="tmRoot" restart="never">
-          <p:childTnLst>
-            <p:seq concurrent="1" nextAc="seek">
-              <p:cTn dur="indefinite" id="2" nodeType="mainSeq">
-                <p:childTnLst>
-                  <p:par>
-                    <p:cTn fill="hold">
-                      <p:stCondLst>
-                        <p:cond delay="indefinite"/>
-                      </p:stCondLst>
-                      <p:childTnLst>
-                        <p:par>
-                          <p:cTn fill="hold">
-                            <p:stCondLst>
-                              <p:cond delay="0"/>
-                            </p:stCondLst>
-                            <p:childTnLst>
-                              <p:par>
-                                <p:cTn fill="hold" nodeType="clickEffect" presetClass="entr" presetID="1" presetSubtype="0">
-                                  <p:stCondLst>
-                                    <p:cond delay="0"/>
-                                  </p:stCondLst>
-                                  <p:childTnLst>
-                                    <p:set>
-                                      <p:cBhvr>
-                                        <p:cTn dur="1" fill="hold">
-                                          <p:stCondLst>
-                                            <p:cond delay="0"/>
-                                          </p:stCondLst>
-                                        </p:cTn>
-                                        <p:tgtEl>
-                                          <p:spTgt spid="222"/>
-                                        </p:tgtEl>
-                                        <p:attrNameLst>
-                                          <p:attrName>style.visibility</p:attrName>
-                                        </p:attrNameLst>
-                                      </p:cBhvr>
-                                      <p:to>
-                                        <p:strVal val="visible"/>
-                                      </p:to>
-                                    </p:set>
-                                  </p:childTnLst>
-                                </p:cTn>
-                              </p:par>
-                            </p:childTnLst>
-                          </p:cTn>
-                        </p:par>
-                      </p:childTnLst>
-                    </p:cTn>
-                  </p:par>
-                  <p:par>
-                    <p:cTn fill="hold">
-                      <p:stCondLst>
-                        <p:cond delay="indefinite"/>
-                      </p:stCondLst>
-                      <p:childTnLst>
-                        <p:par>
-                          <p:cTn fill="hold">
-                            <p:stCondLst>
-                              <p:cond delay="0"/>
-                            </p:stCondLst>
-                            <p:childTnLst>
-                              <p:par>
-                                <p:cTn fill="hold" nodeType="clickEffect" presetClass="entr" presetID="1" presetSubtype="0">
-                                  <p:stCondLst>
-                                    <p:cond delay="0"/>
-                                  </p:stCondLst>
-                                  <p:childTnLst>
-                                    <p:set>
-                                      <p:cBhvr>
-                                        <p:cTn dur="1" fill="hold">
-                                          <p:stCondLst>
-                                            <p:cond delay="0"/>
-                                          </p:stCondLst>
-                                        </p:cTn>
-                                        <p:tgtEl>
-                                          <p:spTgt spid="221"/>
-                                        </p:tgtEl>
-                                        <p:attrNameLst>
-                                          <p:attrName>style.visibility</p:attrName>
-                                        </p:attrNameLst>
-                                      </p:cBhvr>
-                                      <p:to>
-                                        <p:strVal val="visible"/>
-                                      </p:to>
-                                    </p:set>
-                                  </p:childTnLst>
-                                </p:cTn>
-                              </p:par>
-                              <p:par>
-                                <p:cTn fill="hold" nodeType="withEffect" presetClass="entr" presetID="1" presetSubtype="0">
-                                  <p:stCondLst>
-                                    <p:cond delay="0"/>
-                                  </p:stCondLst>
-                                  <p:childTnLst>
-                                    <p:set>
-                                      <p:cBhvr>
-                                        <p:cTn dur="1" fill="hold">
-                                          <p:stCondLst>
-                                            <p:cond delay="0"/>
-                                          </p:stCondLst>
-                                        </p:cTn>
-                                        <p:tgtEl>
-                                          <p:spTgt spid="224"/>
-                                        </p:tgtEl>
-                                        <p:attrNameLst>
-                                          <p:attrName>style.visibility</p:attrName>
-                                        </p:attrNameLst>
-                                      </p:cBhvr>
-                                      <p:to>
-                                        <p:strVal val="visible"/>
-                                      </p:to>
-                                    </p:set>
-                                  </p:childTnLst>
-                                </p:cTn>
-                              </p:par>
-                            </p:childTnLst>
-                          </p:cTn>
-                        </p:par>
-                      </p:childTnLst>
-                    </p:cTn>
-                  </p:par>
-                </p:childTnLst>
-              </p:cTn>
-              <p:prevCondLst>
-                <p:cond evt="onPrev">
-                  <p:tgtEl>
-                    <p:sldTgt/>
-                  </p:tgtEl>
-                </p:cond>
-              </p:prevCondLst>
-              <p:nextCondLst>
-                <p:cond evt="onNext">
-                  <p:tgtEl>
-                    <p:sldTgt/>
-                  </p:tgtEl>
-                </p:cond>
-              </p:nextCondLst>
-            </p:seq>
-          </p:childTnLst>
-        </p:cTn>
-      </p:par>
-    </p:tnLst>
-  </p:timing>
 </p:sld>
 </file>
 
@@ -15572,174 +15452,30 @@
           </a:p>
         </p:txBody>
       </p:sp>
-      <p:sp>
-        <p:nvSpPr>
-          <p:cNvPr id="237" name="Google Shape;237;p37"/>
-          <p:cNvSpPr txBox="1"/>
-          <p:nvPr>
-            <p:ph idx="1" type="body"/>
-          </p:nvPr>
-        </p:nvSpPr>
-        <p:spPr>
-          <a:xfrm>
-            <a:off x="311700" y="885950"/>
-            <a:ext cx="8520600" cy="4023300"/>
-          </a:xfrm>
-          <a:prstGeom prst="rect">
-            <a:avLst/>
-          </a:prstGeom>
-        </p:spPr>
-        <p:txBody>
-          <a:bodyPr anchorCtr="0" anchor="t" bIns="91425" lIns="91425" spcFirstLastPara="1" rIns="91425" wrap="square" tIns="91425">
-            <a:normAutofit/>
-          </a:bodyPr>
-          <a:lstStyle/>
-          <a:p>
-            <a:pPr indent="-330200" lvl="0" marL="457200" rtl="0" algn="l">
-              <a:spcBef>
-                <a:spcPts val="0"/>
-              </a:spcBef>
-              <a:spcAft>
-                <a:spcPts val="0"/>
-              </a:spcAft>
-              <a:buSzPts val="1600"/>
-              <a:buChar char="●"/>
-            </a:pPr>
-            <a:r>
-              <a:rPr lang="en"/>
-              <a:t>Blocking to prevent objects from overlapping</a:t>
-            </a:r>
-            <a:endParaRPr/>
-          </a:p>
-          <a:p>
-            <a:pPr indent="-330200" lvl="0" marL="457200" rtl="0" algn="l">
-              <a:spcBef>
-                <a:spcPts val="0"/>
-              </a:spcBef>
-              <a:spcAft>
-                <a:spcPts val="0"/>
-              </a:spcAft>
-              <a:buSzPts val="1600"/>
-              <a:buChar char="●"/>
-            </a:pPr>
-            <a:r>
-              <a:rPr lang="en"/>
-              <a:t>Triggering events when objects collide</a:t>
-            </a:r>
-            <a:endParaRPr/>
-          </a:p>
-          <a:p>
-            <a:pPr indent="-330200" lvl="0" marL="457200" rtl="0" algn="l">
-              <a:spcBef>
-                <a:spcPts val="0"/>
-              </a:spcBef>
-              <a:spcAft>
-                <a:spcPts val="0"/>
-              </a:spcAft>
-              <a:buSzPts val="1600"/>
-              <a:buChar char="●"/>
-            </a:pPr>
-            <a:r>
-              <a:rPr lang="en"/>
-              <a:t>Bouncing to reflect objects off surfaces</a:t>
-            </a:r>
-            <a:endParaRPr/>
-          </a:p>
-        </p:txBody>
-      </p:sp>
       <p:pic>
         <p:nvPicPr>
-          <p:cNvPr id="238" name="Google Shape;238;p37"/>
-          <p:cNvPicPr preferRelativeResize="0"/>
+          <p:cNvPr id="237" name="Picture 236" descr="response.png"/>
+          <p:cNvPicPr>
+            <a:picLocks noChangeAspect="1"/>
+          </p:cNvPicPr>
           <p:nvPr/>
         </p:nvPicPr>
         <p:blipFill>
-          <a:blip r:embed="rId3">
-            <a:alphaModFix/>
-          </a:blip>
+          <a:blip r:embed="rId5"/>
           <a:stretch>
             <a:fillRect/>
           </a:stretch>
         </p:blipFill>
         <p:spPr>
           <a:xfrm>
-            <a:off x="2858937" y="2195425"/>
-            <a:ext cx="3426125" cy="1951300"/>
+            <a:off x="320039" y="1051560"/>
+            <a:ext cx="8503920" cy="3779520"/>
           </a:xfrm>
           <a:prstGeom prst="rect">
             <a:avLst/>
           </a:prstGeom>
-          <a:noFill/>
-          <a:ln>
-            <a:noFill/>
-          </a:ln>
         </p:spPr>
       </p:pic>
-      <p:sp>
-        <p:nvSpPr>
-          <p:cNvPr id="239" name="Google Shape;239;p37"/>
-          <p:cNvSpPr txBox="1"/>
-          <p:nvPr/>
-        </p:nvSpPr>
-        <p:spPr>
-          <a:xfrm>
-            <a:off x="3894900" y="4363700"/>
-            <a:ext cx="1317300" cy="324000"/>
-          </a:xfrm>
-          <a:prstGeom prst="rect">
-            <a:avLst/>
-          </a:prstGeom>
-          <a:noFill/>
-          <a:ln>
-            <a:noFill/>
-          </a:ln>
-        </p:spPr>
-        <p:txBody>
-          <a:bodyPr anchorCtr="0" anchor="t" bIns="91425" lIns="91425" spcFirstLastPara="1" rIns="91425" wrap="square" tIns="91425">
-            <a:noAutofit/>
-          </a:bodyPr>
-          <a:lstStyle/>
-          <a:p>
-            <a:pPr indent="0" lvl="0" marL="0" rtl="0" algn="l">
-              <a:spcBef>
-                <a:spcPts val="0"/>
-              </a:spcBef>
-              <a:spcAft>
-                <a:spcPts val="0"/>
-              </a:spcAft>
-              <a:buNone/>
-            </a:pPr>
-            <a:r>
-              <a:rPr lang="en" sz="1300" u="sng">
-                <a:solidFill>
-                  <a:srgbClr val="4A86E8"/>
-                </a:solidFill>
-                <a:latin typeface="Roboto"/>
-                <a:ea typeface="Roboto"/>
-                <a:cs typeface="Roboto"/>
-                <a:sym typeface="Roboto"/>
-                <a:hlinkClick r:id="rId4">
-                  <a:extLst>
-                    <a:ext uri="{A12FA001-AC4F-418D-AE19-62706E023703}">
-                      <ahyp:hlinkClr val="tx"/>
-                    </a:ext>
-                  </a:extLst>
-                </a:hlinkClick>
-              </a:rPr>
-              <a:t>Vector2.Reflect</a:t>
-            </a:r>
-            <a:endParaRPr sz="1300">
-              <a:solidFill>
-                <a:srgbClr val="1F1F1F"/>
-              </a:solidFill>
-              <a:latin typeface="Roboto"/>
-              <a:ea typeface="Roboto"/>
-              <a:cs typeface="Roboto"/>
-              <a:sym typeface="Roboto"/>
-            </a:endParaRPr>
-          </a:p>
-        </p:txBody>
-      </p:sp>
     </p:spTree>
   </p:cSld>
   <p:clrMapOvr>
@@ -15907,86 +15643,26 @@
       </p:sp>
       <p:pic>
         <p:nvPicPr>
-          <p:cNvPr id="246" name="Google Shape;246;p38"/>
-          <p:cNvPicPr preferRelativeResize="0"/>
+          <p:cNvPr id="246" name="Picture 245" descr="phases.png"/>
+          <p:cNvPicPr>
+            <a:picLocks noChangeAspect="1"/>
+          </p:cNvPicPr>
           <p:nvPr/>
         </p:nvPicPr>
         <p:blipFill>
-          <a:blip r:embed="rId3">
-            <a:alphaModFix/>
-          </a:blip>
+          <a:blip r:embed="rId6"/>
           <a:stretch>
             <a:fillRect/>
           </a:stretch>
         </p:blipFill>
         <p:spPr>
           <a:xfrm>
-            <a:off x="698200" y="2359000"/>
-            <a:ext cx="2493568" cy="2632100"/>
+            <a:off x="1228725" y="2057400"/>
+            <a:ext cx="6686550" cy="2971800"/>
           </a:xfrm>
           <a:prstGeom prst="rect">
             <a:avLst/>
           </a:prstGeom>
-          <a:noFill/>
-          <a:ln>
-            <a:noFill/>
-          </a:ln>
-        </p:spPr>
-      </p:pic>
-      <p:pic>
-        <p:nvPicPr>
-          <p:cNvPr id="247" name="Google Shape;247;p38"/>
-          <p:cNvPicPr preferRelativeResize="0"/>
-          <p:nvPr/>
-        </p:nvPicPr>
-        <p:blipFill>
-          <a:blip r:embed="rId4">
-            <a:alphaModFix/>
-          </a:blip>
-          <a:stretch>
-            <a:fillRect/>
-          </a:stretch>
-        </p:blipFill>
-        <p:spPr>
-          <a:xfrm>
-            <a:off x="3325347" y="2359000"/>
-            <a:ext cx="2493568" cy="2632100"/>
-          </a:xfrm>
-          <a:prstGeom prst="rect">
-            <a:avLst/>
-          </a:prstGeom>
-          <a:noFill/>
-          <a:ln>
-            <a:noFill/>
-          </a:ln>
-        </p:spPr>
-      </p:pic>
-      <p:pic>
-        <p:nvPicPr>
-          <p:cNvPr id="248" name="Google Shape;248;p38"/>
-          <p:cNvPicPr preferRelativeResize="0"/>
-          <p:nvPr/>
-        </p:nvPicPr>
-        <p:blipFill>
-          <a:blip r:embed="rId5">
-            <a:alphaModFix/>
-          </a:blip>
-          <a:stretch>
-            <a:fillRect/>
-          </a:stretch>
-        </p:blipFill>
-        <p:spPr>
-          <a:xfrm>
-            <a:off x="5952495" y="2359000"/>
-            <a:ext cx="2493306" cy="2631823"/>
-          </a:xfrm>
-          <a:prstGeom prst="rect">
-            <a:avLst/>
-          </a:prstGeom>
-          <a:noFill/>
-          <a:ln>
-            <a:noFill/>
-          </a:ln>
         </p:spPr>
       </p:pic>
     </p:spTree>

--- a/slides/03 Snake.pptx
+++ b/slides/03 Snake.pptx
@@ -42,6 +42,7 @@
     <p:sldId id="283" r:id="rId33"/>
     <p:sldId id="284" r:id="rId34"/>
     <p:sldId id="285" r:id="rId35"/>
+    <p:sldId id="310" r:id="rId23"/>
     <p:sldId id="286" r:id="rId36"/>
     <p:sldId id="287" r:id="rId37"/>
     <p:sldId id="291" r:id="rId41"/>
@@ -3676,6 +3677,69 @@
           <a:p>
             <a:r>
               <a:t>Ask about the misspelling. Answer: the game stops at start-up (the atlas looks names up in a dictionary). A mistake in data only shows up when the game runs.</a:t>
+            </a:r>
+          </a:p>
+        </p:txBody>
+      </p:sp>
+    </p:spTree>
+  </p:cSld>
+  <p:clrMapOvr>
+    <a:masterClrMapping/>
+  </p:clrMapOvr>
+</p:notes>
+</file>
+
+<file path=ppt/notesSlides/notesSlide42.xml><?xml version="1.0" encoding="utf-8"?>
+<p:notes xmlns:a="http://schemas.openxmlformats.org/drawingml/2006/main" xmlns:p="http://schemas.openxmlformats.org/presentationml/2006/main" xmlns:r="http://schemas.openxmlformats.org/officeDocument/2006/relationships">
+  <p:cSld>
+    <p:spTree>
+      <p:nvGrpSpPr>
+        <p:cNvPr id="1" name=""/>
+        <p:cNvGrpSpPr/>
+        <p:nvPr/>
+      </p:nvGrpSpPr>
+      <p:grpSpPr>
+        <a:xfrm>
+          <a:off x="0" y="0"/>
+          <a:ext cx="0" cy="0"/>
+          <a:chOff x="0" y="0"/>
+          <a:chExt cx="0" cy="0"/>
+        </a:xfrm>
+      </p:grpSpPr>
+      <p:sp>
+        <p:nvSpPr>
+          <p:cNvPr id="2" name="Slide Image Placeholder 1"/>
+          <p:cNvSpPr>
+            <a:spLocks noGrp="1"/>
+          </p:cNvSpPr>
+          <p:nvPr>
+            <p:ph type="sldImg" idx="2"/>
+          </p:nvPr>
+        </p:nvSpPr>
+        <p:spPr/>
+      </p:sp>
+      <p:sp>
+        <p:nvSpPr>
+          <p:cNvPr id="3" name="Notes Placeholder 2"/>
+          <p:cNvSpPr>
+            <a:spLocks noGrp="1"/>
+          </p:cNvSpPr>
+          <p:nvPr>
+            <p:ph type="body" idx="1"/>
+          </p:nvPr>
+        </p:nvSpPr>
+        <p:spPr/>
+        <p:txBody>
+          <a:bodyPr/>
+          <a:lstStyle/>
+          <a:p>
+            <a:r>
+              <a:t>The broad phase is cheap and rough: boxes around the shapes, and only pairs whose boxes overlap go on.</a:t>
+            </a:r>
+          </a:p>
+          <a:p>
+            <a:r>
+              <a:t>The narrow phase runs the exact check on those pairs only. Vampire Survivors builds a broad phase, with a grid.</a:t>
             </a:r>
           </a:p>
         </p:txBody>
@@ -13313,14 +13377,14 @@
       </p:sp>
       <p:pic>
         <p:nvPicPr>
-          <p:cNvPr id="215" name="Picture 214" descr="circles.png"/>
+          <p:cNvPr id="214" name="Picture 213" descr="circles.png"/>
           <p:cNvPicPr>
             <a:picLocks noChangeAspect="1"/>
           </p:cNvPicPr>
           <p:nvPr/>
         </p:nvPicPr>
         <p:blipFill>
-          <a:blip r:embed="rId4"/>
+          <a:blip r:embed="rId3"/>
           <a:stretch>
             <a:fillRect/>
           </a:stretch>
@@ -15641,30 +15705,6 @@
           </a:p>
         </p:txBody>
       </p:sp>
-      <p:pic>
-        <p:nvPicPr>
-          <p:cNvPr id="246" name="Picture 245" descr="phases.png"/>
-          <p:cNvPicPr>
-            <a:picLocks noChangeAspect="1"/>
-          </p:cNvPicPr>
-          <p:nvPr/>
-        </p:nvPicPr>
-        <p:blipFill>
-          <a:blip r:embed="rId6"/>
-          <a:stretch>
-            <a:fillRect/>
-          </a:stretch>
-        </p:blipFill>
-        <p:spPr>
-          <a:xfrm>
-            <a:off x="1228725" y="2057400"/>
-            <a:ext cx="6686550" cy="2971800"/>
-          </a:xfrm>
-          <a:prstGeom prst="rect">
-            <a:avLst/>
-          </a:prstGeom>
-        </p:spPr>
-      </p:pic>
     </p:spTree>
   </p:cSld>
   <p:clrMapOvr>
@@ -19702,6 +19742,80 @@
 </p:sld>
 </file>
 
+<file path=ppt/slides/slide42.xml><?xml version="1.0" encoding="utf-8"?>
+<p:sld xmlns:a="http://schemas.openxmlformats.org/drawingml/2006/main" xmlns:p="http://schemas.openxmlformats.org/presentationml/2006/main" xmlns:r="http://schemas.openxmlformats.org/officeDocument/2006/relationships">
+  <p:cSld>
+    <p:spTree>
+      <p:nvGrpSpPr>
+        <p:cNvPr id="1" name=""/>
+        <p:cNvGrpSpPr/>
+        <p:nvPr/>
+      </p:nvGrpSpPr>
+      <p:grpSpPr/>
+      <p:sp>
+        <p:nvSpPr>
+          <p:cNvPr id="2" name="Title 1"/>
+          <p:cNvSpPr>
+            <a:spLocks noGrp="1"/>
+          </p:cNvSpPr>
+          <p:nvPr>
+            <p:ph type="title"/>
+          </p:nvPr>
+        </p:nvSpPr>
+        <p:spPr/>
+        <p:txBody>
+          <a:bodyPr/>
+          <a:lstStyle/>
+          <a:p>
+            <a:pPr indent="0" lvl="0" marL="0" rtl="0" algn="l">
+              <a:spcBef>
+                <a:spcPts val="0"/>
+              </a:spcBef>
+              <a:spcAft>
+                <a:spcPts val="0"/>
+              </a:spcAft>
+              <a:buNone/>
+            </a:pPr>
+            <a:r>
+              <a:rPr lang="en"/>
+              <a:t>Broad Phase and Narrow Phase</a:t>
+            </a:r>
+            <a:endParaRPr/>
+          </a:p>
+        </p:txBody>
+      </p:sp>
+      <p:pic>
+        <p:nvPicPr>
+          <p:cNvPr id="3" name="Picture 2" descr="image.png"/>
+          <p:cNvPicPr>
+            <a:picLocks noChangeAspect="1"/>
+          </p:cNvPicPr>
+          <p:nvPr/>
+        </p:nvPicPr>
+        <p:blipFill>
+          <a:blip r:embed="rId2"/>
+          <a:stretch>
+            <a:fillRect/>
+          </a:stretch>
+        </p:blipFill>
+        <p:spPr>
+          <a:xfrm>
+            <a:off x="320039" y="1051560"/>
+            <a:ext cx="8503920" cy="3779520"/>
+          </a:xfrm>
+          <a:prstGeom prst="rect">
+            <a:avLst/>
+          </a:prstGeom>
+        </p:spPr>
+      </p:pic>
+    </p:spTree>
+  </p:cSld>
+  <p:clrMapOvr>
+    <a:masterClrMapping/>
+  </p:clrMapOvr>
+</p:sld>
+</file>
+
 <file path=ppt/slides/slide5.xml><?xml version="1.0" encoding="utf-8"?>
 <p:sld xmlns:a="http://schemas.openxmlformats.org/drawingml/2006/main" xmlns:r="http://schemas.openxmlformats.org/officeDocument/2006/relationships" xmlns:mc="http://schemas.openxmlformats.org/markup-compatibility/2006" xmlns:mv="urn:schemas-microsoft-com:mac:vml" xmlns:p="http://schemas.openxmlformats.org/presentationml/2006/main" xmlns:c="http://schemas.openxmlformats.org/drawingml/2006/chart" xmlns:dgm="http://schemas.openxmlformats.org/drawingml/2006/diagram" xmlns:o="urn:schemas-microsoft-com:office:office" xmlns:v="urn:schemas-microsoft-com:vml" xmlns:pvml="urn:schemas-microsoft-com:office:powerpoint" xmlns:com="http://schemas.openxmlformats.org/drawingml/2006/compatibility" xmlns:p14="http://schemas.microsoft.com/office/powerpoint/2010/main" xmlns:p15="http://schemas.microsoft.com/office/powerpoint/2012/main" xmlns:ahyp="http://schemas.microsoft.com/office/drawing/2018/hyperlinkcolor">
   <p:cSld>

--- a/slides/03 Snake.pptx
+++ b/slides/03 Snake.pptx
@@ -45,6 +45,8 @@
     <p:sldId id="310" r:id="rId23"/>
     <p:sldId id="286" r:id="rId36"/>
     <p:sldId id="287" r:id="rId37"/>
+    <p:sldId id="311" r:id="rId22"/>
+    <p:sldId id="312" r:id="rId21"/>
     <p:sldId id="291" r:id="rId41"/>
     <p:sldId id="292" r:id="rId42"/>
     <p:sldId id="293" r:id="rId52"/>
@@ -3740,6 +3742,127 @@
           <a:p>
             <a:r>
               <a:t>The narrow phase runs the exact check on those pairs only. Vampire Survivors builds a broad phase, with a grid.</a:t>
+            </a:r>
+          </a:p>
+        </p:txBody>
+      </p:sp>
+    </p:spTree>
+  </p:cSld>
+  <p:clrMapOvr>
+    <a:masterClrMapping/>
+  </p:clrMapOvr>
+</p:notes>
+</file>
+
+<file path=ppt/notesSlides/notesSlide43.xml><?xml version="1.0" encoding="utf-8"?>
+<p:notes xmlns:a="http://schemas.openxmlformats.org/drawingml/2006/main" xmlns:p="http://schemas.openxmlformats.org/presentationml/2006/main" xmlns:r="http://schemas.openxmlformats.org/officeDocument/2006/relationships">
+  <p:cSld>
+    <p:spTree>
+      <p:nvGrpSpPr>
+        <p:cNvPr id="1" name=""/>
+        <p:cNvGrpSpPr/>
+        <p:nvPr/>
+      </p:nvGrpSpPr>
+      <p:grpSpPr>
+        <a:xfrm>
+          <a:off x="0" y="0"/>
+          <a:ext cx="0" cy="0"/>
+          <a:chOff x="0" y="0"/>
+          <a:chExt cx="0" cy="0"/>
+        </a:xfrm>
+      </p:grpSpPr>
+      <p:sp>
+        <p:nvSpPr>
+          <p:cNvPr id="2" name="Slide Image Placeholder 1"/>
+          <p:cNvSpPr>
+            <a:spLocks noGrp="1"/>
+          </p:cNvSpPr>
+          <p:nvPr>
+            <p:ph type="sldImg" idx="2"/>
+          </p:nvPr>
+        </p:nvSpPr>
+        <p:spPr/>
+      </p:sp>
+      <p:sp>
+        <p:nvSpPr>
+          <p:cNvPr id="3" name="Notes Placeholder 2"/>
+          <p:cNvSpPr>
+            <a:spLocks noGrp="1"/>
+          </p:cNvSpPr>
+          <p:nvPr>
+            <p:ph type="body" idx="1"/>
+          </p:nvPr>
+        </p:nvSpPr>
+        <p:spPr/>
+        <p:txBody>
+          <a:bodyPr/>
+          <a:lstStyle/>
+          <a:p>
+            <a:r>
+              <a:t>Who holds what in the finished Snake. Tilemap and the sprites are GARCore classes that the XML files fill.</a:t>
+            </a:r>
+          </a:p>
+          <a:p>
+            <a:r>
+              <a:t>Ask: which of these boxes would another game reuse unchanged?</a:t>
+            </a:r>
+          </a:p>
+        </p:txBody>
+      </p:sp>
+    </p:spTree>
+  </p:cSld>
+  <p:clrMapOvr>
+    <a:masterClrMapping/>
+  </p:clrMapOvr>
+</p:notes>
+</file>
+
+<file path=ppt/notesSlides/notesSlide44.xml><?xml version="1.0" encoding="utf-8"?>
+<p:notes xmlns:a="http://schemas.openxmlformats.org/drawingml/2006/main" xmlns:p="http://schemas.openxmlformats.org/presentationml/2006/main" xmlns:r="http://schemas.openxmlformats.org/officeDocument/2006/relationships">
+  <p:cSld>
+    <p:spTree>
+      <p:nvGrpSpPr>
+        <p:cNvPr id="1" name=""/>
+        <p:cNvGrpSpPr/>
+        <p:nvPr/>
+      </p:nvGrpSpPr>
+      <p:grpSpPr>
+        <a:xfrm>
+          <a:off x="0" y="0"/>
+          <a:ext cx="0" cy="0"/>
+          <a:chOff x="0" y="0"/>
+          <a:chExt cx="0" cy="0"/>
+        </a:xfrm>
+      </p:grpSpPr>
+      <p:sp>
+        <p:nvSpPr>
+          <p:cNvPr id="2" name="Slide Image Placeholder 1"/>
+          <p:cNvSpPr>
+            <a:spLocks noGrp="1"/>
+          </p:cNvSpPr>
+          <p:nvPr>
+            <p:ph type="sldImg" idx="2"/>
+          </p:nvPr>
+        </p:nvSpPr>
+        <p:spPr/>
+      </p:sp>
+      <p:sp>
+        <p:nvSpPr>
+          <p:cNvPr id="3" name="Notes Placeholder 2"/>
+          <p:cNvSpPr>
+            <a:spLocks noGrp="1"/>
+          </p:cNvSpPr>
+          <p:nvPr>
+            <p:ph type="body" idx="1"/>
+          </p:nvPr>
+        </p:nvSpPr>
+        <p:spPr/>
+        <p:txBody>
+          <a:bodyPr/>
+          <a:lstStyle/>
+          <a:p>
+            <a:r>
+              <a:t>The session in one slide. Read each concern aloud and let the class give the answer before pointing at it.</a:t>
             </a:r>
           </a:p>
         </p:txBody>
@@ -15714,6 +15837,80 @@
 </file>
 
 <file path=ppt/slides/slide35.xml><?xml version="1.0" encoding="utf-8"?>
+<p:sld xmlns:a="http://schemas.openxmlformats.org/drawingml/2006/main" xmlns:p="http://schemas.openxmlformats.org/presentationml/2006/main" xmlns:r="http://schemas.openxmlformats.org/officeDocument/2006/relationships">
+  <p:cSld>
+    <p:spTree>
+      <p:nvGrpSpPr>
+        <p:cNvPr id="1" name=""/>
+        <p:cNvGrpSpPr/>
+        <p:nvPr/>
+      </p:nvGrpSpPr>
+      <p:grpSpPr/>
+      <p:sp>
+        <p:nvSpPr>
+          <p:cNvPr id="2" name="Title 1"/>
+          <p:cNvSpPr>
+            <a:spLocks noGrp="1"/>
+          </p:cNvSpPr>
+          <p:nvPr>
+            <p:ph type="title"/>
+          </p:nvPr>
+        </p:nvSpPr>
+        <p:spPr/>
+        <p:txBody>
+          <a:bodyPr/>
+          <a:lstStyle/>
+          <a:p>
+            <a:pPr indent="0" lvl="0" marL="0" rtl="0" algn="l">
+              <a:spcBef>
+                <a:spcPts val="0"/>
+              </a:spcBef>
+              <a:spcAft>
+                <a:spcPts val="0"/>
+              </a:spcAft>
+              <a:buNone/>
+            </a:pPr>
+            <a:r>
+              <a:rPr lang="en"/>
+              <a:t>Broad Phase and Narrow Phase</a:t>
+            </a:r>
+            <a:endParaRPr/>
+          </a:p>
+        </p:txBody>
+      </p:sp>
+      <p:pic>
+        <p:nvPicPr>
+          <p:cNvPr id="3" name="Picture 2" descr="image.png"/>
+          <p:cNvPicPr>
+            <a:picLocks noChangeAspect="1"/>
+          </p:cNvPicPr>
+          <p:nvPr/>
+        </p:nvPicPr>
+        <p:blipFill>
+          <a:blip r:embed="rId2"/>
+          <a:stretch>
+            <a:fillRect/>
+          </a:stretch>
+        </p:blipFill>
+        <p:spPr>
+          <a:xfrm>
+            <a:off x="320039" y="1051560"/>
+            <a:ext cx="8503920" cy="3779520"/>
+          </a:xfrm>
+          <a:prstGeom prst="rect">
+            <a:avLst/>
+          </a:prstGeom>
+        </p:spPr>
+      </p:pic>
+    </p:spTree>
+  </p:cSld>
+  <p:clrMapOvr>
+    <a:masterClrMapping/>
+  </p:clrMapOvr>
+</p:sld>
+</file>
+
+<file path=ppt/slides/slide36.xml><?xml version="1.0" encoding="utf-8"?>
 <p:sld xmlns:a="http://schemas.openxmlformats.org/drawingml/2006/main" xmlns:r="http://schemas.openxmlformats.org/officeDocument/2006/relationships" xmlns:mc="http://schemas.openxmlformats.org/markup-compatibility/2006" xmlns:mv="urn:schemas-microsoft-com:mac:vml" xmlns:p="http://schemas.openxmlformats.org/presentationml/2006/main" xmlns:c="http://schemas.openxmlformats.org/drawingml/2006/chart" xmlns:dgm="http://schemas.openxmlformats.org/drawingml/2006/diagram" xmlns:o="urn:schemas-microsoft-com:office:office" xmlns:v="urn:schemas-microsoft-com:vml" xmlns:pvml="urn:schemas-microsoft-com:office:powerpoint" xmlns:com="http://schemas.openxmlformats.org/drawingml/2006/compatibility" xmlns:p14="http://schemas.microsoft.com/office/powerpoint/2010/main" xmlns:p15="http://schemas.microsoft.com/office/powerpoint/2012/main" xmlns:ahyp="http://schemas.microsoft.com/office/drawing/2018/hyperlinkcolor">
   <p:cSld>
     <p:spTree>
@@ -15982,7 +16179,7 @@
 </p:sld>
 </file>
 
-<file path=ppt/slides/slide36.xml><?xml version="1.0" encoding="utf-8"?>
+<file path=ppt/slides/slide37.xml><?xml version="1.0" encoding="utf-8"?>
 <p:sld xmlns:a="http://schemas.openxmlformats.org/drawingml/2006/main" xmlns:r="http://schemas.openxmlformats.org/officeDocument/2006/relationships" xmlns:mc="http://schemas.openxmlformats.org/markup-compatibility/2006" xmlns:mv="urn:schemas-microsoft-com:mac:vml" xmlns:p="http://schemas.openxmlformats.org/presentationml/2006/main" xmlns:c="http://schemas.openxmlformats.org/drawingml/2006/chart" xmlns:dgm="http://schemas.openxmlformats.org/drawingml/2006/diagram" xmlns:o="urn:schemas-microsoft-com:office:office" xmlns:v="urn:schemas-microsoft-com:vml" xmlns:pvml="urn:schemas-microsoft-com:office:powerpoint" xmlns:com="http://schemas.openxmlformats.org/drawingml/2006/compatibility" xmlns:p14="http://schemas.microsoft.com/office/powerpoint/2010/main" xmlns:p15="http://schemas.microsoft.com/office/powerpoint/2012/main" xmlns:ahyp="http://schemas.microsoft.com/office/drawing/2018/hyperlinkcolor">
   <p:cSld>
     <p:spTree>
@@ -16116,7 +16313,7 @@
 </p:sld>
 </file>
 
-<file path=ppt/slides/slide37.xml><?xml version="1.0" encoding="utf-8"?>
+<file path=ppt/slides/slide38.xml><?xml version="1.0" encoding="utf-8"?>
 <p:sld xmlns:a="http://schemas.openxmlformats.org/drawingml/2006/main" xmlns:r="http://schemas.openxmlformats.org/officeDocument/2006/relationships" xmlns:mc="http://schemas.openxmlformats.org/markup-compatibility/2006" xmlns:mv="urn:schemas-microsoft-com:mac:vml" xmlns:p="http://schemas.openxmlformats.org/presentationml/2006/main" xmlns:c="http://schemas.openxmlformats.org/drawingml/2006/chart" xmlns:dgm="http://schemas.openxmlformats.org/drawingml/2006/diagram" xmlns:o="urn:schemas-microsoft-com:office:office" xmlns:v="urn:schemas-microsoft-com:vml" xmlns:pvml="urn:schemas-microsoft-com:office:powerpoint" xmlns:com="http://schemas.openxmlformats.org/drawingml/2006/compatibility" xmlns:p14="http://schemas.microsoft.com/office/powerpoint/2010/main" xmlns:p15="http://schemas.microsoft.com/office/powerpoint/2012/main" xmlns:ahyp="http://schemas.microsoft.com/office/drawing/2018/hyperlinkcolor">
   <p:cSld>
     <p:spTree>
@@ -16556,855 +16753,6 @@
 </p:sld>
 </file>
 
-<file path=ppt/slides/slide38.xml><?xml version="1.0" encoding="utf-8"?>
-<p:sld xmlns:a="http://schemas.openxmlformats.org/drawingml/2006/main" xmlns:r="http://schemas.openxmlformats.org/officeDocument/2006/relationships" xmlns:mc="http://schemas.openxmlformats.org/markup-compatibility/2006" xmlns:mv="urn:schemas-microsoft-com:mac:vml" xmlns:p="http://schemas.openxmlformats.org/presentationml/2006/main" xmlns:c="http://schemas.openxmlformats.org/drawingml/2006/chart" xmlns:dgm="http://schemas.openxmlformats.org/drawingml/2006/diagram" xmlns:o="urn:schemas-microsoft-com:office:office" xmlns:v="urn:schemas-microsoft-com:vml" xmlns:pvml="urn:schemas-microsoft-com:office:powerpoint" xmlns:com="http://schemas.openxmlformats.org/drawingml/2006/compatibility" xmlns:p14="http://schemas.microsoft.com/office/powerpoint/2010/main" xmlns:p15="http://schemas.microsoft.com/office/powerpoint/2012/main" xmlns:ahyp="http://schemas.microsoft.com/office/drawing/2018/hyperlinkcolor">
-  <p:cSld>
-    <p:spTree>
-      <p:nvGrpSpPr>
-        <p:cNvPr id="292" name="Shape 292"/>
-        <p:cNvGrpSpPr/>
-        <p:nvPr/>
-      </p:nvGrpSpPr>
-      <p:grpSpPr>
-        <a:xfrm>
-          <a:off x="0" y="0"/>
-          <a:ext cx="0" cy="0"/>
-          <a:chOff x="0" y="0"/>
-          <a:chExt cx="0" cy="0"/>
-        </a:xfrm>
-      </p:grpSpPr>
-      <p:sp>
-        <p:nvSpPr>
-          <p:cNvPr id="293" name="Google Shape;293;p45"/>
-          <p:cNvSpPr txBox="1"/>
-          <p:nvPr>
-            <p:ph type="title"/>
-          </p:nvPr>
-        </p:nvSpPr>
-        <p:spPr>
-          <a:xfrm>
-            <a:off x="311700" y="195615"/>
-            <a:ext cx="8520600" cy="572700"/>
-          </a:xfrm>
-          <a:prstGeom prst="rect">
-            <a:avLst/>
-          </a:prstGeom>
-        </p:spPr>
-        <p:txBody>
-          <a:bodyPr anchorCtr="0" anchor="t" bIns="91425" lIns="91425" spcFirstLastPara="1" rIns="91425" wrap="square" tIns="91425">
-            <a:normAutofit fontScale="90000"/>
-          </a:bodyPr>
-          <a:lstStyle/>
-          <a:p>
-            <a:pPr indent="0" lvl="0" marL="0" rtl="0" algn="l">
-              <a:spcBef>
-                <a:spcPts val="0"/>
-              </a:spcBef>
-              <a:spcAft>
-                <a:spcPts val="0"/>
-              </a:spcAft>
-              <a:buNone/>
-            </a:pPr>
-            <a:r>
-              <a:rPr lang="en">
-                <a:solidFill>
-                  <a:schemeClr val="accent5"/>
-                </a:solidFill>
-              </a:rPr>
-              <a:t>Exercises</a:t>
-            </a:r>
-            <a:endParaRPr>
-              <a:solidFill>
-                <a:schemeClr val="accent5"/>
-              </a:solidFill>
-            </a:endParaRPr>
-          </a:p>
-        </p:txBody>
-      </p:sp>
-      <p:sp>
-        <p:nvSpPr>
-          <p:cNvPr id="294" name="Google Shape;294;p45"/>
-          <p:cNvSpPr txBox="1"/>
-          <p:nvPr>
-            <p:ph idx="1" type="body"/>
-          </p:nvPr>
-        </p:nvSpPr>
-        <p:spPr>
-          <a:xfrm>
-            <a:off x="311700" y="885950"/>
-            <a:ext cx="8520600" cy="2057400"/>
-          </a:xfrm>
-          <a:prstGeom prst="rect">
-            <a:avLst/>
-          </a:prstGeom>
-        </p:spPr>
-        <p:txBody>
-          <a:bodyPr anchorCtr="0" anchor="t" bIns="91425" lIns="91425" spcFirstLastPara="1" rIns="91425" wrap="square" tIns="91425">
-            <a:normAutofit/>
-          </a:bodyPr>
-          <a:lstStyle/>
-          <a:p>
-            <a:pPr indent="-330200" lvl="0" marL="457200" rtl="0" algn="l">
-              <a:spcBef>
-                <a:spcPts val="0"/>
-              </a:spcBef>
-              <a:spcAft>
-                <a:spcPts val="0"/>
-              </a:spcAft>
-              <a:buSzPts val="1600"/>
-              <a:buChar char="●"/>
-            </a:pPr>
-            <a:r>
-              <a:rPr lang="en"/>
-              <a:t>Start from Snake9, the finished game</a:t>
-            </a:r>
-            <a:endParaRPr/>
-          </a:p>
-          <a:p>
-            <a:pPr indent="-330200" lvl="0" marL="457200" rtl="0" algn="l">
-              <a:spcBef>
-                <a:spcPts val="0"/>
-              </a:spcBef>
-              <a:spcAft>
-                <a:spcPts val="0"/>
-              </a:spcAft>
-              <a:buSzPts val="1600"/>
-              <a:buChar char="●"/>
-            </a:pPr>
-            <a:r>
-              <a:rPr lang="en"/>
-              <a:t>Speed up: make the tick shorter every time the snake eats</a:t>
-            </a:r>
-            <a:endParaRPr/>
-          </a:p>
-          <a:p>
-            <a:pPr indent="-330200" lvl="0" marL="457200" rtl="0" algn="l">
-              <a:spcBef>
-                <a:spcPts val="0"/>
-              </a:spcBef>
-              <a:spcAft>
-                <a:spcPts val="0"/>
-              </a:spcAft>
-              <a:buSzPts val="1600"/>
-              <a:buChar char="●"/>
-            </a:pPr>
-            <a:r>
-              <a:rPr lang="en"/>
-              <a:t>Where does that rule belong?</a:t>
-            </a:r>
-            <a:endParaRPr/>
-          </a:p>
-          <a:p>
-            <a:pPr indent="-330200" lvl="0" marL="457200" rtl="0" algn="l">
-              <a:spcBef>
-                <a:spcPts val="0"/>
-              </a:spcBef>
-              <a:spcAft>
-                <a:spcPts val="0"/>
-              </a:spcAft>
-              <a:buSzPts val="1600"/>
-              <a:buChar char="●"/>
-            </a:pPr>
-            <a:r>
-              <a:rPr lang="en"/>
-              <a:t>New input: the D-pad, through a GamePadInfo in GARCore</a:t>
-            </a:r>
-            <a:endParaRPr/>
-          </a:p>
-          <a:p>
-            <a:pPr indent="-330200" lvl="0" marL="457200" rtl="0" algn="l">
-              <a:spcBef>
-                <a:spcPts val="0"/>
-              </a:spcBef>
-              <a:spcAft>
-                <a:spcPts val="0"/>
-              </a:spcAft>
-              <a:buSzPts val="1600"/>
-              <a:buChar char="●"/>
-            </a:pPr>
-            <a:r>
-              <a:rPr lang="en"/>
-              <a:t>Pause: while paused, the snake doesn’t move and turns aren’t buffered</a:t>
-            </a:r>
-            <a:endParaRPr/>
-          </a:p>
-        </p:txBody>
-      </p:sp>
-    </p:spTree>
-  </p:cSld>
-  <p:clrMapOvr>
-    <a:masterClrMapping/>
-  </p:clrMapOvr>
-  <p:timing>
-    <p:tnLst>
-      <p:par>
-        <p:cTn dur="indefinite" nodeType="tmRoot" restart="never">
-          <p:childTnLst>
-            <p:seq concurrent="1" nextAc="seek">
-              <p:cTn dur="indefinite" id="2" nodeType="mainSeq">
-                <p:childTnLst>
-                  <p:par>
-                    <p:cTn fill="hold">
-                      <p:stCondLst>
-                        <p:cond delay="indefinite"/>
-                      </p:stCondLst>
-                      <p:childTnLst>
-                        <p:par>
-                          <p:cTn fill="hold">
-                            <p:stCondLst>
-                              <p:cond delay="0"/>
-                            </p:stCondLst>
-                            <p:childTnLst>
-                              <p:par>
-                                <p:cTn fill="hold" nodeType="clickEffect" presetClass="entr" presetID="1" presetSubtype="0">
-                                  <p:stCondLst>
-                                    <p:cond delay="0"/>
-                                  </p:stCondLst>
-                                  <p:childTnLst>
-                                    <p:set>
-                                      <p:cBhvr>
-                                        <p:cTn dur="1" fill="hold">
-                                          <p:stCondLst>
-                                            <p:cond delay="0"/>
-                                          </p:stCondLst>
-                                        </p:cTn>
-                                        <p:tgtEl>
-                                          <p:spTgt spid="294">
-                                            <p:txEl>
-                                              <p:pRg end="0" st="0"/>
-                                            </p:txEl>
-                                          </p:spTgt>
-                                        </p:tgtEl>
-                                        <p:attrNameLst>
-                                          <p:attrName>style.visibility</p:attrName>
-                                        </p:attrNameLst>
-                                      </p:cBhvr>
-                                      <p:to>
-                                        <p:strVal val="visible"/>
-                                      </p:to>
-                                    </p:set>
-                                  </p:childTnLst>
-                                </p:cTn>
-                              </p:par>
-                            </p:childTnLst>
-                          </p:cTn>
-                        </p:par>
-                      </p:childTnLst>
-                    </p:cTn>
-                  </p:par>
-                  <p:par>
-                    <p:cTn fill="hold">
-                      <p:stCondLst>
-                        <p:cond delay="indefinite"/>
-                      </p:stCondLst>
-                      <p:childTnLst>
-                        <p:par>
-                          <p:cTn fill="hold">
-                            <p:stCondLst>
-                              <p:cond delay="0"/>
-                            </p:stCondLst>
-                            <p:childTnLst>
-                              <p:par>
-                                <p:cTn fill="hold" nodeType="clickEffect" presetClass="entr" presetID="1" presetSubtype="0">
-                                  <p:stCondLst>
-                                    <p:cond delay="0"/>
-                                  </p:stCondLst>
-                                  <p:childTnLst>
-                                    <p:set>
-                                      <p:cBhvr>
-                                        <p:cTn dur="1" fill="hold">
-                                          <p:stCondLst>
-                                            <p:cond delay="0"/>
-                                          </p:stCondLst>
-                                        </p:cTn>
-                                        <p:tgtEl>
-                                          <p:spTgt spid="294">
-                                            <p:txEl>
-                                              <p:pRg end="1" st="1"/>
-                                            </p:txEl>
-                                          </p:spTgt>
-                                        </p:tgtEl>
-                                        <p:attrNameLst>
-                                          <p:attrName>style.visibility</p:attrName>
-                                        </p:attrNameLst>
-                                      </p:cBhvr>
-                                      <p:to>
-                                        <p:strVal val="visible"/>
-                                      </p:to>
-                                    </p:set>
-                                  </p:childTnLst>
-                                </p:cTn>
-                              </p:par>
-                            </p:childTnLst>
-                          </p:cTn>
-                        </p:par>
-                      </p:childTnLst>
-                    </p:cTn>
-                  </p:par>
-                  <p:par>
-                    <p:cTn fill="hold">
-                      <p:stCondLst>
-                        <p:cond delay="indefinite"/>
-                      </p:stCondLst>
-                      <p:childTnLst>
-                        <p:par>
-                          <p:cTn fill="hold">
-                            <p:stCondLst>
-                              <p:cond delay="0"/>
-                            </p:stCondLst>
-                            <p:childTnLst>
-                              <p:par>
-                                <p:cTn fill="hold" nodeType="clickEffect" presetClass="entr" presetID="1" presetSubtype="0">
-                                  <p:stCondLst>
-                                    <p:cond delay="0"/>
-                                  </p:stCondLst>
-                                  <p:childTnLst>
-                                    <p:set>
-                                      <p:cBhvr>
-                                        <p:cTn dur="1" fill="hold">
-                                          <p:stCondLst>
-                                            <p:cond delay="0"/>
-                                          </p:stCondLst>
-                                        </p:cTn>
-                                        <p:tgtEl>
-                                          <p:spTgt spid="294">
-                                            <p:txEl>
-                                              <p:pRg end="2" st="2"/>
-                                            </p:txEl>
-                                          </p:spTgt>
-                                        </p:tgtEl>
-                                        <p:attrNameLst>
-                                          <p:attrName>style.visibility</p:attrName>
-                                        </p:attrNameLst>
-                                      </p:cBhvr>
-                                      <p:to>
-                                        <p:strVal val="visible"/>
-                                      </p:to>
-                                    </p:set>
-                                  </p:childTnLst>
-                                </p:cTn>
-                              </p:par>
-                            </p:childTnLst>
-                          </p:cTn>
-                        </p:par>
-                      </p:childTnLst>
-                    </p:cTn>
-                  </p:par>
-                  <p:par>
-                    <p:cTn fill="hold">
-                      <p:stCondLst>
-                        <p:cond delay="indefinite"/>
-                      </p:stCondLst>
-                      <p:childTnLst>
-                        <p:par>
-                          <p:cTn fill="hold">
-                            <p:stCondLst>
-                              <p:cond delay="0"/>
-                            </p:stCondLst>
-                            <p:childTnLst>
-                              <p:par>
-                                <p:cTn fill="hold" nodeType="clickEffect" presetClass="entr" presetID="1" presetSubtype="0">
-                                  <p:stCondLst>
-                                    <p:cond delay="0"/>
-                                  </p:stCondLst>
-                                  <p:childTnLst>
-                                    <p:set>
-                                      <p:cBhvr>
-                                        <p:cTn dur="1" fill="hold">
-                                          <p:stCondLst>
-                                            <p:cond delay="0"/>
-                                          </p:stCondLst>
-                                        </p:cTn>
-                                        <p:tgtEl>
-                                          <p:spTgt spid="294">
-                                            <p:txEl>
-                                              <p:pRg end="3" st="3"/>
-                                            </p:txEl>
-                                          </p:spTgt>
-                                        </p:tgtEl>
-                                        <p:attrNameLst>
-                                          <p:attrName>style.visibility</p:attrName>
-                                        </p:attrNameLst>
-                                      </p:cBhvr>
-                                      <p:to>
-                                        <p:strVal val="visible"/>
-                                      </p:to>
-                                    </p:set>
-                                  </p:childTnLst>
-                                </p:cTn>
-                              </p:par>
-                            </p:childTnLst>
-                          </p:cTn>
-                        </p:par>
-                      </p:childTnLst>
-                    </p:cTn>
-                  </p:par>
-                  <p:par>
-                    <p:cTn fill="hold">
-                      <p:stCondLst>
-                        <p:cond delay="indefinite"/>
-                      </p:stCondLst>
-                      <p:childTnLst>
-                        <p:par>
-                          <p:cTn fill="hold">
-                            <p:stCondLst>
-                              <p:cond delay="0"/>
-                            </p:stCondLst>
-                            <p:childTnLst>
-                              <p:par>
-                                <p:cTn fill="hold" nodeType="clickEffect" presetClass="entr" presetID="1" presetSubtype="0">
-                                  <p:stCondLst>
-                                    <p:cond delay="0"/>
-                                  </p:stCondLst>
-                                  <p:childTnLst>
-                                    <p:set>
-                                      <p:cBhvr>
-                                        <p:cTn dur="1" fill="hold">
-                                          <p:stCondLst>
-                                            <p:cond delay="0"/>
-                                          </p:stCondLst>
-                                        </p:cTn>
-                                        <p:tgtEl>
-                                          <p:spTgt spid="294">
-                                            <p:txEl>
-                                              <p:pRg end="4" st="4"/>
-                                            </p:txEl>
-                                          </p:spTgt>
-                                        </p:tgtEl>
-                                        <p:attrNameLst>
-                                          <p:attrName>style.visibility</p:attrName>
-                                        </p:attrNameLst>
-                                      </p:cBhvr>
-                                      <p:to>
-                                        <p:strVal val="visible"/>
-                                      </p:to>
-                                    </p:set>
-                                  </p:childTnLst>
-                                </p:cTn>
-                              </p:par>
-                            </p:childTnLst>
-                          </p:cTn>
-                        </p:par>
-                      </p:childTnLst>
-                    </p:cTn>
-                  </p:par>
-                  <p:par>
-                    <p:cTn fill="hold">
-                      <p:stCondLst>
-                        <p:cond delay="indefinite"/>
-                      </p:stCondLst>
-                      <p:childTnLst>
-                        <p:par>
-                          <p:cTn fill="hold">
-                            <p:stCondLst>
-                              <p:cond delay="0"/>
-                            </p:stCondLst>
-                            <p:childTnLst>
-                              <p:par>
-                                <p:cTn fill="hold" nodeType="clickEffect" presetClass="entr" presetID="1" presetSubtype="0">
-                                  <p:stCondLst>
-                                    <p:cond delay="0"/>
-                                  </p:stCondLst>
-                                  <p:childTnLst>
-                                    <p:set>
-                                      <p:cBhvr>
-                                        <p:cTn dur="1" fill="hold">
-                                          <p:stCondLst>
-                                            <p:cond delay="0"/>
-                                          </p:stCondLst>
-                                        </p:cTn>
-                                        <p:tgtEl>
-                                          <p:spTgt spid="294">
-                                            <p:txEl>
-                                              <p:pRg end="5" st="5"/>
-                                            </p:txEl>
-                                          </p:spTgt>
-                                        </p:tgtEl>
-                                        <p:attrNameLst>
-                                          <p:attrName>style.visibility</p:attrName>
-                                        </p:attrNameLst>
-                                      </p:cBhvr>
-                                      <p:to>
-                                        <p:strVal val="visible"/>
-                                      </p:to>
-                                    </p:set>
-                                  </p:childTnLst>
-                                </p:cTn>
-                              </p:par>
-                            </p:childTnLst>
-                          </p:cTn>
-                        </p:par>
-                      </p:childTnLst>
-                    </p:cTn>
-                  </p:par>
-                  <p:par>
-                    <p:cTn fill="hold">
-                      <p:stCondLst>
-                        <p:cond delay="indefinite"/>
-                      </p:stCondLst>
-                      <p:childTnLst>
-                        <p:par>
-                          <p:cTn fill="hold">
-                            <p:stCondLst>
-                              <p:cond delay="0"/>
-                            </p:stCondLst>
-                            <p:childTnLst>
-                              <p:par>
-                                <p:cTn fill="hold" nodeType="clickEffect" presetClass="entr" presetID="1" presetSubtype="0">
-                                  <p:stCondLst>
-                                    <p:cond delay="0"/>
-                                  </p:stCondLst>
-                                  <p:childTnLst>
-                                    <p:set>
-                                      <p:cBhvr>
-                                        <p:cTn dur="1" fill="hold">
-                                          <p:stCondLst>
-                                            <p:cond delay="0"/>
-                                          </p:stCondLst>
-                                        </p:cTn>
-                                        <p:tgtEl>
-                                          <p:spTgt spid="294">
-                                            <p:txEl>
-                                              <p:pRg end="6" st="6"/>
-                                            </p:txEl>
-                                          </p:spTgt>
-                                        </p:tgtEl>
-                                        <p:attrNameLst>
-                                          <p:attrName>style.visibility</p:attrName>
-                                        </p:attrNameLst>
-                                      </p:cBhvr>
-                                      <p:to>
-                                        <p:strVal val="visible"/>
-                                      </p:to>
-                                    </p:set>
-                                  </p:childTnLst>
-                                </p:cTn>
-                              </p:par>
-                            </p:childTnLst>
-                          </p:cTn>
-                        </p:par>
-                      </p:childTnLst>
-                    </p:cTn>
-                  </p:par>
-                  <p:par>
-                    <p:cTn fill="hold">
-                      <p:stCondLst>
-                        <p:cond delay="indefinite"/>
-                      </p:stCondLst>
-                      <p:childTnLst>
-                        <p:par>
-                          <p:cTn fill="hold">
-                            <p:stCondLst>
-                              <p:cond delay="0"/>
-                            </p:stCondLst>
-                            <p:childTnLst>
-                              <p:par>
-                                <p:cTn fill="hold" nodeType="clickEffect" presetClass="entr" presetID="1" presetSubtype="0">
-                                  <p:stCondLst>
-                                    <p:cond delay="0"/>
-                                  </p:stCondLst>
-                                  <p:childTnLst>
-                                    <p:set>
-                                      <p:cBhvr>
-                                        <p:cTn dur="1" fill="hold">
-                                          <p:stCondLst>
-                                            <p:cond delay="0"/>
-                                          </p:stCondLst>
-                                        </p:cTn>
-                                        <p:tgtEl>
-                                          <p:spTgt spid="294">
-                                            <p:txEl>
-                                              <p:pRg end="7" st="7"/>
-                                            </p:txEl>
-                                          </p:spTgt>
-                                        </p:tgtEl>
-                                        <p:attrNameLst>
-                                          <p:attrName>style.visibility</p:attrName>
-                                        </p:attrNameLst>
-                                      </p:cBhvr>
-                                      <p:to>
-                                        <p:strVal val="visible"/>
-                                      </p:to>
-                                    </p:set>
-                                  </p:childTnLst>
-                                </p:cTn>
-                              </p:par>
-                            </p:childTnLst>
-                          </p:cTn>
-                        </p:par>
-                      </p:childTnLst>
-                    </p:cTn>
-                  </p:par>
-                  <p:par>
-                    <p:cTn fill="hold">
-                      <p:stCondLst>
-                        <p:cond delay="indefinite"/>
-                      </p:stCondLst>
-                      <p:childTnLst>
-                        <p:par>
-                          <p:cTn fill="hold">
-                            <p:stCondLst>
-                              <p:cond delay="0"/>
-                            </p:stCondLst>
-                            <p:childTnLst>
-                              <p:par>
-                                <p:cTn fill="hold" nodeType="clickEffect" presetClass="entr" presetID="1" presetSubtype="0">
-                                  <p:stCondLst>
-                                    <p:cond delay="0"/>
-                                  </p:stCondLst>
-                                  <p:childTnLst>
-                                    <p:set>
-                                      <p:cBhvr>
-                                        <p:cTn dur="1" fill="hold">
-                                          <p:stCondLst>
-                                            <p:cond delay="0"/>
-                                          </p:stCondLst>
-                                        </p:cTn>
-                                        <p:tgtEl>
-                                          <p:spTgt spid="294">
-                                            <p:txEl>
-                                              <p:pRg end="8" st="8"/>
-                                            </p:txEl>
-                                          </p:spTgt>
-                                        </p:tgtEl>
-                                        <p:attrNameLst>
-                                          <p:attrName>style.visibility</p:attrName>
-                                        </p:attrNameLst>
-                                      </p:cBhvr>
-                                      <p:to>
-                                        <p:strVal val="visible"/>
-                                      </p:to>
-                                    </p:set>
-                                  </p:childTnLst>
-                                </p:cTn>
-                              </p:par>
-                            </p:childTnLst>
-                          </p:cTn>
-                        </p:par>
-                      </p:childTnLst>
-                    </p:cTn>
-                  </p:par>
-                  <p:par>
-                    <p:cTn fill="hold">
-                      <p:stCondLst>
-                        <p:cond delay="indefinite"/>
-                      </p:stCondLst>
-                      <p:childTnLst>
-                        <p:par>
-                          <p:cTn fill="hold">
-                            <p:stCondLst>
-                              <p:cond delay="0"/>
-                            </p:stCondLst>
-                            <p:childTnLst>
-                              <p:par>
-                                <p:cTn fill="hold" nodeType="clickEffect" presetClass="entr" presetID="1" presetSubtype="0">
-                                  <p:stCondLst>
-                                    <p:cond delay="0"/>
-                                  </p:stCondLst>
-                                  <p:childTnLst>
-                                    <p:set>
-                                      <p:cBhvr>
-                                        <p:cTn dur="1" fill="hold">
-                                          <p:stCondLst>
-                                            <p:cond delay="0"/>
-                                          </p:stCondLst>
-                                        </p:cTn>
-                                        <p:tgtEl>
-                                          <p:spTgt spid="294">
-                                            <p:txEl>
-                                              <p:pRg end="9" st="9"/>
-                                            </p:txEl>
-                                          </p:spTgt>
-                                        </p:tgtEl>
-                                        <p:attrNameLst>
-                                          <p:attrName>style.visibility</p:attrName>
-                                        </p:attrNameLst>
-                                      </p:cBhvr>
-                                      <p:to>
-                                        <p:strVal val="visible"/>
-                                      </p:to>
-                                    </p:set>
-                                  </p:childTnLst>
-                                </p:cTn>
-                              </p:par>
-                            </p:childTnLst>
-                          </p:cTn>
-                        </p:par>
-                      </p:childTnLst>
-                    </p:cTn>
-                  </p:par>
-                  <p:par>
-                    <p:cTn fill="hold">
-                      <p:stCondLst>
-                        <p:cond delay="indefinite"/>
-                      </p:stCondLst>
-                      <p:childTnLst>
-                        <p:par>
-                          <p:cTn fill="hold">
-                            <p:stCondLst>
-                              <p:cond delay="0"/>
-                            </p:stCondLst>
-                            <p:childTnLst>
-                              <p:par>
-                                <p:cTn fill="hold" nodeType="clickEffect" presetClass="entr" presetID="1" presetSubtype="0">
-                                  <p:stCondLst>
-                                    <p:cond delay="0"/>
-                                  </p:stCondLst>
-                                  <p:childTnLst>
-                                    <p:set>
-                                      <p:cBhvr>
-                                        <p:cTn dur="1" fill="hold">
-                                          <p:stCondLst>
-                                            <p:cond delay="0"/>
-                                          </p:stCondLst>
-                                        </p:cTn>
-                                        <p:tgtEl>
-                                          <p:spTgt spid="294">
-                                            <p:txEl>
-                                              <p:pRg end="10" st="10"/>
-                                            </p:txEl>
-                                          </p:spTgt>
-                                        </p:tgtEl>
-                                        <p:attrNameLst>
-                                          <p:attrName>style.visibility</p:attrName>
-                                        </p:attrNameLst>
-                                      </p:cBhvr>
-                                      <p:to>
-                                        <p:strVal val="visible"/>
-                                      </p:to>
-                                    </p:set>
-                                  </p:childTnLst>
-                                </p:cTn>
-                              </p:par>
-                            </p:childTnLst>
-                          </p:cTn>
-                        </p:par>
-                      </p:childTnLst>
-                    </p:cTn>
-                  </p:par>
-                  <p:par>
-                    <p:cTn fill="hold">
-                      <p:stCondLst>
-                        <p:cond delay="indefinite"/>
-                      </p:stCondLst>
-                      <p:childTnLst>
-                        <p:par>
-                          <p:cTn fill="hold">
-                            <p:stCondLst>
-                              <p:cond delay="0"/>
-                            </p:stCondLst>
-                            <p:childTnLst>
-                              <p:par>
-                                <p:cTn fill="hold" nodeType="clickEffect" presetClass="entr" presetID="1" presetSubtype="0">
-                                  <p:stCondLst>
-                                    <p:cond delay="0"/>
-                                  </p:stCondLst>
-                                  <p:childTnLst>
-                                    <p:set>
-                                      <p:cBhvr>
-                                        <p:cTn dur="1" fill="hold">
-                                          <p:stCondLst>
-                                            <p:cond delay="0"/>
-                                          </p:stCondLst>
-                                        </p:cTn>
-                                        <p:tgtEl>
-                                          <p:spTgt spid="294">
-                                            <p:txEl>
-                                              <p:pRg end="11" st="11"/>
-                                            </p:txEl>
-                                          </p:spTgt>
-                                        </p:tgtEl>
-                                        <p:attrNameLst>
-                                          <p:attrName>style.visibility</p:attrName>
-                                        </p:attrNameLst>
-                                      </p:cBhvr>
-                                      <p:to>
-                                        <p:strVal val="visible"/>
-                                      </p:to>
-                                    </p:set>
-                                  </p:childTnLst>
-                                </p:cTn>
-                              </p:par>
-                            </p:childTnLst>
-                          </p:cTn>
-                        </p:par>
-                      </p:childTnLst>
-                    </p:cTn>
-                  </p:par>
-                  <p:par>
-                    <p:cTn fill="hold">
-                      <p:stCondLst>
-                        <p:cond delay="indefinite"/>
-                      </p:stCondLst>
-                      <p:childTnLst>
-                        <p:par>
-                          <p:cTn fill="hold">
-                            <p:stCondLst>
-                              <p:cond delay="0"/>
-                            </p:stCondLst>
-                            <p:childTnLst>
-                              <p:par>
-                                <p:cTn fill="hold" nodeType="clickEffect" presetClass="entr" presetID="1" presetSubtype="0">
-                                  <p:stCondLst>
-                                    <p:cond delay="0"/>
-                                  </p:stCondLst>
-                                  <p:childTnLst>
-                                    <p:set>
-                                      <p:cBhvr>
-                                        <p:cTn dur="1" fill="hold">
-                                          <p:stCondLst>
-                                            <p:cond delay="0"/>
-                                          </p:stCondLst>
-                                        </p:cTn>
-                                        <p:tgtEl>
-                                          <p:spTgt spid="294">
-                                            <p:txEl>
-                                              <p:pRg end="12" st="12"/>
-                                            </p:txEl>
-                                          </p:spTgt>
-                                        </p:tgtEl>
-                                        <p:attrNameLst>
-                                          <p:attrName>style.visibility</p:attrName>
-                                        </p:attrNameLst>
-                                      </p:cBhvr>
-                                      <p:to>
-                                        <p:strVal val="visible"/>
-                                      </p:to>
-                                    </p:set>
-                                  </p:childTnLst>
-                                </p:cTn>
-                              </p:par>
-                            </p:childTnLst>
-                          </p:cTn>
-                        </p:par>
-                      </p:childTnLst>
-                    </p:cTn>
-                  </p:par>
-                </p:childTnLst>
-              </p:cTn>
-              <p:prevCondLst>
-                <p:cond evt="onPrev">
-                  <p:tgtEl>
-                    <p:sldTgt/>
-                  </p:tgtEl>
-                </p:cond>
-              </p:prevCondLst>
-              <p:nextCondLst>
-                <p:cond evt="onNext">
-                  <p:tgtEl>
-                    <p:sldTgt/>
-                  </p:tgtEl>
-                </p:cond>
-              </p:nextCondLst>
-            </p:seq>
-          </p:childTnLst>
-        </p:cTn>
-      </p:par>
-    </p:tnLst>
-  </p:timing>
-</p:sld>
-</file>
-
 <file path=ppt/slides/slide39.xml><?xml version="1.0" encoding="utf-8"?>
 <p:sld xmlns:a="http://schemas.openxmlformats.org/drawingml/2006/main" xmlns:r="http://schemas.openxmlformats.org/officeDocument/2006/relationships" xmlns:mc="http://schemas.openxmlformats.org/markup-compatibility/2006" xmlns:mv="urn:schemas-microsoft-com:mac:vml" xmlns:p="http://schemas.openxmlformats.org/presentationml/2006/main" xmlns:c="http://schemas.openxmlformats.org/drawingml/2006/chart" xmlns:dgm="http://schemas.openxmlformats.org/drawingml/2006/diagram" xmlns:o="urn:schemas-microsoft-com:office:office" xmlns:v="urn:schemas-microsoft-com:vml" xmlns:pvml="urn:schemas-microsoft-com:office:powerpoint" xmlns:com="http://schemas.openxmlformats.org/drawingml/2006/compatibility" xmlns:p14="http://schemas.microsoft.com/office/powerpoint/2010/main" xmlns:p15="http://schemas.microsoft.com/office/powerpoint/2012/main" xmlns:ahyp="http://schemas.microsoft.com/office/drawing/2018/hyperlinkcolor">
   <p:cSld>
@@ -17460,7 +16808,7 @@
                   <a:schemeClr val="accent5"/>
                 </a:solidFill>
               </a:rPr>
-              <a:t>Exercise: Refactor (Stretch)</a:t>
+              <a:t>Exercises</a:t>
             </a:r>
             <a:endParaRPr>
               <a:solidFill>
@@ -17481,7 +16829,7 @@
         <p:spPr>
           <a:xfrm>
             <a:off x="311700" y="885950"/>
-            <a:ext cx="8520600" cy="4023300"/>
+            <a:ext cx="8520600" cy="2057400"/>
           </a:xfrm>
           <a:prstGeom prst="rect">
             <a:avLst/>
@@ -17505,7 +16853,7 @@
             </a:pPr>
             <a:r>
               <a:rPr lang="en"/>
-              <a:t>The tick timer lives in the Snake class</a:t>
+              <a:t>Start from Snake9, the finished game</a:t>
             </a:r>
             <a:endParaRPr/>
           </a:p>
@@ -17522,24 +16870,7 @@
             </a:pPr>
             <a:r>
               <a:rPr lang="en"/>
-              <a:t>Move it into a reusable FixedTimer class in GARCore</a:t>
-            </a:r>
-            <a:endParaRPr/>
-          </a:p>
-          <a:p>
-            <a:pPr indent="-317500" lvl="1" marL="914400" rtl="0" algn="l">
-              <a:spcBef>
-                <a:spcPts val="0"/>
-              </a:spcBef>
-              <a:spcAft>
-                <a:spcPts val="0"/>
-              </a:spcAft>
-              <a:buSzPts val="1400"/>
-              <a:buChar char="○"/>
-            </a:pPr>
-            <a:r>
-              <a:rPr lang="en"/>
-              <a:t>It calls back on every tick</a:t>
+              <a:t>Speed up: make the tick shorter every time the snake eats</a:t>
             </a:r>
             <a:endParaRPr/>
           </a:p>
@@ -17556,7 +16887,41 @@
             </a:pPr>
             <a:r>
               <a:rPr lang="en"/>
-              <a:t>Use it for the snake</a:t>
+              <a:t>Where does that rule belong?</a:t>
+            </a:r>
+            <a:endParaRPr/>
+          </a:p>
+          <a:p>
+            <a:pPr indent="-330200" lvl="0" marL="457200" rtl="0" algn="l">
+              <a:spcBef>
+                <a:spcPts val="0"/>
+              </a:spcBef>
+              <a:spcAft>
+                <a:spcPts val="0"/>
+              </a:spcAft>
+              <a:buSzPts val="1600"/>
+              <a:buChar char="●"/>
+            </a:pPr>
+            <a:r>
+              <a:rPr lang="en"/>
+              <a:t>New input: the D-pad, through a GamePadInfo in GARCore</a:t>
+            </a:r>
+            <a:endParaRPr/>
+          </a:p>
+          <a:p>
+            <a:pPr indent="-330200" lvl="0" marL="457200" rtl="0" algn="l">
+              <a:spcBef>
+                <a:spcPts val="0"/>
+              </a:spcBef>
+              <a:spcAft>
+                <a:spcPts val="0"/>
+              </a:spcAft>
+              <a:buSzPts val="1600"/>
+              <a:buChar char="●"/>
+            </a:pPr>
+            <a:r>
+              <a:rPr lang="en"/>
+              <a:t>Pause: while paused, the snake doesn’t move and turns aren’t buffered</a:t>
             </a:r>
             <a:endParaRPr/>
           </a:p>
@@ -18738,179 +18103,6 @@
 </file>
 
 <file path=ppt/slides/slide40.xml><?xml version="1.0" encoding="utf-8"?>
-<p:sld xmlns:a="http://schemas.openxmlformats.org/drawingml/2006/main" xmlns:p="http://schemas.openxmlformats.org/presentationml/2006/main" xmlns:r="http://schemas.openxmlformats.org/officeDocument/2006/relationships">
-  <p:cSld>
-    <p:spTree>
-      <p:nvGrpSpPr>
-        <p:cNvPr id="1" name=""/>
-        <p:cNvGrpSpPr/>
-        <p:nvPr/>
-      </p:nvGrpSpPr>
-      <p:grpSpPr/>
-      <p:sp>
-        <p:nvSpPr>
-          <p:cNvPr id="2" name="Title 1"/>
-          <p:cNvSpPr>
-            <a:spLocks noGrp="1"/>
-          </p:cNvSpPr>
-          <p:nvPr>
-            <p:ph type="title"/>
-          </p:nvPr>
-        </p:nvSpPr>
-        <p:spPr/>
-        <p:txBody>
-          <a:bodyPr/>
-          <a:lstStyle/>
-          <a:p>
-            <a:pPr indent="0" lvl="0" marL="0" rtl="0" algn="l">
-              <a:spcBef>
-                <a:spcPts val="0"/>
-              </a:spcBef>
-              <a:spcAft>
-                <a:spcPts val="0"/>
-              </a:spcAft>
-              <a:buNone/>
-            </a:pPr>
-            <a:r>
-              <a:rPr lang="en"/>
-              <a:t>Check Yourself</a:t>
-            </a:r>
-            <a:endParaRPr/>
-          </a:p>
-        </p:txBody>
-      </p:sp>
-      <p:sp>
-        <p:nvSpPr>
-          <p:cNvPr id="3" name="Text Placeholder 2"/>
-          <p:cNvSpPr>
-            <a:spLocks noGrp="1"/>
-          </p:cNvSpPr>
-          <p:nvPr>
-            <p:ph type="body" idx="1"/>
-          </p:nvPr>
-        </p:nvSpPr>
-        <p:spPr>
-          <a:xfrm>
-            <a:off x="311700" y="885950"/>
-            <a:ext cx="8520600" cy="1719072"/>
-          </a:xfrm>
-        </p:spPr>
-        <p:txBody>
-          <a:bodyPr/>
-          <a:lstStyle/>
-          <a:p>
-            <a:pPr indent="-330200" lvl="0" marL="457200" rtl="0" algn="l">
-              <a:spcBef>
-                <a:spcPts val="0"/>
-              </a:spcBef>
-              <a:spcAft>
-                <a:spcPts val="0"/>
-              </a:spcAft>
-              <a:buSzPts val="1600"/>
-              <a:buChar char="●"/>
-            </a:pPr>
-            <a:r>
-              <a:rPr lang="en"/>
-              <a:t>Why prefer a texture atlas over many individual image files?</a:t>
-            </a:r>
-            <a:endParaRPr/>
-          </a:p>
-          <a:p>
-            <a:pPr indent="-330200" lvl="0" marL="457200" rtl="0" algn="l">
-              <a:spcBef>
-                <a:spcPts val="0"/>
-              </a:spcBef>
-              <a:spcAft>
-                <a:spcPts val="0"/>
-              </a:spcAft>
-              <a:buSzPts val="1600"/>
-              <a:buChar char="●"/>
-            </a:pPr>
-            <a:r>
-              <a:rPr lang="en"/>
-              <a:t>Why subtract the tick duration from the accumulator instead of resetting it?</a:t>
-            </a:r>
-            <a:endParaRPr/>
-          </a:p>
-          <a:p>
-            <a:pPr indent="-330200" lvl="0" marL="457200" rtl="0" algn="l">
-              <a:spcBef>
-                <a:spcPts val="0"/>
-              </a:spcBef>
-              <a:spcAft>
-                <a:spcPts val="0"/>
-              </a:spcAft>
-              <a:buSzPts val="1600"/>
-              <a:buChar char="●"/>
-            </a:pPr>
-            <a:r>
-              <a:rPr lang="en"/>
-              <a:t>What problems come from reading the keyboard inside gameplay code?</a:t>
-            </a:r>
-            <a:endParaRPr/>
-          </a:p>
-          <a:p>
-            <a:pPr indent="-330200" lvl="0" marL="457200" rtl="0" algn="l">
-              <a:spcBef>
-                <a:spcPts val="0"/>
-              </a:spcBef>
-              <a:spcAft>
-                <a:spcPts val="0"/>
-              </a:spcAft>
-              <a:buSzPts val="1600"/>
-              <a:buChar char="●"/>
-            </a:pPr>
-            <a:r>
-              <a:rPr lang="en"/>
-              <a:t>Why check a buffered turn against the last buffered direction?</a:t>
-            </a:r>
-            <a:endParaRPr/>
-          </a:p>
-        </p:txBody>
-      </p:sp>
-      <p:sp>
-        <p:nvSpPr>
-          <p:cNvPr id="4" name="TextBox 3"/>
-          <p:cNvSpPr txBox="1"/>
-          <p:nvPr/>
-        </p:nvSpPr>
-        <p:spPr>
-          <a:xfrm>
-            <a:off x="457200" y="3182112"/>
-            <a:ext cx="8229600" cy="457200"/>
-          </a:xfrm>
-          <a:prstGeom prst="rect">
-            <a:avLst/>
-          </a:prstGeom>
-          <a:noFill/>
-        </p:spPr>
-        <p:txBody>
-          <a:bodyPr wrap="square">
-            <a:spAutoFit/>
-          </a:bodyPr>
-          <a:lstStyle/>
-          <a:p>
-            <a:pPr algn="ctr"/>
-            <a:r>
-              <a:rPr sz="1400" b="0" i="0">
-                <a:solidFill>
-                  <a:srgbClr val="9AA3AB"/>
-                </a:solidFill>
-              </a:rPr>
-              <a:t>The answers, and more questions, are on the course site.</a:t>
-            </a:r>
-          </a:p>
-        </p:txBody>
-      </p:sp>
-    </p:spTree>
-  </p:cSld>
-  <p:clrMapOvr>
-    <a:masterClrMapping/>
-  </p:clrMapOvr>
-</p:sld>
-</file>
-
-<file path=ppt/slides/slide41.xml><?xml version="1.0" encoding="utf-8"?>
 <p:sld xmlns:a="http://schemas.openxmlformats.org/drawingml/2006/main" xmlns:r="http://schemas.openxmlformats.org/officeDocument/2006/relationships" xmlns:mc="http://schemas.openxmlformats.org/markup-compatibility/2006" xmlns:mv="urn:schemas-microsoft-com:mac:vml" xmlns:p="http://schemas.openxmlformats.org/presentationml/2006/main" xmlns:c="http://schemas.openxmlformats.org/drawingml/2006/chart" xmlns:dgm="http://schemas.openxmlformats.org/drawingml/2006/diagram" xmlns:o="urn:schemas-microsoft-com:office:office" xmlns:v="urn:schemas-microsoft-com:vml" xmlns:pvml="urn:schemas-microsoft-com:office:powerpoint" xmlns:com="http://schemas.openxmlformats.org/drawingml/2006/compatibility" xmlns:p14="http://schemas.microsoft.com/office/powerpoint/2010/main" xmlns:p15="http://schemas.microsoft.com/office/powerpoint/2012/main" xmlns:ahyp="http://schemas.microsoft.com/office/drawing/2018/hyperlinkcolor">
   <p:cSld>
     <p:spTree>
@@ -18965,7 +18157,7 @@
                   <a:schemeClr val="accent5"/>
                 </a:solidFill>
               </a:rPr>
-              <a:t>Apply It to Your Project</a:t>
+              <a:t>Exercise: Refactor (Stretch)</a:t>
             </a:r>
             <a:endParaRPr>
               <a:solidFill>
@@ -19010,7 +18202,7 @@
             </a:pPr>
             <a:r>
               <a:rPr lang="en"/>
-              <a:t>Which assets and settings are hardcoded, and could live in data files?</a:t>
+              <a:t>The tick timer lives in the Snake class</a:t>
             </a:r>
             <a:endParaRPr/>
           </a:p>
@@ -19027,7 +18219,7 @@
             </a:pPr>
             <a:r>
               <a:rPr lang="en"/>
-              <a:t>What are the actions in your game?</a:t>
+              <a:t>Move it into a reusable FixedTimer class in GARCore</a:t>
             </a:r>
             <a:endParaRPr/>
           </a:p>
@@ -19044,7 +18236,7 @@
             </a:pPr>
             <a:r>
               <a:rPr lang="en"/>
-              <a:t>List them separately from the keys and buttons that trigger them</a:t>
+              <a:t>It calls back on every tick</a:t>
             </a:r>
             <a:endParaRPr/>
           </a:p>
@@ -19061,7 +18253,7 @@
             </a:pPr>
             <a:r>
               <a:rPr lang="en"/>
-              <a:t>Does anything in your game happen on a fixed tick?</a:t>
+              <a:t>Use it for the snake</a:t>
             </a:r>
             <a:endParaRPr/>
           </a:p>
@@ -19742,7 +18934,7 @@
 </p:sld>
 </file>
 
-<file path=ppt/slides/slide42.xml><?xml version="1.0" encoding="utf-8"?>
+<file path=ppt/slides/slide41.xml><?xml version="1.0" encoding="utf-8"?>
 <p:sld xmlns:a="http://schemas.openxmlformats.org/drawingml/2006/main" xmlns:p="http://schemas.openxmlformats.org/presentationml/2006/main" xmlns:r="http://schemas.openxmlformats.org/officeDocument/2006/relationships">
   <p:cSld>
     <p:spTree>
@@ -19778,36 +18970,2038 @@
             </a:pPr>
             <a:r>
               <a:rPr lang="en"/>
-              <a:t>Broad Phase and Narrow Phase</a:t>
+              <a:t>Check Yourself</a:t>
             </a:r>
             <a:endParaRPr/>
           </a:p>
         </p:txBody>
       </p:sp>
-      <p:pic>
-        <p:nvPicPr>
-          <p:cNvPr id="3" name="Picture 2" descr="image.png"/>
-          <p:cNvPicPr>
-            <a:picLocks noChangeAspect="1"/>
-          </p:cNvPicPr>
-          <p:nvPr/>
-        </p:nvPicPr>
-        <p:blipFill>
-          <a:blip r:embed="rId2"/>
-          <a:stretch>
-            <a:fillRect/>
-          </a:stretch>
-        </p:blipFill>
+      <p:sp>
+        <p:nvSpPr>
+          <p:cNvPr id="3" name="Text Placeholder 2"/>
+          <p:cNvSpPr>
+            <a:spLocks noGrp="1"/>
+          </p:cNvSpPr>
+          <p:nvPr>
+            <p:ph type="body" idx="1"/>
+          </p:nvPr>
+        </p:nvSpPr>
         <p:spPr>
           <a:xfrm>
-            <a:off x="320039" y="1051560"/>
-            <a:ext cx="8503920" cy="3779520"/>
+            <a:off x="311700" y="885950"/>
+            <a:ext cx="8520600" cy="1719072"/>
+          </a:xfrm>
+        </p:spPr>
+        <p:txBody>
+          <a:bodyPr/>
+          <a:lstStyle/>
+          <a:p>
+            <a:pPr indent="-330200" lvl="0" marL="457200" rtl="0" algn="l">
+              <a:spcBef>
+                <a:spcPts val="0"/>
+              </a:spcBef>
+              <a:spcAft>
+                <a:spcPts val="0"/>
+              </a:spcAft>
+              <a:buSzPts val="1600"/>
+              <a:buChar char="●"/>
+            </a:pPr>
+            <a:r>
+              <a:rPr lang="en"/>
+              <a:t>Why prefer a texture atlas over many individual image files?</a:t>
+            </a:r>
+            <a:endParaRPr/>
+          </a:p>
+          <a:p>
+            <a:pPr indent="-330200" lvl="0" marL="457200" rtl="0" algn="l">
+              <a:spcBef>
+                <a:spcPts val="0"/>
+              </a:spcBef>
+              <a:spcAft>
+                <a:spcPts val="0"/>
+              </a:spcAft>
+              <a:buSzPts val="1600"/>
+              <a:buChar char="●"/>
+            </a:pPr>
+            <a:r>
+              <a:rPr lang="en"/>
+              <a:t>Why subtract the tick duration from the accumulator instead of resetting it?</a:t>
+            </a:r>
+            <a:endParaRPr/>
+          </a:p>
+          <a:p>
+            <a:pPr indent="-330200" lvl="0" marL="457200" rtl="0" algn="l">
+              <a:spcBef>
+                <a:spcPts val="0"/>
+              </a:spcBef>
+              <a:spcAft>
+                <a:spcPts val="0"/>
+              </a:spcAft>
+              <a:buSzPts val="1600"/>
+              <a:buChar char="●"/>
+            </a:pPr>
+            <a:r>
+              <a:rPr lang="en"/>
+              <a:t>What problems come from reading the keyboard inside gameplay code?</a:t>
+            </a:r>
+            <a:endParaRPr/>
+          </a:p>
+          <a:p>
+            <a:pPr indent="-330200" lvl="0" marL="457200" rtl="0" algn="l">
+              <a:spcBef>
+                <a:spcPts val="0"/>
+              </a:spcBef>
+              <a:spcAft>
+                <a:spcPts val="0"/>
+              </a:spcAft>
+              <a:buSzPts val="1600"/>
+              <a:buChar char="●"/>
+            </a:pPr>
+            <a:r>
+              <a:rPr lang="en"/>
+              <a:t>Why check a buffered turn against the last buffered direction?</a:t>
+            </a:r>
+            <a:endParaRPr/>
+          </a:p>
+        </p:txBody>
+      </p:sp>
+      <p:sp>
+        <p:nvSpPr>
+          <p:cNvPr id="4" name="TextBox 3"/>
+          <p:cNvSpPr txBox="1"/>
+          <p:nvPr/>
+        </p:nvSpPr>
+        <p:spPr>
+          <a:xfrm>
+            <a:off x="457200" y="3182112"/>
+            <a:ext cx="8229600" cy="457200"/>
+          </a:xfrm>
+          <a:prstGeom prst="rect">
+            <a:avLst/>
+          </a:prstGeom>
+          <a:noFill/>
+        </p:spPr>
+        <p:txBody>
+          <a:bodyPr wrap="square">
+            <a:spAutoFit/>
+          </a:bodyPr>
+          <a:lstStyle/>
+          <a:p>
+            <a:pPr algn="ctr"/>
+            <a:r>
+              <a:rPr sz="1400" b="0" i="0">
+                <a:solidFill>
+                  <a:srgbClr val="9AA3AB"/>
+                </a:solidFill>
+              </a:rPr>
+              <a:t>The answers, and more questions, are on the course site.</a:t>
+            </a:r>
+          </a:p>
+        </p:txBody>
+      </p:sp>
+    </p:spTree>
+  </p:cSld>
+  <p:clrMapOvr>
+    <a:masterClrMapping/>
+  </p:clrMapOvr>
+</p:sld>
+</file>
+
+<file path=ppt/slides/slide42.xml><?xml version="1.0" encoding="utf-8"?>
+<p:sld xmlns:a="http://schemas.openxmlformats.org/drawingml/2006/main" xmlns:r="http://schemas.openxmlformats.org/officeDocument/2006/relationships" xmlns:mc="http://schemas.openxmlformats.org/markup-compatibility/2006" xmlns:mv="urn:schemas-microsoft-com:mac:vml" xmlns:p="http://schemas.openxmlformats.org/presentationml/2006/main" xmlns:c="http://schemas.openxmlformats.org/drawingml/2006/chart" xmlns:dgm="http://schemas.openxmlformats.org/drawingml/2006/diagram" xmlns:o="urn:schemas-microsoft-com:office:office" xmlns:v="urn:schemas-microsoft-com:vml" xmlns:pvml="urn:schemas-microsoft-com:office:powerpoint" xmlns:com="http://schemas.openxmlformats.org/drawingml/2006/compatibility" xmlns:p14="http://schemas.microsoft.com/office/powerpoint/2010/main" xmlns:p15="http://schemas.microsoft.com/office/powerpoint/2012/main" xmlns:ahyp="http://schemas.microsoft.com/office/drawing/2018/hyperlinkcolor">
+  <p:cSld>
+    <p:spTree>
+      <p:nvGrpSpPr>
+        <p:cNvPr id="292" name="Shape 292"/>
+        <p:cNvGrpSpPr/>
+        <p:nvPr/>
+      </p:nvGrpSpPr>
+      <p:grpSpPr>
+        <a:xfrm>
+          <a:off x="0" y="0"/>
+          <a:ext cx="0" cy="0"/>
+          <a:chOff x="0" y="0"/>
+          <a:chExt cx="0" cy="0"/>
+        </a:xfrm>
+      </p:grpSpPr>
+      <p:sp>
+        <p:nvSpPr>
+          <p:cNvPr id="293" name="Google Shape;293;p45"/>
+          <p:cNvSpPr txBox="1"/>
+          <p:nvPr>
+            <p:ph type="title"/>
+          </p:nvPr>
+        </p:nvSpPr>
+        <p:spPr>
+          <a:xfrm>
+            <a:off x="311700" y="195615"/>
+            <a:ext cx="8520600" cy="572700"/>
           </a:xfrm>
           <a:prstGeom prst="rect">
             <a:avLst/>
           </a:prstGeom>
         </p:spPr>
-      </p:pic>
+        <p:txBody>
+          <a:bodyPr anchorCtr="0" anchor="t" bIns="91425" lIns="91425" spcFirstLastPara="1" rIns="91425" wrap="square" tIns="91425">
+            <a:normAutofit fontScale="90000"/>
+          </a:bodyPr>
+          <a:lstStyle/>
+          <a:p>
+            <a:pPr indent="0" lvl="0" marL="0" rtl="0" algn="l">
+              <a:spcBef>
+                <a:spcPts val="0"/>
+              </a:spcBef>
+              <a:spcAft>
+                <a:spcPts val="0"/>
+              </a:spcAft>
+              <a:buNone/>
+            </a:pPr>
+            <a:r>
+              <a:rPr lang="en">
+                <a:solidFill>
+                  <a:schemeClr val="accent5"/>
+                </a:solidFill>
+              </a:rPr>
+              <a:t>Apply It to Your Project</a:t>
+            </a:r>
+            <a:endParaRPr>
+              <a:solidFill>
+                <a:schemeClr val="accent5"/>
+              </a:solidFill>
+            </a:endParaRPr>
+          </a:p>
+        </p:txBody>
+      </p:sp>
+      <p:sp>
+        <p:nvSpPr>
+          <p:cNvPr id="294" name="Google Shape;294;p45"/>
+          <p:cNvSpPr txBox="1"/>
+          <p:nvPr>
+            <p:ph idx="1" type="body"/>
+          </p:nvPr>
+        </p:nvSpPr>
+        <p:spPr>
+          <a:xfrm>
+            <a:off x="311700" y="885950"/>
+            <a:ext cx="8520600" cy="4023300"/>
+          </a:xfrm>
+          <a:prstGeom prst="rect">
+            <a:avLst/>
+          </a:prstGeom>
+        </p:spPr>
+        <p:txBody>
+          <a:bodyPr anchorCtr="0" anchor="t" bIns="91425" lIns="91425" spcFirstLastPara="1" rIns="91425" wrap="square" tIns="91425">
+            <a:normAutofit/>
+          </a:bodyPr>
+          <a:lstStyle/>
+          <a:p>
+            <a:pPr indent="-330200" lvl="0" marL="457200" rtl="0" algn="l">
+              <a:spcBef>
+                <a:spcPts val="0"/>
+              </a:spcBef>
+              <a:spcAft>
+                <a:spcPts val="0"/>
+              </a:spcAft>
+              <a:buSzPts val="1600"/>
+              <a:buChar char="●"/>
+            </a:pPr>
+            <a:r>
+              <a:rPr lang="en"/>
+              <a:t>Which assets and settings are hardcoded, and could live in data files?</a:t>
+            </a:r>
+            <a:endParaRPr/>
+          </a:p>
+          <a:p>
+            <a:pPr indent="-330200" lvl="0" marL="457200" rtl="0" algn="l">
+              <a:spcBef>
+                <a:spcPts val="0"/>
+              </a:spcBef>
+              <a:spcAft>
+                <a:spcPts val="0"/>
+              </a:spcAft>
+              <a:buSzPts val="1600"/>
+              <a:buChar char="●"/>
+            </a:pPr>
+            <a:r>
+              <a:rPr lang="en"/>
+              <a:t>What are the actions in your game?</a:t>
+            </a:r>
+            <a:endParaRPr/>
+          </a:p>
+          <a:p>
+            <a:pPr indent="-317500" lvl="1" marL="914400" rtl="0" algn="l">
+              <a:spcBef>
+                <a:spcPts val="0"/>
+              </a:spcBef>
+              <a:spcAft>
+                <a:spcPts val="0"/>
+              </a:spcAft>
+              <a:buSzPts val="1400"/>
+              <a:buChar char="○"/>
+            </a:pPr>
+            <a:r>
+              <a:rPr lang="en"/>
+              <a:t>List them separately from the keys and buttons that trigger them</a:t>
+            </a:r>
+            <a:endParaRPr/>
+          </a:p>
+          <a:p>
+            <a:pPr indent="-330200" lvl="0" marL="457200" rtl="0" algn="l">
+              <a:spcBef>
+                <a:spcPts val="0"/>
+              </a:spcBef>
+              <a:spcAft>
+                <a:spcPts val="0"/>
+              </a:spcAft>
+              <a:buSzPts val="1600"/>
+              <a:buChar char="●"/>
+            </a:pPr>
+            <a:r>
+              <a:rPr lang="en"/>
+              <a:t>Does anything in your game happen on a fixed tick?</a:t>
+            </a:r>
+            <a:endParaRPr/>
+          </a:p>
+        </p:txBody>
+      </p:sp>
+    </p:spTree>
+  </p:cSld>
+  <p:clrMapOvr>
+    <a:masterClrMapping/>
+  </p:clrMapOvr>
+  <p:timing>
+    <p:tnLst>
+      <p:par>
+        <p:cTn dur="indefinite" nodeType="tmRoot" restart="never">
+          <p:childTnLst>
+            <p:seq concurrent="1" nextAc="seek">
+              <p:cTn dur="indefinite" id="2" nodeType="mainSeq">
+                <p:childTnLst>
+                  <p:par>
+                    <p:cTn fill="hold">
+                      <p:stCondLst>
+                        <p:cond delay="indefinite"/>
+                      </p:stCondLst>
+                      <p:childTnLst>
+                        <p:par>
+                          <p:cTn fill="hold">
+                            <p:stCondLst>
+                              <p:cond delay="0"/>
+                            </p:stCondLst>
+                            <p:childTnLst>
+                              <p:par>
+                                <p:cTn fill="hold" nodeType="clickEffect" presetClass="entr" presetID="1" presetSubtype="0">
+                                  <p:stCondLst>
+                                    <p:cond delay="0"/>
+                                  </p:stCondLst>
+                                  <p:childTnLst>
+                                    <p:set>
+                                      <p:cBhvr>
+                                        <p:cTn dur="1" fill="hold">
+                                          <p:stCondLst>
+                                            <p:cond delay="0"/>
+                                          </p:stCondLst>
+                                        </p:cTn>
+                                        <p:tgtEl>
+                                          <p:spTgt spid="294">
+                                            <p:txEl>
+                                              <p:pRg end="0" st="0"/>
+                                            </p:txEl>
+                                          </p:spTgt>
+                                        </p:tgtEl>
+                                        <p:attrNameLst>
+                                          <p:attrName>style.visibility</p:attrName>
+                                        </p:attrNameLst>
+                                      </p:cBhvr>
+                                      <p:to>
+                                        <p:strVal val="visible"/>
+                                      </p:to>
+                                    </p:set>
+                                  </p:childTnLst>
+                                </p:cTn>
+                              </p:par>
+                            </p:childTnLst>
+                          </p:cTn>
+                        </p:par>
+                      </p:childTnLst>
+                    </p:cTn>
+                  </p:par>
+                  <p:par>
+                    <p:cTn fill="hold">
+                      <p:stCondLst>
+                        <p:cond delay="indefinite"/>
+                      </p:stCondLst>
+                      <p:childTnLst>
+                        <p:par>
+                          <p:cTn fill="hold">
+                            <p:stCondLst>
+                              <p:cond delay="0"/>
+                            </p:stCondLst>
+                            <p:childTnLst>
+                              <p:par>
+                                <p:cTn fill="hold" nodeType="clickEffect" presetClass="entr" presetID="1" presetSubtype="0">
+                                  <p:stCondLst>
+                                    <p:cond delay="0"/>
+                                  </p:stCondLst>
+                                  <p:childTnLst>
+                                    <p:set>
+                                      <p:cBhvr>
+                                        <p:cTn dur="1" fill="hold">
+                                          <p:stCondLst>
+                                            <p:cond delay="0"/>
+                                          </p:stCondLst>
+                                        </p:cTn>
+                                        <p:tgtEl>
+                                          <p:spTgt spid="294">
+                                            <p:txEl>
+                                              <p:pRg end="1" st="1"/>
+                                            </p:txEl>
+                                          </p:spTgt>
+                                        </p:tgtEl>
+                                        <p:attrNameLst>
+                                          <p:attrName>style.visibility</p:attrName>
+                                        </p:attrNameLst>
+                                      </p:cBhvr>
+                                      <p:to>
+                                        <p:strVal val="visible"/>
+                                      </p:to>
+                                    </p:set>
+                                  </p:childTnLst>
+                                </p:cTn>
+                              </p:par>
+                            </p:childTnLst>
+                          </p:cTn>
+                        </p:par>
+                      </p:childTnLst>
+                    </p:cTn>
+                  </p:par>
+                  <p:par>
+                    <p:cTn fill="hold">
+                      <p:stCondLst>
+                        <p:cond delay="indefinite"/>
+                      </p:stCondLst>
+                      <p:childTnLst>
+                        <p:par>
+                          <p:cTn fill="hold">
+                            <p:stCondLst>
+                              <p:cond delay="0"/>
+                            </p:stCondLst>
+                            <p:childTnLst>
+                              <p:par>
+                                <p:cTn fill="hold" nodeType="clickEffect" presetClass="entr" presetID="1" presetSubtype="0">
+                                  <p:stCondLst>
+                                    <p:cond delay="0"/>
+                                  </p:stCondLst>
+                                  <p:childTnLst>
+                                    <p:set>
+                                      <p:cBhvr>
+                                        <p:cTn dur="1" fill="hold">
+                                          <p:stCondLst>
+                                            <p:cond delay="0"/>
+                                          </p:stCondLst>
+                                        </p:cTn>
+                                        <p:tgtEl>
+                                          <p:spTgt spid="294">
+                                            <p:txEl>
+                                              <p:pRg end="2" st="2"/>
+                                            </p:txEl>
+                                          </p:spTgt>
+                                        </p:tgtEl>
+                                        <p:attrNameLst>
+                                          <p:attrName>style.visibility</p:attrName>
+                                        </p:attrNameLst>
+                                      </p:cBhvr>
+                                      <p:to>
+                                        <p:strVal val="visible"/>
+                                      </p:to>
+                                    </p:set>
+                                  </p:childTnLst>
+                                </p:cTn>
+                              </p:par>
+                            </p:childTnLst>
+                          </p:cTn>
+                        </p:par>
+                      </p:childTnLst>
+                    </p:cTn>
+                  </p:par>
+                  <p:par>
+                    <p:cTn fill="hold">
+                      <p:stCondLst>
+                        <p:cond delay="indefinite"/>
+                      </p:stCondLst>
+                      <p:childTnLst>
+                        <p:par>
+                          <p:cTn fill="hold">
+                            <p:stCondLst>
+                              <p:cond delay="0"/>
+                            </p:stCondLst>
+                            <p:childTnLst>
+                              <p:par>
+                                <p:cTn fill="hold" nodeType="clickEffect" presetClass="entr" presetID="1" presetSubtype="0">
+                                  <p:stCondLst>
+                                    <p:cond delay="0"/>
+                                  </p:stCondLst>
+                                  <p:childTnLst>
+                                    <p:set>
+                                      <p:cBhvr>
+                                        <p:cTn dur="1" fill="hold">
+                                          <p:stCondLst>
+                                            <p:cond delay="0"/>
+                                          </p:stCondLst>
+                                        </p:cTn>
+                                        <p:tgtEl>
+                                          <p:spTgt spid="294">
+                                            <p:txEl>
+                                              <p:pRg end="3" st="3"/>
+                                            </p:txEl>
+                                          </p:spTgt>
+                                        </p:tgtEl>
+                                        <p:attrNameLst>
+                                          <p:attrName>style.visibility</p:attrName>
+                                        </p:attrNameLst>
+                                      </p:cBhvr>
+                                      <p:to>
+                                        <p:strVal val="visible"/>
+                                      </p:to>
+                                    </p:set>
+                                  </p:childTnLst>
+                                </p:cTn>
+                              </p:par>
+                            </p:childTnLst>
+                          </p:cTn>
+                        </p:par>
+                      </p:childTnLst>
+                    </p:cTn>
+                  </p:par>
+                  <p:par>
+                    <p:cTn fill="hold">
+                      <p:stCondLst>
+                        <p:cond delay="indefinite"/>
+                      </p:stCondLst>
+                      <p:childTnLst>
+                        <p:par>
+                          <p:cTn fill="hold">
+                            <p:stCondLst>
+                              <p:cond delay="0"/>
+                            </p:stCondLst>
+                            <p:childTnLst>
+                              <p:par>
+                                <p:cTn fill="hold" nodeType="clickEffect" presetClass="entr" presetID="1" presetSubtype="0">
+                                  <p:stCondLst>
+                                    <p:cond delay="0"/>
+                                  </p:stCondLst>
+                                  <p:childTnLst>
+                                    <p:set>
+                                      <p:cBhvr>
+                                        <p:cTn dur="1" fill="hold">
+                                          <p:stCondLst>
+                                            <p:cond delay="0"/>
+                                          </p:stCondLst>
+                                        </p:cTn>
+                                        <p:tgtEl>
+                                          <p:spTgt spid="294">
+                                            <p:txEl>
+                                              <p:pRg end="4" st="4"/>
+                                            </p:txEl>
+                                          </p:spTgt>
+                                        </p:tgtEl>
+                                        <p:attrNameLst>
+                                          <p:attrName>style.visibility</p:attrName>
+                                        </p:attrNameLst>
+                                      </p:cBhvr>
+                                      <p:to>
+                                        <p:strVal val="visible"/>
+                                      </p:to>
+                                    </p:set>
+                                  </p:childTnLst>
+                                </p:cTn>
+                              </p:par>
+                            </p:childTnLst>
+                          </p:cTn>
+                        </p:par>
+                      </p:childTnLst>
+                    </p:cTn>
+                  </p:par>
+                  <p:par>
+                    <p:cTn fill="hold">
+                      <p:stCondLst>
+                        <p:cond delay="indefinite"/>
+                      </p:stCondLst>
+                      <p:childTnLst>
+                        <p:par>
+                          <p:cTn fill="hold">
+                            <p:stCondLst>
+                              <p:cond delay="0"/>
+                            </p:stCondLst>
+                            <p:childTnLst>
+                              <p:par>
+                                <p:cTn fill="hold" nodeType="clickEffect" presetClass="entr" presetID="1" presetSubtype="0">
+                                  <p:stCondLst>
+                                    <p:cond delay="0"/>
+                                  </p:stCondLst>
+                                  <p:childTnLst>
+                                    <p:set>
+                                      <p:cBhvr>
+                                        <p:cTn dur="1" fill="hold">
+                                          <p:stCondLst>
+                                            <p:cond delay="0"/>
+                                          </p:stCondLst>
+                                        </p:cTn>
+                                        <p:tgtEl>
+                                          <p:spTgt spid="294">
+                                            <p:txEl>
+                                              <p:pRg end="5" st="5"/>
+                                            </p:txEl>
+                                          </p:spTgt>
+                                        </p:tgtEl>
+                                        <p:attrNameLst>
+                                          <p:attrName>style.visibility</p:attrName>
+                                        </p:attrNameLst>
+                                      </p:cBhvr>
+                                      <p:to>
+                                        <p:strVal val="visible"/>
+                                      </p:to>
+                                    </p:set>
+                                  </p:childTnLst>
+                                </p:cTn>
+                              </p:par>
+                            </p:childTnLst>
+                          </p:cTn>
+                        </p:par>
+                      </p:childTnLst>
+                    </p:cTn>
+                  </p:par>
+                  <p:par>
+                    <p:cTn fill="hold">
+                      <p:stCondLst>
+                        <p:cond delay="indefinite"/>
+                      </p:stCondLst>
+                      <p:childTnLst>
+                        <p:par>
+                          <p:cTn fill="hold">
+                            <p:stCondLst>
+                              <p:cond delay="0"/>
+                            </p:stCondLst>
+                            <p:childTnLst>
+                              <p:par>
+                                <p:cTn fill="hold" nodeType="clickEffect" presetClass="entr" presetID="1" presetSubtype="0">
+                                  <p:stCondLst>
+                                    <p:cond delay="0"/>
+                                  </p:stCondLst>
+                                  <p:childTnLst>
+                                    <p:set>
+                                      <p:cBhvr>
+                                        <p:cTn dur="1" fill="hold">
+                                          <p:stCondLst>
+                                            <p:cond delay="0"/>
+                                          </p:stCondLst>
+                                        </p:cTn>
+                                        <p:tgtEl>
+                                          <p:spTgt spid="294">
+                                            <p:txEl>
+                                              <p:pRg end="6" st="6"/>
+                                            </p:txEl>
+                                          </p:spTgt>
+                                        </p:tgtEl>
+                                        <p:attrNameLst>
+                                          <p:attrName>style.visibility</p:attrName>
+                                        </p:attrNameLst>
+                                      </p:cBhvr>
+                                      <p:to>
+                                        <p:strVal val="visible"/>
+                                      </p:to>
+                                    </p:set>
+                                  </p:childTnLst>
+                                </p:cTn>
+                              </p:par>
+                            </p:childTnLst>
+                          </p:cTn>
+                        </p:par>
+                      </p:childTnLst>
+                    </p:cTn>
+                  </p:par>
+                  <p:par>
+                    <p:cTn fill="hold">
+                      <p:stCondLst>
+                        <p:cond delay="indefinite"/>
+                      </p:stCondLst>
+                      <p:childTnLst>
+                        <p:par>
+                          <p:cTn fill="hold">
+                            <p:stCondLst>
+                              <p:cond delay="0"/>
+                            </p:stCondLst>
+                            <p:childTnLst>
+                              <p:par>
+                                <p:cTn fill="hold" nodeType="clickEffect" presetClass="entr" presetID="1" presetSubtype="0">
+                                  <p:stCondLst>
+                                    <p:cond delay="0"/>
+                                  </p:stCondLst>
+                                  <p:childTnLst>
+                                    <p:set>
+                                      <p:cBhvr>
+                                        <p:cTn dur="1" fill="hold">
+                                          <p:stCondLst>
+                                            <p:cond delay="0"/>
+                                          </p:stCondLst>
+                                        </p:cTn>
+                                        <p:tgtEl>
+                                          <p:spTgt spid="294">
+                                            <p:txEl>
+                                              <p:pRg end="7" st="7"/>
+                                            </p:txEl>
+                                          </p:spTgt>
+                                        </p:tgtEl>
+                                        <p:attrNameLst>
+                                          <p:attrName>style.visibility</p:attrName>
+                                        </p:attrNameLst>
+                                      </p:cBhvr>
+                                      <p:to>
+                                        <p:strVal val="visible"/>
+                                      </p:to>
+                                    </p:set>
+                                  </p:childTnLst>
+                                </p:cTn>
+                              </p:par>
+                            </p:childTnLst>
+                          </p:cTn>
+                        </p:par>
+                      </p:childTnLst>
+                    </p:cTn>
+                  </p:par>
+                  <p:par>
+                    <p:cTn fill="hold">
+                      <p:stCondLst>
+                        <p:cond delay="indefinite"/>
+                      </p:stCondLst>
+                      <p:childTnLst>
+                        <p:par>
+                          <p:cTn fill="hold">
+                            <p:stCondLst>
+                              <p:cond delay="0"/>
+                            </p:stCondLst>
+                            <p:childTnLst>
+                              <p:par>
+                                <p:cTn fill="hold" nodeType="clickEffect" presetClass="entr" presetID="1" presetSubtype="0">
+                                  <p:stCondLst>
+                                    <p:cond delay="0"/>
+                                  </p:stCondLst>
+                                  <p:childTnLst>
+                                    <p:set>
+                                      <p:cBhvr>
+                                        <p:cTn dur="1" fill="hold">
+                                          <p:stCondLst>
+                                            <p:cond delay="0"/>
+                                          </p:stCondLst>
+                                        </p:cTn>
+                                        <p:tgtEl>
+                                          <p:spTgt spid="294">
+                                            <p:txEl>
+                                              <p:pRg end="8" st="8"/>
+                                            </p:txEl>
+                                          </p:spTgt>
+                                        </p:tgtEl>
+                                        <p:attrNameLst>
+                                          <p:attrName>style.visibility</p:attrName>
+                                        </p:attrNameLst>
+                                      </p:cBhvr>
+                                      <p:to>
+                                        <p:strVal val="visible"/>
+                                      </p:to>
+                                    </p:set>
+                                  </p:childTnLst>
+                                </p:cTn>
+                              </p:par>
+                            </p:childTnLst>
+                          </p:cTn>
+                        </p:par>
+                      </p:childTnLst>
+                    </p:cTn>
+                  </p:par>
+                  <p:par>
+                    <p:cTn fill="hold">
+                      <p:stCondLst>
+                        <p:cond delay="indefinite"/>
+                      </p:stCondLst>
+                      <p:childTnLst>
+                        <p:par>
+                          <p:cTn fill="hold">
+                            <p:stCondLst>
+                              <p:cond delay="0"/>
+                            </p:stCondLst>
+                            <p:childTnLst>
+                              <p:par>
+                                <p:cTn fill="hold" nodeType="clickEffect" presetClass="entr" presetID="1" presetSubtype="0">
+                                  <p:stCondLst>
+                                    <p:cond delay="0"/>
+                                  </p:stCondLst>
+                                  <p:childTnLst>
+                                    <p:set>
+                                      <p:cBhvr>
+                                        <p:cTn dur="1" fill="hold">
+                                          <p:stCondLst>
+                                            <p:cond delay="0"/>
+                                          </p:stCondLst>
+                                        </p:cTn>
+                                        <p:tgtEl>
+                                          <p:spTgt spid="294">
+                                            <p:txEl>
+                                              <p:pRg end="9" st="9"/>
+                                            </p:txEl>
+                                          </p:spTgt>
+                                        </p:tgtEl>
+                                        <p:attrNameLst>
+                                          <p:attrName>style.visibility</p:attrName>
+                                        </p:attrNameLst>
+                                      </p:cBhvr>
+                                      <p:to>
+                                        <p:strVal val="visible"/>
+                                      </p:to>
+                                    </p:set>
+                                  </p:childTnLst>
+                                </p:cTn>
+                              </p:par>
+                            </p:childTnLst>
+                          </p:cTn>
+                        </p:par>
+                      </p:childTnLst>
+                    </p:cTn>
+                  </p:par>
+                  <p:par>
+                    <p:cTn fill="hold">
+                      <p:stCondLst>
+                        <p:cond delay="indefinite"/>
+                      </p:stCondLst>
+                      <p:childTnLst>
+                        <p:par>
+                          <p:cTn fill="hold">
+                            <p:stCondLst>
+                              <p:cond delay="0"/>
+                            </p:stCondLst>
+                            <p:childTnLst>
+                              <p:par>
+                                <p:cTn fill="hold" nodeType="clickEffect" presetClass="entr" presetID="1" presetSubtype="0">
+                                  <p:stCondLst>
+                                    <p:cond delay="0"/>
+                                  </p:stCondLst>
+                                  <p:childTnLst>
+                                    <p:set>
+                                      <p:cBhvr>
+                                        <p:cTn dur="1" fill="hold">
+                                          <p:stCondLst>
+                                            <p:cond delay="0"/>
+                                          </p:stCondLst>
+                                        </p:cTn>
+                                        <p:tgtEl>
+                                          <p:spTgt spid="294">
+                                            <p:txEl>
+                                              <p:pRg end="10" st="10"/>
+                                            </p:txEl>
+                                          </p:spTgt>
+                                        </p:tgtEl>
+                                        <p:attrNameLst>
+                                          <p:attrName>style.visibility</p:attrName>
+                                        </p:attrNameLst>
+                                      </p:cBhvr>
+                                      <p:to>
+                                        <p:strVal val="visible"/>
+                                      </p:to>
+                                    </p:set>
+                                  </p:childTnLst>
+                                </p:cTn>
+                              </p:par>
+                            </p:childTnLst>
+                          </p:cTn>
+                        </p:par>
+                      </p:childTnLst>
+                    </p:cTn>
+                  </p:par>
+                  <p:par>
+                    <p:cTn fill="hold">
+                      <p:stCondLst>
+                        <p:cond delay="indefinite"/>
+                      </p:stCondLst>
+                      <p:childTnLst>
+                        <p:par>
+                          <p:cTn fill="hold">
+                            <p:stCondLst>
+                              <p:cond delay="0"/>
+                            </p:stCondLst>
+                            <p:childTnLst>
+                              <p:par>
+                                <p:cTn fill="hold" nodeType="clickEffect" presetClass="entr" presetID="1" presetSubtype="0">
+                                  <p:stCondLst>
+                                    <p:cond delay="0"/>
+                                  </p:stCondLst>
+                                  <p:childTnLst>
+                                    <p:set>
+                                      <p:cBhvr>
+                                        <p:cTn dur="1" fill="hold">
+                                          <p:stCondLst>
+                                            <p:cond delay="0"/>
+                                          </p:stCondLst>
+                                        </p:cTn>
+                                        <p:tgtEl>
+                                          <p:spTgt spid="294">
+                                            <p:txEl>
+                                              <p:pRg end="11" st="11"/>
+                                            </p:txEl>
+                                          </p:spTgt>
+                                        </p:tgtEl>
+                                        <p:attrNameLst>
+                                          <p:attrName>style.visibility</p:attrName>
+                                        </p:attrNameLst>
+                                      </p:cBhvr>
+                                      <p:to>
+                                        <p:strVal val="visible"/>
+                                      </p:to>
+                                    </p:set>
+                                  </p:childTnLst>
+                                </p:cTn>
+                              </p:par>
+                            </p:childTnLst>
+                          </p:cTn>
+                        </p:par>
+                      </p:childTnLst>
+                    </p:cTn>
+                  </p:par>
+                  <p:par>
+                    <p:cTn fill="hold">
+                      <p:stCondLst>
+                        <p:cond delay="indefinite"/>
+                      </p:stCondLst>
+                      <p:childTnLst>
+                        <p:par>
+                          <p:cTn fill="hold">
+                            <p:stCondLst>
+                              <p:cond delay="0"/>
+                            </p:stCondLst>
+                            <p:childTnLst>
+                              <p:par>
+                                <p:cTn fill="hold" nodeType="clickEffect" presetClass="entr" presetID="1" presetSubtype="0">
+                                  <p:stCondLst>
+                                    <p:cond delay="0"/>
+                                  </p:stCondLst>
+                                  <p:childTnLst>
+                                    <p:set>
+                                      <p:cBhvr>
+                                        <p:cTn dur="1" fill="hold">
+                                          <p:stCondLst>
+                                            <p:cond delay="0"/>
+                                          </p:stCondLst>
+                                        </p:cTn>
+                                        <p:tgtEl>
+                                          <p:spTgt spid="294">
+                                            <p:txEl>
+                                              <p:pRg end="12" st="12"/>
+                                            </p:txEl>
+                                          </p:spTgt>
+                                        </p:tgtEl>
+                                        <p:attrNameLst>
+                                          <p:attrName>style.visibility</p:attrName>
+                                        </p:attrNameLst>
+                                      </p:cBhvr>
+                                      <p:to>
+                                        <p:strVal val="visible"/>
+                                      </p:to>
+                                    </p:set>
+                                  </p:childTnLst>
+                                </p:cTn>
+                              </p:par>
+                            </p:childTnLst>
+                          </p:cTn>
+                        </p:par>
+                      </p:childTnLst>
+                    </p:cTn>
+                  </p:par>
+                </p:childTnLst>
+              </p:cTn>
+              <p:prevCondLst>
+                <p:cond evt="onPrev">
+                  <p:tgtEl>
+                    <p:sldTgt/>
+                  </p:tgtEl>
+                </p:cond>
+              </p:prevCondLst>
+              <p:nextCondLst>
+                <p:cond evt="onNext">
+                  <p:tgtEl>
+                    <p:sldTgt/>
+                  </p:tgtEl>
+                </p:cond>
+              </p:nextCondLst>
+            </p:seq>
+          </p:childTnLst>
+        </p:cTn>
+      </p:par>
+    </p:tnLst>
+  </p:timing>
+</p:sld>
+</file>
+
+<file path=ppt/slides/slide43.xml><?xml version="1.0" encoding="utf-8"?>
+<p:sld xmlns:a="http://schemas.openxmlformats.org/drawingml/2006/main" xmlns:p="http://schemas.openxmlformats.org/presentationml/2006/main" xmlns:r="http://schemas.openxmlformats.org/officeDocument/2006/relationships">
+  <p:cSld>
+    <p:spTree>
+      <p:nvGrpSpPr>
+        <p:cNvPr id="1" name=""/>
+        <p:cNvGrpSpPr/>
+        <p:nvPr/>
+      </p:nvGrpSpPr>
+      <p:grpSpPr/>
+      <p:sp>
+        <p:nvSpPr>
+          <p:cNvPr id="2" name="Title 1"/>
+          <p:cNvSpPr>
+            <a:spLocks noGrp="1"/>
+          </p:cNvSpPr>
+          <p:nvPr>
+            <p:ph type="title"/>
+          </p:nvPr>
+        </p:nvSpPr>
+        <p:spPr/>
+        <p:txBody>
+          <a:bodyPr/>
+          <a:lstStyle/>
+          <a:p>
+            <a:pPr indent="0" lvl="0" marL="0" rtl="0" algn="l">
+              <a:spcBef>
+                <a:spcPts val="0"/>
+              </a:spcBef>
+              <a:spcAft>
+                <a:spcPts val="0"/>
+              </a:spcAft>
+              <a:buNone/>
+            </a:pPr>
+            <a:r>
+              <a:rPr lang="en"/>
+              <a:t>The Whole Game</a:t>
+            </a:r>
+            <a:endParaRPr/>
+          </a:p>
+        </p:txBody>
+      </p:sp>
+      <p:sp>
+        <p:nvSpPr>
+          <p:cNvPr id="3" name="Text Placeholder 2"/>
+          <p:cNvSpPr>
+            <a:spLocks noGrp="1"/>
+          </p:cNvSpPr>
+          <p:nvPr>
+            <p:ph type="body" idx="1"/>
+          </p:nvPr>
+        </p:nvSpPr>
+        <p:spPr>
+          <a:xfrm>
+            <a:off x="311700" y="885950"/>
+            <a:ext cx="8520600" cy="521208"/>
+          </a:xfrm>
+        </p:spPr>
+        <p:txBody>
+          <a:bodyPr/>
+          <a:lstStyle/>
+          <a:p>
+            <a:pPr indent="-330200" lvl="0" marL="457200" rtl="0" algn="l">
+              <a:spcBef>
+                <a:spcPts val="0"/>
+              </a:spcBef>
+              <a:spcAft>
+                <a:spcPts val="0"/>
+              </a:spcAft>
+              <a:buSzPts val="1600"/>
+              <a:buChar char="●"/>
+            </a:pPr>
+            <a:r>
+              <a:rPr lang="en" b="1"/>
+              <a:t>Snake9 is the finished game. Game1 applies the rules between its parts.</a:t>
+            </a:r>
+            <a:endParaRPr/>
+          </a:p>
+        </p:txBody>
+      </p:sp>
+      <p:sp>
+        <p:nvSpPr>
+          <p:cNvPr id="4" name="Rounded Rectangle 3"/>
+          <p:cNvSpPr/>
+          <p:nvPr/>
+        </p:nvSpPr>
+        <p:spPr>
+          <a:xfrm>
+            <a:off x="3429000" y="1481328"/>
+            <a:ext cx="2286000" cy="777240"/>
+          </a:xfrm>
+          <a:prstGeom prst="roundRect">
+            <a:avLst>
+              <a:gd name="adj" fmla="val 12000"/>
+            </a:avLst>
+          </a:prstGeom>
+          <a:solidFill>
+            <a:srgbClr val="2E3338"/>
+          </a:solidFill>
+          <a:ln w="25400">
+            <a:solidFill>
+              <a:srgbClr val="D45D35"/>
+            </a:solidFill>
+          </a:ln>
+          <a:effectLst/>
+        </p:spPr>
+        <p:style>
+          <a:lnRef idx="1">
+            <a:schemeClr val="accent1"/>
+          </a:lnRef>
+          <a:fillRef idx="3">
+            <a:schemeClr val="accent1"/>
+          </a:fillRef>
+          <a:effectRef idx="2">
+            <a:schemeClr val="accent1"/>
+          </a:effectRef>
+          <a:fontRef idx="minor">
+            <a:schemeClr val="lt1"/>
+          </a:fontRef>
+        </p:style>
+        <p:txBody>
+          <a:bodyPr rtlCol="0" anchor="ctr" wrap="square" lIns="73152" rIns="73152"/>
+          <a:lstStyle/>
+          <a:p>
+            <a:pPr algn="ctr"/>
+            <a:r>
+              <a:rPr sz="1500" b="1">
+                <a:solidFill>
+                  <a:srgbClr val="DEE2E6"/>
+                </a:solidFill>
+              </a:rPr>
+              <a:t>Game1 : Core</a:t>
+            </a:r>
+          </a:p>
+          <a:p>
+            <a:pPr algn="ctr"/>
+            <a:r>
+              <a:rPr sz="1300" b="0">
+                <a:solidFill>
+                  <a:srgbClr val="9AA3AB"/>
+                </a:solidFill>
+              </a:rPr>
+              <a:t>eating, scoring, game over</a:t>
+            </a:r>
+          </a:p>
+        </p:txBody>
+      </p:sp>
+      <p:sp>
+        <p:nvSpPr>
+          <p:cNvPr id="5" name="Rounded Rectangle 4"/>
+          <p:cNvSpPr/>
+          <p:nvPr/>
+        </p:nvSpPr>
+        <p:spPr>
+          <a:xfrm>
+            <a:off x="374904" y="2807208"/>
+            <a:ext cx="2016252" cy="777240"/>
+          </a:xfrm>
+          <a:prstGeom prst="roundRect">
+            <a:avLst>
+              <a:gd name="adj" fmla="val 12000"/>
+            </a:avLst>
+          </a:prstGeom>
+          <a:solidFill>
+            <a:srgbClr val="2E3338"/>
+          </a:solidFill>
+          <a:ln>
+            <a:noFill/>
+          </a:ln>
+          <a:effectLst/>
+        </p:spPr>
+        <p:style>
+          <a:lnRef idx="1">
+            <a:schemeClr val="accent1"/>
+          </a:lnRef>
+          <a:fillRef idx="3">
+            <a:schemeClr val="accent1"/>
+          </a:fillRef>
+          <a:effectRef idx="2">
+            <a:schemeClr val="accent1"/>
+          </a:effectRef>
+          <a:fontRef idx="minor">
+            <a:schemeClr val="lt1"/>
+          </a:fontRef>
+        </p:style>
+        <p:txBody>
+          <a:bodyPr rtlCol="0" anchor="ctr" wrap="square" lIns="73152" rIns="73152"/>
+          <a:lstStyle/>
+          <a:p>
+            <a:pPr algn="ctr"/>
+            <a:r>
+              <a:rPr sz="1500" b="1">
+                <a:solidFill>
+                  <a:srgbClr val="DEE2E6"/>
+                </a:solidFill>
+              </a:rPr>
+              <a:t>Tilemap</a:t>
+            </a:r>
+          </a:p>
+          <a:p>
+            <a:pPr algn="ctr"/>
+            <a:r>
+              <a:rPr sz="1300" b="0">
+                <a:solidFill>
+                  <a:srgbClr val="9AA3AB"/>
+                </a:solidFill>
+              </a:rPr>
+              <a:t>the room</a:t>
+            </a:r>
+          </a:p>
+        </p:txBody>
+      </p:sp>
+      <p:cxnSp>
+        <p:nvCxnSpPr>
+          <p:cNvPr id="6" name="Connector 5"/>
+          <p:cNvCxnSpPr/>
+          <p:nvPr/>
+        </p:nvCxnSpPr>
+        <p:spPr>
+          <a:xfrm flipH="1">
+            <a:off x="1383030" y="2276856"/>
+            <a:ext cx="3188970" cy="512064"/>
+          </a:xfrm>
+          <a:prstGeom prst="line">
+            <a:avLst/>
+          </a:prstGeom>
+          <a:ln w="25400">
+            <a:solidFill>
+              <a:srgbClr val="9AA3AB"/>
+            </a:solidFill>
+            <a:tailEnd type="triangle"/>
+          </a:ln>
+        </p:spPr>
+        <p:style>
+          <a:lnRef idx="2">
+            <a:schemeClr val="accent1"/>
+          </a:lnRef>
+          <a:fillRef idx="0">
+            <a:schemeClr val="accent1"/>
+          </a:fillRef>
+          <a:effectRef idx="1">
+            <a:schemeClr val="accent1"/>
+          </a:effectRef>
+          <a:fontRef idx="minor">
+            <a:schemeClr val="tx1"/>
+          </a:fontRef>
+        </p:style>
+      </p:cxnSp>
+      <p:sp>
+        <p:nvSpPr>
+          <p:cNvPr id="7" name="Rounded Rectangle 6"/>
+          <p:cNvSpPr/>
+          <p:nvPr/>
+        </p:nvSpPr>
+        <p:spPr>
+          <a:xfrm>
+            <a:off x="2500884" y="2807208"/>
+            <a:ext cx="2016252" cy="777240"/>
+          </a:xfrm>
+          <a:prstGeom prst="roundRect">
+            <a:avLst>
+              <a:gd name="adj" fmla="val 12000"/>
+            </a:avLst>
+          </a:prstGeom>
+          <a:solidFill>
+            <a:srgbClr val="2E3338"/>
+          </a:solidFill>
+          <a:ln>
+            <a:noFill/>
+          </a:ln>
+          <a:effectLst/>
+        </p:spPr>
+        <p:style>
+          <a:lnRef idx="1">
+            <a:schemeClr val="accent1"/>
+          </a:lnRef>
+          <a:fillRef idx="3">
+            <a:schemeClr val="accent1"/>
+          </a:fillRef>
+          <a:effectRef idx="2">
+            <a:schemeClr val="accent1"/>
+          </a:effectRef>
+          <a:fontRef idx="minor">
+            <a:schemeClr val="lt1"/>
+          </a:fontRef>
+        </p:style>
+        <p:txBody>
+          <a:bodyPr rtlCol="0" anchor="ctr" wrap="square" lIns="73152" rIns="73152"/>
+          <a:lstStyle/>
+          <a:p>
+            <a:pPr algn="ctr"/>
+            <a:r>
+              <a:rPr sz="1500" b="1">
+                <a:solidFill>
+                  <a:srgbClr val="DEE2E6"/>
+                </a:solidFill>
+              </a:rPr>
+              <a:t>Snake</a:t>
+            </a:r>
+          </a:p>
+          <a:p>
+            <a:pPr algn="ctr"/>
+            <a:r>
+              <a:rPr sz="1300" b="0">
+                <a:solidFill>
+                  <a:srgbClr val="9AA3AB"/>
+                </a:solidFill>
+              </a:rPr>
+              <a:t>cells, tick, turn buffer</a:t>
+            </a:r>
+          </a:p>
+        </p:txBody>
+      </p:sp>
+      <p:cxnSp>
+        <p:nvCxnSpPr>
+          <p:cNvPr id="8" name="Connector 7"/>
+          <p:cNvCxnSpPr/>
+          <p:nvPr/>
+        </p:nvCxnSpPr>
+        <p:spPr>
+          <a:xfrm flipH="1">
+            <a:off x="3509010" y="2276856"/>
+            <a:ext cx="1062990" cy="512064"/>
+          </a:xfrm>
+          <a:prstGeom prst="line">
+            <a:avLst/>
+          </a:prstGeom>
+          <a:ln w="25400">
+            <a:solidFill>
+              <a:srgbClr val="9AA3AB"/>
+            </a:solidFill>
+            <a:tailEnd type="triangle"/>
+          </a:ln>
+        </p:spPr>
+        <p:style>
+          <a:lnRef idx="2">
+            <a:schemeClr val="accent1"/>
+          </a:lnRef>
+          <a:fillRef idx="0">
+            <a:schemeClr val="accent1"/>
+          </a:fillRef>
+          <a:effectRef idx="1">
+            <a:schemeClr val="accent1"/>
+          </a:effectRef>
+          <a:fontRef idx="minor">
+            <a:schemeClr val="tx1"/>
+          </a:fontRef>
+        </p:style>
+      </p:cxnSp>
+      <p:sp>
+        <p:nvSpPr>
+          <p:cNvPr id="9" name="Rounded Rectangle 8"/>
+          <p:cNvSpPr/>
+          <p:nvPr/>
+        </p:nvSpPr>
+        <p:spPr>
+          <a:xfrm>
+            <a:off x="4626864" y="2807208"/>
+            <a:ext cx="2016252" cy="777240"/>
+          </a:xfrm>
+          <a:prstGeom prst="roundRect">
+            <a:avLst>
+              <a:gd name="adj" fmla="val 12000"/>
+            </a:avLst>
+          </a:prstGeom>
+          <a:solidFill>
+            <a:srgbClr val="2E3338"/>
+          </a:solidFill>
+          <a:ln>
+            <a:noFill/>
+          </a:ln>
+          <a:effectLst/>
+        </p:spPr>
+        <p:style>
+          <a:lnRef idx="1">
+            <a:schemeClr val="accent1"/>
+          </a:lnRef>
+          <a:fillRef idx="3">
+            <a:schemeClr val="accent1"/>
+          </a:fillRef>
+          <a:effectRef idx="2">
+            <a:schemeClr val="accent1"/>
+          </a:effectRef>
+          <a:fontRef idx="minor">
+            <a:schemeClr val="lt1"/>
+          </a:fontRef>
+        </p:style>
+        <p:txBody>
+          <a:bodyPr rtlCol="0" anchor="ctr" wrap="square" lIns="73152" rIns="73152"/>
+          <a:lstStyle/>
+          <a:p>
+            <a:pPr algn="ctr"/>
+            <a:r>
+              <a:rPr sz="1500" b="1">
+                <a:solidFill>
+                  <a:srgbClr val="DEE2E6"/>
+                </a:solidFill>
+              </a:rPr>
+              <a:t>Food</a:t>
+            </a:r>
+          </a:p>
+          <a:p>
+            <a:pPr algn="ctr"/>
+            <a:r>
+              <a:rPr sz="1300" b="0">
+                <a:solidFill>
+                  <a:srgbClr val="9AA3AB"/>
+                </a:solidFill>
+              </a:rPr>
+              <a:t>one cell</a:t>
+            </a:r>
+          </a:p>
+        </p:txBody>
+      </p:sp>
+      <p:cxnSp>
+        <p:nvCxnSpPr>
+          <p:cNvPr id="10" name="Connector 9"/>
+          <p:cNvCxnSpPr/>
+          <p:nvPr/>
+        </p:nvCxnSpPr>
+        <p:spPr>
+          <a:xfrm>
+            <a:off x="4572000" y="2276856"/>
+            <a:ext cx="1062990" cy="512064"/>
+          </a:xfrm>
+          <a:prstGeom prst="line">
+            <a:avLst/>
+          </a:prstGeom>
+          <a:ln w="25400">
+            <a:solidFill>
+              <a:srgbClr val="9AA3AB"/>
+            </a:solidFill>
+            <a:tailEnd type="triangle"/>
+          </a:ln>
+        </p:spPr>
+        <p:style>
+          <a:lnRef idx="2">
+            <a:schemeClr val="accent1"/>
+          </a:lnRef>
+          <a:fillRef idx="0">
+            <a:schemeClr val="accent1"/>
+          </a:fillRef>
+          <a:effectRef idx="1">
+            <a:schemeClr val="accent1"/>
+          </a:effectRef>
+          <a:fontRef idx="minor">
+            <a:schemeClr val="tx1"/>
+          </a:fontRef>
+        </p:style>
+      </p:cxnSp>
+      <p:sp>
+        <p:nvSpPr>
+          <p:cNvPr id="11" name="Rounded Rectangle 10"/>
+          <p:cNvSpPr/>
+          <p:nvPr/>
+        </p:nvSpPr>
+        <p:spPr>
+          <a:xfrm>
+            <a:off x="6752844" y="2807208"/>
+            <a:ext cx="2016252" cy="777240"/>
+          </a:xfrm>
+          <a:prstGeom prst="roundRect">
+            <a:avLst>
+              <a:gd name="adj" fmla="val 12000"/>
+            </a:avLst>
+          </a:prstGeom>
+          <a:solidFill>
+            <a:srgbClr val="2E3338"/>
+          </a:solidFill>
+          <a:ln>
+            <a:noFill/>
+          </a:ln>
+          <a:effectLst/>
+        </p:spPr>
+        <p:style>
+          <a:lnRef idx="1">
+            <a:schemeClr val="accent1"/>
+          </a:lnRef>
+          <a:fillRef idx="3">
+            <a:schemeClr val="accent1"/>
+          </a:fillRef>
+          <a:effectRef idx="2">
+            <a:schemeClr val="accent1"/>
+          </a:effectRef>
+          <a:fontRef idx="minor">
+            <a:schemeClr val="lt1"/>
+          </a:fontRef>
+        </p:style>
+        <p:txBody>
+          <a:bodyPr rtlCol="0" anchor="ctr" wrap="square" lIns="73152" rIns="73152"/>
+          <a:lstStyle/>
+          <a:p>
+            <a:pPr algn="ctr"/>
+            <a:r>
+              <a:rPr sz="1500" b="1">
+                <a:solidFill>
+                  <a:srgbClr val="DEE2E6"/>
+                </a:solidFill>
+              </a:rPr>
+              <a:t>GameController</a:t>
+            </a:r>
+          </a:p>
+          <a:p>
+            <a:pPr algn="ctr"/>
+            <a:r>
+              <a:rPr sz="1300" b="0">
+                <a:solidFill>
+                  <a:srgbClr val="9AA3AB"/>
+                </a:solidFill>
+              </a:rPr>
+              <a:t>asked for actions</a:t>
+            </a:r>
+          </a:p>
+        </p:txBody>
+      </p:sp>
+      <p:cxnSp>
+        <p:nvCxnSpPr>
+          <p:cNvPr id="12" name="Connector 11"/>
+          <p:cNvCxnSpPr/>
+          <p:nvPr/>
+        </p:nvCxnSpPr>
+        <p:spPr>
+          <a:xfrm>
+            <a:off x="4572000" y="2276856"/>
+            <a:ext cx="3188970" cy="512064"/>
+          </a:xfrm>
+          <a:prstGeom prst="line">
+            <a:avLst/>
+          </a:prstGeom>
+          <a:ln w="25400">
+            <a:solidFill>
+              <a:srgbClr val="9AA3AB"/>
+            </a:solidFill>
+            <a:tailEnd type="triangle"/>
+          </a:ln>
+        </p:spPr>
+        <p:style>
+          <a:lnRef idx="2">
+            <a:schemeClr val="accent1"/>
+          </a:lnRef>
+          <a:fillRef idx="0">
+            <a:schemeClr val="accent1"/>
+          </a:fillRef>
+          <a:effectRef idx="1">
+            <a:schemeClr val="accent1"/>
+          </a:effectRef>
+          <a:fontRef idx="minor">
+            <a:schemeClr val="tx1"/>
+          </a:fontRef>
+        </p:style>
+      </p:cxnSp>
+      <p:sp>
+        <p:nvSpPr>
+          <p:cNvPr id="13" name="TextBox 12"/>
+          <p:cNvSpPr txBox="1"/>
+          <p:nvPr/>
+        </p:nvSpPr>
+        <p:spPr>
+          <a:xfrm>
+            <a:off x="457200" y="4462272"/>
+            <a:ext cx="8229600" cy="365760"/>
+          </a:xfrm>
+          <a:prstGeom prst="rect">
+            <a:avLst/>
+          </a:prstGeom>
+          <a:noFill/>
+        </p:spPr>
+        <p:txBody>
+          <a:bodyPr wrap="square">
+            <a:spAutoFit/>
+          </a:bodyPr>
+          <a:lstStyle/>
+          <a:p>
+            <a:pPr algn="ctr"/>
+            <a:r>
+              <a:rPr sz="1300" b="0" i="0">
+                <a:solidFill>
+                  <a:srgbClr val="9AA3AB"/>
+                </a:solidFill>
+              </a:rPr>
+              <a:t>Every sprite comes from one atlas, and the atlas and the room are XML.</a:t>
+            </a:r>
+          </a:p>
+        </p:txBody>
+      </p:sp>
+    </p:spTree>
+  </p:cSld>
+  <p:clrMapOvr>
+    <a:masterClrMapping/>
+  </p:clrMapOvr>
+</p:sld>
+</file>
+
+<file path=ppt/slides/slide44.xml><?xml version="1.0" encoding="utf-8"?>
+<p:sld xmlns:a="http://schemas.openxmlformats.org/drawingml/2006/main" xmlns:p="http://schemas.openxmlformats.org/presentationml/2006/main" xmlns:r="http://schemas.openxmlformats.org/officeDocument/2006/relationships">
+  <p:cSld>
+    <p:spTree>
+      <p:nvGrpSpPr>
+        <p:cNvPr id="1" name=""/>
+        <p:cNvGrpSpPr/>
+        <p:nvPr/>
+      </p:nvGrpSpPr>
+      <p:grpSpPr/>
+      <p:sp>
+        <p:nvSpPr>
+          <p:cNvPr id="2" name="Title 1"/>
+          <p:cNvSpPr>
+            <a:spLocks noGrp="1"/>
+          </p:cNvSpPr>
+          <p:nvPr>
+            <p:ph type="title"/>
+          </p:nvPr>
+        </p:nvSpPr>
+        <p:spPr/>
+        <p:txBody>
+          <a:bodyPr/>
+          <a:lstStyle/>
+          <a:p>
+            <a:pPr indent="0" lvl="0" marL="0" rtl="0" algn="l">
+              <a:spcBef>
+                <a:spcPts val="0"/>
+              </a:spcBef>
+              <a:spcAft>
+                <a:spcPts val="0"/>
+              </a:spcAft>
+              <a:buNone/>
+            </a:pPr>
+            <a:r>
+              <a:rPr lang="en"/>
+              <a:t>Summary</a:t>
+            </a:r>
+            <a:endParaRPr/>
+          </a:p>
+        </p:txBody>
+      </p:sp>
+      <p:sp>
+        <p:nvSpPr>
+          <p:cNvPr id="3" name="Text Placeholder 2"/>
+          <p:cNvSpPr>
+            <a:spLocks noGrp="1"/>
+          </p:cNvSpPr>
+          <p:nvPr>
+            <p:ph type="body" idx="1"/>
+          </p:nvPr>
+        </p:nvSpPr>
+        <p:spPr>
+          <a:xfrm>
+            <a:off x="311700" y="885950"/>
+            <a:ext cx="8520600" cy="521208"/>
+          </a:xfrm>
+        </p:spPr>
+        <p:txBody>
+          <a:bodyPr/>
+          <a:lstStyle/>
+          <a:p>
+            <a:pPr indent="-330200" lvl="0" marL="457200" rtl="0" algn="l">
+              <a:spcBef>
+                <a:spcPts val="0"/>
+              </a:spcBef>
+              <a:spcAft>
+                <a:spcPts val="0"/>
+              </a:spcAft>
+              <a:buSzPts val="1600"/>
+              <a:buChar char="●"/>
+            </a:pPr>
+            <a:r>
+              <a:rPr lang="en" b="1"/>
+              <a:t>Six concerns, and this session’s answer to each.</a:t>
+            </a:r>
+            <a:endParaRPr/>
+          </a:p>
+        </p:txBody>
+      </p:sp>
+      <p:sp>
+        <p:nvSpPr>
+          <p:cNvPr id="4" name="Rounded Rectangle 3"/>
+          <p:cNvSpPr/>
+          <p:nvPr/>
+        </p:nvSpPr>
+        <p:spPr>
+          <a:xfrm>
+            <a:off x="548640" y="1417320"/>
+            <a:ext cx="2560320" cy="914400"/>
+          </a:xfrm>
+          <a:prstGeom prst="roundRect">
+            <a:avLst>
+              <a:gd name="adj" fmla="val 12000"/>
+            </a:avLst>
+          </a:prstGeom>
+          <a:solidFill>
+            <a:srgbClr val="2E3338"/>
+          </a:solidFill>
+          <a:ln>
+            <a:noFill/>
+          </a:ln>
+          <a:effectLst/>
+        </p:spPr>
+        <p:style>
+          <a:lnRef idx="1">
+            <a:schemeClr val="accent1"/>
+          </a:lnRef>
+          <a:fillRef idx="3">
+            <a:schemeClr val="accent1"/>
+          </a:fillRef>
+          <a:effectRef idx="2">
+            <a:schemeClr val="accent1"/>
+          </a:effectRef>
+          <a:fontRef idx="minor">
+            <a:schemeClr val="lt1"/>
+          </a:fontRef>
+        </p:style>
+        <p:txBody>
+          <a:bodyPr rtlCol="0" anchor="ctr" wrap="square" lIns="73152" rIns="73152"/>
+          <a:lstStyle/>
+          <a:p>
+            <a:pPr algn="ctr"/>
+            <a:r>
+              <a:rPr sz="1500" b="1">
+                <a:solidFill>
+                  <a:srgbClr val="DEE2E6"/>
+                </a:solidFill>
+              </a:rPr>
+              <a:t>What the art and the room look like</a:t>
+            </a:r>
+          </a:p>
+          <a:p>
+            <a:pPr algn="ctr"/>
+            <a:r>
+              <a:rPr sz="1300" b="0">
+                <a:solidFill>
+                  <a:srgbClr val="9AA3AB"/>
+                </a:solidFill>
+              </a:rPr>
+              <a:t>XML files the code reads</a:t>
+            </a:r>
+          </a:p>
+        </p:txBody>
+      </p:sp>
+      <p:sp>
+        <p:nvSpPr>
+          <p:cNvPr id="5" name="Rounded Rectangle 4"/>
+          <p:cNvSpPr/>
+          <p:nvPr/>
+        </p:nvSpPr>
+        <p:spPr>
+          <a:xfrm>
+            <a:off x="3291840" y="1417320"/>
+            <a:ext cx="2560320" cy="914400"/>
+          </a:xfrm>
+          <a:prstGeom prst="roundRect">
+            <a:avLst>
+              <a:gd name="adj" fmla="val 12000"/>
+            </a:avLst>
+          </a:prstGeom>
+          <a:solidFill>
+            <a:srgbClr val="2E3338"/>
+          </a:solidFill>
+          <a:ln>
+            <a:noFill/>
+          </a:ln>
+          <a:effectLst/>
+        </p:spPr>
+        <p:style>
+          <a:lnRef idx="1">
+            <a:schemeClr val="accent1"/>
+          </a:lnRef>
+          <a:fillRef idx="3">
+            <a:schemeClr val="accent1"/>
+          </a:fillRef>
+          <a:effectRef idx="2">
+            <a:schemeClr val="accent1"/>
+          </a:effectRef>
+          <a:fontRef idx="minor">
+            <a:schemeClr val="lt1"/>
+          </a:fontRef>
+        </p:style>
+        <p:txBody>
+          <a:bodyPr rtlCol="0" anchor="ctr" wrap="square" lIns="73152" rIns="73152"/>
+          <a:lstStyle/>
+          <a:p>
+            <a:pPr algn="ctr"/>
+            <a:r>
+              <a:rPr sz="1500" b="1">
+                <a:solidFill>
+                  <a:srgbClr val="DEE2E6"/>
+                </a:solidFill>
+              </a:rPr>
+              <a:t>Many images, few draw calls</a:t>
+            </a:r>
+          </a:p>
+          <a:p>
+            <a:pPr algn="ctr"/>
+            <a:r>
+              <a:rPr sz="1300" b="0">
+                <a:solidFill>
+                  <a:srgbClr val="9AA3AB"/>
+                </a:solidFill>
+              </a:rPr>
+              <a:t>A texture atlas with named regions</a:t>
+            </a:r>
+          </a:p>
+        </p:txBody>
+      </p:sp>
+      <p:sp>
+        <p:nvSpPr>
+          <p:cNvPr id="6" name="Rounded Rectangle 5"/>
+          <p:cNvSpPr/>
+          <p:nvPr/>
+        </p:nvSpPr>
+        <p:spPr>
+          <a:xfrm>
+            <a:off x="6035040" y="1417320"/>
+            <a:ext cx="2560320" cy="914400"/>
+          </a:xfrm>
+          <a:prstGeom prst="roundRect">
+            <a:avLst>
+              <a:gd name="adj" fmla="val 12000"/>
+            </a:avLst>
+          </a:prstGeom>
+          <a:solidFill>
+            <a:srgbClr val="2E3338"/>
+          </a:solidFill>
+          <a:ln>
+            <a:noFill/>
+          </a:ln>
+          <a:effectLst/>
+        </p:spPr>
+        <p:style>
+          <a:lnRef idx="1">
+            <a:schemeClr val="accent1"/>
+          </a:lnRef>
+          <a:fillRef idx="3">
+            <a:schemeClr val="accent1"/>
+          </a:fillRef>
+          <a:effectRef idx="2">
+            <a:schemeClr val="accent1"/>
+          </a:effectRef>
+          <a:fontRef idx="minor">
+            <a:schemeClr val="lt1"/>
+          </a:fontRef>
+        </p:style>
+        <p:txBody>
+          <a:bodyPr rtlCol="0" anchor="ctr" wrap="square" lIns="73152" rIns="73152"/>
+          <a:lstStyle/>
+          <a:p>
+            <a:pPr algn="ctr"/>
+            <a:r>
+              <a:rPr sz="1500" b="1">
+                <a:solidFill>
+                  <a:srgbClr val="DEE2E6"/>
+                </a:solidFill>
+              </a:rPr>
+              <a:t>Movement in steps</a:t>
+            </a:r>
+          </a:p>
+          <a:p>
+            <a:pPr algn="ctr"/>
+            <a:r>
+              <a:rPr sz="1300" b="0">
+                <a:solidFill>
+                  <a:srgbClr val="9AA3AB"/>
+                </a:solidFill>
+              </a:rPr>
+              <a:t>A fixed tick and an accumulator</a:t>
+            </a:r>
+          </a:p>
+        </p:txBody>
+      </p:sp>
+      <p:sp>
+        <p:nvSpPr>
+          <p:cNvPr id="7" name="Rounded Rectangle 6"/>
+          <p:cNvSpPr/>
+          <p:nvPr/>
+        </p:nvSpPr>
+        <p:spPr>
+          <a:xfrm>
+            <a:off x="548640" y="2468880"/>
+            <a:ext cx="2560320" cy="914400"/>
+          </a:xfrm>
+          <a:prstGeom prst="roundRect">
+            <a:avLst>
+              <a:gd name="adj" fmla="val 12000"/>
+            </a:avLst>
+          </a:prstGeom>
+          <a:solidFill>
+            <a:srgbClr val="2E3338"/>
+          </a:solidFill>
+          <a:ln>
+            <a:noFill/>
+          </a:ln>
+          <a:effectLst/>
+        </p:spPr>
+        <p:style>
+          <a:lnRef idx="1">
+            <a:schemeClr val="accent1"/>
+          </a:lnRef>
+          <a:fillRef idx="3">
+            <a:schemeClr val="accent1"/>
+          </a:fillRef>
+          <a:effectRef idx="2">
+            <a:schemeClr val="accent1"/>
+          </a:effectRef>
+          <a:fontRef idx="minor">
+            <a:schemeClr val="lt1"/>
+          </a:fontRef>
+        </p:style>
+        <p:txBody>
+          <a:bodyPr rtlCol="0" anchor="ctr" wrap="square" lIns="73152" rIns="73152"/>
+          <a:lstStyle/>
+          <a:p>
+            <a:pPr algn="ctr"/>
+            <a:r>
+              <a:rPr sz="1500" b="1">
+                <a:solidFill>
+                  <a:srgbClr val="DEE2E6"/>
+                </a:solidFill>
+              </a:rPr>
+              <a:t>Which key does what</a:t>
+            </a:r>
+          </a:p>
+          <a:p>
+            <a:pPr algn="ctr"/>
+            <a:r>
+              <a:rPr sz="1300" b="0">
+                <a:solidFill>
+                  <a:srgbClr val="9AA3AB"/>
+                </a:solidFill>
+              </a:rPr>
+              <a:t>Actions in a GameController</a:t>
+            </a:r>
+          </a:p>
+        </p:txBody>
+      </p:sp>
+      <p:sp>
+        <p:nvSpPr>
+          <p:cNvPr id="8" name="Rounded Rectangle 7"/>
+          <p:cNvSpPr/>
+          <p:nvPr/>
+        </p:nvSpPr>
+        <p:spPr>
+          <a:xfrm>
+            <a:off x="3291840" y="2468880"/>
+            <a:ext cx="2560320" cy="914400"/>
+          </a:xfrm>
+          <a:prstGeom prst="roundRect">
+            <a:avLst>
+              <a:gd name="adj" fmla="val 12000"/>
+            </a:avLst>
+          </a:prstGeom>
+          <a:solidFill>
+            <a:srgbClr val="2E3338"/>
+          </a:solidFill>
+          <a:ln>
+            <a:noFill/>
+          </a:ln>
+          <a:effectLst/>
+        </p:spPr>
+        <p:style>
+          <a:lnRef idx="1">
+            <a:schemeClr val="accent1"/>
+          </a:lnRef>
+          <a:fillRef idx="3">
+            <a:schemeClr val="accent1"/>
+          </a:fillRef>
+          <a:effectRef idx="2">
+            <a:schemeClr val="accent1"/>
+          </a:effectRef>
+          <a:fontRef idx="minor">
+            <a:schemeClr val="lt1"/>
+          </a:fontRef>
+        </p:style>
+        <p:txBody>
+          <a:bodyPr rtlCol="0" anchor="ctr" wrap="square" lIns="73152" rIns="73152"/>
+          <a:lstStyle/>
+          <a:p>
+            <a:pPr algn="ctr"/>
+            <a:r>
+              <a:rPr sz="1500" b="1">
+                <a:solidFill>
+                  <a:srgbClr val="DEE2E6"/>
+                </a:solidFill>
+              </a:rPr>
+              <a:t>Key presses between ticks</a:t>
+            </a:r>
+          </a:p>
+          <a:p>
+            <a:pPr algn="ctr"/>
+            <a:r>
+              <a:rPr sz="1300" b="0">
+                <a:solidFill>
+                  <a:srgbClr val="9AA3AB"/>
+                </a:solidFill>
+              </a:rPr>
+              <a:t>An input buffer</a:t>
+            </a:r>
+          </a:p>
+        </p:txBody>
+      </p:sp>
+      <p:sp>
+        <p:nvSpPr>
+          <p:cNvPr id="9" name="Rounded Rectangle 8"/>
+          <p:cNvSpPr/>
+          <p:nvPr/>
+        </p:nvSpPr>
+        <p:spPr>
+          <a:xfrm>
+            <a:off x="6035040" y="2468880"/>
+            <a:ext cx="2560320" cy="914400"/>
+          </a:xfrm>
+          <a:prstGeom prst="roundRect">
+            <a:avLst>
+              <a:gd name="adj" fmla="val 12000"/>
+            </a:avLst>
+          </a:prstGeom>
+          <a:solidFill>
+            <a:srgbClr val="2E3338"/>
+          </a:solidFill>
+          <a:ln>
+            <a:noFill/>
+          </a:ln>
+          <a:effectLst/>
+        </p:spPr>
+        <p:style>
+          <a:lnRef idx="1">
+            <a:schemeClr val="accent1"/>
+          </a:lnRef>
+          <a:fillRef idx="3">
+            <a:schemeClr val="accent1"/>
+          </a:fillRef>
+          <a:effectRef idx="2">
+            <a:schemeClr val="accent1"/>
+          </a:effectRef>
+          <a:fontRef idx="minor">
+            <a:schemeClr val="lt1"/>
+          </a:fontRef>
+        </p:style>
+        <p:txBody>
+          <a:bodyPr rtlCol="0" anchor="ctr" wrap="square" lIns="73152" rIns="73152"/>
+          <a:lstStyle/>
+          <a:p>
+            <a:pPr algn="ctr"/>
+            <a:r>
+              <a:rPr sz="1500" b="1">
+                <a:solidFill>
+                  <a:srgbClr val="DEE2E6"/>
+                </a:solidFill>
+              </a:rPr>
+              <a:t>What happens after a hit</a:t>
+            </a:r>
+          </a:p>
+          <a:p>
+            <a:pPr algn="ctr"/>
+            <a:r>
+              <a:rPr sz="1300" b="0">
+                <a:solidFill>
+                  <a:srgbClr val="9AA3AB"/>
+                </a:solidFill>
+              </a:rPr>
+              <a:t>Block, trigger or bounce</a:t>
+            </a:r>
+          </a:p>
+        </p:txBody>
+      </p:sp>
     </p:spTree>
   </p:cSld>
   <p:clrMapOvr>
